--- a/slides/overview.pptx
+++ b/slides/overview.pptx
@@ -581,7 +581,7 @@
           <a:lstStyle/>
           <a:p>
             <a:r>
-              <a:t>Output FORM, not measured results (heads train in issue #10). ModeHead = Dirichlet over minerals; CondHead = per-axis GMM (H2O multimodal). Numbers illustrative.</a:t>
+              <a:t>Output FORM, not measured results (heads train in issue #10). ModeHead = hurdle Dirichlet: per-phase presence Bernoulli x conditional Dirichlet over present-phase modes; bars are posterior means + credible intervals, and intermediate presence (amphibole ~0.4) IS the multimodal posterior, not noise. CondHead = per-axis GMM (H2O multimodal). Numbers illustrative.</a:t>
             </a:r>
           </a:p>
         </p:txBody>
@@ -4679,7 +4679,7 @@
                   <a:srgbClr val="2A9D8F"/>
                 </a:solidFill>
               </a:rPr>
-              <a:t>ModeHead -&gt; modal mineralogy (Dirichlet)</a:t>
+              <a:t>ModeHead -&gt; distribution over modal mineralogy (hurdle Dirichlet)</a:t>
             </a:r>
           </a:p>
         </p:txBody>
@@ -4728,16 +4728,124 @@
           </a:p>
         </p:txBody>
       </p:sp>
-      <p:sp>
-        <p:nvSpPr>
-          <p:cNvPr id="11" name="TextBox 10"/>
+      <p:cxnSp>
+        <p:nvCxnSpPr>
+          <p:cNvPr id="11" name="Connector 10"/>
+          <p:cNvCxnSpPr/>
+          <p:nvPr/>
+        </p:nvCxnSpPr>
+        <p:spPr>
+          <a:xfrm>
+            <a:off x="7271308" y="2020824"/>
+            <a:ext cx="420624" cy="0"/>
+          </a:xfrm>
+          <a:prstGeom prst="bentConnector3">
+            <a:avLst/>
+          </a:prstGeom>
+          <a:ln w="15875">
+            <a:solidFill>
+              <a:srgbClr val="1A2238"/>
+            </a:solidFill>
+          </a:ln>
+          <a:effectLst/>
+        </p:spPr>
+        <p:style>
+          <a:lnRef idx="2">
+            <a:schemeClr val="accent1"/>
+          </a:lnRef>
+          <a:fillRef idx="0">
+            <a:schemeClr val="accent1"/>
+          </a:fillRef>
+          <a:effectRef idx="1">
+            <a:schemeClr val="accent1"/>
+          </a:effectRef>
+          <a:fontRef idx="minor">
+            <a:schemeClr val="tx1"/>
+          </a:fontRef>
+        </p:style>
+      </p:cxnSp>
+      <p:cxnSp>
+        <p:nvCxnSpPr>
+          <p:cNvPr id="12" name="Connector 11"/>
+          <p:cNvCxnSpPr/>
+          <p:nvPr/>
+        </p:nvCxnSpPr>
+        <p:spPr>
+          <a:xfrm>
+            <a:off x="7271308" y="1956816"/>
+            <a:ext cx="0" cy="128015"/>
+          </a:xfrm>
+          <a:prstGeom prst="bentConnector3">
+            <a:avLst/>
+          </a:prstGeom>
+          <a:ln w="15875">
+            <a:solidFill>
+              <a:srgbClr val="1A2238"/>
+            </a:solidFill>
+          </a:ln>
+          <a:effectLst/>
+        </p:spPr>
+        <p:style>
+          <a:lnRef idx="2">
+            <a:schemeClr val="accent1"/>
+          </a:lnRef>
+          <a:fillRef idx="0">
+            <a:schemeClr val="accent1"/>
+          </a:fillRef>
+          <a:effectRef idx="1">
+            <a:schemeClr val="accent1"/>
+          </a:effectRef>
+          <a:fontRef idx="minor">
+            <a:schemeClr val="tx1"/>
+          </a:fontRef>
+        </p:style>
+      </p:cxnSp>
+      <p:cxnSp>
+        <p:nvCxnSpPr>
+          <p:cNvPr id="13" name="Connector 12"/>
+          <p:cNvCxnSpPr/>
+          <p:nvPr/>
+        </p:nvCxnSpPr>
+        <p:spPr>
+          <a:xfrm>
+            <a:off x="7691932" y="1956816"/>
+            <a:ext cx="0" cy="128015"/>
+          </a:xfrm>
+          <a:prstGeom prst="bentConnector3">
+            <a:avLst/>
+          </a:prstGeom>
+          <a:ln w="15875">
+            <a:solidFill>
+              <a:srgbClr val="1A2238"/>
+            </a:solidFill>
+          </a:ln>
+          <a:effectLst/>
+        </p:spPr>
+        <p:style>
+          <a:lnRef idx="2">
+            <a:schemeClr val="accent1"/>
+          </a:lnRef>
+          <a:fillRef idx="0">
+            <a:schemeClr val="accent1"/>
+          </a:fillRef>
+          <a:effectRef idx="1">
+            <a:schemeClr val="accent1"/>
+          </a:effectRef>
+          <a:fontRef idx="minor">
+            <a:schemeClr val="tx1"/>
+          </a:fontRef>
+        </p:style>
+      </p:cxnSp>
+      <p:sp>
+        <p:nvSpPr>
+          <p:cNvPr id="14" name="TextBox 13"/>
           <p:cNvSpPr txBox="1"/>
           <p:nvPr/>
         </p:nvSpPr>
         <p:spPr>
           <a:xfrm>
-            <a:off x="7573060" y="1828799"/>
-            <a:ext cx="3840480" cy="365760"/>
+            <a:off x="7783372" y="1828799"/>
+            <a:ext cx="4206240" cy="365760"/>
           </a:xfrm>
           <a:prstGeom prst="rect">
             <a:avLst/>
@@ -4764,7 +4872,7 @@
       </p:sp>
       <p:sp>
         <p:nvSpPr>
-          <p:cNvPr id="12" name="Rounded Rectangle 11"/>
+          <p:cNvPr id="15" name="Rounded Rectangle 14"/>
           <p:cNvSpPr/>
           <p:nvPr/>
         </p:nvSpPr>
@@ -4806,16 +4914,124 @@
           </a:p>
         </p:txBody>
       </p:sp>
-      <p:sp>
-        <p:nvSpPr>
-          <p:cNvPr id="13" name="TextBox 12"/>
+      <p:cxnSp>
+        <p:nvCxnSpPr>
+          <p:cNvPr id="16" name="Connector 15"/>
+          <p:cNvCxnSpPr/>
+          <p:nvPr/>
+        </p:nvCxnSpPr>
+        <p:spPr>
+          <a:xfrm>
+            <a:off x="6724497" y="2331720"/>
+            <a:ext cx="336499" cy="0"/>
+          </a:xfrm>
+          <a:prstGeom prst="bentConnector3">
+            <a:avLst/>
+          </a:prstGeom>
+          <a:ln w="15875">
+            <a:solidFill>
+              <a:srgbClr val="1A2238"/>
+            </a:solidFill>
+          </a:ln>
+          <a:effectLst/>
+        </p:spPr>
+        <p:style>
+          <a:lnRef idx="2">
+            <a:schemeClr val="accent1"/>
+          </a:lnRef>
+          <a:fillRef idx="0">
+            <a:schemeClr val="accent1"/>
+          </a:fillRef>
+          <a:effectRef idx="1">
+            <a:schemeClr val="accent1"/>
+          </a:effectRef>
+          <a:fontRef idx="minor">
+            <a:schemeClr val="tx1"/>
+          </a:fontRef>
+        </p:style>
+      </p:cxnSp>
+      <p:cxnSp>
+        <p:nvCxnSpPr>
+          <p:cNvPr id="17" name="Connector 16"/>
+          <p:cNvCxnSpPr/>
+          <p:nvPr/>
+        </p:nvCxnSpPr>
+        <p:spPr>
+          <a:xfrm>
+            <a:off x="6724497" y="2267712"/>
+            <a:ext cx="0" cy="128015"/>
+          </a:xfrm>
+          <a:prstGeom prst="bentConnector3">
+            <a:avLst/>
+          </a:prstGeom>
+          <a:ln w="15875">
+            <a:solidFill>
+              <a:srgbClr val="1A2238"/>
+            </a:solidFill>
+          </a:ln>
+          <a:effectLst/>
+        </p:spPr>
+        <p:style>
+          <a:lnRef idx="2">
+            <a:schemeClr val="accent1"/>
+          </a:lnRef>
+          <a:fillRef idx="0">
+            <a:schemeClr val="accent1"/>
+          </a:fillRef>
+          <a:effectRef idx="1">
+            <a:schemeClr val="accent1"/>
+          </a:effectRef>
+          <a:fontRef idx="minor">
+            <a:schemeClr val="tx1"/>
+          </a:fontRef>
+        </p:style>
+      </p:cxnSp>
+      <p:cxnSp>
+        <p:nvCxnSpPr>
+          <p:cNvPr id="18" name="Connector 17"/>
+          <p:cNvCxnSpPr/>
+          <p:nvPr/>
+        </p:nvCxnSpPr>
+        <p:spPr>
+          <a:xfrm>
+            <a:off x="7060996" y="2267712"/>
+            <a:ext cx="0" cy="128015"/>
+          </a:xfrm>
+          <a:prstGeom prst="bentConnector3">
+            <a:avLst/>
+          </a:prstGeom>
+          <a:ln w="15875">
+            <a:solidFill>
+              <a:srgbClr val="1A2238"/>
+            </a:solidFill>
+          </a:ln>
+          <a:effectLst/>
+        </p:spPr>
+        <p:style>
+          <a:lnRef idx="2">
+            <a:schemeClr val="accent1"/>
+          </a:lnRef>
+          <a:fillRef idx="0">
+            <a:schemeClr val="accent1"/>
+          </a:fillRef>
+          <a:effectRef idx="1">
+            <a:schemeClr val="accent1"/>
+          </a:effectRef>
+          <a:fontRef idx="minor">
+            <a:schemeClr val="tx1"/>
+          </a:fontRef>
+        </p:style>
+      </p:cxnSp>
+      <p:sp>
+        <p:nvSpPr>
+          <p:cNvPr id="19" name="TextBox 18"/>
           <p:cNvSpPr txBox="1"/>
           <p:nvPr/>
         </p:nvSpPr>
         <p:spPr>
           <a:xfrm>
-            <a:off x="6984187" y="2139696"/>
-            <a:ext cx="3840480" cy="365760"/>
+            <a:off x="7152436" y="2139696"/>
+            <a:ext cx="4206240" cy="365760"/>
           </a:xfrm>
           <a:prstGeom prst="rect">
             <a:avLst/>
@@ -4842,7 +5058,7 @@
       </p:sp>
       <p:sp>
         <p:nvSpPr>
-          <p:cNvPr id="14" name="Rounded Rectangle 13"/>
+          <p:cNvPr id="20" name="Rounded Rectangle 19"/>
           <p:cNvSpPr/>
           <p:nvPr/>
         </p:nvSpPr>
@@ -4884,16 +5100,124 @@
           </a:p>
         </p:txBody>
       </p:sp>
-      <p:sp>
-        <p:nvSpPr>
-          <p:cNvPr id="15" name="TextBox 14"/>
+      <p:cxnSp>
+        <p:nvCxnSpPr>
+          <p:cNvPr id="21" name="Connector 20"/>
+          <p:cNvCxnSpPr/>
+          <p:nvPr/>
+        </p:nvCxnSpPr>
+        <p:spPr>
+          <a:xfrm>
+            <a:off x="6135624" y="2642616"/>
+            <a:ext cx="504748" cy="0"/>
+          </a:xfrm>
+          <a:prstGeom prst="bentConnector3">
+            <a:avLst/>
+          </a:prstGeom>
+          <a:ln w="15875">
+            <a:solidFill>
+              <a:srgbClr val="1A2238"/>
+            </a:solidFill>
+          </a:ln>
+          <a:effectLst/>
+        </p:spPr>
+        <p:style>
+          <a:lnRef idx="2">
+            <a:schemeClr val="accent1"/>
+          </a:lnRef>
+          <a:fillRef idx="0">
+            <a:schemeClr val="accent1"/>
+          </a:fillRef>
+          <a:effectRef idx="1">
+            <a:schemeClr val="accent1"/>
+          </a:effectRef>
+          <a:fontRef idx="minor">
+            <a:schemeClr val="tx1"/>
+          </a:fontRef>
+        </p:style>
+      </p:cxnSp>
+      <p:cxnSp>
+        <p:nvCxnSpPr>
+          <p:cNvPr id="22" name="Connector 21"/>
+          <p:cNvCxnSpPr/>
+          <p:nvPr/>
+        </p:nvCxnSpPr>
+        <p:spPr>
+          <a:xfrm>
+            <a:off x="6135624" y="2578608"/>
+            <a:ext cx="0" cy="128016"/>
+          </a:xfrm>
+          <a:prstGeom prst="bentConnector3">
+            <a:avLst/>
+          </a:prstGeom>
+          <a:ln w="15875">
+            <a:solidFill>
+              <a:srgbClr val="1A2238"/>
+            </a:solidFill>
+          </a:ln>
+          <a:effectLst/>
+        </p:spPr>
+        <p:style>
+          <a:lnRef idx="2">
+            <a:schemeClr val="accent1"/>
+          </a:lnRef>
+          <a:fillRef idx="0">
+            <a:schemeClr val="accent1"/>
+          </a:fillRef>
+          <a:effectRef idx="1">
+            <a:schemeClr val="accent1"/>
+          </a:effectRef>
+          <a:fontRef idx="minor">
+            <a:schemeClr val="tx1"/>
+          </a:fontRef>
+        </p:style>
+      </p:cxnSp>
+      <p:cxnSp>
+        <p:nvCxnSpPr>
+          <p:cNvPr id="23" name="Connector 22"/>
+          <p:cNvCxnSpPr/>
+          <p:nvPr/>
+        </p:nvCxnSpPr>
+        <p:spPr>
+          <a:xfrm>
+            <a:off x="6640372" y="2578608"/>
+            <a:ext cx="0" cy="128016"/>
+          </a:xfrm>
+          <a:prstGeom prst="bentConnector3">
+            <a:avLst/>
+          </a:prstGeom>
+          <a:ln w="15875">
+            <a:solidFill>
+              <a:srgbClr val="1A2238"/>
+            </a:solidFill>
+          </a:ln>
+          <a:effectLst/>
+        </p:spPr>
+        <p:style>
+          <a:lnRef idx="2">
+            <a:schemeClr val="accent1"/>
+          </a:lnRef>
+          <a:fillRef idx="0">
+            <a:schemeClr val="accent1"/>
+          </a:fillRef>
+          <a:effectRef idx="1">
+            <a:schemeClr val="accent1"/>
+          </a:effectRef>
+          <a:fontRef idx="minor">
+            <a:schemeClr val="tx1"/>
+          </a:fontRef>
+        </p:style>
+      </p:cxnSp>
+      <p:sp>
+        <p:nvSpPr>
+          <p:cNvPr id="24" name="TextBox 23"/>
           <p:cNvSpPr txBox="1"/>
           <p:nvPr/>
         </p:nvSpPr>
         <p:spPr>
           <a:xfrm>
-            <a:off x="6479438" y="2450592"/>
-            <a:ext cx="3840480" cy="365760"/>
+            <a:off x="6731812" y="2450592"/>
+            <a:ext cx="4206240" cy="365760"/>
           </a:xfrm>
           <a:prstGeom prst="rect">
             <a:avLst/>
@@ -4913,14 +5237,14 @@
                   <a:srgbClr val="1A2238"/>
                 </a:solidFill>
               </a:rPr>
-              <a:t>olivine  0.16</a:t>
-            </a:r>
-          </a:p>
-        </p:txBody>
-      </p:sp>
-      <p:sp>
-        <p:nvSpPr>
-          <p:cNvPr id="16" name="Rounded Rectangle 15"/>
+              <a:t>amphibole  0.16   p(present) 0.41</a:t>
+            </a:r>
+          </a:p>
+        </p:txBody>
+      </p:sp>
+      <p:sp>
+        <p:nvSpPr>
+          <p:cNvPr id="25" name="Rounded Rectangle 24"/>
           <p:cNvSpPr/>
           <p:nvPr/>
         </p:nvSpPr>
@@ -4962,16 +5286,124 @@
           </a:p>
         </p:txBody>
       </p:sp>
-      <p:sp>
-        <p:nvSpPr>
-          <p:cNvPr id="17" name="TextBox 16"/>
+      <p:cxnSp>
+        <p:nvCxnSpPr>
+          <p:cNvPr id="26" name="Connector 25"/>
+          <p:cNvCxnSpPr/>
+          <p:nvPr/>
+        </p:nvCxnSpPr>
+        <p:spPr>
+          <a:xfrm>
+            <a:off x="5925312" y="2953512"/>
+            <a:ext cx="252374" cy="0"/>
+          </a:xfrm>
+          <a:prstGeom prst="bentConnector3">
+            <a:avLst/>
+          </a:prstGeom>
+          <a:ln w="15875">
+            <a:solidFill>
+              <a:srgbClr val="1A2238"/>
+            </a:solidFill>
+          </a:ln>
+          <a:effectLst/>
+        </p:spPr>
+        <p:style>
+          <a:lnRef idx="2">
+            <a:schemeClr val="accent1"/>
+          </a:lnRef>
+          <a:fillRef idx="0">
+            <a:schemeClr val="accent1"/>
+          </a:fillRef>
+          <a:effectRef idx="1">
+            <a:schemeClr val="accent1"/>
+          </a:effectRef>
+          <a:fontRef idx="minor">
+            <a:schemeClr val="tx1"/>
+          </a:fontRef>
+        </p:style>
+      </p:cxnSp>
+      <p:cxnSp>
+        <p:nvCxnSpPr>
+          <p:cNvPr id="27" name="Connector 26"/>
+          <p:cNvCxnSpPr/>
+          <p:nvPr/>
+        </p:nvCxnSpPr>
+        <p:spPr>
+          <a:xfrm>
+            <a:off x="5925312" y="2889504"/>
+            <a:ext cx="0" cy="128016"/>
+          </a:xfrm>
+          <a:prstGeom prst="bentConnector3">
+            <a:avLst/>
+          </a:prstGeom>
+          <a:ln w="15875">
+            <a:solidFill>
+              <a:srgbClr val="1A2238"/>
+            </a:solidFill>
+          </a:ln>
+          <a:effectLst/>
+        </p:spPr>
+        <p:style>
+          <a:lnRef idx="2">
+            <a:schemeClr val="accent1"/>
+          </a:lnRef>
+          <a:fillRef idx="0">
+            <a:schemeClr val="accent1"/>
+          </a:fillRef>
+          <a:effectRef idx="1">
+            <a:schemeClr val="accent1"/>
+          </a:effectRef>
+          <a:fontRef idx="minor">
+            <a:schemeClr val="tx1"/>
+          </a:fontRef>
+        </p:style>
+      </p:cxnSp>
+      <p:cxnSp>
+        <p:nvCxnSpPr>
+          <p:cNvPr id="28" name="Connector 27"/>
+          <p:cNvCxnSpPr/>
+          <p:nvPr/>
+        </p:nvCxnSpPr>
+        <p:spPr>
+          <a:xfrm>
+            <a:off x="6177686" y="2889504"/>
+            <a:ext cx="0" cy="128016"/>
+          </a:xfrm>
+          <a:prstGeom prst="bentConnector3">
+            <a:avLst/>
+          </a:prstGeom>
+          <a:ln w="15875">
+            <a:solidFill>
+              <a:srgbClr val="1A2238"/>
+            </a:solidFill>
+          </a:ln>
+          <a:effectLst/>
+        </p:spPr>
+        <p:style>
+          <a:lnRef idx="2">
+            <a:schemeClr val="accent1"/>
+          </a:lnRef>
+          <a:fillRef idx="0">
+            <a:schemeClr val="accent1"/>
+          </a:fillRef>
+          <a:effectRef idx="1">
+            <a:schemeClr val="accent1"/>
+          </a:effectRef>
+          <a:fontRef idx="minor">
+            <a:schemeClr val="tx1"/>
+          </a:fontRef>
+        </p:style>
+      </p:cxnSp>
+      <p:sp>
+        <p:nvSpPr>
+          <p:cNvPr id="29" name="TextBox 28"/>
           <p:cNvSpPr txBox="1"/>
           <p:nvPr/>
         </p:nvSpPr>
         <p:spPr>
           <a:xfrm>
-            <a:off x="6142939" y="2761488"/>
-            <a:ext cx="3840480" cy="365760"/>
+            <a:off x="6269126" y="2761488"/>
+            <a:ext cx="4206240" cy="365760"/>
           </a:xfrm>
           <a:prstGeom prst="rect">
             <a:avLst/>
@@ -4998,7 +5430,7 @@
       </p:sp>
       <p:sp>
         <p:nvSpPr>
-          <p:cNvPr id="18" name="Rounded Rectangle 17"/>
+          <p:cNvPr id="30" name="Rounded Rectangle 29"/>
           <p:cNvSpPr/>
           <p:nvPr/>
         </p:nvSpPr>
@@ -5040,16 +5472,124 @@
           </a:p>
         </p:txBody>
       </p:sp>
-      <p:sp>
-        <p:nvSpPr>
-          <p:cNvPr id="19" name="TextBox 18"/>
+      <p:cxnSp>
+        <p:nvCxnSpPr>
+          <p:cNvPr id="31" name="Connector 30"/>
+          <p:cNvCxnSpPr/>
+          <p:nvPr/>
+        </p:nvCxnSpPr>
+        <p:spPr>
+          <a:xfrm>
+            <a:off x="5799124" y="3264408"/>
+            <a:ext cx="168250" cy="0"/>
+          </a:xfrm>
+          <a:prstGeom prst="bentConnector3">
+            <a:avLst/>
+          </a:prstGeom>
+          <a:ln w="15875">
+            <a:solidFill>
+              <a:srgbClr val="1A2238"/>
+            </a:solidFill>
+          </a:ln>
+          <a:effectLst/>
+        </p:spPr>
+        <p:style>
+          <a:lnRef idx="2">
+            <a:schemeClr val="accent1"/>
+          </a:lnRef>
+          <a:fillRef idx="0">
+            <a:schemeClr val="accent1"/>
+          </a:fillRef>
+          <a:effectRef idx="1">
+            <a:schemeClr val="accent1"/>
+          </a:effectRef>
+          <a:fontRef idx="minor">
+            <a:schemeClr val="tx1"/>
+          </a:fontRef>
+        </p:style>
+      </p:cxnSp>
+      <p:cxnSp>
+        <p:nvCxnSpPr>
+          <p:cNvPr id="32" name="Connector 31"/>
+          <p:cNvCxnSpPr/>
+          <p:nvPr/>
+        </p:nvCxnSpPr>
+        <p:spPr>
+          <a:xfrm>
+            <a:off x="5799124" y="3200400"/>
+            <a:ext cx="0" cy="128016"/>
+          </a:xfrm>
+          <a:prstGeom prst="bentConnector3">
+            <a:avLst/>
+          </a:prstGeom>
+          <a:ln w="15875">
+            <a:solidFill>
+              <a:srgbClr val="1A2238"/>
+            </a:solidFill>
+          </a:ln>
+          <a:effectLst/>
+        </p:spPr>
+        <p:style>
+          <a:lnRef idx="2">
+            <a:schemeClr val="accent1"/>
+          </a:lnRef>
+          <a:fillRef idx="0">
+            <a:schemeClr val="accent1"/>
+          </a:fillRef>
+          <a:effectRef idx="1">
+            <a:schemeClr val="accent1"/>
+          </a:effectRef>
+          <a:fontRef idx="minor">
+            <a:schemeClr val="tx1"/>
+          </a:fontRef>
+        </p:style>
+      </p:cxnSp>
+      <p:cxnSp>
+        <p:nvCxnSpPr>
+          <p:cNvPr id="33" name="Connector 32"/>
+          <p:cNvCxnSpPr/>
+          <p:nvPr/>
+        </p:nvCxnSpPr>
+        <p:spPr>
+          <a:xfrm>
+            <a:off x="5967374" y="3200400"/>
+            <a:ext cx="0" cy="128016"/>
+          </a:xfrm>
+          <a:prstGeom prst="bentConnector3">
+            <a:avLst/>
+          </a:prstGeom>
+          <a:ln w="15875">
+            <a:solidFill>
+              <a:srgbClr val="1A2238"/>
+            </a:solidFill>
+          </a:ln>
+          <a:effectLst/>
+        </p:spPr>
+        <p:style>
+          <a:lnRef idx="2">
+            <a:schemeClr val="accent1"/>
+          </a:lnRef>
+          <a:fillRef idx="0">
+            <a:schemeClr val="accent1"/>
+          </a:fillRef>
+          <a:effectRef idx="1">
+            <a:schemeClr val="accent1"/>
+          </a:effectRef>
+          <a:fontRef idx="minor">
+            <a:schemeClr val="tx1"/>
+          </a:fontRef>
+        </p:style>
+      </p:cxnSp>
+      <p:sp>
+        <p:nvSpPr>
+          <p:cNvPr id="34" name="TextBox 33"/>
           <p:cNvSpPr txBox="1"/>
           <p:nvPr/>
         </p:nvSpPr>
         <p:spPr>
           <a:xfrm>
-            <a:off x="5974689" y="3072384"/>
-            <a:ext cx="3840480" cy="365760"/>
+            <a:off x="6058814" y="3072384"/>
+            <a:ext cx="4206240" cy="365760"/>
           </a:xfrm>
           <a:prstGeom prst="rect">
             <a:avLst/>
@@ -5069,14 +5609,14 @@
                   <a:srgbClr val="1A2238"/>
                 </a:solidFill>
               </a:rPr>
-              <a:t>oxides  0.04</a:t>
-            </a:r>
-          </a:p>
-        </p:txBody>
-      </p:sp>
-      <p:sp>
-        <p:nvSpPr>
-          <p:cNvPr id="20" name="Rounded Rectangle 19"/>
+              <a:t>magnetite  0.04</a:t>
+            </a:r>
+          </a:p>
+        </p:txBody>
+      </p:sp>
+      <p:sp>
+        <p:nvSpPr>
+          <p:cNvPr id="35" name="Rounded Rectangle 34"/>
           <p:cNvSpPr/>
           <p:nvPr/>
         </p:nvSpPr>
@@ -5130,7 +5670,7 @@
       </p:sp>
       <p:sp>
         <p:nvSpPr>
-          <p:cNvPr id="21" name="TextBox 20"/>
+          <p:cNvPr id="36" name="TextBox 35"/>
           <p:cNvSpPr txBox="1"/>
           <p:nvPr/>
         </p:nvSpPr>
@@ -5157,21 +5697,21 @@
                   <a:srgbClr val="6C5CE7"/>
                 </a:solidFill>
               </a:rPr>
-              <a:t>CondHead -&gt; formation conditions (per-axis GMM)</a:t>
-            </a:r>
-          </a:p>
-        </p:txBody>
-      </p:sp>
-      <p:sp>
-        <p:nvSpPr>
-          <p:cNvPr id="22" name="Freeform 21"/>
+              <a:t>CondHead -&gt; formation conditions (per-axis GMM, if trained on a thermodynamic phase-equilibrium solver like MAGEMin)</a:t>
+            </a:r>
+          </a:p>
+        </p:txBody>
+      </p:sp>
+      <p:sp>
+        <p:nvSpPr>
+          <p:cNvPr id="37" name="Freeform 36"/>
           <p:cNvSpPr/>
           <p:nvPr/>
         </p:nvSpPr>
         <p:spPr>
           <a:xfrm>
-            <a:off x="5806440" y="4251960"/>
-            <a:ext cx="1737360" cy="960120"/>
+            <a:off x="5806440" y="4434840"/>
+            <a:ext cx="1737360" cy="960119"/>
           </a:xfrm>
           <a:custGeom>
             <a:avLst/>
@@ -5180,9 +5720,9 @@
             <a:cxnLst/>
             <a:rect l="l" t="t" r="r" b="b"/>
             <a:pathLst>
-              <a:path w="1737360" h="960120">
+              <a:path w="1737360" h="960119">
                 <a:moveTo>
-                  <a:pt x="0" y="960120"/>
+                  <a:pt x="0" y="960119"/>
                 </a:moveTo>
                 <a:lnTo>
                   <a:pt x="0" y="952846"/>
@@ -5332,7 +5872,7 @@
                   <a:pt x="1737360" y="952846"/>
                 </a:lnTo>
                 <a:lnTo>
-                  <a:pt x="1737360" y="960120"/>
+                  <a:pt x="1737360" y="960119"/>
                 </a:lnTo>
                 <a:close/>
               </a:path>
@@ -5372,13 +5912,13 @@
       </p:sp>
       <p:cxnSp>
         <p:nvCxnSpPr>
-          <p:cNvPr id="23" name="Connector 22"/>
+          <p:cNvPr id="38" name="Connector 37"/>
           <p:cNvCxnSpPr/>
           <p:nvPr/>
         </p:nvCxnSpPr>
         <p:spPr>
           <a:xfrm>
-            <a:off x="5806440" y="5212080"/>
+            <a:off x="5806440" y="5394959"/>
             <a:ext cx="1737360" cy="0"/>
           </a:xfrm>
           <a:prstGeom prst="bentConnector3">
@@ -5408,13 +5948,13 @@
       </p:cxnSp>
       <p:sp>
         <p:nvSpPr>
-          <p:cNvPr id="24" name="TextBox 23"/>
+          <p:cNvPr id="39" name="TextBox 38"/>
           <p:cNvSpPr txBox="1"/>
           <p:nvPr/>
         </p:nvSpPr>
         <p:spPr>
           <a:xfrm>
-            <a:off x="5623559" y="5257800"/>
+            <a:off x="5623559" y="5440679"/>
             <a:ext cx="2103120" cy="365760"/>
           </a:xfrm>
           <a:prstGeom prst="rect">
@@ -5442,14 +5982,14 @@
       </p:sp>
       <p:sp>
         <p:nvSpPr>
-          <p:cNvPr id="25" name="Freeform 24"/>
+          <p:cNvPr id="40" name="Freeform 39"/>
           <p:cNvSpPr/>
           <p:nvPr/>
         </p:nvSpPr>
         <p:spPr>
           <a:xfrm>
-            <a:off x="7772400" y="4251960"/>
-            <a:ext cx="1737360" cy="960120"/>
+            <a:off x="7772400" y="4434840"/>
+            <a:ext cx="1737360" cy="960119"/>
           </a:xfrm>
           <a:custGeom>
             <a:avLst/>
@@ -5458,9 +5998,9 @@
             <a:cxnLst/>
             <a:rect l="l" t="t" r="r" b="b"/>
             <a:pathLst>
-              <a:path w="1737360" h="960120">
+              <a:path w="1737360" h="960119">
                 <a:moveTo>
-                  <a:pt x="0" y="960120"/>
+                  <a:pt x="0" y="960119"/>
                 </a:moveTo>
                 <a:lnTo>
                   <a:pt x="0" y="939852"/>
@@ -5610,7 +6150,7 @@
                   <a:pt x="1737360" y="939852"/>
                 </a:lnTo>
                 <a:lnTo>
-                  <a:pt x="1737360" y="960120"/>
+                  <a:pt x="1737360" y="960119"/>
                 </a:lnTo>
                 <a:close/>
               </a:path>
@@ -5650,13 +6190,13 @@
       </p:sp>
       <p:cxnSp>
         <p:nvCxnSpPr>
-          <p:cNvPr id="26" name="Connector 25"/>
+          <p:cNvPr id="41" name="Connector 40"/>
           <p:cNvCxnSpPr/>
           <p:nvPr/>
         </p:nvCxnSpPr>
         <p:spPr>
           <a:xfrm>
-            <a:off x="7772400" y="5212080"/>
+            <a:off x="7772400" y="5394959"/>
             <a:ext cx="1737360" cy="0"/>
           </a:xfrm>
           <a:prstGeom prst="bentConnector3">
@@ -5686,13 +6226,13 @@
       </p:cxnSp>
       <p:sp>
         <p:nvSpPr>
-          <p:cNvPr id="27" name="TextBox 26"/>
+          <p:cNvPr id="42" name="TextBox 41"/>
           <p:cNvSpPr txBox="1"/>
           <p:nvPr/>
         </p:nvSpPr>
         <p:spPr>
           <a:xfrm>
-            <a:off x="7589520" y="5257800"/>
+            <a:off x="7589520" y="5440679"/>
             <a:ext cx="2103120" cy="365760"/>
           </a:xfrm>
           <a:prstGeom prst="rect">
@@ -5720,14 +6260,14 @@
       </p:sp>
       <p:sp>
         <p:nvSpPr>
-          <p:cNvPr id="28" name="Freeform 27"/>
+          <p:cNvPr id="43" name="Freeform 42"/>
           <p:cNvSpPr/>
           <p:nvPr/>
         </p:nvSpPr>
         <p:spPr>
           <a:xfrm>
-            <a:off x="9738360" y="4251960"/>
-            <a:ext cx="1783080" cy="960120"/>
+            <a:off x="9738360" y="4434840"/>
+            <a:ext cx="1783080" cy="960119"/>
           </a:xfrm>
           <a:custGeom>
             <a:avLst/>
@@ -5736,9 +6276,9 @@
             <a:cxnLst/>
             <a:rect l="l" t="t" r="r" b="b"/>
             <a:pathLst>
-              <a:path w="1783080" h="960120">
+              <a:path w="1783080" h="960119">
                 <a:moveTo>
-                  <a:pt x="0" y="960120"/>
+                  <a:pt x="0" y="960119"/>
                 </a:moveTo>
                 <a:lnTo>
                   <a:pt x="0" y="954380"/>
@@ -5888,7 +6428,7 @@
                   <a:pt x="1783080" y="909618"/>
                 </a:lnTo>
                 <a:lnTo>
-                  <a:pt x="1783080" y="960120"/>
+                  <a:pt x="1783080" y="960119"/>
                 </a:lnTo>
                 <a:close/>
               </a:path>
@@ -5928,13 +6468,13 @@
       </p:sp>
       <p:cxnSp>
         <p:nvCxnSpPr>
-          <p:cNvPr id="29" name="Connector 28"/>
+          <p:cNvPr id="44" name="Connector 43"/>
           <p:cNvCxnSpPr/>
           <p:nvPr/>
         </p:nvCxnSpPr>
         <p:spPr>
           <a:xfrm>
-            <a:off x="9738360" y="5212080"/>
+            <a:off x="9738360" y="5394959"/>
             <a:ext cx="1783080" cy="0"/>
           </a:xfrm>
           <a:prstGeom prst="bentConnector3">
@@ -5964,13 +6504,13 @@
       </p:cxnSp>
       <p:sp>
         <p:nvSpPr>
-          <p:cNvPr id="30" name="TextBox 29"/>
+          <p:cNvPr id="45" name="TextBox 44"/>
           <p:cNvSpPr txBox="1"/>
           <p:nvPr/>
         </p:nvSpPr>
         <p:spPr>
           <a:xfrm>
-            <a:off x="9555480" y="5257800"/>
+            <a:off x="9555480" y="5440679"/>
             <a:ext cx="2148840" cy="365760"/>
           </a:xfrm>
           <a:prstGeom prst="rect">
@@ -5998,7 +6538,7 @@
       </p:sp>
       <p:sp>
         <p:nvSpPr>
-          <p:cNvPr id="31" name="TextBox 30"/>
+          <p:cNvPr id="46" name="TextBox 45"/>
           <p:cNvSpPr txBox="1"/>
           <p:nvPr/>
         </p:nvSpPr>
@@ -6025,7 +6565,7 @@
                   <a:srgbClr val="8A93A3"/>
                 </a:solidFill>
               </a:rPr>
-              <a:t>values illustrative -- each head emits a distribution; H2O drawn multimodal to show CondHead's GMM form.</a:t>
+              <a:t>values illustrative -- every head emits a distribution: ModeHead bars are posterior means with credible-interval whiskers and a per-phase presence probability; H2O drawn multimodal to show CondHead's GMM form.</a:t>
             </a:r>
           </a:p>
         </p:txBody>

--- a/slides/overview.pptx
+++ b/slides/overview.pptx
@@ -1001,7 +1001,7 @@
           <a:lstStyle/>
           <a:p>
             <a:r>
-              <a:t>Masked-element modelling. Encoder is TRAINED here (frozen is the downstream state). Loss is per-element standardized log-space MSE so traces get supervised. Over 474k rocks.</a:t>
+              <a:t>Masked-element modelling. Encoder is TRAINED here (frozen is the downstream state). Loss is per-element standardized log-space MSE so traces get supervised. Over ~167k rocks.</a:t>
             </a:r>
           </a:p>
         </p:txBody>
@@ -6738,7 +6738,7 @@
                   <a:srgbClr val="8A93A3"/>
                 </a:solidFill>
               </a:rPr>
-              <a:t>~474k igneous bulks</a:t>
+              <a:t>~167k igneous bulks</a:t>
             </a:r>
           </a:p>
           <a:p>

--- a/slides/overview.pptx
+++ b/slides/overview.pptx
@@ -17,6 +17,7 @@
     <p:sldId id="265" r:id="rId17"/>
     <p:sldId id="266" r:id="rId18"/>
     <p:sldId id="267" r:id="rId19"/>
+    <p:sldId id="268" r:id="rId20"/>
   </p:sldIdLst>
   <p:sldSz cx="12191695" cy="6858000" type="screen4x3"/>
   <p:notesSz cx="6858000" cy="9144000"/>
@@ -723,7 +724,77 @@
           <a:lstStyle/>
           <a:p>
             <a:r>
-              <a:t>Output FORM, not measured results (heads train in issue #10). ModeHead = hurdle Dirichlet: per-phase presence Bernoulli x conditional Dirichlet over present-phase modes; bars are posterior means + credible intervals, and intermediate presence (amphibole ~0.4) IS the multimodal posterior, not noise. CondHead = per-axis GMM (H2O multimodal). Numbers illustrative.</a:t>
+              <a:t>Output FORM, not measured results (heads train in issue #10). ModeHead = hurdle Dirichlet over the crystals-renormalized solid assemblage (liq/fl dropped, solids sum to 1 -- matches real itemized-phenocrysts + lumped-groundmass granularity). EVERY phase gets a presence Bernoulli AND a conditional amount +/- CI; near-certain phases just have p~1. Amp 0.41 / opx 0.63 anti-correlated is the flagship multimodality (deep-wet-amp vs shallow-dry-opx), so their marginal amounts are conditional on presence, not rock-wide means. CondHead = per-axis GMM; P and H2O were sampled at generation, T is derived (cooling endpoint at the phenocryst window), hence the lower illustrative T. Second read-out view: top-K scenarios; weights labeled prior-weighted plausibility, reweightable p/q. Mass-balance closure teacher-forces the label melt fraction at training. Numbers illustrative.</a:t>
+            </a:r>
+          </a:p>
+        </p:txBody>
+      </p:sp>
+      <p:sp>
+        <p:nvSpPr>
+          <p:cNvPr id="4" name="Slide Number Placeholder 3"/>
+          <p:cNvSpPr>
+            <a:spLocks noGrp="1"/>
+          </p:cNvSpPr>
+          <p:nvPr>
+            <p:ph type="sldNum" idx="5" sz="quarter"/>
+          </p:nvPr>
+        </p:nvSpPr>
+        <p:spPr/>
+      </p:sp>
+    </p:spTree>
+  </p:cSld>
+  <p:clrMapOvr>
+    <a:masterClrMapping/>
+  </p:clrMapOvr>
+</p:notes>
+</file>
+
+<file path=ppt/notesSlides/notesSlide13.xml><?xml version="1.0" encoding="utf-8"?>
+<p:notes xmlns:a="http://schemas.openxmlformats.org/drawingml/2006/main" xmlns:p="http://schemas.openxmlformats.org/presentationml/2006/main" xmlns:r="http://schemas.openxmlformats.org/officeDocument/2006/relationships">
+  <p:cSld>
+    <p:spTree>
+      <p:nvGrpSpPr>
+        <p:cNvPr id="1" name=""/>
+        <p:cNvGrpSpPr/>
+        <p:nvPr/>
+      </p:nvGrpSpPr>
+      <p:grpSpPr>
+        <a:xfrm>
+          <a:off x="0" y="0"/>
+          <a:ext cx="0" cy="0"/>
+          <a:chOff x="0" y="0"/>
+          <a:chExt cx="0" cy="0"/>
+        </a:xfrm>
+      </p:grpSpPr>
+      <p:sp>
+        <p:nvSpPr>
+          <p:cNvPr id="2" name="Slide Image Placeholder 1"/>
+          <p:cNvSpPr>
+            <a:spLocks noGrp="1"/>
+          </p:cNvSpPr>
+          <p:nvPr>
+            <p:ph type="sldImg" idx="2"/>
+          </p:nvPr>
+        </p:nvSpPr>
+        <p:spPr/>
+      </p:sp>
+      <p:sp>
+        <p:nvSpPr>
+          <p:cNvPr id="3" name="Notes Placeholder 2"/>
+          <p:cNvSpPr>
+            <a:spLocks noGrp="1"/>
+          </p:cNvSpPr>
+          <p:nvPr>
+            <p:ph type="body" idx="3" sz="quarter"/>
+          </p:nvPr>
+        </p:nvSpPr>
+        <p:spPr/>
+        <p:txBody>
+          <a:bodyPr/>
+          <a:lstStyle/>
+          <a:p>
+            <a:r>
+              <a:t>View 2 from heads.md, modernized to the locked corpus design: crystals-renormalized (no residual-melt row -- melt-fraction head dropped), composition shared across scenarios (CompHead reads h only), no inference-time mass-balance checkmark (closure is teacher-forced at training; the inference residual as OOD signal is an open rethink). Marginal view = projection of these scenarios; scenarios are the primary object. Open mechanism detail for #10/#13: coupling conditions to assemblage in a sampled scenario requires joint sampling across heads. Numbers illustrative.</a:t>
             </a:r>
           </a:p>
         </p:txBody>
@@ -1283,7 +1354,7 @@
           <a:lstStyle/>
           <a:p>
             <a:r>
-              <a:t>Masked-element modelling. Encoder is TRAINED here (frozen is the downstream state). Loss is per-element standardized log-space MSE so traces get supervised. Over ~167k rocks.</a:t>
+              <a:t>Masked-element modelling. Encoder is TRAINED here (frozen is the downstream state). Loss is per-element standardized log-space MSE so traces get supervised (fracs span ~8 decades; linear MSE leaves traces unsupervised). mu/sigma are per-element log10-frac stats from the train split (pretrain_objective.compute_loss_stats), stored as head buffers. Over ~167k rocks.</a:t>
             </a:r>
           </a:p>
         </p:txBody>
@@ -6330,7 +6401,7 @@
                   <a:srgbClr val="2A9D8F"/>
                 </a:solidFill>
               </a:rPr>
-              <a:t>ModeHead -&gt; distribution over modal mineralogy (hurdle Dirichlet)</a:t>
+              <a:t>ModeHead -&gt; per phase: p(present) x amount-when-present (hurdle Dirichlet; crystals renormalized to 1, groundmass/melt excluded)</a:t>
             </a:r>
           </a:p>
         </p:txBody>
@@ -6344,7 +6415,7 @@
         <p:spPr>
           <a:xfrm>
             <a:off x="5715000" y="1874519"/>
-            <a:ext cx="1766620" cy="292608"/>
+            <a:ext cx="1892807" cy="292608"/>
           </a:xfrm>
           <a:prstGeom prst="roundRect">
             <a:avLst/>
@@ -6387,7 +6458,7 @@
         </p:nvCxnSpPr>
         <p:spPr>
           <a:xfrm>
-            <a:off x="7271308" y="2020824"/>
+            <a:off x="7397496" y="2020824"/>
             <a:ext cx="420624" cy="0"/>
           </a:xfrm>
           <a:prstGeom prst="bentConnector3">
@@ -6423,7 +6494,7 @@
         </p:nvCxnSpPr>
         <p:spPr>
           <a:xfrm>
-            <a:off x="7271308" y="1956816"/>
+            <a:off x="7397496" y="1956816"/>
             <a:ext cx="0" cy="128015"/>
           </a:xfrm>
           <a:prstGeom prst="bentConnector3">
@@ -6459,7 +6530,7 @@
         </p:nvCxnSpPr>
         <p:spPr>
           <a:xfrm>
-            <a:off x="7691932" y="1956816"/>
+            <a:off x="7818120" y="1956816"/>
             <a:ext cx="0" cy="128015"/>
           </a:xfrm>
           <a:prstGeom prst="bentConnector3">
@@ -6495,7 +6566,7 @@
         </p:nvSpPr>
         <p:spPr>
           <a:xfrm>
-            <a:off x="7783372" y="1828799"/>
+            <a:off x="7909560" y="1828799"/>
             <a:ext cx="4206240" cy="365760"/>
           </a:xfrm>
           <a:prstGeom prst="rect">
@@ -6516,7 +6587,7 @@
                   <a:srgbClr val="1A2238"/>
                 </a:solidFill>
               </a:rPr>
-              <a:t>plagioclase  0.42</a:t>
+              <a:t>plagioclase  0.45  |  p 1.00</a:t>
             </a:r>
           </a:p>
         </p:txBody>
@@ -6530,7 +6601,7 @@
         <p:spPr>
           <a:xfrm>
             <a:off x="5715000" y="2185415"/>
-            <a:ext cx="1177747" cy="292608"/>
+            <a:ext cx="1135684" cy="292608"/>
           </a:xfrm>
           <a:prstGeom prst="roundRect">
             <a:avLst/>
@@ -6573,7 +6644,7 @@
         </p:nvCxnSpPr>
         <p:spPr>
           <a:xfrm>
-            <a:off x="6724497" y="2331720"/>
+            <a:off x="6682435" y="2331720"/>
             <a:ext cx="336499" cy="0"/>
           </a:xfrm>
           <a:prstGeom prst="bentConnector3">
@@ -6609,7 +6680,7 @@
         </p:nvCxnSpPr>
         <p:spPr>
           <a:xfrm>
-            <a:off x="6724497" y="2267712"/>
+            <a:off x="6682435" y="2267712"/>
             <a:ext cx="0" cy="128015"/>
           </a:xfrm>
           <a:prstGeom prst="bentConnector3">
@@ -6645,7 +6716,7 @@
         </p:nvCxnSpPr>
         <p:spPr>
           <a:xfrm>
-            <a:off x="7060996" y="2267712"/>
+            <a:off x="7018934" y="2267712"/>
             <a:ext cx="0" cy="128015"/>
           </a:xfrm>
           <a:prstGeom prst="bentConnector3">
@@ -6681,7 +6752,7 @@
         </p:nvSpPr>
         <p:spPr>
           <a:xfrm>
-            <a:off x="7152436" y="2139696"/>
+            <a:off x="7110374" y="2139696"/>
             <a:ext cx="4206240" cy="365760"/>
           </a:xfrm>
           <a:prstGeom prst="rect">
@@ -6702,7 +6773,7 @@
                   <a:srgbClr val="1A2238"/>
                 </a:solidFill>
               </a:rPr>
-              <a:t>clinopyroxene  0.28</a:t>
+              <a:t>clinopyroxene  0.27  |  p 0.97</a:t>
             </a:r>
           </a:p>
         </p:txBody>
@@ -6716,13 +6787,13 @@
         <p:spPr>
           <a:xfrm>
             <a:off x="5715000" y="2496312"/>
-            <a:ext cx="672998" cy="292608"/>
+            <a:ext cx="757123" cy="292608"/>
           </a:xfrm>
           <a:prstGeom prst="roundRect">
             <a:avLst/>
           </a:prstGeom>
           <a:solidFill>
-            <a:srgbClr val="2A9D8F"/>
+            <a:srgbClr val="A9D7D2"/>
           </a:solidFill>
           <a:ln>
             <a:noFill/>
@@ -6759,8 +6830,8 @@
         </p:nvCxnSpPr>
         <p:spPr>
           <a:xfrm>
-            <a:off x="6135624" y="2642616"/>
-            <a:ext cx="504748" cy="0"/>
+            <a:off x="6219748" y="2642616"/>
+            <a:ext cx="504749" cy="0"/>
           </a:xfrm>
           <a:prstGeom prst="bentConnector3">
             <a:avLst/>
@@ -6795,7 +6866,7 @@
         </p:nvCxnSpPr>
         <p:spPr>
           <a:xfrm>
-            <a:off x="6135624" y="2578608"/>
+            <a:off x="6219748" y="2578608"/>
             <a:ext cx="0" cy="128016"/>
           </a:xfrm>
           <a:prstGeom prst="bentConnector3">
@@ -6831,7 +6902,7 @@
         </p:nvCxnSpPr>
         <p:spPr>
           <a:xfrm>
-            <a:off x="6640372" y="2578608"/>
+            <a:off x="6724497" y="2578608"/>
             <a:ext cx="0" cy="128016"/>
           </a:xfrm>
           <a:prstGeom prst="bentConnector3">
@@ -6867,7 +6938,7 @@
         </p:nvSpPr>
         <p:spPr>
           <a:xfrm>
-            <a:off x="6731812" y="2450592"/>
+            <a:off x="6815937" y="2450592"/>
             <a:ext cx="4206240" cy="365760"/>
           </a:xfrm>
           <a:prstGeom prst="rect">
@@ -6888,7 +6959,7 @@
                   <a:srgbClr val="1A2238"/>
                 </a:solidFill>
               </a:rPr>
-              <a:t>amphibole  0.16   p(present) 0.41</a:t>
+              <a:t>amphibole  0.18  |  p 0.41</a:t>
             </a:r>
           </a:p>
         </p:txBody>
@@ -6902,13 +6973,13 @@
         <p:spPr>
           <a:xfrm>
             <a:off x="5715000" y="2807208"/>
-            <a:ext cx="336499" cy="292608"/>
+            <a:ext cx="420623" cy="292608"/>
           </a:xfrm>
           <a:prstGeom prst="roundRect">
             <a:avLst/>
           </a:prstGeom>
           <a:solidFill>
-            <a:srgbClr val="2A9D8F"/>
+            <a:srgbClr val="A9D7D2"/>
           </a:solidFill>
           <a:ln>
             <a:noFill/>
@@ -6945,8 +7016,8 @@
         </p:nvCxnSpPr>
         <p:spPr>
           <a:xfrm>
-            <a:off x="5925312" y="2953512"/>
-            <a:ext cx="252374" cy="0"/>
+            <a:off x="5967374" y="2953512"/>
+            <a:ext cx="336499" cy="0"/>
           </a:xfrm>
           <a:prstGeom prst="bentConnector3">
             <a:avLst/>
@@ -6981,7 +7052,7 @@
         </p:nvCxnSpPr>
         <p:spPr>
           <a:xfrm>
-            <a:off x="5925312" y="2889504"/>
+            <a:off x="5967374" y="2889504"/>
             <a:ext cx="0" cy="128016"/>
           </a:xfrm>
           <a:prstGeom prst="bentConnector3">
@@ -7017,7 +7088,7 @@
         </p:nvCxnSpPr>
         <p:spPr>
           <a:xfrm>
-            <a:off x="6177686" y="2889504"/>
+            <a:off x="6303873" y="2889504"/>
             <a:ext cx="0" cy="128016"/>
           </a:xfrm>
           <a:prstGeom prst="bentConnector3">
@@ -7053,7 +7124,7 @@
         </p:nvSpPr>
         <p:spPr>
           <a:xfrm>
-            <a:off x="6269126" y="2761488"/>
+            <a:off x="6395313" y="2761488"/>
             <a:ext cx="4206240" cy="365760"/>
           </a:xfrm>
           <a:prstGeom prst="rect">
@@ -7074,7 +7145,7 @@
                   <a:srgbClr val="1A2238"/>
                 </a:solidFill>
               </a:rPr>
-              <a:t>orthopyroxene  0.08</a:t>
+              <a:t>orthopyroxene  0.10  |  p 0.63</a:t>
             </a:r>
           </a:p>
         </p:txBody>
@@ -7260,7 +7331,7 @@
                   <a:srgbClr val="1A2238"/>
                 </a:solidFill>
               </a:rPr>
-              <a:t>magnetite  0.04</a:t>
+              <a:t>magnetite  0.04  |  p 0.95</a:t>
             </a:r>
           </a:p>
         </p:txBody>
@@ -7348,7 +7419,7 @@
                   <a:srgbClr val="6C5CE7"/>
                 </a:solidFill>
               </a:rPr>
-              <a:t>CondHead -&gt; formation conditions (per-axis GMM, if trained on a thermodynamic phase-equilibrium solver like MAGEMin)</a:t>
+              <a:t>CondHead -&gt; storage conditions (per-axis GMM; P and H2O are sampled axes, T is the derived phenocryst-window endpoint temperature)</a:t>
             </a:r>
           </a:p>
         </p:txBody>
@@ -7626,7 +7697,7 @@
                   <a:srgbClr val="1A2238"/>
                 </a:solidFill>
               </a:rPr>
-              <a:t>T  1140 +/- 35 C</a:t>
+              <a:t>T  1010 +/- 40 C</a:t>
             </a:r>
           </a:p>
         </p:txBody>
@@ -8216,7 +8287,413 @@
                   <a:srgbClr val="8A93A3"/>
                 </a:solidFill>
               </a:rPr>
-              <a:t>values illustrative -- every head emits a distribution: ModeHead bars are posterior means with credible-interval whiskers and a per-phase presence probability; H2O drawn multimodal to show CondHead's GMM form.</a:t>
+              <a:t>values illustrative -- every phase carries both numbers; faded bars = presence genuinely uncertain (here the amphibole/orthopyroxene either-or: wet-deep grows amp, dry-shallow grows opx). This marginal view is a projection; the primary output is the ranked-scenario view on the next slide.</a:t>
+            </a:r>
+          </a:p>
+        </p:txBody>
+      </p:sp>
+    </p:spTree>
+  </p:cSld>
+  <p:clrMapOvr>
+    <a:masterClrMapping/>
+  </p:clrMapOvr>
+</p:sld>
+</file>
+
+<file path=ppt/slides/slide13.xml><?xml version="1.0" encoding="utf-8"?>
+<p:sld xmlns:a="http://schemas.openxmlformats.org/drawingml/2006/main" xmlns:p="http://schemas.openxmlformats.org/presentationml/2006/main" xmlns:r="http://schemas.openxmlformats.org/officeDocument/2006/relationships">
+  <p:cSld>
+    <p:spTree>
+      <p:nvGrpSpPr>
+        <p:cNvPr id="1" name=""/>
+        <p:cNvGrpSpPr/>
+        <p:nvPr/>
+      </p:nvGrpSpPr>
+      <p:grpSpPr/>
+      <p:sp>
+        <p:nvSpPr>
+          <p:cNvPr id="2" name="TextBox 1"/>
+          <p:cNvSpPr txBox="1"/>
+          <p:nvPr/>
+        </p:nvSpPr>
+        <p:spPr>
+          <a:xfrm>
+            <a:off x="502920" y="274320"/>
+            <a:ext cx="10972800" cy="365760"/>
+          </a:xfrm>
+          <a:prstGeom prst="rect">
+            <a:avLst/>
+          </a:prstGeom>
+          <a:noFill/>
+        </p:spPr>
+        <p:txBody>
+          <a:bodyPr wrap="square">
+            <a:spAutoFit/>
+          </a:bodyPr>
+          <a:lstStyle/>
+          <a:p>
+            <a:pPr algn="l"/>
+            <a:r>
+              <a:rPr sz="1300" b="1">
+                <a:solidFill>
+                  <a:srgbClr val="2E5BFF"/>
+                </a:solidFill>
+              </a:rPr>
+              <a:t>HEADS</a:t>
+            </a:r>
+          </a:p>
+        </p:txBody>
+      </p:sp>
+      <p:sp>
+        <p:nvSpPr>
+          <p:cNvPr id="3" name="TextBox 2"/>
+          <p:cNvSpPr txBox="1"/>
+          <p:nvPr/>
+        </p:nvSpPr>
+        <p:spPr>
+          <a:xfrm>
+            <a:off x="502920" y="603504"/>
+            <a:ext cx="11155680" cy="731520"/>
+          </a:xfrm>
+          <a:prstGeom prst="rect">
+            <a:avLst/>
+          </a:prstGeom>
+          <a:noFill/>
+        </p:spPr>
+        <p:txBody>
+          <a:bodyPr wrap="square">
+            <a:spAutoFit/>
+          </a:bodyPr>
+          <a:lstStyle/>
+          <a:p>
+            <a:pPr algn="l"/>
+            <a:r>
+              <a:rPr sz="2600" b="1">
+                <a:solidFill>
+                  <a:srgbClr val="1A2238"/>
+                </a:solidFill>
+              </a:rPr>
+              <a:t>The coherent answer: ranked scenarios</a:t>
+            </a:r>
+          </a:p>
+        </p:txBody>
+      </p:sp>
+      <p:sp>
+        <p:nvSpPr>
+          <p:cNvPr id="4" name="TextBox 3"/>
+          <p:cNvSpPr txBox="1"/>
+          <p:nvPr/>
+        </p:nvSpPr>
+        <p:spPr>
+          <a:xfrm>
+            <a:off x="502920" y="1051560"/>
+            <a:ext cx="11155680" cy="731520"/>
+          </a:xfrm>
+          <a:prstGeom prst="rect">
+            <a:avLst/>
+          </a:prstGeom>
+          <a:noFill/>
+        </p:spPr>
+        <p:txBody>
+          <a:bodyPr wrap="square">
+            <a:spAutoFit/>
+          </a:bodyPr>
+          <a:lstStyle/>
+          <a:p>
+            <a:pPr algn="l"/>
+            <a:r>
+              <a:rPr sz="1300" b="0">
+                <a:solidFill>
+                  <a:srgbClr val="8A93A3"/>
+                </a:solidFill>
+              </a:rPr>
+              <a:t>the marginal table can't show WHICH minerals trade off; scenarios can -- sample the posterior, cluster by assemblage, rank by weight</a:t>
+            </a:r>
+          </a:p>
+        </p:txBody>
+      </p:sp>
+      <p:sp>
+        <p:nvSpPr>
+          <p:cNvPr id="5" name="Rounded Rectangle 4"/>
+          <p:cNvSpPr/>
+          <p:nvPr/>
+        </p:nvSpPr>
+        <p:spPr>
+          <a:xfrm>
+            <a:off x="640080" y="1783080"/>
+            <a:ext cx="5394960" cy="3291840"/>
+          </a:xfrm>
+          <a:prstGeom prst="roundRect">
+            <a:avLst/>
+          </a:prstGeom>
+          <a:solidFill>
+            <a:srgbClr val="E1F1EF"/>
+          </a:solidFill>
+          <a:ln w="25400">
+            <a:solidFill>
+              <a:srgbClr val="2A9D8F"/>
+            </a:solidFill>
+          </a:ln>
+          <a:effectLst/>
+        </p:spPr>
+        <p:style>
+          <a:lnRef idx="1">
+            <a:schemeClr val="accent1"/>
+          </a:lnRef>
+          <a:fillRef idx="3">
+            <a:schemeClr val="accent1"/>
+          </a:fillRef>
+          <a:effectRef idx="2">
+            <a:schemeClr val="accent1"/>
+          </a:effectRef>
+          <a:fontRef idx="minor">
+            <a:schemeClr val="lt1"/>
+          </a:fontRef>
+        </p:style>
+        <p:txBody>
+          <a:bodyPr rtlCol="0" anchor="ctr" wrap="square"/>
+          <a:lstStyle/>
+          <a:p>
+            <a:pPr algn="ctr"/>
+            <a:r>
+              <a:rPr sz="1400" b="1">
+                <a:solidFill>
+                  <a:srgbClr val="1A2238"/>
+                </a:solidFill>
+              </a:rPr>
+              <a:t>Scenario A -- deep &amp; wet . weight ~45%</a:t>
+            </a:r>
+          </a:p>
+          <a:p>
+            <a:pPr algn="ctr"/>
+            <a:r>
+              <a:rPr sz="1100" b="0">
+                <a:solidFill>
+                  <a:srgbClr val="8A93A3"/>
+                </a:solidFill>
+              </a:rPr>
+              <a:t>P 6-9 kbar   H2O 4-6 wt%   T ~950-990 C</a:t>
+            </a:r>
+          </a:p>
+          <a:p>
+            <a:pPr algn="ctr"/>
+            <a:r>
+              <a:rPr sz="1400" b="1">
+                <a:solidFill>
+                  <a:srgbClr val="1A2238"/>
+                </a:solidFill>
+              </a:rPr>
+              <a:t/>
+            </a:r>
+          </a:p>
+          <a:p>
+            <a:pPr algn="ctr"/>
+            <a:r>
+              <a:rPr sz="1100" b="0">
+                <a:solidFill>
+                  <a:srgbClr val="8A93A3"/>
+                </a:solidFill>
+              </a:rPr>
+              <a:t>phenocrysts (wt% of cargo, sums to 100):</a:t>
+            </a:r>
+          </a:p>
+          <a:p>
+            <a:pPr algn="ctr"/>
+            <a:r>
+              <a:rPr sz="1100" b="0">
+                <a:solidFill>
+                  <a:srgbClr val="8A93A3"/>
+                </a:solidFill>
+              </a:rPr>
+              <a:t>plagioclase 44 +/- 4    clinopyroxene 26 +/- 3</a:t>
+            </a:r>
+          </a:p>
+          <a:p>
+            <a:pPr algn="ctr"/>
+            <a:r>
+              <a:rPr sz="1100" b="0">
+                <a:solidFill>
+                  <a:srgbClr val="8A93A3"/>
+                </a:solidFill>
+              </a:rPr>
+              <a:t>amphibole 18 +/- 4      Fe-Ti oxides 12 +/- 2</a:t>
+            </a:r>
+          </a:p>
+        </p:txBody>
+      </p:sp>
+      <p:sp>
+        <p:nvSpPr>
+          <p:cNvPr id="6" name="Rounded Rectangle 5"/>
+          <p:cNvSpPr/>
+          <p:nvPr/>
+        </p:nvSpPr>
+        <p:spPr>
+          <a:xfrm>
+            <a:off x="6309360" y="1783080"/>
+            <a:ext cx="5394960" cy="3291840"/>
+          </a:xfrm>
+          <a:prstGeom prst="roundRect">
+            <a:avLst/>
+          </a:prstGeom>
+          <a:solidFill>
+            <a:srgbClr val="DDF4F2"/>
+          </a:solidFill>
+          <a:ln w="25400">
+            <a:solidFill>
+              <a:srgbClr val="12B5A5"/>
+            </a:solidFill>
+          </a:ln>
+          <a:effectLst/>
+        </p:spPr>
+        <p:style>
+          <a:lnRef idx="1">
+            <a:schemeClr val="accent1"/>
+          </a:lnRef>
+          <a:fillRef idx="3">
+            <a:schemeClr val="accent1"/>
+          </a:fillRef>
+          <a:effectRef idx="2">
+            <a:schemeClr val="accent1"/>
+          </a:effectRef>
+          <a:fontRef idx="minor">
+            <a:schemeClr val="lt1"/>
+          </a:fontRef>
+        </p:style>
+        <p:txBody>
+          <a:bodyPr rtlCol="0" anchor="ctr" wrap="square"/>
+          <a:lstStyle/>
+          <a:p>
+            <a:pPr algn="ctr"/>
+            <a:r>
+              <a:rPr sz="1400" b="1">
+                <a:solidFill>
+                  <a:srgbClr val="1A2238"/>
+                </a:solidFill>
+              </a:rPr>
+              <a:t>Scenario B -- shallow &amp; dry . weight ~35%</a:t>
+            </a:r>
+          </a:p>
+          <a:p>
+            <a:pPr algn="ctr"/>
+            <a:r>
+              <a:rPr sz="1100" b="0">
+                <a:solidFill>
+                  <a:srgbClr val="8A93A3"/>
+                </a:solidFill>
+              </a:rPr>
+              <a:t>P 1-3 kbar   H2O 1-2.5 wt%   T ~1000-1040 C</a:t>
+            </a:r>
+          </a:p>
+          <a:p>
+            <a:pPr algn="ctr"/>
+            <a:r>
+              <a:rPr sz="1400" b="1">
+                <a:solidFill>
+                  <a:srgbClr val="1A2238"/>
+                </a:solidFill>
+              </a:rPr>
+              <a:t/>
+            </a:r>
+          </a:p>
+          <a:p>
+            <a:pPr algn="ctr"/>
+            <a:r>
+              <a:rPr sz="1100" b="0">
+                <a:solidFill>
+                  <a:srgbClr val="8A93A3"/>
+                </a:solidFill>
+              </a:rPr>
+              <a:t>phenocrysts (wt% of cargo, sums to 100):</a:t>
+            </a:r>
+          </a:p>
+          <a:p>
+            <a:pPr algn="ctr"/>
+            <a:r>
+              <a:rPr sz="1100" b="0">
+                <a:solidFill>
+                  <a:srgbClr val="8A93A3"/>
+                </a:solidFill>
+              </a:rPr>
+              <a:t>plagioclase 48 +/- 4    clinopyroxene 24 +/- 3</a:t>
+            </a:r>
+          </a:p>
+          <a:p>
+            <a:pPr algn="ctr"/>
+            <a:r>
+              <a:rPr sz="1100" b="0">
+                <a:solidFill>
+                  <a:srgbClr val="8A93A3"/>
+                </a:solidFill>
+              </a:rPr>
+              <a:t>orthopyroxene 16 +/- 3  Fe-Ti oxides 12 +/- 2</a:t>
+            </a:r>
+          </a:p>
+        </p:txBody>
+      </p:sp>
+      <p:sp>
+        <p:nvSpPr>
+          <p:cNvPr id="7" name="TextBox 6"/>
+          <p:cNvSpPr txBox="1"/>
+          <p:nvPr/>
+        </p:nvSpPr>
+        <p:spPr>
+          <a:xfrm>
+            <a:off x="640080" y="5212080"/>
+            <a:ext cx="11064240" cy="731520"/>
+          </a:xfrm>
+          <a:prstGeom prst="rect">
+            <a:avLst/>
+          </a:prstGeom>
+          <a:noFill/>
+        </p:spPr>
+        <p:txBody>
+          <a:bodyPr wrap="square">
+            <a:spAutoFit/>
+          </a:bodyPr>
+          <a:lstStyle/>
+          <a:p>
+            <a:pPr algn="l"/>
+            <a:r>
+              <a:rPr sz="1200" b="0">
+                <a:solidFill>
+                  <a:srgbClr val="1A2238"/>
+                </a:solidFill>
+              </a:rPr>
+              <a:t>+ intermediate scenario (amp + opx coexist, ~12%) + tail (~8%) -- nothing silently dropped; weights are prior-weighted plausibility, reweightable</a:t>
+            </a:r>
+          </a:p>
+        </p:txBody>
+      </p:sp>
+      <p:sp>
+        <p:nvSpPr>
+          <p:cNvPr id="8" name="TextBox 7"/>
+          <p:cNvSpPr txBox="1"/>
+          <p:nvPr/>
+        </p:nvSpPr>
+        <p:spPr>
+          <a:xfrm>
+            <a:off x="640080" y="5806440"/>
+            <a:ext cx="11064240" cy="731520"/>
+          </a:xfrm>
+          <a:prstGeom prst="rect">
+            <a:avLst/>
+          </a:prstGeom>
+          <a:noFill/>
+        </p:spPr>
+        <p:txBody>
+          <a:bodyPr wrap="square">
+            <a:spAutoFit/>
+          </a:bodyPr>
+          <a:lstStyle/>
+          <a:p>
+            <a:pPr algn="l"/>
+            <a:r>
+              <a:rPr sz="1200" b="0">
+                <a:solidFill>
+                  <a:srgbClr val="8A93A3"/>
+                </a:solidFill>
+              </a:rPr>
+              <a:t>per-phase composition (An#, Mg#) is bulk-controlled -- one shared band across scenarios, not re-predicted per scenario. Each scenario is a falsifiable hypothesis: amphibole in thin section selects A, and with it A's conditions.</a:t>
             </a:r>
           </a:p>
         </p:txBody>
@@ -15702,6 +16179,171 @@
                 </a:solidFill>
               </a:rPr>
               <a:t>updates encoder weights</a:t>
+            </a:r>
+          </a:p>
+        </p:txBody>
+      </p:sp>
+      <p:sp>
+        <p:nvSpPr>
+          <p:cNvPr id="30" name="Rounded Rectangle 29"/>
+          <p:cNvSpPr/>
+          <p:nvPr/>
+        </p:nvSpPr>
+        <p:spPr>
+          <a:xfrm>
+            <a:off x="1463040" y="5943600"/>
+            <a:ext cx="4206240" cy="777240"/>
+          </a:xfrm>
+          <a:prstGeom prst="roundRect">
+            <a:avLst/>
+          </a:prstGeom>
+          <a:solidFill>
+            <a:srgbClr val="FFFFFF"/>
+          </a:solidFill>
+          <a:ln w="12700">
+            <a:solidFill>
+              <a:srgbClr val="C8CDD6"/>
+            </a:solidFill>
+          </a:ln>
+          <a:effectLst/>
+        </p:spPr>
+        <p:style>
+          <a:lnRef idx="1">
+            <a:schemeClr val="accent1"/>
+          </a:lnRef>
+          <a:fillRef idx="3">
+            <a:schemeClr val="accent1"/>
+          </a:fillRef>
+          <a:effectRef idx="2">
+            <a:schemeClr val="accent1"/>
+          </a:effectRef>
+          <a:fontRef idx="minor">
+            <a:schemeClr val="lt1"/>
+          </a:fontRef>
+        </p:style>
+        <p:txBody>
+          <a:bodyPr rtlCol="0" anchor="ctr" wrap="square"/>
+          <a:lstStyle/>
+          <a:p>
+            <a:pPr algn="ctr"/>
+            <a:r>
+              <a:rPr sz="1500" b="1">
+                <a:solidFill>
+                  <a:srgbClr val="8A93A3"/>
+                </a:solidFill>
+              </a:rPr>
+              <a:t>zⱼ = (log₁₀ fⱼ − μⱼ) / σⱼ</a:t>
+            </a:r>
+          </a:p>
+          <a:p>
+            <a:pPr algn="ctr"/>
+            <a:r>
+              <a:rPr sz="1200" b="0">
+                <a:solidFill>
+                  <a:srgbClr val="8A93A3"/>
+                </a:solidFill>
+              </a:rPr>
+              <a:t>target: per-element z-scored log fraction; μⱼ, σⱼ from the train split only</a:t>
+            </a:r>
+          </a:p>
+        </p:txBody>
+      </p:sp>
+      <p:sp>
+        <p:nvSpPr>
+          <p:cNvPr id="31" name="Rounded Rectangle 30"/>
+          <p:cNvSpPr/>
+          <p:nvPr/>
+        </p:nvSpPr>
+        <p:spPr>
+          <a:xfrm>
+            <a:off x="6309360" y="5943600"/>
+            <a:ext cx="4206240" cy="777240"/>
+          </a:xfrm>
+          <a:prstGeom prst="roundRect">
+            <a:avLst/>
+          </a:prstGeom>
+          <a:solidFill>
+            <a:srgbClr val="FFFFFF"/>
+          </a:solidFill>
+          <a:ln w="12700">
+            <a:solidFill>
+              <a:srgbClr val="C8CDD6"/>
+            </a:solidFill>
+          </a:ln>
+          <a:effectLst/>
+        </p:spPr>
+        <p:style>
+          <a:lnRef idx="1">
+            <a:schemeClr val="accent1"/>
+          </a:lnRef>
+          <a:fillRef idx="3">
+            <a:schemeClr val="accent1"/>
+          </a:fillRef>
+          <a:effectRef idx="2">
+            <a:schemeClr val="accent1"/>
+          </a:effectRef>
+          <a:fontRef idx="minor">
+            <a:schemeClr val="lt1"/>
+          </a:fontRef>
+        </p:style>
+        <p:txBody>
+          <a:bodyPr rtlCol="0" anchor="ctr" wrap="square"/>
+          <a:lstStyle/>
+          <a:p>
+            <a:pPr algn="ctr"/>
+            <a:r>
+              <a:rPr sz="1500" b="1">
+                <a:solidFill>
+                  <a:srgbClr val="8A93A3"/>
+                </a:solidFill>
+              </a:rPr>
+              <a:t>L = 1/|M| Σⱼ∈M (ŷⱼ − zⱼ)²</a:t>
+            </a:r>
+          </a:p>
+          <a:p>
+            <a:pPr algn="ctr"/>
+            <a:r>
+              <a:rPr sz="1200" b="0">
+                <a:solidFill>
+                  <a:srgbClr val="8A93A3"/>
+                </a:solidFill>
+              </a:rPr>
+              <a:t>plain MSE between prediction ŷ and z, at the masked positions M only</a:t>
+            </a:r>
+          </a:p>
+        </p:txBody>
+      </p:sp>
+      <p:sp>
+        <p:nvSpPr>
+          <p:cNvPr id="32" name="TextBox 31"/>
+          <p:cNvSpPr txBox="1"/>
+          <p:nvPr/>
+        </p:nvSpPr>
+        <p:spPr>
+          <a:xfrm>
+            <a:off x="502920" y="5989320"/>
+            <a:ext cx="914400" cy="731520"/>
+          </a:xfrm>
+          <a:prstGeom prst="rect">
+            <a:avLst/>
+          </a:prstGeom>
+          <a:noFill/>
+        </p:spPr>
+        <p:txBody>
+          <a:bodyPr wrap="square">
+            <a:spAutoFit/>
+          </a:bodyPr>
+          <a:lstStyle/>
+          <a:p>
+            <a:pPr algn="l"/>
+            <a:r>
+              <a:rPr sz="1100" b="0">
+                <a:solidFill>
+                  <a:srgbClr val="C0392B"/>
+                </a:solidFill>
+              </a:rPr>
+              <a:t>the loss,
+explicitly:</a:t>
             </a:r>
           </a:p>
         </p:txBody>

--- a/slides/overview.pptx
+++ b/slides/overview.pptx
@@ -21,6 +21,7 @@
     <p:sldId id="269" r:id="rId21"/>
     <p:sldId id="270" r:id="rId22"/>
     <p:sldId id="271" r:id="rId23"/>
+    <p:sldId id="272" r:id="rId24"/>
   </p:sldIdLst>
   <p:sldSz cx="12191695" cy="6858000" type="screen4x3"/>
   <p:notesSz cx="6858000" cy="9144000"/>
@@ -937,7 +938,7 @@
           <a:lstStyle/>
           <a:p>
             <a:r>
-              <a:t>Output FORM, not measured results (heads train in issue #10). ModeHead = hurdle Dirichlet over the crystals-renormalized solid assemblage (liq/fl dropped, solids sum to 1 -- matches real itemized-phenocrysts + lumped-groundmass granularity). EVERY phase gets a presence Bernoulli AND a conditional amount +/- CI; near-certain phases just have p~1. Amp 0.41 / opx 0.63 anti-correlated is the flagship multimodality (deep-wet-amp vs shallow-dry-opx), so their marginal amounts are conditional on presence, not rock-wide means. CondHead = per-axis GMM; P and H2O were sampled at generation, T is derived (cooling endpoint at the phenocryst window), hence the lower illustrative T. Second read-out view: top-K scenarios; weights labeled prior-weighted plausibility, reweightable p/q. Mass-balance closure teacher-forces the label melt fraction at training. Numbers illustrative.</a:t>
+              <a:t>Eval-semantics slide for the magnitude branch, mirroring the presence branch's reliability worked example. Numbers illustrative but to scale: alpha sliced to the true 4-phase support gives Dirichlet means alpha_i/alpha0 and Beta marginals Beta(alpha_i, alpha0 - alpha_i); plag Beta(12,13) has mean 0.48, sd ~0.10, and truth 0.44 lands at CDF 0.34. alpha0 is the single shared confidence knob per row -- the reason per-phase spreads can't be tuned independently (see alpha_concentration.png). PIT histograms are the magnitude analog of reliability diagrams; parity plots are the point-estimate view. Scored by masked Dirichlet NLL (anatomy slide's L_magnitude).</a:t>
             </a:r>
           </a:p>
         </p:txBody>
@@ -963,6 +964,76 @@
 </file>
 
 <file path=ppt/notesSlides/notesSlide16.xml><?xml version="1.0" encoding="utf-8"?>
+<p:notes xmlns:a="http://schemas.openxmlformats.org/drawingml/2006/main" xmlns:p="http://schemas.openxmlformats.org/presentationml/2006/main" xmlns:r="http://schemas.openxmlformats.org/officeDocument/2006/relationships">
+  <p:cSld>
+    <p:spTree>
+      <p:nvGrpSpPr>
+        <p:cNvPr id="1" name=""/>
+        <p:cNvGrpSpPr/>
+        <p:nvPr/>
+      </p:nvGrpSpPr>
+      <p:grpSpPr>
+        <a:xfrm>
+          <a:off x="0" y="0"/>
+          <a:ext cx="0" cy="0"/>
+          <a:chOff x="0" y="0"/>
+          <a:chExt cx="0" cy="0"/>
+        </a:xfrm>
+      </p:grpSpPr>
+      <p:sp>
+        <p:nvSpPr>
+          <p:cNvPr id="2" name="Slide Image Placeholder 1"/>
+          <p:cNvSpPr>
+            <a:spLocks noGrp="1"/>
+          </p:cNvSpPr>
+          <p:nvPr>
+            <p:ph type="sldImg" idx="2"/>
+          </p:nvPr>
+        </p:nvSpPr>
+        <p:spPr/>
+      </p:sp>
+      <p:sp>
+        <p:nvSpPr>
+          <p:cNvPr id="3" name="Notes Placeholder 2"/>
+          <p:cNvSpPr>
+            <a:spLocks noGrp="1"/>
+          </p:cNvSpPr>
+          <p:nvPr>
+            <p:ph type="body" idx="3" sz="quarter"/>
+          </p:nvPr>
+        </p:nvSpPr>
+        <p:spPr/>
+        <p:txBody>
+          <a:bodyPr/>
+          <a:lstStyle/>
+          <a:p>
+            <a:r>
+              <a:t>Output FORM, not measured results (heads train in issue #10). ModeHead = hurdle Dirichlet over the crystals-renormalized solid assemblage (liq/fl dropped, solids sum to 1 -- matches real itemized-phenocrysts + lumped-groundmass granularity). EVERY phase gets a presence Bernoulli AND a conditional amount +/- CI; near-certain phases just have p~1. Amp 0.41 / opx 0.63 anti-correlated is the flagship multimodality (deep-wet-amp vs shallow-dry-opx), so their marginal amounts are conditional on presence, not rock-wide means. CondHead = per-axis GMM; P and H2O were sampled at generation, T is derived (cooling endpoint at the phenocryst window), hence the lower illustrative T. Second read-out view: top-K scenarios; weights labeled prior-weighted plausibility, reweightable p/q. Mass-balance closure teacher-forces the label melt fraction at training. Numbers illustrative.</a:t>
+            </a:r>
+          </a:p>
+        </p:txBody>
+      </p:sp>
+      <p:sp>
+        <p:nvSpPr>
+          <p:cNvPr id="4" name="Slide Number Placeholder 3"/>
+          <p:cNvSpPr>
+            <a:spLocks noGrp="1"/>
+          </p:cNvSpPr>
+          <p:nvPr>
+            <p:ph type="sldNum" idx="5" sz="quarter"/>
+          </p:nvPr>
+        </p:nvSpPr>
+        <p:spPr/>
+      </p:sp>
+    </p:spTree>
+  </p:cSld>
+  <p:clrMapOvr>
+    <a:masterClrMapping/>
+  </p:clrMapOvr>
+</p:notes>
+</file>
+
+<file path=ppt/notesSlides/notesSlide17.xml><?xml version="1.0" encoding="utf-8"?>
 <p:notes xmlns:a="http://schemas.openxmlformats.org/drawingml/2006/main" xmlns:p="http://schemas.openxmlformats.org/presentationml/2006/main" xmlns:r="http://schemas.openxmlformats.org/officeDocument/2006/relationships">
   <p:cSld>
     <p:spTree>
@@ -10245,6 +10316,958 @@
                   <a:srgbClr val="1A2238"/>
                 </a:solidFill>
               </a:rPr>
+              <a:t>If it's there, how much? One row through the Dirichlet</a:t>
+            </a:r>
+          </a:p>
+        </p:txBody>
+      </p:sp>
+      <p:sp>
+        <p:nvSpPr>
+          <p:cNvPr id="4" name="TextBox 3"/>
+          <p:cNvSpPr txBox="1"/>
+          <p:nvPr/>
+        </p:nvSpPr>
+        <p:spPr>
+          <a:xfrm>
+            <a:off x="502920" y="1051560"/>
+            <a:ext cx="11155680" cy="731520"/>
+          </a:xfrm>
+          <a:prstGeom prst="rect">
+            <a:avLst/>
+          </a:prstGeom>
+          <a:noFill/>
+        </p:spPr>
+        <p:txBody>
+          <a:bodyPr wrap="square">
+            <a:spAutoFit/>
+          </a:bodyPr>
+          <a:lstStyle/>
+          <a:p>
+            <a:pPr algn="l"/>
+            <a:r>
+              <a:rPr sz="1300" b="0">
+                <a:solidFill>
+                  <a:srgbClr val="8A93A3"/>
+                </a:solidFill>
+              </a:rPr>
+              <a:t>the magnitude branch's eval: slice the predicted concentrations to the row's true support, compare means to truth, and ask whether the claimed spread is honest (PIT)</a:t>
+            </a:r>
+          </a:p>
+        </p:txBody>
+      </p:sp>
+      <p:sp>
+        <p:nvSpPr>
+          <p:cNvPr id="5" name="Rounded Rectangle 4"/>
+          <p:cNvSpPr/>
+          <p:nvPr/>
+        </p:nvSpPr>
+        <p:spPr>
+          <a:xfrm>
+            <a:off x="502920" y="1920240"/>
+            <a:ext cx="2743200" cy="1828800"/>
+          </a:xfrm>
+          <a:prstGeom prst="roundRect">
+            <a:avLst/>
+          </a:prstGeom>
+          <a:solidFill>
+            <a:srgbClr val="E1F1EF"/>
+          </a:solidFill>
+          <a:ln w="25400">
+            <a:solidFill>
+              <a:srgbClr val="2A9D8F"/>
+            </a:solidFill>
+          </a:ln>
+          <a:effectLst/>
+        </p:spPr>
+        <p:style>
+          <a:lnRef idx="1">
+            <a:schemeClr val="accent1"/>
+          </a:lnRef>
+          <a:fillRef idx="3">
+            <a:schemeClr val="accent1"/>
+          </a:fillRef>
+          <a:effectRef idx="2">
+            <a:schemeClr val="accent1"/>
+          </a:effectRef>
+          <a:fontRef idx="minor">
+            <a:schemeClr val="lt1"/>
+          </a:fontRef>
+        </p:style>
+        <p:txBody>
+          <a:bodyPr rtlCol="0" anchor="ctr" wrap="square"/>
+          <a:lstStyle/>
+          <a:p>
+            <a:pPr algn="ctr"/>
+            <a:r>
+              <a:rPr sz="1200" b="1">
+                <a:solidFill>
+                  <a:srgbClr val="1A2238"/>
+                </a:solidFill>
+              </a:rPr>
+              <a:t>one row's truth</a:t>
+            </a:r>
+          </a:p>
+          <a:p>
+            <a:pPr algn="ctr"/>
+            <a:r>
+              <a:rPr sz="900" b="0">
+                <a:solidFill>
+                  <a:srgbClr val="8A93A3"/>
+                </a:solidFill>
+              </a:rPr>
+              <a:t>bulk X . draw 17 . rung 50</a:t>
+            </a:r>
+          </a:p>
+          <a:p>
+            <a:pPr algn="ctr"/>
+            <a:r>
+              <a:rPr sz="900" b="0">
+                <a:solidFill>
+                  <a:srgbClr val="8A93A3"/>
+                </a:solidFill>
+              </a:rPr>
+              <a:t>present: plag cpx amp ilm</a:t>
+            </a:r>
+          </a:p>
+          <a:p>
+            <a:pPr algn="ctr"/>
+            <a:r>
+              <a:rPr sz="900" b="0">
+                <a:solidFill>
+                  <a:srgbClr val="8A93A3"/>
+                </a:solidFill>
+              </a:rPr>
+              <a:t>modes: .44  .26  .19  .11</a:t>
+            </a:r>
+          </a:p>
+          <a:p>
+            <a:pPr algn="ctr"/>
+            <a:r>
+              <a:rPr sz="900" b="0">
+                <a:solidFill>
+                  <a:srgbClr val="8A93A3"/>
+                </a:solidFill>
+              </a:rPr>
+              <a:t>(crystals-renormalized, sum 1)</a:t>
+            </a:r>
+          </a:p>
+        </p:txBody>
+      </p:sp>
+      <p:sp>
+        <p:nvSpPr>
+          <p:cNvPr id="6" name="Right Arrow 5"/>
+          <p:cNvSpPr/>
+          <p:nvPr/>
+        </p:nvSpPr>
+        <p:spPr>
+          <a:xfrm>
+            <a:off x="3337560" y="2651760"/>
+            <a:ext cx="365760" cy="320040"/>
+          </a:xfrm>
+          <a:prstGeom prst="rightArrow">
+            <a:avLst/>
+          </a:prstGeom>
+          <a:solidFill>
+            <a:srgbClr val="1A2238"/>
+          </a:solidFill>
+          <a:ln>
+            <a:noFill/>
+          </a:ln>
+          <a:effectLst/>
+        </p:spPr>
+        <p:style>
+          <a:lnRef idx="1">
+            <a:schemeClr val="accent1"/>
+          </a:lnRef>
+          <a:fillRef idx="3">
+            <a:schemeClr val="accent1"/>
+          </a:fillRef>
+          <a:effectRef idx="2">
+            <a:schemeClr val="accent1"/>
+          </a:effectRef>
+          <a:fontRef idx="minor">
+            <a:schemeClr val="lt1"/>
+          </a:fontRef>
+        </p:style>
+        <p:txBody>
+          <a:bodyPr rtlCol="0" anchor="ctr"/>
+          <a:lstStyle/>
+          <a:p>
+            <a:pPr algn="ctr"/>
+          </a:p>
+        </p:txBody>
+      </p:sp>
+      <p:sp>
+        <p:nvSpPr>
+          <p:cNvPr id="7" name="Rounded Rectangle 6"/>
+          <p:cNvSpPr/>
+          <p:nvPr/>
+        </p:nvSpPr>
+        <p:spPr>
+          <a:xfrm>
+            <a:off x="3794760" y="1920240"/>
+            <a:ext cx="2743200" cy="1828800"/>
+          </a:xfrm>
+          <a:prstGeom prst="roundRect">
+            <a:avLst/>
+          </a:prstGeom>
+          <a:solidFill>
+            <a:srgbClr val="FBEEE3"/>
+          </a:solidFill>
+          <a:ln w="25400">
+            <a:solidFill>
+              <a:srgbClr val="E8883A"/>
+            </a:solidFill>
+          </a:ln>
+          <a:effectLst/>
+        </p:spPr>
+        <p:style>
+          <a:lnRef idx="1">
+            <a:schemeClr val="accent1"/>
+          </a:lnRef>
+          <a:fillRef idx="3">
+            <a:schemeClr val="accent1"/>
+          </a:fillRef>
+          <a:effectRef idx="2">
+            <a:schemeClr val="accent1"/>
+          </a:effectRef>
+          <a:fontRef idx="minor">
+            <a:schemeClr val="lt1"/>
+          </a:fontRef>
+        </p:style>
+        <p:txBody>
+          <a:bodyPr rtlCol="0" anchor="ctr" wrap="square"/>
+          <a:lstStyle/>
+          <a:p>
+            <a:pPr algn="ctr"/>
+            <a:r>
+              <a:rPr sz="1200" b="1">
+                <a:solidFill>
+                  <a:srgbClr val="1A2238"/>
+                </a:solidFill>
+              </a:rPr>
+              <a:t>head output for bulk X</a:t>
+            </a:r>
+          </a:p>
+          <a:p>
+            <a:pPr algn="ctr"/>
+            <a:r>
+              <a:rPr sz="900" b="0">
+                <a:solidFill>
+                  <a:srgbClr val="8A93A3"/>
+                </a:solidFill>
+              </a:rPr>
+              <a:t>alpha, sliced to the true support:</a:t>
+            </a:r>
+          </a:p>
+          <a:p>
+            <a:pPr algn="ctr"/>
+            <a:r>
+              <a:rPr sz="900" b="0">
+                <a:solidFill>
+                  <a:srgbClr val="8A93A3"/>
+                </a:solidFill>
+              </a:rPr>
+              <a:t>plag 12.0    cpx 7.0</a:t>
+            </a:r>
+          </a:p>
+          <a:p>
+            <a:pPr algn="ctr"/>
+            <a:r>
+              <a:rPr sz="900" b="0">
+                <a:solidFill>
+                  <a:srgbClr val="8A93A3"/>
+                </a:solidFill>
+              </a:rPr>
+              <a:t>amp 4.5      ilm 1.5</a:t>
+            </a:r>
+          </a:p>
+          <a:p>
+            <a:pPr algn="ctr"/>
+            <a:r>
+              <a:rPr sz="900" b="0">
+                <a:solidFill>
+                  <a:srgbClr val="8A93A3"/>
+                </a:solidFill>
+              </a:rPr>
+              <a:t>alpha0 = sum = 25 (confidence)</a:t>
+            </a:r>
+          </a:p>
+        </p:txBody>
+      </p:sp>
+      <p:sp>
+        <p:nvSpPr>
+          <p:cNvPr id="8" name="Right Arrow 7"/>
+          <p:cNvSpPr/>
+          <p:nvPr/>
+        </p:nvSpPr>
+        <p:spPr>
+          <a:xfrm>
+            <a:off x="6629400" y="2651760"/>
+            <a:ext cx="365760" cy="320040"/>
+          </a:xfrm>
+          <a:prstGeom prst="rightArrow">
+            <a:avLst/>
+          </a:prstGeom>
+          <a:solidFill>
+            <a:srgbClr val="1A2238"/>
+          </a:solidFill>
+          <a:ln>
+            <a:noFill/>
+          </a:ln>
+          <a:effectLst/>
+        </p:spPr>
+        <p:style>
+          <a:lnRef idx="1">
+            <a:schemeClr val="accent1"/>
+          </a:lnRef>
+          <a:fillRef idx="3">
+            <a:schemeClr val="accent1"/>
+          </a:fillRef>
+          <a:effectRef idx="2">
+            <a:schemeClr val="accent1"/>
+          </a:effectRef>
+          <a:fontRef idx="minor">
+            <a:schemeClr val="lt1"/>
+          </a:fontRef>
+        </p:style>
+        <p:txBody>
+          <a:bodyPr rtlCol="0" anchor="ctr"/>
+          <a:lstStyle/>
+          <a:p>
+            <a:pPr algn="ctr"/>
+          </a:p>
+        </p:txBody>
+      </p:sp>
+      <p:sp>
+        <p:nvSpPr>
+          <p:cNvPr id="9" name="Rounded Rectangle 8"/>
+          <p:cNvSpPr/>
+          <p:nvPr/>
+        </p:nvSpPr>
+        <p:spPr>
+          <a:xfrm>
+            <a:off x="7086600" y="1920240"/>
+            <a:ext cx="2743200" cy="1828800"/>
+          </a:xfrm>
+          <a:prstGeom prst="roundRect">
+            <a:avLst/>
+          </a:prstGeom>
+          <a:solidFill>
+            <a:srgbClr val="EAE8FB"/>
+          </a:solidFill>
+          <a:ln w="25400">
+            <a:solidFill>
+              <a:srgbClr val="6C5CE7"/>
+            </a:solidFill>
+          </a:ln>
+          <a:effectLst/>
+        </p:spPr>
+        <p:style>
+          <a:lnRef idx="1">
+            <a:schemeClr val="accent1"/>
+          </a:lnRef>
+          <a:fillRef idx="3">
+            <a:schemeClr val="accent1"/>
+          </a:fillRef>
+          <a:effectRef idx="2">
+            <a:schemeClr val="accent1"/>
+          </a:effectRef>
+          <a:fontRef idx="minor">
+            <a:schemeClr val="lt1"/>
+          </a:fontRef>
+        </p:style>
+        <p:txBody>
+          <a:bodyPr rtlCol="0" anchor="ctr" wrap="square"/>
+          <a:lstStyle/>
+          <a:p>
+            <a:pPr algn="ctr"/>
+            <a:r>
+              <a:rPr sz="1200" b="1">
+                <a:solidFill>
+                  <a:srgbClr val="1A2238"/>
+                </a:solidFill>
+              </a:rPr>
+              <a:t>predicted mean +/- spread</a:t>
+            </a:r>
+          </a:p>
+          <a:p>
+            <a:pPr algn="ctr"/>
+            <a:r>
+              <a:rPr sz="900" b="0">
+                <a:solidFill>
+                  <a:srgbClr val="8A93A3"/>
+                </a:solidFill>
+              </a:rPr>
+              <a:t>plag 0.48 +/- 0.10   (true .44)</a:t>
+            </a:r>
+          </a:p>
+          <a:p>
+            <a:pPr algn="ctr"/>
+            <a:r>
+              <a:rPr sz="900" b="0">
+                <a:solidFill>
+                  <a:srgbClr val="8A93A3"/>
+                </a:solidFill>
+              </a:rPr>
+              <a:t>cpx 0.28 +/- 0.09   (true .26)</a:t>
+            </a:r>
+          </a:p>
+          <a:p>
+            <a:pPr algn="ctr"/>
+            <a:r>
+              <a:rPr sz="900" b="0">
+                <a:solidFill>
+                  <a:srgbClr val="8A93A3"/>
+                </a:solidFill>
+              </a:rPr>
+              <a:t>amp 0.18 +/- 0.08   (true .19)</a:t>
+            </a:r>
+          </a:p>
+          <a:p>
+            <a:pPr algn="ctr"/>
+            <a:r>
+              <a:rPr sz="900" b="0">
+                <a:solidFill>
+                  <a:srgbClr val="8A93A3"/>
+                </a:solidFill>
+              </a:rPr>
+              <a:t>ilm 0.06 +/- 0.05   (true .11)</a:t>
+            </a:r>
+          </a:p>
+        </p:txBody>
+      </p:sp>
+      <p:sp>
+        <p:nvSpPr>
+          <p:cNvPr id="10" name="Freeform 9"/>
+          <p:cNvSpPr/>
+          <p:nvPr/>
+        </p:nvSpPr>
+        <p:spPr>
+          <a:xfrm>
+            <a:off x="10104120" y="2240280"/>
+            <a:ext cx="1828800" cy="1051560"/>
+          </a:xfrm>
+          <a:custGeom>
+            <a:avLst/>
+            <a:gdLst/>
+            <a:ahLst/>
+            <a:cxnLst/>
+            <a:rect l="l" t="t" r="r" b="b"/>
+            <a:pathLst>
+              <a:path w="1828800" h="1051560">
+                <a:moveTo>
+                  <a:pt x="0" y="1051560"/>
+                </a:moveTo>
+                <a:lnTo>
+                  <a:pt x="0" y="1051549"/>
+                </a:lnTo>
+                <a:lnTo>
+                  <a:pt x="38100" y="1051532"/>
+                </a:lnTo>
+                <a:lnTo>
+                  <a:pt x="76200" y="1051489"/>
+                </a:lnTo>
+                <a:lnTo>
+                  <a:pt x="114300" y="1051387"/>
+                </a:lnTo>
+                <a:lnTo>
+                  <a:pt x="152400" y="1051157"/>
+                </a:lnTo>
+                <a:lnTo>
+                  <a:pt x="190500" y="1050659"/>
+                </a:lnTo>
+                <a:lnTo>
+                  <a:pt x="228600" y="1049631"/>
+                </a:lnTo>
+                <a:lnTo>
+                  <a:pt x="266700" y="1047606"/>
+                </a:lnTo>
+                <a:lnTo>
+                  <a:pt x="304800" y="1043798"/>
+                </a:lnTo>
+                <a:lnTo>
+                  <a:pt x="342900" y="1036971"/>
+                </a:lnTo>
+                <a:lnTo>
+                  <a:pt x="381000" y="1025303"/>
+                </a:lnTo>
+                <a:lnTo>
+                  <a:pt x="419100" y="1006310"/>
+                </a:lnTo>
+                <a:lnTo>
+                  <a:pt x="457200" y="976891"/>
+                </a:lnTo>
+                <a:lnTo>
+                  <a:pt x="495300" y="933578"/>
+                </a:lnTo>
+                <a:lnTo>
+                  <a:pt x="533400" y="873059"/>
+                </a:lnTo>
+                <a:lnTo>
+                  <a:pt x="571500" y="792967"/>
+                </a:lnTo>
+                <a:lnTo>
+                  <a:pt x="609600" y="692851"/>
+                </a:lnTo>
+                <a:lnTo>
+                  <a:pt x="647700" y="575109"/>
+                </a:lnTo>
+                <a:lnTo>
+                  <a:pt x="685800" y="445599"/>
+                </a:lnTo>
+                <a:lnTo>
+                  <a:pt x="723900" y="313619"/>
+                </a:lnTo>
+                <a:lnTo>
+                  <a:pt x="762000" y="191063"/>
+                </a:lnTo>
+                <a:lnTo>
+                  <a:pt x="800100" y="90773"/>
+                </a:lnTo>
+                <a:lnTo>
+                  <a:pt x="838200" y="24359"/>
+                </a:lnTo>
+                <a:lnTo>
+                  <a:pt x="876300" y="0"/>
+                </a:lnTo>
+                <a:lnTo>
+                  <a:pt x="914400" y="20786"/>
+                </a:lnTo>
+                <a:lnTo>
+                  <a:pt x="952500" y="84078"/>
+                </a:lnTo>
+                <a:lnTo>
+                  <a:pt x="990600" y="182053"/>
+                </a:lnTo>
+                <a:lnTo>
+                  <a:pt x="1028700" y="303298"/>
+                </a:lnTo>
+                <a:lnTo>
+                  <a:pt x="1066800" y="434987"/>
+                </a:lnTo>
+                <a:lnTo>
+                  <a:pt x="1104900" y="565079"/>
+                </a:lnTo>
+                <a:lnTo>
+                  <a:pt x="1143000" y="684026"/>
+                </a:lnTo>
+                <a:lnTo>
+                  <a:pt x="1181100" y="785683"/>
+                </a:lnTo>
+                <a:lnTo>
+                  <a:pt x="1219200" y="867393"/>
+                </a:lnTo>
+                <a:lnTo>
+                  <a:pt x="1257300" y="929409"/>
+                </a:lnTo>
+                <a:lnTo>
+                  <a:pt x="1295400" y="973983"/>
+                </a:lnTo>
+                <a:lnTo>
+                  <a:pt x="1333500" y="1004385"/>
+                </a:lnTo>
+                <a:lnTo>
+                  <a:pt x="1371600" y="1024090"/>
+                </a:lnTo>
+                <a:lnTo>
+                  <a:pt x="1409700" y="1036244"/>
+                </a:lnTo>
+                <a:lnTo>
+                  <a:pt x="1447800" y="1043383"/>
+                </a:lnTo>
+                <a:lnTo>
+                  <a:pt x="1485900" y="1047380"/>
+                </a:lnTo>
+                <a:lnTo>
+                  <a:pt x="1524000" y="1049514"/>
+                </a:lnTo>
+                <a:lnTo>
+                  <a:pt x="1562100" y="1050601"/>
+                </a:lnTo>
+                <a:lnTo>
+                  <a:pt x="1600200" y="1051129"/>
+                </a:lnTo>
+                <a:lnTo>
+                  <a:pt x="1638300" y="1051375"/>
+                </a:lnTo>
+                <a:lnTo>
+                  <a:pt x="1676400" y="1051483"/>
+                </a:lnTo>
+                <a:lnTo>
+                  <a:pt x="1714500" y="1051530"/>
+                </a:lnTo>
+                <a:lnTo>
+                  <a:pt x="1752600" y="1051548"/>
+                </a:lnTo>
+                <a:lnTo>
+                  <a:pt x="1790700" y="1051555"/>
+                </a:lnTo>
+                <a:lnTo>
+                  <a:pt x="1828800" y="1051558"/>
+                </a:lnTo>
+                <a:lnTo>
+                  <a:pt x="1828800" y="1051560"/>
+                </a:lnTo>
+                <a:close/>
+              </a:path>
+            </a:pathLst>
+          </a:custGeom>
+          <a:solidFill>
+            <a:srgbClr val="D5D1F8"/>
+          </a:solidFill>
+          <a:ln w="25400">
+            <a:solidFill>
+              <a:srgbClr val="6C5CE7"/>
+            </a:solidFill>
+          </a:ln>
+          <a:effectLst/>
+        </p:spPr>
+        <p:style>
+          <a:lnRef idx="1">
+            <a:schemeClr val="accent1"/>
+          </a:lnRef>
+          <a:fillRef idx="3">
+            <a:schemeClr val="accent1"/>
+          </a:fillRef>
+          <a:effectRef idx="2">
+            <a:schemeClr val="accent1"/>
+          </a:effectRef>
+          <a:fontRef idx="minor">
+            <a:schemeClr val="lt1"/>
+          </a:fontRef>
+        </p:style>
+        <p:txBody>
+          <a:bodyPr rtlCol="0" anchor="ctr"/>
+          <a:lstStyle/>
+          <a:p>
+            <a:pPr algn="ctr"/>
+          </a:p>
+        </p:txBody>
+      </p:sp>
+      <p:cxnSp>
+        <p:nvCxnSpPr>
+          <p:cNvPr id="11" name="Connector 10"/>
+          <p:cNvCxnSpPr/>
+          <p:nvPr/>
+        </p:nvCxnSpPr>
+        <p:spPr>
+          <a:xfrm>
+            <a:off x="10104120" y="3291840"/>
+            <a:ext cx="1828800" cy="0"/>
+          </a:xfrm>
+          <a:prstGeom prst="bentConnector3">
+            <a:avLst/>
+          </a:prstGeom>
+          <a:ln w="12700">
+            <a:solidFill>
+              <a:srgbClr val="8A93A3"/>
+            </a:solidFill>
+          </a:ln>
+          <a:effectLst/>
+        </p:spPr>
+        <p:style>
+          <a:lnRef idx="2">
+            <a:schemeClr val="accent1"/>
+          </a:lnRef>
+          <a:fillRef idx="0">
+            <a:schemeClr val="accent1"/>
+          </a:fillRef>
+          <a:effectRef idx="1">
+            <a:schemeClr val="accent1"/>
+          </a:effectRef>
+          <a:fontRef idx="minor">
+            <a:schemeClr val="tx1"/>
+          </a:fontRef>
+        </p:style>
+      </p:cxnSp>
+      <p:sp>
+        <p:nvSpPr>
+          <p:cNvPr id="12" name="TextBox 11"/>
+          <p:cNvSpPr txBox="1"/>
+          <p:nvPr/>
+        </p:nvSpPr>
+        <p:spPr>
+          <a:xfrm>
+            <a:off x="9921240" y="3337560"/>
+            <a:ext cx="2194560" cy="365760"/>
+          </a:xfrm>
+          <a:prstGeom prst="rect">
+            <a:avLst/>
+          </a:prstGeom>
+          <a:noFill/>
+        </p:spPr>
+        <p:txBody>
+          <a:bodyPr wrap="square">
+            <a:spAutoFit/>
+          </a:bodyPr>
+          <a:lstStyle/>
+          <a:p>
+            <a:pPr algn="ctr"/>
+            <a:r>
+              <a:rPr sz="1200" b="1">
+                <a:solidFill>
+                  <a:srgbClr val="1A2238"/>
+                </a:solidFill>
+              </a:rPr>
+              <a:t>plag marginal: Beta(12, 13)</a:t>
+            </a:r>
+          </a:p>
+        </p:txBody>
+      </p:sp>
+      <p:cxnSp>
+        <p:nvCxnSpPr>
+          <p:cNvPr id="13" name="Connector 12"/>
+          <p:cNvCxnSpPr/>
+          <p:nvPr/>
+        </p:nvCxnSpPr>
+        <p:spPr>
+          <a:xfrm flipV="1">
+            <a:off x="10908792" y="2103120"/>
+            <a:ext cx="0" cy="1188720"/>
+          </a:xfrm>
+          <a:prstGeom prst="bentConnector3">
+            <a:avLst/>
+          </a:prstGeom>
+          <a:ln w="25400">
+            <a:solidFill>
+              <a:srgbClr val="2A9D8F"/>
+            </a:solidFill>
+          </a:ln>
+          <a:effectLst/>
+        </p:spPr>
+        <p:style>
+          <a:lnRef idx="2">
+            <a:schemeClr val="accent1"/>
+          </a:lnRef>
+          <a:fillRef idx="0">
+            <a:schemeClr val="accent1"/>
+          </a:fillRef>
+          <a:effectRef idx="1">
+            <a:schemeClr val="accent1"/>
+          </a:effectRef>
+          <a:fontRef idx="minor">
+            <a:schemeClr val="tx1"/>
+          </a:fontRef>
+        </p:style>
+      </p:cxnSp>
+      <p:sp>
+        <p:nvSpPr>
+          <p:cNvPr id="14" name="TextBox 13"/>
+          <p:cNvSpPr txBox="1"/>
+          <p:nvPr/>
+        </p:nvSpPr>
+        <p:spPr>
+          <a:xfrm>
+            <a:off x="9875520" y="1737360"/>
+            <a:ext cx="2286000" cy="731520"/>
+          </a:xfrm>
+          <a:prstGeom prst="rect">
+            <a:avLst/>
+          </a:prstGeom>
+          <a:noFill/>
+        </p:spPr>
+        <p:txBody>
+          <a:bodyPr wrap="square">
+            <a:spAutoFit/>
+          </a:bodyPr>
+          <a:lstStyle/>
+          <a:p>
+            <a:pPr algn="ctr"/>
+            <a:r>
+              <a:rPr sz="1000" b="0">
+                <a:solidFill>
+                  <a:srgbClr val="2A9D8F"/>
+                </a:solidFill>
+              </a:rPr>
+              <a:t>truth 0.44 -&gt; PIT 0.34</a:t>
+            </a:r>
+          </a:p>
+        </p:txBody>
+      </p:sp>
+      <p:sp>
+        <p:nvSpPr>
+          <p:cNvPr id="15" name="TextBox 14"/>
+          <p:cNvSpPr txBox="1"/>
+          <p:nvPr/>
+        </p:nvSpPr>
+        <p:spPr>
+          <a:xfrm>
+            <a:off x="502920" y="4160520"/>
+            <a:ext cx="11155680" cy="731520"/>
+          </a:xfrm>
+          <a:prstGeom prst="rect">
+            <a:avLst/>
+          </a:prstGeom>
+          <a:noFill/>
+        </p:spPr>
+        <p:txBody>
+          <a:bodyPr wrap="square">
+            <a:spAutoFit/>
+          </a:bodyPr>
+          <a:lstStyle/>
+          <a:p>
+            <a:pPr algn="l"/>
+            <a:r>
+              <a:rPr sz="1100" b="0">
+                <a:solidFill>
+                  <a:srgbClr val="1A2238"/>
+                </a:solidFill>
+              </a:rPr>
+              <a:t>each present phase's marginal is a Beta distribution; PIT = where the truth lands inside it (its CDF value). Over many rows a flat PIT histogram means the spread is honest; a U means overconfident (truth keeps escaping the claimed range), a hump means underconfident.</a:t>
+            </a:r>
+          </a:p>
+        </p:txBody>
+      </p:sp>
+      <p:sp>
+        <p:nvSpPr>
+          <p:cNvPr id="16" name="TextBox 15"/>
+          <p:cNvSpPr txBox="1"/>
+          <p:nvPr/>
+        </p:nvSpPr>
+        <p:spPr>
+          <a:xfrm>
+            <a:off x="502920" y="4892040"/>
+            <a:ext cx="11155680" cy="731520"/>
+          </a:xfrm>
+          <a:prstGeom prst="rect">
+            <a:avLst/>
+          </a:prstGeom>
+          <a:noFill/>
+        </p:spPr>
+        <p:txBody>
+          <a:bodyPr wrap="square">
+            <a:spAutoFit/>
+          </a:bodyPr>
+          <a:lstStyle/>
+          <a:p>
+            <a:pPr algn="l"/>
+            <a:r>
+              <a:rPr sz="1100" b="0">
+                <a:solidFill>
+                  <a:srgbClr val="1A2238"/>
+                </a:solidFill>
+              </a:rPr>
+              <a:t>the support is teacher-forced: training and this eval slice alpha to the row's TRUE present set (absent phases contribute nothing -- they belong to the Bernoullis; the sub-composition of a Dirichlet is itself a Dirichlet, so the sliced score is a proper density). At inference the support is sampled from the presence branch instead.</a:t>
+            </a:r>
+          </a:p>
+        </p:txBody>
+      </p:sp>
+      <p:sp>
+        <p:nvSpPr>
+          <p:cNvPr id="17" name="TextBox 16"/>
+          <p:cNvSpPr txBox="1"/>
+          <p:nvPr/>
+        </p:nvSpPr>
+        <p:spPr>
+          <a:xfrm>
+            <a:off x="502920" y="5760720"/>
+            <a:ext cx="11155680" cy="731520"/>
+          </a:xfrm>
+          <a:prstGeom prst="rect">
+            <a:avLst/>
+          </a:prstGeom>
+          <a:noFill/>
+        </p:spPr>
+        <p:txBody>
+          <a:bodyPr wrap="square">
+            <a:spAutoFit/>
+          </a:bodyPr>
+          <a:lstStyle/>
+          <a:p>
+            <a:pPr algn="l"/>
+            <a:r>
+              <a:rPr sz="1000" b="0">
+                <a:solidFill>
+                  <a:srgbClr val="8A93A3"/>
+                </a:solidFill>
+              </a:rPr>
+              <a:t>population: only truly-present (row, phase) pairs are scored -- ~68k pairs for plag down to ~200 for corundum; single-phase rows are excluded (nothing to size). current limits (provisional): amphibole U-shaped PIT (spread too narrow; truth plausibly bimodal across paths), oxide accessories humped (too wide), plag under-sized. full report: results/mode_head/&lt;tag&gt;/ (magnitude_parity, magnitude_pit).</a:t>
+            </a:r>
+          </a:p>
+        </p:txBody>
+      </p:sp>
+    </p:spTree>
+  </p:cSld>
+  <p:clrMapOvr>
+    <a:masterClrMapping/>
+  </p:clrMapOvr>
+</p:sld>
+</file>
+
+<file path=ppt/slides/slide16.xml><?xml version="1.0" encoding="utf-8"?>
+<p:sld xmlns:a="http://schemas.openxmlformats.org/drawingml/2006/main" xmlns:p="http://schemas.openxmlformats.org/presentationml/2006/main" xmlns:r="http://schemas.openxmlformats.org/officeDocument/2006/relationships">
+  <p:cSld>
+    <p:spTree>
+      <p:nvGrpSpPr>
+        <p:cNvPr id="1" name=""/>
+        <p:cNvGrpSpPr/>
+        <p:nvPr/>
+      </p:nvGrpSpPr>
+      <p:grpSpPr/>
+      <p:sp>
+        <p:nvSpPr>
+          <p:cNvPr id="2" name="TextBox 1"/>
+          <p:cNvSpPr txBox="1"/>
+          <p:nvPr/>
+        </p:nvSpPr>
+        <p:spPr>
+          <a:xfrm>
+            <a:off x="502920" y="274320"/>
+            <a:ext cx="10972800" cy="365760"/>
+          </a:xfrm>
+          <a:prstGeom prst="rect">
+            <a:avLst/>
+          </a:prstGeom>
+          <a:noFill/>
+        </p:spPr>
+        <p:txBody>
+          <a:bodyPr wrap="square">
+            <a:spAutoFit/>
+          </a:bodyPr>
+          <a:lstStyle/>
+          <a:p>
+            <a:pPr algn="l"/>
+            <a:r>
+              <a:rPr sz="1300" b="1">
+                <a:solidFill>
+                  <a:srgbClr val="2E5BFF"/>
+                </a:solidFill>
+              </a:rPr>
+              <a:t>HEADS</a:t>
+            </a:r>
+          </a:p>
+        </p:txBody>
+      </p:sp>
+      <p:sp>
+        <p:nvSpPr>
+          <p:cNvPr id="3" name="TextBox 2"/>
+          <p:cNvSpPr txBox="1"/>
+          <p:nvPr/>
+        </p:nvSpPr>
+        <p:spPr>
+          <a:xfrm>
+            <a:off x="502920" y="603504"/>
+            <a:ext cx="11155680" cy="731520"/>
+          </a:xfrm>
+          <a:prstGeom prst="rect">
+            <a:avLst/>
+          </a:prstGeom>
+          <a:noFill/>
+        </p:spPr>
+        <p:txBody>
+          <a:bodyPr wrap="square">
+            <a:spAutoFit/>
+          </a:bodyPr>
+          <a:lstStyle/>
+          <a:p>
+            <a:pPr algn="l"/>
+            <a:r>
+              <a:rPr sz="2600" b="1">
+                <a:solidFill>
+                  <a:srgbClr val="1A2238"/>
+                </a:solidFill>
+              </a:rPr>
               <a:t>What the heads emit (distributions, not point estimates)</a:t>
             </a:r>
           </a:p>
@@ -12483,7 +13506,7 @@
 </p:sld>
 </file>
 
-<file path=ppt/slides/slide16.xml><?xml version="1.0" encoding="utf-8"?>
+<file path=ppt/slides/slide17.xml><?xml version="1.0" encoding="utf-8"?>
 <p:sld xmlns:a="http://schemas.openxmlformats.org/drawingml/2006/main" xmlns:p="http://schemas.openxmlformats.org/presentationml/2006/main" xmlns:r="http://schemas.openxmlformats.org/officeDocument/2006/relationships">
   <p:cSld>
     <p:spTree>

--- a/slides/overview.pptx
+++ b/slides/overview.pptx
@@ -938,7 +938,7 @@
           <a:lstStyle/>
           <a:p>
             <a:r>
-              <a:t>Eval-semantics slide for the magnitude branch, mirroring the presence branch's reliability worked example. Numbers illustrative but to scale: alpha sliced to the true 4-phase support gives Dirichlet means alpha_i/alpha0 and Beta marginals Beta(alpha_i, alpha0 - alpha_i); plag Beta(12,13) has mean 0.48, sd ~0.10, and truth 0.44 lands at CDF 0.34. alpha0 is the single shared confidence knob per row -- the reason per-phase spreads can't be tuned independently (see alpha_concentration.png). PIT histograms are the magnitude analog of reliability diagrams; parity plots are the point-estimate view. Scored by masked Dirichlet NLL (anatomy slide's L_magnitude).</a:t>
+              <a:t>Eval-semantics slide for the magnitude branch, mirroring the presence branch's reliability worked example. Laid out as two tracks converging at a scoring node: the prediction track never sees the truth's modes; the truth contributes only its support to the slice (teacher-forced) and meets the prediction at scoring. Numbers illustrative but to scale: alpha sliced to the true 4-phase support gives Dirichlet means alpha_i/alpha0 and Beta marginals Beta(alpha_i, alpha0 - alpha_i); plag Beta(12,13) has mean 0.48, sd ~0.10, and truth 0.44 lands at CDF 0.34. alpha0 is the single shared confidence knob per row -- the reason per-phase spreads can't be tuned independently (see alpha_concentration.png). PIT histograms are the magnitude analog of reliability diagrams; parity plots are the point-estimate view. Scored by masked Dirichlet NLL (anatomy slide's L_magnitude). Worked numbers for the expansion box: this row scores -4.34 nats (normalizer -28.37 + shape +24.03); scaling alpha x4 improves to -5.26 when truth is near the peak but explodes to +17.9 when truth swaps to the other hump (plag/amp values exchanged) -- the mechanism that pins amphibole's alpha0 low and its mean in the middle.</a:t>
             </a:r>
           </a:p>
         </p:txBody>
@@ -10350,7 +10350,7 @@
                   <a:srgbClr val="8A93A3"/>
                 </a:solidFill>
               </a:rPr>
-              <a:t>the magnitude branch's eval: slice the predicted concentrations to the row's true support, compare means to truth, and ask whether the claimed spread is honest (PIT)</a:t>
+              <a:t>the magnitude branch's eval: slice the predicted concentrations to the row's true support, then meet the truth at the scoring step -- are the means right, and is the claimed spread honest (PIT)?</a:t>
             </a:r>
           </a:p>
         </p:txBody>
@@ -10363,8 +10363,368 @@
         </p:nvSpPr>
         <p:spPr>
           <a:xfrm>
-            <a:off x="502920" y="1920240"/>
-            <a:ext cx="2743200" cy="1828800"/>
+            <a:off x="502920" y="1783080"/>
+            <a:ext cx="2560320" cy="1371600"/>
+          </a:xfrm>
+          <a:prstGeom prst="roundRect">
+            <a:avLst/>
+          </a:prstGeom>
+          <a:solidFill>
+            <a:srgbClr val="FBEEE3"/>
+          </a:solidFill>
+          <a:ln w="25400">
+            <a:solidFill>
+              <a:srgbClr val="E8883A"/>
+            </a:solidFill>
+          </a:ln>
+          <a:effectLst/>
+        </p:spPr>
+        <p:style>
+          <a:lnRef idx="1">
+            <a:schemeClr val="accent1"/>
+          </a:lnRef>
+          <a:fillRef idx="3">
+            <a:schemeClr val="accent1"/>
+          </a:fillRef>
+          <a:effectRef idx="2">
+            <a:schemeClr val="accent1"/>
+          </a:effectRef>
+          <a:fontRef idx="minor">
+            <a:schemeClr val="lt1"/>
+          </a:fontRef>
+        </p:style>
+        <p:txBody>
+          <a:bodyPr rtlCol="0" anchor="ctr" wrap="square"/>
+          <a:lstStyle/>
+          <a:p>
+            <a:pPr algn="ctr"/>
+            <a:r>
+              <a:rPr sz="1100" b="1">
+                <a:solidFill>
+                  <a:srgbClr val="1A2238"/>
+                </a:solidFill>
+              </a:rPr>
+              <a:t>head output for bulk X</a:t>
+            </a:r>
+          </a:p>
+          <a:p>
+            <a:pPr algn="ctr"/>
+            <a:r>
+              <a:rPr sz="800" b="0">
+                <a:solidFill>
+                  <a:srgbClr val="8A93A3"/>
+                </a:solidFill>
+              </a:rPr>
+              <a:t>alpha for all 21 phases,</a:t>
+            </a:r>
+          </a:p>
+          <a:p>
+            <a:pPr algn="ctr"/>
+            <a:r>
+              <a:rPr sz="800" b="0">
+                <a:solidFill>
+                  <a:srgbClr val="8A93A3"/>
+                </a:solidFill>
+              </a:rPr>
+              <a:t>computed from the latent --</a:t>
+            </a:r>
+          </a:p>
+          <a:p>
+            <a:pPr algn="ctr"/>
+            <a:r>
+              <a:rPr sz="800" b="0">
+                <a:solidFill>
+                  <a:srgbClr val="8A93A3"/>
+                </a:solidFill>
+              </a:rPr>
+              <a:t>truth is not an input</a:t>
+            </a:r>
+          </a:p>
+        </p:txBody>
+      </p:sp>
+      <p:sp>
+        <p:nvSpPr>
+          <p:cNvPr id="6" name="Right Arrow 5"/>
+          <p:cNvSpPr/>
+          <p:nvPr/>
+        </p:nvSpPr>
+        <p:spPr>
+          <a:xfrm>
+            <a:off x="3154680" y="2331720"/>
+            <a:ext cx="320040" cy="274320"/>
+          </a:xfrm>
+          <a:prstGeom prst="rightArrow">
+            <a:avLst/>
+          </a:prstGeom>
+          <a:solidFill>
+            <a:srgbClr val="1A2238"/>
+          </a:solidFill>
+          <a:ln>
+            <a:noFill/>
+          </a:ln>
+          <a:effectLst/>
+        </p:spPr>
+        <p:style>
+          <a:lnRef idx="1">
+            <a:schemeClr val="accent1"/>
+          </a:lnRef>
+          <a:fillRef idx="3">
+            <a:schemeClr val="accent1"/>
+          </a:fillRef>
+          <a:effectRef idx="2">
+            <a:schemeClr val="accent1"/>
+          </a:effectRef>
+          <a:fontRef idx="minor">
+            <a:schemeClr val="lt1"/>
+          </a:fontRef>
+        </p:style>
+        <p:txBody>
+          <a:bodyPr rtlCol="0" anchor="ctr"/>
+          <a:lstStyle/>
+          <a:p>
+            <a:pPr algn="ctr"/>
+          </a:p>
+        </p:txBody>
+      </p:sp>
+      <p:sp>
+        <p:nvSpPr>
+          <p:cNvPr id="7" name="Rounded Rectangle 6"/>
+          <p:cNvSpPr/>
+          <p:nvPr/>
+        </p:nvSpPr>
+        <p:spPr>
+          <a:xfrm>
+            <a:off x="3520440" y="1783080"/>
+            <a:ext cx="2560320" cy="1371600"/>
+          </a:xfrm>
+          <a:prstGeom prst="roundRect">
+            <a:avLst/>
+          </a:prstGeom>
+          <a:solidFill>
+            <a:srgbClr val="FBEEE3"/>
+          </a:solidFill>
+          <a:ln w="25400">
+            <a:solidFill>
+              <a:srgbClr val="E8883A"/>
+            </a:solidFill>
+          </a:ln>
+          <a:effectLst/>
+        </p:spPr>
+        <p:style>
+          <a:lnRef idx="1">
+            <a:schemeClr val="accent1"/>
+          </a:lnRef>
+          <a:fillRef idx="3">
+            <a:schemeClr val="accent1"/>
+          </a:fillRef>
+          <a:effectRef idx="2">
+            <a:schemeClr val="accent1"/>
+          </a:effectRef>
+          <a:fontRef idx="minor">
+            <a:schemeClr val="lt1"/>
+          </a:fontRef>
+        </p:style>
+        <p:txBody>
+          <a:bodyPr rtlCol="0" anchor="ctr" wrap="square"/>
+          <a:lstStyle/>
+          <a:p>
+            <a:pPr algn="ctr"/>
+            <a:r>
+              <a:rPr sz="1100" b="1">
+                <a:solidFill>
+                  <a:srgbClr val="1A2238"/>
+                </a:solidFill>
+              </a:rPr>
+              <a:t>alpha sliced to the support</a:t>
+            </a:r>
+          </a:p>
+          <a:p>
+            <a:pPr algn="ctr"/>
+            <a:r>
+              <a:rPr sz="800" b="0">
+                <a:solidFill>
+                  <a:srgbClr val="8A93A3"/>
+                </a:solidFill>
+              </a:rPr>
+              <a:t>plag 12.0    cpx 7.0</a:t>
+            </a:r>
+          </a:p>
+          <a:p>
+            <a:pPr algn="ctr"/>
+            <a:r>
+              <a:rPr sz="800" b="0">
+                <a:solidFill>
+                  <a:srgbClr val="8A93A3"/>
+                </a:solidFill>
+              </a:rPr>
+              <a:t>amp 4.5      ilm 1.5</a:t>
+            </a:r>
+          </a:p>
+          <a:p>
+            <a:pPr algn="ctr"/>
+            <a:r>
+              <a:rPr sz="800" b="0">
+                <a:solidFill>
+                  <a:srgbClr val="8A93A3"/>
+                </a:solidFill>
+              </a:rPr>
+              <a:t>alpha0 = sum = 25 (confidence)</a:t>
+            </a:r>
+          </a:p>
+        </p:txBody>
+      </p:sp>
+      <p:sp>
+        <p:nvSpPr>
+          <p:cNvPr id="8" name="Right Arrow 7"/>
+          <p:cNvSpPr/>
+          <p:nvPr/>
+        </p:nvSpPr>
+        <p:spPr>
+          <a:xfrm>
+            <a:off x="6172200" y="2331720"/>
+            <a:ext cx="320040" cy="274320"/>
+          </a:xfrm>
+          <a:prstGeom prst="rightArrow">
+            <a:avLst/>
+          </a:prstGeom>
+          <a:solidFill>
+            <a:srgbClr val="1A2238"/>
+          </a:solidFill>
+          <a:ln>
+            <a:noFill/>
+          </a:ln>
+          <a:effectLst/>
+        </p:spPr>
+        <p:style>
+          <a:lnRef idx="1">
+            <a:schemeClr val="accent1"/>
+          </a:lnRef>
+          <a:fillRef idx="3">
+            <a:schemeClr val="accent1"/>
+          </a:fillRef>
+          <a:effectRef idx="2">
+            <a:schemeClr val="accent1"/>
+          </a:effectRef>
+          <a:fontRef idx="minor">
+            <a:schemeClr val="lt1"/>
+          </a:fontRef>
+        </p:style>
+        <p:txBody>
+          <a:bodyPr rtlCol="0" anchor="ctr"/>
+          <a:lstStyle/>
+          <a:p>
+            <a:pPr algn="ctr"/>
+          </a:p>
+        </p:txBody>
+      </p:sp>
+      <p:sp>
+        <p:nvSpPr>
+          <p:cNvPr id="9" name="Rounded Rectangle 8"/>
+          <p:cNvSpPr/>
+          <p:nvPr/>
+        </p:nvSpPr>
+        <p:spPr>
+          <a:xfrm>
+            <a:off x="6537960" y="1783080"/>
+            <a:ext cx="2560320" cy="1371600"/>
+          </a:xfrm>
+          <a:prstGeom prst="roundRect">
+            <a:avLst/>
+          </a:prstGeom>
+          <a:solidFill>
+            <a:srgbClr val="EAE8FB"/>
+          </a:solidFill>
+          <a:ln w="25400">
+            <a:solidFill>
+              <a:srgbClr val="6C5CE7"/>
+            </a:solidFill>
+          </a:ln>
+          <a:effectLst/>
+        </p:spPr>
+        <p:style>
+          <a:lnRef idx="1">
+            <a:schemeClr val="accent1"/>
+          </a:lnRef>
+          <a:fillRef idx="3">
+            <a:schemeClr val="accent1"/>
+          </a:fillRef>
+          <a:effectRef idx="2">
+            <a:schemeClr val="accent1"/>
+          </a:effectRef>
+          <a:fontRef idx="minor">
+            <a:schemeClr val="lt1"/>
+          </a:fontRef>
+        </p:style>
+        <p:txBody>
+          <a:bodyPr rtlCol="0" anchor="ctr" wrap="square"/>
+          <a:lstStyle/>
+          <a:p>
+            <a:pPr algn="ctr"/>
+            <a:r>
+              <a:rPr sz="1100" b="1">
+                <a:solidFill>
+                  <a:srgbClr val="1A2238"/>
+                </a:solidFill>
+              </a:rPr>
+              <a:t>predicted mean +/- spread</a:t>
+            </a:r>
+          </a:p>
+          <a:p>
+            <a:pPr algn="ctr"/>
+            <a:r>
+              <a:rPr sz="800" b="0">
+                <a:solidFill>
+                  <a:srgbClr val="8A93A3"/>
+                </a:solidFill>
+              </a:rPr>
+              <a:t>plag 0.48 +/- 0.10</a:t>
+            </a:r>
+          </a:p>
+          <a:p>
+            <a:pPr algn="ctr"/>
+            <a:r>
+              <a:rPr sz="800" b="0">
+                <a:solidFill>
+                  <a:srgbClr val="8A93A3"/>
+                </a:solidFill>
+              </a:rPr>
+              <a:t>cpx 0.28 +/- 0.09</a:t>
+            </a:r>
+          </a:p>
+          <a:p>
+            <a:pPr algn="ctr"/>
+            <a:r>
+              <a:rPr sz="800" b="0">
+                <a:solidFill>
+                  <a:srgbClr val="8A93A3"/>
+                </a:solidFill>
+              </a:rPr>
+              <a:t>amp 0.18 +/- 0.08</a:t>
+            </a:r>
+          </a:p>
+          <a:p>
+            <a:pPr algn="ctr"/>
+            <a:r>
+              <a:rPr sz="800" b="0">
+                <a:solidFill>
+                  <a:srgbClr val="8A93A3"/>
+                </a:solidFill>
+              </a:rPr>
+              <a:t>ilm 0.06 +/- 0.05</a:t>
+            </a:r>
+          </a:p>
+        </p:txBody>
+      </p:sp>
+      <p:sp>
+        <p:nvSpPr>
+          <p:cNvPr id="10" name="Rounded Rectangle 9"/>
+          <p:cNvSpPr/>
+          <p:nvPr/>
+        </p:nvSpPr>
+        <p:spPr>
+          <a:xfrm>
+            <a:off x="502920" y="3429000"/>
+            <a:ext cx="2560320" cy="1188720"/>
           </a:xfrm>
           <a:prstGeom prst="roundRect">
             <a:avLst/>
@@ -10399,7 +10759,7 @@
           <a:p>
             <a:pPr algn="ctr"/>
             <a:r>
-              <a:rPr sz="1200" b="1">
+              <a:rPr sz="1100" b="1">
                 <a:solidFill>
                   <a:srgbClr val="1A2238"/>
                 </a:solidFill>
@@ -10410,7 +10770,7 @@
           <a:p>
             <a:pPr algn="ctr"/>
             <a:r>
-              <a:rPr sz="900" b="0">
+              <a:rPr sz="800" b="0">
                 <a:solidFill>
                   <a:srgbClr val="8A93A3"/>
                 </a:solidFill>
@@ -10421,7 +10781,7 @@
           <a:p>
             <a:pPr algn="ctr"/>
             <a:r>
-              <a:rPr sz="900" b="0">
+              <a:rPr sz="800" b="0">
                 <a:solidFill>
                   <a:srgbClr val="8A93A3"/>
                 </a:solidFill>
@@ -10432,7 +10792,7 @@
           <a:p>
             <a:pPr algn="ctr"/>
             <a:r>
-              <a:rPr sz="900" b="0">
+              <a:rPr sz="800" b="0">
                 <a:solidFill>
                   <a:srgbClr val="8A93A3"/>
                 </a:solidFill>
@@ -10440,29 +10800,18 @@
               <a:t>modes: .44  .26  .19  .11</a:t>
             </a:r>
           </a:p>
-          <a:p>
-            <a:pPr algn="ctr"/>
-            <a:r>
-              <a:rPr sz="900" b="0">
-                <a:solidFill>
-                  <a:srgbClr val="8A93A3"/>
-                </a:solidFill>
-              </a:rPr>
-              <a:t>(crystals-renormalized, sum 1)</a:t>
-            </a:r>
-          </a:p>
-        </p:txBody>
-      </p:sp>
-      <p:sp>
-        <p:nvSpPr>
-          <p:cNvPr id="6" name="Right Arrow 5"/>
+        </p:txBody>
+      </p:sp>
+      <p:sp>
+        <p:nvSpPr>
+          <p:cNvPr id="11" name="Right Arrow 10"/>
           <p:cNvSpPr/>
           <p:nvPr/>
         </p:nvSpPr>
         <p:spPr>
           <a:xfrm>
-            <a:off x="3337560" y="2651760"/>
-            <a:ext cx="365760" cy="320040"/>
+            <a:off x="3154680" y="3886200"/>
+            <a:ext cx="320040" cy="274320"/>
           </a:xfrm>
           <a:prstGeom prst="rightArrow">
             <a:avLst/>
@@ -10499,24 +10848,24 @@
       </p:sp>
       <p:sp>
         <p:nvSpPr>
-          <p:cNvPr id="7" name="Rounded Rectangle 6"/>
+          <p:cNvPr id="12" name="Rounded Rectangle 11"/>
           <p:cNvSpPr/>
           <p:nvPr/>
         </p:nvSpPr>
         <p:spPr>
           <a:xfrm>
-            <a:off x="3794760" y="1920240"/>
-            <a:ext cx="2743200" cy="1828800"/>
+            <a:off x="3520440" y="3429000"/>
+            <a:ext cx="2560320" cy="1188720"/>
           </a:xfrm>
           <a:prstGeom prst="roundRect">
             <a:avLst/>
           </a:prstGeom>
           <a:solidFill>
-            <a:srgbClr val="FBEEE3"/>
+            <a:srgbClr val="E1E8FF"/>
           </a:solidFill>
           <a:ln w="25400">
             <a:solidFill>
-              <a:srgbClr val="E8883A"/>
+              <a:srgbClr val="2E5BFF"/>
             </a:solidFill>
           </a:ln>
           <a:effectLst/>
@@ -10541,122 +10890,123 @@
           <a:p>
             <a:pPr algn="ctr"/>
             <a:r>
-              <a:rPr sz="1200" b="1">
+              <a:rPr sz="1100" b="1">
                 <a:solidFill>
                   <a:srgbClr val="1A2238"/>
                 </a:solidFill>
               </a:rPr>
-              <a:t>head output for bulk X</a:t>
-            </a:r>
-          </a:p>
-          <a:p>
-            <a:pPr algn="ctr"/>
+              <a:t>scoring -- truth meets prediction</a:t>
+            </a:r>
+          </a:p>
+          <a:p>
+            <a:pPr algn="ctr"/>
+            <a:r>
+              <a:rPr sz="800" b="0">
+                <a:solidFill>
+                  <a:srgbClr val="8A93A3"/>
+                </a:solidFill>
+              </a:rPr>
+              <a:t>eval: PIT of each true mode</a:t>
+            </a:r>
+          </a:p>
+          <a:p>
+            <a:pPr algn="ctr"/>
+            <a:r>
+              <a:rPr sz="800" b="0">
+                <a:solidFill>
+                  <a:srgbClr val="8A93A3"/>
+                </a:solidFill>
+              </a:rPr>
+              <a:t>train: masked Dirichlet NLL</a:t>
+            </a:r>
+          </a:p>
+        </p:txBody>
+      </p:sp>
+      <p:cxnSp>
+        <p:nvCxnSpPr>
+          <p:cNvPr id="13" name="Connector 12"/>
+          <p:cNvCxnSpPr/>
+          <p:nvPr/>
+        </p:nvCxnSpPr>
+        <p:spPr>
+          <a:xfrm flipV="1">
+            <a:off x="2651760" y="3154680"/>
+            <a:ext cx="1280160" cy="274320"/>
+          </a:xfrm>
+          <a:prstGeom prst="bentConnector3">
+            <a:avLst/>
+          </a:prstGeom>
+          <a:ln w="19050">
+            <a:solidFill>
+              <a:srgbClr val="2A9D8F"/>
+            </a:solidFill>
+          </a:ln>
+          <a:effectLst/>
+        </p:spPr>
+        <p:style>
+          <a:lnRef idx="2">
+            <a:schemeClr val="accent1"/>
+          </a:lnRef>
+          <a:fillRef idx="0">
+            <a:schemeClr val="accent1"/>
+          </a:fillRef>
+          <a:effectRef idx="1">
+            <a:schemeClr val="accent1"/>
+          </a:effectRef>
+          <a:fontRef idx="minor">
+            <a:schemeClr val="tx1"/>
+          </a:fontRef>
+        </p:style>
+      </p:cxnSp>
+      <p:sp>
+        <p:nvSpPr>
+          <p:cNvPr id="14" name="TextBox 13"/>
+          <p:cNvSpPr txBox="1"/>
+          <p:nvPr/>
+        </p:nvSpPr>
+        <p:spPr>
+          <a:xfrm>
+            <a:off x="548640" y="3172968"/>
+            <a:ext cx="2377440" cy="731520"/>
+          </a:xfrm>
+          <a:prstGeom prst="rect">
+            <a:avLst/>
+          </a:prstGeom>
+          <a:noFill/>
+        </p:spPr>
+        <p:txBody>
+          <a:bodyPr wrap="square">
+            <a:spAutoFit/>
+          </a:bodyPr>
+          <a:lstStyle/>
+          <a:p>
+            <a:pPr algn="l"/>
             <a:r>
               <a:rPr sz="900" b="0">
                 <a:solidFill>
-                  <a:srgbClr val="8A93A3"/>
-                </a:solidFill>
-              </a:rPr>
-              <a:t>alpha, sliced to the true support:</a:t>
-            </a:r>
-          </a:p>
-          <a:p>
-            <a:pPr algn="ctr"/>
-            <a:r>
-              <a:rPr sz="900" b="0">
-                <a:solidFill>
-                  <a:srgbClr val="8A93A3"/>
-                </a:solidFill>
-              </a:rPr>
-              <a:t>plag 12.0    cpx 7.0</a:t>
-            </a:r>
-          </a:p>
-          <a:p>
-            <a:pPr algn="ctr"/>
-            <a:r>
-              <a:rPr sz="900" b="0">
-                <a:solidFill>
-                  <a:srgbClr val="8A93A3"/>
-                </a:solidFill>
-              </a:rPr>
-              <a:t>amp 4.5      ilm 1.5</a:t>
-            </a:r>
-          </a:p>
-          <a:p>
-            <a:pPr algn="ctr"/>
-            <a:r>
-              <a:rPr sz="900" b="0">
-                <a:solidFill>
-                  <a:srgbClr val="8A93A3"/>
-                </a:solidFill>
-              </a:rPr>
-              <a:t>alpha0 = sum = 25 (confidence)</a:t>
-            </a:r>
-          </a:p>
-        </p:txBody>
-      </p:sp>
-      <p:sp>
-        <p:nvSpPr>
-          <p:cNvPr id="8" name="Right Arrow 7"/>
-          <p:cNvSpPr/>
-          <p:nvPr/>
-        </p:nvSpPr>
-        <p:spPr>
-          <a:xfrm>
-            <a:off x="6629400" y="2651760"/>
-            <a:ext cx="365760" cy="320040"/>
-          </a:xfrm>
-          <a:prstGeom prst="rightArrow">
-            <a:avLst/>
-          </a:prstGeom>
-          <a:solidFill>
-            <a:srgbClr val="1A2238"/>
-          </a:solidFill>
-          <a:ln>
-            <a:noFill/>
-          </a:ln>
-          <a:effectLst/>
-        </p:spPr>
-        <p:style>
-          <a:lnRef idx="1">
-            <a:schemeClr val="accent1"/>
-          </a:lnRef>
-          <a:fillRef idx="3">
-            <a:schemeClr val="accent1"/>
-          </a:fillRef>
-          <a:effectRef idx="2">
-            <a:schemeClr val="accent1"/>
-          </a:effectRef>
-          <a:fontRef idx="minor">
-            <a:schemeClr val="lt1"/>
-          </a:fontRef>
-        </p:style>
-        <p:txBody>
-          <a:bodyPr rtlCol="0" anchor="ctr"/>
-          <a:lstStyle/>
-          <a:p>
-            <a:pPr algn="ctr"/>
-          </a:p>
-        </p:txBody>
-      </p:sp>
-      <p:sp>
-        <p:nvSpPr>
-          <p:cNvPr id="9" name="Rounded Rectangle 8"/>
-          <p:cNvSpPr/>
-          <p:nvPr/>
-        </p:nvSpPr>
-        <p:spPr>
-          <a:xfrm>
-            <a:off x="7086600" y="1920240"/>
-            <a:ext cx="2743200" cy="1828800"/>
-          </a:xfrm>
-          <a:prstGeom prst="roundRect">
-            <a:avLst/>
-          </a:prstGeom>
-          <a:solidFill>
-            <a:srgbClr val="EAE8FB"/>
-          </a:solidFill>
-          <a:ln w="25400">
+                  <a:srgbClr val="2A9D8F"/>
+                </a:solidFill>
+              </a:rPr>
+              <a:t>support only (which phases)</a:t>
+            </a:r>
+          </a:p>
+        </p:txBody>
+      </p:sp>
+      <p:cxnSp>
+        <p:nvCxnSpPr>
+          <p:cNvPr id="15" name="Connector 14"/>
+          <p:cNvCxnSpPr/>
+          <p:nvPr/>
+        </p:nvCxnSpPr>
+        <p:spPr>
+          <a:xfrm flipH="1">
+            <a:off x="6080760" y="3154680"/>
+            <a:ext cx="1737360" cy="777240"/>
+          </a:xfrm>
+          <a:prstGeom prst="bentConnector3">
+            <a:avLst/>
+          </a:prstGeom>
+          <a:ln w="19050">
             <a:solidFill>
               <a:srgbClr val="6C5CE7"/>
             </a:solidFill>
@@ -10664,6 +11014,45 @@
           <a:effectLst/>
         </p:spPr>
         <p:style>
+          <a:lnRef idx="2">
+            <a:schemeClr val="accent1"/>
+          </a:lnRef>
+          <a:fillRef idx="0">
+            <a:schemeClr val="accent1"/>
+          </a:fillRef>
+          <a:effectRef idx="1">
+            <a:schemeClr val="accent1"/>
+          </a:effectRef>
+          <a:fontRef idx="minor">
+            <a:schemeClr val="tx1"/>
+          </a:fontRef>
+        </p:style>
+      </p:cxnSp>
+      <p:sp>
+        <p:nvSpPr>
+          <p:cNvPr id="16" name="Rounded Rectangle 15"/>
+          <p:cNvSpPr/>
+          <p:nvPr/>
+        </p:nvSpPr>
+        <p:spPr>
+          <a:xfrm>
+            <a:off x="7315200" y="3429000"/>
+            <a:ext cx="4297680" cy="1188720"/>
+          </a:xfrm>
+          <a:prstGeom prst="roundRect">
+            <a:avLst/>
+          </a:prstGeom>
+          <a:solidFill>
+            <a:srgbClr val="FFFFFF"/>
+          </a:solidFill>
+          <a:ln w="12700">
+            <a:solidFill>
+              <a:srgbClr val="C8CDD6"/>
+            </a:solidFill>
+          </a:ln>
+          <a:effectLst/>
+        </p:spPr>
+        <p:style>
           <a:lnRef idx="1">
             <a:schemeClr val="accent1"/>
           </a:lnRef>
@@ -10683,63 +11072,74 @@
           <a:p>
             <a:pPr algn="ctr"/>
             <a:r>
-              <a:rPr sz="1200" b="1">
-                <a:solidFill>
-                  <a:srgbClr val="1A2238"/>
-                </a:solidFill>
-              </a:rPr>
-              <a:t>predicted mean +/- spread</a:t>
-            </a:r>
-          </a:p>
-          <a:p>
-            <a:pPr algn="ctr"/>
-            <a:r>
-              <a:rPr sz="900" b="0">
+              <a:rPr sz="1100" b="1">
                 <a:solidFill>
                   <a:srgbClr val="8A93A3"/>
                 </a:solidFill>
               </a:rPr>
-              <a:t>plag 0.48 +/- 0.10   (true .44)</a:t>
-            </a:r>
-          </a:p>
-          <a:p>
-            <a:pPr algn="ctr"/>
-            <a:r>
-              <a:rPr sz="900" b="0">
+              <a:t>L_magnitude = −log Dir(mₛ | αₛ), expanded:</a:t>
+            </a:r>
+          </a:p>
+          <a:p>
+            <a:pPr algn="ctr"/>
+            <a:r>
+              <a:rPr sz="1100" b="1">
                 <a:solidFill>
                   <a:srgbClr val="8A93A3"/>
                 </a:solidFill>
               </a:rPr>
-              <a:t>cpx 0.28 +/- 0.09   (true .26)</a:t>
-            </a:r>
-          </a:p>
-          <a:p>
-            <a:pPr algn="ctr"/>
-            <a:r>
-              <a:rPr sz="900" b="0">
+              <a:t>= Σ lnΓ(αᵢ) − lnΓ(α₀) − Σ (αᵢ−1) ln mᵢ   (sums over S)</a:t>
+            </a:r>
+          </a:p>
+          <a:p>
+            <a:pPr algn="ctr"/>
+            <a:r>
+              <a:rPr sz="800" b="0">
                 <a:solidFill>
                   <a:srgbClr val="8A93A3"/>
                 </a:solidFill>
               </a:rPr>
-              <a:t>amp 0.18 +/- 0.08   (true .19)</a:t>
-            </a:r>
-          </a:p>
-          <a:p>
-            <a:pPr algn="ctr"/>
-            <a:r>
-              <a:rPr sz="900" b="0">
+              <a:t>mᵢ true mode . αᵢ predicted concentration . α₀ = Σ αᵢ . Γ extends factorial</a:t>
+            </a:r>
+          </a:p>
+          <a:p>
+            <a:pPr algn="ctr"/>
+            <a:r>
+              <a:rPr sz="800" b="0">
                 <a:solidFill>
                   <a:srgbClr val="8A93A3"/>
                 </a:solidFill>
               </a:rPr>
-              <a:t>ilm 0.06 +/- 0.05   (true .11)</a:t>
-            </a:r>
-          </a:p>
-        </p:txBody>
-      </p:sp>
-      <p:sp>
-        <p:nvSpPr>
-          <p:cNvPr id="10" name="Freeform 9"/>
+              <a:t>Γ terms: normalizer -- the cost of confidence, grows with α₀</a:t>
+            </a:r>
+          </a:p>
+          <a:p>
+            <a:pPr algn="ctr"/>
+            <a:r>
+              <a:rPr sz="800" b="0">
+                <a:solidFill>
+                  <a:srgbClr val="8A93A3"/>
+                </a:solidFill>
+              </a:rPr>
+              <a:t>(αᵢ−1) ln mᵢ: shape term -- the only place truth meets prediction</a:t>
+            </a:r>
+          </a:p>
+          <a:p>
+            <a:pPr algn="ctr"/>
+            <a:r>
+              <a:rPr sz="800" b="0">
+                <a:solidFill>
+                  <a:srgbClr val="8A93A3"/>
+                </a:solidFill>
+              </a:rPr>
+              <a:t>a density, not a probability -- well-scored rows go negative</a:t>
+            </a:r>
+          </a:p>
+        </p:txBody>
+      </p:sp>
+      <p:sp>
+        <p:nvSpPr>
+          <p:cNvPr id="17" name="Freeform 16"/>
           <p:cNvSpPr/>
           <p:nvPr/>
         </p:nvSpPr>
@@ -10947,7 +11347,7 @@
       </p:sp>
       <p:cxnSp>
         <p:nvCxnSpPr>
-          <p:cNvPr id="11" name="Connector 10"/>
+          <p:cNvPr id="18" name="Connector 17"/>
           <p:cNvCxnSpPr/>
           <p:nvPr/>
         </p:nvCxnSpPr>
@@ -10983,7 +11383,7 @@
       </p:cxnSp>
       <p:sp>
         <p:nvSpPr>
-          <p:cNvPr id="12" name="TextBox 11"/>
+          <p:cNvPr id="19" name="TextBox 18"/>
           <p:cNvSpPr txBox="1"/>
           <p:nvPr/>
         </p:nvSpPr>
@@ -11017,7 +11417,7 @@
       </p:sp>
       <p:cxnSp>
         <p:nvCxnSpPr>
-          <p:cNvPr id="13" name="Connector 12"/>
+          <p:cNvPr id="20" name="Connector 19"/>
           <p:cNvCxnSpPr/>
           <p:nvPr/>
         </p:nvCxnSpPr>
@@ -11053,7 +11453,7 @@
       </p:cxnSp>
       <p:sp>
         <p:nvSpPr>
-          <p:cNvPr id="14" name="TextBox 13"/>
+          <p:cNvPr id="21" name="TextBox 20"/>
           <p:cNvSpPr txBox="1"/>
           <p:nvPr/>
         </p:nvSpPr>
@@ -11087,13 +11487,13 @@
       </p:sp>
       <p:sp>
         <p:nvSpPr>
-          <p:cNvPr id="15" name="TextBox 14"/>
+          <p:cNvPr id="22" name="TextBox 21"/>
           <p:cNvSpPr txBox="1"/>
           <p:nvPr/>
         </p:nvSpPr>
         <p:spPr>
           <a:xfrm>
-            <a:off x="502920" y="4160520"/>
+            <a:off x="502920" y="4754880"/>
             <a:ext cx="11155680" cy="731520"/>
           </a:xfrm>
           <a:prstGeom prst="rect">
@@ -11121,13 +11521,13 @@
       </p:sp>
       <p:sp>
         <p:nvSpPr>
-          <p:cNvPr id="16" name="TextBox 15"/>
+          <p:cNvPr id="23" name="TextBox 22"/>
           <p:cNvSpPr txBox="1"/>
           <p:nvPr/>
         </p:nvSpPr>
         <p:spPr>
           <a:xfrm>
-            <a:off x="502920" y="4892040"/>
+            <a:off x="502920" y="5486400"/>
             <a:ext cx="11155680" cy="731520"/>
           </a:xfrm>
           <a:prstGeom prst="rect">
@@ -11148,20 +11548,20 @@
                   <a:srgbClr val="1A2238"/>
                 </a:solidFill>
               </a:rPr>
-              <a:t>the support is teacher-forced: training and this eval slice alpha to the row's TRUE present set (absent phases contribute nothing -- they belong to the Bernoullis; the sub-composition of a Dirichlet is itself a Dirichlet, so the sliced score is a proper density). At inference the support is sampled from the presence branch instead.</a:t>
-            </a:r>
-          </a:p>
-        </p:txBody>
-      </p:sp>
-      <p:sp>
-        <p:nvSpPr>
-          <p:cNvPr id="17" name="TextBox 16"/>
+              <a:t>the truth plays two roles, never as a model input: its support slices alpha (teacher-forced at train/eval, sampled from the presence branch at inference; a Dirichlet sub-composition is itself a Dirichlet, so the sliced score is a proper density), and its modes appear only at the scoring step.</a:t>
+            </a:r>
+          </a:p>
+        </p:txBody>
+      </p:sp>
+      <p:sp>
+        <p:nvSpPr>
+          <p:cNvPr id="24" name="TextBox 23"/>
           <p:cNvSpPr txBox="1"/>
           <p:nvPr/>
         </p:nvSpPr>
         <p:spPr>
           <a:xfrm>
-            <a:off x="502920" y="5760720"/>
+            <a:off x="502920" y="6263640"/>
             <a:ext cx="11155680" cy="731520"/>
           </a:xfrm>
           <a:prstGeom prst="rect">

--- a/slides/overview.pptx
+++ b/slides/overview.pptx
@@ -868,7 +868,7 @@
           <a:lstStyle/>
           <a:p>
             <a:r>
-              <a:t>Worked example for the reliability diagram in results/mode_head/&lt;tag&gt;/reliability.png. Numbers illustrative but to scale: three rocks predicted in [0.70, 0.80) -- a real bin edge of the 10 equal-width bins the code uses -- contribute 3 predictions x 96 labels = 288 (p, truth) pairs -- 3 predictions, not 288; each rock's single p is scored against its 96 labels. x = count-weighted mean p (0.740), y = pooled fraction of pairs with cpx present (205/288 = 0.712). ECE on the real panels is the count-weighted |x - y| over 10 such bins. The gray ghost dot shows the overconfident failure mode. Real population: val split of the provisional bulk-level hash split (~20% of 4,670 corpus rocks at 47/100 chunks); the '~930 rocks / 86,617 rows' line is a current snapshot and grows with the corpus -- update it on regen. Pair with figure 2 (p vs within-bulk frequency): reliability is aggregate honesty, the scatter is per-rock sharpness; a base-rate predictor passes the first and fails the second.</a:t>
+              <a:t>Worked example for the reliability diagram in results/mode_head/&lt;tag&gt;/reliability.png. Numbers illustrative but to scale: three rocks predicted in [0.70, 0.80) -- a real bin edge of the 10 equal-width bins the code uses -- contribute 3 predictions x 256 labels = 768 (p, truth) pairs -- 3 predictions, not 768; each rock's single p is scored against its 256 labels. x = count-weighted mean p (0.740), y = pooled fraction of pairs with cpx present (547/768 = 0.712). ECE on the real panels is the count-weighted |x - y| over 10 such bins. The gray ghost dot shows the overconfident failure mode. Real population: the sealed valtest tier's val roster (221 assigned rocks, 218 contributing 55,576 rows at 128 draws x rungs 50/30, minus attrition). Fixed roster: panel numbers move only when the head retrains. Pair with figure 2 (p vs within-bulk frequency): reliability is aggregate honesty, the scatter is per-rock sharpness; a base-rate predictor passes the first and fails the second.</a:t>
             </a:r>
           </a:p>
         </p:txBody>
@@ -1358,7 +1358,7 @@
           <a:lstStyle/>
           <a:p>
             <a:r>
-              <a:t>Status strip for the corpus regen. Stages 1-2 are code, landed and tested. Stage 3-5 are runs the owner executes in his own terminal; each has a decision gate before the next. Update this slide as stages complete.</a:t>
+              <a:t>Status strip for the corpus regen, now fully landed -- the slide is a record, not a plan. Candidate to retire or fold into the corpora slide at the next deck pass (owner call).</a:t>
             </a:r>
           </a:p>
         </p:txBody>
@@ -9290,7 +9290,7 @@
                   <a:srgbClr val="1A2238"/>
                 </a:solidFill>
               </a:rPr>
-              <a:t>96 rows: cpx in 70</a:t>
+              <a:t>256 rows: cpx in 187</a:t>
             </a:r>
           </a:p>
         </p:txBody>
@@ -9489,7 +9489,7 @@
                   <a:srgbClr val="1A2238"/>
                 </a:solidFill>
               </a:rPr>
-              <a:t>96 rows: cpx in 61</a:t>
+              <a:t>256 rows: cpx in 163</a:t>
             </a:r>
           </a:p>
         </p:txBody>
@@ -9688,7 +9688,7 @@
                   <a:srgbClr val="1A2238"/>
                 </a:solidFill>
               </a:rPr>
-              <a:t>96 rows: cpx in 74</a:t>
+              <a:t>256 rows: cpx in 197</a:t>
             </a:r>
           </a:p>
         </p:txBody>
@@ -9800,7 +9800,7 @@
                   <a:srgbClr val="8A93A3"/>
                 </a:solidFill>
               </a:rPr>
-              <a:t>x 96 labels each = 288 pairs</a:t>
+              <a:t>x 256 labels each = 768 pairs</a:t>
             </a:r>
           </a:p>
           <a:p>
@@ -9822,7 +9822,7 @@
                   <a:srgbClr val="8A93A3"/>
                 </a:solidFill>
               </a:rPr>
-              <a:t>present: 205 / 288 = 0.712</a:t>
+              <a:t>present: 547 / 768 = 0.712</a:t>
             </a:r>
           </a:p>
         </p:txBody>
@@ -10128,7 +10128,7 @@
                   <a:srgbClr val="8A93A3"/>
                 </a:solidFill>
               </a:rPr>
-              <a:t>gray dot: overconfident (if truth were 135/288)</a:t>
+              <a:t>gray dot: overconfident (if truth were 360/768)</a:t>
             </a:r>
           </a:p>
         </p:txBody>
@@ -10196,7 +10196,7 @@
                   <a:srgbClr val="1A2238"/>
                 </a:solidFill>
               </a:rPr>
-              <a:t>3 rocks shown; the real figure pools the validation rocks only -- currently ~930 rocks x 96 rows = 86,617 (p, truth) pairs per mineral panel, partitioned across the 10 bins (the gray bars). Training rocks are excluded because a head that memorized them would grade itself calibrated. And since all 96 rows of a rock share one prediction, a panel holds only ~930 distinct p values, each stamped 96x -- the effective sample size is rocks, not rows, which is why every number stays provisional until the valtest tier (500 rocks x 128 draws) lands.</a:t>
+              <a:t>3 rocks shown; the real figure pools the val-roster rocks only -- 218 rocks x ~255 rows = 55,576 (p, truth) pairs per mineral panel, partitioned across the 10 bins (the gray bars). Training rocks are excluded because a head that memorized them would grade itself calibrated. And since all ~255 rows of a rock share one prediction, a panel holds only 218 distinct p values, each stamped ~255x -- the effective sample size is rocks, not rows. The population is the fixed val roster of the sealed valtest tier (128 draws/rock at rungs 50+30), so panels are comparable across retrains.</a:t>
             </a:r>
           </a:p>
         </p:txBody>
@@ -10230,7 +10230,7 @@
                   <a:srgbClr val="8A93A3"/>
                 </a:solidFill>
               </a:rPr>
-              <a:t>BCE's per-rock minimum is the true fraction, so an honest head lands on the diagonal by construction. current limits (provisional): garnet presence under-predicted even at f &gt; 0.9; amphibole magnitude spread too narrow. full report: results/mode_head/&lt;tag&gt;/</a:t>
+              <a:t>BCE's per-rock minimum is the true fraction, so an honest head lands on the diagonal by construction. current limits: intermediate-frequency presence is the miss mode (garnet recall 1.0 at f &gt; 0.9 but 0.0 below f = 0.5; opx 0.23 / ru 0.13 / ol 0.04 overall); spinel is the worst-calibrated panel (ECE 0.043); amphibole magnitude spread stays too narrow (next slide). full report: results/mode_head/&lt;tag&gt;/</a:t>
             </a:r>
           </a:p>
         </p:txBody>
@@ -11582,7 +11582,7 @@
                   <a:srgbClr val="8A93A3"/>
                 </a:solidFill>
               </a:rPr>
-              <a:t>population: only truly-present (row, phase) pairs are scored -- ~68k pairs for plag down to ~200 for corundum; single-phase rows are excluded (nothing to size). current limits (provisional): amphibole U-shaped PIT (spread too narrow; truth plausibly bimodal across paths), oxide accessories humped (too wide), plag under-sized. full report: results/mode_head/&lt;tag&gt;/ (magnitude_parity, magnitude_pit).</a:t>
+              <a:t>population: only truly-present (row, phase) pairs are scored -- ~41k pairs for plag down to ~240 for andalusite; single-phase rows are excluded (nothing to size). current limits: amphibole PIT U-shaped with a high-side tilt (tails 0.27 vs 0.10 expected: spread too narrow and conditionally under-sized; corpus bimodality measured), oxide accessories humped (spl/ilm/ru tails ~0.01: too wide); plag's earlier under-sizing flattened with the full-tier retrain (tails 0.12). full report: results/mode_head/&lt;tag&gt;/ (magnitude_parity, magnitude_pit).</a:t>
             </a:r>
           </a:p>
         </p:txBody>
@@ -18574,11 +18574,11 @@
             <a:avLst/>
           </a:prstGeom>
           <a:solidFill>
-            <a:srgbClr val="FBEEE3"/>
+            <a:srgbClr val="E1F1EF"/>
           </a:solidFill>
           <a:ln w="25400">
             <a:solidFill>
-              <a:srgbClr val="E8883A"/>
+              <a:srgbClr val="2A9D8F"/>
             </a:solidFill>
           </a:ln>
           <a:effectLst/>
@@ -18630,7 +18630,7 @@
                   <a:srgbClr val="1A2238"/>
                 </a:solidFill>
               </a:rPr>
-              <a:t>first 5 train chunks</a:t>
+              <a:t>passed; rungs locked</a:t>
             </a:r>
           </a:p>
           <a:p>
@@ -18641,7 +18641,7 @@
                   <a:srgbClr val="8A93A3"/>
                 </a:solidFill>
               </a:rPr>
-              <a:t>health report +</a:t>
+              <a:t>50 + 30 (owner,</a:t>
             </a:r>
           </a:p>
           <a:p>
@@ -18652,7 +18652,7 @@
                   <a:srgbClr val="8A93A3"/>
                 </a:solidFill>
               </a:rPr>
-              <a:t>rung_prescreen.py -&gt; owner</a:t>
+              <a:t>rung_prescreen.py)</a:t>
             </a:r>
           </a:p>
         </p:txBody>
@@ -18683,10 +18683,10 @@
             <a:r>
               <a:rPr sz="1100" b="0">
                 <a:solidFill>
-                  <a:srgbClr val="E8883A"/>
-                </a:solidFill>
-              </a:rPr>
-              <a:t>NEXT</a:t>
+                  <a:srgbClr val="2A9D8F"/>
+                </a:solidFill>
+              </a:rPr>
+              <a:t>LANDED</a:t>
             </a:r>
           </a:p>
         </p:txBody>
@@ -18750,11 +18750,11 @@
             <a:avLst/>
           </a:prstGeom>
           <a:solidFill>
-            <a:srgbClr val="FFFFFF"/>
+            <a:srgbClr val="E1F1EF"/>
           </a:solidFill>
-          <a:ln w="12700">
+          <a:ln w="25400">
             <a:solidFill>
-              <a:srgbClr val="C8CDD6"/>
+              <a:srgbClr val="2A9D8F"/>
             </a:solidFill>
           </a:ln>
           <a:effectLst/>
@@ -18781,54 +18781,65 @@
             <a:r>
               <a:rPr sz="1200" b="1">
                 <a:solidFill>
+                  <a:srgbClr val="1A2238"/>
+                </a:solidFill>
+              </a:rPr>
+              <a:t>5. production</a:t>
+            </a:r>
+          </a:p>
+          <a:p>
+            <a:pPr algn="ctr"/>
+            <a:r>
+              <a:rPr sz="1200" b="1">
+                <a:solidFill>
+                  <a:srgbClr val="1A2238"/>
+                </a:solidFill>
+              </a:rPr>
+              <a:t/>
+            </a:r>
+          </a:p>
+          <a:p>
+            <a:pPr algn="ctr"/>
+            <a:r>
+              <a:rPr sz="1200" b="1">
+                <a:solidFill>
+                  <a:srgbClr val="1A2238"/>
+                </a:solidFill>
+              </a:rPr>
+              <a:t>both tiers complete</a:t>
+            </a:r>
+          </a:p>
+          <a:p>
+            <a:pPr algn="ctr"/>
+            <a:r>
+              <a:rPr sz="900" b="0">
+                <a:solidFill>
                   <a:srgbClr val="8A93A3"/>
                 </a:solidFill>
               </a:rPr>
-              <a:t>5. production</a:t>
-            </a:r>
-          </a:p>
-          <a:p>
-            <a:pPr algn="ctr"/>
-            <a:r>
-              <a:rPr sz="1200" b="1">
+              <a:t>948k train rows;</a:t>
+            </a:r>
+          </a:p>
+          <a:p>
+            <a:pPr algn="ctr"/>
+            <a:r>
+              <a:rPr sz="900" b="0">
                 <a:solidFill>
                   <a:srgbClr val="8A93A3"/>
                 </a:solidFill>
               </a:rPr>
-              <a:t/>
-            </a:r>
-          </a:p>
-          <a:p>
-            <a:pPr algn="ctr"/>
-            <a:r>
-              <a:rPr sz="1200" b="1">
+              <a:t>valtest 125k, sealed</a:t>
+            </a:r>
+          </a:p>
+          <a:p>
+            <a:pPr algn="ctr"/>
+            <a:r>
+              <a:rPr sz="900" b="0">
                 <a:solidFill>
                   <a:srgbClr val="8A93A3"/>
                 </a:solidFill>
               </a:rPr>
-              <a:t>10k x 48 + 500 x 128</a:t>
-            </a:r>
-          </a:p>
-          <a:p>
-            <a:pPr algn="ctr"/>
-            <a:r>
-              <a:rPr sz="900" b="0">
-                <a:solidFill>
-                  <a:srgbClr val="8A93A3"/>
-                </a:solidFill>
-              </a:rPr>
-              <a:t>~2 days, pausable</a:t>
-            </a:r>
-          </a:p>
-          <a:p>
-            <a:pPr algn="ctr"/>
-            <a:r>
-              <a:rPr sz="900" b="0">
-                <a:solidFill>
-                  <a:srgbClr val="8A93A3"/>
-                </a:solidFill>
-              </a:rPr>
-              <a:t>rerun command = resume</a:t>
+              <a:t>221/278 val/test roster</a:t>
             </a:r>
           </a:p>
         </p:txBody>
@@ -18859,10 +18870,10 @@
             <a:r>
               <a:rPr sz="1100" b="0">
                 <a:solidFill>
-                  <a:srgbClr val="8A93A3"/>
-                </a:solidFill>
-              </a:rPr>
-              <a:t>queued</a:t>
+                  <a:srgbClr val="2A9D8F"/>
+                </a:solidFill>
+              </a:rPr>
+              <a:t>LANDED</a:t>
             </a:r>
           </a:p>
         </p:txBody>
@@ -18882,7 +18893,7 @@
             <a:avLst/>
           </a:prstGeom>
           <a:solidFill>
-            <a:srgbClr val="C8CDD6"/>
+            <a:srgbClr val="1A2238"/>
           </a:solidFill>
           <a:ln>
             <a:noFill/>
@@ -18940,7 +18951,7 @@
                   <a:srgbClr val="1A2238"/>
                 </a:solidFill>
               </a:rPr>
-              <a:t>gates between stages: the A/B re-checks the amp/opx multimodality magnitude and the biotite presence gap under bounded water; the pilot pre-screen scores each rung against the real benchmark (presence per SiO2 band, then rank of proportions) and the owner picks the training rung before production launches.</a:t>
+              <a:t>all gates passed: the water A/B held under bounded sampling; the pilot pre-screen locked rungs 50 + 30; production completed 2026-07-17 (train 99.2% point convergence, valtest 97.7% usable rows after dropping one solver-poisoned bulk). The 499 valtest bulks divide 16:20 into a committed val/test roster (valtest_split.csv); test stays sealed.</a:t>
             </a:r>
           </a:p>
         </p:txBody>
@@ -18974,7 +18985,7 @@
                   <a:srgbClr val="8A93A3"/>
                 </a:solidFill>
               </a:rPr>
-              <a:t>spec: docs/corpus_regen_spec.md (all design decisions locked 2026-07-14; what remains is measurement and generation).</a:t>
+              <a:t>spec: docs/corpus_regen_spec.md (all design decisions locked 2026-07-14; generation complete 2026-07-17).</a:t>
             </a:r>
           </a:p>
         </p:txBody>

--- a/slides/overview.pptx
+++ b/slides/overview.pptx
@@ -22,6 +22,8 @@
     <p:sldId id="270" r:id="rId22"/>
     <p:sldId id="271" r:id="rId23"/>
     <p:sldId id="272" r:id="rId24"/>
+    <p:sldId id="273" r:id="rId25"/>
+    <p:sldId id="274" r:id="rId26"/>
   </p:sldIdLst>
   <p:sldSz cx="12191695" cy="6858000" type="screen4x3"/>
   <p:notesSz cx="6858000" cy="9144000"/>
@@ -798,7 +800,7 @@
           <a:lstStyle/>
           <a:p>
             <a:r>
-              <a:t>Anatomy of the trained ModeHead (checkpoints/mode_head_seed0): shared trunk Linear(256-&gt;128)+GELU+dropout, then two parallel linear branches -- presence logits (sigmoid -&gt; per-phase Bernoulli, BCE) and concentrations (softplus + eps -&gt; conditional Dirichlet, masked NLL on the true support). Param counts are exact for hidden=d_model//2. Loss boxes mirror the SSL slide: BCE is a proper scoring rule (per-rock minimum = within-bulk presence frequency, which is why intermediate p is signal); the Dirichlet NLL is masked to the label's present set (sub-composition property keeps it a proper density); λ_mag is the loss-weighting coefficient (config key magnitude_weight, 1.0 currently) -- λ chosen over w to avoid clashing with layer weights and to match the coming λ_balance / λ_comp family. 'Trained jointly' is literal chain-rule math: L is one scalar, so one backward pass and one AdamW step update all params at once. Each branch's weights appear in only its own term (the other term's gradient is exactly zero there); the trunk appears in both, so its gradient is the sum -- λ_mag is the exchange rate between the two error signals shaping the shared features. NOT alternating epochs, NOT separate optimizers, NOT staged pretraining of one branch. The hurdle split exists because one full-simplex Dirichlet cannot be simultaneously confident about absences and honest about present-phase spread (shared concentration). CompHead/CondHead follow the same small-MLP-emitting-distribution-parameters pattern; counts land when they're built.</a:t>
+              <a:t>Anatomy of the trained ModeHead (checkpoints/mode_head_seed0): shared trunk Linear(256-&gt;128)+GELU+dropout, then two parallel linear branches -- presence logits (sigmoid -&gt; per-phase Bernoulli, BCE) and concentrations (softplus + eps -&gt; conditional Dirichlet, masked NLL on the true support). Param counts are exact for hidden=d_model//2. Loss boxes mirror the SSL slide: BCE is a proper scoring rule (per-rock minimum = within-bulk presence frequency, which is why intermediate p is signal); the Dirichlet NLL is masked to the label's present set (sub-composition property keeps it a proper density); λ_mag is the loss-weighting coefficient (config key magnitude_weight, 1.0 currently) -- λ chosen over w to avoid clashing with layer weights and to match the coming λ_balance / λ_comp family. 'Trained jointly' is literal chain-rule math: L is one scalar, so one backward pass and one AdamW step update all params at once. Each branch's weights appear in only its own term (the other term's gradient is exactly zero there); the trunk appears in both, so its gradient is the sum -- λ_mag is the exchange rate between the two error signals shaping the shared features. NOT alternating epochs, NOT separate optimizers, NOT staged pretraining of one branch. The hurdle split exists because one full-simplex Dirichlet cannot be simultaneously confident about absences and honest about present-phase spread (shared concentration). CompHead/CondHead follow the same small-MLP-emitting-distribution-parameters pattern; their anatomy slides follow the eval-semantics slides.</a:t>
             </a:r>
           </a:p>
         </p:txBody>
@@ -1008,7 +1010,7 @@
           <a:lstStyle/>
           <a:p>
             <a:r>
-              <a:t>Output FORM, not measured results (heads train in issue #10). ModeHead = hurdle Dirichlet over the crystals-renormalized solid assemblage (liq/fl dropped, solids sum to 1 -- matches real itemized-phenocrysts + lumped-groundmass granularity). EVERY phase gets a presence Bernoulli AND a conditional amount +/- CI; near-certain phases just have p~1. Amp 0.41 / opx 0.63 anti-correlated is the flagship multimodality (deep-wet-amp vs shallow-dry-opx), so their marginal amounts are conditional on presence, not rock-wide means. CondHead = per-axis GMM; P and H2O were sampled at generation, T is derived (cooling endpoint at the phenocryst window), hence the lower illustrative T. Second read-out view: top-K scenarios; weights labeled prior-weighted plausibility, reweightable p/q. Mass-balance closure teacher-forces the label melt fraction at training. Numbers illustrative.</a:t>
+              <a:t>Anatomy of CompHead (trains in the joint trainer, checkpoints/joint_heads_seed0). Interface: h [256] in, alpha [21, 11] out; one training example is one (bulk, draw, rung) row; targets are per-phase oxide mass fractions from the rungs table (same-token instances merged by mass-weighted mean, feldspar split into plag/afs BEFORE averaging so the solvus pair never mixes), eps-clipped at comp_eps and renormalized. Param counts are exact (instantiated at d_model 256, hidden 128). The shared-concentration factorization is the locked heads.md parameterization: one c_p per phase blurs per-oxide error bars toward each other -- accepted because composition spreads are 10-30x tighter than modal spreads (the reason CompHead is bulk-controlled and unconditioned). L_comp's minimum: the Dirichlet matching the per-bulk composition distribution of each phase. L_closure is the one loss term coupling two heads (mode x comp product); squared-L2 is a constraint penalty, not a head likelihood, so the no-MSE rule for heads doesn't apply. Known limits: hard-zero oxides are clipped (a q row is 'SiO2 + 10 eps-floors'); ~0.3% of corpus rows don't self-close (melt immiscibility, dropped-phase mass, worst 5.2 wt%) and set an unattainable closure floor there; endmember bonus heads deferred (heads.md).</a:t>
             </a:r>
           </a:p>
         </p:txBody>
@@ -1034,6 +1036,146 @@
 </file>
 
 <file path=ppt/notesSlides/notesSlide17.xml><?xml version="1.0" encoding="utf-8"?>
+<p:notes xmlns:a="http://schemas.openxmlformats.org/drawingml/2006/main" xmlns:p="http://schemas.openxmlformats.org/presentationml/2006/main" xmlns:r="http://schemas.openxmlformats.org/officeDocument/2006/relationships">
+  <p:cSld>
+    <p:spTree>
+      <p:nvGrpSpPr>
+        <p:cNvPr id="1" name=""/>
+        <p:cNvGrpSpPr/>
+        <p:nvPr/>
+      </p:nvGrpSpPr>
+      <p:grpSpPr>
+        <a:xfrm>
+          <a:off x="0" y="0"/>
+          <a:ext cx="0" cy="0"/>
+          <a:chOff x="0" y="0"/>
+          <a:chExt cx="0" cy="0"/>
+        </a:xfrm>
+      </p:grpSpPr>
+      <p:sp>
+        <p:nvSpPr>
+          <p:cNvPr id="2" name="Slide Image Placeholder 1"/>
+          <p:cNvSpPr>
+            <a:spLocks noGrp="1"/>
+          </p:cNvSpPr>
+          <p:nvPr>
+            <p:ph type="sldImg" idx="2"/>
+          </p:nvPr>
+        </p:nvSpPr>
+        <p:spPr/>
+      </p:sp>
+      <p:sp>
+        <p:nvSpPr>
+          <p:cNvPr id="3" name="Notes Placeholder 2"/>
+          <p:cNvSpPr>
+            <a:spLocks noGrp="1"/>
+          </p:cNvSpPr>
+          <p:nvPr>
+            <p:ph type="body" idx="3" sz="quarter"/>
+          </p:nvPr>
+        </p:nvSpPr>
+        <p:spPr/>
+        <p:txBody>
+          <a:bodyPr/>
+          <a:lstStyle/>
+          <a:p>
+            <a:r>
+              <a:t>Anatomy of CondHead (trains in the joint trainer, checkpoints/joint_heads_seed0). Interface: concat(h [256], presence [21]) in; (log_w, mu, sigma) each [3 axes, K] out; one training example is one (bulk, draw, rung) row with targets (T_end from the rung row; P_kbar, H2O from the draw). Param counts exact (d_model 256, hidden 128, K=3). Support-conditioning is the locked chain-rule decision: independent heads assume a conditional independence the corpus violates by design -- the within-bulk label variance is driven by the shared hidden (P, H2O) path, and marginals forget which condition mode went with which support. Raw linear units are deliberate (no log transforms; negative mass is a diagnostic, not a bug -- mass_below_zero in the cond eval). init_output_bias seeds component means at target mean +/- 1 std and sigmas at the target std; without it Adam needs ~mu/lr steps to walk mu from 0 to ~900 C. lambda_cond nuance: L_cond's gradient reaches only CondHead's own weights (frozen encoder, separate trunks, teacher-forced input), and per-head clipping + Adam's per-parameter scaling make the constant nearly inert for optimization; its real lever is the val-total early stop, where 0.01 down-weights condition improvements 100x vs mineralogy (the locked mineralogy-first priority). Known limits: axes are independent mixtures (no (T, P) correlation, deferred per ADR 006); exposure bias measured, not yet mitigated (#31); T is a derived cooling endpoint, not a sampled axis, in the scenario view.</a:t>
+            </a:r>
+          </a:p>
+        </p:txBody>
+      </p:sp>
+      <p:sp>
+        <p:nvSpPr>
+          <p:cNvPr id="4" name="Slide Number Placeholder 3"/>
+          <p:cNvSpPr>
+            <a:spLocks noGrp="1"/>
+          </p:cNvSpPr>
+          <p:nvPr>
+            <p:ph type="sldNum" idx="5" sz="quarter"/>
+          </p:nvPr>
+        </p:nvSpPr>
+        <p:spPr/>
+      </p:sp>
+    </p:spTree>
+  </p:cSld>
+  <p:clrMapOvr>
+    <a:masterClrMapping/>
+  </p:clrMapOvr>
+</p:notes>
+</file>
+
+<file path=ppt/notesSlides/notesSlide18.xml><?xml version="1.0" encoding="utf-8"?>
+<p:notes xmlns:a="http://schemas.openxmlformats.org/drawingml/2006/main" xmlns:p="http://schemas.openxmlformats.org/presentationml/2006/main" xmlns:r="http://schemas.openxmlformats.org/officeDocument/2006/relationships">
+  <p:cSld>
+    <p:spTree>
+      <p:nvGrpSpPr>
+        <p:cNvPr id="1" name=""/>
+        <p:cNvGrpSpPr/>
+        <p:nvPr/>
+      </p:nvGrpSpPr>
+      <p:grpSpPr>
+        <a:xfrm>
+          <a:off x="0" y="0"/>
+          <a:ext cx="0" cy="0"/>
+          <a:chOff x="0" y="0"/>
+          <a:chExt cx="0" cy="0"/>
+        </a:xfrm>
+      </p:grpSpPr>
+      <p:sp>
+        <p:nvSpPr>
+          <p:cNvPr id="2" name="Slide Image Placeholder 1"/>
+          <p:cNvSpPr>
+            <a:spLocks noGrp="1"/>
+          </p:cNvSpPr>
+          <p:nvPr>
+            <p:ph type="sldImg" idx="2"/>
+          </p:nvPr>
+        </p:nvSpPr>
+        <p:spPr/>
+      </p:sp>
+      <p:sp>
+        <p:nvSpPr>
+          <p:cNvPr id="3" name="Notes Placeholder 2"/>
+          <p:cNvSpPr>
+            <a:spLocks noGrp="1"/>
+          </p:cNvSpPr>
+          <p:nvPr>
+            <p:ph type="body" idx="3" sz="quarter"/>
+          </p:nvPr>
+        </p:nvSpPr>
+        <p:spPr/>
+        <p:txBody>
+          <a:bodyPr/>
+          <a:lstStyle/>
+          <a:p>
+            <a:r>
+              <a:t>Output FORM, not measured results (heads train in issue #10). ModeHead = hurdle Dirichlet over the crystals-renormalized solid assemblage (liq/fl dropped, solids sum to 1 -- matches real itemized-phenocrysts + lumped-groundmass granularity). EVERY phase gets a presence Bernoulli AND a conditional amount +/- CI; near-certain phases just have p~1. Amp 0.41 / opx 0.63 anti-correlated is the flagship multimodality (deep-wet-amp vs shallow-dry-opx), so their marginal amounts are conditional on presence, not rock-wide means. CondHead = per-axis GMM; P and H2O were sampled at generation, T is derived (cooling endpoint at the phenocryst window), hence the lower illustrative T. Second read-out view: top-K scenarios; weights labeled prior-weighted plausibility, reweightable p/q. Mass-balance closure teacher-forces the label melt fraction at training. Numbers illustrative.</a:t>
+            </a:r>
+          </a:p>
+        </p:txBody>
+      </p:sp>
+      <p:sp>
+        <p:nvSpPr>
+          <p:cNvPr id="4" name="Slide Number Placeholder 3"/>
+          <p:cNvSpPr>
+            <a:spLocks noGrp="1"/>
+          </p:cNvSpPr>
+          <p:nvPr>
+            <p:ph type="sldNum" idx="5" sz="quarter"/>
+          </p:nvPr>
+        </p:nvSpPr>
+        <p:spPr/>
+      </p:sp>
+    </p:spTree>
+  </p:cSld>
+  <p:clrMapOvr>
+    <a:masterClrMapping/>
+  </p:clrMapOvr>
+</p:notes>
+</file>
+
+<file path=ppt/notesSlides/notesSlide19.xml><?xml version="1.0" encoding="utf-8"?>
 <p:notes xmlns:a="http://schemas.openxmlformats.org/drawingml/2006/main" xmlns:p="http://schemas.openxmlformats.org/presentationml/2006/main" xmlns:r="http://schemas.openxmlformats.org/officeDocument/2006/relationships">
   <p:cSld>
     <p:spTree>
@@ -11668,6 +11810,2517 @@
                   <a:srgbClr val="1A2238"/>
                 </a:solidFill>
               </a:rPr>
+              <a:t>Inside CompHead: one oxide Dirichlet per mineral</a:t>
+            </a:r>
+          </a:p>
+        </p:txBody>
+      </p:sp>
+      <p:sp>
+        <p:nvSpPr>
+          <p:cNvPr id="4" name="TextBox 3"/>
+          <p:cNvSpPr txBox="1"/>
+          <p:nvPr/>
+        </p:nvSpPr>
+        <p:spPr>
+          <a:xfrm>
+            <a:off x="502920" y="1051560"/>
+            <a:ext cx="11155680" cy="731520"/>
+          </a:xfrm>
+          <a:prstGeom prst="rect">
+            <a:avLst/>
+          </a:prstGeom>
+          <a:noFill/>
+        </p:spPr>
+        <p:txBody>
+          <a:bodyPr wrap="square">
+            <a:spAutoFit/>
+          </a:bodyPr>
+          <a:lstStyle/>
+          <a:p>
+            <a:pPr algn="l"/>
+            <a:r>
+              <a:rPr sz="1300" b="0">
+                <a:solidFill>
+                  <a:srgbClr val="8A93A3"/>
+                </a:solidFill>
+              </a:rPr>
+              <a:t>CompHead emits a Dirichlet over the 11 MAGEMin oxides for each of the 21 phases -- composition is bulk-controlled, so it reads h only (never the support or conditions)</a:t>
+            </a:r>
+          </a:p>
+        </p:txBody>
+      </p:sp>
+      <p:sp>
+        <p:nvSpPr>
+          <p:cNvPr id="5" name="Oval 4"/>
+          <p:cNvSpPr/>
+          <p:nvPr/>
+        </p:nvSpPr>
+        <p:spPr>
+          <a:xfrm>
+            <a:off x="777240" y="2834640"/>
+            <a:ext cx="1371600" cy="1371600"/>
+          </a:xfrm>
+          <a:prstGeom prst="ellipse">
+            <a:avLst/>
+          </a:prstGeom>
+          <a:solidFill>
+            <a:srgbClr val="E8883A"/>
+          </a:solidFill>
+          <a:ln w="31750">
+            <a:solidFill>
+              <a:srgbClr val="E8883A"/>
+            </a:solidFill>
+          </a:ln>
+          <a:effectLst/>
+        </p:spPr>
+        <p:style>
+          <a:lnRef idx="1">
+            <a:schemeClr val="accent1"/>
+          </a:lnRef>
+          <a:fillRef idx="3">
+            <a:schemeClr val="accent1"/>
+          </a:fillRef>
+          <a:effectRef idx="2">
+            <a:schemeClr val="accent1"/>
+          </a:effectRef>
+          <a:fontRef idx="minor">
+            <a:schemeClr val="lt1"/>
+          </a:fontRef>
+        </p:style>
+        <p:txBody>
+          <a:bodyPr rtlCol="0" anchor="ctr" wrap="square"/>
+          <a:lstStyle/>
+          <a:p>
+            <a:pPr algn="ctr"/>
+            <a:r>
+              <a:rPr sz="2200" b="1">
+                <a:solidFill>
+                  <a:srgbClr val="FFFFFF"/>
+                </a:solidFill>
+              </a:rPr>
+              <a:t>h</a:t>
+            </a:r>
+          </a:p>
+          <a:p>
+            <a:pPr algn="ctr"/>
+            <a:r>
+              <a:rPr sz="1900" b="0">
+                <a:solidFill>
+                  <a:srgbClr val="8A93A3"/>
+                </a:solidFill>
+              </a:rPr>
+              <a:t>256-d latent</a:t>
+            </a:r>
+          </a:p>
+        </p:txBody>
+      </p:sp>
+      <p:sp>
+        <p:nvSpPr>
+          <p:cNvPr id="6" name="TextBox 5"/>
+          <p:cNvSpPr txBox="1"/>
+          <p:nvPr/>
+        </p:nvSpPr>
+        <p:spPr>
+          <a:xfrm>
+            <a:off x="457200" y="4434840"/>
+            <a:ext cx="2011680" cy="731520"/>
+          </a:xfrm>
+          <a:prstGeom prst="rect">
+            <a:avLst/>
+          </a:prstGeom>
+          <a:noFill/>
+        </p:spPr>
+        <p:txBody>
+          <a:bodyPr wrap="square">
+            <a:spAutoFit/>
+          </a:bodyPr>
+          <a:lstStyle/>
+          <a:p>
+            <a:pPr algn="ctr"/>
+            <a:r>
+              <a:rPr sz="1000" b="0">
+                <a:solidFill>
+                  <a:srgbClr val="8A93A3"/>
+                </a:solidFill>
+              </a:rPr>
+              <a:t>from the frozen encoder (3.23M params, not trained here)</a:t>
+            </a:r>
+          </a:p>
+        </p:txBody>
+      </p:sp>
+      <p:sp>
+        <p:nvSpPr>
+          <p:cNvPr id="7" name="Right Arrow 6"/>
+          <p:cNvSpPr/>
+          <p:nvPr/>
+        </p:nvSpPr>
+        <p:spPr>
+          <a:xfrm>
+            <a:off x="2286000" y="3337560"/>
+            <a:ext cx="457200" cy="365760"/>
+          </a:xfrm>
+          <a:prstGeom prst="rightArrow">
+            <a:avLst/>
+          </a:prstGeom>
+          <a:solidFill>
+            <a:srgbClr val="1A2238"/>
+          </a:solidFill>
+          <a:ln>
+            <a:noFill/>
+          </a:ln>
+          <a:effectLst/>
+        </p:spPr>
+        <p:style>
+          <a:lnRef idx="1">
+            <a:schemeClr val="accent1"/>
+          </a:lnRef>
+          <a:fillRef idx="3">
+            <a:schemeClr val="accent1"/>
+          </a:fillRef>
+          <a:effectRef idx="2">
+            <a:schemeClr val="accent1"/>
+          </a:effectRef>
+          <a:fontRef idx="minor">
+            <a:schemeClr val="lt1"/>
+          </a:fontRef>
+        </p:style>
+        <p:txBody>
+          <a:bodyPr rtlCol="0" anchor="ctr"/>
+          <a:lstStyle/>
+          <a:p>
+            <a:pPr algn="ctr"/>
+          </a:p>
+        </p:txBody>
+      </p:sp>
+      <p:sp>
+        <p:nvSpPr>
+          <p:cNvPr id="8" name="Rounded Rectangle 7"/>
+          <p:cNvSpPr/>
+          <p:nvPr/>
+        </p:nvSpPr>
+        <p:spPr>
+          <a:xfrm>
+            <a:off x="2834640" y="2788920"/>
+            <a:ext cx="2651760" cy="1463040"/>
+          </a:xfrm>
+          <a:prstGeom prst="roundRect">
+            <a:avLst/>
+          </a:prstGeom>
+          <a:solidFill>
+            <a:srgbClr val="EAE8FB"/>
+          </a:solidFill>
+          <a:ln w="25400">
+            <a:solidFill>
+              <a:srgbClr val="6C5CE7"/>
+            </a:solidFill>
+          </a:ln>
+          <a:effectLst/>
+        </p:spPr>
+        <p:style>
+          <a:lnRef idx="1">
+            <a:schemeClr val="accent1"/>
+          </a:lnRef>
+          <a:fillRef idx="3">
+            <a:schemeClr val="accent1"/>
+          </a:fillRef>
+          <a:effectRef idx="2">
+            <a:schemeClr val="accent1"/>
+          </a:effectRef>
+          <a:fontRef idx="minor">
+            <a:schemeClr val="lt1"/>
+          </a:fontRef>
+        </p:style>
+        <p:txBody>
+          <a:bodyPr rtlCol="0" anchor="ctr" wrap="square"/>
+          <a:lstStyle/>
+          <a:p>
+            <a:pPr algn="ctr"/>
+            <a:r>
+              <a:rPr sz="1300" b="1">
+                <a:solidFill>
+                  <a:srgbClr val="1A2238"/>
+                </a:solidFill>
+              </a:rPr>
+              <a:t>own trunk</a:t>
+            </a:r>
+          </a:p>
+          <a:p>
+            <a:pPr algn="ctr"/>
+            <a:r>
+              <a:rPr sz="1000" b="0">
+                <a:solidFill>
+                  <a:srgbClr val="8A93A3"/>
+                </a:solidFill>
+              </a:rPr>
+              <a:t>Linear 256 -&gt; 128</a:t>
+            </a:r>
+          </a:p>
+          <a:p>
+            <a:pPr algn="ctr"/>
+            <a:r>
+              <a:rPr sz="1000" b="0">
+                <a:solidFill>
+                  <a:srgbClr val="8A93A3"/>
+                </a:solidFill>
+              </a:rPr>
+              <a:t>GELU + dropout</a:t>
+            </a:r>
+          </a:p>
+          <a:p>
+            <a:pPr algn="ctr"/>
+            <a:r>
+              <a:rPr sz="1000" b="0">
+                <a:solidFill>
+                  <a:srgbClr val="8A93A3"/>
+                </a:solidFill>
+              </a:rPr>
+              <a:t>32,896 params</a:t>
+            </a:r>
+          </a:p>
+        </p:txBody>
+      </p:sp>
+      <p:cxnSp>
+        <p:nvCxnSpPr>
+          <p:cNvPr id="9" name="Connector 8"/>
+          <p:cNvCxnSpPr/>
+          <p:nvPr/>
+        </p:nvCxnSpPr>
+        <p:spPr>
+          <a:xfrm flipV="1">
+            <a:off x="5486400" y="2537460"/>
+            <a:ext cx="685800" cy="982980"/>
+          </a:xfrm>
+          <a:prstGeom prst="bentConnector3">
+            <a:avLst/>
+          </a:prstGeom>
+          <a:ln w="19050">
+            <a:solidFill>
+              <a:srgbClr val="8A93A3"/>
+            </a:solidFill>
+          </a:ln>
+          <a:effectLst/>
+        </p:spPr>
+        <p:style>
+          <a:lnRef idx="2">
+            <a:schemeClr val="accent1"/>
+          </a:lnRef>
+          <a:fillRef idx="0">
+            <a:schemeClr val="accent1"/>
+          </a:fillRef>
+          <a:effectRef idx="1">
+            <a:schemeClr val="accent1"/>
+          </a:effectRef>
+          <a:fontRef idx="minor">
+            <a:schemeClr val="tx1"/>
+          </a:fontRef>
+        </p:style>
+      </p:cxnSp>
+      <p:sp>
+        <p:nvSpPr>
+          <p:cNvPr id="10" name="Rounded Rectangle 9"/>
+          <p:cNvSpPr/>
+          <p:nvPr/>
+        </p:nvSpPr>
+        <p:spPr>
+          <a:xfrm>
+            <a:off x="6172200" y="1828800"/>
+            <a:ext cx="3017520" cy="1417320"/>
+          </a:xfrm>
+          <a:prstGeom prst="roundRect">
+            <a:avLst/>
+          </a:prstGeom>
+          <a:solidFill>
+            <a:srgbClr val="DDF4F2"/>
+          </a:solidFill>
+          <a:ln w="25400">
+            <a:solidFill>
+              <a:srgbClr val="12B5A5"/>
+            </a:solidFill>
+          </a:ln>
+          <a:effectLst/>
+        </p:spPr>
+        <p:style>
+          <a:lnRef idx="1">
+            <a:schemeClr val="accent1"/>
+          </a:lnRef>
+          <a:fillRef idx="3">
+            <a:schemeClr val="accent1"/>
+          </a:fillRef>
+          <a:effectRef idx="2">
+            <a:schemeClr val="accent1"/>
+          </a:effectRef>
+          <a:fontRef idx="minor">
+            <a:schemeClr val="lt1"/>
+          </a:fontRef>
+        </p:style>
+        <p:txBody>
+          <a:bodyPr rtlCol="0" anchor="ctr" wrap="square"/>
+          <a:lstStyle/>
+          <a:p>
+            <a:pPr algn="ctr"/>
+            <a:r>
+              <a:rPr sz="1300" b="1">
+                <a:solidFill>
+                  <a:srgbClr val="1A2238"/>
+                </a:solidFill>
+              </a:rPr>
+              <a:t>mean branch</a:t>
+            </a:r>
+          </a:p>
+          <a:p>
+            <a:pPr algn="ctr"/>
+            <a:r>
+              <a:rPr sz="1000" b="0">
+                <a:solidFill>
+                  <a:srgbClr val="8A93A3"/>
+                </a:solidFill>
+              </a:rPr>
+              <a:t>Linear 128 -&gt; 231 (21x11)</a:t>
+            </a:r>
+          </a:p>
+          <a:p>
+            <a:pPr algn="ctr"/>
+            <a:r>
+              <a:rPr sz="1000" b="0">
+                <a:solidFill>
+                  <a:srgbClr val="8A93A3"/>
+                </a:solidFill>
+              </a:rPr>
+              <a:t>softmax per phase: m_p, the oxide mix</a:t>
+            </a:r>
+          </a:p>
+          <a:p>
+            <a:pPr algn="ctr"/>
+            <a:r>
+              <a:rPr sz="1000" b="0">
+                <a:solidFill>
+                  <a:srgbClr val="8A93A3"/>
+                </a:solidFill>
+              </a:rPr>
+              <a:t>29,799 params</a:t>
+            </a:r>
+          </a:p>
+        </p:txBody>
+      </p:sp>
+      <p:sp>
+        <p:nvSpPr>
+          <p:cNvPr id="11" name="Right Arrow 10"/>
+          <p:cNvSpPr/>
+          <p:nvPr/>
+        </p:nvSpPr>
+        <p:spPr>
+          <a:xfrm>
+            <a:off x="9281160" y="2372868"/>
+            <a:ext cx="365760" cy="320040"/>
+          </a:xfrm>
+          <a:prstGeom prst="rightArrow">
+            <a:avLst/>
+          </a:prstGeom>
+          <a:solidFill>
+            <a:srgbClr val="1A2238"/>
+          </a:solidFill>
+          <a:ln>
+            <a:noFill/>
+          </a:ln>
+          <a:effectLst/>
+        </p:spPr>
+        <p:style>
+          <a:lnRef idx="1">
+            <a:schemeClr val="accent1"/>
+          </a:lnRef>
+          <a:fillRef idx="3">
+            <a:schemeClr val="accent1"/>
+          </a:fillRef>
+          <a:effectRef idx="2">
+            <a:schemeClr val="accent1"/>
+          </a:effectRef>
+          <a:fontRef idx="minor">
+            <a:schemeClr val="lt1"/>
+          </a:fontRef>
+        </p:style>
+        <p:txBody>
+          <a:bodyPr rtlCol="0" anchor="ctr"/>
+          <a:lstStyle/>
+          <a:p>
+            <a:pPr algn="ctr"/>
+          </a:p>
+        </p:txBody>
+      </p:sp>
+      <p:sp>
+        <p:nvSpPr>
+          <p:cNvPr id="12" name="Rounded Rectangle 11"/>
+          <p:cNvSpPr/>
+          <p:nvPr/>
+        </p:nvSpPr>
+        <p:spPr>
+          <a:xfrm>
+            <a:off x="9738360" y="1874519"/>
+            <a:ext cx="2057400" cy="1325880"/>
+          </a:xfrm>
+          <a:prstGeom prst="roundRect">
+            <a:avLst/>
+          </a:prstGeom>
+          <a:solidFill>
+            <a:srgbClr val="FFFFFF"/>
+          </a:solidFill>
+          <a:ln w="12700">
+            <a:solidFill>
+              <a:srgbClr val="C8CDD6"/>
+            </a:solidFill>
+          </a:ln>
+          <a:effectLst/>
+        </p:spPr>
+        <p:style>
+          <a:lnRef idx="1">
+            <a:schemeClr val="accent1"/>
+          </a:lnRef>
+          <a:fillRef idx="3">
+            <a:schemeClr val="accent1"/>
+          </a:fillRef>
+          <a:effectRef idx="2">
+            <a:schemeClr val="accent1"/>
+          </a:effectRef>
+          <a:fontRef idx="minor">
+            <a:schemeClr val="lt1"/>
+          </a:fontRef>
+        </p:style>
+        <p:txBody>
+          <a:bodyPr rtlCol="0" anchor="ctr" wrap="square"/>
+          <a:lstStyle/>
+          <a:p>
+            <a:pPr algn="ctr"/>
+            <a:r>
+              <a:rPr sz="1200" b="1">
+                <a:solidFill>
+                  <a:srgbClr val="8A93A3"/>
+                </a:solidFill>
+              </a:rPr>
+              <a:t>21 simplex means</a:t>
+            </a:r>
+          </a:p>
+          <a:p>
+            <a:pPr algn="ctr"/>
+            <a:r>
+              <a:rPr sz="900" b="0">
+                <a:solidFill>
+                  <a:srgbClr val="8A93A3"/>
+                </a:solidFill>
+              </a:rPr>
+              <a:t>what each mineral</a:t>
+            </a:r>
+          </a:p>
+          <a:p>
+            <a:pPr algn="ctr"/>
+            <a:r>
+              <a:rPr sz="900" b="0">
+                <a:solidFill>
+                  <a:srgbClr val="8A93A3"/>
+                </a:solidFill>
+              </a:rPr>
+              <a:t>is made of</a:t>
+            </a:r>
+          </a:p>
+        </p:txBody>
+      </p:sp>
+      <p:cxnSp>
+        <p:nvCxnSpPr>
+          <p:cNvPr id="13" name="Connector 12"/>
+          <p:cNvCxnSpPr/>
+          <p:nvPr/>
+        </p:nvCxnSpPr>
+        <p:spPr>
+          <a:xfrm>
+            <a:off x="5486400" y="3520440"/>
+            <a:ext cx="685800" cy="1028700"/>
+          </a:xfrm>
+          <a:prstGeom prst="bentConnector3">
+            <a:avLst/>
+          </a:prstGeom>
+          <a:ln w="19050">
+            <a:solidFill>
+              <a:srgbClr val="8A93A3"/>
+            </a:solidFill>
+          </a:ln>
+          <a:effectLst/>
+        </p:spPr>
+        <p:style>
+          <a:lnRef idx="2">
+            <a:schemeClr val="accent1"/>
+          </a:lnRef>
+          <a:fillRef idx="0">
+            <a:schemeClr val="accent1"/>
+          </a:fillRef>
+          <a:effectRef idx="1">
+            <a:schemeClr val="accent1"/>
+          </a:effectRef>
+          <a:fontRef idx="minor">
+            <a:schemeClr val="tx1"/>
+          </a:fontRef>
+        </p:style>
+      </p:cxnSp>
+      <p:sp>
+        <p:nvSpPr>
+          <p:cNvPr id="14" name="Rounded Rectangle 13"/>
+          <p:cNvSpPr/>
+          <p:nvPr/>
+        </p:nvSpPr>
+        <p:spPr>
+          <a:xfrm>
+            <a:off x="6172200" y="3840480"/>
+            <a:ext cx="3017520" cy="1417320"/>
+          </a:xfrm>
+          <a:prstGeom prst="roundRect">
+            <a:avLst/>
+          </a:prstGeom>
+          <a:solidFill>
+            <a:srgbClr val="FBEEE3"/>
+          </a:solidFill>
+          <a:ln w="25400">
+            <a:solidFill>
+              <a:srgbClr val="E8883A"/>
+            </a:solidFill>
+          </a:ln>
+          <a:effectLst/>
+        </p:spPr>
+        <p:style>
+          <a:lnRef idx="1">
+            <a:schemeClr val="accent1"/>
+          </a:lnRef>
+          <a:fillRef idx="3">
+            <a:schemeClr val="accent1"/>
+          </a:fillRef>
+          <a:effectRef idx="2">
+            <a:schemeClr val="accent1"/>
+          </a:effectRef>
+          <a:fontRef idx="minor">
+            <a:schemeClr val="lt1"/>
+          </a:fontRef>
+        </p:style>
+        <p:txBody>
+          <a:bodyPr rtlCol="0" anchor="ctr" wrap="square"/>
+          <a:lstStyle/>
+          <a:p>
+            <a:pPr algn="ctr"/>
+            <a:r>
+              <a:rPr sz="1300" b="1">
+                <a:solidFill>
+                  <a:srgbClr val="1A2238"/>
+                </a:solidFill>
+              </a:rPr>
+              <a:t>concentration branch</a:t>
+            </a:r>
+          </a:p>
+          <a:p>
+            <a:pPr algn="ctr"/>
+            <a:r>
+              <a:rPr sz="1000" b="0">
+                <a:solidFill>
+                  <a:srgbClr val="8A93A3"/>
+                </a:solidFill>
+              </a:rPr>
+              <a:t>Linear 128 -&gt; 21, softplus + eps</a:t>
+            </a:r>
+          </a:p>
+          <a:p>
+            <a:pPr algn="ctr"/>
+            <a:r>
+              <a:rPr sz="1000" b="0">
+                <a:solidFill>
+                  <a:srgbClr val="8A93A3"/>
+                </a:solidFill>
+              </a:rPr>
+              <a:t>c_p = one certainty scalar per phase</a:t>
+            </a:r>
+          </a:p>
+          <a:p>
+            <a:pPr algn="ctr"/>
+            <a:r>
+              <a:rPr sz="1000" b="0">
+                <a:solidFill>
+                  <a:srgbClr val="8A93A3"/>
+                </a:solidFill>
+              </a:rPr>
+              <a:t>2,709 params</a:t>
+            </a:r>
+          </a:p>
+        </p:txBody>
+      </p:sp>
+      <p:sp>
+        <p:nvSpPr>
+          <p:cNvPr id="15" name="Right Arrow 14"/>
+          <p:cNvSpPr/>
+          <p:nvPr/>
+        </p:nvSpPr>
+        <p:spPr>
+          <a:xfrm>
+            <a:off x="9281160" y="4384548"/>
+            <a:ext cx="365760" cy="320040"/>
+          </a:xfrm>
+          <a:prstGeom prst="rightArrow">
+            <a:avLst/>
+          </a:prstGeom>
+          <a:solidFill>
+            <a:srgbClr val="1A2238"/>
+          </a:solidFill>
+          <a:ln>
+            <a:noFill/>
+          </a:ln>
+          <a:effectLst/>
+        </p:spPr>
+        <p:style>
+          <a:lnRef idx="1">
+            <a:schemeClr val="accent1"/>
+          </a:lnRef>
+          <a:fillRef idx="3">
+            <a:schemeClr val="accent1"/>
+          </a:fillRef>
+          <a:effectRef idx="2">
+            <a:schemeClr val="accent1"/>
+          </a:effectRef>
+          <a:fontRef idx="minor">
+            <a:schemeClr val="lt1"/>
+          </a:fontRef>
+        </p:style>
+        <p:txBody>
+          <a:bodyPr rtlCol="0" anchor="ctr"/>
+          <a:lstStyle/>
+          <a:p>
+            <a:pPr algn="ctr"/>
+          </a:p>
+        </p:txBody>
+      </p:sp>
+      <p:sp>
+        <p:nvSpPr>
+          <p:cNvPr id="16" name="Rounded Rectangle 15"/>
+          <p:cNvSpPr/>
+          <p:nvPr/>
+        </p:nvSpPr>
+        <p:spPr>
+          <a:xfrm>
+            <a:off x="9738360" y="3886200"/>
+            <a:ext cx="2057400" cy="1325880"/>
+          </a:xfrm>
+          <a:prstGeom prst="roundRect">
+            <a:avLst/>
+          </a:prstGeom>
+          <a:solidFill>
+            <a:srgbClr val="FFFFFF"/>
+          </a:solidFill>
+          <a:ln w="12700">
+            <a:solidFill>
+              <a:srgbClr val="C8CDD6"/>
+            </a:solidFill>
+          </a:ln>
+          <a:effectLst/>
+        </p:spPr>
+        <p:style>
+          <a:lnRef idx="1">
+            <a:schemeClr val="accent1"/>
+          </a:lnRef>
+          <a:fillRef idx="3">
+            <a:schemeClr val="accent1"/>
+          </a:fillRef>
+          <a:effectRef idx="2">
+            <a:schemeClr val="accent1"/>
+          </a:effectRef>
+          <a:fontRef idx="minor">
+            <a:schemeClr val="lt1"/>
+          </a:fontRef>
+        </p:style>
+        <p:txBody>
+          <a:bodyPr rtlCol="0" anchor="ctr" wrap="square"/>
+          <a:lstStyle/>
+          <a:p>
+            <a:pPr algn="ctr"/>
+            <a:r>
+              <a:rPr sz="1200" b="1">
+                <a:solidFill>
+                  <a:srgbClr val="8A93A3"/>
+                </a:solidFill>
+              </a:rPr>
+              <a:t>21 certainties</a:t>
+            </a:r>
+          </a:p>
+          <a:p>
+            <a:pPr algn="ctr"/>
+            <a:r>
+              <a:rPr sz="900" b="0">
+                <a:solidFill>
+                  <a:srgbClr val="8A93A3"/>
+                </a:solidFill>
+              </a:rPr>
+              <a:t>alpha_p = c_p · m_p</a:t>
+            </a:r>
+          </a:p>
+          <a:p>
+            <a:pPr algn="ctr"/>
+            <a:r>
+              <a:rPr sz="900" b="0">
+                <a:solidFill>
+                  <a:srgbClr val="8A93A3"/>
+                </a:solidFill>
+              </a:rPr>
+              <a:t>(mean invariant to c_p)</a:t>
+            </a:r>
+          </a:p>
+        </p:txBody>
+      </p:sp>
+      <p:sp>
+        <p:nvSpPr>
+          <p:cNvPr id="17" name="TextBox 16"/>
+          <p:cNvSpPr txBox="1"/>
+          <p:nvPr/>
+        </p:nvSpPr>
+        <p:spPr>
+          <a:xfrm>
+            <a:off x="502920" y="5349240"/>
+            <a:ext cx="11155680" cy="731520"/>
+          </a:xfrm>
+          <a:prstGeom prst="rect">
+            <a:avLst/>
+          </a:prstGeom>
+          <a:noFill/>
+        </p:spPr>
+        <p:txBody>
+          <a:bodyPr wrap="square">
+            <a:spAutoFit/>
+          </a:bodyPr>
+          <a:lstStyle/>
+          <a:p>
+            <a:pPr algn="l"/>
+            <a:r>
+              <a:rPr sz="1100" b="0">
+                <a:solidFill>
+                  <a:srgbClr val="1A2238"/>
+                </a:solidFill>
+              </a:rPr>
+              <a:t>65,404 trainable params (trunk 32,896 + mean 29,799 + concentration 2,709) -- ~2.0% of the frozen encoder; the largest head, and still trivially retrainable.</a:t>
+            </a:r>
+          </a:p>
+        </p:txBody>
+      </p:sp>
+      <p:sp>
+        <p:nvSpPr>
+          <p:cNvPr id="18" name="TextBox 17"/>
+          <p:cNvSpPr txBox="1"/>
+          <p:nvPr/>
+        </p:nvSpPr>
+        <p:spPr>
+          <a:xfrm>
+            <a:off x="502920" y="5669280"/>
+            <a:ext cx="11155680" cy="731520"/>
+          </a:xfrm>
+          <a:prstGeom prst="rect">
+            <a:avLst/>
+          </a:prstGeom>
+          <a:noFill/>
+        </p:spPr>
+        <p:txBody>
+          <a:bodyPr wrap="square">
+            <a:spAutoFit/>
+          </a:bodyPr>
+          <a:lstStyle/>
+          <a:p>
+            <a:pPr algn="l"/>
+            <a:r>
+              <a:rPr sz="1000" b="0">
+                <a:solidFill>
+                  <a:srgbClr val="8A93A3"/>
+                </a:solidFill>
+              </a:rPr>
+              <a:t>dials (configs/heads/joint_heads.yaml): hidden 128 . dropout 0.0 . alpha_eps 1e-6 . comp_eps 1e-4 (hard-zero clip on targets) . lambda_comp 1.0 . lambda_balance 1.0 -- fixed in code: GELU, AdamW, per-head grad-clip 1.0</a:t>
+            </a:r>
+          </a:p>
+        </p:txBody>
+      </p:sp>
+      <p:sp>
+        <p:nvSpPr>
+          <p:cNvPr id="19" name="Rounded Rectangle 18"/>
+          <p:cNvSpPr/>
+          <p:nvPr/>
+        </p:nvSpPr>
+        <p:spPr>
+          <a:xfrm>
+            <a:off x="1463040" y="6035040"/>
+            <a:ext cx="3139440" cy="777240"/>
+          </a:xfrm>
+          <a:prstGeom prst="roundRect">
+            <a:avLst/>
+          </a:prstGeom>
+          <a:solidFill>
+            <a:srgbClr val="FFFFFF"/>
+          </a:solidFill>
+          <a:ln w="12700">
+            <a:solidFill>
+              <a:srgbClr val="C8CDD6"/>
+            </a:solidFill>
+          </a:ln>
+          <a:effectLst/>
+        </p:spPr>
+        <p:style>
+          <a:lnRef idx="1">
+            <a:schemeClr val="accent1"/>
+          </a:lnRef>
+          <a:fillRef idx="3">
+            <a:schemeClr val="accent1"/>
+          </a:fillRef>
+          <a:effectRef idx="2">
+            <a:schemeClr val="accent1"/>
+          </a:effectRef>
+          <a:fontRef idx="minor">
+            <a:schemeClr val="lt1"/>
+          </a:fontRef>
+        </p:style>
+        <p:txBody>
+          <a:bodyPr rtlCol="0" anchor="ctr" wrap="square"/>
+          <a:lstStyle/>
+          <a:p>
+            <a:pPr algn="ctr"/>
+            <a:r>
+              <a:rPr sz="1200" b="1">
+                <a:solidFill>
+                  <a:srgbClr val="8A93A3"/>
+                </a:solidFill>
+              </a:rPr>
+              <a:t>alpha_p = c_p · softmax(u_p)</a:t>
+            </a:r>
+          </a:p>
+          <a:p>
+            <a:pPr algn="ctr"/>
+            <a:r>
+              <a:rPr sz="900" b="0">
+                <a:solidFill>
+                  <a:srgbClr val="8A93A3"/>
+                </a:solidFill>
+              </a:rPr>
+              <a:t>mean x shared-concentration factorization: c_p scales certainty, never the predicted composition</a:t>
+            </a:r>
+          </a:p>
+        </p:txBody>
+      </p:sp>
+      <p:sp>
+        <p:nvSpPr>
+          <p:cNvPr id="20" name="Rounded Rectangle 19"/>
+          <p:cNvSpPr/>
+          <p:nvPr/>
+        </p:nvSpPr>
+        <p:spPr>
+          <a:xfrm>
+            <a:off x="4876800" y="6035040"/>
+            <a:ext cx="3139440" cy="777240"/>
+          </a:xfrm>
+          <a:prstGeom prst="roundRect">
+            <a:avLst/>
+          </a:prstGeom>
+          <a:solidFill>
+            <a:srgbClr val="FFFFFF"/>
+          </a:solidFill>
+          <a:ln w="12700">
+            <a:solidFill>
+              <a:srgbClr val="C8CDD6"/>
+            </a:solidFill>
+          </a:ln>
+          <a:effectLst/>
+        </p:spPr>
+        <p:style>
+          <a:lnRef idx="1">
+            <a:schemeClr val="accent1"/>
+          </a:lnRef>
+          <a:fillRef idx="3">
+            <a:schemeClr val="accent1"/>
+          </a:fillRef>
+          <a:effectRef idx="2">
+            <a:schemeClr val="accent1"/>
+          </a:effectRef>
+          <a:fontRef idx="minor">
+            <a:schemeClr val="lt1"/>
+          </a:fontRef>
+        </p:style>
+        <p:txBody>
+          <a:bodyPr rtlCol="0" anchor="ctr" wrap="square"/>
+          <a:lstStyle/>
+          <a:p>
+            <a:pPr algn="ctr"/>
+            <a:r>
+              <a:rPr sz="1200" b="1">
+                <a:solidFill>
+                  <a:srgbClr val="8A93A3"/>
+                </a:solidFill>
+              </a:rPr>
+              <a:t>L_comp = −mean_{p ∈ S} log Dir(x_p | alpha_p)</a:t>
+            </a:r>
+          </a:p>
+          <a:p>
+            <a:pPr algn="ctr"/>
+            <a:r>
+              <a:rPr sz="900" b="0">
+                <a:solidFill>
+                  <a:srgbClr val="8A93A3"/>
+                </a:solidFill>
+              </a:rPr>
+              <a:t>Dirichlet NLL only where the label marks phase p present; targets eps-clipped to full support, renormalized</a:t>
+            </a:r>
+          </a:p>
+        </p:txBody>
+      </p:sp>
+      <p:sp>
+        <p:nvSpPr>
+          <p:cNvPr id="21" name="Rounded Rectangle 20"/>
+          <p:cNvSpPr/>
+          <p:nvPr/>
+        </p:nvSpPr>
+        <p:spPr>
+          <a:xfrm>
+            <a:off x="8290560" y="6035040"/>
+            <a:ext cx="3139440" cy="777240"/>
+          </a:xfrm>
+          <a:prstGeom prst="roundRect">
+            <a:avLst/>
+          </a:prstGeom>
+          <a:solidFill>
+            <a:srgbClr val="FFFFFF"/>
+          </a:solidFill>
+          <a:ln w="12700">
+            <a:solidFill>
+              <a:srgbClr val="C8CDD6"/>
+            </a:solidFill>
+          </a:ln>
+          <a:effectLst/>
+        </p:spPr>
+        <p:style>
+          <a:lnRef idx="1">
+            <a:schemeClr val="accent1"/>
+          </a:lnRef>
+          <a:fillRef idx="3">
+            <a:schemeClr val="accent1"/>
+          </a:fillRef>
+          <a:effectRef idx="2">
+            <a:schemeClr val="accent1"/>
+          </a:effectRef>
+          <a:fontRef idx="minor">
+            <a:schemeClr val="lt1"/>
+          </a:fontRef>
+        </p:style>
+        <p:txBody>
+          <a:bodyPr rtlCol="0" anchor="ctr" wrap="square"/>
+          <a:lstStyle/>
+          <a:p>
+            <a:pPr algn="ctr"/>
+            <a:r>
+              <a:rPr sz="1200" b="1">
+                <a:solidFill>
+                  <a:srgbClr val="8A93A3"/>
+                </a:solidFill>
+              </a:rPr>
+              <a:t>L_closure = ‖(1−F_liq−F_fl)·Σᵢ mᵢCᵢ + F_liq·C_liq + F_fl·C_fl − B‖²</a:t>
+            </a:r>
+          </a:p>
+          <a:p>
+            <a:pPr algn="ctr"/>
+            <a:r>
+              <a:rPr sz="900" b="0">
+                <a:solidFill>
+                  <a:srgbClr val="8A93A3"/>
+                </a:solidFill>
+              </a:rPr>
+              <a:t>mass balance: ModeHead's modes m x CompHead's comps C must rebuild the input bulk B; melt/fluid side teacher-forced from the corpus</a:t>
+            </a:r>
+          </a:p>
+        </p:txBody>
+      </p:sp>
+      <p:sp>
+        <p:nvSpPr>
+          <p:cNvPr id="22" name="TextBox 21"/>
+          <p:cNvSpPr txBox="1"/>
+          <p:nvPr/>
+        </p:nvSpPr>
+        <p:spPr>
+          <a:xfrm>
+            <a:off x="457200" y="6080760"/>
+            <a:ext cx="960120" cy="731520"/>
+          </a:xfrm>
+          <a:prstGeom prst="rect">
+            <a:avLst/>
+          </a:prstGeom>
+          <a:noFill/>
+        </p:spPr>
+        <p:txBody>
+          <a:bodyPr wrap="square">
+            <a:spAutoFit/>
+          </a:bodyPr>
+          <a:lstStyle/>
+          <a:p>
+            <a:pPr algn="l"/>
+            <a:r>
+              <a:rPr sz="1100" b="0">
+                <a:solidFill>
+                  <a:srgbClr val="C0392B"/>
+                </a:solidFill>
+              </a:rPr>
+              <a:t>the loss,
+explicitly:</a:t>
+            </a:r>
+          </a:p>
+        </p:txBody>
+      </p:sp>
+    </p:spTree>
+  </p:cSld>
+  <p:clrMapOvr>
+    <a:masterClrMapping/>
+  </p:clrMapOvr>
+</p:sld>
+</file>
+
+<file path=ppt/slides/slide17.xml><?xml version="1.0" encoding="utf-8"?>
+<p:sld xmlns:a="http://schemas.openxmlformats.org/drawingml/2006/main" xmlns:p="http://schemas.openxmlformats.org/presentationml/2006/main" xmlns:r="http://schemas.openxmlformats.org/officeDocument/2006/relationships">
+  <p:cSld>
+    <p:spTree>
+      <p:nvGrpSpPr>
+        <p:cNvPr id="1" name=""/>
+        <p:cNvGrpSpPr/>
+        <p:nvPr/>
+      </p:nvGrpSpPr>
+      <p:grpSpPr/>
+      <p:sp>
+        <p:nvSpPr>
+          <p:cNvPr id="2" name="TextBox 1"/>
+          <p:cNvSpPr txBox="1"/>
+          <p:nvPr/>
+        </p:nvSpPr>
+        <p:spPr>
+          <a:xfrm>
+            <a:off x="502920" y="274320"/>
+            <a:ext cx="10972800" cy="365760"/>
+          </a:xfrm>
+          <a:prstGeom prst="rect">
+            <a:avLst/>
+          </a:prstGeom>
+          <a:noFill/>
+        </p:spPr>
+        <p:txBody>
+          <a:bodyPr wrap="square">
+            <a:spAutoFit/>
+          </a:bodyPr>
+          <a:lstStyle/>
+          <a:p>
+            <a:pPr algn="l"/>
+            <a:r>
+              <a:rPr sz="1300" b="1">
+                <a:solidFill>
+                  <a:srgbClr val="2E5BFF"/>
+                </a:solidFill>
+              </a:rPr>
+              <a:t>HEADS</a:t>
+            </a:r>
+          </a:p>
+        </p:txBody>
+      </p:sp>
+      <p:sp>
+        <p:nvSpPr>
+          <p:cNvPr id="3" name="TextBox 2"/>
+          <p:cNvSpPr txBox="1"/>
+          <p:nvPr/>
+        </p:nvSpPr>
+        <p:spPr>
+          <a:xfrm>
+            <a:off x="502920" y="603504"/>
+            <a:ext cx="11155680" cy="731520"/>
+          </a:xfrm>
+          <a:prstGeom prst="rect">
+            <a:avLst/>
+          </a:prstGeom>
+          <a:noFill/>
+        </p:spPr>
+        <p:txBody>
+          <a:bodyPr wrap="square">
+            <a:spAutoFit/>
+          </a:bodyPr>
+          <a:lstStyle/>
+          <a:p>
+            <a:pPr algn="l"/>
+            <a:r>
+              <a:rPr sz="2600" b="1">
+                <a:solidFill>
+                  <a:srgbClr val="1A2238"/>
+                </a:solidFill>
+              </a:rPr>
+              <a:t>Inside CondHead: a support-conditioned mixture over (T, P, H2O)</a:t>
+            </a:r>
+          </a:p>
+        </p:txBody>
+      </p:sp>
+      <p:sp>
+        <p:nvSpPr>
+          <p:cNvPr id="4" name="TextBox 3"/>
+          <p:cNvSpPr txBox="1"/>
+          <p:nvPr/>
+        </p:nvSpPr>
+        <p:spPr>
+          <a:xfrm>
+            <a:off x="502920" y="1051560"/>
+            <a:ext cx="11155680" cy="731520"/>
+          </a:xfrm>
+          <a:prstGeom prst="rect">
+            <a:avLst/>
+          </a:prstGeom>
+          <a:noFill/>
+        </p:spPr>
+        <p:txBody>
+          <a:bodyPr wrap="square">
+            <a:spAutoFit/>
+          </a:bodyPr>
+          <a:lstStyle/>
+          <a:p>
+            <a:pPr algn="l"/>
+            <a:r>
+              <a:rPr sz="1300" b="0">
+                <a:solidFill>
+                  <a:srgbClr val="8A93A3"/>
+                </a:solidFill>
+              </a:rPr>
+              <a:t>the inverse-inference head, chain rule p(support | h) x p(T, P, H2O | h, support): the presence vector joins h at the input -- teacher-forced true set at train, ModeHead-sampled at inference</a:t>
+            </a:r>
+          </a:p>
+        </p:txBody>
+      </p:sp>
+      <p:sp>
+        <p:nvSpPr>
+          <p:cNvPr id="5" name="Oval 4"/>
+          <p:cNvSpPr/>
+          <p:nvPr/>
+        </p:nvSpPr>
+        <p:spPr>
+          <a:xfrm>
+            <a:off x="777240" y="2834640"/>
+            <a:ext cx="1371600" cy="1371600"/>
+          </a:xfrm>
+          <a:prstGeom prst="ellipse">
+            <a:avLst/>
+          </a:prstGeom>
+          <a:solidFill>
+            <a:srgbClr val="E8883A"/>
+          </a:solidFill>
+          <a:ln w="31750">
+            <a:solidFill>
+              <a:srgbClr val="E8883A"/>
+            </a:solidFill>
+          </a:ln>
+          <a:effectLst/>
+        </p:spPr>
+        <p:style>
+          <a:lnRef idx="1">
+            <a:schemeClr val="accent1"/>
+          </a:lnRef>
+          <a:fillRef idx="3">
+            <a:schemeClr val="accent1"/>
+          </a:fillRef>
+          <a:effectRef idx="2">
+            <a:schemeClr val="accent1"/>
+          </a:effectRef>
+          <a:fontRef idx="minor">
+            <a:schemeClr val="lt1"/>
+          </a:fontRef>
+        </p:style>
+        <p:txBody>
+          <a:bodyPr rtlCol="0" anchor="ctr" wrap="square"/>
+          <a:lstStyle/>
+          <a:p>
+            <a:pPr algn="ctr"/>
+            <a:r>
+              <a:rPr sz="2200" b="1">
+                <a:solidFill>
+                  <a:srgbClr val="FFFFFF"/>
+                </a:solidFill>
+              </a:rPr>
+              <a:t>h</a:t>
+            </a:r>
+          </a:p>
+          <a:p>
+            <a:pPr algn="ctr"/>
+            <a:r>
+              <a:rPr sz="1900" b="0">
+                <a:solidFill>
+                  <a:srgbClr val="8A93A3"/>
+                </a:solidFill>
+              </a:rPr>
+              <a:t>256-d latent</a:t>
+            </a:r>
+          </a:p>
+        </p:txBody>
+      </p:sp>
+      <p:sp>
+        <p:nvSpPr>
+          <p:cNvPr id="6" name="TextBox 5"/>
+          <p:cNvSpPr txBox="1"/>
+          <p:nvPr/>
+        </p:nvSpPr>
+        <p:spPr>
+          <a:xfrm>
+            <a:off x="457200" y="4434840"/>
+            <a:ext cx="2011680" cy="731520"/>
+          </a:xfrm>
+          <a:prstGeom prst="rect">
+            <a:avLst/>
+          </a:prstGeom>
+          <a:noFill/>
+        </p:spPr>
+        <p:txBody>
+          <a:bodyPr wrap="square">
+            <a:spAutoFit/>
+          </a:bodyPr>
+          <a:lstStyle/>
+          <a:p>
+            <a:pPr algn="ctr"/>
+            <a:r>
+              <a:rPr sz="1000" b="0">
+                <a:solidFill>
+                  <a:srgbClr val="8A93A3"/>
+                </a:solidFill>
+              </a:rPr>
+              <a:t>frozen h [256] ++ presence vector [21] = 277-dim input</a:t>
+            </a:r>
+          </a:p>
+        </p:txBody>
+      </p:sp>
+      <p:sp>
+        <p:nvSpPr>
+          <p:cNvPr id="7" name="Right Arrow 6"/>
+          <p:cNvSpPr/>
+          <p:nvPr/>
+        </p:nvSpPr>
+        <p:spPr>
+          <a:xfrm>
+            <a:off x="2286000" y="3337560"/>
+            <a:ext cx="457200" cy="365760"/>
+          </a:xfrm>
+          <a:prstGeom prst="rightArrow">
+            <a:avLst/>
+          </a:prstGeom>
+          <a:solidFill>
+            <a:srgbClr val="1A2238"/>
+          </a:solidFill>
+          <a:ln>
+            <a:noFill/>
+          </a:ln>
+          <a:effectLst/>
+        </p:spPr>
+        <p:style>
+          <a:lnRef idx="1">
+            <a:schemeClr val="accent1"/>
+          </a:lnRef>
+          <a:fillRef idx="3">
+            <a:schemeClr val="accent1"/>
+          </a:fillRef>
+          <a:effectRef idx="2">
+            <a:schemeClr val="accent1"/>
+          </a:effectRef>
+          <a:fontRef idx="minor">
+            <a:schemeClr val="lt1"/>
+          </a:fontRef>
+        </p:style>
+        <p:txBody>
+          <a:bodyPr rtlCol="0" anchor="ctr"/>
+          <a:lstStyle/>
+          <a:p>
+            <a:pPr algn="ctr"/>
+          </a:p>
+        </p:txBody>
+      </p:sp>
+      <p:sp>
+        <p:nvSpPr>
+          <p:cNvPr id="8" name="Rounded Rectangle 7"/>
+          <p:cNvSpPr/>
+          <p:nvPr/>
+        </p:nvSpPr>
+        <p:spPr>
+          <a:xfrm>
+            <a:off x="2834640" y="2788920"/>
+            <a:ext cx="2651760" cy="1463040"/>
+          </a:xfrm>
+          <a:prstGeom prst="roundRect">
+            <a:avLst/>
+          </a:prstGeom>
+          <a:solidFill>
+            <a:srgbClr val="EAE8FB"/>
+          </a:solidFill>
+          <a:ln w="25400">
+            <a:solidFill>
+              <a:srgbClr val="6C5CE7"/>
+            </a:solidFill>
+          </a:ln>
+          <a:effectLst/>
+        </p:spPr>
+        <p:style>
+          <a:lnRef idx="1">
+            <a:schemeClr val="accent1"/>
+          </a:lnRef>
+          <a:fillRef idx="3">
+            <a:schemeClr val="accent1"/>
+          </a:fillRef>
+          <a:effectRef idx="2">
+            <a:schemeClr val="accent1"/>
+          </a:effectRef>
+          <a:fontRef idx="minor">
+            <a:schemeClr val="lt1"/>
+          </a:fontRef>
+        </p:style>
+        <p:txBody>
+          <a:bodyPr rtlCol="0" anchor="ctr" wrap="square"/>
+          <a:lstStyle/>
+          <a:p>
+            <a:pPr algn="ctr"/>
+            <a:r>
+              <a:rPr sz="1300" b="1">
+                <a:solidFill>
+                  <a:srgbClr val="1A2238"/>
+                </a:solidFill>
+              </a:rPr>
+              <a:t>own trunk</a:t>
+            </a:r>
+          </a:p>
+          <a:p>
+            <a:pPr algn="ctr"/>
+            <a:r>
+              <a:rPr sz="1000" b="0">
+                <a:solidFill>
+                  <a:srgbClr val="8A93A3"/>
+                </a:solidFill>
+              </a:rPr>
+              <a:t>Linear 277 -&gt; 128</a:t>
+            </a:r>
+          </a:p>
+          <a:p>
+            <a:pPr algn="ctr"/>
+            <a:r>
+              <a:rPr sz="1000" b="0">
+                <a:solidFill>
+                  <a:srgbClr val="8A93A3"/>
+                </a:solidFill>
+              </a:rPr>
+              <a:t>GELU + dropout</a:t>
+            </a:r>
+          </a:p>
+          <a:p>
+            <a:pPr algn="ctr"/>
+            <a:r>
+              <a:rPr sz="1000" b="0">
+                <a:solidFill>
+                  <a:srgbClr val="8A93A3"/>
+                </a:solidFill>
+              </a:rPr>
+              <a:t>35,584 params</a:t>
+            </a:r>
+          </a:p>
+        </p:txBody>
+      </p:sp>
+      <p:cxnSp>
+        <p:nvCxnSpPr>
+          <p:cNvPr id="9" name="Connector 8"/>
+          <p:cNvCxnSpPr/>
+          <p:nvPr/>
+        </p:nvCxnSpPr>
+        <p:spPr>
+          <a:xfrm flipV="1">
+            <a:off x="5486400" y="2354580"/>
+            <a:ext cx="685800" cy="1165860"/>
+          </a:xfrm>
+          <a:prstGeom prst="bentConnector3">
+            <a:avLst/>
+          </a:prstGeom>
+          <a:ln w="19050">
+            <a:solidFill>
+              <a:srgbClr val="8A93A3"/>
+            </a:solidFill>
+          </a:ln>
+          <a:effectLst/>
+        </p:spPr>
+        <p:style>
+          <a:lnRef idx="2">
+            <a:schemeClr val="accent1"/>
+          </a:lnRef>
+          <a:fillRef idx="0">
+            <a:schemeClr val="accent1"/>
+          </a:fillRef>
+          <a:effectRef idx="1">
+            <a:schemeClr val="accent1"/>
+          </a:effectRef>
+          <a:fontRef idx="minor">
+            <a:schemeClr val="tx1"/>
+          </a:fontRef>
+        </p:style>
+      </p:cxnSp>
+      <p:sp>
+        <p:nvSpPr>
+          <p:cNvPr id="10" name="Rounded Rectangle 9"/>
+          <p:cNvSpPr/>
+          <p:nvPr/>
+        </p:nvSpPr>
+        <p:spPr>
+          <a:xfrm>
+            <a:off x="6172200" y="1828800"/>
+            <a:ext cx="3017520" cy="1051560"/>
+          </a:xfrm>
+          <a:prstGeom prst="roundRect">
+            <a:avLst/>
+          </a:prstGeom>
+          <a:solidFill>
+            <a:srgbClr val="DDF4F2"/>
+          </a:solidFill>
+          <a:ln w="25400">
+            <a:solidFill>
+              <a:srgbClr val="12B5A5"/>
+            </a:solidFill>
+          </a:ln>
+          <a:effectLst/>
+        </p:spPr>
+        <p:style>
+          <a:lnRef idx="1">
+            <a:schemeClr val="accent1"/>
+          </a:lnRef>
+          <a:fillRef idx="3">
+            <a:schemeClr val="accent1"/>
+          </a:fillRef>
+          <a:effectRef idx="2">
+            <a:schemeClr val="accent1"/>
+          </a:effectRef>
+          <a:fontRef idx="minor">
+            <a:schemeClr val="lt1"/>
+          </a:fontRef>
+        </p:style>
+        <p:txBody>
+          <a:bodyPr rtlCol="0" anchor="ctr" wrap="square"/>
+          <a:lstStyle/>
+          <a:p>
+            <a:pPr algn="ctr"/>
+            <a:r>
+              <a:rPr sz="1300" b="1">
+                <a:solidFill>
+                  <a:srgbClr val="1A2238"/>
+                </a:solidFill>
+              </a:rPr>
+              <a:t>weight branch</a:t>
+            </a:r>
+          </a:p>
+          <a:p>
+            <a:pPr algn="ctr"/>
+            <a:r>
+              <a:rPr sz="1000" b="0">
+                <a:solidFill>
+                  <a:srgbClr val="8A93A3"/>
+                </a:solidFill>
+              </a:rPr>
+              <a:t>Linear 128 -&gt; 9 (3 axes x K=3)</a:t>
+            </a:r>
+          </a:p>
+          <a:p>
+            <a:pPr algn="ctr"/>
+            <a:r>
+              <a:rPr sz="1000" b="0">
+                <a:solidFill>
+                  <a:srgbClr val="8A93A3"/>
+                </a:solidFill>
+              </a:rPr>
+              <a:t>log-softmax over K per axis</a:t>
+            </a:r>
+          </a:p>
+          <a:p>
+            <a:pPr algn="ctr"/>
+            <a:r>
+              <a:rPr sz="1000" b="0">
+                <a:solidFill>
+                  <a:srgbClr val="8A93A3"/>
+                </a:solidFill>
+              </a:rPr>
+              <a:t>1,161 params</a:t>
+            </a:r>
+          </a:p>
+        </p:txBody>
+      </p:sp>
+      <p:sp>
+        <p:nvSpPr>
+          <p:cNvPr id="11" name="Right Arrow 10"/>
+          <p:cNvSpPr/>
+          <p:nvPr/>
+        </p:nvSpPr>
+        <p:spPr>
+          <a:xfrm>
+            <a:off x="9281160" y="2189988"/>
+            <a:ext cx="365760" cy="320040"/>
+          </a:xfrm>
+          <a:prstGeom prst="rightArrow">
+            <a:avLst/>
+          </a:prstGeom>
+          <a:solidFill>
+            <a:srgbClr val="1A2238"/>
+          </a:solidFill>
+          <a:ln>
+            <a:noFill/>
+          </a:ln>
+          <a:effectLst/>
+        </p:spPr>
+        <p:style>
+          <a:lnRef idx="1">
+            <a:schemeClr val="accent1"/>
+          </a:lnRef>
+          <a:fillRef idx="3">
+            <a:schemeClr val="accent1"/>
+          </a:fillRef>
+          <a:effectRef idx="2">
+            <a:schemeClr val="accent1"/>
+          </a:effectRef>
+          <a:fontRef idx="minor">
+            <a:schemeClr val="lt1"/>
+          </a:fontRef>
+        </p:style>
+        <p:txBody>
+          <a:bodyPr rtlCol="0" anchor="ctr"/>
+          <a:lstStyle/>
+          <a:p>
+            <a:pPr algn="ctr"/>
+          </a:p>
+        </p:txBody>
+      </p:sp>
+      <p:sp>
+        <p:nvSpPr>
+          <p:cNvPr id="12" name="Rounded Rectangle 11"/>
+          <p:cNvSpPr/>
+          <p:nvPr/>
+        </p:nvSpPr>
+        <p:spPr>
+          <a:xfrm>
+            <a:off x="9738360" y="1874519"/>
+            <a:ext cx="2057400" cy="960119"/>
+          </a:xfrm>
+          <a:prstGeom prst="roundRect">
+            <a:avLst/>
+          </a:prstGeom>
+          <a:solidFill>
+            <a:srgbClr val="FFFFFF"/>
+          </a:solidFill>
+          <a:ln w="12700">
+            <a:solidFill>
+              <a:srgbClr val="C8CDD6"/>
+            </a:solidFill>
+          </a:ln>
+          <a:effectLst/>
+        </p:spPr>
+        <p:style>
+          <a:lnRef idx="1">
+            <a:schemeClr val="accent1"/>
+          </a:lnRef>
+          <a:fillRef idx="3">
+            <a:schemeClr val="accent1"/>
+          </a:fillRef>
+          <a:effectRef idx="2">
+            <a:schemeClr val="accent1"/>
+          </a:effectRef>
+          <a:fontRef idx="minor">
+            <a:schemeClr val="lt1"/>
+          </a:fontRef>
+        </p:style>
+        <p:txBody>
+          <a:bodyPr rtlCol="0" anchor="ctr" wrap="square"/>
+          <a:lstStyle/>
+          <a:p>
+            <a:pPr algn="ctr"/>
+            <a:r>
+              <a:rPr sz="1200" b="1">
+                <a:solidFill>
+                  <a:srgbClr val="8A93A3"/>
+                </a:solidFill>
+              </a:rPr>
+              <a:t>mixture weights</a:t>
+            </a:r>
+          </a:p>
+          <a:p>
+            <a:pPr algn="ctr"/>
+            <a:r>
+              <a:rPr sz="900" b="0">
+                <a:solidFill>
+                  <a:srgbClr val="8A93A3"/>
+                </a:solidFill>
+              </a:rPr>
+              <a:t>which condition mode,</a:t>
+            </a:r>
+          </a:p>
+          <a:p>
+            <a:pPr algn="ctr"/>
+            <a:r>
+              <a:rPr sz="900" b="0">
+                <a:solidFill>
+                  <a:srgbClr val="8A93A3"/>
+                </a:solidFill>
+              </a:rPr>
+              <a:t>how likely</a:t>
+            </a:r>
+          </a:p>
+        </p:txBody>
+      </p:sp>
+      <p:cxnSp>
+        <p:nvCxnSpPr>
+          <p:cNvPr id="13" name="Connector 12"/>
+          <p:cNvCxnSpPr/>
+          <p:nvPr/>
+        </p:nvCxnSpPr>
+        <p:spPr>
+          <a:xfrm>
+            <a:off x="5486400" y="3520440"/>
+            <a:ext cx="685800" cy="22860"/>
+          </a:xfrm>
+          <a:prstGeom prst="bentConnector3">
+            <a:avLst/>
+          </a:prstGeom>
+          <a:ln w="19050">
+            <a:solidFill>
+              <a:srgbClr val="8A93A3"/>
+            </a:solidFill>
+          </a:ln>
+          <a:effectLst/>
+        </p:spPr>
+        <p:style>
+          <a:lnRef idx="2">
+            <a:schemeClr val="accent1"/>
+          </a:lnRef>
+          <a:fillRef idx="0">
+            <a:schemeClr val="accent1"/>
+          </a:fillRef>
+          <a:effectRef idx="1">
+            <a:schemeClr val="accent1"/>
+          </a:effectRef>
+          <a:fontRef idx="minor">
+            <a:schemeClr val="tx1"/>
+          </a:fontRef>
+        </p:style>
+      </p:cxnSp>
+      <p:sp>
+        <p:nvSpPr>
+          <p:cNvPr id="14" name="Rounded Rectangle 13"/>
+          <p:cNvSpPr/>
+          <p:nvPr/>
+        </p:nvSpPr>
+        <p:spPr>
+          <a:xfrm>
+            <a:off x="6172200" y="3017520"/>
+            <a:ext cx="3017520" cy="1051560"/>
+          </a:xfrm>
+          <a:prstGeom prst="roundRect">
+            <a:avLst/>
+          </a:prstGeom>
+          <a:solidFill>
+            <a:srgbClr val="E1F1EF"/>
+          </a:solidFill>
+          <a:ln w="25400">
+            <a:solidFill>
+              <a:srgbClr val="2A9D8F"/>
+            </a:solidFill>
+          </a:ln>
+          <a:effectLst/>
+        </p:spPr>
+        <p:style>
+          <a:lnRef idx="1">
+            <a:schemeClr val="accent1"/>
+          </a:lnRef>
+          <a:fillRef idx="3">
+            <a:schemeClr val="accent1"/>
+          </a:fillRef>
+          <a:effectRef idx="2">
+            <a:schemeClr val="accent1"/>
+          </a:effectRef>
+          <a:fontRef idx="minor">
+            <a:schemeClr val="lt1"/>
+          </a:fontRef>
+        </p:style>
+        <p:txBody>
+          <a:bodyPr rtlCol="0" anchor="ctr" wrap="square"/>
+          <a:lstStyle/>
+          <a:p>
+            <a:pPr algn="ctr"/>
+            <a:r>
+              <a:rPr sz="1300" b="1">
+                <a:solidFill>
+                  <a:srgbClr val="1A2238"/>
+                </a:solidFill>
+              </a:rPr>
+              <a:t>mean branch</a:t>
+            </a:r>
+          </a:p>
+          <a:p>
+            <a:pPr algn="ctr"/>
+            <a:r>
+              <a:rPr sz="1000" b="0">
+                <a:solidFill>
+                  <a:srgbClr val="8A93A3"/>
+                </a:solidFill>
+              </a:rPr>
+              <a:t>Linear 128 -&gt; 9</a:t>
+            </a:r>
+          </a:p>
+          <a:p>
+            <a:pPr algn="ctr"/>
+            <a:r>
+              <a:rPr sz="1000" b="0">
+                <a:solidFill>
+                  <a:srgbClr val="8A93A3"/>
+                </a:solidFill>
+              </a:rPr>
+              <a:t>mu_k in raw units (C, kbar, wt%)</a:t>
+            </a:r>
+          </a:p>
+          <a:p>
+            <a:pPr algn="ctr"/>
+            <a:r>
+              <a:rPr sz="1000" b="0">
+                <a:solidFill>
+                  <a:srgbClr val="8A93A3"/>
+                </a:solidFill>
+              </a:rPr>
+              <a:t>1,161 params</a:t>
+            </a:r>
+          </a:p>
+        </p:txBody>
+      </p:sp>
+      <p:sp>
+        <p:nvSpPr>
+          <p:cNvPr id="15" name="Right Arrow 14"/>
+          <p:cNvSpPr/>
+          <p:nvPr/>
+        </p:nvSpPr>
+        <p:spPr>
+          <a:xfrm>
+            <a:off x="9281160" y="3378708"/>
+            <a:ext cx="365760" cy="320040"/>
+          </a:xfrm>
+          <a:prstGeom prst="rightArrow">
+            <a:avLst/>
+          </a:prstGeom>
+          <a:solidFill>
+            <a:srgbClr val="1A2238"/>
+          </a:solidFill>
+          <a:ln>
+            <a:noFill/>
+          </a:ln>
+          <a:effectLst/>
+        </p:spPr>
+        <p:style>
+          <a:lnRef idx="1">
+            <a:schemeClr val="accent1"/>
+          </a:lnRef>
+          <a:fillRef idx="3">
+            <a:schemeClr val="accent1"/>
+          </a:fillRef>
+          <a:effectRef idx="2">
+            <a:schemeClr val="accent1"/>
+          </a:effectRef>
+          <a:fontRef idx="minor">
+            <a:schemeClr val="lt1"/>
+          </a:fontRef>
+        </p:style>
+        <p:txBody>
+          <a:bodyPr rtlCol="0" anchor="ctr"/>
+          <a:lstStyle/>
+          <a:p>
+            <a:pPr algn="ctr"/>
+          </a:p>
+        </p:txBody>
+      </p:sp>
+      <p:sp>
+        <p:nvSpPr>
+          <p:cNvPr id="16" name="Rounded Rectangle 15"/>
+          <p:cNvSpPr/>
+          <p:nvPr/>
+        </p:nvSpPr>
+        <p:spPr>
+          <a:xfrm>
+            <a:off x="9738360" y="3063239"/>
+            <a:ext cx="2057400" cy="960119"/>
+          </a:xfrm>
+          <a:prstGeom prst="roundRect">
+            <a:avLst/>
+          </a:prstGeom>
+          <a:solidFill>
+            <a:srgbClr val="FFFFFF"/>
+          </a:solidFill>
+          <a:ln w="12700">
+            <a:solidFill>
+              <a:srgbClr val="C8CDD6"/>
+            </a:solidFill>
+          </a:ln>
+          <a:effectLst/>
+        </p:spPr>
+        <p:style>
+          <a:lnRef idx="1">
+            <a:schemeClr val="accent1"/>
+          </a:lnRef>
+          <a:fillRef idx="3">
+            <a:schemeClr val="accent1"/>
+          </a:fillRef>
+          <a:effectRef idx="2">
+            <a:schemeClr val="accent1"/>
+          </a:effectRef>
+          <a:fontRef idx="minor">
+            <a:schemeClr val="lt1"/>
+          </a:fontRef>
+        </p:style>
+        <p:txBody>
+          <a:bodyPr rtlCol="0" anchor="ctr" wrap="square"/>
+          <a:lstStyle/>
+          <a:p>
+            <a:pPr algn="ctr"/>
+            <a:r>
+              <a:rPr sz="1200" b="1">
+                <a:solidFill>
+                  <a:srgbClr val="8A93A3"/>
+                </a:solidFill>
+              </a:rPr>
+              <a:t>component centers</a:t>
+            </a:r>
+          </a:p>
+          <a:p>
+            <a:pPr algn="ctr"/>
+            <a:r>
+              <a:rPr sz="900" b="0">
+                <a:solidFill>
+                  <a:srgbClr val="8A93A3"/>
+                </a:solidFill>
+              </a:rPr>
+              <a:t>e.g. deep-wet vs</a:t>
+            </a:r>
+          </a:p>
+          <a:p>
+            <a:pPr algn="ctr"/>
+            <a:r>
+              <a:rPr sz="900" b="0">
+                <a:solidFill>
+                  <a:srgbClr val="8A93A3"/>
+                </a:solidFill>
+              </a:rPr>
+              <a:t>shallow-dry</a:t>
+            </a:r>
+          </a:p>
+        </p:txBody>
+      </p:sp>
+      <p:cxnSp>
+        <p:nvCxnSpPr>
+          <p:cNvPr id="17" name="Connector 16"/>
+          <p:cNvCxnSpPr/>
+          <p:nvPr/>
+        </p:nvCxnSpPr>
+        <p:spPr>
+          <a:xfrm>
+            <a:off x="5486400" y="3520440"/>
+            <a:ext cx="685800" cy="1211580"/>
+          </a:xfrm>
+          <a:prstGeom prst="bentConnector3">
+            <a:avLst/>
+          </a:prstGeom>
+          <a:ln w="19050">
+            <a:solidFill>
+              <a:srgbClr val="8A93A3"/>
+            </a:solidFill>
+          </a:ln>
+          <a:effectLst/>
+        </p:spPr>
+        <p:style>
+          <a:lnRef idx="2">
+            <a:schemeClr val="accent1"/>
+          </a:lnRef>
+          <a:fillRef idx="0">
+            <a:schemeClr val="accent1"/>
+          </a:fillRef>
+          <a:effectRef idx="1">
+            <a:schemeClr val="accent1"/>
+          </a:effectRef>
+          <a:fontRef idx="minor">
+            <a:schemeClr val="tx1"/>
+          </a:fontRef>
+        </p:style>
+      </p:cxnSp>
+      <p:sp>
+        <p:nvSpPr>
+          <p:cNvPr id="18" name="Rounded Rectangle 17"/>
+          <p:cNvSpPr/>
+          <p:nvPr/>
+        </p:nvSpPr>
+        <p:spPr>
+          <a:xfrm>
+            <a:off x="6172200" y="4206240"/>
+            <a:ext cx="3017520" cy="1051560"/>
+          </a:xfrm>
+          <a:prstGeom prst="roundRect">
+            <a:avLst/>
+          </a:prstGeom>
+          <a:solidFill>
+            <a:srgbClr val="FBEEE3"/>
+          </a:solidFill>
+          <a:ln w="25400">
+            <a:solidFill>
+              <a:srgbClr val="E8883A"/>
+            </a:solidFill>
+          </a:ln>
+          <a:effectLst/>
+        </p:spPr>
+        <p:style>
+          <a:lnRef idx="1">
+            <a:schemeClr val="accent1"/>
+          </a:lnRef>
+          <a:fillRef idx="3">
+            <a:schemeClr val="accent1"/>
+          </a:fillRef>
+          <a:effectRef idx="2">
+            <a:schemeClr val="accent1"/>
+          </a:effectRef>
+          <a:fontRef idx="minor">
+            <a:schemeClr val="lt1"/>
+          </a:fontRef>
+        </p:style>
+        <p:txBody>
+          <a:bodyPr rtlCol="0" anchor="ctr" wrap="square"/>
+          <a:lstStyle/>
+          <a:p>
+            <a:pPr algn="ctr"/>
+            <a:r>
+              <a:rPr sz="1300" b="1">
+                <a:solidFill>
+                  <a:srgbClr val="1A2238"/>
+                </a:solidFill>
+              </a:rPr>
+              <a:t>spread branch</a:t>
+            </a:r>
+          </a:p>
+          <a:p>
+            <a:pPr algn="ctr"/>
+            <a:r>
+              <a:rPr sz="1000" b="0">
+                <a:solidFill>
+                  <a:srgbClr val="8A93A3"/>
+                </a:solidFill>
+              </a:rPr>
+              <a:t>Linear 128 -&gt; 9, softplus + eps</a:t>
+            </a:r>
+          </a:p>
+          <a:p>
+            <a:pPr algn="ctr"/>
+            <a:r>
+              <a:rPr sz="1000" b="0">
+                <a:solidFill>
+                  <a:srgbClr val="8A93A3"/>
+                </a:solidFill>
+              </a:rPr>
+              <a:t>sigma_k, heteroscedastic</a:t>
+            </a:r>
+          </a:p>
+          <a:p>
+            <a:pPr algn="ctr"/>
+            <a:r>
+              <a:rPr sz="1000" b="0">
+                <a:solidFill>
+                  <a:srgbClr val="8A93A3"/>
+                </a:solidFill>
+              </a:rPr>
+              <a:t>1,161 params</a:t>
+            </a:r>
+          </a:p>
+        </p:txBody>
+      </p:sp>
+      <p:sp>
+        <p:nvSpPr>
+          <p:cNvPr id="19" name="Right Arrow 18"/>
+          <p:cNvSpPr/>
+          <p:nvPr/>
+        </p:nvSpPr>
+        <p:spPr>
+          <a:xfrm>
+            <a:off x="9281160" y="4567428"/>
+            <a:ext cx="365760" cy="320040"/>
+          </a:xfrm>
+          <a:prstGeom prst="rightArrow">
+            <a:avLst/>
+          </a:prstGeom>
+          <a:solidFill>
+            <a:srgbClr val="1A2238"/>
+          </a:solidFill>
+          <a:ln>
+            <a:noFill/>
+          </a:ln>
+          <a:effectLst/>
+        </p:spPr>
+        <p:style>
+          <a:lnRef idx="1">
+            <a:schemeClr val="accent1"/>
+          </a:lnRef>
+          <a:fillRef idx="3">
+            <a:schemeClr val="accent1"/>
+          </a:fillRef>
+          <a:effectRef idx="2">
+            <a:schemeClr val="accent1"/>
+          </a:effectRef>
+          <a:fontRef idx="minor">
+            <a:schemeClr val="lt1"/>
+          </a:fontRef>
+        </p:style>
+        <p:txBody>
+          <a:bodyPr rtlCol="0" anchor="ctr"/>
+          <a:lstStyle/>
+          <a:p>
+            <a:pPr algn="ctr"/>
+          </a:p>
+        </p:txBody>
+      </p:sp>
+      <p:sp>
+        <p:nvSpPr>
+          <p:cNvPr id="20" name="Rounded Rectangle 19"/>
+          <p:cNvSpPr/>
+          <p:nvPr/>
+        </p:nvSpPr>
+        <p:spPr>
+          <a:xfrm>
+            <a:off x="9738360" y="4251959"/>
+            <a:ext cx="2057400" cy="960119"/>
+          </a:xfrm>
+          <a:prstGeom prst="roundRect">
+            <a:avLst/>
+          </a:prstGeom>
+          <a:solidFill>
+            <a:srgbClr val="FFFFFF"/>
+          </a:solidFill>
+          <a:ln w="12700">
+            <a:solidFill>
+              <a:srgbClr val="C8CDD6"/>
+            </a:solidFill>
+          </a:ln>
+          <a:effectLst/>
+        </p:spPr>
+        <p:style>
+          <a:lnRef idx="1">
+            <a:schemeClr val="accent1"/>
+          </a:lnRef>
+          <a:fillRef idx="3">
+            <a:schemeClr val="accent1"/>
+          </a:fillRef>
+          <a:effectRef idx="2">
+            <a:schemeClr val="accent1"/>
+          </a:effectRef>
+          <a:fontRef idx="minor">
+            <a:schemeClr val="lt1"/>
+          </a:fontRef>
+        </p:style>
+        <p:txBody>
+          <a:bodyPr rtlCol="0" anchor="ctr" wrap="square"/>
+          <a:lstStyle/>
+          <a:p>
+            <a:pPr algn="ctr"/>
+            <a:r>
+              <a:rPr sz="1200" b="1">
+                <a:solidFill>
+                  <a:srgbClr val="8A93A3"/>
+                </a:solidFill>
+              </a:rPr>
+              <a:t>per-mode spreads</a:t>
+            </a:r>
+          </a:p>
+          <a:p>
+            <a:pPr algn="ctr"/>
+            <a:r>
+              <a:rPr sz="900" b="0">
+                <a:solidFill>
+                  <a:srgbClr val="8A93A3"/>
+                </a:solidFill>
+              </a:rPr>
+              <a:t>row-dependent</a:t>
+            </a:r>
+          </a:p>
+          <a:p>
+            <a:pPr algn="ctr"/>
+            <a:r>
+              <a:rPr sz="900" b="0">
+                <a:solidFill>
+                  <a:srgbClr val="8A93A3"/>
+                </a:solidFill>
+              </a:rPr>
+              <a:t>error bars</a:t>
+            </a:r>
+          </a:p>
+        </p:txBody>
+      </p:sp>
+      <p:sp>
+        <p:nvSpPr>
+          <p:cNvPr id="21" name="TextBox 20"/>
+          <p:cNvSpPr txBox="1"/>
+          <p:nvPr/>
+        </p:nvSpPr>
+        <p:spPr>
+          <a:xfrm>
+            <a:off x="502920" y="5349240"/>
+            <a:ext cx="11155680" cy="731520"/>
+          </a:xfrm>
+          <a:prstGeom prst="rect">
+            <a:avLst/>
+          </a:prstGeom>
+          <a:noFill/>
+        </p:spPr>
+        <p:txBody>
+          <a:bodyPr wrap="square">
+            <a:spAutoFit/>
+          </a:bodyPr>
+          <a:lstStyle/>
+          <a:p>
+            <a:pPr algn="l"/>
+            <a:r>
+              <a:rPr sz="1100" b="0">
+                <a:solidFill>
+                  <a:srgbClr val="1A2238"/>
+                </a:solidFill>
+              </a:rPr>
+              <a:t>39,067 trainable params (trunk 35,584 + 3 x 1,161) -- ~1.2% of the frozen encoder; output biases seeded at the targets' mean/std (raw-unit cold-start fix: an unseeded head starts ~1,300 sigmas from typical T).</a:t>
+            </a:r>
+          </a:p>
+        </p:txBody>
+      </p:sp>
+      <p:sp>
+        <p:nvSpPr>
+          <p:cNvPr id="22" name="TextBox 21"/>
+          <p:cNvSpPr txBox="1"/>
+          <p:nvPr/>
+        </p:nvSpPr>
+        <p:spPr>
+          <a:xfrm>
+            <a:off x="502920" y="5669280"/>
+            <a:ext cx="11155680" cy="731520"/>
+          </a:xfrm>
+          <a:prstGeom prst="rect">
+            <a:avLst/>
+          </a:prstGeom>
+          <a:noFill/>
+        </p:spPr>
+        <p:txBody>
+          <a:bodyPr wrap="square">
+            <a:spAutoFit/>
+          </a:bodyPr>
+          <a:lstStyle/>
+          <a:p>
+            <a:pPr algn="l"/>
+            <a:r>
+              <a:rPr sz="1000" b="0">
+                <a:solidFill>
+                  <a:srgbClr val="8A93A3"/>
+                </a:solidFill>
+              </a:rPr>
+              <a:t>dials (configs/heads/joint_heads.yaml): cond_n_components 3 (HPO sweeps {2,3,4}) . cond_sigma_eps 1e-3 . hidden 128 . dropout 0.0 . lambda_cond 0.01 -- fixed in code: GELU, AdamW, per-head grad-clip 1.0, linear units (no log transform of T/P/H2O)</a:t>
+            </a:r>
+          </a:p>
+        </p:txBody>
+      </p:sp>
+      <p:sp>
+        <p:nvSpPr>
+          <p:cNvPr id="23" name="Rounded Rectangle 22"/>
+          <p:cNvSpPr/>
+          <p:nvPr/>
+        </p:nvSpPr>
+        <p:spPr>
+          <a:xfrm>
+            <a:off x="1463040" y="6035040"/>
+            <a:ext cx="3139440" cy="777240"/>
+          </a:xfrm>
+          <a:prstGeom prst="roundRect">
+            <a:avLst/>
+          </a:prstGeom>
+          <a:solidFill>
+            <a:srgbClr val="FFFFFF"/>
+          </a:solidFill>
+          <a:ln w="12700">
+            <a:solidFill>
+              <a:srgbClr val="C8CDD6"/>
+            </a:solidFill>
+          </a:ln>
+          <a:effectLst/>
+        </p:spPr>
+        <p:style>
+          <a:lnRef idx="1">
+            <a:schemeClr val="accent1"/>
+          </a:lnRef>
+          <a:fillRef idx="3">
+            <a:schemeClr val="accent1"/>
+          </a:fillRef>
+          <a:effectRef idx="2">
+            <a:schemeClr val="accent1"/>
+          </a:effectRef>
+          <a:fontRef idx="minor">
+            <a:schemeClr val="lt1"/>
+          </a:fontRef>
+        </p:style>
+        <p:txBody>
+          <a:bodyPr rtlCol="0" anchor="ctr" wrap="square"/>
+          <a:lstStyle/>
+          <a:p>
+            <a:pPr algn="ctr"/>
+            <a:r>
+              <a:rPr sz="1200" b="1">
+                <a:solidFill>
+                  <a:srgbClr val="8A93A3"/>
+                </a:solidFill>
+              </a:rPr>
+              <a:t>L_cond = Σ_axis −log Σ_k w_k · N(t | mu_k, sigma_k²)</a:t>
+            </a:r>
+          </a:p>
+          <a:p>
+            <a:pPr algn="ctr"/>
+            <a:r>
+              <a:rPr sz="900" b="0">
+                <a:solidFill>
+                  <a:srgbClr val="8A93A3"/>
+                </a:solidFill>
+              </a:rPr>
+              <a:t>per-axis GMM NLL in raw units; minimized when the mixture matches each rock's condition distribution per support</a:t>
+            </a:r>
+          </a:p>
+        </p:txBody>
+      </p:sp>
+      <p:sp>
+        <p:nvSpPr>
+          <p:cNvPr id="24" name="Rounded Rectangle 23"/>
+          <p:cNvSpPr/>
+          <p:nvPr/>
+        </p:nvSpPr>
+        <p:spPr>
+          <a:xfrm>
+            <a:off x="4876800" y="6035040"/>
+            <a:ext cx="3139440" cy="777240"/>
+          </a:xfrm>
+          <a:prstGeom prst="roundRect">
+            <a:avLst/>
+          </a:prstGeom>
+          <a:solidFill>
+            <a:srgbClr val="FFFFFF"/>
+          </a:solidFill>
+          <a:ln w="12700">
+            <a:solidFill>
+              <a:srgbClr val="C8CDD6"/>
+            </a:solidFill>
+          </a:ln>
+          <a:effectLst/>
+        </p:spPr>
+        <p:style>
+          <a:lnRef idx="1">
+            <a:schemeClr val="accent1"/>
+          </a:lnRef>
+          <a:fillRef idx="3">
+            <a:schemeClr val="accent1"/>
+          </a:fillRef>
+          <a:effectRef idx="2">
+            <a:schemeClr val="accent1"/>
+          </a:effectRef>
+          <a:fontRef idx="minor">
+            <a:schemeClr val="lt1"/>
+          </a:fontRef>
+        </p:style>
+        <p:txBody>
+          <a:bodyPr rtlCol="0" anchor="ctr" wrap="square"/>
+          <a:lstStyle/>
+          <a:p>
+            <a:pPr algn="ctr"/>
+            <a:r>
+              <a:rPr sz="1200" b="1">
+                <a:solidFill>
+                  <a:srgbClr val="8A93A3"/>
+                </a:solidFill>
+              </a:rPr>
+              <a:t>support in, never through the encoder</a:t>
+            </a:r>
+          </a:p>
+          <a:p>
+            <a:pPr algn="ctr"/>
+            <a:r>
+              <a:rPr sz="900" b="0">
+                <a:solidFill>
+                  <a:srgbClr val="8A93A3"/>
+                </a:solidFill>
+              </a:rPr>
+              <a:t>teacher-forced true set at train -&gt; no gradient coupling to ModeHead; sampled sets at inference (exposure bias, #31)</a:t>
+            </a:r>
+          </a:p>
+        </p:txBody>
+      </p:sp>
+      <p:sp>
+        <p:nvSpPr>
+          <p:cNvPr id="25" name="Rounded Rectangle 24"/>
+          <p:cNvSpPr/>
+          <p:nvPr/>
+        </p:nvSpPr>
+        <p:spPr>
+          <a:xfrm>
+            <a:off x="8290560" y="6035040"/>
+            <a:ext cx="3139440" cy="777240"/>
+          </a:xfrm>
+          <a:prstGeom prst="roundRect">
+            <a:avLst/>
+          </a:prstGeom>
+          <a:solidFill>
+            <a:srgbClr val="FFFFFF"/>
+          </a:solidFill>
+          <a:ln w="12700">
+            <a:solidFill>
+              <a:srgbClr val="C8CDD6"/>
+            </a:solidFill>
+          </a:ln>
+          <a:effectLst/>
+        </p:spPr>
+        <p:style>
+          <a:lnRef idx="1">
+            <a:schemeClr val="accent1"/>
+          </a:lnRef>
+          <a:fillRef idx="3">
+            <a:schemeClr val="accent1"/>
+          </a:fillRef>
+          <a:effectRef idx="2">
+            <a:schemeClr val="accent1"/>
+          </a:effectRef>
+          <a:fontRef idx="minor">
+            <a:schemeClr val="lt1"/>
+          </a:fontRef>
+        </p:style>
+        <p:txBody>
+          <a:bodyPr rtlCol="0" anchor="ctr" wrap="square"/>
+          <a:lstStyle/>
+          <a:p>
+            <a:pPr algn="ctr"/>
+            <a:r>
+              <a:rPr sz="1200" b="1">
+                <a:solidFill>
+                  <a:srgbClr val="8A93A3"/>
+                </a:solidFill>
+              </a:rPr>
+              <a:t>L = L_mode + λ_comp·L_comp + λ_cond·L_cond + λ_bal·L_closure</a:t>
+            </a:r>
+          </a:p>
+          <a:p>
+            <a:pPr algn="ctr"/>
+            <a:r>
+              <a:rPr sz="900" b="0">
+                <a:solidFill>
+                  <a:srgbClr val="8A93A3"/>
+                </a:solidFill>
+              </a:rPr>
+              <a:t>heads share no weights, so λ_cond mainly weights EARLY STOPPING (best-epoch pick), not gradients -- 0.01 = mineralogy-first</a:t>
+            </a:r>
+          </a:p>
+        </p:txBody>
+      </p:sp>
+      <p:sp>
+        <p:nvSpPr>
+          <p:cNvPr id="26" name="TextBox 25"/>
+          <p:cNvSpPr txBox="1"/>
+          <p:nvPr/>
+        </p:nvSpPr>
+        <p:spPr>
+          <a:xfrm>
+            <a:off x="457200" y="6080760"/>
+            <a:ext cx="960120" cy="731520"/>
+          </a:xfrm>
+          <a:prstGeom prst="rect">
+            <a:avLst/>
+          </a:prstGeom>
+          <a:noFill/>
+        </p:spPr>
+        <p:txBody>
+          <a:bodyPr wrap="square">
+            <a:spAutoFit/>
+          </a:bodyPr>
+          <a:lstStyle/>
+          <a:p>
+            <a:pPr algn="l"/>
+            <a:r>
+              <a:rPr sz="1100" b="0">
+                <a:solidFill>
+                  <a:srgbClr val="C0392B"/>
+                </a:solidFill>
+              </a:rPr>
+              <a:t>the loss,
+explicitly:</a:t>
+            </a:r>
+          </a:p>
+        </p:txBody>
+      </p:sp>
+    </p:spTree>
+  </p:cSld>
+  <p:clrMapOvr>
+    <a:masterClrMapping/>
+  </p:clrMapOvr>
+</p:sld>
+</file>
+
+<file path=ppt/slides/slide18.xml><?xml version="1.0" encoding="utf-8"?>
+<p:sld xmlns:a="http://schemas.openxmlformats.org/drawingml/2006/main" xmlns:p="http://schemas.openxmlformats.org/presentationml/2006/main" xmlns:r="http://schemas.openxmlformats.org/officeDocument/2006/relationships">
+  <p:cSld>
+    <p:spTree>
+      <p:nvGrpSpPr>
+        <p:cNvPr id="1" name=""/>
+        <p:cNvGrpSpPr/>
+        <p:nvPr/>
+      </p:nvGrpSpPr>
+      <p:grpSpPr/>
+      <p:sp>
+        <p:nvSpPr>
+          <p:cNvPr id="2" name="TextBox 1"/>
+          <p:cNvSpPr txBox="1"/>
+          <p:nvPr/>
+        </p:nvSpPr>
+        <p:spPr>
+          <a:xfrm>
+            <a:off x="502920" y="274320"/>
+            <a:ext cx="10972800" cy="365760"/>
+          </a:xfrm>
+          <a:prstGeom prst="rect">
+            <a:avLst/>
+          </a:prstGeom>
+          <a:noFill/>
+        </p:spPr>
+        <p:txBody>
+          <a:bodyPr wrap="square">
+            <a:spAutoFit/>
+          </a:bodyPr>
+          <a:lstStyle/>
+          <a:p>
+            <a:pPr algn="l"/>
+            <a:r>
+              <a:rPr sz="1300" b="1">
+                <a:solidFill>
+                  <a:srgbClr val="2E5BFF"/>
+                </a:solidFill>
+              </a:rPr>
+              <a:t>HEADS</a:t>
+            </a:r>
+          </a:p>
+        </p:txBody>
+      </p:sp>
+      <p:sp>
+        <p:nvSpPr>
+          <p:cNvPr id="3" name="TextBox 2"/>
+          <p:cNvSpPr txBox="1"/>
+          <p:nvPr/>
+        </p:nvSpPr>
+        <p:spPr>
+          <a:xfrm>
+            <a:off x="502920" y="603504"/>
+            <a:ext cx="11155680" cy="731520"/>
+          </a:xfrm>
+          <a:prstGeom prst="rect">
+            <a:avLst/>
+          </a:prstGeom>
+          <a:noFill/>
+        </p:spPr>
+        <p:txBody>
+          <a:bodyPr wrap="square">
+            <a:spAutoFit/>
+          </a:bodyPr>
+          <a:lstStyle/>
+          <a:p>
+            <a:pPr algn="l"/>
+            <a:r>
+              <a:rPr sz="2600" b="1">
+                <a:solidFill>
+                  <a:srgbClr val="1A2238"/>
+                </a:solidFill>
+              </a:rPr>
               <a:t>What the heads emit (distributions, not point estimates)</a:t>
             </a:r>
           </a:p>
@@ -13906,7 +16559,7 @@
 </p:sld>
 </file>
 
-<file path=ppt/slides/slide17.xml><?xml version="1.0" encoding="utf-8"?>
+<file path=ppt/slides/slide19.xml><?xml version="1.0" encoding="utf-8"?>
 <p:sld xmlns:a="http://schemas.openxmlformats.org/drawingml/2006/main" xmlns:p="http://schemas.openxmlformats.org/presentationml/2006/main" xmlns:r="http://schemas.openxmlformats.org/officeDocument/2006/relationships">
   <p:cSld>
     <p:spTree>

--- a/slides/overview.pptx
+++ b/slides/overview.pptx
@@ -1080,7 +1080,7 @@
           <a:lstStyle/>
           <a:p>
             <a:r>
-              <a:t>Anatomy of CondHead (trains in the joint trainer, checkpoints/joint_heads_seed0). Interface: concat(h [256], presence [21]) in; (log_w, mu, sigma) each [3 axes, K] out; one training example is one (bulk, draw, rung) row with targets (T_end from the rung row; P_kbar, H2O from the draw). Param counts exact (d_model 256, hidden 128, K=3). Support-conditioning is the locked chain-rule decision: independent heads assume a conditional independence the corpus violates by design -- the within-bulk label variance is driven by the shared hidden (P, H2O) path, and marginals forget which condition mode went with which support. Raw linear units are deliberate (no log transforms; negative mass is a diagnostic, not a bug -- mass_below_zero in the cond eval). init_output_bias seeds component means at target mean +/- 1 std and sigmas at the target std; without it Adam needs ~mu/lr steps to walk mu from 0 to ~900 C. lambda_cond nuance: L_cond's gradient reaches only CondHead's own weights (frozen encoder, separate trunks, teacher-forced input), and per-head clipping + Adam's per-parameter scaling make the constant nearly inert for optimization; its real lever is the val-total early stop, where 0.01 down-weights condition improvements 100x vs mineralogy (the locked mineralogy-first priority). Known limits: axes are independent mixtures (no (T, P) correlation, deferred per ADR 006); exposure bias measured, not yet mitigated (#31); T is a derived cooling endpoint, not a sampled axis, in the scenario view.</a:t>
+              <a:t>Anatomy of CondHead (trains in the joint trainer, checkpoints/joint_heads_seed0). Interface: concat(h [256], presence [21]) in; (log_w, mu, sigma) each [3 axes, K] out; one training example is one (bulk, draw, rung) row with targets (T_end from the rung row; P_kbar, H2O from the draw). Param counts exact (d_model 256, hidden 128, K=3). Support-conditioning is the locked chain-rule decision: independent heads assume a conditional independence the corpus violates by design -- the within-bulk label variance is driven by the shared hidden (P, H2O) path, and marginals forget which condition mode went with which support. Raw linear units are deliberate (no log transforms; negative mass is a diagnostic, not a bug -- mass_below_zero in the cond eval). init_output_bias seeds component means at target mean +/- 1 std and sigmas at the target std; without it Adam needs ~mu/lr steps to walk mu from 0 to ~900 C. lambda_cond nuance: L_cond's gradient reaches only CondHead's own weights (frozen encoder, separate trunks, teacher-forced input), and per-head clipping + Adam's per-parameter scaling make the constant nearly inert for optimization; per-head best selection (each head keeps its own raw-val best epoch) removed its old early-stopping lever too, leaving it a raw-unit scale absorber (mineralogy-first). Known limits: axes are independent mixtures (no (T, P) correlation, deferred per ADR 006); exposure bias measured, not yet mitigated (#31); T is a derived cooling endpoint, not a sampled axis, in the scenario view.</a:t>
             </a:r>
           </a:p>
         </p:txBody>
@@ -12628,7 +12628,7 @@
                   <a:srgbClr val="8A93A3"/>
                 </a:solidFill>
               </a:rPr>
-              <a:t>dials (configs/heads/joint_heads.yaml): hidden 128 . dropout 0.0 . alpha_eps 1e-6 . comp_eps 1e-4 (hard-zero clip on targets) . lambda_comp 1.0 . lambda_balance 1.0 -- fixed in code: GELU, AdamW, per-head grad-clip 1.0</a:t>
+              <a:t>dials (configs/heads/joint_heads.yaml): comp_hidden 128 . comp_layers 1 . dropout 0.0 . alpha_eps 1e-6 . comp_eps 1e-4 (hard-zero clip on targets) . lambda_comp 1.0 . lambda_balance 1.0 -- fixed in code: GELU, AdamW, per-head grad-clip 1.0</a:t>
             </a:r>
           </a:p>
         </p:txBody>
@@ -14005,7 +14005,7 @@
                   <a:srgbClr val="8A93A3"/>
                 </a:solidFill>
               </a:rPr>
-              <a:t>dials (configs/heads/joint_heads.yaml): cond_n_components 3 (HPO sweeps {2,3,4}) . cond_sigma_eps 1e-3 . hidden 128 . dropout 0.0 . lambda_cond 0.01 -- fixed in code: GELU, AdamW, per-head grad-clip 1.0, linear units (no log transform of T/P/H2O)</a:t>
+              <a:t>dials (configs/heads/joint_heads.yaml): cond_n_components 3 (HPO sweeps {2,3,4}) . cond_sigma_eps 1e-3 . cond_hidden 128 . cond_layers 1 . dropout 0.0 . lambda_cond 0.01 -- fixed in code: GELU, AdamW, per-head grad-clip 1.0, linear units (no log transform of T/P/H2O)</a:t>
             </a:r>
           </a:p>
         </p:txBody>
@@ -14200,7 +14200,7 @@
                   <a:srgbClr val="8A93A3"/>
                 </a:solidFill>
               </a:rPr>
-              <a:t>heads share no weights, so λ_cond mainly weights EARLY STOPPING (best-epoch pick), not gradients -- 0.01 = mineralogy-first</a:t>
+              <a:t>heads share no weights and each is snapshotted at its own raw-val best, so λ_cond only absorbs the raw-unit scale in the total</a:t>
             </a:r>
           </a:p>
         </p:txBody>

--- a/slides/overview.pptx
+++ b/slides/overview.pptx
@@ -12628,7 +12628,7 @@
                   <a:srgbClr val="8A93A3"/>
                 </a:solidFill>
               </a:rPr>
-              <a:t>dials (configs/heads/joint_heads.yaml): comp_hidden 128 . comp_layers 1 . dropout 0.0 . alpha_eps 1e-6 . comp_eps 1e-4 (hard-zero clip on targets) . lambda_comp 1.0 . lambda_balance 1.0 -- fixed in code: GELU, AdamW, per-head grad-clip 1.0</a:t>
+              <a:t>dials (configs/heads/joint_heads.yaml): comp_hidden 128 . comp_layers 1 . dropout 0.35 . alpha_eps 1e-6 . comp_eps 1e-4 (hard-zero clip on targets) . lambda_comp 1.0 . lambda_balance 54.5 -- fixed in code: GELU, AdamW, per-head grad-clip 1.0</a:t>
             </a:r>
           </a:p>
         </p:txBody>
@@ -14005,7 +14005,7 @@
                   <a:srgbClr val="8A93A3"/>
                 </a:solidFill>
               </a:rPr>
-              <a:t>dials (configs/heads/joint_heads.yaml): cond_n_components 3 (HPO sweeps {2,3,4}) . cond_sigma_eps 1e-3 . cond_hidden 128 . cond_layers 1 . dropout 0.0 . lambda_cond 0.01 -- fixed in code: GELU, AdamW, per-head grad-clip 1.0, linear units (no log transform of T/P/H2O)</a:t>
+              <a:t>dials (configs/heads/joint_heads.yaml): cond_n_components 3 . cond_sigma_eps 1e-3 . cond_hidden 128 . cond_layers 1 (architecture mini-sweep pending) . dropout 0.35 . lambda_cond 0.01 -- fixed in code: GELU, AdamW, per-head grad-clip 1.0, linear units (no log transform of T/P/H2O)</a:t>
             </a:r>
           </a:p>
         </p:txBody>

--- a/slides/overview.pptx
+++ b/slides/overview.pptx
@@ -24,6 +24,8 @@
     <p:sldId id="272" r:id="rId24"/>
     <p:sldId id="273" r:id="rId25"/>
     <p:sldId id="274" r:id="rId26"/>
+    <p:sldId id="275" r:id="rId27"/>
+    <p:sldId id="276" r:id="rId28"/>
   </p:sldIdLst>
   <p:sldSz cx="12191695" cy="6858000" type="screen4x3"/>
   <p:notesSz cx="6858000" cy="9144000"/>
@@ -800,7 +802,7 @@
           <a:lstStyle/>
           <a:p>
             <a:r>
-              <a:t>Anatomy of the trained ModeHead (checkpoints/mode_head_seed0): shared trunk Linear(256-&gt;128)+GELU+dropout, then two parallel linear branches -- presence logits (sigmoid -&gt; per-phase Bernoulli, BCE) and concentrations (softplus + eps -&gt; conditional Dirichlet, masked NLL on the true support). Param counts are exact for hidden=d_model//2. Loss boxes mirror the SSL slide: BCE is a proper scoring rule (per-rock minimum = within-bulk presence frequency, which is why intermediate p is signal); the Dirichlet NLL is masked to the label's present set (sub-composition property keeps it a proper density); λ_mag is the loss-weighting coefficient (config key magnitude_weight, 1.0 currently) -- λ chosen over w to avoid clashing with layer weights and to match the coming λ_balance / λ_comp family. 'Trained jointly' is literal chain-rule math: L is one scalar, so one backward pass and one AdamW step update all params at once. Each branch's weights appear in only its own term (the other term's gradient is exactly zero there); the trunk appears in both, so its gradient is the sum -- λ_mag is the exchange rate between the two error signals shaping the shared features. NOT alternating epochs, NOT separate optimizers, NOT staged pretraining of one branch. The hurdle split exists because one full-simplex Dirichlet cannot be simultaneously confident about absences and honest about present-phase spread (shared concentration). CompHead/CondHead follow the same small-MLP-emitting-distribution-parameters pattern; their anatomy slides follow the eval-semantics slides.</a:t>
+              <a:t>Anatomy of the trained ModeHead (checkpoints/joint_heads_seed0): shared trunk 3 stacked Linear(-&gt;256)+GELU+dropout blocks, then two parallel linear branches -- presence logits (sigmoid -&gt; per-phase Bernoulli, BCE) and concentrations (softplus + eps -&gt; conditional Dirichlet, masked NLL on the true support). Param counts are pulled from the checkpoint (mode_hidden 256, mode_layers 3, the joint-HPO winner; fANOVA put architecture near zero, the gain came with the tuned environment). Loss boxes mirror the SSL slide: BCE is a proper scoring rule (per-rock minimum = within-bulk presence frequency, which is why intermediate p is signal); the Dirichlet NLL is masked to the label's present set (sub-composition property keeps it a proper density); λ_mag is the loss-weighting coefficient (config key magnitude_weight, 0.25 tuned) -- λ chosen over w to avoid clashing with layer weights and to match the λ_balance / λ_comp family. 'Trained jointly' is literal chain-rule math: L is one scalar, so one backward pass and one AdamW step update all params at once. Each branch's weights appear in only its own term (the other term's gradient is exactly zero there); the trunk appears in both, so its gradient is the sum -- λ_mag is the exchange rate between the two error signals shaping the shared features. NOT alternating epochs, NOT separate optimizers, NOT staged pretraining of one branch. The hurdle split exists because one full-simplex Dirichlet cannot be simultaneously confident about absences and honest about present-phase spread (shared concentration). CompHead/CondHead follow the same small-MLP-emitting-distribution-parameters pattern; their two-slide reports follow ModeHead's.</a:t>
             </a:r>
           </a:p>
         </p:txBody>
@@ -1080,7 +1082,7 @@
           <a:lstStyle/>
           <a:p>
             <a:r>
-              <a:t>Anatomy of CondHead (trains in the joint trainer, checkpoints/joint_heads_seed0). Interface: concat(h [256], presence [21]) in; (log_w, mu, sigma) each [3 axes, K] out; one training example is one (bulk, draw, rung) row with targets (T_end from the rung row; P_kbar, H2O from the draw). Param counts exact (d_model 256, hidden 128, K=3). Support-conditioning is the locked chain-rule decision: independent heads assume a conditional independence the corpus violates by design -- the within-bulk label variance is driven by the shared hidden (P, H2O) path, and marginals forget which condition mode went with which support. Raw linear units are deliberate (no log transforms; negative mass is a diagnostic, not a bug -- mass_below_zero in the cond eval). init_output_bias seeds component means at target mean +/- 1 std and sigmas at the target std; without it Adam needs ~mu/lr steps to walk mu from 0 to ~900 C. lambda_cond nuance: L_cond's gradient reaches only CondHead's own weights (frozen encoder, separate trunks, teacher-forced input), and per-head clipping + Adam's per-parameter scaling make the constant nearly inert for optimization; per-head best selection (each head keeps its own raw-val best epoch) removed its old early-stopping lever too, leaving it a raw-unit scale absorber (mineralogy-first). Known limits: axes are independent mixtures (no (T, P) correlation, deferred per ADR 006); exposure bias measured, not yet mitigated (#31); T is a derived cooling endpoint, not a sampled axis, in the scenario view.</a:t>
+              <a:t>Eval-semantics slide for CompHead, mirroring the ModeHead magnitude worked example: two tracks converge at a scoring node; the truth contributes its support to the slice and meets the prediction only at scoring. Box numbers illustrative but to scale (a plag Dirichlet with alpha0 ~780 has SiO2 sd ~0.018); headline numbers are real, from results/comp_head/joint_heads_seed0/metrics.json vs the preserved joint_heads_seed0_baseline run: NLL -50.25 -&gt; -53.85, closure L2 mean 0.0181 -&gt; 0.0134 with the stable +SiO2/-Al2O3 signed bias collapsed to zero-centered residuals (the closure-penalty-form question, #38, closed on this evidence), An# parity mae 0.064 -&gt; 0.060 / r 0.920 -&gt; 0.927. The alpha0-span story is the headline fix: comp_concentration.png baseline vs tuned shows the 100-650 compression opening to 25-32,000, ordered by how constrained each mineral's chemistry really is. PIT here is per-oxide Beta marginals of the 11-simplex Dirichlet (same sub-composition property as the mode slice).</a:t>
             </a:r>
           </a:p>
         </p:txBody>
@@ -1150,7 +1152,7 @@
           <a:lstStyle/>
           <a:p>
             <a:r>
-              <a:t>Output FORM, not measured results (heads train in issue #10). ModeHead = hurdle Dirichlet over the crystals-renormalized solid assemblage (liq/fl dropped, solids sum to 1 -- matches real itemized-phenocrysts + lumped-groundmass granularity). EVERY phase gets a presence Bernoulli AND a conditional amount +/- CI; near-certain phases just have p~1. Amp 0.41 / opx 0.63 anti-correlated is the flagship multimodality (deep-wet-amp vs shallow-dry-opx), so their marginal amounts are conditional on presence, not rock-wide means. CondHead = per-axis GMM; P and H2O were sampled at generation, T is derived (cooling endpoint at the phenocryst window), hence the lower illustrative T. Second read-out view: top-K scenarios; weights labeled prior-weighted plausibility, reweightable p/q. Mass-balance closure teacher-forces the label melt fraction at training. Numbers illustrative.</a:t>
+              <a:t>Anatomy of CondHead (trains in the joint trainer, checkpoints/joint_heads_seed0). Interface: concat(h [256], presence [21]) in; (log_w, mu, sigma) each [3 axes, K] out; one training example is one (bulk, draw, rung) row with targets (T_end from the rung row; P_kbar, H2O from the draw). Param counts pulled from the checkpoint (cond_hidden 512, cond_layers 2, K=3): cond was the one head that wanted capacity -- starved at 128x1 under the shared tuned lr, fixed by the mini-sweep adoption. Support-conditioning is the locked chain-rule decision: independent heads assume a conditional independence the corpus violates by design -- the within-bulk label variance is driven by the shared hidden (P, H2O) path, and marginals forget which condition mode went with which support. Raw linear units are deliberate (no log transforms; negative mass is a diagnostic, not a bug -- mass_below_zero in the cond eval). init_output_bias seeds component means at target mean +/- 1 std and sigmas at the target std; without it Adam needs ~mu/lr steps to walk mu from 0 to ~900 C. lambda_cond nuance: L_cond's gradient reaches only CondHead's own weights (frozen encoder, separate trunks, teacher-forced input), and per-head clipping + Adam's per-parameter scaling make the constant nearly inert for optimization; per-head best selection (each head keeps its own raw-val best epoch) removed its old early-stopping lever too, leaving it a raw-unit scale absorber (mineralogy-first). Known limits: axes are independent mixtures (no (T, P) correlation, deferred per ADR 006); exposure bias measured, not yet mitigated (#31); T is a derived cooling endpoint, not a sampled axis, in the scenario view.</a:t>
             </a:r>
           </a:p>
         </p:txBody>
@@ -1220,7 +1222,7 @@
           <a:lstStyle/>
           <a:p>
             <a:r>
-              <a:t>View 2 from heads.md, modernized to the locked corpus design: crystals-renormalized (no residual-melt row -- melt-fraction head dropped), composition shared across scenarios (CompHead reads h only), no inference-time mass-balance checkmark (closure is teacher-forced at training; the inference residual as OOD signal is an open rethink). Marginal view = projection of these scenarios; scenarios are the primary object. Open mechanism detail for #10/#13: coupling conditions to assemblage in a sampled scenario requires joint sampling across heads. Numbers illustrative.</a:t>
+              <a:t>Eval-semantics slide for CondHead. The two-pass protocol is the point: teacher-forced scoring isolates the head's conditional skill p(T,P,H2O | h, true support); sampled-support scoring measures the deployed chain with ModeHead's Bernoulli draws standing in for the truth (exposure_seed pins reproducibility). Mixture drawing illustrative but to scale for a bimodal amp/opx bulk (deep-wet vs shallow-dry is the flagship condition multimodality). Real numbers from results/cond_head/joint_heads_seed0/metrics.json vs the preserved baseline: teacher-forced NLL 8.60 -&gt; 8.32 and coverage_68 0.65-0.69 -&gt; 0.67-0.72 (tuning + the 512x2 trunk), while the exposure delta WIDENED (T 2.91 -&gt; 3.94, H2O 1.53 -&gt; 2.40, P finite -&gt; inf on some rows) -- the sharper head is more wrong under mismatched supports. Coverage is central-interval mass via the mixture CDF (PIT), same construction as the mode/comp calibration reads.</a:t>
             </a:r>
           </a:p>
         </p:txBody>
@@ -1291,6 +1293,146 @@
           <a:p>
             <a:r>
               <a:t>Three corpora. Pretrain (Gard) is inputs-only and trains the encoder; the equilibrium corpus (MAGEMin cooling, phenocryst-regime endpoint -- generation pipeline on the next slide) carries the labels that train the heads; the real volcanic benchmark and mineralML grains are held out for validation.</a:t>
+            </a:r>
+          </a:p>
+        </p:txBody>
+      </p:sp>
+      <p:sp>
+        <p:nvSpPr>
+          <p:cNvPr id="4" name="Slide Number Placeholder 3"/>
+          <p:cNvSpPr>
+            <a:spLocks noGrp="1"/>
+          </p:cNvSpPr>
+          <p:nvPr>
+            <p:ph type="sldNum" idx="5" sz="quarter"/>
+          </p:nvPr>
+        </p:nvSpPr>
+        <p:spPr/>
+      </p:sp>
+    </p:spTree>
+  </p:cSld>
+  <p:clrMapOvr>
+    <a:masterClrMapping/>
+  </p:clrMapOvr>
+</p:notes>
+</file>
+
+<file path=ppt/notesSlides/notesSlide20.xml><?xml version="1.0" encoding="utf-8"?>
+<p:notes xmlns:a="http://schemas.openxmlformats.org/drawingml/2006/main" xmlns:p="http://schemas.openxmlformats.org/presentationml/2006/main" xmlns:r="http://schemas.openxmlformats.org/officeDocument/2006/relationships">
+  <p:cSld>
+    <p:spTree>
+      <p:nvGrpSpPr>
+        <p:cNvPr id="1" name=""/>
+        <p:cNvGrpSpPr/>
+        <p:nvPr/>
+      </p:nvGrpSpPr>
+      <p:grpSpPr>
+        <a:xfrm>
+          <a:off x="0" y="0"/>
+          <a:ext cx="0" cy="0"/>
+          <a:chOff x="0" y="0"/>
+          <a:chExt cx="0" cy="0"/>
+        </a:xfrm>
+      </p:grpSpPr>
+      <p:sp>
+        <p:nvSpPr>
+          <p:cNvPr id="2" name="Slide Image Placeholder 1"/>
+          <p:cNvSpPr>
+            <a:spLocks noGrp="1"/>
+          </p:cNvSpPr>
+          <p:nvPr>
+            <p:ph type="sldImg" idx="2"/>
+          </p:nvPr>
+        </p:nvSpPr>
+        <p:spPr/>
+      </p:sp>
+      <p:sp>
+        <p:nvSpPr>
+          <p:cNvPr id="3" name="Notes Placeholder 2"/>
+          <p:cNvSpPr>
+            <a:spLocks noGrp="1"/>
+          </p:cNvSpPr>
+          <p:nvPr>
+            <p:ph type="body" idx="3" sz="quarter"/>
+          </p:nvPr>
+        </p:nvSpPr>
+        <p:spPr/>
+        <p:txBody>
+          <a:bodyPr/>
+          <a:lstStyle/>
+          <a:p>
+            <a:r>
+              <a:t>Output FORM, not measured results (heads train in issue #10). ModeHead = hurdle Dirichlet over the crystals-renormalized solid assemblage (liq/fl dropped, solids sum to 1 -- matches real itemized-phenocrysts + lumped-groundmass granularity). EVERY phase gets a presence Bernoulli AND a conditional amount +/- CI; near-certain phases just have p~1. Amp 0.41 / opx 0.63 anti-correlated is the flagship multimodality (deep-wet-amp vs shallow-dry-opx), so their marginal amounts are conditional on presence, not rock-wide means. CondHead = per-axis GMM; P and H2O were sampled at generation, T is derived (cooling endpoint at the phenocryst window), hence the lower illustrative T. Second read-out view: top-K scenarios; weights labeled prior-weighted plausibility, reweightable p/q. Mass-balance closure teacher-forces the label melt fraction at training. Numbers illustrative.</a:t>
+            </a:r>
+          </a:p>
+        </p:txBody>
+      </p:sp>
+      <p:sp>
+        <p:nvSpPr>
+          <p:cNvPr id="4" name="Slide Number Placeholder 3"/>
+          <p:cNvSpPr>
+            <a:spLocks noGrp="1"/>
+          </p:cNvSpPr>
+          <p:nvPr>
+            <p:ph type="sldNum" idx="5" sz="quarter"/>
+          </p:nvPr>
+        </p:nvSpPr>
+        <p:spPr/>
+      </p:sp>
+    </p:spTree>
+  </p:cSld>
+  <p:clrMapOvr>
+    <a:masterClrMapping/>
+  </p:clrMapOvr>
+</p:notes>
+</file>
+
+<file path=ppt/notesSlides/notesSlide21.xml><?xml version="1.0" encoding="utf-8"?>
+<p:notes xmlns:a="http://schemas.openxmlformats.org/drawingml/2006/main" xmlns:p="http://schemas.openxmlformats.org/presentationml/2006/main" xmlns:r="http://schemas.openxmlformats.org/officeDocument/2006/relationships">
+  <p:cSld>
+    <p:spTree>
+      <p:nvGrpSpPr>
+        <p:cNvPr id="1" name=""/>
+        <p:cNvGrpSpPr/>
+        <p:nvPr/>
+      </p:nvGrpSpPr>
+      <p:grpSpPr>
+        <a:xfrm>
+          <a:off x="0" y="0"/>
+          <a:ext cx="0" cy="0"/>
+          <a:chOff x="0" y="0"/>
+          <a:chExt cx="0" cy="0"/>
+        </a:xfrm>
+      </p:grpSpPr>
+      <p:sp>
+        <p:nvSpPr>
+          <p:cNvPr id="2" name="Slide Image Placeholder 1"/>
+          <p:cNvSpPr>
+            <a:spLocks noGrp="1"/>
+          </p:cNvSpPr>
+          <p:nvPr>
+            <p:ph type="sldImg" idx="2"/>
+          </p:nvPr>
+        </p:nvSpPr>
+        <p:spPr/>
+      </p:sp>
+      <p:sp>
+        <p:nvSpPr>
+          <p:cNvPr id="3" name="Notes Placeholder 2"/>
+          <p:cNvSpPr>
+            <a:spLocks noGrp="1"/>
+          </p:cNvSpPr>
+          <p:nvPr>
+            <p:ph type="body" idx="3" sz="quarter"/>
+          </p:nvPr>
+        </p:nvSpPr>
+        <p:spPr/>
+        <p:txBody>
+          <a:bodyPr/>
+          <a:lstStyle/>
+          <a:p>
+            <a:r>
+              <a:t>View 2 from heads.md, modernized to the locked corpus design: crystals-renormalized (no residual-melt row -- melt-fraction head dropped), composition shared across scenarios (CompHead reads h only), no inference-time mass-balance checkmark (closure is teacher-forced at training; the inference residual as OOD signal is an open rethink). Marginal view = projection of these scenarios; scenarios are the primary object. Open mechanism detail for #10/#13: coupling conditions to assemblage in a sampled scenario requires joint sampling across heads. Numbers illustrative.</a:t>
             </a:r>
           </a:p>
         </p:txBody>
@@ -8275,7 +8417,7 @@
                   <a:srgbClr val="8A93A3"/>
                 </a:solidFill>
               </a:rPr>
-              <a:t>Linear 256 -&gt; 128</a:t>
+              <a:t>3 x [Linear -&gt; 256]</a:t>
             </a:r>
           </a:p>
           <a:p>
@@ -8286,7 +8428,7 @@
                   <a:srgbClr val="8A93A3"/>
                 </a:solidFill>
               </a:rPr>
-              <a:t>GELU + dropout</a:t>
+              <a:t>GELU + dropout each</a:t>
             </a:r>
           </a:p>
           <a:p>
@@ -8297,7 +8439,7 @@
                   <a:srgbClr val="8A93A3"/>
                 </a:solidFill>
               </a:rPr>
-              <a:t>32,896 params</a:t>
+              <a:t>197,376 params</a:t>
             </a:r>
           </a:p>
         </p:txBody>
@@ -8398,7 +8540,7 @@
                   <a:srgbClr val="8A93A3"/>
                 </a:solidFill>
               </a:rPr>
-              <a:t>Linear 128 -&gt; 21, sigmoid</a:t>
+              <a:t>Linear 256 -&gt; 21, sigmoid</a:t>
             </a:r>
           </a:p>
           <a:p>
@@ -8420,7 +8562,7 @@
                   <a:srgbClr val="8A93A3"/>
                 </a:solidFill>
               </a:rPr>
-              <a:t>2,709 params</a:t>
+              <a:t>5,397 params</a:t>
             </a:r>
           </a:p>
         </p:txBody>
@@ -8641,7 +8783,7 @@
                   <a:srgbClr val="8A93A3"/>
                 </a:solidFill>
               </a:rPr>
-              <a:t>Linear 128 -&gt; 21, softplus</a:t>
+              <a:t>Linear 256 -&gt; 21, softplus</a:t>
             </a:r>
           </a:p>
           <a:p>
@@ -8663,7 +8805,7 @@
                   <a:srgbClr val="8A93A3"/>
                 </a:solidFill>
               </a:rPr>
-              <a:t>2,709 params</a:t>
+              <a:t>5,397 params</a:t>
             </a:r>
           </a:p>
         </p:txBody>
@@ -8817,7 +8959,7 @@
                   <a:srgbClr val="1A2238"/>
                 </a:solidFill>
               </a:rPr>
-              <a:t>38,314 trainable params (trunk 32,896 + 2 x 2,709) -- ~1.2% of the frozen encoder; retrains in under a minute, so the label proxy stays cheap to revise.</a:t>
+              <a:t>208,170 trainable params (trunk 197,376 + 2 x 5,397) -- ~6.4% of the frozen encoder; the 256 x 3 trunk is the joint-HPO winner (untuned 128 x 1 gave up 0.105 nats of assemblage NLL).</a:t>
             </a:r>
           </a:p>
         </p:txBody>
@@ -8851,7 +8993,7 @@
                   <a:srgbClr val="8A93A3"/>
                 </a:solidFill>
               </a:rPr>
-              <a:t>dials (configs/heads/mode_head.yaml): hidden 128 . dropout 0.0 . magnitude_weight 1.0 . alpha_eps 1e-6 . lr 1e-3 . weight_decay 0 . batch 1024 . epochs 40 / patience 5 -- fixed in code: GELU, AdamW, grad-clip 1.0</a:t>
+              <a:t>dials (configs/heads/joint_heads.yaml): mode_hidden 256 . mode_layers 3 . dropout 0.348 . magnitude_weight 0.25 . alpha_eps 1e-6 . lr 2.15e-4 . weight_decay 1.04e-5 . batch 1024 . epochs 120 / per-head patience 10 -- fixed in code: GELU, AdamW, grad-clip 1.0</a:t>
             </a:r>
           </a:p>
         </p:txBody>
@@ -10372,7 +10514,7 @@
                   <a:srgbClr val="8A93A3"/>
                 </a:solidFill>
               </a:rPr>
-              <a:t>BCE's per-rock minimum is the true fraction, so an honest head lands on the diagonal by construction. current limits: intermediate-frequency presence is the miss mode (garnet recall 1.0 at f &gt; 0.9 but 0.0 below f = 0.5; opx 0.23 / ru 0.13 / ol 0.04 overall); spinel is the worst-calibrated panel (ECE 0.043); amphibole magnitude spread stays too narrow (next slide). full report: results/mode_head/&lt;tag&gt;/</a:t>
+              <a:t>BCE's per-rock minimum is the true fraction, so an honest head lands on the diagonal by construction. current limits (tuned model): intermediate-frequency presence is the miss mode (garnet recall 0.58 in f = [0.5, 0.9) and 0.0 elsewhere; opx 0.25 / ru 0.08 / ol 0.08 overall); spinel is the worst-calibrated panel (ECE 0.037); amphibole magnitude spread stays too narrow (next slide). full report: results/mode_head/&lt;tag&gt;/</a:t>
             </a:r>
           </a:p>
         </p:txBody>
@@ -11724,7 +11866,7 @@
                   <a:srgbClr val="8A93A3"/>
                 </a:solidFill>
               </a:rPr>
-              <a:t>population: only truly-present (row, phase) pairs are scored -- ~41k pairs for plag down to ~240 for andalusite; single-phase rows are excluded (nothing to size). current limits: amphibole PIT U-shaped with a high-side tilt (tails 0.27 vs 0.10 expected: spread too narrow and conditionally under-sized; corpus bimodality measured), oxide accessories humped (spl/ilm/ru tails ~0.01: too wide); plag's earlier under-sizing flattened with the full-tier retrain (tails 0.12). full report: results/mode_head/&lt;tag&gt;/ (magnitude_parity, magnitude_pit).</a:t>
+              <a:t>population: only truly-present (row, phase) pairs are scored -- ~41k pairs for plag down to ~240 for andalusite; single-phase rows are excluded (nothing to size). current limits (tuned model): amphibole stays the flagship miss -- 65% of its (rock, support) PIT groups are mean-shifted (within-bulk bimodality collapses to the mean; mixture fix staged, #25) and tuning did not move its magnitude error; plag/afs/q are majority-shifted too (the support-conditioning signal, heads.md). full report: results/mode_head/&lt;tag&gt;/ (magnitude_parity, magnitude_pit).</a:t>
             </a:r>
           </a:p>
         </p:txBody>
@@ -12628,7 +12770,7 @@
                   <a:srgbClr val="8A93A3"/>
                 </a:solidFill>
               </a:rPr>
-              <a:t>dials (configs/heads/joint_heads.yaml): comp_hidden 128 . comp_layers 1 . dropout 0.35 . alpha_eps 1e-6 . comp_eps 1e-4 (hard-zero clip on targets) . lambda_comp 1.0 . lambda_balance 54.5 -- fixed in code: GELU, AdamW, per-head grad-clip 1.0</a:t>
+              <a:t>dials (configs/heads/joint_heads.yaml): comp_hidden 128 . comp_layers 1 (mini-sweep verdict: capacity above 128 x 1 hurts comp) . dropout 0.348 . alpha_eps 1e-6 . comp_eps 1e-4 (hard-zero clip on targets) . lambda_comp 1.0 . lambda_balance 54.5 -- fixed in code: GELU, AdamW, per-head grad-clip 1.0</a:t>
             </a:r>
           </a:p>
         </p:txBody>
@@ -12944,7 +13086,7 @@
                   <a:srgbClr val="1A2238"/>
                 </a:solidFill>
               </a:rPr>
-              <a:t>Inside CondHead: a support-conditioned mixture over (T, P, H2O)</a:t>
+              <a:t>Is the recipe right? One phase through the oxide Dirichlet</a:t>
             </a:r>
           </a:p>
         </p:txBody>
@@ -12978,29 +13120,29 @@
                   <a:srgbClr val="8A93A3"/>
                 </a:solidFill>
               </a:rPr>
-              <a:t>the inverse-inference head, chain rule p(support | h) x p(T, P, H2O | h, support): the presence vector joins h at the input -- teacher-forced true set at train, ModeHead-sampled at inference</a:t>
-            </a:r>
-          </a:p>
-        </p:txBody>
-      </p:sp>
-      <p:sp>
-        <p:nvSpPr>
-          <p:cNvPr id="5" name="Oval 4"/>
+              <a:t>CompHead's eval: slice the per-phase Dirichlets to the row's true support, then score each present phase's 11-oxide simplex -- right mix (parity), honest error bars (PIT), and mass balance as the physics self-check</a:t>
+            </a:r>
+          </a:p>
+        </p:txBody>
+      </p:sp>
+      <p:sp>
+        <p:nvSpPr>
+          <p:cNvPr id="5" name="Rounded Rectangle 4"/>
           <p:cNvSpPr/>
           <p:nvPr/>
         </p:nvSpPr>
         <p:spPr>
           <a:xfrm>
-            <a:off x="777240" y="2834640"/>
-            <a:ext cx="1371600" cy="1371600"/>
-          </a:xfrm>
-          <a:prstGeom prst="ellipse">
+            <a:off x="502920" y="1783080"/>
+            <a:ext cx="2560320" cy="1371600"/>
+          </a:xfrm>
+          <a:prstGeom prst="roundRect">
             <a:avLst/>
           </a:prstGeom>
           <a:solidFill>
-            <a:srgbClr val="E8883A"/>
+            <a:srgbClr val="FBEEE3"/>
           </a:solidFill>
-          <a:ln w="31750">
+          <a:ln w="25400">
             <a:solidFill>
               <a:srgbClr val="E8883A"/>
             </a:solidFill>
@@ -13027,71 +13169,59 @@
           <a:p>
             <a:pPr algn="ctr"/>
             <a:r>
-              <a:rPr sz="2200" b="1">
-                <a:solidFill>
-                  <a:srgbClr val="FFFFFF"/>
-                </a:solidFill>
-              </a:rPr>
-              <a:t>h</a:t>
-            </a:r>
-          </a:p>
-          <a:p>
-            <a:pPr algn="ctr"/>
-            <a:r>
-              <a:rPr sz="1900" b="0">
+              <a:rPr sz="1100" b="1">
+                <a:solidFill>
+                  <a:srgbClr val="1A2238"/>
+                </a:solidFill>
+              </a:rPr>
+              <a:t>head output for bulk X</a:t>
+            </a:r>
+          </a:p>
+          <a:p>
+            <a:pPr algn="ctr"/>
+            <a:r>
+              <a:rPr sz="800" b="0">
                 <a:solidFill>
                   <a:srgbClr val="8A93A3"/>
                 </a:solidFill>
               </a:rPr>
-              <a:t>256-d latent</a:t>
-            </a:r>
-          </a:p>
-        </p:txBody>
-      </p:sp>
-      <p:sp>
-        <p:nvSpPr>
-          <p:cNvPr id="6" name="TextBox 5"/>
-          <p:cNvSpPr txBox="1"/>
-          <p:nvPr/>
-        </p:nvSpPr>
-        <p:spPr>
-          <a:xfrm>
-            <a:off x="457200" y="4434840"/>
-            <a:ext cx="2011680" cy="731520"/>
-          </a:xfrm>
-          <a:prstGeom prst="rect">
-            <a:avLst/>
-          </a:prstGeom>
-          <a:noFill/>
-        </p:spPr>
-        <p:txBody>
-          <a:bodyPr wrap="square">
-            <a:spAutoFit/>
-          </a:bodyPr>
-          <a:lstStyle/>
-          <a:p>
-            <a:pPr algn="ctr"/>
-            <a:r>
-              <a:rPr sz="1000" b="0">
+              <a:t>alpha [21 phases x 11 oxides],</a:t>
+            </a:r>
+          </a:p>
+          <a:p>
+            <a:pPr algn="ctr"/>
+            <a:r>
+              <a:rPr sz="800" b="0">
                 <a:solidFill>
                   <a:srgbClr val="8A93A3"/>
                 </a:solidFill>
               </a:rPr>
-              <a:t>frozen h [256] ++ presence vector [21] = 277-dim input</a:t>
-            </a:r>
-          </a:p>
-        </p:txBody>
-      </p:sp>
-      <p:sp>
-        <p:nvSpPr>
-          <p:cNvPr id="7" name="Right Arrow 6"/>
+              <a:t>computed from the latent --</a:t>
+            </a:r>
+          </a:p>
+          <a:p>
+            <a:pPr algn="ctr"/>
+            <a:r>
+              <a:rPr sz="800" b="0">
+                <a:solidFill>
+                  <a:srgbClr val="8A93A3"/>
+                </a:solidFill>
+              </a:rPr>
+              <a:t>truth is not an input</a:t>
+            </a:r>
+          </a:p>
+        </p:txBody>
+      </p:sp>
+      <p:sp>
+        <p:nvSpPr>
+          <p:cNvPr id="6" name="Right Arrow 5"/>
           <p:cNvSpPr/>
           <p:nvPr/>
         </p:nvSpPr>
         <p:spPr>
           <a:xfrm>
-            <a:off x="2286000" y="3337560"/>
-            <a:ext cx="457200" cy="365760"/>
+            <a:off x="3154680" y="2331720"/>
+            <a:ext cx="320040" cy="274320"/>
           </a:xfrm>
           <a:prstGeom prst="rightArrow">
             <a:avLst/>
@@ -13128,14 +13258,145 @@
       </p:sp>
       <p:sp>
         <p:nvSpPr>
-          <p:cNvPr id="8" name="Rounded Rectangle 7"/>
+          <p:cNvPr id="7" name="Rounded Rectangle 6"/>
           <p:cNvSpPr/>
           <p:nvPr/>
         </p:nvSpPr>
         <p:spPr>
           <a:xfrm>
-            <a:off x="2834640" y="2788920"/>
-            <a:ext cx="2651760" cy="1463040"/>
+            <a:off x="3520440" y="1783080"/>
+            <a:ext cx="2560320" cy="1371600"/>
+          </a:xfrm>
+          <a:prstGeom prst="roundRect">
+            <a:avLst/>
+          </a:prstGeom>
+          <a:solidFill>
+            <a:srgbClr val="FBEEE3"/>
+          </a:solidFill>
+          <a:ln w="25400">
+            <a:solidFill>
+              <a:srgbClr val="E8883A"/>
+            </a:solidFill>
+          </a:ln>
+          <a:effectLst/>
+        </p:spPr>
+        <p:style>
+          <a:lnRef idx="1">
+            <a:schemeClr val="accent1"/>
+          </a:lnRef>
+          <a:fillRef idx="3">
+            <a:schemeClr val="accent1"/>
+          </a:fillRef>
+          <a:effectRef idx="2">
+            <a:schemeClr val="accent1"/>
+          </a:effectRef>
+          <a:fontRef idx="minor">
+            <a:schemeClr val="lt1"/>
+          </a:fontRef>
+        </p:style>
+        <p:txBody>
+          <a:bodyPr rtlCol="0" anchor="ctr" wrap="square"/>
+          <a:lstStyle/>
+          <a:p>
+            <a:pPr algn="ctr"/>
+            <a:r>
+              <a:rPr sz="1100" b="1">
+                <a:solidFill>
+                  <a:srgbClr val="1A2238"/>
+                </a:solidFill>
+              </a:rPr>
+              <a:t>one present phase: plag</a:t>
+            </a:r>
+          </a:p>
+          <a:p>
+            <a:pPr algn="ctr"/>
+            <a:r>
+              <a:rPr sz="800" b="0">
+                <a:solidFill>
+                  <a:srgbClr val="8A93A3"/>
+                </a:solidFill>
+              </a:rPr>
+              <a:t>alpha0 = 780 (confidence)</a:t>
+            </a:r>
+          </a:p>
+          <a:p>
+            <a:pPr algn="ctr"/>
+            <a:r>
+              <a:rPr sz="800" b="0">
+                <a:solidFill>
+                  <a:srgbClr val="8A93A3"/>
+                </a:solidFill>
+              </a:rPr>
+              <a:t>mean = alpha / alpha0:</a:t>
+            </a:r>
+          </a:p>
+          <a:p>
+            <a:pPr algn="ctr"/>
+            <a:r>
+              <a:rPr sz="800" b="0">
+                <a:solidFill>
+                  <a:srgbClr val="8A93A3"/>
+                </a:solidFill>
+              </a:rPr>
+              <a:t>SiO2 .55  Al2O3 .28  CaO .12 ...</a:t>
+            </a:r>
+          </a:p>
+        </p:txBody>
+      </p:sp>
+      <p:sp>
+        <p:nvSpPr>
+          <p:cNvPr id="8" name="Right Arrow 7"/>
+          <p:cNvSpPr/>
+          <p:nvPr/>
+        </p:nvSpPr>
+        <p:spPr>
+          <a:xfrm>
+            <a:off x="6172200" y="2331720"/>
+            <a:ext cx="320040" cy="274320"/>
+          </a:xfrm>
+          <a:prstGeom prst="rightArrow">
+            <a:avLst/>
+          </a:prstGeom>
+          <a:solidFill>
+            <a:srgbClr val="1A2238"/>
+          </a:solidFill>
+          <a:ln>
+            <a:noFill/>
+          </a:ln>
+          <a:effectLst/>
+        </p:spPr>
+        <p:style>
+          <a:lnRef idx="1">
+            <a:schemeClr val="accent1"/>
+          </a:lnRef>
+          <a:fillRef idx="3">
+            <a:schemeClr val="accent1"/>
+          </a:fillRef>
+          <a:effectRef idx="2">
+            <a:schemeClr val="accent1"/>
+          </a:effectRef>
+          <a:fontRef idx="minor">
+            <a:schemeClr val="lt1"/>
+          </a:fontRef>
+        </p:style>
+        <p:txBody>
+          <a:bodyPr rtlCol="0" anchor="ctr"/>
+          <a:lstStyle/>
+          <a:p>
+            <a:pPr algn="ctr"/>
+          </a:p>
+        </p:txBody>
+      </p:sp>
+      <p:sp>
+        <p:nvSpPr>
+          <p:cNvPr id="9" name="Rounded Rectangle 8"/>
+          <p:cNvSpPr/>
+          <p:nvPr/>
+        </p:nvSpPr>
+        <p:spPr>
+          <a:xfrm>
+            <a:off x="6537960" y="1783080"/>
+            <a:ext cx="2560320" cy="1371600"/>
           </a:xfrm>
           <a:prstGeom prst="roundRect">
             <a:avLst/>
@@ -13170,85 +13431,49 @@
           <a:p>
             <a:pPr algn="ctr"/>
             <a:r>
-              <a:rPr sz="1300" b="1">
+              <a:rPr sz="1100" b="1">
                 <a:solidFill>
                   <a:srgbClr val="1A2238"/>
                 </a:solidFill>
               </a:rPr>
-              <a:t>own trunk</a:t>
-            </a:r>
-          </a:p>
-          <a:p>
-            <a:pPr algn="ctr"/>
-            <a:r>
-              <a:rPr sz="1000" b="0">
+              <a:t>predicted mix +/- spread</a:t>
+            </a:r>
+          </a:p>
+          <a:p>
+            <a:pPr algn="ctr"/>
+            <a:r>
+              <a:rPr sz="800" b="0">
                 <a:solidFill>
                   <a:srgbClr val="8A93A3"/>
                 </a:solidFill>
               </a:rPr>
-              <a:t>Linear 277 -&gt; 128</a:t>
-            </a:r>
-          </a:p>
-          <a:p>
-            <a:pPr algn="ctr"/>
-            <a:r>
-              <a:rPr sz="1000" b="0">
+              <a:t>SiO2 0.55 +/- 0.018</a:t>
+            </a:r>
+          </a:p>
+          <a:p>
+            <a:pPr algn="ctr"/>
+            <a:r>
+              <a:rPr sz="800" b="0">
                 <a:solidFill>
                   <a:srgbClr val="8A93A3"/>
                 </a:solidFill>
               </a:rPr>
-              <a:t>GELU + dropout</a:t>
-            </a:r>
-          </a:p>
-          <a:p>
-            <a:pPr algn="ctr"/>
-            <a:r>
-              <a:rPr sz="1000" b="0">
+              <a:t>Al2O3 0.28 +/- 0.016</a:t>
+            </a:r>
+          </a:p>
+          <a:p>
+            <a:pPr algn="ctr"/>
+            <a:r>
+              <a:rPr sz="800" b="0">
                 <a:solidFill>
                   <a:srgbClr val="8A93A3"/>
                 </a:solidFill>
               </a:rPr>
-              <a:t>35,584 params</a:t>
-            </a:r>
-          </a:p>
-        </p:txBody>
-      </p:sp>
-      <p:cxnSp>
-        <p:nvCxnSpPr>
-          <p:cNvPr id="9" name="Connector 8"/>
-          <p:cNvCxnSpPr/>
-          <p:nvPr/>
-        </p:nvCxnSpPr>
-        <p:spPr>
-          <a:xfrm flipV="1">
-            <a:off x="5486400" y="2354580"/>
-            <a:ext cx="685800" cy="1165860"/>
-          </a:xfrm>
-          <a:prstGeom prst="bentConnector3">
-            <a:avLst/>
-          </a:prstGeom>
-          <a:ln w="19050">
-            <a:solidFill>
-              <a:srgbClr val="8A93A3"/>
-            </a:solidFill>
-          </a:ln>
-          <a:effectLst/>
-        </p:spPr>
-        <p:style>
-          <a:lnRef idx="2">
-            <a:schemeClr val="accent1"/>
-          </a:lnRef>
-          <a:fillRef idx="0">
-            <a:schemeClr val="accent1"/>
-          </a:fillRef>
-          <a:effectRef idx="1">
-            <a:schemeClr val="accent1"/>
-          </a:effectRef>
-          <a:fontRef idx="minor">
-            <a:schemeClr val="tx1"/>
-          </a:fontRef>
-        </p:style>
-      </p:cxnSp>
+              <a:t>CaO 0.12 +/- 0.012</a:t>
+            </a:r>
+          </a:p>
+        </p:txBody>
+      </p:sp>
       <p:sp>
         <p:nvSpPr>
           <p:cNvPr id="10" name="Rounded Rectangle 9"/>
@@ -13257,251 +13482,8 @@
         </p:nvSpPr>
         <p:spPr>
           <a:xfrm>
-            <a:off x="6172200" y="1828800"/>
-            <a:ext cx="3017520" cy="1051560"/>
-          </a:xfrm>
-          <a:prstGeom prst="roundRect">
-            <a:avLst/>
-          </a:prstGeom>
-          <a:solidFill>
-            <a:srgbClr val="DDF4F2"/>
-          </a:solidFill>
-          <a:ln w="25400">
-            <a:solidFill>
-              <a:srgbClr val="12B5A5"/>
-            </a:solidFill>
-          </a:ln>
-          <a:effectLst/>
-        </p:spPr>
-        <p:style>
-          <a:lnRef idx="1">
-            <a:schemeClr val="accent1"/>
-          </a:lnRef>
-          <a:fillRef idx="3">
-            <a:schemeClr val="accent1"/>
-          </a:fillRef>
-          <a:effectRef idx="2">
-            <a:schemeClr val="accent1"/>
-          </a:effectRef>
-          <a:fontRef idx="minor">
-            <a:schemeClr val="lt1"/>
-          </a:fontRef>
-        </p:style>
-        <p:txBody>
-          <a:bodyPr rtlCol="0" anchor="ctr" wrap="square"/>
-          <a:lstStyle/>
-          <a:p>
-            <a:pPr algn="ctr"/>
-            <a:r>
-              <a:rPr sz="1300" b="1">
-                <a:solidFill>
-                  <a:srgbClr val="1A2238"/>
-                </a:solidFill>
-              </a:rPr>
-              <a:t>weight branch</a:t>
-            </a:r>
-          </a:p>
-          <a:p>
-            <a:pPr algn="ctr"/>
-            <a:r>
-              <a:rPr sz="1000" b="0">
-                <a:solidFill>
-                  <a:srgbClr val="8A93A3"/>
-                </a:solidFill>
-              </a:rPr>
-              <a:t>Linear 128 -&gt; 9 (3 axes x K=3)</a:t>
-            </a:r>
-          </a:p>
-          <a:p>
-            <a:pPr algn="ctr"/>
-            <a:r>
-              <a:rPr sz="1000" b="0">
-                <a:solidFill>
-                  <a:srgbClr val="8A93A3"/>
-                </a:solidFill>
-              </a:rPr>
-              <a:t>log-softmax over K per axis</a:t>
-            </a:r>
-          </a:p>
-          <a:p>
-            <a:pPr algn="ctr"/>
-            <a:r>
-              <a:rPr sz="1000" b="0">
-                <a:solidFill>
-                  <a:srgbClr val="8A93A3"/>
-                </a:solidFill>
-              </a:rPr>
-              <a:t>1,161 params</a:t>
-            </a:r>
-          </a:p>
-        </p:txBody>
-      </p:sp>
-      <p:sp>
-        <p:nvSpPr>
-          <p:cNvPr id="11" name="Right Arrow 10"/>
-          <p:cNvSpPr/>
-          <p:nvPr/>
-        </p:nvSpPr>
-        <p:spPr>
-          <a:xfrm>
-            <a:off x="9281160" y="2189988"/>
-            <a:ext cx="365760" cy="320040"/>
-          </a:xfrm>
-          <a:prstGeom prst="rightArrow">
-            <a:avLst/>
-          </a:prstGeom>
-          <a:solidFill>
-            <a:srgbClr val="1A2238"/>
-          </a:solidFill>
-          <a:ln>
-            <a:noFill/>
-          </a:ln>
-          <a:effectLst/>
-        </p:spPr>
-        <p:style>
-          <a:lnRef idx="1">
-            <a:schemeClr val="accent1"/>
-          </a:lnRef>
-          <a:fillRef idx="3">
-            <a:schemeClr val="accent1"/>
-          </a:fillRef>
-          <a:effectRef idx="2">
-            <a:schemeClr val="accent1"/>
-          </a:effectRef>
-          <a:fontRef idx="minor">
-            <a:schemeClr val="lt1"/>
-          </a:fontRef>
-        </p:style>
-        <p:txBody>
-          <a:bodyPr rtlCol="0" anchor="ctr"/>
-          <a:lstStyle/>
-          <a:p>
-            <a:pPr algn="ctr"/>
-          </a:p>
-        </p:txBody>
-      </p:sp>
-      <p:sp>
-        <p:nvSpPr>
-          <p:cNvPr id="12" name="Rounded Rectangle 11"/>
-          <p:cNvSpPr/>
-          <p:nvPr/>
-        </p:nvSpPr>
-        <p:spPr>
-          <a:xfrm>
-            <a:off x="9738360" y="1874519"/>
-            <a:ext cx="2057400" cy="960119"/>
-          </a:xfrm>
-          <a:prstGeom prst="roundRect">
-            <a:avLst/>
-          </a:prstGeom>
-          <a:solidFill>
-            <a:srgbClr val="FFFFFF"/>
-          </a:solidFill>
-          <a:ln w="12700">
-            <a:solidFill>
-              <a:srgbClr val="C8CDD6"/>
-            </a:solidFill>
-          </a:ln>
-          <a:effectLst/>
-        </p:spPr>
-        <p:style>
-          <a:lnRef idx="1">
-            <a:schemeClr val="accent1"/>
-          </a:lnRef>
-          <a:fillRef idx="3">
-            <a:schemeClr val="accent1"/>
-          </a:fillRef>
-          <a:effectRef idx="2">
-            <a:schemeClr val="accent1"/>
-          </a:effectRef>
-          <a:fontRef idx="minor">
-            <a:schemeClr val="lt1"/>
-          </a:fontRef>
-        </p:style>
-        <p:txBody>
-          <a:bodyPr rtlCol="0" anchor="ctr" wrap="square"/>
-          <a:lstStyle/>
-          <a:p>
-            <a:pPr algn="ctr"/>
-            <a:r>
-              <a:rPr sz="1200" b="1">
-                <a:solidFill>
-                  <a:srgbClr val="8A93A3"/>
-                </a:solidFill>
-              </a:rPr>
-              <a:t>mixture weights</a:t>
-            </a:r>
-          </a:p>
-          <a:p>
-            <a:pPr algn="ctr"/>
-            <a:r>
-              <a:rPr sz="900" b="0">
-                <a:solidFill>
-                  <a:srgbClr val="8A93A3"/>
-                </a:solidFill>
-              </a:rPr>
-              <a:t>which condition mode,</a:t>
-            </a:r>
-          </a:p>
-          <a:p>
-            <a:pPr algn="ctr"/>
-            <a:r>
-              <a:rPr sz="900" b="0">
-                <a:solidFill>
-                  <a:srgbClr val="8A93A3"/>
-                </a:solidFill>
-              </a:rPr>
-              <a:t>how likely</a:t>
-            </a:r>
-          </a:p>
-        </p:txBody>
-      </p:sp>
-      <p:cxnSp>
-        <p:nvCxnSpPr>
-          <p:cNvPr id="13" name="Connector 12"/>
-          <p:cNvCxnSpPr/>
-          <p:nvPr/>
-        </p:nvCxnSpPr>
-        <p:spPr>
-          <a:xfrm>
-            <a:off x="5486400" y="3520440"/>
-            <a:ext cx="685800" cy="22860"/>
-          </a:xfrm>
-          <a:prstGeom prst="bentConnector3">
-            <a:avLst/>
-          </a:prstGeom>
-          <a:ln w="19050">
-            <a:solidFill>
-              <a:srgbClr val="8A93A3"/>
-            </a:solidFill>
-          </a:ln>
-          <a:effectLst/>
-        </p:spPr>
-        <p:style>
-          <a:lnRef idx="2">
-            <a:schemeClr val="accent1"/>
-          </a:lnRef>
-          <a:fillRef idx="0">
-            <a:schemeClr val="accent1"/>
-          </a:fillRef>
-          <a:effectRef idx="1">
-            <a:schemeClr val="accent1"/>
-          </a:effectRef>
-          <a:fontRef idx="minor">
-            <a:schemeClr val="tx1"/>
-          </a:fontRef>
-        </p:style>
-      </p:cxnSp>
-      <p:sp>
-        <p:nvSpPr>
-          <p:cNvPr id="14" name="Rounded Rectangle 13"/>
-          <p:cNvSpPr/>
-          <p:nvPr/>
-        </p:nvSpPr>
-        <p:spPr>
-          <a:xfrm>
-            <a:off x="6172200" y="3017520"/>
-            <a:ext cx="3017520" cy="1051560"/>
+            <a:off x="502920" y="3429000"/>
+            <a:ext cx="2560320" cy="1188720"/>
           </a:xfrm>
           <a:prstGeom prst="roundRect">
             <a:avLst/>
@@ -13536,59 +13518,59 @@
           <a:p>
             <a:pPr algn="ctr"/>
             <a:r>
-              <a:rPr sz="1300" b="1">
+              <a:rPr sz="1100" b="1">
                 <a:solidFill>
                   <a:srgbClr val="1A2238"/>
                 </a:solidFill>
               </a:rPr>
-              <a:t>mean branch</a:t>
-            </a:r>
-          </a:p>
-          <a:p>
-            <a:pPr algn="ctr"/>
-            <a:r>
-              <a:rPr sz="1000" b="0">
+              <a:t>one row's truth</a:t>
+            </a:r>
+          </a:p>
+          <a:p>
+            <a:pPr algn="ctr"/>
+            <a:r>
+              <a:rPr sz="800" b="0">
                 <a:solidFill>
                   <a:srgbClr val="8A93A3"/>
                 </a:solidFill>
               </a:rPr>
-              <a:t>Linear 128 -&gt; 9</a:t>
-            </a:r>
-          </a:p>
-          <a:p>
-            <a:pPr algn="ctr"/>
-            <a:r>
-              <a:rPr sz="1000" b="0">
+              <a:t>bulk X . draw 17 . rung 50</a:t>
+            </a:r>
+          </a:p>
+          <a:p>
+            <a:pPr algn="ctr"/>
+            <a:r>
+              <a:rPr sz="800" b="0">
                 <a:solidFill>
                   <a:srgbClr val="8A93A3"/>
                 </a:solidFill>
               </a:rPr>
-              <a:t>mu_k in raw units (C, kbar, wt%)</a:t>
-            </a:r>
-          </a:p>
-          <a:p>
-            <a:pPr algn="ctr"/>
-            <a:r>
-              <a:rPr sz="1000" b="0">
+              <a:t>plag measured (mass-frac):</a:t>
+            </a:r>
+          </a:p>
+          <a:p>
+            <a:pPr algn="ctr"/>
+            <a:r>
+              <a:rPr sz="800" b="0">
                 <a:solidFill>
                   <a:srgbClr val="8A93A3"/>
                 </a:solidFill>
               </a:rPr>
-              <a:t>1,161 params</a:t>
-            </a:r>
-          </a:p>
-        </p:txBody>
-      </p:sp>
-      <p:sp>
-        <p:nvSpPr>
-          <p:cNvPr id="15" name="Right Arrow 14"/>
+              <a:t>.553  .285  .118  .041 ...</a:t>
+            </a:r>
+          </a:p>
+        </p:txBody>
+      </p:sp>
+      <p:sp>
+        <p:nvSpPr>
+          <p:cNvPr id="11" name="Right Arrow 10"/>
           <p:cNvSpPr/>
           <p:nvPr/>
         </p:nvSpPr>
         <p:spPr>
           <a:xfrm>
-            <a:off x="9281160" y="3378708"/>
-            <a:ext cx="365760" cy="320040"/>
+            <a:off x="3154680" y="3886200"/>
+            <a:ext cx="320040" cy="274320"/>
           </a:xfrm>
           <a:prstGeom prst="rightArrow">
             <a:avLst/>
@@ -13625,24 +13607,24 @@
       </p:sp>
       <p:sp>
         <p:nvSpPr>
-          <p:cNvPr id="16" name="Rounded Rectangle 15"/>
+          <p:cNvPr id="12" name="Rounded Rectangle 11"/>
           <p:cNvSpPr/>
           <p:nvPr/>
         </p:nvSpPr>
         <p:spPr>
           <a:xfrm>
-            <a:off x="9738360" y="3063239"/>
-            <a:ext cx="2057400" cy="960119"/>
+            <a:off x="3520440" y="3429000"/>
+            <a:ext cx="2560320" cy="1188720"/>
           </a:xfrm>
           <a:prstGeom prst="roundRect">
             <a:avLst/>
           </a:prstGeom>
           <a:solidFill>
-            <a:srgbClr val="FFFFFF"/>
+            <a:srgbClr val="E1E8FF"/>
           </a:solidFill>
-          <a:ln w="12700">
+          <a:ln w="25400">
             <a:solidFill>
-              <a:srgbClr val="C8CDD6"/>
+              <a:srgbClr val="2E5BFF"/>
             </a:solidFill>
           </a:ln>
           <a:effectLst/>
@@ -13667,53 +13649,261 @@
           <a:p>
             <a:pPr algn="ctr"/>
             <a:r>
-              <a:rPr sz="1200" b="1">
+              <a:rPr sz="1100" b="1">
+                <a:solidFill>
+                  <a:srgbClr val="1A2238"/>
+                </a:solidFill>
+              </a:rPr>
+              <a:t>scoring -- truth meets prediction</a:t>
+            </a:r>
+          </a:p>
+          <a:p>
+            <a:pPr algn="ctr"/>
+            <a:r>
+              <a:rPr sz="800" b="0">
                 <a:solidFill>
                   <a:srgbClr val="8A93A3"/>
                 </a:solidFill>
               </a:rPr>
-              <a:t>component centers</a:t>
-            </a:r>
-          </a:p>
-          <a:p>
-            <a:pPr algn="ctr"/>
-            <a:r>
-              <a:rPr sz="900" b="0">
+              <a:t>eval: per-oxide Beta PIT</a:t>
+            </a:r>
+          </a:p>
+          <a:p>
+            <a:pPr algn="ctr"/>
+            <a:r>
+              <a:rPr sz="800" b="0">
                 <a:solidFill>
                   <a:srgbClr val="8A93A3"/>
                 </a:solidFill>
               </a:rPr>
-              <a:t>e.g. deep-wet vs</a:t>
-            </a:r>
-          </a:p>
-          <a:p>
-            <a:pPr algn="ctr"/>
-            <a:r>
-              <a:rPr sz="900" b="0">
-                <a:solidFill>
-                  <a:srgbClr val="8A93A3"/>
-                </a:solidFill>
-              </a:rPr>
-              <a:t>shallow-dry</a:t>
-            </a:r>
+              <a:t>train: masked comp Dirichlet NLL</a:t>
+            </a:r>
+          </a:p>
+        </p:txBody>
+      </p:sp>
+      <p:sp>
+        <p:nvSpPr>
+          <p:cNvPr id="13" name="Freeform 12"/>
+          <p:cNvSpPr/>
+          <p:nvPr/>
+        </p:nvSpPr>
+        <p:spPr>
+          <a:xfrm>
+            <a:off x="10104120" y="2240280"/>
+            <a:ext cx="1828800" cy="1051560"/>
+          </a:xfrm>
+          <a:custGeom>
+            <a:avLst/>
+            <a:gdLst/>
+            <a:ahLst/>
+            <a:cxnLst/>
+            <a:rect l="l" t="t" r="r" b="b"/>
+            <a:pathLst>
+              <a:path w="1828800" h="1051560">
+                <a:moveTo>
+                  <a:pt x="0" y="1051560"/>
+                </a:moveTo>
+                <a:lnTo>
+                  <a:pt x="0" y="1050844"/>
+                </a:lnTo>
+                <a:lnTo>
+                  <a:pt x="38100" y="1050329"/>
+                </a:lnTo>
+                <a:lnTo>
+                  <a:pt x="76200" y="1049487"/>
+                </a:lnTo>
+                <a:lnTo>
+                  <a:pt x="114300" y="1048141"/>
+                </a:lnTo>
+                <a:lnTo>
+                  <a:pt x="152400" y="1046039"/>
+                </a:lnTo>
+                <a:lnTo>
+                  <a:pt x="190500" y="1042828"/>
+                </a:lnTo>
+                <a:lnTo>
+                  <a:pt x="228600" y="1038037"/>
+                </a:lnTo>
+                <a:lnTo>
+                  <a:pt x="266700" y="1031050"/>
+                </a:lnTo>
+                <a:lnTo>
+                  <a:pt x="304800" y="1021097"/>
+                </a:lnTo>
+                <a:lnTo>
+                  <a:pt x="342900" y="1007252"/>
+                </a:lnTo>
+                <a:lnTo>
+                  <a:pt x="381000" y="988449"/>
+                </a:lnTo>
+                <a:lnTo>
+                  <a:pt x="419100" y="963528"/>
+                </a:lnTo>
+                <a:lnTo>
+                  <a:pt x="457200" y="931310"/>
+                </a:lnTo>
+                <a:lnTo>
+                  <a:pt x="495300" y="890704"/>
+                </a:lnTo>
+                <a:lnTo>
+                  <a:pt x="533400" y="840842"/>
+                </a:lnTo>
+                <a:lnTo>
+                  <a:pt x="571500" y="781241"/>
+                </a:lnTo>
+                <a:lnTo>
+                  <a:pt x="609600" y="711966"/>
+                </a:lnTo>
+                <a:lnTo>
+                  <a:pt x="647700" y="633774"/>
+                </a:lnTo>
+                <a:lnTo>
+                  <a:pt x="685800" y="548225"/>
+                </a:lnTo>
+                <a:lnTo>
+                  <a:pt x="723900" y="457719"/>
+                </a:lnTo>
+                <a:lnTo>
+                  <a:pt x="762000" y="365451"/>
+                </a:lnTo>
+                <a:lnTo>
+                  <a:pt x="800100" y="275267"/>
+                </a:lnTo>
+                <a:lnTo>
+                  <a:pt x="838200" y="191423"/>
+                </a:lnTo>
+                <a:lnTo>
+                  <a:pt x="876300" y="118263"/>
+                </a:lnTo>
+                <a:lnTo>
+                  <a:pt x="914400" y="59857"/>
+                </a:lnTo>
+                <a:lnTo>
+                  <a:pt x="952500" y="19623"/>
+                </a:lnTo>
+                <a:lnTo>
+                  <a:pt x="990600" y="0"/>
+                </a:lnTo>
+                <a:lnTo>
+                  <a:pt x="1028700" y="2198"/>
+                </a:lnTo>
+                <a:lnTo>
+                  <a:pt x="1066800" y="26083"/>
+                </a:lnTo>
+                <a:lnTo>
+                  <a:pt x="1104900" y="70182"/>
+                </a:lnTo>
+                <a:lnTo>
+                  <a:pt x="1143000" y="131838"/>
+                </a:lnTo>
+                <a:lnTo>
+                  <a:pt x="1181100" y="207474"/>
+                </a:lnTo>
+                <a:lnTo>
+                  <a:pt x="1219200" y="292937"/>
+                </a:lnTo>
+                <a:lnTo>
+                  <a:pt x="1257300" y="383869"/>
+                </a:lnTo>
+                <a:lnTo>
+                  <a:pt x="1295400" y="476074"/>
+                </a:lnTo>
+                <a:lnTo>
+                  <a:pt x="1333500" y="565820"/>
+                </a:lnTo>
+                <a:lnTo>
+                  <a:pt x="1371600" y="650063"/>
+                </a:lnTo>
+                <a:lnTo>
+                  <a:pt x="1409700" y="726570"/>
+                </a:lnTo>
+                <a:lnTo>
+                  <a:pt x="1447800" y="793946"/>
+                </a:lnTo>
+                <a:lnTo>
+                  <a:pt x="1485900" y="851585"/>
+                </a:lnTo>
+                <a:lnTo>
+                  <a:pt x="1524000" y="899542"/>
+                </a:lnTo>
+                <a:lnTo>
+                  <a:pt x="1562100" y="938392"/>
+                </a:lnTo>
+                <a:lnTo>
+                  <a:pt x="1600200" y="969059"/>
+                </a:lnTo>
+                <a:lnTo>
+                  <a:pt x="1638300" y="992661"/>
+                </a:lnTo>
+                <a:lnTo>
+                  <a:pt x="1676400" y="1010382"/>
+                </a:lnTo>
+                <a:lnTo>
+                  <a:pt x="1714500" y="1023367"/>
+                </a:lnTo>
+                <a:lnTo>
+                  <a:pt x="1752600" y="1032658"/>
+                </a:lnTo>
+                <a:lnTo>
+                  <a:pt x="1790700" y="1039149"/>
+                </a:lnTo>
+                <a:lnTo>
+                  <a:pt x="1828800" y="1043580"/>
+                </a:lnTo>
+                <a:lnTo>
+                  <a:pt x="1828800" y="1051560"/>
+                </a:lnTo>
+                <a:close/>
+              </a:path>
+            </a:pathLst>
+          </a:custGeom>
+          <a:solidFill>
+            <a:srgbClr val="D5D1F8"/>
+          </a:solidFill>
+          <a:ln w="25400">
+            <a:solidFill>
+              <a:srgbClr val="6C5CE7"/>
+            </a:solidFill>
+          </a:ln>
+          <a:effectLst/>
+        </p:spPr>
+        <p:style>
+          <a:lnRef idx="1">
+            <a:schemeClr val="accent1"/>
+          </a:lnRef>
+          <a:fillRef idx="3">
+            <a:schemeClr val="accent1"/>
+          </a:fillRef>
+          <a:effectRef idx="2">
+            <a:schemeClr val="accent1"/>
+          </a:effectRef>
+          <a:fontRef idx="minor">
+            <a:schemeClr val="lt1"/>
+          </a:fontRef>
+        </p:style>
+        <p:txBody>
+          <a:bodyPr rtlCol="0" anchor="ctr"/>
+          <a:lstStyle/>
+          <a:p>
+            <a:pPr algn="ctr"/>
           </a:p>
         </p:txBody>
       </p:sp>
       <p:cxnSp>
         <p:nvCxnSpPr>
-          <p:cNvPr id="17" name="Connector 16"/>
+          <p:cNvPr id="14" name="Connector 13"/>
           <p:cNvCxnSpPr/>
           <p:nvPr/>
         </p:nvCxnSpPr>
         <p:spPr>
           <a:xfrm>
-            <a:off x="5486400" y="3520440"/>
-            <a:ext cx="685800" cy="1211580"/>
+            <a:off x="10104120" y="3291840"/>
+            <a:ext cx="1828800" cy="0"/>
           </a:xfrm>
           <a:prstGeom prst="bentConnector3">
             <a:avLst/>
           </a:prstGeom>
-          <a:ln w="19050">
+          <a:ln w="12700">
             <a:solidFill>
               <a:srgbClr val="8A93A3"/>
             </a:solidFill>
@@ -13737,221 +13927,14 @@
       </p:cxnSp>
       <p:sp>
         <p:nvSpPr>
-          <p:cNvPr id="18" name="Rounded Rectangle 17"/>
-          <p:cNvSpPr/>
-          <p:nvPr/>
-        </p:nvSpPr>
-        <p:spPr>
-          <a:xfrm>
-            <a:off x="6172200" y="4206240"/>
-            <a:ext cx="3017520" cy="1051560"/>
-          </a:xfrm>
-          <a:prstGeom prst="roundRect">
-            <a:avLst/>
-          </a:prstGeom>
-          <a:solidFill>
-            <a:srgbClr val="FBEEE3"/>
-          </a:solidFill>
-          <a:ln w="25400">
-            <a:solidFill>
-              <a:srgbClr val="E8883A"/>
-            </a:solidFill>
-          </a:ln>
-          <a:effectLst/>
-        </p:spPr>
-        <p:style>
-          <a:lnRef idx="1">
-            <a:schemeClr val="accent1"/>
-          </a:lnRef>
-          <a:fillRef idx="3">
-            <a:schemeClr val="accent1"/>
-          </a:fillRef>
-          <a:effectRef idx="2">
-            <a:schemeClr val="accent1"/>
-          </a:effectRef>
-          <a:fontRef idx="minor">
-            <a:schemeClr val="lt1"/>
-          </a:fontRef>
-        </p:style>
-        <p:txBody>
-          <a:bodyPr rtlCol="0" anchor="ctr" wrap="square"/>
-          <a:lstStyle/>
-          <a:p>
-            <a:pPr algn="ctr"/>
-            <a:r>
-              <a:rPr sz="1300" b="1">
-                <a:solidFill>
-                  <a:srgbClr val="1A2238"/>
-                </a:solidFill>
-              </a:rPr>
-              <a:t>spread branch</a:t>
-            </a:r>
-          </a:p>
-          <a:p>
-            <a:pPr algn="ctr"/>
-            <a:r>
-              <a:rPr sz="1000" b="0">
-                <a:solidFill>
-                  <a:srgbClr val="8A93A3"/>
-                </a:solidFill>
-              </a:rPr>
-              <a:t>Linear 128 -&gt; 9, softplus + eps</a:t>
-            </a:r>
-          </a:p>
-          <a:p>
-            <a:pPr algn="ctr"/>
-            <a:r>
-              <a:rPr sz="1000" b="0">
-                <a:solidFill>
-                  <a:srgbClr val="8A93A3"/>
-                </a:solidFill>
-              </a:rPr>
-              <a:t>sigma_k, heteroscedastic</a:t>
-            </a:r>
-          </a:p>
-          <a:p>
-            <a:pPr algn="ctr"/>
-            <a:r>
-              <a:rPr sz="1000" b="0">
-                <a:solidFill>
-                  <a:srgbClr val="8A93A3"/>
-                </a:solidFill>
-              </a:rPr>
-              <a:t>1,161 params</a:t>
-            </a:r>
-          </a:p>
-        </p:txBody>
-      </p:sp>
-      <p:sp>
-        <p:nvSpPr>
-          <p:cNvPr id="19" name="Right Arrow 18"/>
-          <p:cNvSpPr/>
-          <p:nvPr/>
-        </p:nvSpPr>
-        <p:spPr>
-          <a:xfrm>
-            <a:off x="9281160" y="4567428"/>
-            <a:ext cx="365760" cy="320040"/>
-          </a:xfrm>
-          <a:prstGeom prst="rightArrow">
-            <a:avLst/>
-          </a:prstGeom>
-          <a:solidFill>
-            <a:srgbClr val="1A2238"/>
-          </a:solidFill>
-          <a:ln>
-            <a:noFill/>
-          </a:ln>
-          <a:effectLst/>
-        </p:spPr>
-        <p:style>
-          <a:lnRef idx="1">
-            <a:schemeClr val="accent1"/>
-          </a:lnRef>
-          <a:fillRef idx="3">
-            <a:schemeClr val="accent1"/>
-          </a:fillRef>
-          <a:effectRef idx="2">
-            <a:schemeClr val="accent1"/>
-          </a:effectRef>
-          <a:fontRef idx="minor">
-            <a:schemeClr val="lt1"/>
-          </a:fontRef>
-        </p:style>
-        <p:txBody>
-          <a:bodyPr rtlCol="0" anchor="ctr"/>
-          <a:lstStyle/>
-          <a:p>
-            <a:pPr algn="ctr"/>
-          </a:p>
-        </p:txBody>
-      </p:sp>
-      <p:sp>
-        <p:nvSpPr>
-          <p:cNvPr id="20" name="Rounded Rectangle 19"/>
-          <p:cNvSpPr/>
-          <p:nvPr/>
-        </p:nvSpPr>
-        <p:spPr>
-          <a:xfrm>
-            <a:off x="9738360" y="4251959"/>
-            <a:ext cx="2057400" cy="960119"/>
-          </a:xfrm>
-          <a:prstGeom prst="roundRect">
-            <a:avLst/>
-          </a:prstGeom>
-          <a:solidFill>
-            <a:srgbClr val="FFFFFF"/>
-          </a:solidFill>
-          <a:ln w="12700">
-            <a:solidFill>
-              <a:srgbClr val="C8CDD6"/>
-            </a:solidFill>
-          </a:ln>
-          <a:effectLst/>
-        </p:spPr>
-        <p:style>
-          <a:lnRef idx="1">
-            <a:schemeClr val="accent1"/>
-          </a:lnRef>
-          <a:fillRef idx="3">
-            <a:schemeClr val="accent1"/>
-          </a:fillRef>
-          <a:effectRef idx="2">
-            <a:schemeClr val="accent1"/>
-          </a:effectRef>
-          <a:fontRef idx="minor">
-            <a:schemeClr val="lt1"/>
-          </a:fontRef>
-        </p:style>
-        <p:txBody>
-          <a:bodyPr rtlCol="0" anchor="ctr" wrap="square"/>
-          <a:lstStyle/>
-          <a:p>
-            <a:pPr algn="ctr"/>
-            <a:r>
-              <a:rPr sz="1200" b="1">
-                <a:solidFill>
-                  <a:srgbClr val="8A93A3"/>
-                </a:solidFill>
-              </a:rPr>
-              <a:t>per-mode spreads</a:t>
-            </a:r>
-          </a:p>
-          <a:p>
-            <a:pPr algn="ctr"/>
-            <a:r>
-              <a:rPr sz="900" b="0">
-                <a:solidFill>
-                  <a:srgbClr val="8A93A3"/>
-                </a:solidFill>
-              </a:rPr>
-              <a:t>row-dependent</a:t>
-            </a:r>
-          </a:p>
-          <a:p>
-            <a:pPr algn="ctr"/>
-            <a:r>
-              <a:rPr sz="900" b="0">
-                <a:solidFill>
-                  <a:srgbClr val="8A93A3"/>
-                </a:solidFill>
-              </a:rPr>
-              <a:t>error bars</a:t>
-            </a:r>
-          </a:p>
-        </p:txBody>
-      </p:sp>
-      <p:sp>
-        <p:nvSpPr>
-          <p:cNvPr id="21" name="TextBox 20"/>
+          <p:cNvPr id="15" name="TextBox 14"/>
           <p:cNvSpPr txBox="1"/>
           <p:nvPr/>
         </p:nvSpPr>
         <p:spPr>
           <a:xfrm>
-            <a:off x="502920" y="5349240"/>
-            <a:ext cx="11155680" cy="731520"/>
+            <a:off x="9921240" y="3337560"/>
+            <a:ext cx="2194560" cy="365760"/>
           </a:xfrm>
           <a:prstGeom prst="rect">
             <a:avLst/>
@@ -13964,28 +13947,64 @@
           </a:bodyPr>
           <a:lstStyle/>
           <a:p>
-            <a:pPr algn="l"/>
-            <a:r>
-              <a:rPr sz="1100" b="0">
+            <a:pPr algn="ctr"/>
+            <a:r>
+              <a:rPr sz="1200" b="1">
                 <a:solidFill>
                   <a:srgbClr val="1A2238"/>
                 </a:solidFill>
               </a:rPr>
-              <a:t>39,067 trainable params (trunk 35,584 + 3 x 1,161) -- ~1.2% of the frozen encoder; output biases seeded at the targets' mean/std (raw-unit cold-start fix: an unseeded head starts ~1,300 sigmas from typical T).</a:t>
-            </a:r>
-          </a:p>
-        </p:txBody>
-      </p:sp>
-      <p:sp>
-        <p:nvSpPr>
-          <p:cNvPr id="22" name="TextBox 21"/>
+              <a:t>SiO2 marginal (Beta)</a:t>
+            </a:r>
+          </a:p>
+        </p:txBody>
+      </p:sp>
+      <p:cxnSp>
+        <p:nvCxnSpPr>
+          <p:cNvPr id="16" name="Connector 15"/>
+          <p:cNvCxnSpPr/>
+          <p:nvPr/>
+        </p:nvCxnSpPr>
+        <p:spPr>
+          <a:xfrm flipV="1">
+            <a:off x="11073384" y="2103120"/>
+            <a:ext cx="0" cy="1188720"/>
+          </a:xfrm>
+          <a:prstGeom prst="bentConnector3">
+            <a:avLst/>
+          </a:prstGeom>
+          <a:ln w="25400">
+            <a:solidFill>
+              <a:srgbClr val="2A9D8F"/>
+            </a:solidFill>
+          </a:ln>
+          <a:effectLst/>
+        </p:spPr>
+        <p:style>
+          <a:lnRef idx="2">
+            <a:schemeClr val="accent1"/>
+          </a:lnRef>
+          <a:fillRef idx="0">
+            <a:schemeClr val="accent1"/>
+          </a:fillRef>
+          <a:effectRef idx="1">
+            <a:schemeClr val="accent1"/>
+          </a:effectRef>
+          <a:fontRef idx="minor">
+            <a:schemeClr val="tx1"/>
+          </a:fontRef>
+        </p:style>
+      </p:cxnSp>
+      <p:sp>
+        <p:nvSpPr>
+          <p:cNvPr id="17" name="TextBox 16"/>
           <p:cNvSpPr txBox="1"/>
           <p:nvPr/>
         </p:nvSpPr>
         <p:spPr>
           <a:xfrm>
-            <a:off x="502920" y="5669280"/>
-            <a:ext cx="11155680" cy="731520"/>
+            <a:off x="9875520" y="1737360"/>
+            <a:ext cx="2286000" cy="731520"/>
           </a:xfrm>
           <a:prstGeom prst="rect">
             <a:avLst/>
@@ -13998,223 +14017,28 @@
           </a:bodyPr>
           <a:lstStyle/>
           <a:p>
-            <a:pPr algn="l"/>
+            <a:pPr algn="ctr"/>
             <a:r>
               <a:rPr sz="1000" b="0">
                 <a:solidFill>
-                  <a:srgbClr val="8A93A3"/>
-                </a:solidFill>
-              </a:rPr>
-              <a:t>dials (configs/heads/joint_heads.yaml): cond_n_components 3 . cond_sigma_eps 1e-3 . cond_hidden 128 . cond_layers 1 (architecture mini-sweep pending) . dropout 0.35 . lambda_cond 0.01 -- fixed in code: GELU, AdamW, per-head grad-clip 1.0, linear units (no log transform of T/P/H2O)</a:t>
-            </a:r>
-          </a:p>
-        </p:txBody>
-      </p:sp>
-      <p:sp>
-        <p:nvSpPr>
-          <p:cNvPr id="23" name="Rounded Rectangle 22"/>
-          <p:cNvSpPr/>
-          <p:nvPr/>
-        </p:nvSpPr>
-        <p:spPr>
-          <a:xfrm>
-            <a:off x="1463040" y="6035040"/>
-            <a:ext cx="3139440" cy="777240"/>
-          </a:xfrm>
-          <a:prstGeom prst="roundRect">
-            <a:avLst/>
-          </a:prstGeom>
-          <a:solidFill>
-            <a:srgbClr val="FFFFFF"/>
-          </a:solidFill>
-          <a:ln w="12700">
-            <a:solidFill>
-              <a:srgbClr val="C8CDD6"/>
-            </a:solidFill>
-          </a:ln>
-          <a:effectLst/>
-        </p:spPr>
-        <p:style>
-          <a:lnRef idx="1">
-            <a:schemeClr val="accent1"/>
-          </a:lnRef>
-          <a:fillRef idx="3">
-            <a:schemeClr val="accent1"/>
-          </a:fillRef>
-          <a:effectRef idx="2">
-            <a:schemeClr val="accent1"/>
-          </a:effectRef>
-          <a:fontRef idx="minor">
-            <a:schemeClr val="lt1"/>
-          </a:fontRef>
-        </p:style>
-        <p:txBody>
-          <a:bodyPr rtlCol="0" anchor="ctr" wrap="square"/>
-          <a:lstStyle/>
-          <a:p>
-            <a:pPr algn="ctr"/>
-            <a:r>
-              <a:rPr sz="1200" b="1">
-                <a:solidFill>
-                  <a:srgbClr val="8A93A3"/>
-                </a:solidFill>
-              </a:rPr>
-              <a:t>L_cond = Σ_axis −log Σ_k w_k · N(t | mu_k, sigma_k²)</a:t>
-            </a:r>
-          </a:p>
-          <a:p>
-            <a:pPr algn="ctr"/>
-            <a:r>
-              <a:rPr sz="900" b="0">
-                <a:solidFill>
-                  <a:srgbClr val="8A93A3"/>
-                </a:solidFill>
-              </a:rPr>
-              <a:t>per-axis GMM NLL in raw units; minimized when the mixture matches each rock's condition distribution per support</a:t>
-            </a:r>
-          </a:p>
-        </p:txBody>
-      </p:sp>
-      <p:sp>
-        <p:nvSpPr>
-          <p:cNvPr id="24" name="Rounded Rectangle 23"/>
-          <p:cNvSpPr/>
-          <p:nvPr/>
-        </p:nvSpPr>
-        <p:spPr>
-          <a:xfrm>
-            <a:off x="4876800" y="6035040"/>
-            <a:ext cx="3139440" cy="777240"/>
-          </a:xfrm>
-          <a:prstGeom prst="roundRect">
-            <a:avLst/>
-          </a:prstGeom>
-          <a:solidFill>
-            <a:srgbClr val="FFFFFF"/>
-          </a:solidFill>
-          <a:ln w="12700">
-            <a:solidFill>
-              <a:srgbClr val="C8CDD6"/>
-            </a:solidFill>
-          </a:ln>
-          <a:effectLst/>
-        </p:spPr>
-        <p:style>
-          <a:lnRef idx="1">
-            <a:schemeClr val="accent1"/>
-          </a:lnRef>
-          <a:fillRef idx="3">
-            <a:schemeClr val="accent1"/>
-          </a:fillRef>
-          <a:effectRef idx="2">
-            <a:schemeClr val="accent1"/>
-          </a:effectRef>
-          <a:fontRef idx="minor">
-            <a:schemeClr val="lt1"/>
-          </a:fontRef>
-        </p:style>
-        <p:txBody>
-          <a:bodyPr rtlCol="0" anchor="ctr" wrap="square"/>
-          <a:lstStyle/>
-          <a:p>
-            <a:pPr algn="ctr"/>
-            <a:r>
-              <a:rPr sz="1200" b="1">
-                <a:solidFill>
-                  <a:srgbClr val="8A93A3"/>
-                </a:solidFill>
-              </a:rPr>
-              <a:t>support in, never through the encoder</a:t>
-            </a:r>
-          </a:p>
-          <a:p>
-            <a:pPr algn="ctr"/>
-            <a:r>
-              <a:rPr sz="900" b="0">
-                <a:solidFill>
-                  <a:srgbClr val="8A93A3"/>
-                </a:solidFill>
-              </a:rPr>
-              <a:t>teacher-forced true set at train -&gt; no gradient coupling to ModeHead; sampled sets at inference (exposure bias, #31)</a:t>
-            </a:r>
-          </a:p>
-        </p:txBody>
-      </p:sp>
-      <p:sp>
-        <p:nvSpPr>
-          <p:cNvPr id="25" name="Rounded Rectangle 24"/>
-          <p:cNvSpPr/>
-          <p:nvPr/>
-        </p:nvSpPr>
-        <p:spPr>
-          <a:xfrm>
-            <a:off x="8290560" y="6035040"/>
-            <a:ext cx="3139440" cy="777240"/>
-          </a:xfrm>
-          <a:prstGeom prst="roundRect">
-            <a:avLst/>
-          </a:prstGeom>
-          <a:solidFill>
-            <a:srgbClr val="FFFFFF"/>
-          </a:solidFill>
-          <a:ln w="12700">
-            <a:solidFill>
-              <a:srgbClr val="C8CDD6"/>
-            </a:solidFill>
-          </a:ln>
-          <a:effectLst/>
-        </p:spPr>
-        <p:style>
-          <a:lnRef idx="1">
-            <a:schemeClr val="accent1"/>
-          </a:lnRef>
-          <a:fillRef idx="3">
-            <a:schemeClr val="accent1"/>
-          </a:fillRef>
-          <a:effectRef idx="2">
-            <a:schemeClr val="accent1"/>
-          </a:effectRef>
-          <a:fontRef idx="minor">
-            <a:schemeClr val="lt1"/>
-          </a:fontRef>
-        </p:style>
-        <p:txBody>
-          <a:bodyPr rtlCol="0" anchor="ctr" wrap="square"/>
-          <a:lstStyle/>
-          <a:p>
-            <a:pPr algn="ctr"/>
-            <a:r>
-              <a:rPr sz="1200" b="1">
-                <a:solidFill>
-                  <a:srgbClr val="8A93A3"/>
-                </a:solidFill>
-              </a:rPr>
-              <a:t>L = L_mode + λ_comp·L_comp + λ_cond·L_cond + λ_bal·L_closure</a:t>
-            </a:r>
-          </a:p>
-          <a:p>
-            <a:pPr algn="ctr"/>
-            <a:r>
-              <a:rPr sz="900" b="0">
-                <a:solidFill>
-                  <a:srgbClr val="8A93A3"/>
-                </a:solidFill>
-              </a:rPr>
-              <a:t>heads share no weights and each is snapshotted at its own raw-val best, so λ_cond only absorbs the raw-unit scale in the total</a:t>
-            </a:r>
-          </a:p>
-        </p:txBody>
-      </p:sp>
-      <p:sp>
-        <p:nvSpPr>
-          <p:cNvPr id="26" name="TextBox 25"/>
+                  <a:srgbClr val="2A9D8F"/>
+                </a:solidFill>
+              </a:rPr>
+              <a:t>truth 0.553 -&gt; PIT 0.43</a:t>
+            </a:r>
+          </a:p>
+        </p:txBody>
+      </p:sp>
+      <p:sp>
+        <p:nvSpPr>
+          <p:cNvPr id="18" name="TextBox 17"/>
           <p:cNvSpPr txBox="1"/>
           <p:nvPr/>
         </p:nvSpPr>
         <p:spPr>
           <a:xfrm>
-            <a:off x="457200" y="6080760"/>
-            <a:ext cx="960120" cy="731520"/>
+            <a:off x="502920" y="4754880"/>
+            <a:ext cx="11155680" cy="731520"/>
           </a:xfrm>
           <a:prstGeom prst="rect">
             <a:avLst/>
@@ -14231,11 +14055,78 @@
             <a:r>
               <a:rPr sz="1100" b="0">
                 <a:solidFill>
-                  <a:srgbClr val="C0392B"/>
-                </a:solidFill>
-              </a:rPr>
-              <a:t>the loss,
-explicitly:</a:t>
+                  <a:srgbClr val="1A2238"/>
+                </a:solidFill>
+              </a:rPr>
+              <a:t>population: only truly-present (row, phase) pairs -- 42k for cpx down to ~240 for andalusite. headline (val roster, tuned): comp NLL -53.85 nats per present (row, phase), from -50.25 untuned; majors' PIT tails sit near the nominal 10% (cpx 0.055/0.056).</a:t>
+            </a:r>
+          </a:p>
+        </p:txBody>
+      </p:sp>
+      <p:sp>
+        <p:nvSpPr>
+          <p:cNvPr id="19" name="TextBox 18"/>
+          <p:cNvSpPr txBox="1"/>
+          <p:nvPr/>
+        </p:nvSpPr>
+        <p:spPr>
+          <a:xfrm>
+            <a:off x="502920" y="5440680"/>
+            <a:ext cx="11155680" cy="731520"/>
+          </a:xfrm>
+          <a:prstGeom prst="rect">
+            <a:avLst/>
+          </a:prstGeom>
+          <a:noFill/>
+        </p:spPr>
+        <p:txBody>
+          <a:bodyPr wrap="square">
+            <a:spAutoFit/>
+          </a:bodyPr>
+          <a:lstStyle/>
+          <a:p>
+            <a:pPr algn="l"/>
+            <a:r>
+              <a:rPr sz="1100" b="0">
+                <a:solidFill>
+                  <a:srgbClr val="1A2238"/>
+                </a:solidFill>
+              </a:rPr>
+              <a:t>the tuned confidence spans ~3 decades and tracks real mineralogy: near-stoichiometric phases (q, ru, sph, sill) earn alpha0 up to ~30,000 while wide solid solutions (spl, ilm, cpx) stay soft -- the untuned model hedged every phase into alpha0 100-650. mass balance closes to 1.3% mean L2 with signed per-oxide residuals centered on zero; plag An# parity r = 0.93.</a:t>
+            </a:r>
+          </a:p>
+        </p:txBody>
+      </p:sp>
+      <p:sp>
+        <p:nvSpPr>
+          <p:cNvPr id="20" name="TextBox 19"/>
+          <p:cNvSpPr txBox="1"/>
+          <p:nvPr/>
+        </p:nvSpPr>
+        <p:spPr>
+          <a:xfrm>
+            <a:off x="502920" y="6263640"/>
+            <a:ext cx="11155680" cy="731520"/>
+          </a:xfrm>
+          <a:prstGeom prst="rect">
+            <a:avLst/>
+          </a:prstGeom>
+          <a:noFill/>
+        </p:spPr>
+        <p:txBody>
+          <a:bodyPr wrap="square">
+            <a:spAutoFit/>
+          </a:bodyPr>
+          <a:lstStyle/>
+          <a:p>
+            <a:pPr algn="l"/>
+            <a:r>
+              <a:rPr sz="1000" b="0">
+                <a:solidFill>
+                  <a:srgbClr val="8A93A3"/>
+                </a:solidFill>
+              </a:rPr>
+              <a:t>current limits: hard-zero oxides ride the eps floor (a quartz row is 'SiO2 + 10 floors'); ilmenite FeO/TiO2 stays the accuracy outlier; ~0.3% of corpus rows cannot self-close and set an unattainable closure floor there. full report: results/comp_head/&lt;tag&gt;/</a:t>
             </a:r>
           </a:p>
         </p:txBody>
@@ -14321,163 +14212,55 @@
                   <a:srgbClr val="1A2238"/>
                 </a:solidFill>
               </a:rPr>
-              <a:t>What the heads emit (distributions, not point estimates)</a:t>
-            </a:r>
-          </a:p>
-        </p:txBody>
-      </p:sp>
-      <p:sp>
-        <p:nvSpPr>
-          <p:cNvPr id="4" name="Rounded Rectangle 3"/>
+              <a:t>Inside CondHead: a support-conditioned mixture over (T, P, H2O)</a:t>
+            </a:r>
+          </a:p>
+        </p:txBody>
+      </p:sp>
+      <p:sp>
+        <p:nvSpPr>
+          <p:cNvPr id="4" name="TextBox 3"/>
+          <p:cNvSpPr txBox="1"/>
+          <p:nvPr/>
+        </p:nvSpPr>
+        <p:spPr>
+          <a:xfrm>
+            <a:off x="502920" y="1051560"/>
+            <a:ext cx="11155680" cy="731520"/>
+          </a:xfrm>
+          <a:prstGeom prst="rect">
+            <a:avLst/>
+          </a:prstGeom>
+          <a:noFill/>
+        </p:spPr>
+        <p:txBody>
+          <a:bodyPr wrap="square">
+            <a:spAutoFit/>
+          </a:bodyPr>
+          <a:lstStyle/>
+          <a:p>
+            <a:pPr algn="l"/>
+            <a:r>
+              <a:rPr sz="1300" b="0">
+                <a:solidFill>
+                  <a:srgbClr val="8A93A3"/>
+                </a:solidFill>
+              </a:rPr>
+              <a:t>the inverse-inference head, chain rule p(support | h) x p(T, P, H2O | h, support): the presence vector joins h at the input -- teacher-forced true set at train, ModeHead-sampled at inference</a:t>
+            </a:r>
+          </a:p>
+        </p:txBody>
+      </p:sp>
+      <p:sp>
+        <p:nvSpPr>
+          <p:cNvPr id="5" name="Oval 4"/>
           <p:cNvSpPr/>
           <p:nvPr/>
         </p:nvSpPr>
         <p:spPr>
           <a:xfrm>
-            <a:off x="502920" y="2651760"/>
-            <a:ext cx="2286000" cy="1554480"/>
-          </a:xfrm>
-          <a:prstGeom prst="roundRect">
-            <a:avLst/>
-          </a:prstGeom>
-          <a:solidFill>
-            <a:srgbClr val="E1E8FF"/>
-          </a:solidFill>
-          <a:ln w="25400">
-            <a:solidFill>
-              <a:srgbClr val="2E5BFF"/>
-            </a:solidFill>
-          </a:ln>
-          <a:effectLst/>
-        </p:spPr>
-        <p:style>
-          <a:lnRef idx="1">
-            <a:schemeClr val="accent1"/>
-          </a:lnRef>
-          <a:fillRef idx="3">
-            <a:schemeClr val="accent1"/>
-          </a:fillRef>
-          <a:effectRef idx="2">
-            <a:schemeClr val="accent1"/>
-          </a:effectRef>
-          <a:fontRef idx="minor">
-            <a:schemeClr val="lt1"/>
-          </a:fontRef>
-        </p:style>
-        <p:txBody>
-          <a:bodyPr rtlCol="0" anchor="ctr" wrap="square"/>
-          <a:lstStyle/>
-          <a:p>
-            <a:pPr algn="ctr"/>
-            <a:r>
-              <a:rPr sz="1200" b="1">
-                <a:solidFill>
-                  <a:srgbClr val="1A2238"/>
-                </a:solidFill>
-              </a:rPr>
-              <a:t>example bulk</a:t>
-            </a:r>
-          </a:p>
-          <a:p>
-            <a:pPr algn="ctr"/>
-            <a:r>
-              <a:rPr sz="1200" b="1">
-                <a:solidFill>
-                  <a:srgbClr val="1A2238"/>
-                </a:solidFill>
-              </a:rPr>
-              <a:t/>
-            </a:r>
-          </a:p>
-          <a:p>
-            <a:pPr algn="ctr"/>
-            <a:r>
-              <a:rPr sz="900" b="0">
-                <a:solidFill>
-                  <a:srgbClr val="8A93A3"/>
-                </a:solidFill>
-              </a:rPr>
-              <a:t>SiO2 50  Al2O3 16</a:t>
-            </a:r>
-          </a:p>
-          <a:p>
-            <a:pPr algn="ctr"/>
-            <a:r>
-              <a:rPr sz="900" b="0">
-                <a:solidFill>
-                  <a:srgbClr val="8A93A3"/>
-                </a:solidFill>
-              </a:rPr>
-              <a:t>MgO 7.5  FeO 11</a:t>
-            </a:r>
-          </a:p>
-          <a:p>
-            <a:pPr algn="ctr"/>
-            <a:r>
-              <a:rPr sz="900" b="0">
-                <a:solidFill>
-                  <a:srgbClr val="8A93A3"/>
-                </a:solidFill>
-              </a:rPr>
-              <a:t>Sr 400 ppm ...</a:t>
-            </a:r>
-          </a:p>
-        </p:txBody>
-      </p:sp>
-      <p:sp>
-        <p:nvSpPr>
-          <p:cNvPr id="5" name="Right Arrow 4"/>
-          <p:cNvSpPr/>
-          <p:nvPr/>
-        </p:nvSpPr>
-        <p:spPr>
-          <a:xfrm>
-            <a:off x="2880360" y="3246120"/>
-            <a:ext cx="457200" cy="365760"/>
-          </a:xfrm>
-          <a:prstGeom prst="rightArrow">
-            <a:avLst/>
-          </a:prstGeom>
-          <a:solidFill>
-            <a:srgbClr val="1A2238"/>
-          </a:solidFill>
-          <a:ln>
-            <a:noFill/>
-          </a:ln>
-          <a:effectLst/>
-        </p:spPr>
-        <p:style>
-          <a:lnRef idx="1">
-            <a:schemeClr val="accent1"/>
-          </a:lnRef>
-          <a:fillRef idx="3">
-            <a:schemeClr val="accent1"/>
-          </a:fillRef>
-          <a:effectRef idx="2">
-            <a:schemeClr val="accent1"/>
-          </a:effectRef>
-          <a:fontRef idx="minor">
-            <a:schemeClr val="lt1"/>
-          </a:fontRef>
-        </p:style>
-        <p:txBody>
-          <a:bodyPr rtlCol="0" anchor="ctr"/>
-          <a:lstStyle/>
-          <a:p>
-            <a:pPr algn="ctr"/>
-          </a:p>
-        </p:txBody>
-      </p:sp>
-      <p:sp>
-        <p:nvSpPr>
-          <p:cNvPr id="6" name="Oval 5"/>
-          <p:cNvSpPr/>
-          <p:nvPr/>
-        </p:nvSpPr>
-        <p:spPr>
-          <a:xfrm>
-            <a:off x="3456432" y="2770632"/>
-            <a:ext cx="1316736" cy="1316736"/>
+            <a:off x="777240" y="2834640"/>
+            <a:ext cx="1371600" cy="1371600"/>
           </a:xfrm>
           <a:prstGeom prst="ellipse">
             <a:avLst/>
@@ -14535,13 +14318,47 @@
       </p:sp>
       <p:sp>
         <p:nvSpPr>
+          <p:cNvPr id="6" name="TextBox 5"/>
+          <p:cNvSpPr txBox="1"/>
+          <p:nvPr/>
+        </p:nvSpPr>
+        <p:spPr>
+          <a:xfrm>
+            <a:off x="457200" y="4434840"/>
+            <a:ext cx="2011680" cy="731520"/>
+          </a:xfrm>
+          <a:prstGeom prst="rect">
+            <a:avLst/>
+          </a:prstGeom>
+          <a:noFill/>
+        </p:spPr>
+        <p:txBody>
+          <a:bodyPr wrap="square">
+            <a:spAutoFit/>
+          </a:bodyPr>
+          <a:lstStyle/>
+          <a:p>
+            <a:pPr algn="ctr"/>
+            <a:r>
+              <a:rPr sz="1000" b="0">
+                <a:solidFill>
+                  <a:srgbClr val="8A93A3"/>
+                </a:solidFill>
+              </a:rPr>
+              <a:t>frozen h [256] ++ presence vector [21] = 277-dim input</a:t>
+            </a:r>
+          </a:p>
+        </p:txBody>
+      </p:sp>
+      <p:sp>
+        <p:nvSpPr>
           <p:cNvPr id="7" name="Right Arrow 6"/>
           <p:cNvSpPr/>
           <p:nvPr/>
         </p:nvSpPr>
         <p:spPr>
           <a:xfrm>
-            <a:off x="4892040" y="3246120"/>
+            <a:off x="2286000" y="3337560"/>
             <a:ext cx="457200" cy="365760"/>
           </a:xfrm>
           <a:prstGeom prst="rightArrow">
@@ -14585,8 +14402,374 @@
         </p:nvSpPr>
         <p:spPr>
           <a:xfrm>
-            <a:off x="5486400" y="1417320"/>
-            <a:ext cx="6309360" cy="2057400"/>
+            <a:off x="2834640" y="2788920"/>
+            <a:ext cx="2651760" cy="1463040"/>
+          </a:xfrm>
+          <a:prstGeom prst="roundRect">
+            <a:avLst/>
+          </a:prstGeom>
+          <a:solidFill>
+            <a:srgbClr val="EAE8FB"/>
+          </a:solidFill>
+          <a:ln w="25400">
+            <a:solidFill>
+              <a:srgbClr val="6C5CE7"/>
+            </a:solidFill>
+          </a:ln>
+          <a:effectLst/>
+        </p:spPr>
+        <p:style>
+          <a:lnRef idx="1">
+            <a:schemeClr val="accent1"/>
+          </a:lnRef>
+          <a:fillRef idx="3">
+            <a:schemeClr val="accent1"/>
+          </a:fillRef>
+          <a:effectRef idx="2">
+            <a:schemeClr val="accent1"/>
+          </a:effectRef>
+          <a:fontRef idx="minor">
+            <a:schemeClr val="lt1"/>
+          </a:fontRef>
+        </p:style>
+        <p:txBody>
+          <a:bodyPr rtlCol="0" anchor="ctr" wrap="square"/>
+          <a:lstStyle/>
+          <a:p>
+            <a:pPr algn="ctr"/>
+            <a:r>
+              <a:rPr sz="1300" b="1">
+                <a:solidFill>
+                  <a:srgbClr val="1A2238"/>
+                </a:solidFill>
+              </a:rPr>
+              <a:t>own trunk</a:t>
+            </a:r>
+          </a:p>
+          <a:p>
+            <a:pPr algn="ctr"/>
+            <a:r>
+              <a:rPr sz="1000" b="0">
+                <a:solidFill>
+                  <a:srgbClr val="8A93A3"/>
+                </a:solidFill>
+              </a:rPr>
+              <a:t>2 x [Linear -&gt; 512]</a:t>
+            </a:r>
+          </a:p>
+          <a:p>
+            <a:pPr algn="ctr"/>
+            <a:r>
+              <a:rPr sz="1000" b="0">
+                <a:solidFill>
+                  <a:srgbClr val="8A93A3"/>
+                </a:solidFill>
+              </a:rPr>
+              <a:t>GELU + dropout each</a:t>
+            </a:r>
+          </a:p>
+          <a:p>
+            <a:pPr algn="ctr"/>
+            <a:r>
+              <a:rPr sz="1000" b="0">
+                <a:solidFill>
+                  <a:srgbClr val="8A93A3"/>
+                </a:solidFill>
+              </a:rPr>
+              <a:t>404,992 params</a:t>
+            </a:r>
+          </a:p>
+        </p:txBody>
+      </p:sp>
+      <p:cxnSp>
+        <p:nvCxnSpPr>
+          <p:cNvPr id="9" name="Connector 8"/>
+          <p:cNvCxnSpPr/>
+          <p:nvPr/>
+        </p:nvCxnSpPr>
+        <p:spPr>
+          <a:xfrm flipV="1">
+            <a:off x="5486400" y="2354580"/>
+            <a:ext cx="685800" cy="1165860"/>
+          </a:xfrm>
+          <a:prstGeom prst="bentConnector3">
+            <a:avLst/>
+          </a:prstGeom>
+          <a:ln w="19050">
+            <a:solidFill>
+              <a:srgbClr val="8A93A3"/>
+            </a:solidFill>
+          </a:ln>
+          <a:effectLst/>
+        </p:spPr>
+        <p:style>
+          <a:lnRef idx="2">
+            <a:schemeClr val="accent1"/>
+          </a:lnRef>
+          <a:fillRef idx="0">
+            <a:schemeClr val="accent1"/>
+          </a:fillRef>
+          <a:effectRef idx="1">
+            <a:schemeClr val="accent1"/>
+          </a:effectRef>
+          <a:fontRef idx="minor">
+            <a:schemeClr val="tx1"/>
+          </a:fontRef>
+        </p:style>
+      </p:cxnSp>
+      <p:sp>
+        <p:nvSpPr>
+          <p:cNvPr id="10" name="Rounded Rectangle 9"/>
+          <p:cNvSpPr/>
+          <p:nvPr/>
+        </p:nvSpPr>
+        <p:spPr>
+          <a:xfrm>
+            <a:off x="6172200" y="1828800"/>
+            <a:ext cx="3017520" cy="1051560"/>
+          </a:xfrm>
+          <a:prstGeom prst="roundRect">
+            <a:avLst/>
+          </a:prstGeom>
+          <a:solidFill>
+            <a:srgbClr val="DDF4F2"/>
+          </a:solidFill>
+          <a:ln w="25400">
+            <a:solidFill>
+              <a:srgbClr val="12B5A5"/>
+            </a:solidFill>
+          </a:ln>
+          <a:effectLst/>
+        </p:spPr>
+        <p:style>
+          <a:lnRef idx="1">
+            <a:schemeClr val="accent1"/>
+          </a:lnRef>
+          <a:fillRef idx="3">
+            <a:schemeClr val="accent1"/>
+          </a:fillRef>
+          <a:effectRef idx="2">
+            <a:schemeClr val="accent1"/>
+          </a:effectRef>
+          <a:fontRef idx="minor">
+            <a:schemeClr val="lt1"/>
+          </a:fontRef>
+        </p:style>
+        <p:txBody>
+          <a:bodyPr rtlCol="0" anchor="ctr" wrap="square"/>
+          <a:lstStyle/>
+          <a:p>
+            <a:pPr algn="ctr"/>
+            <a:r>
+              <a:rPr sz="1300" b="1">
+                <a:solidFill>
+                  <a:srgbClr val="1A2238"/>
+                </a:solidFill>
+              </a:rPr>
+              <a:t>weight branch</a:t>
+            </a:r>
+          </a:p>
+          <a:p>
+            <a:pPr algn="ctr"/>
+            <a:r>
+              <a:rPr sz="1000" b="0">
+                <a:solidFill>
+                  <a:srgbClr val="8A93A3"/>
+                </a:solidFill>
+              </a:rPr>
+              <a:t>Linear 512 -&gt; 9 (3 axes x K=3)</a:t>
+            </a:r>
+          </a:p>
+          <a:p>
+            <a:pPr algn="ctr"/>
+            <a:r>
+              <a:rPr sz="1000" b="0">
+                <a:solidFill>
+                  <a:srgbClr val="8A93A3"/>
+                </a:solidFill>
+              </a:rPr>
+              <a:t>log-softmax over K per axis</a:t>
+            </a:r>
+          </a:p>
+          <a:p>
+            <a:pPr algn="ctr"/>
+            <a:r>
+              <a:rPr sz="1000" b="0">
+                <a:solidFill>
+                  <a:srgbClr val="8A93A3"/>
+                </a:solidFill>
+              </a:rPr>
+              <a:t>4,617 params</a:t>
+            </a:r>
+          </a:p>
+        </p:txBody>
+      </p:sp>
+      <p:sp>
+        <p:nvSpPr>
+          <p:cNvPr id="11" name="Right Arrow 10"/>
+          <p:cNvSpPr/>
+          <p:nvPr/>
+        </p:nvSpPr>
+        <p:spPr>
+          <a:xfrm>
+            <a:off x="9281160" y="2189988"/>
+            <a:ext cx="365760" cy="320040"/>
+          </a:xfrm>
+          <a:prstGeom prst="rightArrow">
+            <a:avLst/>
+          </a:prstGeom>
+          <a:solidFill>
+            <a:srgbClr val="1A2238"/>
+          </a:solidFill>
+          <a:ln>
+            <a:noFill/>
+          </a:ln>
+          <a:effectLst/>
+        </p:spPr>
+        <p:style>
+          <a:lnRef idx="1">
+            <a:schemeClr val="accent1"/>
+          </a:lnRef>
+          <a:fillRef idx="3">
+            <a:schemeClr val="accent1"/>
+          </a:fillRef>
+          <a:effectRef idx="2">
+            <a:schemeClr val="accent1"/>
+          </a:effectRef>
+          <a:fontRef idx="minor">
+            <a:schemeClr val="lt1"/>
+          </a:fontRef>
+        </p:style>
+        <p:txBody>
+          <a:bodyPr rtlCol="0" anchor="ctr"/>
+          <a:lstStyle/>
+          <a:p>
+            <a:pPr algn="ctr"/>
+          </a:p>
+        </p:txBody>
+      </p:sp>
+      <p:sp>
+        <p:nvSpPr>
+          <p:cNvPr id="12" name="Rounded Rectangle 11"/>
+          <p:cNvSpPr/>
+          <p:nvPr/>
+        </p:nvSpPr>
+        <p:spPr>
+          <a:xfrm>
+            <a:off x="9738360" y="1874519"/>
+            <a:ext cx="2057400" cy="960119"/>
+          </a:xfrm>
+          <a:prstGeom prst="roundRect">
+            <a:avLst/>
+          </a:prstGeom>
+          <a:solidFill>
+            <a:srgbClr val="FFFFFF"/>
+          </a:solidFill>
+          <a:ln w="12700">
+            <a:solidFill>
+              <a:srgbClr val="C8CDD6"/>
+            </a:solidFill>
+          </a:ln>
+          <a:effectLst/>
+        </p:spPr>
+        <p:style>
+          <a:lnRef idx="1">
+            <a:schemeClr val="accent1"/>
+          </a:lnRef>
+          <a:fillRef idx="3">
+            <a:schemeClr val="accent1"/>
+          </a:fillRef>
+          <a:effectRef idx="2">
+            <a:schemeClr val="accent1"/>
+          </a:effectRef>
+          <a:fontRef idx="minor">
+            <a:schemeClr val="lt1"/>
+          </a:fontRef>
+        </p:style>
+        <p:txBody>
+          <a:bodyPr rtlCol="0" anchor="ctr" wrap="square"/>
+          <a:lstStyle/>
+          <a:p>
+            <a:pPr algn="ctr"/>
+            <a:r>
+              <a:rPr sz="1200" b="1">
+                <a:solidFill>
+                  <a:srgbClr val="8A93A3"/>
+                </a:solidFill>
+              </a:rPr>
+              <a:t>mixture weights</a:t>
+            </a:r>
+          </a:p>
+          <a:p>
+            <a:pPr algn="ctr"/>
+            <a:r>
+              <a:rPr sz="900" b="0">
+                <a:solidFill>
+                  <a:srgbClr val="8A93A3"/>
+                </a:solidFill>
+              </a:rPr>
+              <a:t>which condition mode,</a:t>
+            </a:r>
+          </a:p>
+          <a:p>
+            <a:pPr algn="ctr"/>
+            <a:r>
+              <a:rPr sz="900" b="0">
+                <a:solidFill>
+                  <a:srgbClr val="8A93A3"/>
+                </a:solidFill>
+              </a:rPr>
+              <a:t>how likely</a:t>
+            </a:r>
+          </a:p>
+        </p:txBody>
+      </p:sp>
+      <p:cxnSp>
+        <p:nvCxnSpPr>
+          <p:cNvPr id="13" name="Connector 12"/>
+          <p:cNvCxnSpPr/>
+          <p:nvPr/>
+        </p:nvCxnSpPr>
+        <p:spPr>
+          <a:xfrm>
+            <a:off x="5486400" y="3520440"/>
+            <a:ext cx="685800" cy="22860"/>
+          </a:xfrm>
+          <a:prstGeom prst="bentConnector3">
+            <a:avLst/>
+          </a:prstGeom>
+          <a:ln w="19050">
+            <a:solidFill>
+              <a:srgbClr val="8A93A3"/>
+            </a:solidFill>
+          </a:ln>
+          <a:effectLst/>
+        </p:spPr>
+        <p:style>
+          <a:lnRef idx="2">
+            <a:schemeClr val="accent1"/>
+          </a:lnRef>
+          <a:fillRef idx="0">
+            <a:schemeClr val="accent1"/>
+          </a:fillRef>
+          <a:effectRef idx="1">
+            <a:schemeClr val="accent1"/>
+          </a:effectRef>
+          <a:fontRef idx="minor">
+            <a:schemeClr val="tx1"/>
+          </a:fontRef>
+        </p:style>
+      </p:cxnSp>
+      <p:sp>
+        <p:nvSpPr>
+          <p:cNvPr id="14" name="Rounded Rectangle 13"/>
+          <p:cNvSpPr/>
+          <p:nvPr/>
+        </p:nvSpPr>
+        <p:spPr>
+          <a:xfrm>
+            <a:off x="6172200" y="3017520"/>
+            <a:ext cx="3017520" cy="1051560"/>
           </a:xfrm>
           <a:prstGeom prst="roundRect">
             <a:avLst/>
@@ -14626,61 +14809,60 @@
                   <a:srgbClr val="1A2238"/>
                 </a:solidFill>
               </a:rPr>
-              <a:t/>
-            </a:r>
-          </a:p>
-        </p:txBody>
-      </p:sp>
-      <p:sp>
-        <p:nvSpPr>
-          <p:cNvPr id="9" name="TextBox 8"/>
-          <p:cNvSpPr txBox="1"/>
-          <p:nvPr/>
-        </p:nvSpPr>
-        <p:spPr>
-          <a:xfrm>
-            <a:off x="5669280" y="1463040"/>
-            <a:ext cx="5943600" cy="731520"/>
-          </a:xfrm>
-          <a:prstGeom prst="rect">
-            <a:avLst/>
-          </a:prstGeom>
-          <a:noFill/>
-        </p:spPr>
-        <p:txBody>
-          <a:bodyPr wrap="square">
-            <a:spAutoFit/>
-          </a:bodyPr>
-          <a:lstStyle/>
-          <a:p>
-            <a:pPr algn="l"/>
-            <a:r>
-              <a:rPr sz="1200" b="0">
-                <a:solidFill>
-                  <a:srgbClr val="2A9D8F"/>
-                </a:solidFill>
-              </a:rPr>
-              <a:t>ModeHead -&gt; per phase: p(present) x amount-when-present (hurdle Dirichlet; crystals renormalized to 1, groundmass/melt excluded)</a:t>
-            </a:r>
-          </a:p>
-        </p:txBody>
-      </p:sp>
-      <p:sp>
-        <p:nvSpPr>
-          <p:cNvPr id="10" name="Rounded Rectangle 9"/>
+              <a:t>mean branch</a:t>
+            </a:r>
+          </a:p>
+          <a:p>
+            <a:pPr algn="ctr"/>
+            <a:r>
+              <a:rPr sz="1000" b="0">
+                <a:solidFill>
+                  <a:srgbClr val="8A93A3"/>
+                </a:solidFill>
+              </a:rPr>
+              <a:t>Linear 512 -&gt; 9</a:t>
+            </a:r>
+          </a:p>
+          <a:p>
+            <a:pPr algn="ctr"/>
+            <a:r>
+              <a:rPr sz="1000" b="0">
+                <a:solidFill>
+                  <a:srgbClr val="8A93A3"/>
+                </a:solidFill>
+              </a:rPr>
+              <a:t>mu_k in raw units (C, kbar, wt%)</a:t>
+            </a:r>
+          </a:p>
+          <a:p>
+            <a:pPr algn="ctr"/>
+            <a:r>
+              <a:rPr sz="1000" b="0">
+                <a:solidFill>
+                  <a:srgbClr val="8A93A3"/>
+                </a:solidFill>
+              </a:rPr>
+              <a:t>4,617 params</a:t>
+            </a:r>
+          </a:p>
+        </p:txBody>
+      </p:sp>
+      <p:sp>
+        <p:nvSpPr>
+          <p:cNvPr id="15" name="Right Arrow 14"/>
           <p:cNvSpPr/>
           <p:nvPr/>
         </p:nvSpPr>
         <p:spPr>
           <a:xfrm>
-            <a:off x="5715000" y="1874519"/>
-            <a:ext cx="1892807" cy="292608"/>
-          </a:xfrm>
-          <a:prstGeom prst="roundRect">
+            <a:off x="9281160" y="3378708"/>
+            <a:ext cx="365760" cy="320040"/>
+          </a:xfrm>
+          <a:prstGeom prst="rightArrow">
             <a:avLst/>
           </a:prstGeom>
           <a:solidFill>
-            <a:srgbClr val="2A9D8F"/>
+            <a:srgbClr val="1A2238"/>
           </a:solidFill>
           <a:ln>
             <a:noFill/>
@@ -14709,171 +14891,31 @@
           </a:p>
         </p:txBody>
       </p:sp>
-      <p:cxnSp>
-        <p:nvCxnSpPr>
-          <p:cNvPr id="11" name="Connector 10"/>
-          <p:cNvCxnSpPr/>
-          <p:nvPr/>
-        </p:nvCxnSpPr>
-        <p:spPr>
-          <a:xfrm>
-            <a:off x="7397496" y="2020824"/>
-            <a:ext cx="420624" cy="0"/>
-          </a:xfrm>
-          <a:prstGeom prst="bentConnector3">
-            <a:avLst/>
-          </a:prstGeom>
-          <a:ln w="15875">
+      <p:sp>
+        <p:nvSpPr>
+          <p:cNvPr id="16" name="Rounded Rectangle 15"/>
+          <p:cNvSpPr/>
+          <p:nvPr/>
+        </p:nvSpPr>
+        <p:spPr>
+          <a:xfrm>
+            <a:off x="9738360" y="3063239"/>
+            <a:ext cx="2057400" cy="960119"/>
+          </a:xfrm>
+          <a:prstGeom prst="roundRect">
+            <a:avLst/>
+          </a:prstGeom>
+          <a:solidFill>
+            <a:srgbClr val="FFFFFF"/>
+          </a:solidFill>
+          <a:ln w="12700">
             <a:solidFill>
-              <a:srgbClr val="1A2238"/>
+              <a:srgbClr val="C8CDD6"/>
             </a:solidFill>
           </a:ln>
           <a:effectLst/>
         </p:spPr>
         <p:style>
-          <a:lnRef idx="2">
-            <a:schemeClr val="accent1"/>
-          </a:lnRef>
-          <a:fillRef idx="0">
-            <a:schemeClr val="accent1"/>
-          </a:fillRef>
-          <a:effectRef idx="1">
-            <a:schemeClr val="accent1"/>
-          </a:effectRef>
-          <a:fontRef idx="minor">
-            <a:schemeClr val="tx1"/>
-          </a:fontRef>
-        </p:style>
-      </p:cxnSp>
-      <p:cxnSp>
-        <p:nvCxnSpPr>
-          <p:cNvPr id="12" name="Connector 11"/>
-          <p:cNvCxnSpPr/>
-          <p:nvPr/>
-        </p:nvCxnSpPr>
-        <p:spPr>
-          <a:xfrm>
-            <a:off x="7397496" y="1956816"/>
-            <a:ext cx="0" cy="128015"/>
-          </a:xfrm>
-          <a:prstGeom prst="bentConnector3">
-            <a:avLst/>
-          </a:prstGeom>
-          <a:ln w="15875">
-            <a:solidFill>
-              <a:srgbClr val="1A2238"/>
-            </a:solidFill>
-          </a:ln>
-          <a:effectLst/>
-        </p:spPr>
-        <p:style>
-          <a:lnRef idx="2">
-            <a:schemeClr val="accent1"/>
-          </a:lnRef>
-          <a:fillRef idx="0">
-            <a:schemeClr val="accent1"/>
-          </a:fillRef>
-          <a:effectRef idx="1">
-            <a:schemeClr val="accent1"/>
-          </a:effectRef>
-          <a:fontRef idx="minor">
-            <a:schemeClr val="tx1"/>
-          </a:fontRef>
-        </p:style>
-      </p:cxnSp>
-      <p:cxnSp>
-        <p:nvCxnSpPr>
-          <p:cNvPr id="13" name="Connector 12"/>
-          <p:cNvCxnSpPr/>
-          <p:nvPr/>
-        </p:nvCxnSpPr>
-        <p:spPr>
-          <a:xfrm>
-            <a:off x="7818120" y="1956816"/>
-            <a:ext cx="0" cy="128015"/>
-          </a:xfrm>
-          <a:prstGeom prst="bentConnector3">
-            <a:avLst/>
-          </a:prstGeom>
-          <a:ln w="15875">
-            <a:solidFill>
-              <a:srgbClr val="1A2238"/>
-            </a:solidFill>
-          </a:ln>
-          <a:effectLst/>
-        </p:spPr>
-        <p:style>
-          <a:lnRef idx="2">
-            <a:schemeClr val="accent1"/>
-          </a:lnRef>
-          <a:fillRef idx="0">
-            <a:schemeClr val="accent1"/>
-          </a:fillRef>
-          <a:effectRef idx="1">
-            <a:schemeClr val="accent1"/>
-          </a:effectRef>
-          <a:fontRef idx="minor">
-            <a:schemeClr val="tx1"/>
-          </a:fontRef>
-        </p:style>
-      </p:cxnSp>
-      <p:sp>
-        <p:nvSpPr>
-          <p:cNvPr id="14" name="TextBox 13"/>
-          <p:cNvSpPr txBox="1"/>
-          <p:nvPr/>
-        </p:nvSpPr>
-        <p:spPr>
-          <a:xfrm>
-            <a:off x="7909560" y="1828799"/>
-            <a:ext cx="4206240" cy="365760"/>
-          </a:xfrm>
-          <a:prstGeom prst="rect">
-            <a:avLst/>
-          </a:prstGeom>
-          <a:noFill/>
-        </p:spPr>
-        <p:txBody>
-          <a:bodyPr wrap="square">
-            <a:spAutoFit/>
-          </a:bodyPr>
-          <a:lstStyle/>
-          <a:p>
-            <a:pPr algn="l"/>
-            <a:r>
-              <a:rPr sz="1200" b="0">
-                <a:solidFill>
-                  <a:srgbClr val="1A2238"/>
-                </a:solidFill>
-              </a:rPr>
-              <a:t>plagioclase  0.45  |  p 1.00</a:t>
-            </a:r>
-          </a:p>
-        </p:txBody>
-      </p:sp>
-      <p:sp>
-        <p:nvSpPr>
-          <p:cNvPr id="15" name="Rounded Rectangle 14"/>
-          <p:cNvSpPr/>
-          <p:nvPr/>
-        </p:nvSpPr>
-        <p:spPr>
-          <a:xfrm>
-            <a:off x="5715000" y="2185415"/>
-            <a:ext cx="1135684" cy="292608"/>
-          </a:xfrm>
-          <a:prstGeom prst="roundRect">
-            <a:avLst/>
-          </a:prstGeom>
-          <a:solidFill>
-            <a:srgbClr val="2A9D8F"/>
-          </a:solidFill>
-          <a:ln>
-            <a:noFill/>
-          </a:ln>
-          <a:effectLst/>
-        </p:spPr>
-        <p:style>
           <a:lnRef idx="1">
             <a:schemeClr val="accent1"/>
           </a:lnRef>
@@ -14888,49 +14930,43 @@
           </a:fontRef>
         </p:style>
         <p:txBody>
-          <a:bodyPr rtlCol="0" anchor="ctr"/>
-          <a:lstStyle/>
-          <a:p>
-            <a:pPr algn="ctr"/>
-          </a:p>
-        </p:txBody>
-      </p:sp>
-      <p:cxnSp>
-        <p:nvCxnSpPr>
-          <p:cNvPr id="16" name="Connector 15"/>
-          <p:cNvCxnSpPr/>
-          <p:nvPr/>
-        </p:nvCxnSpPr>
-        <p:spPr>
-          <a:xfrm>
-            <a:off x="6682435" y="2331720"/>
-            <a:ext cx="336499" cy="0"/>
-          </a:xfrm>
-          <a:prstGeom prst="bentConnector3">
-            <a:avLst/>
-          </a:prstGeom>
-          <a:ln w="15875">
-            <a:solidFill>
-              <a:srgbClr val="1A2238"/>
-            </a:solidFill>
-          </a:ln>
-          <a:effectLst/>
-        </p:spPr>
-        <p:style>
-          <a:lnRef idx="2">
-            <a:schemeClr val="accent1"/>
-          </a:lnRef>
-          <a:fillRef idx="0">
-            <a:schemeClr val="accent1"/>
-          </a:fillRef>
-          <a:effectRef idx="1">
-            <a:schemeClr val="accent1"/>
-          </a:effectRef>
-          <a:fontRef idx="minor">
-            <a:schemeClr val="tx1"/>
-          </a:fontRef>
-        </p:style>
-      </p:cxnSp>
+          <a:bodyPr rtlCol="0" anchor="ctr" wrap="square"/>
+          <a:lstStyle/>
+          <a:p>
+            <a:pPr algn="ctr"/>
+            <a:r>
+              <a:rPr sz="1200" b="1">
+                <a:solidFill>
+                  <a:srgbClr val="8A93A3"/>
+                </a:solidFill>
+              </a:rPr>
+              <a:t>component centers</a:t>
+            </a:r>
+          </a:p>
+          <a:p>
+            <a:pPr algn="ctr"/>
+            <a:r>
+              <a:rPr sz="900" b="0">
+                <a:solidFill>
+                  <a:srgbClr val="8A93A3"/>
+                </a:solidFill>
+              </a:rPr>
+              <a:t>e.g. deep-wet vs</a:t>
+            </a:r>
+          </a:p>
+          <a:p>
+            <a:pPr algn="ctr"/>
+            <a:r>
+              <a:rPr sz="900" b="0">
+                <a:solidFill>
+                  <a:srgbClr val="8A93A3"/>
+                </a:solidFill>
+              </a:rPr>
+              <a:t>shallow-dry</a:t>
+            </a:r>
+          </a:p>
+        </p:txBody>
+      </p:sp>
       <p:cxnSp>
         <p:nvCxnSpPr>
           <p:cNvPr id="17" name="Connector 16"/>
@@ -14939,973 +14975,13 @@
         </p:nvCxnSpPr>
         <p:spPr>
           <a:xfrm>
-            <a:off x="6682435" y="2267712"/>
-            <a:ext cx="0" cy="128015"/>
+            <a:off x="5486400" y="3520440"/>
+            <a:ext cx="685800" cy="1211580"/>
           </a:xfrm>
           <a:prstGeom prst="bentConnector3">
             <a:avLst/>
           </a:prstGeom>
-          <a:ln w="15875">
-            <a:solidFill>
-              <a:srgbClr val="1A2238"/>
-            </a:solidFill>
-          </a:ln>
-          <a:effectLst/>
-        </p:spPr>
-        <p:style>
-          <a:lnRef idx="2">
-            <a:schemeClr val="accent1"/>
-          </a:lnRef>
-          <a:fillRef idx="0">
-            <a:schemeClr val="accent1"/>
-          </a:fillRef>
-          <a:effectRef idx="1">
-            <a:schemeClr val="accent1"/>
-          </a:effectRef>
-          <a:fontRef idx="minor">
-            <a:schemeClr val="tx1"/>
-          </a:fontRef>
-        </p:style>
-      </p:cxnSp>
-      <p:cxnSp>
-        <p:nvCxnSpPr>
-          <p:cNvPr id="18" name="Connector 17"/>
-          <p:cNvCxnSpPr/>
-          <p:nvPr/>
-        </p:nvCxnSpPr>
-        <p:spPr>
-          <a:xfrm>
-            <a:off x="7018934" y="2267712"/>
-            <a:ext cx="0" cy="128015"/>
-          </a:xfrm>
-          <a:prstGeom prst="bentConnector3">
-            <a:avLst/>
-          </a:prstGeom>
-          <a:ln w="15875">
-            <a:solidFill>
-              <a:srgbClr val="1A2238"/>
-            </a:solidFill>
-          </a:ln>
-          <a:effectLst/>
-        </p:spPr>
-        <p:style>
-          <a:lnRef idx="2">
-            <a:schemeClr val="accent1"/>
-          </a:lnRef>
-          <a:fillRef idx="0">
-            <a:schemeClr val="accent1"/>
-          </a:fillRef>
-          <a:effectRef idx="1">
-            <a:schemeClr val="accent1"/>
-          </a:effectRef>
-          <a:fontRef idx="minor">
-            <a:schemeClr val="tx1"/>
-          </a:fontRef>
-        </p:style>
-      </p:cxnSp>
-      <p:sp>
-        <p:nvSpPr>
-          <p:cNvPr id="19" name="TextBox 18"/>
-          <p:cNvSpPr txBox="1"/>
-          <p:nvPr/>
-        </p:nvSpPr>
-        <p:spPr>
-          <a:xfrm>
-            <a:off x="7110374" y="2139696"/>
-            <a:ext cx="4206240" cy="365760"/>
-          </a:xfrm>
-          <a:prstGeom prst="rect">
-            <a:avLst/>
-          </a:prstGeom>
-          <a:noFill/>
-        </p:spPr>
-        <p:txBody>
-          <a:bodyPr wrap="square">
-            <a:spAutoFit/>
-          </a:bodyPr>
-          <a:lstStyle/>
-          <a:p>
-            <a:pPr algn="l"/>
-            <a:r>
-              <a:rPr sz="1200" b="0">
-                <a:solidFill>
-                  <a:srgbClr val="1A2238"/>
-                </a:solidFill>
-              </a:rPr>
-              <a:t>clinopyroxene  0.27  |  p 0.97</a:t>
-            </a:r>
-          </a:p>
-        </p:txBody>
-      </p:sp>
-      <p:sp>
-        <p:nvSpPr>
-          <p:cNvPr id="20" name="Rounded Rectangle 19"/>
-          <p:cNvSpPr/>
-          <p:nvPr/>
-        </p:nvSpPr>
-        <p:spPr>
-          <a:xfrm>
-            <a:off x="5715000" y="2496312"/>
-            <a:ext cx="757123" cy="292608"/>
-          </a:xfrm>
-          <a:prstGeom prst="roundRect">
-            <a:avLst/>
-          </a:prstGeom>
-          <a:solidFill>
-            <a:srgbClr val="A9D7D2"/>
-          </a:solidFill>
-          <a:ln>
-            <a:noFill/>
-          </a:ln>
-          <a:effectLst/>
-        </p:spPr>
-        <p:style>
-          <a:lnRef idx="1">
-            <a:schemeClr val="accent1"/>
-          </a:lnRef>
-          <a:fillRef idx="3">
-            <a:schemeClr val="accent1"/>
-          </a:fillRef>
-          <a:effectRef idx="2">
-            <a:schemeClr val="accent1"/>
-          </a:effectRef>
-          <a:fontRef idx="minor">
-            <a:schemeClr val="lt1"/>
-          </a:fontRef>
-        </p:style>
-        <p:txBody>
-          <a:bodyPr rtlCol="0" anchor="ctr"/>
-          <a:lstStyle/>
-          <a:p>
-            <a:pPr algn="ctr"/>
-          </a:p>
-        </p:txBody>
-      </p:sp>
-      <p:cxnSp>
-        <p:nvCxnSpPr>
-          <p:cNvPr id="21" name="Connector 20"/>
-          <p:cNvCxnSpPr/>
-          <p:nvPr/>
-        </p:nvCxnSpPr>
-        <p:spPr>
-          <a:xfrm>
-            <a:off x="6219748" y="2642616"/>
-            <a:ext cx="504749" cy="0"/>
-          </a:xfrm>
-          <a:prstGeom prst="bentConnector3">
-            <a:avLst/>
-          </a:prstGeom>
-          <a:ln w="15875">
-            <a:solidFill>
-              <a:srgbClr val="1A2238"/>
-            </a:solidFill>
-          </a:ln>
-          <a:effectLst/>
-        </p:spPr>
-        <p:style>
-          <a:lnRef idx="2">
-            <a:schemeClr val="accent1"/>
-          </a:lnRef>
-          <a:fillRef idx="0">
-            <a:schemeClr val="accent1"/>
-          </a:fillRef>
-          <a:effectRef idx="1">
-            <a:schemeClr val="accent1"/>
-          </a:effectRef>
-          <a:fontRef idx="minor">
-            <a:schemeClr val="tx1"/>
-          </a:fontRef>
-        </p:style>
-      </p:cxnSp>
-      <p:cxnSp>
-        <p:nvCxnSpPr>
-          <p:cNvPr id="22" name="Connector 21"/>
-          <p:cNvCxnSpPr/>
-          <p:nvPr/>
-        </p:nvCxnSpPr>
-        <p:spPr>
-          <a:xfrm>
-            <a:off x="6219748" y="2578608"/>
-            <a:ext cx="0" cy="128016"/>
-          </a:xfrm>
-          <a:prstGeom prst="bentConnector3">
-            <a:avLst/>
-          </a:prstGeom>
-          <a:ln w="15875">
-            <a:solidFill>
-              <a:srgbClr val="1A2238"/>
-            </a:solidFill>
-          </a:ln>
-          <a:effectLst/>
-        </p:spPr>
-        <p:style>
-          <a:lnRef idx="2">
-            <a:schemeClr val="accent1"/>
-          </a:lnRef>
-          <a:fillRef idx="0">
-            <a:schemeClr val="accent1"/>
-          </a:fillRef>
-          <a:effectRef idx="1">
-            <a:schemeClr val="accent1"/>
-          </a:effectRef>
-          <a:fontRef idx="minor">
-            <a:schemeClr val="tx1"/>
-          </a:fontRef>
-        </p:style>
-      </p:cxnSp>
-      <p:cxnSp>
-        <p:nvCxnSpPr>
-          <p:cNvPr id="23" name="Connector 22"/>
-          <p:cNvCxnSpPr/>
-          <p:nvPr/>
-        </p:nvCxnSpPr>
-        <p:spPr>
-          <a:xfrm>
-            <a:off x="6724497" y="2578608"/>
-            <a:ext cx="0" cy="128016"/>
-          </a:xfrm>
-          <a:prstGeom prst="bentConnector3">
-            <a:avLst/>
-          </a:prstGeom>
-          <a:ln w="15875">
-            <a:solidFill>
-              <a:srgbClr val="1A2238"/>
-            </a:solidFill>
-          </a:ln>
-          <a:effectLst/>
-        </p:spPr>
-        <p:style>
-          <a:lnRef idx="2">
-            <a:schemeClr val="accent1"/>
-          </a:lnRef>
-          <a:fillRef idx="0">
-            <a:schemeClr val="accent1"/>
-          </a:fillRef>
-          <a:effectRef idx="1">
-            <a:schemeClr val="accent1"/>
-          </a:effectRef>
-          <a:fontRef idx="minor">
-            <a:schemeClr val="tx1"/>
-          </a:fontRef>
-        </p:style>
-      </p:cxnSp>
-      <p:sp>
-        <p:nvSpPr>
-          <p:cNvPr id="24" name="TextBox 23"/>
-          <p:cNvSpPr txBox="1"/>
-          <p:nvPr/>
-        </p:nvSpPr>
-        <p:spPr>
-          <a:xfrm>
-            <a:off x="6815937" y="2450592"/>
-            <a:ext cx="4206240" cy="365760"/>
-          </a:xfrm>
-          <a:prstGeom prst="rect">
-            <a:avLst/>
-          </a:prstGeom>
-          <a:noFill/>
-        </p:spPr>
-        <p:txBody>
-          <a:bodyPr wrap="square">
-            <a:spAutoFit/>
-          </a:bodyPr>
-          <a:lstStyle/>
-          <a:p>
-            <a:pPr algn="l"/>
-            <a:r>
-              <a:rPr sz="1200" b="0">
-                <a:solidFill>
-                  <a:srgbClr val="1A2238"/>
-                </a:solidFill>
-              </a:rPr>
-              <a:t>amphibole  0.18  |  p 0.41</a:t>
-            </a:r>
-          </a:p>
-        </p:txBody>
-      </p:sp>
-      <p:sp>
-        <p:nvSpPr>
-          <p:cNvPr id="25" name="Rounded Rectangle 24"/>
-          <p:cNvSpPr/>
-          <p:nvPr/>
-        </p:nvSpPr>
-        <p:spPr>
-          <a:xfrm>
-            <a:off x="5715000" y="2807208"/>
-            <a:ext cx="420623" cy="292608"/>
-          </a:xfrm>
-          <a:prstGeom prst="roundRect">
-            <a:avLst/>
-          </a:prstGeom>
-          <a:solidFill>
-            <a:srgbClr val="A9D7D2"/>
-          </a:solidFill>
-          <a:ln>
-            <a:noFill/>
-          </a:ln>
-          <a:effectLst/>
-        </p:spPr>
-        <p:style>
-          <a:lnRef idx="1">
-            <a:schemeClr val="accent1"/>
-          </a:lnRef>
-          <a:fillRef idx="3">
-            <a:schemeClr val="accent1"/>
-          </a:fillRef>
-          <a:effectRef idx="2">
-            <a:schemeClr val="accent1"/>
-          </a:effectRef>
-          <a:fontRef idx="minor">
-            <a:schemeClr val="lt1"/>
-          </a:fontRef>
-        </p:style>
-        <p:txBody>
-          <a:bodyPr rtlCol="0" anchor="ctr"/>
-          <a:lstStyle/>
-          <a:p>
-            <a:pPr algn="ctr"/>
-          </a:p>
-        </p:txBody>
-      </p:sp>
-      <p:cxnSp>
-        <p:nvCxnSpPr>
-          <p:cNvPr id="26" name="Connector 25"/>
-          <p:cNvCxnSpPr/>
-          <p:nvPr/>
-        </p:nvCxnSpPr>
-        <p:spPr>
-          <a:xfrm>
-            <a:off x="5967374" y="2953512"/>
-            <a:ext cx="336499" cy="0"/>
-          </a:xfrm>
-          <a:prstGeom prst="bentConnector3">
-            <a:avLst/>
-          </a:prstGeom>
-          <a:ln w="15875">
-            <a:solidFill>
-              <a:srgbClr val="1A2238"/>
-            </a:solidFill>
-          </a:ln>
-          <a:effectLst/>
-        </p:spPr>
-        <p:style>
-          <a:lnRef idx="2">
-            <a:schemeClr val="accent1"/>
-          </a:lnRef>
-          <a:fillRef idx="0">
-            <a:schemeClr val="accent1"/>
-          </a:fillRef>
-          <a:effectRef idx="1">
-            <a:schemeClr val="accent1"/>
-          </a:effectRef>
-          <a:fontRef idx="minor">
-            <a:schemeClr val="tx1"/>
-          </a:fontRef>
-        </p:style>
-      </p:cxnSp>
-      <p:cxnSp>
-        <p:nvCxnSpPr>
-          <p:cNvPr id="27" name="Connector 26"/>
-          <p:cNvCxnSpPr/>
-          <p:nvPr/>
-        </p:nvCxnSpPr>
-        <p:spPr>
-          <a:xfrm>
-            <a:off x="5967374" y="2889504"/>
-            <a:ext cx="0" cy="128016"/>
-          </a:xfrm>
-          <a:prstGeom prst="bentConnector3">
-            <a:avLst/>
-          </a:prstGeom>
-          <a:ln w="15875">
-            <a:solidFill>
-              <a:srgbClr val="1A2238"/>
-            </a:solidFill>
-          </a:ln>
-          <a:effectLst/>
-        </p:spPr>
-        <p:style>
-          <a:lnRef idx="2">
-            <a:schemeClr val="accent1"/>
-          </a:lnRef>
-          <a:fillRef idx="0">
-            <a:schemeClr val="accent1"/>
-          </a:fillRef>
-          <a:effectRef idx="1">
-            <a:schemeClr val="accent1"/>
-          </a:effectRef>
-          <a:fontRef idx="minor">
-            <a:schemeClr val="tx1"/>
-          </a:fontRef>
-        </p:style>
-      </p:cxnSp>
-      <p:cxnSp>
-        <p:nvCxnSpPr>
-          <p:cNvPr id="28" name="Connector 27"/>
-          <p:cNvCxnSpPr/>
-          <p:nvPr/>
-        </p:nvCxnSpPr>
-        <p:spPr>
-          <a:xfrm>
-            <a:off x="6303873" y="2889504"/>
-            <a:ext cx="0" cy="128016"/>
-          </a:xfrm>
-          <a:prstGeom prst="bentConnector3">
-            <a:avLst/>
-          </a:prstGeom>
-          <a:ln w="15875">
-            <a:solidFill>
-              <a:srgbClr val="1A2238"/>
-            </a:solidFill>
-          </a:ln>
-          <a:effectLst/>
-        </p:spPr>
-        <p:style>
-          <a:lnRef idx="2">
-            <a:schemeClr val="accent1"/>
-          </a:lnRef>
-          <a:fillRef idx="0">
-            <a:schemeClr val="accent1"/>
-          </a:fillRef>
-          <a:effectRef idx="1">
-            <a:schemeClr val="accent1"/>
-          </a:effectRef>
-          <a:fontRef idx="minor">
-            <a:schemeClr val="tx1"/>
-          </a:fontRef>
-        </p:style>
-      </p:cxnSp>
-      <p:sp>
-        <p:nvSpPr>
-          <p:cNvPr id="29" name="TextBox 28"/>
-          <p:cNvSpPr txBox="1"/>
-          <p:nvPr/>
-        </p:nvSpPr>
-        <p:spPr>
-          <a:xfrm>
-            <a:off x="6395313" y="2761488"/>
-            <a:ext cx="4206240" cy="365760"/>
-          </a:xfrm>
-          <a:prstGeom prst="rect">
-            <a:avLst/>
-          </a:prstGeom>
-          <a:noFill/>
-        </p:spPr>
-        <p:txBody>
-          <a:bodyPr wrap="square">
-            <a:spAutoFit/>
-          </a:bodyPr>
-          <a:lstStyle/>
-          <a:p>
-            <a:pPr algn="l"/>
-            <a:r>
-              <a:rPr sz="1200" b="0">
-                <a:solidFill>
-                  <a:srgbClr val="1A2238"/>
-                </a:solidFill>
-              </a:rPr>
-              <a:t>orthopyroxene  0.10  |  p 0.63</a:t>
-            </a:r>
-          </a:p>
-        </p:txBody>
-      </p:sp>
-      <p:sp>
-        <p:nvSpPr>
-          <p:cNvPr id="30" name="Rounded Rectangle 29"/>
-          <p:cNvSpPr/>
-          <p:nvPr/>
-        </p:nvSpPr>
-        <p:spPr>
-          <a:xfrm>
-            <a:off x="5715000" y="3118104"/>
-            <a:ext cx="168249" cy="292608"/>
-          </a:xfrm>
-          <a:prstGeom prst="roundRect">
-            <a:avLst/>
-          </a:prstGeom>
-          <a:solidFill>
-            <a:srgbClr val="2A9D8F"/>
-          </a:solidFill>
-          <a:ln>
-            <a:noFill/>
-          </a:ln>
-          <a:effectLst/>
-        </p:spPr>
-        <p:style>
-          <a:lnRef idx="1">
-            <a:schemeClr val="accent1"/>
-          </a:lnRef>
-          <a:fillRef idx="3">
-            <a:schemeClr val="accent1"/>
-          </a:fillRef>
-          <a:effectRef idx="2">
-            <a:schemeClr val="accent1"/>
-          </a:effectRef>
-          <a:fontRef idx="minor">
-            <a:schemeClr val="lt1"/>
-          </a:fontRef>
-        </p:style>
-        <p:txBody>
-          <a:bodyPr rtlCol="0" anchor="ctr"/>
-          <a:lstStyle/>
-          <a:p>
-            <a:pPr algn="ctr"/>
-          </a:p>
-        </p:txBody>
-      </p:sp>
-      <p:cxnSp>
-        <p:nvCxnSpPr>
-          <p:cNvPr id="31" name="Connector 30"/>
-          <p:cNvCxnSpPr/>
-          <p:nvPr/>
-        </p:nvCxnSpPr>
-        <p:spPr>
-          <a:xfrm>
-            <a:off x="5799124" y="3264408"/>
-            <a:ext cx="168250" cy="0"/>
-          </a:xfrm>
-          <a:prstGeom prst="bentConnector3">
-            <a:avLst/>
-          </a:prstGeom>
-          <a:ln w="15875">
-            <a:solidFill>
-              <a:srgbClr val="1A2238"/>
-            </a:solidFill>
-          </a:ln>
-          <a:effectLst/>
-        </p:spPr>
-        <p:style>
-          <a:lnRef idx="2">
-            <a:schemeClr val="accent1"/>
-          </a:lnRef>
-          <a:fillRef idx="0">
-            <a:schemeClr val="accent1"/>
-          </a:fillRef>
-          <a:effectRef idx="1">
-            <a:schemeClr val="accent1"/>
-          </a:effectRef>
-          <a:fontRef idx="minor">
-            <a:schemeClr val="tx1"/>
-          </a:fontRef>
-        </p:style>
-      </p:cxnSp>
-      <p:cxnSp>
-        <p:nvCxnSpPr>
-          <p:cNvPr id="32" name="Connector 31"/>
-          <p:cNvCxnSpPr/>
-          <p:nvPr/>
-        </p:nvCxnSpPr>
-        <p:spPr>
-          <a:xfrm>
-            <a:off x="5799124" y="3200400"/>
-            <a:ext cx="0" cy="128016"/>
-          </a:xfrm>
-          <a:prstGeom prst="bentConnector3">
-            <a:avLst/>
-          </a:prstGeom>
-          <a:ln w="15875">
-            <a:solidFill>
-              <a:srgbClr val="1A2238"/>
-            </a:solidFill>
-          </a:ln>
-          <a:effectLst/>
-        </p:spPr>
-        <p:style>
-          <a:lnRef idx="2">
-            <a:schemeClr val="accent1"/>
-          </a:lnRef>
-          <a:fillRef idx="0">
-            <a:schemeClr val="accent1"/>
-          </a:fillRef>
-          <a:effectRef idx="1">
-            <a:schemeClr val="accent1"/>
-          </a:effectRef>
-          <a:fontRef idx="minor">
-            <a:schemeClr val="tx1"/>
-          </a:fontRef>
-        </p:style>
-      </p:cxnSp>
-      <p:cxnSp>
-        <p:nvCxnSpPr>
-          <p:cNvPr id="33" name="Connector 32"/>
-          <p:cNvCxnSpPr/>
-          <p:nvPr/>
-        </p:nvCxnSpPr>
-        <p:spPr>
-          <a:xfrm>
-            <a:off x="5967374" y="3200400"/>
-            <a:ext cx="0" cy="128016"/>
-          </a:xfrm>
-          <a:prstGeom prst="bentConnector3">
-            <a:avLst/>
-          </a:prstGeom>
-          <a:ln w="15875">
-            <a:solidFill>
-              <a:srgbClr val="1A2238"/>
-            </a:solidFill>
-          </a:ln>
-          <a:effectLst/>
-        </p:spPr>
-        <p:style>
-          <a:lnRef idx="2">
-            <a:schemeClr val="accent1"/>
-          </a:lnRef>
-          <a:fillRef idx="0">
-            <a:schemeClr val="accent1"/>
-          </a:fillRef>
-          <a:effectRef idx="1">
-            <a:schemeClr val="accent1"/>
-          </a:effectRef>
-          <a:fontRef idx="minor">
-            <a:schemeClr val="tx1"/>
-          </a:fontRef>
-        </p:style>
-      </p:cxnSp>
-      <p:sp>
-        <p:nvSpPr>
-          <p:cNvPr id="34" name="TextBox 33"/>
-          <p:cNvSpPr txBox="1"/>
-          <p:nvPr/>
-        </p:nvSpPr>
-        <p:spPr>
-          <a:xfrm>
-            <a:off x="6058814" y="3072384"/>
-            <a:ext cx="4206240" cy="365760"/>
-          </a:xfrm>
-          <a:prstGeom prst="rect">
-            <a:avLst/>
-          </a:prstGeom>
-          <a:noFill/>
-        </p:spPr>
-        <p:txBody>
-          <a:bodyPr wrap="square">
-            <a:spAutoFit/>
-          </a:bodyPr>
-          <a:lstStyle/>
-          <a:p>
-            <a:pPr algn="l"/>
-            <a:r>
-              <a:rPr sz="1200" b="0">
-                <a:solidFill>
-                  <a:srgbClr val="1A2238"/>
-                </a:solidFill>
-              </a:rPr>
-              <a:t>magnetite  0.04  |  p 0.95</a:t>
-            </a:r>
-          </a:p>
-        </p:txBody>
-      </p:sp>
-      <p:sp>
-        <p:nvSpPr>
-          <p:cNvPr id="35" name="Rounded Rectangle 34"/>
-          <p:cNvSpPr/>
-          <p:nvPr/>
-        </p:nvSpPr>
-        <p:spPr>
-          <a:xfrm>
-            <a:off x="5486400" y="3657600"/>
-            <a:ext cx="6309360" cy="2331720"/>
-          </a:xfrm>
-          <a:prstGeom prst="roundRect">
-            <a:avLst/>
-          </a:prstGeom>
-          <a:solidFill>
-            <a:srgbClr val="EAE8FB"/>
-          </a:solidFill>
-          <a:ln w="25400">
-            <a:solidFill>
-              <a:srgbClr val="6C5CE7"/>
-            </a:solidFill>
-          </a:ln>
-          <a:effectLst/>
-        </p:spPr>
-        <p:style>
-          <a:lnRef idx="1">
-            <a:schemeClr val="accent1"/>
-          </a:lnRef>
-          <a:fillRef idx="3">
-            <a:schemeClr val="accent1"/>
-          </a:fillRef>
-          <a:effectRef idx="2">
-            <a:schemeClr val="accent1"/>
-          </a:effectRef>
-          <a:fontRef idx="minor">
-            <a:schemeClr val="lt1"/>
-          </a:fontRef>
-        </p:style>
-        <p:txBody>
-          <a:bodyPr rtlCol="0" anchor="ctr" wrap="square"/>
-          <a:lstStyle/>
-          <a:p>
-            <a:pPr algn="ctr"/>
-            <a:r>
-              <a:rPr sz="1300" b="1">
-                <a:solidFill>
-                  <a:srgbClr val="1A2238"/>
-                </a:solidFill>
-              </a:rPr>
-              <a:t/>
-            </a:r>
-          </a:p>
-        </p:txBody>
-      </p:sp>
-      <p:sp>
-        <p:nvSpPr>
-          <p:cNvPr id="36" name="TextBox 35"/>
-          <p:cNvSpPr txBox="1"/>
-          <p:nvPr/>
-        </p:nvSpPr>
-        <p:spPr>
-          <a:xfrm>
-            <a:off x="5669280" y="3703320"/>
-            <a:ext cx="5943600" cy="731520"/>
-          </a:xfrm>
-          <a:prstGeom prst="rect">
-            <a:avLst/>
-          </a:prstGeom>
-          <a:noFill/>
-        </p:spPr>
-        <p:txBody>
-          <a:bodyPr wrap="square">
-            <a:spAutoFit/>
-          </a:bodyPr>
-          <a:lstStyle/>
-          <a:p>
-            <a:pPr algn="l"/>
-            <a:r>
-              <a:rPr sz="1200" b="0">
-                <a:solidFill>
-                  <a:srgbClr val="6C5CE7"/>
-                </a:solidFill>
-              </a:rPr>
-              <a:t>CondHead -&gt; storage conditions (per-axis GMM; P and H2O are sampled axes, T is the derived phenocryst-window endpoint temperature)</a:t>
-            </a:r>
-          </a:p>
-        </p:txBody>
-      </p:sp>
-      <p:sp>
-        <p:nvSpPr>
-          <p:cNvPr id="37" name="Freeform 36"/>
-          <p:cNvSpPr/>
-          <p:nvPr/>
-        </p:nvSpPr>
-        <p:spPr>
-          <a:xfrm>
-            <a:off x="5806440" y="4434840"/>
-            <a:ext cx="1737360" cy="960119"/>
-          </a:xfrm>
-          <a:custGeom>
-            <a:avLst/>
-            <a:gdLst/>
-            <a:ahLst/>
-            <a:cxnLst/>
-            <a:rect l="l" t="t" r="r" b="b"/>
-            <a:pathLst>
-              <a:path w="1737360" h="960119">
-                <a:moveTo>
-                  <a:pt x="0" y="960119"/>
-                </a:moveTo>
-                <a:lnTo>
-                  <a:pt x="0" y="952846"/>
-                </a:lnTo>
-                <a:lnTo>
-                  <a:pt x="36195" y="949286"/>
-                </a:lnTo>
-                <a:lnTo>
-                  <a:pt x="72390" y="944254"/>
-                </a:lnTo>
-                <a:lnTo>
-                  <a:pt x="108585" y="937276"/>
-                </a:lnTo>
-                <a:lnTo>
-                  <a:pt x="144780" y="927782"/>
-                </a:lnTo>
-                <a:lnTo>
-                  <a:pt x="180975" y="915112"/>
-                </a:lnTo>
-                <a:lnTo>
-                  <a:pt x="217169" y="898531"/>
-                </a:lnTo>
-                <a:lnTo>
-                  <a:pt x="253365" y="877258"/>
-                </a:lnTo>
-                <a:lnTo>
-                  <a:pt x="289559" y="850511"/>
-                </a:lnTo>
-                <a:lnTo>
-                  <a:pt x="325755" y="817567"/>
-                </a:lnTo>
-                <a:lnTo>
-                  <a:pt x="361949" y="777839"/>
-                </a:lnTo>
-                <a:lnTo>
-                  <a:pt x="398145" y="730958"/>
-                </a:lnTo>
-                <a:lnTo>
-                  <a:pt x="434339" y="676862"/>
-                </a:lnTo>
-                <a:lnTo>
-                  <a:pt x="470535" y="615883"/>
-                </a:lnTo>
-                <a:lnTo>
-                  <a:pt x="506730" y="548809"/>
-                </a:lnTo>
-                <a:lnTo>
-                  <a:pt x="542925" y="476928"/>
-                </a:lnTo>
-                <a:lnTo>
-                  <a:pt x="579119" y="402028"/>
-                </a:lnTo>
-                <a:lnTo>
-                  <a:pt x="615315" y="326353"/>
-                </a:lnTo>
-                <a:lnTo>
-                  <a:pt x="651510" y="252517"/>
-                </a:lnTo>
-                <a:lnTo>
-                  <a:pt x="687705" y="183360"/>
-                </a:lnTo>
-                <a:lnTo>
-                  <a:pt x="723900" y="121779"/>
-                </a:lnTo>
-                <a:lnTo>
-                  <a:pt x="760094" y="70526"/>
-                </a:lnTo>
-                <a:lnTo>
-                  <a:pt x="796290" y="32010"/>
-                </a:lnTo>
-                <a:lnTo>
-                  <a:pt x="832484" y="8104"/>
-                </a:lnTo>
-                <a:lnTo>
-                  <a:pt x="868680" y="0"/>
-                </a:lnTo>
-                <a:lnTo>
-                  <a:pt x="904874" y="8104"/>
-                </a:lnTo>
-                <a:lnTo>
-                  <a:pt x="941070" y="32010"/>
-                </a:lnTo>
-                <a:lnTo>
-                  <a:pt x="977264" y="70526"/>
-                </a:lnTo>
-                <a:lnTo>
-                  <a:pt x="1013460" y="121779"/>
-                </a:lnTo>
-                <a:lnTo>
-                  <a:pt x="1049654" y="183360"/>
-                </a:lnTo>
-                <a:lnTo>
-                  <a:pt x="1085850" y="252517"/>
-                </a:lnTo>
-                <a:lnTo>
-                  <a:pt x="1122044" y="326353"/>
-                </a:lnTo>
-                <a:lnTo>
-                  <a:pt x="1158240" y="402028"/>
-                </a:lnTo>
-                <a:lnTo>
-                  <a:pt x="1194435" y="476928"/>
-                </a:lnTo>
-                <a:lnTo>
-                  <a:pt x="1230630" y="548809"/>
-                </a:lnTo>
-                <a:lnTo>
-                  <a:pt x="1266824" y="615883"/>
-                </a:lnTo>
-                <a:lnTo>
-                  <a:pt x="1303019" y="676862"/>
-                </a:lnTo>
-                <a:lnTo>
-                  <a:pt x="1339215" y="730958"/>
-                </a:lnTo>
-                <a:lnTo>
-                  <a:pt x="1375409" y="777839"/>
-                </a:lnTo>
-                <a:lnTo>
-                  <a:pt x="1411605" y="817567"/>
-                </a:lnTo>
-                <a:lnTo>
-                  <a:pt x="1447799" y="850511"/>
-                </a:lnTo>
-                <a:lnTo>
-                  <a:pt x="1483995" y="877258"/>
-                </a:lnTo>
-                <a:lnTo>
-                  <a:pt x="1520189" y="898531"/>
-                </a:lnTo>
-                <a:lnTo>
-                  <a:pt x="1556384" y="915112"/>
-                </a:lnTo>
-                <a:lnTo>
-                  <a:pt x="1592580" y="927782"/>
-                </a:lnTo>
-                <a:lnTo>
-                  <a:pt x="1628775" y="937276"/>
-                </a:lnTo>
-                <a:lnTo>
-                  <a:pt x="1664969" y="944254"/>
-                </a:lnTo>
-                <a:lnTo>
-                  <a:pt x="1701165" y="949286"/>
-                </a:lnTo>
-                <a:lnTo>
-                  <a:pt x="1737360" y="952846"/>
-                </a:lnTo>
-                <a:lnTo>
-                  <a:pt x="1737360" y="960119"/>
-                </a:lnTo>
-                <a:close/>
-              </a:path>
-            </a:pathLst>
-          </a:custGeom>
-          <a:solidFill>
-            <a:srgbClr val="C4D1FF"/>
-          </a:solidFill>
-          <a:ln w="25400">
-            <a:solidFill>
-              <a:srgbClr val="2E5BFF"/>
-            </a:solidFill>
-          </a:ln>
-          <a:effectLst/>
-        </p:spPr>
-        <p:style>
-          <a:lnRef idx="1">
-            <a:schemeClr val="accent1"/>
-          </a:lnRef>
-          <a:fillRef idx="3">
-            <a:schemeClr val="accent1"/>
-          </a:fillRef>
-          <a:effectRef idx="2">
-            <a:schemeClr val="accent1"/>
-          </a:effectRef>
-          <a:fontRef idx="minor">
-            <a:schemeClr val="lt1"/>
-          </a:fontRef>
-        </p:style>
-        <p:txBody>
-          <a:bodyPr rtlCol="0" anchor="ctr"/>
-          <a:lstStyle/>
-          <a:p>
-            <a:pPr algn="ctr"/>
-          </a:p>
-        </p:txBody>
-      </p:sp>
-      <p:cxnSp>
-        <p:nvCxnSpPr>
-          <p:cNvPr id="38" name="Connector 37"/>
-          <p:cNvCxnSpPr/>
-          <p:nvPr/>
-        </p:nvCxnSpPr>
-        <p:spPr>
-          <a:xfrm>
-            <a:off x="5806440" y="5394959"/>
-            <a:ext cx="1737360" cy="0"/>
-          </a:xfrm>
-          <a:prstGeom prst="bentConnector3">
-            <a:avLst/>
-          </a:prstGeom>
-          <a:ln w="12700">
+          <a:ln w="19050">
             <a:solidFill>
               <a:srgbClr val="8A93A3"/>
             </a:solidFill>
@@ -15929,494 +15005,20 @@
       </p:cxnSp>
       <p:sp>
         <p:nvSpPr>
-          <p:cNvPr id="39" name="TextBox 38"/>
-          <p:cNvSpPr txBox="1"/>
-          <p:nvPr/>
-        </p:nvSpPr>
-        <p:spPr>
-          <a:xfrm>
-            <a:off x="5623559" y="5440679"/>
-            <a:ext cx="2103120" cy="365760"/>
-          </a:xfrm>
-          <a:prstGeom prst="rect">
-            <a:avLst/>
-          </a:prstGeom>
-          <a:noFill/>
-        </p:spPr>
-        <p:txBody>
-          <a:bodyPr wrap="square">
-            <a:spAutoFit/>
-          </a:bodyPr>
-          <a:lstStyle/>
-          <a:p>
-            <a:pPr algn="ctr"/>
-            <a:r>
-              <a:rPr sz="1200" b="1">
-                <a:solidFill>
-                  <a:srgbClr val="1A2238"/>
-                </a:solidFill>
-              </a:rPr>
-              <a:t>T  1010 +/- 40 C</a:t>
-            </a:r>
-          </a:p>
-        </p:txBody>
-      </p:sp>
-      <p:sp>
-        <p:nvSpPr>
-          <p:cNvPr id="40" name="Freeform 39"/>
+          <p:cNvPr id="18" name="Rounded Rectangle 17"/>
           <p:cNvSpPr/>
           <p:nvPr/>
         </p:nvSpPr>
         <p:spPr>
           <a:xfrm>
-            <a:off x="7772400" y="4434840"/>
-            <a:ext cx="1737360" cy="960119"/>
-          </a:xfrm>
-          <a:custGeom>
-            <a:avLst/>
-            <a:gdLst/>
-            <a:ahLst/>
-            <a:cxnLst/>
-            <a:rect l="l" t="t" r="r" b="b"/>
-            <a:pathLst>
-              <a:path w="1737360" h="960119">
-                <a:moveTo>
-                  <a:pt x="0" y="960119"/>
-                </a:moveTo>
-                <a:lnTo>
-                  <a:pt x="0" y="939852"/>
-                </a:lnTo>
-                <a:lnTo>
-                  <a:pt x="36195" y="932353"/>
-                </a:lnTo>
-                <a:lnTo>
-                  <a:pt x="72390" y="922586"/>
-                </a:lnTo>
-                <a:lnTo>
-                  <a:pt x="108585" y="910058"/>
-                </a:lnTo>
-                <a:lnTo>
-                  <a:pt x="144780" y="894237"/>
-                </a:lnTo>
-                <a:lnTo>
-                  <a:pt x="180974" y="874570"/>
-                </a:lnTo>
-                <a:lnTo>
-                  <a:pt x="217170" y="850511"/>
-                </a:lnTo>
-                <a:lnTo>
-                  <a:pt x="253365" y="821553"/>
-                </a:lnTo>
-                <a:lnTo>
-                  <a:pt x="289560" y="787277"/>
-                </a:lnTo>
-                <a:lnTo>
-                  <a:pt x="325754" y="747391"/>
-                </a:lnTo>
-                <a:lnTo>
-                  <a:pt x="361950" y="701784"/>
-                </a:lnTo>
-                <a:lnTo>
-                  <a:pt x="398145" y="650575"/>
-                </a:lnTo>
-                <a:lnTo>
-                  <a:pt x="434340" y="594149"/>
-                </a:lnTo>
-                <a:lnTo>
-                  <a:pt x="470534" y="533196"/>
-                </a:lnTo>
-                <a:lnTo>
-                  <a:pt x="506730" y="468718"/>
-                </a:lnTo>
-                <a:lnTo>
-                  <a:pt x="542925" y="402028"/>
-                </a:lnTo>
-                <a:lnTo>
-                  <a:pt x="579120" y="334721"/>
-                </a:lnTo>
-                <a:lnTo>
-                  <a:pt x="615315" y="268623"/>
-                </a:lnTo>
-                <a:lnTo>
-                  <a:pt x="651510" y="205713"/>
-                </a:lnTo>
-                <a:lnTo>
-                  <a:pt x="687705" y="148031"/>
-                </a:lnTo>
-                <a:lnTo>
-                  <a:pt x="723900" y="97571"/>
-                </a:lnTo>
-                <a:lnTo>
-                  <a:pt x="760095" y="56167"/>
-                </a:lnTo>
-                <a:lnTo>
-                  <a:pt x="796290" y="25381"/>
-                </a:lnTo>
-                <a:lnTo>
-                  <a:pt x="832485" y="6409"/>
-                </a:lnTo>
-                <a:lnTo>
-                  <a:pt x="868680" y="0"/>
-                </a:lnTo>
-                <a:lnTo>
-                  <a:pt x="904875" y="6409"/>
-                </a:lnTo>
-                <a:lnTo>
-                  <a:pt x="941070" y="25381"/>
-                </a:lnTo>
-                <a:lnTo>
-                  <a:pt x="977265" y="56167"/>
-                </a:lnTo>
-                <a:lnTo>
-                  <a:pt x="1013460" y="97571"/>
-                </a:lnTo>
-                <a:lnTo>
-                  <a:pt x="1049655" y="148031"/>
-                </a:lnTo>
-                <a:lnTo>
-                  <a:pt x="1085850" y="205713"/>
-                </a:lnTo>
-                <a:lnTo>
-                  <a:pt x="1122045" y="268623"/>
-                </a:lnTo>
-                <a:lnTo>
-                  <a:pt x="1158240" y="334721"/>
-                </a:lnTo>
-                <a:lnTo>
-                  <a:pt x="1194435" y="402028"/>
-                </a:lnTo>
-                <a:lnTo>
-                  <a:pt x="1230630" y="468718"/>
-                </a:lnTo>
-                <a:lnTo>
-                  <a:pt x="1266825" y="533196"/>
-                </a:lnTo>
-                <a:lnTo>
-                  <a:pt x="1303020" y="594149"/>
-                </a:lnTo>
-                <a:lnTo>
-                  <a:pt x="1339215" y="650575"/>
-                </a:lnTo>
-                <a:lnTo>
-                  <a:pt x="1375410" y="701784"/>
-                </a:lnTo>
-                <a:lnTo>
-                  <a:pt x="1411605" y="747391"/>
-                </a:lnTo>
-                <a:lnTo>
-                  <a:pt x="1447800" y="787277"/>
-                </a:lnTo>
-                <a:lnTo>
-                  <a:pt x="1483995" y="821553"/>
-                </a:lnTo>
-                <a:lnTo>
-                  <a:pt x="1520190" y="850511"/>
-                </a:lnTo>
-                <a:lnTo>
-                  <a:pt x="1556385" y="874570"/>
-                </a:lnTo>
-                <a:lnTo>
-                  <a:pt x="1592580" y="894237"/>
-                </a:lnTo>
-                <a:lnTo>
-                  <a:pt x="1628775" y="910058"/>
-                </a:lnTo>
-                <a:lnTo>
-                  <a:pt x="1664970" y="922586"/>
-                </a:lnTo>
-                <a:lnTo>
-                  <a:pt x="1701165" y="932353"/>
-                </a:lnTo>
-                <a:lnTo>
-                  <a:pt x="1737360" y="939852"/>
-                </a:lnTo>
-                <a:lnTo>
-                  <a:pt x="1737360" y="960119"/>
-                </a:lnTo>
-                <a:close/>
-              </a:path>
-            </a:pathLst>
-          </a:custGeom>
+            <a:off x="6172200" y="4206240"/>
+            <a:ext cx="3017520" cy="1051560"/>
+          </a:xfrm>
+          <a:prstGeom prst="roundRect">
+            <a:avLst/>
+          </a:prstGeom>
           <a:solidFill>
-            <a:srgbClr val="BCEAE5"/>
-          </a:solidFill>
-          <a:ln w="25400">
-            <a:solidFill>
-              <a:srgbClr val="12B5A5"/>
-            </a:solidFill>
-          </a:ln>
-          <a:effectLst/>
-        </p:spPr>
-        <p:style>
-          <a:lnRef idx="1">
-            <a:schemeClr val="accent1"/>
-          </a:lnRef>
-          <a:fillRef idx="3">
-            <a:schemeClr val="accent1"/>
-          </a:fillRef>
-          <a:effectRef idx="2">
-            <a:schemeClr val="accent1"/>
-          </a:effectRef>
-          <a:fontRef idx="minor">
-            <a:schemeClr val="lt1"/>
-          </a:fontRef>
-        </p:style>
-        <p:txBody>
-          <a:bodyPr rtlCol="0" anchor="ctr"/>
-          <a:lstStyle/>
-          <a:p>
-            <a:pPr algn="ctr"/>
-          </a:p>
-        </p:txBody>
-      </p:sp>
-      <p:cxnSp>
-        <p:nvCxnSpPr>
-          <p:cNvPr id="41" name="Connector 40"/>
-          <p:cNvCxnSpPr/>
-          <p:nvPr/>
-        </p:nvCxnSpPr>
-        <p:spPr>
-          <a:xfrm>
-            <a:off x="7772400" y="5394959"/>
-            <a:ext cx="1737360" cy="0"/>
-          </a:xfrm>
-          <a:prstGeom prst="bentConnector3">
-            <a:avLst/>
-          </a:prstGeom>
-          <a:ln w="12700">
-            <a:solidFill>
-              <a:srgbClr val="8A93A3"/>
-            </a:solidFill>
-          </a:ln>
-          <a:effectLst/>
-        </p:spPr>
-        <p:style>
-          <a:lnRef idx="2">
-            <a:schemeClr val="accent1"/>
-          </a:lnRef>
-          <a:fillRef idx="0">
-            <a:schemeClr val="accent1"/>
-          </a:fillRef>
-          <a:effectRef idx="1">
-            <a:schemeClr val="accent1"/>
-          </a:effectRef>
-          <a:fontRef idx="minor">
-            <a:schemeClr val="tx1"/>
-          </a:fontRef>
-        </p:style>
-      </p:cxnSp>
-      <p:sp>
-        <p:nvSpPr>
-          <p:cNvPr id="42" name="TextBox 41"/>
-          <p:cNvSpPr txBox="1"/>
-          <p:nvPr/>
-        </p:nvSpPr>
-        <p:spPr>
-          <a:xfrm>
-            <a:off x="7589520" y="5440679"/>
-            <a:ext cx="2103120" cy="365760"/>
-          </a:xfrm>
-          <a:prstGeom prst="rect">
-            <a:avLst/>
-          </a:prstGeom>
-          <a:noFill/>
-        </p:spPr>
-        <p:txBody>
-          <a:bodyPr wrap="square">
-            <a:spAutoFit/>
-          </a:bodyPr>
-          <a:lstStyle/>
-          <a:p>
-            <a:pPr algn="ctr"/>
-            <a:r>
-              <a:rPr sz="1200" b="1">
-                <a:solidFill>
-                  <a:srgbClr val="1A2238"/>
-                </a:solidFill>
-              </a:rPr>
-              <a:t>P  4.8 +/- 1.9 kbar</a:t>
-            </a:r>
-          </a:p>
-        </p:txBody>
-      </p:sp>
-      <p:sp>
-        <p:nvSpPr>
-          <p:cNvPr id="43" name="Freeform 42"/>
-          <p:cNvSpPr/>
-          <p:nvPr/>
-        </p:nvSpPr>
-        <p:spPr>
-          <a:xfrm>
-            <a:off x="9738360" y="4434840"/>
-            <a:ext cx="1783080" cy="960119"/>
-          </a:xfrm>
-          <a:custGeom>
-            <a:avLst/>
-            <a:gdLst/>
-            <a:ahLst/>
-            <a:cxnLst/>
-            <a:rect l="l" t="t" r="r" b="b"/>
-            <a:pathLst>
-              <a:path w="1783080" h="960119">
-                <a:moveTo>
-                  <a:pt x="0" y="960119"/>
-                </a:moveTo>
-                <a:lnTo>
-                  <a:pt x="0" y="954380"/>
-                </a:lnTo>
-                <a:lnTo>
-                  <a:pt x="37147" y="949181"/>
-                </a:lnTo>
-                <a:lnTo>
-                  <a:pt x="74295" y="940156"/>
-                </a:lnTo>
-                <a:lnTo>
-                  <a:pt x="111442" y="925235"/>
-                </a:lnTo>
-                <a:lnTo>
-                  <a:pt x="148590" y="901749"/>
-                </a:lnTo>
-                <a:lnTo>
-                  <a:pt x="185737" y="866600"/>
-                </a:lnTo>
-                <a:lnTo>
-                  <a:pt x="222885" y="816648"/>
-                </a:lnTo>
-                <a:lnTo>
-                  <a:pt x="260032" y="749364"/>
-                </a:lnTo>
-                <a:lnTo>
-                  <a:pt x="297180" y="663673"/>
-                </a:lnTo>
-                <a:lnTo>
-                  <a:pt x="334327" y="560845"/>
-                </a:lnTo>
-                <a:lnTo>
-                  <a:pt x="371475" y="445176"/>
-                </a:lnTo>
-                <a:lnTo>
-                  <a:pt x="408622" y="324178"/>
-                </a:lnTo>
-                <a:lnTo>
-                  <a:pt x="445770" y="208043"/>
-                </a:lnTo>
-                <a:lnTo>
-                  <a:pt x="482917" y="108354"/>
-                </a:lnTo>
-                <a:lnTo>
-                  <a:pt x="520065" y="36181"/>
-                </a:lnTo>
-                <a:lnTo>
-                  <a:pt x="557212" y="0"/>
-                </a:lnTo>
-                <a:lnTo>
-                  <a:pt x="594360" y="3933"/>
-                </a:lnTo>
-                <a:lnTo>
-                  <a:pt x="631507" y="46793"/>
-                </a:lnTo>
-                <a:lnTo>
-                  <a:pt x="668655" y="122197"/>
-                </a:lnTo>
-                <a:lnTo>
-                  <a:pt x="705802" y="219711"/>
-                </a:lnTo>
-                <a:lnTo>
-                  <a:pt x="742950" y="326710"/>
-                </a:lnTo>
-                <a:lnTo>
-                  <a:pt x="780097" y="430457"/>
-                </a:lnTo>
-                <a:lnTo>
-                  <a:pt x="817245" y="519915"/>
-                </a:lnTo>
-                <a:lnTo>
-                  <a:pt x="854392" y="586970"/>
-                </a:lnTo>
-                <a:lnTo>
-                  <a:pt x="891540" y="626939"/>
-                </a:lnTo>
-                <a:lnTo>
-                  <a:pt x="928687" y="638485"/>
-                </a:lnTo>
-                <a:lnTo>
-                  <a:pt x="965835" y="623138"/>
-                </a:lnTo>
-                <a:lnTo>
-                  <a:pt x="1002982" y="584667"/>
-                </a:lnTo>
-                <a:lnTo>
-                  <a:pt x="1040130" y="528460"/>
-                </a:lnTo>
-                <a:lnTo>
-                  <a:pt x="1077277" y="460988"/>
-                </a:lnTo>
-                <a:lnTo>
-                  <a:pt x="1114425" y="389315"/>
-                </a:lnTo>
-                <a:lnTo>
-                  <a:pt x="1151572" y="320622"/>
-                </a:lnTo>
-                <a:lnTo>
-                  <a:pt x="1188720" y="261689"/>
-                </a:lnTo>
-                <a:lnTo>
-                  <a:pt x="1225867" y="218338"/>
-                </a:lnTo>
-                <a:lnTo>
-                  <a:pt x="1263015" y="194904"/>
-                </a:lnTo>
-                <a:lnTo>
-                  <a:pt x="1300162" y="193807"/>
-                </a:lnTo>
-                <a:lnTo>
-                  <a:pt x="1337310" y="215337"/>
-                </a:lnTo>
-                <a:lnTo>
-                  <a:pt x="1374457" y="257689"/>
-                </a:lnTo>
-                <a:lnTo>
-                  <a:pt x="1411605" y="317276"/>
-                </a:lnTo>
-                <a:lnTo>
-                  <a:pt x="1448752" y="389265"/>
-                </a:lnTo>
-                <a:lnTo>
-                  <a:pt x="1485900" y="468240"/>
-                </a:lnTo>
-                <a:lnTo>
-                  <a:pt x="1523047" y="548872"/>
-                </a:lnTo>
-                <a:lnTo>
-                  <a:pt x="1560195" y="626495"/>
-                </a:lnTo>
-                <a:lnTo>
-                  <a:pt x="1597342" y="697502"/>
-                </a:lnTo>
-                <a:lnTo>
-                  <a:pt x="1634490" y="759534"/>
-                </a:lnTo>
-                <a:lnTo>
-                  <a:pt x="1671637" y="811463"/>
-                </a:lnTo>
-                <a:lnTo>
-                  <a:pt x="1708785" y="853219"/>
-                </a:lnTo>
-                <a:lnTo>
-                  <a:pt x="1745932" y="885529"/>
-                </a:lnTo>
-                <a:lnTo>
-                  <a:pt x="1783080" y="909618"/>
-                </a:lnTo>
-                <a:lnTo>
-                  <a:pt x="1783080" y="960119"/>
-                </a:lnTo>
-                <a:close/>
-              </a:path>
-            </a:pathLst>
-          </a:custGeom>
-          <a:solidFill>
-            <a:srgbClr val="F8DDC7"/>
+            <a:srgbClr val="FBEEE3"/>
           </a:solidFill>
           <a:ln w="25400">
             <a:solidFill>
@@ -16440,6 +15042,91 @@
           </a:fontRef>
         </p:style>
         <p:txBody>
+          <a:bodyPr rtlCol="0" anchor="ctr" wrap="square"/>
+          <a:lstStyle/>
+          <a:p>
+            <a:pPr algn="ctr"/>
+            <a:r>
+              <a:rPr sz="1300" b="1">
+                <a:solidFill>
+                  <a:srgbClr val="1A2238"/>
+                </a:solidFill>
+              </a:rPr>
+              <a:t>spread branch</a:t>
+            </a:r>
+          </a:p>
+          <a:p>
+            <a:pPr algn="ctr"/>
+            <a:r>
+              <a:rPr sz="1000" b="0">
+                <a:solidFill>
+                  <a:srgbClr val="8A93A3"/>
+                </a:solidFill>
+              </a:rPr>
+              <a:t>Linear 512 -&gt; 9, softplus + eps</a:t>
+            </a:r>
+          </a:p>
+          <a:p>
+            <a:pPr algn="ctr"/>
+            <a:r>
+              <a:rPr sz="1000" b="0">
+                <a:solidFill>
+                  <a:srgbClr val="8A93A3"/>
+                </a:solidFill>
+              </a:rPr>
+              <a:t>sigma_k, heteroscedastic</a:t>
+            </a:r>
+          </a:p>
+          <a:p>
+            <a:pPr algn="ctr"/>
+            <a:r>
+              <a:rPr sz="1000" b="0">
+                <a:solidFill>
+                  <a:srgbClr val="8A93A3"/>
+                </a:solidFill>
+              </a:rPr>
+              <a:t>4,617 params</a:t>
+            </a:r>
+          </a:p>
+        </p:txBody>
+      </p:sp>
+      <p:sp>
+        <p:nvSpPr>
+          <p:cNvPr id="19" name="Right Arrow 18"/>
+          <p:cNvSpPr/>
+          <p:nvPr/>
+        </p:nvSpPr>
+        <p:spPr>
+          <a:xfrm>
+            <a:off x="9281160" y="4567428"/>
+            <a:ext cx="365760" cy="320040"/>
+          </a:xfrm>
+          <a:prstGeom prst="rightArrow">
+            <a:avLst/>
+          </a:prstGeom>
+          <a:solidFill>
+            <a:srgbClr val="1A2238"/>
+          </a:solidFill>
+          <a:ln>
+            <a:noFill/>
+          </a:ln>
+          <a:effectLst/>
+        </p:spPr>
+        <p:style>
+          <a:lnRef idx="1">
+            <a:schemeClr val="accent1"/>
+          </a:lnRef>
+          <a:fillRef idx="3">
+            <a:schemeClr val="accent1"/>
+          </a:fillRef>
+          <a:effectRef idx="2">
+            <a:schemeClr val="accent1"/>
+          </a:effectRef>
+          <a:fontRef idx="minor">
+            <a:schemeClr val="lt1"/>
+          </a:fontRef>
+        </p:style>
+        <p:txBody>
           <a:bodyPr rtlCol="0" anchor="ctr"/>
           <a:lstStyle/>
           <a:p>
@@ -16447,52 +15134,92 @@
           </a:p>
         </p:txBody>
       </p:sp>
-      <p:cxnSp>
-        <p:nvCxnSpPr>
-          <p:cNvPr id="44" name="Connector 43"/>
-          <p:cNvCxnSpPr/>
-          <p:nvPr/>
-        </p:nvCxnSpPr>
-        <p:spPr>
-          <a:xfrm>
-            <a:off x="9738360" y="5394959"/>
-            <a:ext cx="1783080" cy="0"/>
-          </a:xfrm>
-          <a:prstGeom prst="bentConnector3">
-            <a:avLst/>
-          </a:prstGeom>
+      <p:sp>
+        <p:nvSpPr>
+          <p:cNvPr id="20" name="Rounded Rectangle 19"/>
+          <p:cNvSpPr/>
+          <p:nvPr/>
+        </p:nvSpPr>
+        <p:spPr>
+          <a:xfrm>
+            <a:off x="9738360" y="4251959"/>
+            <a:ext cx="2057400" cy="960119"/>
+          </a:xfrm>
+          <a:prstGeom prst="roundRect">
+            <a:avLst/>
+          </a:prstGeom>
+          <a:solidFill>
+            <a:srgbClr val="FFFFFF"/>
+          </a:solidFill>
           <a:ln w="12700">
             <a:solidFill>
-              <a:srgbClr val="8A93A3"/>
+              <a:srgbClr val="C8CDD6"/>
             </a:solidFill>
           </a:ln>
           <a:effectLst/>
         </p:spPr>
         <p:style>
-          <a:lnRef idx="2">
-            <a:schemeClr val="accent1"/>
-          </a:lnRef>
-          <a:fillRef idx="0">
-            <a:schemeClr val="accent1"/>
-          </a:fillRef>
-          <a:effectRef idx="1">
-            <a:schemeClr val="accent1"/>
-          </a:effectRef>
-          <a:fontRef idx="minor">
-            <a:schemeClr val="tx1"/>
-          </a:fontRef>
-        </p:style>
-      </p:cxnSp>
-      <p:sp>
-        <p:nvSpPr>
-          <p:cNvPr id="45" name="TextBox 44"/>
+          <a:lnRef idx="1">
+            <a:schemeClr val="accent1"/>
+          </a:lnRef>
+          <a:fillRef idx="3">
+            <a:schemeClr val="accent1"/>
+          </a:fillRef>
+          <a:effectRef idx="2">
+            <a:schemeClr val="accent1"/>
+          </a:effectRef>
+          <a:fontRef idx="minor">
+            <a:schemeClr val="lt1"/>
+          </a:fontRef>
+        </p:style>
+        <p:txBody>
+          <a:bodyPr rtlCol="0" anchor="ctr" wrap="square"/>
+          <a:lstStyle/>
+          <a:p>
+            <a:pPr algn="ctr"/>
+            <a:r>
+              <a:rPr sz="1200" b="1">
+                <a:solidFill>
+                  <a:srgbClr val="8A93A3"/>
+                </a:solidFill>
+              </a:rPr>
+              <a:t>per-mode spreads</a:t>
+            </a:r>
+          </a:p>
+          <a:p>
+            <a:pPr algn="ctr"/>
+            <a:r>
+              <a:rPr sz="900" b="0">
+                <a:solidFill>
+                  <a:srgbClr val="8A93A3"/>
+                </a:solidFill>
+              </a:rPr>
+              <a:t>row-dependent</a:t>
+            </a:r>
+          </a:p>
+          <a:p>
+            <a:pPr algn="ctr"/>
+            <a:r>
+              <a:rPr sz="900" b="0">
+                <a:solidFill>
+                  <a:srgbClr val="8A93A3"/>
+                </a:solidFill>
+              </a:rPr>
+              <a:t>error bars</a:t>
+            </a:r>
+          </a:p>
+        </p:txBody>
+      </p:sp>
+      <p:sp>
+        <p:nvSpPr>
+          <p:cNvPr id="21" name="TextBox 20"/>
           <p:cNvSpPr txBox="1"/>
           <p:nvPr/>
         </p:nvSpPr>
         <p:spPr>
           <a:xfrm>
-            <a:off x="9555480" y="5440679"/>
-            <a:ext cx="2148840" cy="365760"/>
+            <a:off x="502920" y="5349240"/>
+            <a:ext cx="11155680" cy="731520"/>
           </a:xfrm>
           <a:prstGeom prst="rect">
             <a:avLst/>
@@ -16505,28 +15232,28 @@
           </a:bodyPr>
           <a:lstStyle/>
           <a:p>
-            <a:pPr algn="ctr"/>
-            <a:r>
-              <a:rPr sz="1200" b="1">
+            <a:pPr algn="l"/>
+            <a:r>
+              <a:rPr sz="1100" b="0">
                 <a:solidFill>
                   <a:srgbClr val="1A2238"/>
                 </a:solidFill>
               </a:rPr>
-              <a:t>H2O  multimodal</a:t>
-            </a:r>
-          </a:p>
-        </p:txBody>
-      </p:sp>
-      <p:sp>
-        <p:nvSpPr>
-          <p:cNvPr id="46" name="TextBox 45"/>
+              <a:t>418,843 trainable params (trunk 404,992 + 3 x 4,617) -- ~13% of the frozen encoder; the 512 x 2 trunk is the mini-sweep winner (0.29 nats over the starved 128 x 1). Output biases seeded at the targets' mean/std (raw-unit cold-start fix).</a:t>
+            </a:r>
+          </a:p>
+        </p:txBody>
+      </p:sp>
+      <p:sp>
+        <p:nvSpPr>
+          <p:cNvPr id="22" name="TextBox 21"/>
           <p:cNvSpPr txBox="1"/>
           <p:nvPr/>
         </p:nvSpPr>
         <p:spPr>
           <a:xfrm>
-            <a:off x="502920" y="6172200"/>
-            <a:ext cx="11247120" cy="731520"/>
+            <a:off x="502920" y="5669280"/>
+            <a:ext cx="11155680" cy="731520"/>
           </a:xfrm>
           <a:prstGeom prst="rect">
             <a:avLst/>
@@ -16541,12 +15268,242 @@
           <a:p>
             <a:pPr algn="l"/>
             <a:r>
-              <a:rPr sz="1200" b="0">
+              <a:rPr sz="1000" b="0">
                 <a:solidFill>
                   <a:srgbClr val="8A93A3"/>
                 </a:solidFill>
               </a:rPr>
-              <a:t>values illustrative -- every phase carries both numbers; faded bars = presence genuinely uncertain (here the amphibole/orthopyroxene either-or: wet-deep grows amp, dry-shallow grows opx). This marginal view is a projection; the primary output is the ranked-scenario view on the next slide.</a:t>
+              <a:t>dials (configs/heads/joint_heads.yaml): cond_n_components 3 . cond_sigma_eps 1e-3 . cond_hidden 512 . cond_layers 2 (adopted from the architecture mini-sweep) . dropout 0.348 . lambda_cond 0.01 -- fixed in code: GELU, AdamW, per-head grad-clip 1.0, linear units (no log transform of T/P/H2O)</a:t>
+            </a:r>
+          </a:p>
+        </p:txBody>
+      </p:sp>
+      <p:sp>
+        <p:nvSpPr>
+          <p:cNvPr id="23" name="Rounded Rectangle 22"/>
+          <p:cNvSpPr/>
+          <p:nvPr/>
+        </p:nvSpPr>
+        <p:spPr>
+          <a:xfrm>
+            <a:off x="1463040" y="6035040"/>
+            <a:ext cx="3139440" cy="777240"/>
+          </a:xfrm>
+          <a:prstGeom prst="roundRect">
+            <a:avLst/>
+          </a:prstGeom>
+          <a:solidFill>
+            <a:srgbClr val="FFFFFF"/>
+          </a:solidFill>
+          <a:ln w="12700">
+            <a:solidFill>
+              <a:srgbClr val="C8CDD6"/>
+            </a:solidFill>
+          </a:ln>
+          <a:effectLst/>
+        </p:spPr>
+        <p:style>
+          <a:lnRef idx="1">
+            <a:schemeClr val="accent1"/>
+          </a:lnRef>
+          <a:fillRef idx="3">
+            <a:schemeClr val="accent1"/>
+          </a:fillRef>
+          <a:effectRef idx="2">
+            <a:schemeClr val="accent1"/>
+          </a:effectRef>
+          <a:fontRef idx="minor">
+            <a:schemeClr val="lt1"/>
+          </a:fontRef>
+        </p:style>
+        <p:txBody>
+          <a:bodyPr rtlCol="0" anchor="ctr" wrap="square"/>
+          <a:lstStyle/>
+          <a:p>
+            <a:pPr algn="ctr"/>
+            <a:r>
+              <a:rPr sz="1200" b="1">
+                <a:solidFill>
+                  <a:srgbClr val="8A93A3"/>
+                </a:solidFill>
+              </a:rPr>
+              <a:t>L_cond = Σ_axis −log Σ_k w_k · N(t | mu_k, sigma_k²)</a:t>
+            </a:r>
+          </a:p>
+          <a:p>
+            <a:pPr algn="ctr"/>
+            <a:r>
+              <a:rPr sz="900" b="0">
+                <a:solidFill>
+                  <a:srgbClr val="8A93A3"/>
+                </a:solidFill>
+              </a:rPr>
+              <a:t>per-axis GMM NLL in raw units; minimized when the mixture matches each rock's condition distribution per support</a:t>
+            </a:r>
+          </a:p>
+        </p:txBody>
+      </p:sp>
+      <p:sp>
+        <p:nvSpPr>
+          <p:cNvPr id="24" name="Rounded Rectangle 23"/>
+          <p:cNvSpPr/>
+          <p:nvPr/>
+        </p:nvSpPr>
+        <p:spPr>
+          <a:xfrm>
+            <a:off x="4876800" y="6035040"/>
+            <a:ext cx="3139440" cy="777240"/>
+          </a:xfrm>
+          <a:prstGeom prst="roundRect">
+            <a:avLst/>
+          </a:prstGeom>
+          <a:solidFill>
+            <a:srgbClr val="FFFFFF"/>
+          </a:solidFill>
+          <a:ln w="12700">
+            <a:solidFill>
+              <a:srgbClr val="C8CDD6"/>
+            </a:solidFill>
+          </a:ln>
+          <a:effectLst/>
+        </p:spPr>
+        <p:style>
+          <a:lnRef idx="1">
+            <a:schemeClr val="accent1"/>
+          </a:lnRef>
+          <a:fillRef idx="3">
+            <a:schemeClr val="accent1"/>
+          </a:fillRef>
+          <a:effectRef idx="2">
+            <a:schemeClr val="accent1"/>
+          </a:effectRef>
+          <a:fontRef idx="minor">
+            <a:schemeClr val="lt1"/>
+          </a:fontRef>
+        </p:style>
+        <p:txBody>
+          <a:bodyPr rtlCol="0" anchor="ctr" wrap="square"/>
+          <a:lstStyle/>
+          <a:p>
+            <a:pPr algn="ctr"/>
+            <a:r>
+              <a:rPr sz="1200" b="1">
+                <a:solidFill>
+                  <a:srgbClr val="8A93A3"/>
+                </a:solidFill>
+              </a:rPr>
+              <a:t>support in, never through the encoder</a:t>
+            </a:r>
+          </a:p>
+          <a:p>
+            <a:pPr algn="ctr"/>
+            <a:r>
+              <a:rPr sz="900" b="0">
+                <a:solidFill>
+                  <a:srgbClr val="8A93A3"/>
+                </a:solidFill>
+              </a:rPr>
+              <a:t>teacher-forced true set at train -&gt; no gradient coupling to ModeHead; sampled sets at inference (exposure bias, #31)</a:t>
+            </a:r>
+          </a:p>
+        </p:txBody>
+      </p:sp>
+      <p:sp>
+        <p:nvSpPr>
+          <p:cNvPr id="25" name="Rounded Rectangle 24"/>
+          <p:cNvSpPr/>
+          <p:nvPr/>
+        </p:nvSpPr>
+        <p:spPr>
+          <a:xfrm>
+            <a:off x="8290560" y="6035040"/>
+            <a:ext cx="3139440" cy="777240"/>
+          </a:xfrm>
+          <a:prstGeom prst="roundRect">
+            <a:avLst/>
+          </a:prstGeom>
+          <a:solidFill>
+            <a:srgbClr val="FFFFFF"/>
+          </a:solidFill>
+          <a:ln w="12700">
+            <a:solidFill>
+              <a:srgbClr val="C8CDD6"/>
+            </a:solidFill>
+          </a:ln>
+          <a:effectLst/>
+        </p:spPr>
+        <p:style>
+          <a:lnRef idx="1">
+            <a:schemeClr val="accent1"/>
+          </a:lnRef>
+          <a:fillRef idx="3">
+            <a:schemeClr val="accent1"/>
+          </a:fillRef>
+          <a:effectRef idx="2">
+            <a:schemeClr val="accent1"/>
+          </a:effectRef>
+          <a:fontRef idx="minor">
+            <a:schemeClr val="lt1"/>
+          </a:fontRef>
+        </p:style>
+        <p:txBody>
+          <a:bodyPr rtlCol="0" anchor="ctr" wrap="square"/>
+          <a:lstStyle/>
+          <a:p>
+            <a:pPr algn="ctr"/>
+            <a:r>
+              <a:rPr sz="1200" b="1">
+                <a:solidFill>
+                  <a:srgbClr val="8A93A3"/>
+                </a:solidFill>
+              </a:rPr>
+              <a:t>L = L_mode + λ_comp·L_comp + λ_cond·L_cond + λ_bal·L_closure</a:t>
+            </a:r>
+          </a:p>
+          <a:p>
+            <a:pPr algn="ctr"/>
+            <a:r>
+              <a:rPr sz="900" b="0">
+                <a:solidFill>
+                  <a:srgbClr val="8A93A3"/>
+                </a:solidFill>
+              </a:rPr>
+              <a:t>heads share no weights and each is snapshotted at its own raw-val best, so λ_cond only absorbs the raw-unit scale in the total</a:t>
+            </a:r>
+          </a:p>
+        </p:txBody>
+      </p:sp>
+      <p:sp>
+        <p:nvSpPr>
+          <p:cNvPr id="26" name="TextBox 25"/>
+          <p:cNvSpPr txBox="1"/>
+          <p:nvPr/>
+        </p:nvSpPr>
+        <p:spPr>
+          <a:xfrm>
+            <a:off x="457200" y="6080760"/>
+            <a:ext cx="960120" cy="731520"/>
+          </a:xfrm>
+          <a:prstGeom prst="rect">
+            <a:avLst/>
+          </a:prstGeom>
+          <a:noFill/>
+        </p:spPr>
+        <p:txBody>
+          <a:bodyPr wrap="square">
+            <a:spAutoFit/>
+          </a:bodyPr>
+          <a:lstStyle/>
+          <a:p>
+            <a:pPr algn="l"/>
+            <a:r>
+              <a:rPr sz="1100" b="0">
+                <a:solidFill>
+                  <a:srgbClr val="C0392B"/>
+                </a:solidFill>
+              </a:rPr>
+              <a:t>the loss,
+explicitly:</a:t>
             </a:r>
           </a:p>
         </p:txBody>
@@ -16632,7 +15589,7 @@
                   <a:srgbClr val="1A2238"/>
                 </a:solidFill>
               </a:rPr>
-              <a:t>The coherent answer: ranked scenarios</a:t>
+              <a:t>Is the 68% band honest? Coverage, and the exposure gap</a:t>
             </a:r>
           </a:p>
         </p:txBody>
@@ -16666,7 +15623,7 @@
                   <a:srgbClr val="8A93A3"/>
                 </a:solidFill>
               </a:rPr>
-              <a:t>the marginal table can't show WHICH minerals trade off; scenarios can -- sample the posterior, cluster by assemblage, rank by weight</a:t>
+              <a:t>CondHead's eval scores every row twice: told the TRUE mineral list (teacher-forced -- the head's own skill) and told ModeHead's SAMPLED list (the deployed pipeline). The first is calibrated; the gap to the second is the exposure bias.</a:t>
             </a:r>
           </a:p>
         </p:txBody>
@@ -16679,8 +15636,563 @@
         </p:nvSpPr>
         <p:spPr>
           <a:xfrm>
-            <a:off x="640080" y="1783080"/>
-            <a:ext cx="5394960" cy="3291840"/>
+            <a:off x="502920" y="1828800"/>
+            <a:ext cx="2651760" cy="1280160"/>
+          </a:xfrm>
+          <a:prstGeom prst="roundRect">
+            <a:avLst/>
+          </a:prstGeom>
+          <a:solidFill>
+            <a:srgbClr val="E1E8FF"/>
+          </a:solidFill>
+          <a:ln w="25400">
+            <a:solidFill>
+              <a:srgbClr val="2E5BFF"/>
+            </a:solidFill>
+          </a:ln>
+          <a:effectLst/>
+        </p:spPr>
+        <p:style>
+          <a:lnRef idx="1">
+            <a:schemeClr val="accent1"/>
+          </a:lnRef>
+          <a:fillRef idx="3">
+            <a:schemeClr val="accent1"/>
+          </a:fillRef>
+          <a:effectRef idx="2">
+            <a:schemeClr val="accent1"/>
+          </a:effectRef>
+          <a:fontRef idx="minor">
+            <a:schemeClr val="lt1"/>
+          </a:fontRef>
+        </p:style>
+        <p:txBody>
+          <a:bodyPr rtlCol="0" anchor="ctr" wrap="square"/>
+          <a:lstStyle/>
+          <a:p>
+            <a:pPr algn="ctr"/>
+            <a:r>
+              <a:rPr sz="1100" b="1">
+                <a:solidFill>
+                  <a:srgbClr val="1A2238"/>
+                </a:solidFill>
+              </a:rPr>
+              <a:t>one row's input</a:t>
+            </a:r>
+          </a:p>
+          <a:p>
+            <a:pPr algn="ctr"/>
+            <a:r>
+              <a:rPr sz="800" b="0">
+                <a:solidFill>
+                  <a:srgbClr val="8A93A3"/>
+                </a:solidFill>
+              </a:rPr>
+              <a:t>h [256] ++ true presence [21]</a:t>
+            </a:r>
+          </a:p>
+          <a:p>
+            <a:pPr algn="ctr"/>
+            <a:r>
+              <a:rPr sz="800" b="0">
+                <a:solidFill>
+                  <a:srgbClr val="8A93A3"/>
+                </a:solidFill>
+              </a:rPr>
+              <a:t>bulk X: plag cpx amp ilm</a:t>
+            </a:r>
+          </a:p>
+        </p:txBody>
+      </p:sp>
+      <p:sp>
+        <p:nvSpPr>
+          <p:cNvPr id="6" name="Right Arrow 5"/>
+          <p:cNvSpPr/>
+          <p:nvPr/>
+        </p:nvSpPr>
+        <p:spPr>
+          <a:xfrm>
+            <a:off x="3246120" y="2331720"/>
+            <a:ext cx="320040" cy="274320"/>
+          </a:xfrm>
+          <a:prstGeom prst="rightArrow">
+            <a:avLst/>
+          </a:prstGeom>
+          <a:solidFill>
+            <a:srgbClr val="1A2238"/>
+          </a:solidFill>
+          <a:ln>
+            <a:noFill/>
+          </a:ln>
+          <a:effectLst/>
+        </p:spPr>
+        <p:style>
+          <a:lnRef idx="1">
+            <a:schemeClr val="accent1"/>
+          </a:lnRef>
+          <a:fillRef idx="3">
+            <a:schemeClr val="accent1"/>
+          </a:fillRef>
+          <a:effectRef idx="2">
+            <a:schemeClr val="accent1"/>
+          </a:effectRef>
+          <a:fontRef idx="minor">
+            <a:schemeClr val="lt1"/>
+          </a:fontRef>
+        </p:style>
+        <p:txBody>
+          <a:bodyPr rtlCol="0" anchor="ctr"/>
+          <a:lstStyle/>
+          <a:p>
+            <a:pPr algn="ctr"/>
+          </a:p>
+        </p:txBody>
+      </p:sp>
+      <p:sp>
+        <p:nvSpPr>
+          <p:cNvPr id="7" name="Rounded Rectangle 6"/>
+          <p:cNvSpPr/>
+          <p:nvPr/>
+        </p:nvSpPr>
+        <p:spPr>
+          <a:xfrm>
+            <a:off x="3611880" y="1828800"/>
+            <a:ext cx="2834640" cy="1280160"/>
+          </a:xfrm>
+          <a:prstGeom prst="roundRect">
+            <a:avLst/>
+          </a:prstGeom>
+          <a:solidFill>
+            <a:srgbClr val="DDF4F2"/>
+          </a:solidFill>
+          <a:ln w="25400">
+            <a:solidFill>
+              <a:srgbClr val="12B5A5"/>
+            </a:solidFill>
+          </a:ln>
+          <a:effectLst/>
+        </p:spPr>
+        <p:style>
+          <a:lnRef idx="1">
+            <a:schemeClr val="accent1"/>
+          </a:lnRef>
+          <a:fillRef idx="3">
+            <a:schemeClr val="accent1"/>
+          </a:fillRef>
+          <a:effectRef idx="2">
+            <a:schemeClr val="accent1"/>
+          </a:effectRef>
+          <a:fontRef idx="minor">
+            <a:schemeClr val="lt1"/>
+          </a:fontRef>
+        </p:style>
+        <p:txBody>
+          <a:bodyPr rtlCol="0" anchor="ctr" wrap="square"/>
+          <a:lstStyle/>
+          <a:p>
+            <a:pPr algn="ctr"/>
+            <a:r>
+              <a:rPr sz="1100" b="1">
+                <a:solidFill>
+                  <a:srgbClr val="1A2238"/>
+                </a:solidFill>
+              </a:rPr>
+              <a:t>T-axis mixture (K=3)</a:t>
+            </a:r>
+          </a:p>
+          <a:p>
+            <a:pPr algn="ctr"/>
+            <a:r>
+              <a:rPr sz="800" b="0">
+                <a:solidFill>
+                  <a:srgbClr val="8A93A3"/>
+                </a:solidFill>
+              </a:rPr>
+              <a:t>deep-wet:  mu 780 C, w 0.58</a:t>
+            </a:r>
+          </a:p>
+          <a:p>
+            <a:pPr algn="ctr"/>
+            <a:r>
+              <a:rPr sz="800" b="0">
+                <a:solidFill>
+                  <a:srgbClr val="8A93A3"/>
+                </a:solidFill>
+              </a:rPr>
+              <a:t>shallow-dry: mu 940 C, w 0.39</a:t>
+            </a:r>
+          </a:p>
+          <a:p>
+            <a:pPr algn="ctr"/>
+            <a:r>
+              <a:rPr sz="800" b="0">
+                <a:solidFill>
+                  <a:srgbClr val="8A93A3"/>
+                </a:solidFill>
+              </a:rPr>
+              <a:t>(third component ~unused)</a:t>
+            </a:r>
+          </a:p>
+        </p:txBody>
+      </p:sp>
+      <p:sp>
+        <p:nvSpPr>
+          <p:cNvPr id="8" name="Freeform 7"/>
+          <p:cNvSpPr/>
+          <p:nvPr/>
+        </p:nvSpPr>
+        <p:spPr>
+          <a:xfrm>
+            <a:off x="6903720" y="1874519"/>
+            <a:ext cx="2377440" cy="1143001"/>
+          </a:xfrm>
+          <a:custGeom>
+            <a:avLst/>
+            <a:gdLst/>
+            <a:ahLst/>
+            <a:cxnLst/>
+            <a:rect l="l" t="t" r="r" b="b"/>
+            <a:pathLst>
+              <a:path w="2377440" h="1143001">
+                <a:moveTo>
+                  <a:pt x="0" y="1143001"/>
+                </a:moveTo>
+                <a:lnTo>
+                  <a:pt x="0" y="1140938"/>
+                </a:lnTo>
+                <a:lnTo>
+                  <a:pt x="49529" y="1138428"/>
+                </a:lnTo>
+                <a:lnTo>
+                  <a:pt x="99060" y="1133390"/>
+                </a:lnTo>
+                <a:lnTo>
+                  <a:pt x="148589" y="1123858"/>
+                </a:lnTo>
+                <a:lnTo>
+                  <a:pt x="198120" y="1106860"/>
+                </a:lnTo>
+                <a:lnTo>
+                  <a:pt x="247650" y="1078329"/>
+                </a:lnTo>
+                <a:lnTo>
+                  <a:pt x="297180" y="1033310"/>
+                </a:lnTo>
+                <a:lnTo>
+                  <a:pt x="346710" y="966661"/>
+                </a:lnTo>
+                <a:lnTo>
+                  <a:pt x="396240" y="874305"/>
+                </a:lnTo>
+                <a:lnTo>
+                  <a:pt x="445770" y="754939"/>
+                </a:lnTo>
+                <a:lnTo>
+                  <a:pt x="495300" y="611787"/>
+                </a:lnTo>
+                <a:lnTo>
+                  <a:pt x="544830" y="453767"/>
+                </a:lnTo>
+                <a:lnTo>
+                  <a:pt x="594359" y="295397"/>
+                </a:lnTo>
+                <a:lnTo>
+                  <a:pt x="643890" y="155020"/>
+                </a:lnTo>
+                <a:lnTo>
+                  <a:pt x="693420" y="51478"/>
+                </a:lnTo>
+                <a:lnTo>
+                  <a:pt x="742950" y="0"/>
+                </a:lnTo>
+                <a:lnTo>
+                  <a:pt x="792479" y="8538"/>
+                </a:lnTo>
+                <a:lnTo>
+                  <a:pt x="842010" y="75747"/>
+                </a:lnTo>
+                <a:lnTo>
+                  <a:pt x="891540" y="191322"/>
+                </a:lnTo>
+                <a:lnTo>
+                  <a:pt x="941069" y="338550"/>
+                </a:lnTo>
+                <a:lnTo>
+                  <a:pt x="990600" y="498187"/>
+                </a:lnTo>
+                <a:lnTo>
+                  <a:pt x="1040130" y="652364"/>
+                </a:lnTo>
+                <a:lnTo>
+                  <a:pt x="1089660" y="787363"/>
+                </a:lnTo>
+                <a:lnTo>
+                  <a:pt x="1139189" y="894668"/>
+                </a:lnTo>
+                <a:lnTo>
+                  <a:pt x="1188720" y="970345"/>
+                </a:lnTo>
+                <a:lnTo>
+                  <a:pt x="1238250" y="1013401"/>
+                </a:lnTo>
+                <a:lnTo>
+                  <a:pt x="1287779" y="1024014"/>
+                </a:lnTo>
+                <a:lnTo>
+                  <a:pt x="1337309" y="1002483"/>
+                </a:lnTo>
+                <a:lnTo>
+                  <a:pt x="1386840" y="949410"/>
+                </a:lnTo>
+                <a:lnTo>
+                  <a:pt x="1436370" y="867099"/>
+                </a:lnTo>
+                <a:lnTo>
+                  <a:pt x="1485900" y="761531"/>
+                </a:lnTo>
+                <a:lnTo>
+                  <a:pt x="1535430" y="643826"/>
+                </a:lnTo>
+                <a:lnTo>
+                  <a:pt x="1584960" y="530029"/>
+                </a:lnTo>
+                <a:lnTo>
+                  <a:pt x="1634490" y="438642"/>
+                </a:lnTo>
+                <a:lnTo>
+                  <a:pt x="1684020" y="386335"/>
+                </a:lnTo>
+                <a:lnTo>
+                  <a:pt x="1733550" y="383317"/>
+                </a:lnTo>
+                <a:lnTo>
+                  <a:pt x="1783080" y="430256"/>
+                </a:lnTo>
+                <a:lnTo>
+                  <a:pt x="1832610" y="518129"/>
+                </a:lnTo>
+                <a:lnTo>
+                  <a:pt x="1882140" y="631084"/>
+                </a:lnTo>
+                <a:lnTo>
+                  <a:pt x="1931670" y="751118"/>
+                </a:lnTo>
+                <a:lnTo>
+                  <a:pt x="1981200" y="862677"/>
+                </a:lnTo>
+                <a:lnTo>
+                  <a:pt x="2030729" y="955625"/>
+                </a:lnTo>
+                <a:lnTo>
+                  <a:pt x="2080260" y="1025967"/>
+                </a:lnTo>
+                <a:lnTo>
+                  <a:pt x="2129790" y="1074694"/>
+                </a:lnTo>
+                <a:lnTo>
+                  <a:pt x="2179320" y="1105748"/>
+                </a:lnTo>
+                <a:lnTo>
+                  <a:pt x="2228850" y="1124016"/>
+                </a:lnTo>
+                <a:lnTo>
+                  <a:pt x="2278380" y="1133960"/>
+                </a:lnTo>
+                <a:lnTo>
+                  <a:pt x="2327910" y="1138978"/>
+                </a:lnTo>
+                <a:lnTo>
+                  <a:pt x="2377440" y="1141328"/>
+                </a:lnTo>
+                <a:lnTo>
+                  <a:pt x="2377440" y="1143001"/>
+                </a:lnTo>
+                <a:close/>
+              </a:path>
+            </a:pathLst>
+          </a:custGeom>
+          <a:solidFill>
+            <a:srgbClr val="BCEAE5"/>
+          </a:solidFill>
+          <a:ln w="25400">
+            <a:solidFill>
+              <a:srgbClr val="12B5A5"/>
+            </a:solidFill>
+          </a:ln>
+          <a:effectLst/>
+        </p:spPr>
+        <p:style>
+          <a:lnRef idx="1">
+            <a:schemeClr val="accent1"/>
+          </a:lnRef>
+          <a:fillRef idx="3">
+            <a:schemeClr val="accent1"/>
+          </a:fillRef>
+          <a:effectRef idx="2">
+            <a:schemeClr val="accent1"/>
+          </a:effectRef>
+          <a:fontRef idx="minor">
+            <a:schemeClr val="lt1"/>
+          </a:fontRef>
+        </p:style>
+        <p:txBody>
+          <a:bodyPr rtlCol="0" anchor="ctr"/>
+          <a:lstStyle/>
+          <a:p>
+            <a:pPr algn="ctr"/>
+          </a:p>
+        </p:txBody>
+      </p:sp>
+      <p:cxnSp>
+        <p:nvCxnSpPr>
+          <p:cNvPr id="9" name="Connector 8"/>
+          <p:cNvCxnSpPr/>
+          <p:nvPr/>
+        </p:nvCxnSpPr>
+        <p:spPr>
+          <a:xfrm>
+            <a:off x="6903720" y="3017520"/>
+            <a:ext cx="2377440" cy="0"/>
+          </a:xfrm>
+          <a:prstGeom prst="bentConnector3">
+            <a:avLst/>
+          </a:prstGeom>
+          <a:ln w="12700">
+            <a:solidFill>
+              <a:srgbClr val="8A93A3"/>
+            </a:solidFill>
+          </a:ln>
+          <a:effectLst/>
+        </p:spPr>
+        <p:style>
+          <a:lnRef idx="2">
+            <a:schemeClr val="accent1"/>
+          </a:lnRef>
+          <a:fillRef idx="0">
+            <a:schemeClr val="accent1"/>
+          </a:fillRef>
+          <a:effectRef idx="1">
+            <a:schemeClr val="accent1"/>
+          </a:effectRef>
+          <a:fontRef idx="minor">
+            <a:schemeClr val="tx1"/>
+          </a:fontRef>
+        </p:style>
+      </p:cxnSp>
+      <p:sp>
+        <p:nvSpPr>
+          <p:cNvPr id="10" name="TextBox 9"/>
+          <p:cNvSpPr txBox="1"/>
+          <p:nvPr/>
+        </p:nvSpPr>
+        <p:spPr>
+          <a:xfrm>
+            <a:off x="6720840" y="3063239"/>
+            <a:ext cx="2743200" cy="365760"/>
+          </a:xfrm>
+          <a:prstGeom prst="rect">
+            <a:avLst/>
+          </a:prstGeom>
+          <a:noFill/>
+        </p:spPr>
+        <p:txBody>
+          <a:bodyPr wrap="square">
+            <a:spAutoFit/>
+          </a:bodyPr>
+          <a:lstStyle/>
+          <a:p>
+            <a:pPr algn="ctr"/>
+            <a:r>
+              <a:rPr sz="1200" b="1">
+                <a:solidFill>
+                  <a:srgbClr val="1A2238"/>
+                </a:solidFill>
+              </a:rPr>
+              <a:t>p(T | h, support): two condition modes</a:t>
+            </a:r>
+          </a:p>
+        </p:txBody>
+      </p:sp>
+      <p:cxnSp>
+        <p:nvCxnSpPr>
+          <p:cNvPr id="11" name="Connector 10"/>
+          <p:cNvCxnSpPr/>
+          <p:nvPr/>
+        </p:nvCxnSpPr>
+        <p:spPr>
+          <a:xfrm flipV="1">
+            <a:off x="7807147" y="1737360"/>
+            <a:ext cx="0" cy="1280160"/>
+          </a:xfrm>
+          <a:prstGeom prst="bentConnector3">
+            <a:avLst/>
+          </a:prstGeom>
+          <a:ln w="25400">
+            <a:solidFill>
+              <a:srgbClr val="2A9D8F"/>
+            </a:solidFill>
+          </a:ln>
+          <a:effectLst/>
+        </p:spPr>
+        <p:style>
+          <a:lnRef idx="2">
+            <a:schemeClr val="accent1"/>
+          </a:lnRef>
+          <a:fillRef idx="0">
+            <a:schemeClr val="accent1"/>
+          </a:fillRef>
+          <a:effectRef idx="1">
+            <a:schemeClr val="accent1"/>
+          </a:effectRef>
+          <a:fontRef idx="minor">
+            <a:schemeClr val="tx1"/>
+          </a:fontRef>
+        </p:style>
+      </p:cxnSp>
+      <p:sp>
+        <p:nvSpPr>
+          <p:cNvPr id="12" name="TextBox 11"/>
+          <p:cNvSpPr txBox="1"/>
+          <p:nvPr/>
+        </p:nvSpPr>
+        <p:spPr>
+          <a:xfrm>
+            <a:off x="6720840" y="1371599"/>
+            <a:ext cx="2743200" cy="731520"/>
+          </a:xfrm>
+          <a:prstGeom prst="rect">
+            <a:avLst/>
+          </a:prstGeom>
+          <a:noFill/>
+        </p:spPr>
+        <p:txBody>
+          <a:bodyPr wrap="square">
+            <a:spAutoFit/>
+          </a:bodyPr>
+          <a:lstStyle/>
+          <a:p>
+            <a:pPr algn="ctr"/>
+            <a:r>
+              <a:rPr sz="1000" b="0">
+                <a:solidFill>
+                  <a:srgbClr val="2A9D8F"/>
+                </a:solidFill>
+              </a:rPr>
+              <a:t>truth T = 815 C, inside the 68% band</a:t>
+            </a:r>
+          </a:p>
+        </p:txBody>
+      </p:sp>
+      <p:sp>
+        <p:nvSpPr>
+          <p:cNvPr id="13" name="Rounded Rectangle 12"/>
+          <p:cNvSpPr/>
+          <p:nvPr/>
+        </p:nvSpPr>
+        <p:spPr>
+          <a:xfrm>
+            <a:off x="9646920" y="1828800"/>
+            <a:ext cx="2148840" cy="1280160"/>
           </a:xfrm>
           <a:prstGeom prst="roundRect">
             <a:avLst/>
@@ -16715,91 +16227,69 @@
           <a:p>
             <a:pPr algn="ctr"/>
             <a:r>
-              <a:rPr sz="1400" b="1">
+              <a:rPr sz="1100" b="1">
                 <a:solidFill>
                   <a:srgbClr val="1A2238"/>
                 </a:solidFill>
               </a:rPr>
-              <a:t>Scenario A -- deep &amp; wet . weight ~45%</a:t>
-            </a:r>
-          </a:p>
-          <a:p>
-            <a:pPr algn="ctr"/>
-            <a:r>
-              <a:rPr sz="1100" b="0">
+              <a:t>coverage question</a:t>
+            </a:r>
+          </a:p>
+          <a:p>
+            <a:pPr algn="ctr"/>
+            <a:r>
+              <a:rPr sz="800" b="0">
                 <a:solidFill>
                   <a:srgbClr val="8A93A3"/>
                 </a:solidFill>
               </a:rPr>
-              <a:t>P 6-9 kbar   H2O 4-6 wt%   T ~950-990 C</a:t>
-            </a:r>
-          </a:p>
-          <a:p>
-            <a:pPr algn="ctr"/>
-            <a:r>
-              <a:rPr sz="1400" b="1">
-                <a:solidFill>
-                  <a:srgbClr val="1A2238"/>
-                </a:solidFill>
-              </a:rPr>
-              <a:t/>
-            </a:r>
-          </a:p>
-          <a:p>
-            <a:pPr algn="ctr"/>
-            <a:r>
-              <a:rPr sz="1100" b="0">
+              <a:t>does the central 68% of</a:t>
+            </a:r>
+          </a:p>
+          <a:p>
+            <a:pPr algn="ctr"/>
+            <a:r>
+              <a:rPr sz="800" b="0">
                 <a:solidFill>
                   <a:srgbClr val="8A93A3"/>
                 </a:solidFill>
               </a:rPr>
-              <a:t>phenocrysts (wt% of cargo, sums to 100):</a:t>
-            </a:r>
-          </a:p>
-          <a:p>
-            <a:pPr algn="ctr"/>
-            <a:r>
-              <a:rPr sz="1100" b="0">
+              <a:t>the mixture catch the</a:t>
+            </a:r>
+          </a:p>
+          <a:p>
+            <a:pPr algn="ctr"/>
+            <a:r>
+              <a:rPr sz="800" b="0">
                 <a:solidFill>
                   <a:srgbClr val="8A93A3"/>
                 </a:solidFill>
               </a:rPr>
-              <a:t>plagioclase 44 +/- 4    clinopyroxene 26 +/- 3</a:t>
-            </a:r>
-          </a:p>
-          <a:p>
-            <a:pPr algn="ctr"/>
-            <a:r>
-              <a:rPr sz="1100" b="0">
-                <a:solidFill>
-                  <a:srgbClr val="8A93A3"/>
-                </a:solidFill>
-              </a:rPr>
-              <a:t>amphibole 18 +/- 4      Fe-Ti oxides 12 +/- 2</a:t>
-            </a:r>
-          </a:p>
-        </p:txBody>
-      </p:sp>
-      <p:sp>
-        <p:nvSpPr>
-          <p:cNvPr id="6" name="Rounded Rectangle 5"/>
+              <a:t>truth ~68% of rows?</a:t>
+            </a:r>
+          </a:p>
+        </p:txBody>
+      </p:sp>
+      <p:sp>
+        <p:nvSpPr>
+          <p:cNvPr id="14" name="Rounded Rectangle 13"/>
           <p:cNvSpPr/>
           <p:nvPr/>
         </p:nvSpPr>
         <p:spPr>
           <a:xfrm>
-            <a:off x="6309360" y="1783080"/>
-            <a:ext cx="5394960" cy="3291840"/>
+            <a:off x="502920" y="3657600"/>
+            <a:ext cx="5394960" cy="1051560"/>
           </a:xfrm>
           <a:prstGeom prst="roundRect">
             <a:avLst/>
           </a:prstGeom>
           <a:solidFill>
-            <a:srgbClr val="DDF4F2"/>
+            <a:srgbClr val="E1F1EF"/>
           </a:solidFill>
           <a:ln w="25400">
             <a:solidFill>
-              <a:srgbClr val="12B5A5"/>
+              <a:srgbClr val="2A9D8F"/>
             </a:solidFill>
           </a:ln>
           <a:effectLst/>
@@ -16824,81 +16314,124 @@
           <a:p>
             <a:pPr algn="ctr"/>
             <a:r>
-              <a:rPr sz="1400" b="1">
+              <a:rPr sz="1200" b="1">
                 <a:solidFill>
                   <a:srgbClr val="1A2238"/>
                 </a:solidFill>
               </a:rPr>
-              <a:t>Scenario B -- shallow &amp; dry . weight ~35%</a:t>
-            </a:r>
-          </a:p>
-          <a:p>
-            <a:pPr algn="ctr"/>
-            <a:r>
-              <a:rPr sz="1100" b="0">
+              <a:t>teacher-forced (true list): honest</a:t>
+            </a:r>
+          </a:p>
+          <a:p>
+            <a:pPr algn="ctr"/>
+            <a:r>
+              <a:rPr sz="900" b="0">
                 <a:solidFill>
                   <a:srgbClr val="8A93A3"/>
                 </a:solidFill>
               </a:rPr>
-              <a:t>P 1-3 kbar   H2O 1-2.5 wt%   T ~1000-1040 C</a:t>
-            </a:r>
-          </a:p>
-          <a:p>
-            <a:pPr algn="ctr"/>
-            <a:r>
-              <a:rPr sz="1400" b="1">
+              <a:t>68% band catches truth on 71.5% of rows (T),</a:t>
+            </a:r>
+          </a:p>
+          <a:p>
+            <a:pPr algn="ctr"/>
+            <a:r>
+              <a:rPr sz="900" b="0">
+                <a:solidFill>
+                  <a:srgbClr val="8A93A3"/>
+                </a:solidFill>
+              </a:rPr>
+              <a:t>67.1% (P), 68.4% (H2O) . NLL 8.32 nats/row (was 8.60)</a:t>
+            </a:r>
+          </a:p>
+        </p:txBody>
+      </p:sp>
+      <p:sp>
+        <p:nvSpPr>
+          <p:cNvPr id="15" name="Rounded Rectangle 14"/>
+          <p:cNvSpPr/>
+          <p:nvPr/>
+        </p:nvSpPr>
+        <p:spPr>
+          <a:xfrm>
+            <a:off x="6263640" y="3657600"/>
+            <a:ext cx="5532120" cy="1051560"/>
+          </a:xfrm>
+          <a:prstGeom prst="roundRect">
+            <a:avLst/>
+          </a:prstGeom>
+          <a:solidFill>
+            <a:srgbClr val="F6E3E1"/>
+          </a:solidFill>
+          <a:ln w="25400">
+            <a:solidFill>
+              <a:srgbClr val="C0392B"/>
+            </a:solidFill>
+          </a:ln>
+          <a:effectLst/>
+        </p:spPr>
+        <p:style>
+          <a:lnRef idx="1">
+            <a:schemeClr val="accent1"/>
+          </a:lnRef>
+          <a:fillRef idx="3">
+            <a:schemeClr val="accent1"/>
+          </a:fillRef>
+          <a:effectRef idx="2">
+            <a:schemeClr val="accent1"/>
+          </a:effectRef>
+          <a:fontRef idx="minor">
+            <a:schemeClr val="lt1"/>
+          </a:fontRef>
+        </p:style>
+        <p:txBody>
+          <a:bodyPr rtlCol="0" anchor="ctr" wrap="square"/>
+          <a:lstStyle/>
+          <a:p>
+            <a:pPr algn="ctr"/>
+            <a:r>
+              <a:rPr sz="1200" b="1">
                 <a:solidFill>
                   <a:srgbClr val="1A2238"/>
                 </a:solidFill>
               </a:rPr>
-              <a:t/>
-            </a:r>
-          </a:p>
-          <a:p>
-            <a:pPr algn="ctr"/>
-            <a:r>
-              <a:rPr sz="1100" b="0">
+              <a:t>ModeHead-sampled list: the exposure gap</a:t>
+            </a:r>
+          </a:p>
+          <a:p>
+            <a:pPr algn="ctr"/>
+            <a:r>
+              <a:rPr sz="900" b="0">
                 <a:solidFill>
                   <a:srgbClr val="8A93A3"/>
                 </a:solidFill>
               </a:rPr>
-              <a:t>phenocrysts (wt% of cargo, sums to 100):</a:t>
-            </a:r>
-          </a:p>
-          <a:p>
-            <a:pPr algn="ctr"/>
-            <a:r>
-              <a:rPr sz="1100" b="0">
+              <a:t>coverage collapses to 26-35% . NLL +2.4 to +3.9 nats/axis</a:t>
+            </a:r>
+          </a:p>
+          <a:p>
+            <a:pPr algn="ctr"/>
+            <a:r>
+              <a:rPr sz="900" b="0">
                 <a:solidFill>
                   <a:srgbClr val="8A93A3"/>
                 </a:solidFill>
               </a:rPr>
-              <a:t>plagioclase 48 +/- 4    clinopyroxene 24 +/- 3</a:t>
-            </a:r>
-          </a:p>
-          <a:p>
-            <a:pPr algn="ctr"/>
-            <a:r>
-              <a:rPr sz="1100" b="0">
-                <a:solidFill>
-                  <a:srgbClr val="8A93A3"/>
-                </a:solidFill>
-              </a:rPr>
-              <a:t>orthopyroxene 16 +/- 3  Fe-Ti oxides 12 +/- 2</a:t>
-            </a:r>
-          </a:p>
-        </p:txBody>
-      </p:sp>
-      <p:sp>
-        <p:nvSpPr>
-          <p:cNvPr id="7" name="TextBox 6"/>
+              <a:t>(P_kbar hits inf rows) -- sharper under truth = more wrong under mismatch</a:t>
+            </a:r>
+          </a:p>
+        </p:txBody>
+      </p:sp>
+      <p:sp>
+        <p:nvSpPr>
+          <p:cNvPr id="16" name="TextBox 15"/>
           <p:cNvSpPr txBox="1"/>
           <p:nvPr/>
         </p:nvSpPr>
         <p:spPr>
           <a:xfrm>
-            <a:off x="640080" y="5212080"/>
-            <a:ext cx="11064240" cy="731520"/>
+            <a:off x="502920" y="4937760"/>
+            <a:ext cx="11155680" cy="731520"/>
           </a:xfrm>
           <a:prstGeom prst="rect">
             <a:avLst/>
@@ -16913,26 +16446,26 @@
           <a:p>
             <a:pPr algn="l"/>
             <a:r>
-              <a:rPr sz="1200" b="0">
+              <a:rPr sz="1100" b="0">
                 <a:solidFill>
                   <a:srgbClr val="1A2238"/>
                 </a:solidFill>
               </a:rPr>
-              <a:t>+ intermediate scenario (amp + opx coexist, ~12%) + tail (~8%) -- nothing silently dropped; weights are prior-weighted plausibility, reweightable</a:t>
-            </a:r>
-          </a:p>
-        </p:txBody>
-      </p:sp>
-      <p:sp>
-        <p:nvSpPr>
-          <p:cNvPr id="8" name="TextBox 7"/>
+              <a:t>the gap is a deliberate debt: the head trains and is graded teacher-forced (mineralogy-first -- conditions are the bonus product), and tuning made the head sharper, which widened the gap. It is measured, tracked (#31, P3), and untouched by design until the mineralogy heads are done.</a:t>
+            </a:r>
+          </a:p>
+        </p:txBody>
+      </p:sp>
+      <p:sp>
+        <p:nvSpPr>
+          <p:cNvPr id="17" name="TextBox 16"/>
           <p:cNvSpPr txBox="1"/>
           <p:nvPr/>
         </p:nvSpPr>
         <p:spPr>
           <a:xfrm>
-            <a:off x="640080" y="5806440"/>
-            <a:ext cx="11064240" cy="731520"/>
+            <a:off x="502920" y="5623560"/>
+            <a:ext cx="11155680" cy="731520"/>
           </a:xfrm>
           <a:prstGeom prst="rect">
             <a:avLst/>
@@ -16947,12 +16480,46 @@
           <a:p>
             <a:pPr algn="l"/>
             <a:r>
-              <a:rPr sz="1200" b="0">
+              <a:rPr sz="1100" b="0">
+                <a:solidFill>
+                  <a:srgbClr val="1A2238"/>
+                </a:solidFill>
+              </a:rPr>
+              <a:t>population: all 55,576 val-roster rows, both scoring passes on the same rows with a fixed sampling seed. per-axis NLL (tuned, teacher-forced): T 4.97, P 1.82, H2O 1.53 -- summed 8.32.</a:t>
+            </a:r>
+          </a:p>
+        </p:txBody>
+      </p:sp>
+      <p:sp>
+        <p:nvSpPr>
+          <p:cNvPr id="18" name="TextBox 17"/>
+          <p:cNvSpPr txBox="1"/>
+          <p:nvPr/>
+        </p:nvSpPr>
+        <p:spPr>
+          <a:xfrm>
+            <a:off x="502920" y="6309360"/>
+            <a:ext cx="11155680" cy="731520"/>
+          </a:xfrm>
+          <a:prstGeom prst="rect">
+            <a:avLst/>
+          </a:prstGeom>
+          <a:noFill/>
+        </p:spPr>
+        <p:txBody>
+          <a:bodyPr wrap="square">
+            <a:spAutoFit/>
+          </a:bodyPr>
+          <a:lstStyle/>
+          <a:p>
+            <a:pPr algn="l"/>
+            <a:r>
+              <a:rPr sz="1000" b="0">
                 <a:solidFill>
                   <a:srgbClr val="8A93A3"/>
                 </a:solidFill>
               </a:rPr>
-              <a:t>per-phase composition (An#, Mg#) is bulk-controlled -- one shared band across scenarios, not re-predicted per scenario. Each scenario is a falsifiable hypothesis: amphibole in thin section selects A, and with it A's conditions.</a:t>
+              <a:t>current limits: axes are independent mixtures (no (T, P) correlation, deferred per ADR 006); T is a derived cooling endpoint, not a sampled axis; sampled-support P rows can blow up numerically (the inf rows are #31's starting point). full report: results/cond_head/&lt;tag&gt;/</a:t>
             </a:r>
           </a:p>
         </p:txBody>
@@ -17469,6 +17036,2723 @@
                 </a:solidFill>
               </a:rPr>
               <a:t>inputs everywhere are the same 22-token cation+trace vector; the corpora differ in what supervision (if any) they attach.</a:t>
+            </a:r>
+          </a:p>
+        </p:txBody>
+      </p:sp>
+    </p:spTree>
+  </p:cSld>
+  <p:clrMapOvr>
+    <a:masterClrMapping/>
+  </p:clrMapOvr>
+</p:sld>
+</file>
+
+<file path=ppt/slides/slide20.xml><?xml version="1.0" encoding="utf-8"?>
+<p:sld xmlns:a="http://schemas.openxmlformats.org/drawingml/2006/main" xmlns:p="http://schemas.openxmlformats.org/presentationml/2006/main" xmlns:r="http://schemas.openxmlformats.org/officeDocument/2006/relationships">
+  <p:cSld>
+    <p:spTree>
+      <p:nvGrpSpPr>
+        <p:cNvPr id="1" name=""/>
+        <p:cNvGrpSpPr/>
+        <p:nvPr/>
+      </p:nvGrpSpPr>
+      <p:grpSpPr/>
+      <p:sp>
+        <p:nvSpPr>
+          <p:cNvPr id="2" name="TextBox 1"/>
+          <p:cNvSpPr txBox="1"/>
+          <p:nvPr/>
+        </p:nvSpPr>
+        <p:spPr>
+          <a:xfrm>
+            <a:off x="502920" y="274320"/>
+            <a:ext cx="10972800" cy="365760"/>
+          </a:xfrm>
+          <a:prstGeom prst="rect">
+            <a:avLst/>
+          </a:prstGeom>
+          <a:noFill/>
+        </p:spPr>
+        <p:txBody>
+          <a:bodyPr wrap="square">
+            <a:spAutoFit/>
+          </a:bodyPr>
+          <a:lstStyle/>
+          <a:p>
+            <a:pPr algn="l"/>
+            <a:r>
+              <a:rPr sz="1300" b="1">
+                <a:solidFill>
+                  <a:srgbClr val="2E5BFF"/>
+                </a:solidFill>
+              </a:rPr>
+              <a:t>HEADS</a:t>
+            </a:r>
+          </a:p>
+        </p:txBody>
+      </p:sp>
+      <p:sp>
+        <p:nvSpPr>
+          <p:cNvPr id="3" name="TextBox 2"/>
+          <p:cNvSpPr txBox="1"/>
+          <p:nvPr/>
+        </p:nvSpPr>
+        <p:spPr>
+          <a:xfrm>
+            <a:off x="502920" y="603504"/>
+            <a:ext cx="11155680" cy="731520"/>
+          </a:xfrm>
+          <a:prstGeom prst="rect">
+            <a:avLst/>
+          </a:prstGeom>
+          <a:noFill/>
+        </p:spPr>
+        <p:txBody>
+          <a:bodyPr wrap="square">
+            <a:spAutoFit/>
+          </a:bodyPr>
+          <a:lstStyle/>
+          <a:p>
+            <a:pPr algn="l"/>
+            <a:r>
+              <a:rPr sz="2600" b="1">
+                <a:solidFill>
+                  <a:srgbClr val="1A2238"/>
+                </a:solidFill>
+              </a:rPr>
+              <a:t>What the heads emit (distributions, not point estimates)</a:t>
+            </a:r>
+          </a:p>
+        </p:txBody>
+      </p:sp>
+      <p:sp>
+        <p:nvSpPr>
+          <p:cNvPr id="4" name="Rounded Rectangle 3"/>
+          <p:cNvSpPr/>
+          <p:nvPr/>
+        </p:nvSpPr>
+        <p:spPr>
+          <a:xfrm>
+            <a:off x="502920" y="2651760"/>
+            <a:ext cx="2286000" cy="1554480"/>
+          </a:xfrm>
+          <a:prstGeom prst="roundRect">
+            <a:avLst/>
+          </a:prstGeom>
+          <a:solidFill>
+            <a:srgbClr val="E1E8FF"/>
+          </a:solidFill>
+          <a:ln w="25400">
+            <a:solidFill>
+              <a:srgbClr val="2E5BFF"/>
+            </a:solidFill>
+          </a:ln>
+          <a:effectLst/>
+        </p:spPr>
+        <p:style>
+          <a:lnRef idx="1">
+            <a:schemeClr val="accent1"/>
+          </a:lnRef>
+          <a:fillRef idx="3">
+            <a:schemeClr val="accent1"/>
+          </a:fillRef>
+          <a:effectRef idx="2">
+            <a:schemeClr val="accent1"/>
+          </a:effectRef>
+          <a:fontRef idx="minor">
+            <a:schemeClr val="lt1"/>
+          </a:fontRef>
+        </p:style>
+        <p:txBody>
+          <a:bodyPr rtlCol="0" anchor="ctr" wrap="square"/>
+          <a:lstStyle/>
+          <a:p>
+            <a:pPr algn="ctr"/>
+            <a:r>
+              <a:rPr sz="1200" b="1">
+                <a:solidFill>
+                  <a:srgbClr val="1A2238"/>
+                </a:solidFill>
+              </a:rPr>
+              <a:t>example bulk</a:t>
+            </a:r>
+          </a:p>
+          <a:p>
+            <a:pPr algn="ctr"/>
+            <a:r>
+              <a:rPr sz="1200" b="1">
+                <a:solidFill>
+                  <a:srgbClr val="1A2238"/>
+                </a:solidFill>
+              </a:rPr>
+              <a:t/>
+            </a:r>
+          </a:p>
+          <a:p>
+            <a:pPr algn="ctr"/>
+            <a:r>
+              <a:rPr sz="900" b="0">
+                <a:solidFill>
+                  <a:srgbClr val="8A93A3"/>
+                </a:solidFill>
+              </a:rPr>
+              <a:t>SiO2 50  Al2O3 16</a:t>
+            </a:r>
+          </a:p>
+          <a:p>
+            <a:pPr algn="ctr"/>
+            <a:r>
+              <a:rPr sz="900" b="0">
+                <a:solidFill>
+                  <a:srgbClr val="8A93A3"/>
+                </a:solidFill>
+              </a:rPr>
+              <a:t>MgO 7.5  FeO 11</a:t>
+            </a:r>
+          </a:p>
+          <a:p>
+            <a:pPr algn="ctr"/>
+            <a:r>
+              <a:rPr sz="900" b="0">
+                <a:solidFill>
+                  <a:srgbClr val="8A93A3"/>
+                </a:solidFill>
+              </a:rPr>
+              <a:t>Sr 400 ppm ...</a:t>
+            </a:r>
+          </a:p>
+        </p:txBody>
+      </p:sp>
+      <p:sp>
+        <p:nvSpPr>
+          <p:cNvPr id="5" name="Right Arrow 4"/>
+          <p:cNvSpPr/>
+          <p:nvPr/>
+        </p:nvSpPr>
+        <p:spPr>
+          <a:xfrm>
+            <a:off x="2880360" y="3246120"/>
+            <a:ext cx="457200" cy="365760"/>
+          </a:xfrm>
+          <a:prstGeom prst="rightArrow">
+            <a:avLst/>
+          </a:prstGeom>
+          <a:solidFill>
+            <a:srgbClr val="1A2238"/>
+          </a:solidFill>
+          <a:ln>
+            <a:noFill/>
+          </a:ln>
+          <a:effectLst/>
+        </p:spPr>
+        <p:style>
+          <a:lnRef idx="1">
+            <a:schemeClr val="accent1"/>
+          </a:lnRef>
+          <a:fillRef idx="3">
+            <a:schemeClr val="accent1"/>
+          </a:fillRef>
+          <a:effectRef idx="2">
+            <a:schemeClr val="accent1"/>
+          </a:effectRef>
+          <a:fontRef idx="minor">
+            <a:schemeClr val="lt1"/>
+          </a:fontRef>
+        </p:style>
+        <p:txBody>
+          <a:bodyPr rtlCol="0" anchor="ctr"/>
+          <a:lstStyle/>
+          <a:p>
+            <a:pPr algn="ctr"/>
+          </a:p>
+        </p:txBody>
+      </p:sp>
+      <p:sp>
+        <p:nvSpPr>
+          <p:cNvPr id="6" name="Oval 5"/>
+          <p:cNvSpPr/>
+          <p:nvPr/>
+        </p:nvSpPr>
+        <p:spPr>
+          <a:xfrm>
+            <a:off x="3456432" y="2770632"/>
+            <a:ext cx="1316736" cy="1316736"/>
+          </a:xfrm>
+          <a:prstGeom prst="ellipse">
+            <a:avLst/>
+          </a:prstGeom>
+          <a:solidFill>
+            <a:srgbClr val="E8883A"/>
+          </a:solidFill>
+          <a:ln w="31750">
+            <a:solidFill>
+              <a:srgbClr val="E8883A"/>
+            </a:solidFill>
+          </a:ln>
+          <a:effectLst/>
+        </p:spPr>
+        <p:style>
+          <a:lnRef idx="1">
+            <a:schemeClr val="accent1"/>
+          </a:lnRef>
+          <a:fillRef idx="3">
+            <a:schemeClr val="accent1"/>
+          </a:fillRef>
+          <a:effectRef idx="2">
+            <a:schemeClr val="accent1"/>
+          </a:effectRef>
+          <a:fontRef idx="minor">
+            <a:schemeClr val="lt1"/>
+          </a:fontRef>
+        </p:style>
+        <p:txBody>
+          <a:bodyPr rtlCol="0" anchor="ctr" wrap="square"/>
+          <a:lstStyle/>
+          <a:p>
+            <a:pPr algn="ctr"/>
+            <a:r>
+              <a:rPr sz="2200" b="1">
+                <a:solidFill>
+                  <a:srgbClr val="FFFFFF"/>
+                </a:solidFill>
+              </a:rPr>
+              <a:t>h</a:t>
+            </a:r>
+          </a:p>
+          <a:p>
+            <a:pPr algn="ctr"/>
+            <a:r>
+              <a:rPr sz="1900" b="0">
+                <a:solidFill>
+                  <a:srgbClr val="8A93A3"/>
+                </a:solidFill>
+              </a:rPr>
+              <a:t>256-d latent</a:t>
+            </a:r>
+          </a:p>
+        </p:txBody>
+      </p:sp>
+      <p:sp>
+        <p:nvSpPr>
+          <p:cNvPr id="7" name="Right Arrow 6"/>
+          <p:cNvSpPr/>
+          <p:nvPr/>
+        </p:nvSpPr>
+        <p:spPr>
+          <a:xfrm>
+            <a:off x="4892040" y="3246120"/>
+            <a:ext cx="457200" cy="365760"/>
+          </a:xfrm>
+          <a:prstGeom prst="rightArrow">
+            <a:avLst/>
+          </a:prstGeom>
+          <a:solidFill>
+            <a:srgbClr val="1A2238"/>
+          </a:solidFill>
+          <a:ln>
+            <a:noFill/>
+          </a:ln>
+          <a:effectLst/>
+        </p:spPr>
+        <p:style>
+          <a:lnRef idx="1">
+            <a:schemeClr val="accent1"/>
+          </a:lnRef>
+          <a:fillRef idx="3">
+            <a:schemeClr val="accent1"/>
+          </a:fillRef>
+          <a:effectRef idx="2">
+            <a:schemeClr val="accent1"/>
+          </a:effectRef>
+          <a:fontRef idx="minor">
+            <a:schemeClr val="lt1"/>
+          </a:fontRef>
+        </p:style>
+        <p:txBody>
+          <a:bodyPr rtlCol="0" anchor="ctr"/>
+          <a:lstStyle/>
+          <a:p>
+            <a:pPr algn="ctr"/>
+          </a:p>
+        </p:txBody>
+      </p:sp>
+      <p:sp>
+        <p:nvSpPr>
+          <p:cNvPr id="8" name="Rounded Rectangle 7"/>
+          <p:cNvSpPr/>
+          <p:nvPr/>
+        </p:nvSpPr>
+        <p:spPr>
+          <a:xfrm>
+            <a:off x="5486400" y="1417320"/>
+            <a:ext cx="6309360" cy="2057400"/>
+          </a:xfrm>
+          <a:prstGeom prst="roundRect">
+            <a:avLst/>
+          </a:prstGeom>
+          <a:solidFill>
+            <a:srgbClr val="E1F1EF"/>
+          </a:solidFill>
+          <a:ln w="25400">
+            <a:solidFill>
+              <a:srgbClr val="2A9D8F"/>
+            </a:solidFill>
+          </a:ln>
+          <a:effectLst/>
+        </p:spPr>
+        <p:style>
+          <a:lnRef idx="1">
+            <a:schemeClr val="accent1"/>
+          </a:lnRef>
+          <a:fillRef idx="3">
+            <a:schemeClr val="accent1"/>
+          </a:fillRef>
+          <a:effectRef idx="2">
+            <a:schemeClr val="accent1"/>
+          </a:effectRef>
+          <a:fontRef idx="minor">
+            <a:schemeClr val="lt1"/>
+          </a:fontRef>
+        </p:style>
+        <p:txBody>
+          <a:bodyPr rtlCol="0" anchor="ctr" wrap="square"/>
+          <a:lstStyle/>
+          <a:p>
+            <a:pPr algn="ctr"/>
+            <a:r>
+              <a:rPr sz="1300" b="1">
+                <a:solidFill>
+                  <a:srgbClr val="1A2238"/>
+                </a:solidFill>
+              </a:rPr>
+              <a:t/>
+            </a:r>
+          </a:p>
+        </p:txBody>
+      </p:sp>
+      <p:sp>
+        <p:nvSpPr>
+          <p:cNvPr id="9" name="TextBox 8"/>
+          <p:cNvSpPr txBox="1"/>
+          <p:nvPr/>
+        </p:nvSpPr>
+        <p:spPr>
+          <a:xfrm>
+            <a:off x="5669280" y="1463040"/>
+            <a:ext cx="5943600" cy="731520"/>
+          </a:xfrm>
+          <a:prstGeom prst="rect">
+            <a:avLst/>
+          </a:prstGeom>
+          <a:noFill/>
+        </p:spPr>
+        <p:txBody>
+          <a:bodyPr wrap="square">
+            <a:spAutoFit/>
+          </a:bodyPr>
+          <a:lstStyle/>
+          <a:p>
+            <a:pPr algn="l"/>
+            <a:r>
+              <a:rPr sz="1200" b="0">
+                <a:solidFill>
+                  <a:srgbClr val="2A9D8F"/>
+                </a:solidFill>
+              </a:rPr>
+              <a:t>ModeHead -&gt; per phase: p(present) x amount-when-present (hurdle Dirichlet; crystals renormalized to 1, groundmass/melt excluded)</a:t>
+            </a:r>
+          </a:p>
+        </p:txBody>
+      </p:sp>
+      <p:sp>
+        <p:nvSpPr>
+          <p:cNvPr id="10" name="Rounded Rectangle 9"/>
+          <p:cNvSpPr/>
+          <p:nvPr/>
+        </p:nvSpPr>
+        <p:spPr>
+          <a:xfrm>
+            <a:off x="5715000" y="1874519"/>
+            <a:ext cx="1892807" cy="292608"/>
+          </a:xfrm>
+          <a:prstGeom prst="roundRect">
+            <a:avLst/>
+          </a:prstGeom>
+          <a:solidFill>
+            <a:srgbClr val="2A9D8F"/>
+          </a:solidFill>
+          <a:ln>
+            <a:noFill/>
+          </a:ln>
+          <a:effectLst/>
+        </p:spPr>
+        <p:style>
+          <a:lnRef idx="1">
+            <a:schemeClr val="accent1"/>
+          </a:lnRef>
+          <a:fillRef idx="3">
+            <a:schemeClr val="accent1"/>
+          </a:fillRef>
+          <a:effectRef idx="2">
+            <a:schemeClr val="accent1"/>
+          </a:effectRef>
+          <a:fontRef idx="minor">
+            <a:schemeClr val="lt1"/>
+          </a:fontRef>
+        </p:style>
+        <p:txBody>
+          <a:bodyPr rtlCol="0" anchor="ctr"/>
+          <a:lstStyle/>
+          <a:p>
+            <a:pPr algn="ctr"/>
+          </a:p>
+        </p:txBody>
+      </p:sp>
+      <p:cxnSp>
+        <p:nvCxnSpPr>
+          <p:cNvPr id="11" name="Connector 10"/>
+          <p:cNvCxnSpPr/>
+          <p:nvPr/>
+        </p:nvCxnSpPr>
+        <p:spPr>
+          <a:xfrm>
+            <a:off x="7397496" y="2020824"/>
+            <a:ext cx="420624" cy="0"/>
+          </a:xfrm>
+          <a:prstGeom prst="bentConnector3">
+            <a:avLst/>
+          </a:prstGeom>
+          <a:ln w="15875">
+            <a:solidFill>
+              <a:srgbClr val="1A2238"/>
+            </a:solidFill>
+          </a:ln>
+          <a:effectLst/>
+        </p:spPr>
+        <p:style>
+          <a:lnRef idx="2">
+            <a:schemeClr val="accent1"/>
+          </a:lnRef>
+          <a:fillRef idx="0">
+            <a:schemeClr val="accent1"/>
+          </a:fillRef>
+          <a:effectRef idx="1">
+            <a:schemeClr val="accent1"/>
+          </a:effectRef>
+          <a:fontRef idx="minor">
+            <a:schemeClr val="tx1"/>
+          </a:fontRef>
+        </p:style>
+      </p:cxnSp>
+      <p:cxnSp>
+        <p:nvCxnSpPr>
+          <p:cNvPr id="12" name="Connector 11"/>
+          <p:cNvCxnSpPr/>
+          <p:nvPr/>
+        </p:nvCxnSpPr>
+        <p:spPr>
+          <a:xfrm>
+            <a:off x="7397496" y="1956816"/>
+            <a:ext cx="0" cy="128015"/>
+          </a:xfrm>
+          <a:prstGeom prst="bentConnector3">
+            <a:avLst/>
+          </a:prstGeom>
+          <a:ln w="15875">
+            <a:solidFill>
+              <a:srgbClr val="1A2238"/>
+            </a:solidFill>
+          </a:ln>
+          <a:effectLst/>
+        </p:spPr>
+        <p:style>
+          <a:lnRef idx="2">
+            <a:schemeClr val="accent1"/>
+          </a:lnRef>
+          <a:fillRef idx="0">
+            <a:schemeClr val="accent1"/>
+          </a:fillRef>
+          <a:effectRef idx="1">
+            <a:schemeClr val="accent1"/>
+          </a:effectRef>
+          <a:fontRef idx="minor">
+            <a:schemeClr val="tx1"/>
+          </a:fontRef>
+        </p:style>
+      </p:cxnSp>
+      <p:cxnSp>
+        <p:nvCxnSpPr>
+          <p:cNvPr id="13" name="Connector 12"/>
+          <p:cNvCxnSpPr/>
+          <p:nvPr/>
+        </p:nvCxnSpPr>
+        <p:spPr>
+          <a:xfrm>
+            <a:off x="7818120" y="1956816"/>
+            <a:ext cx="0" cy="128015"/>
+          </a:xfrm>
+          <a:prstGeom prst="bentConnector3">
+            <a:avLst/>
+          </a:prstGeom>
+          <a:ln w="15875">
+            <a:solidFill>
+              <a:srgbClr val="1A2238"/>
+            </a:solidFill>
+          </a:ln>
+          <a:effectLst/>
+        </p:spPr>
+        <p:style>
+          <a:lnRef idx="2">
+            <a:schemeClr val="accent1"/>
+          </a:lnRef>
+          <a:fillRef idx="0">
+            <a:schemeClr val="accent1"/>
+          </a:fillRef>
+          <a:effectRef idx="1">
+            <a:schemeClr val="accent1"/>
+          </a:effectRef>
+          <a:fontRef idx="minor">
+            <a:schemeClr val="tx1"/>
+          </a:fontRef>
+        </p:style>
+      </p:cxnSp>
+      <p:sp>
+        <p:nvSpPr>
+          <p:cNvPr id="14" name="TextBox 13"/>
+          <p:cNvSpPr txBox="1"/>
+          <p:nvPr/>
+        </p:nvSpPr>
+        <p:spPr>
+          <a:xfrm>
+            <a:off x="7909560" y="1828799"/>
+            <a:ext cx="4206240" cy="365760"/>
+          </a:xfrm>
+          <a:prstGeom prst="rect">
+            <a:avLst/>
+          </a:prstGeom>
+          <a:noFill/>
+        </p:spPr>
+        <p:txBody>
+          <a:bodyPr wrap="square">
+            <a:spAutoFit/>
+          </a:bodyPr>
+          <a:lstStyle/>
+          <a:p>
+            <a:pPr algn="l"/>
+            <a:r>
+              <a:rPr sz="1200" b="0">
+                <a:solidFill>
+                  <a:srgbClr val="1A2238"/>
+                </a:solidFill>
+              </a:rPr>
+              <a:t>plagioclase  0.45  |  p 1.00</a:t>
+            </a:r>
+          </a:p>
+        </p:txBody>
+      </p:sp>
+      <p:sp>
+        <p:nvSpPr>
+          <p:cNvPr id="15" name="Rounded Rectangle 14"/>
+          <p:cNvSpPr/>
+          <p:nvPr/>
+        </p:nvSpPr>
+        <p:spPr>
+          <a:xfrm>
+            <a:off x="5715000" y="2185415"/>
+            <a:ext cx="1135684" cy="292608"/>
+          </a:xfrm>
+          <a:prstGeom prst="roundRect">
+            <a:avLst/>
+          </a:prstGeom>
+          <a:solidFill>
+            <a:srgbClr val="2A9D8F"/>
+          </a:solidFill>
+          <a:ln>
+            <a:noFill/>
+          </a:ln>
+          <a:effectLst/>
+        </p:spPr>
+        <p:style>
+          <a:lnRef idx="1">
+            <a:schemeClr val="accent1"/>
+          </a:lnRef>
+          <a:fillRef idx="3">
+            <a:schemeClr val="accent1"/>
+          </a:fillRef>
+          <a:effectRef idx="2">
+            <a:schemeClr val="accent1"/>
+          </a:effectRef>
+          <a:fontRef idx="minor">
+            <a:schemeClr val="lt1"/>
+          </a:fontRef>
+        </p:style>
+        <p:txBody>
+          <a:bodyPr rtlCol="0" anchor="ctr"/>
+          <a:lstStyle/>
+          <a:p>
+            <a:pPr algn="ctr"/>
+          </a:p>
+        </p:txBody>
+      </p:sp>
+      <p:cxnSp>
+        <p:nvCxnSpPr>
+          <p:cNvPr id="16" name="Connector 15"/>
+          <p:cNvCxnSpPr/>
+          <p:nvPr/>
+        </p:nvCxnSpPr>
+        <p:spPr>
+          <a:xfrm>
+            <a:off x="6682435" y="2331720"/>
+            <a:ext cx="336499" cy="0"/>
+          </a:xfrm>
+          <a:prstGeom prst="bentConnector3">
+            <a:avLst/>
+          </a:prstGeom>
+          <a:ln w="15875">
+            <a:solidFill>
+              <a:srgbClr val="1A2238"/>
+            </a:solidFill>
+          </a:ln>
+          <a:effectLst/>
+        </p:spPr>
+        <p:style>
+          <a:lnRef idx="2">
+            <a:schemeClr val="accent1"/>
+          </a:lnRef>
+          <a:fillRef idx="0">
+            <a:schemeClr val="accent1"/>
+          </a:fillRef>
+          <a:effectRef idx="1">
+            <a:schemeClr val="accent1"/>
+          </a:effectRef>
+          <a:fontRef idx="minor">
+            <a:schemeClr val="tx1"/>
+          </a:fontRef>
+        </p:style>
+      </p:cxnSp>
+      <p:cxnSp>
+        <p:nvCxnSpPr>
+          <p:cNvPr id="17" name="Connector 16"/>
+          <p:cNvCxnSpPr/>
+          <p:nvPr/>
+        </p:nvCxnSpPr>
+        <p:spPr>
+          <a:xfrm>
+            <a:off x="6682435" y="2267712"/>
+            <a:ext cx="0" cy="128015"/>
+          </a:xfrm>
+          <a:prstGeom prst="bentConnector3">
+            <a:avLst/>
+          </a:prstGeom>
+          <a:ln w="15875">
+            <a:solidFill>
+              <a:srgbClr val="1A2238"/>
+            </a:solidFill>
+          </a:ln>
+          <a:effectLst/>
+        </p:spPr>
+        <p:style>
+          <a:lnRef idx="2">
+            <a:schemeClr val="accent1"/>
+          </a:lnRef>
+          <a:fillRef idx="0">
+            <a:schemeClr val="accent1"/>
+          </a:fillRef>
+          <a:effectRef idx="1">
+            <a:schemeClr val="accent1"/>
+          </a:effectRef>
+          <a:fontRef idx="minor">
+            <a:schemeClr val="tx1"/>
+          </a:fontRef>
+        </p:style>
+      </p:cxnSp>
+      <p:cxnSp>
+        <p:nvCxnSpPr>
+          <p:cNvPr id="18" name="Connector 17"/>
+          <p:cNvCxnSpPr/>
+          <p:nvPr/>
+        </p:nvCxnSpPr>
+        <p:spPr>
+          <a:xfrm>
+            <a:off x="7018934" y="2267712"/>
+            <a:ext cx="0" cy="128015"/>
+          </a:xfrm>
+          <a:prstGeom prst="bentConnector3">
+            <a:avLst/>
+          </a:prstGeom>
+          <a:ln w="15875">
+            <a:solidFill>
+              <a:srgbClr val="1A2238"/>
+            </a:solidFill>
+          </a:ln>
+          <a:effectLst/>
+        </p:spPr>
+        <p:style>
+          <a:lnRef idx="2">
+            <a:schemeClr val="accent1"/>
+          </a:lnRef>
+          <a:fillRef idx="0">
+            <a:schemeClr val="accent1"/>
+          </a:fillRef>
+          <a:effectRef idx="1">
+            <a:schemeClr val="accent1"/>
+          </a:effectRef>
+          <a:fontRef idx="minor">
+            <a:schemeClr val="tx1"/>
+          </a:fontRef>
+        </p:style>
+      </p:cxnSp>
+      <p:sp>
+        <p:nvSpPr>
+          <p:cNvPr id="19" name="TextBox 18"/>
+          <p:cNvSpPr txBox="1"/>
+          <p:nvPr/>
+        </p:nvSpPr>
+        <p:spPr>
+          <a:xfrm>
+            <a:off x="7110374" y="2139696"/>
+            <a:ext cx="4206240" cy="365760"/>
+          </a:xfrm>
+          <a:prstGeom prst="rect">
+            <a:avLst/>
+          </a:prstGeom>
+          <a:noFill/>
+        </p:spPr>
+        <p:txBody>
+          <a:bodyPr wrap="square">
+            <a:spAutoFit/>
+          </a:bodyPr>
+          <a:lstStyle/>
+          <a:p>
+            <a:pPr algn="l"/>
+            <a:r>
+              <a:rPr sz="1200" b="0">
+                <a:solidFill>
+                  <a:srgbClr val="1A2238"/>
+                </a:solidFill>
+              </a:rPr>
+              <a:t>clinopyroxene  0.27  |  p 0.97</a:t>
+            </a:r>
+          </a:p>
+        </p:txBody>
+      </p:sp>
+      <p:sp>
+        <p:nvSpPr>
+          <p:cNvPr id="20" name="Rounded Rectangle 19"/>
+          <p:cNvSpPr/>
+          <p:nvPr/>
+        </p:nvSpPr>
+        <p:spPr>
+          <a:xfrm>
+            <a:off x="5715000" y="2496312"/>
+            <a:ext cx="757123" cy="292608"/>
+          </a:xfrm>
+          <a:prstGeom prst="roundRect">
+            <a:avLst/>
+          </a:prstGeom>
+          <a:solidFill>
+            <a:srgbClr val="A9D7D2"/>
+          </a:solidFill>
+          <a:ln>
+            <a:noFill/>
+          </a:ln>
+          <a:effectLst/>
+        </p:spPr>
+        <p:style>
+          <a:lnRef idx="1">
+            <a:schemeClr val="accent1"/>
+          </a:lnRef>
+          <a:fillRef idx="3">
+            <a:schemeClr val="accent1"/>
+          </a:fillRef>
+          <a:effectRef idx="2">
+            <a:schemeClr val="accent1"/>
+          </a:effectRef>
+          <a:fontRef idx="minor">
+            <a:schemeClr val="lt1"/>
+          </a:fontRef>
+        </p:style>
+        <p:txBody>
+          <a:bodyPr rtlCol="0" anchor="ctr"/>
+          <a:lstStyle/>
+          <a:p>
+            <a:pPr algn="ctr"/>
+          </a:p>
+        </p:txBody>
+      </p:sp>
+      <p:cxnSp>
+        <p:nvCxnSpPr>
+          <p:cNvPr id="21" name="Connector 20"/>
+          <p:cNvCxnSpPr/>
+          <p:nvPr/>
+        </p:nvCxnSpPr>
+        <p:spPr>
+          <a:xfrm>
+            <a:off x="6219748" y="2642616"/>
+            <a:ext cx="504749" cy="0"/>
+          </a:xfrm>
+          <a:prstGeom prst="bentConnector3">
+            <a:avLst/>
+          </a:prstGeom>
+          <a:ln w="15875">
+            <a:solidFill>
+              <a:srgbClr val="1A2238"/>
+            </a:solidFill>
+          </a:ln>
+          <a:effectLst/>
+        </p:spPr>
+        <p:style>
+          <a:lnRef idx="2">
+            <a:schemeClr val="accent1"/>
+          </a:lnRef>
+          <a:fillRef idx="0">
+            <a:schemeClr val="accent1"/>
+          </a:fillRef>
+          <a:effectRef idx="1">
+            <a:schemeClr val="accent1"/>
+          </a:effectRef>
+          <a:fontRef idx="minor">
+            <a:schemeClr val="tx1"/>
+          </a:fontRef>
+        </p:style>
+      </p:cxnSp>
+      <p:cxnSp>
+        <p:nvCxnSpPr>
+          <p:cNvPr id="22" name="Connector 21"/>
+          <p:cNvCxnSpPr/>
+          <p:nvPr/>
+        </p:nvCxnSpPr>
+        <p:spPr>
+          <a:xfrm>
+            <a:off x="6219748" y="2578608"/>
+            <a:ext cx="0" cy="128016"/>
+          </a:xfrm>
+          <a:prstGeom prst="bentConnector3">
+            <a:avLst/>
+          </a:prstGeom>
+          <a:ln w="15875">
+            <a:solidFill>
+              <a:srgbClr val="1A2238"/>
+            </a:solidFill>
+          </a:ln>
+          <a:effectLst/>
+        </p:spPr>
+        <p:style>
+          <a:lnRef idx="2">
+            <a:schemeClr val="accent1"/>
+          </a:lnRef>
+          <a:fillRef idx="0">
+            <a:schemeClr val="accent1"/>
+          </a:fillRef>
+          <a:effectRef idx="1">
+            <a:schemeClr val="accent1"/>
+          </a:effectRef>
+          <a:fontRef idx="minor">
+            <a:schemeClr val="tx1"/>
+          </a:fontRef>
+        </p:style>
+      </p:cxnSp>
+      <p:cxnSp>
+        <p:nvCxnSpPr>
+          <p:cNvPr id="23" name="Connector 22"/>
+          <p:cNvCxnSpPr/>
+          <p:nvPr/>
+        </p:nvCxnSpPr>
+        <p:spPr>
+          <a:xfrm>
+            <a:off x="6724497" y="2578608"/>
+            <a:ext cx="0" cy="128016"/>
+          </a:xfrm>
+          <a:prstGeom prst="bentConnector3">
+            <a:avLst/>
+          </a:prstGeom>
+          <a:ln w="15875">
+            <a:solidFill>
+              <a:srgbClr val="1A2238"/>
+            </a:solidFill>
+          </a:ln>
+          <a:effectLst/>
+        </p:spPr>
+        <p:style>
+          <a:lnRef idx="2">
+            <a:schemeClr val="accent1"/>
+          </a:lnRef>
+          <a:fillRef idx="0">
+            <a:schemeClr val="accent1"/>
+          </a:fillRef>
+          <a:effectRef idx="1">
+            <a:schemeClr val="accent1"/>
+          </a:effectRef>
+          <a:fontRef idx="minor">
+            <a:schemeClr val="tx1"/>
+          </a:fontRef>
+        </p:style>
+      </p:cxnSp>
+      <p:sp>
+        <p:nvSpPr>
+          <p:cNvPr id="24" name="TextBox 23"/>
+          <p:cNvSpPr txBox="1"/>
+          <p:nvPr/>
+        </p:nvSpPr>
+        <p:spPr>
+          <a:xfrm>
+            <a:off x="6815937" y="2450592"/>
+            <a:ext cx="4206240" cy="365760"/>
+          </a:xfrm>
+          <a:prstGeom prst="rect">
+            <a:avLst/>
+          </a:prstGeom>
+          <a:noFill/>
+        </p:spPr>
+        <p:txBody>
+          <a:bodyPr wrap="square">
+            <a:spAutoFit/>
+          </a:bodyPr>
+          <a:lstStyle/>
+          <a:p>
+            <a:pPr algn="l"/>
+            <a:r>
+              <a:rPr sz="1200" b="0">
+                <a:solidFill>
+                  <a:srgbClr val="1A2238"/>
+                </a:solidFill>
+              </a:rPr>
+              <a:t>amphibole  0.18  |  p 0.41</a:t>
+            </a:r>
+          </a:p>
+        </p:txBody>
+      </p:sp>
+      <p:sp>
+        <p:nvSpPr>
+          <p:cNvPr id="25" name="Rounded Rectangle 24"/>
+          <p:cNvSpPr/>
+          <p:nvPr/>
+        </p:nvSpPr>
+        <p:spPr>
+          <a:xfrm>
+            <a:off x="5715000" y="2807208"/>
+            <a:ext cx="420623" cy="292608"/>
+          </a:xfrm>
+          <a:prstGeom prst="roundRect">
+            <a:avLst/>
+          </a:prstGeom>
+          <a:solidFill>
+            <a:srgbClr val="A9D7D2"/>
+          </a:solidFill>
+          <a:ln>
+            <a:noFill/>
+          </a:ln>
+          <a:effectLst/>
+        </p:spPr>
+        <p:style>
+          <a:lnRef idx="1">
+            <a:schemeClr val="accent1"/>
+          </a:lnRef>
+          <a:fillRef idx="3">
+            <a:schemeClr val="accent1"/>
+          </a:fillRef>
+          <a:effectRef idx="2">
+            <a:schemeClr val="accent1"/>
+          </a:effectRef>
+          <a:fontRef idx="minor">
+            <a:schemeClr val="lt1"/>
+          </a:fontRef>
+        </p:style>
+        <p:txBody>
+          <a:bodyPr rtlCol="0" anchor="ctr"/>
+          <a:lstStyle/>
+          <a:p>
+            <a:pPr algn="ctr"/>
+          </a:p>
+        </p:txBody>
+      </p:sp>
+      <p:cxnSp>
+        <p:nvCxnSpPr>
+          <p:cNvPr id="26" name="Connector 25"/>
+          <p:cNvCxnSpPr/>
+          <p:nvPr/>
+        </p:nvCxnSpPr>
+        <p:spPr>
+          <a:xfrm>
+            <a:off x="5967374" y="2953512"/>
+            <a:ext cx="336499" cy="0"/>
+          </a:xfrm>
+          <a:prstGeom prst="bentConnector3">
+            <a:avLst/>
+          </a:prstGeom>
+          <a:ln w="15875">
+            <a:solidFill>
+              <a:srgbClr val="1A2238"/>
+            </a:solidFill>
+          </a:ln>
+          <a:effectLst/>
+        </p:spPr>
+        <p:style>
+          <a:lnRef idx="2">
+            <a:schemeClr val="accent1"/>
+          </a:lnRef>
+          <a:fillRef idx="0">
+            <a:schemeClr val="accent1"/>
+          </a:fillRef>
+          <a:effectRef idx="1">
+            <a:schemeClr val="accent1"/>
+          </a:effectRef>
+          <a:fontRef idx="minor">
+            <a:schemeClr val="tx1"/>
+          </a:fontRef>
+        </p:style>
+      </p:cxnSp>
+      <p:cxnSp>
+        <p:nvCxnSpPr>
+          <p:cNvPr id="27" name="Connector 26"/>
+          <p:cNvCxnSpPr/>
+          <p:nvPr/>
+        </p:nvCxnSpPr>
+        <p:spPr>
+          <a:xfrm>
+            <a:off x="5967374" y="2889504"/>
+            <a:ext cx="0" cy="128016"/>
+          </a:xfrm>
+          <a:prstGeom prst="bentConnector3">
+            <a:avLst/>
+          </a:prstGeom>
+          <a:ln w="15875">
+            <a:solidFill>
+              <a:srgbClr val="1A2238"/>
+            </a:solidFill>
+          </a:ln>
+          <a:effectLst/>
+        </p:spPr>
+        <p:style>
+          <a:lnRef idx="2">
+            <a:schemeClr val="accent1"/>
+          </a:lnRef>
+          <a:fillRef idx="0">
+            <a:schemeClr val="accent1"/>
+          </a:fillRef>
+          <a:effectRef idx="1">
+            <a:schemeClr val="accent1"/>
+          </a:effectRef>
+          <a:fontRef idx="minor">
+            <a:schemeClr val="tx1"/>
+          </a:fontRef>
+        </p:style>
+      </p:cxnSp>
+      <p:cxnSp>
+        <p:nvCxnSpPr>
+          <p:cNvPr id="28" name="Connector 27"/>
+          <p:cNvCxnSpPr/>
+          <p:nvPr/>
+        </p:nvCxnSpPr>
+        <p:spPr>
+          <a:xfrm>
+            <a:off x="6303873" y="2889504"/>
+            <a:ext cx="0" cy="128016"/>
+          </a:xfrm>
+          <a:prstGeom prst="bentConnector3">
+            <a:avLst/>
+          </a:prstGeom>
+          <a:ln w="15875">
+            <a:solidFill>
+              <a:srgbClr val="1A2238"/>
+            </a:solidFill>
+          </a:ln>
+          <a:effectLst/>
+        </p:spPr>
+        <p:style>
+          <a:lnRef idx="2">
+            <a:schemeClr val="accent1"/>
+          </a:lnRef>
+          <a:fillRef idx="0">
+            <a:schemeClr val="accent1"/>
+          </a:fillRef>
+          <a:effectRef idx="1">
+            <a:schemeClr val="accent1"/>
+          </a:effectRef>
+          <a:fontRef idx="minor">
+            <a:schemeClr val="tx1"/>
+          </a:fontRef>
+        </p:style>
+      </p:cxnSp>
+      <p:sp>
+        <p:nvSpPr>
+          <p:cNvPr id="29" name="TextBox 28"/>
+          <p:cNvSpPr txBox="1"/>
+          <p:nvPr/>
+        </p:nvSpPr>
+        <p:spPr>
+          <a:xfrm>
+            <a:off x="6395313" y="2761488"/>
+            <a:ext cx="4206240" cy="365760"/>
+          </a:xfrm>
+          <a:prstGeom prst="rect">
+            <a:avLst/>
+          </a:prstGeom>
+          <a:noFill/>
+        </p:spPr>
+        <p:txBody>
+          <a:bodyPr wrap="square">
+            <a:spAutoFit/>
+          </a:bodyPr>
+          <a:lstStyle/>
+          <a:p>
+            <a:pPr algn="l"/>
+            <a:r>
+              <a:rPr sz="1200" b="0">
+                <a:solidFill>
+                  <a:srgbClr val="1A2238"/>
+                </a:solidFill>
+              </a:rPr>
+              <a:t>orthopyroxene  0.10  |  p 0.63</a:t>
+            </a:r>
+          </a:p>
+        </p:txBody>
+      </p:sp>
+      <p:sp>
+        <p:nvSpPr>
+          <p:cNvPr id="30" name="Rounded Rectangle 29"/>
+          <p:cNvSpPr/>
+          <p:nvPr/>
+        </p:nvSpPr>
+        <p:spPr>
+          <a:xfrm>
+            <a:off x="5715000" y="3118104"/>
+            <a:ext cx="168249" cy="292608"/>
+          </a:xfrm>
+          <a:prstGeom prst="roundRect">
+            <a:avLst/>
+          </a:prstGeom>
+          <a:solidFill>
+            <a:srgbClr val="2A9D8F"/>
+          </a:solidFill>
+          <a:ln>
+            <a:noFill/>
+          </a:ln>
+          <a:effectLst/>
+        </p:spPr>
+        <p:style>
+          <a:lnRef idx="1">
+            <a:schemeClr val="accent1"/>
+          </a:lnRef>
+          <a:fillRef idx="3">
+            <a:schemeClr val="accent1"/>
+          </a:fillRef>
+          <a:effectRef idx="2">
+            <a:schemeClr val="accent1"/>
+          </a:effectRef>
+          <a:fontRef idx="minor">
+            <a:schemeClr val="lt1"/>
+          </a:fontRef>
+        </p:style>
+        <p:txBody>
+          <a:bodyPr rtlCol="0" anchor="ctr"/>
+          <a:lstStyle/>
+          <a:p>
+            <a:pPr algn="ctr"/>
+          </a:p>
+        </p:txBody>
+      </p:sp>
+      <p:cxnSp>
+        <p:nvCxnSpPr>
+          <p:cNvPr id="31" name="Connector 30"/>
+          <p:cNvCxnSpPr/>
+          <p:nvPr/>
+        </p:nvCxnSpPr>
+        <p:spPr>
+          <a:xfrm>
+            <a:off x="5799124" y="3264408"/>
+            <a:ext cx="168250" cy="0"/>
+          </a:xfrm>
+          <a:prstGeom prst="bentConnector3">
+            <a:avLst/>
+          </a:prstGeom>
+          <a:ln w="15875">
+            <a:solidFill>
+              <a:srgbClr val="1A2238"/>
+            </a:solidFill>
+          </a:ln>
+          <a:effectLst/>
+        </p:spPr>
+        <p:style>
+          <a:lnRef idx="2">
+            <a:schemeClr val="accent1"/>
+          </a:lnRef>
+          <a:fillRef idx="0">
+            <a:schemeClr val="accent1"/>
+          </a:fillRef>
+          <a:effectRef idx="1">
+            <a:schemeClr val="accent1"/>
+          </a:effectRef>
+          <a:fontRef idx="minor">
+            <a:schemeClr val="tx1"/>
+          </a:fontRef>
+        </p:style>
+      </p:cxnSp>
+      <p:cxnSp>
+        <p:nvCxnSpPr>
+          <p:cNvPr id="32" name="Connector 31"/>
+          <p:cNvCxnSpPr/>
+          <p:nvPr/>
+        </p:nvCxnSpPr>
+        <p:spPr>
+          <a:xfrm>
+            <a:off x="5799124" y="3200400"/>
+            <a:ext cx="0" cy="128016"/>
+          </a:xfrm>
+          <a:prstGeom prst="bentConnector3">
+            <a:avLst/>
+          </a:prstGeom>
+          <a:ln w="15875">
+            <a:solidFill>
+              <a:srgbClr val="1A2238"/>
+            </a:solidFill>
+          </a:ln>
+          <a:effectLst/>
+        </p:spPr>
+        <p:style>
+          <a:lnRef idx="2">
+            <a:schemeClr val="accent1"/>
+          </a:lnRef>
+          <a:fillRef idx="0">
+            <a:schemeClr val="accent1"/>
+          </a:fillRef>
+          <a:effectRef idx="1">
+            <a:schemeClr val="accent1"/>
+          </a:effectRef>
+          <a:fontRef idx="minor">
+            <a:schemeClr val="tx1"/>
+          </a:fontRef>
+        </p:style>
+      </p:cxnSp>
+      <p:cxnSp>
+        <p:nvCxnSpPr>
+          <p:cNvPr id="33" name="Connector 32"/>
+          <p:cNvCxnSpPr/>
+          <p:nvPr/>
+        </p:nvCxnSpPr>
+        <p:spPr>
+          <a:xfrm>
+            <a:off x="5967374" y="3200400"/>
+            <a:ext cx="0" cy="128016"/>
+          </a:xfrm>
+          <a:prstGeom prst="bentConnector3">
+            <a:avLst/>
+          </a:prstGeom>
+          <a:ln w="15875">
+            <a:solidFill>
+              <a:srgbClr val="1A2238"/>
+            </a:solidFill>
+          </a:ln>
+          <a:effectLst/>
+        </p:spPr>
+        <p:style>
+          <a:lnRef idx="2">
+            <a:schemeClr val="accent1"/>
+          </a:lnRef>
+          <a:fillRef idx="0">
+            <a:schemeClr val="accent1"/>
+          </a:fillRef>
+          <a:effectRef idx="1">
+            <a:schemeClr val="accent1"/>
+          </a:effectRef>
+          <a:fontRef idx="minor">
+            <a:schemeClr val="tx1"/>
+          </a:fontRef>
+        </p:style>
+      </p:cxnSp>
+      <p:sp>
+        <p:nvSpPr>
+          <p:cNvPr id="34" name="TextBox 33"/>
+          <p:cNvSpPr txBox="1"/>
+          <p:nvPr/>
+        </p:nvSpPr>
+        <p:spPr>
+          <a:xfrm>
+            <a:off x="6058814" y="3072384"/>
+            <a:ext cx="4206240" cy="365760"/>
+          </a:xfrm>
+          <a:prstGeom prst="rect">
+            <a:avLst/>
+          </a:prstGeom>
+          <a:noFill/>
+        </p:spPr>
+        <p:txBody>
+          <a:bodyPr wrap="square">
+            <a:spAutoFit/>
+          </a:bodyPr>
+          <a:lstStyle/>
+          <a:p>
+            <a:pPr algn="l"/>
+            <a:r>
+              <a:rPr sz="1200" b="0">
+                <a:solidFill>
+                  <a:srgbClr val="1A2238"/>
+                </a:solidFill>
+              </a:rPr>
+              <a:t>magnetite  0.04  |  p 0.95</a:t>
+            </a:r>
+          </a:p>
+        </p:txBody>
+      </p:sp>
+      <p:sp>
+        <p:nvSpPr>
+          <p:cNvPr id="35" name="Rounded Rectangle 34"/>
+          <p:cNvSpPr/>
+          <p:nvPr/>
+        </p:nvSpPr>
+        <p:spPr>
+          <a:xfrm>
+            <a:off x="5486400" y="3657600"/>
+            <a:ext cx="6309360" cy="2331720"/>
+          </a:xfrm>
+          <a:prstGeom prst="roundRect">
+            <a:avLst/>
+          </a:prstGeom>
+          <a:solidFill>
+            <a:srgbClr val="EAE8FB"/>
+          </a:solidFill>
+          <a:ln w="25400">
+            <a:solidFill>
+              <a:srgbClr val="6C5CE7"/>
+            </a:solidFill>
+          </a:ln>
+          <a:effectLst/>
+        </p:spPr>
+        <p:style>
+          <a:lnRef idx="1">
+            <a:schemeClr val="accent1"/>
+          </a:lnRef>
+          <a:fillRef idx="3">
+            <a:schemeClr val="accent1"/>
+          </a:fillRef>
+          <a:effectRef idx="2">
+            <a:schemeClr val="accent1"/>
+          </a:effectRef>
+          <a:fontRef idx="minor">
+            <a:schemeClr val="lt1"/>
+          </a:fontRef>
+        </p:style>
+        <p:txBody>
+          <a:bodyPr rtlCol="0" anchor="ctr" wrap="square"/>
+          <a:lstStyle/>
+          <a:p>
+            <a:pPr algn="ctr"/>
+            <a:r>
+              <a:rPr sz="1300" b="1">
+                <a:solidFill>
+                  <a:srgbClr val="1A2238"/>
+                </a:solidFill>
+              </a:rPr>
+              <a:t/>
+            </a:r>
+          </a:p>
+        </p:txBody>
+      </p:sp>
+      <p:sp>
+        <p:nvSpPr>
+          <p:cNvPr id="36" name="TextBox 35"/>
+          <p:cNvSpPr txBox="1"/>
+          <p:nvPr/>
+        </p:nvSpPr>
+        <p:spPr>
+          <a:xfrm>
+            <a:off x="5669280" y="3703320"/>
+            <a:ext cx="5943600" cy="731520"/>
+          </a:xfrm>
+          <a:prstGeom prst="rect">
+            <a:avLst/>
+          </a:prstGeom>
+          <a:noFill/>
+        </p:spPr>
+        <p:txBody>
+          <a:bodyPr wrap="square">
+            <a:spAutoFit/>
+          </a:bodyPr>
+          <a:lstStyle/>
+          <a:p>
+            <a:pPr algn="l"/>
+            <a:r>
+              <a:rPr sz="1200" b="0">
+                <a:solidFill>
+                  <a:srgbClr val="6C5CE7"/>
+                </a:solidFill>
+              </a:rPr>
+              <a:t>CondHead -&gt; storage conditions (per-axis GMM; P and H2O are sampled axes, T is the derived phenocryst-window endpoint temperature)</a:t>
+            </a:r>
+          </a:p>
+        </p:txBody>
+      </p:sp>
+      <p:sp>
+        <p:nvSpPr>
+          <p:cNvPr id="37" name="Freeform 36"/>
+          <p:cNvSpPr/>
+          <p:nvPr/>
+        </p:nvSpPr>
+        <p:spPr>
+          <a:xfrm>
+            <a:off x="5806440" y="4434840"/>
+            <a:ext cx="1737360" cy="960119"/>
+          </a:xfrm>
+          <a:custGeom>
+            <a:avLst/>
+            <a:gdLst/>
+            <a:ahLst/>
+            <a:cxnLst/>
+            <a:rect l="l" t="t" r="r" b="b"/>
+            <a:pathLst>
+              <a:path w="1737360" h="960119">
+                <a:moveTo>
+                  <a:pt x="0" y="960119"/>
+                </a:moveTo>
+                <a:lnTo>
+                  <a:pt x="0" y="952846"/>
+                </a:lnTo>
+                <a:lnTo>
+                  <a:pt x="36195" y="949286"/>
+                </a:lnTo>
+                <a:lnTo>
+                  <a:pt x="72390" y="944254"/>
+                </a:lnTo>
+                <a:lnTo>
+                  <a:pt x="108585" y="937276"/>
+                </a:lnTo>
+                <a:lnTo>
+                  <a:pt x="144780" y="927782"/>
+                </a:lnTo>
+                <a:lnTo>
+                  <a:pt x="180975" y="915112"/>
+                </a:lnTo>
+                <a:lnTo>
+                  <a:pt x="217169" y="898531"/>
+                </a:lnTo>
+                <a:lnTo>
+                  <a:pt x="253365" y="877258"/>
+                </a:lnTo>
+                <a:lnTo>
+                  <a:pt x="289559" y="850511"/>
+                </a:lnTo>
+                <a:lnTo>
+                  <a:pt x="325755" y="817567"/>
+                </a:lnTo>
+                <a:lnTo>
+                  <a:pt x="361949" y="777839"/>
+                </a:lnTo>
+                <a:lnTo>
+                  <a:pt x="398145" y="730958"/>
+                </a:lnTo>
+                <a:lnTo>
+                  <a:pt x="434339" y="676862"/>
+                </a:lnTo>
+                <a:lnTo>
+                  <a:pt x="470535" y="615883"/>
+                </a:lnTo>
+                <a:lnTo>
+                  <a:pt x="506730" y="548809"/>
+                </a:lnTo>
+                <a:lnTo>
+                  <a:pt x="542925" y="476928"/>
+                </a:lnTo>
+                <a:lnTo>
+                  <a:pt x="579119" y="402028"/>
+                </a:lnTo>
+                <a:lnTo>
+                  <a:pt x="615315" y="326353"/>
+                </a:lnTo>
+                <a:lnTo>
+                  <a:pt x="651510" y="252517"/>
+                </a:lnTo>
+                <a:lnTo>
+                  <a:pt x="687705" y="183360"/>
+                </a:lnTo>
+                <a:lnTo>
+                  <a:pt x="723900" y="121779"/>
+                </a:lnTo>
+                <a:lnTo>
+                  <a:pt x="760094" y="70526"/>
+                </a:lnTo>
+                <a:lnTo>
+                  <a:pt x="796290" y="32010"/>
+                </a:lnTo>
+                <a:lnTo>
+                  <a:pt x="832484" y="8104"/>
+                </a:lnTo>
+                <a:lnTo>
+                  <a:pt x="868680" y="0"/>
+                </a:lnTo>
+                <a:lnTo>
+                  <a:pt x="904874" y="8104"/>
+                </a:lnTo>
+                <a:lnTo>
+                  <a:pt x="941070" y="32010"/>
+                </a:lnTo>
+                <a:lnTo>
+                  <a:pt x="977264" y="70526"/>
+                </a:lnTo>
+                <a:lnTo>
+                  <a:pt x="1013460" y="121779"/>
+                </a:lnTo>
+                <a:lnTo>
+                  <a:pt x="1049654" y="183360"/>
+                </a:lnTo>
+                <a:lnTo>
+                  <a:pt x="1085850" y="252517"/>
+                </a:lnTo>
+                <a:lnTo>
+                  <a:pt x="1122044" y="326353"/>
+                </a:lnTo>
+                <a:lnTo>
+                  <a:pt x="1158240" y="402028"/>
+                </a:lnTo>
+                <a:lnTo>
+                  <a:pt x="1194435" y="476928"/>
+                </a:lnTo>
+                <a:lnTo>
+                  <a:pt x="1230630" y="548809"/>
+                </a:lnTo>
+                <a:lnTo>
+                  <a:pt x="1266824" y="615883"/>
+                </a:lnTo>
+                <a:lnTo>
+                  <a:pt x="1303019" y="676862"/>
+                </a:lnTo>
+                <a:lnTo>
+                  <a:pt x="1339215" y="730958"/>
+                </a:lnTo>
+                <a:lnTo>
+                  <a:pt x="1375409" y="777839"/>
+                </a:lnTo>
+                <a:lnTo>
+                  <a:pt x="1411605" y="817567"/>
+                </a:lnTo>
+                <a:lnTo>
+                  <a:pt x="1447799" y="850511"/>
+                </a:lnTo>
+                <a:lnTo>
+                  <a:pt x="1483995" y="877258"/>
+                </a:lnTo>
+                <a:lnTo>
+                  <a:pt x="1520189" y="898531"/>
+                </a:lnTo>
+                <a:lnTo>
+                  <a:pt x="1556384" y="915112"/>
+                </a:lnTo>
+                <a:lnTo>
+                  <a:pt x="1592580" y="927782"/>
+                </a:lnTo>
+                <a:lnTo>
+                  <a:pt x="1628775" y="937276"/>
+                </a:lnTo>
+                <a:lnTo>
+                  <a:pt x="1664969" y="944254"/>
+                </a:lnTo>
+                <a:lnTo>
+                  <a:pt x="1701165" y="949286"/>
+                </a:lnTo>
+                <a:lnTo>
+                  <a:pt x="1737360" y="952846"/>
+                </a:lnTo>
+                <a:lnTo>
+                  <a:pt x="1737360" y="960119"/>
+                </a:lnTo>
+                <a:close/>
+              </a:path>
+            </a:pathLst>
+          </a:custGeom>
+          <a:solidFill>
+            <a:srgbClr val="C4D1FF"/>
+          </a:solidFill>
+          <a:ln w="25400">
+            <a:solidFill>
+              <a:srgbClr val="2E5BFF"/>
+            </a:solidFill>
+          </a:ln>
+          <a:effectLst/>
+        </p:spPr>
+        <p:style>
+          <a:lnRef idx="1">
+            <a:schemeClr val="accent1"/>
+          </a:lnRef>
+          <a:fillRef idx="3">
+            <a:schemeClr val="accent1"/>
+          </a:fillRef>
+          <a:effectRef idx="2">
+            <a:schemeClr val="accent1"/>
+          </a:effectRef>
+          <a:fontRef idx="minor">
+            <a:schemeClr val="lt1"/>
+          </a:fontRef>
+        </p:style>
+        <p:txBody>
+          <a:bodyPr rtlCol="0" anchor="ctr"/>
+          <a:lstStyle/>
+          <a:p>
+            <a:pPr algn="ctr"/>
+          </a:p>
+        </p:txBody>
+      </p:sp>
+      <p:cxnSp>
+        <p:nvCxnSpPr>
+          <p:cNvPr id="38" name="Connector 37"/>
+          <p:cNvCxnSpPr/>
+          <p:nvPr/>
+        </p:nvCxnSpPr>
+        <p:spPr>
+          <a:xfrm>
+            <a:off x="5806440" y="5394959"/>
+            <a:ext cx="1737360" cy="0"/>
+          </a:xfrm>
+          <a:prstGeom prst="bentConnector3">
+            <a:avLst/>
+          </a:prstGeom>
+          <a:ln w="12700">
+            <a:solidFill>
+              <a:srgbClr val="8A93A3"/>
+            </a:solidFill>
+          </a:ln>
+          <a:effectLst/>
+        </p:spPr>
+        <p:style>
+          <a:lnRef idx="2">
+            <a:schemeClr val="accent1"/>
+          </a:lnRef>
+          <a:fillRef idx="0">
+            <a:schemeClr val="accent1"/>
+          </a:fillRef>
+          <a:effectRef idx="1">
+            <a:schemeClr val="accent1"/>
+          </a:effectRef>
+          <a:fontRef idx="minor">
+            <a:schemeClr val="tx1"/>
+          </a:fontRef>
+        </p:style>
+      </p:cxnSp>
+      <p:sp>
+        <p:nvSpPr>
+          <p:cNvPr id="39" name="TextBox 38"/>
+          <p:cNvSpPr txBox="1"/>
+          <p:nvPr/>
+        </p:nvSpPr>
+        <p:spPr>
+          <a:xfrm>
+            <a:off x="5623559" y="5440679"/>
+            <a:ext cx="2103120" cy="365760"/>
+          </a:xfrm>
+          <a:prstGeom prst="rect">
+            <a:avLst/>
+          </a:prstGeom>
+          <a:noFill/>
+        </p:spPr>
+        <p:txBody>
+          <a:bodyPr wrap="square">
+            <a:spAutoFit/>
+          </a:bodyPr>
+          <a:lstStyle/>
+          <a:p>
+            <a:pPr algn="ctr"/>
+            <a:r>
+              <a:rPr sz="1200" b="1">
+                <a:solidFill>
+                  <a:srgbClr val="1A2238"/>
+                </a:solidFill>
+              </a:rPr>
+              <a:t>T  1010 +/- 40 C</a:t>
+            </a:r>
+          </a:p>
+        </p:txBody>
+      </p:sp>
+      <p:sp>
+        <p:nvSpPr>
+          <p:cNvPr id="40" name="Freeform 39"/>
+          <p:cNvSpPr/>
+          <p:nvPr/>
+        </p:nvSpPr>
+        <p:spPr>
+          <a:xfrm>
+            <a:off x="7772400" y="4434840"/>
+            <a:ext cx="1737360" cy="960119"/>
+          </a:xfrm>
+          <a:custGeom>
+            <a:avLst/>
+            <a:gdLst/>
+            <a:ahLst/>
+            <a:cxnLst/>
+            <a:rect l="l" t="t" r="r" b="b"/>
+            <a:pathLst>
+              <a:path w="1737360" h="960119">
+                <a:moveTo>
+                  <a:pt x="0" y="960119"/>
+                </a:moveTo>
+                <a:lnTo>
+                  <a:pt x="0" y="939852"/>
+                </a:lnTo>
+                <a:lnTo>
+                  <a:pt x="36195" y="932353"/>
+                </a:lnTo>
+                <a:lnTo>
+                  <a:pt x="72390" y="922586"/>
+                </a:lnTo>
+                <a:lnTo>
+                  <a:pt x="108585" y="910058"/>
+                </a:lnTo>
+                <a:lnTo>
+                  <a:pt x="144780" y="894237"/>
+                </a:lnTo>
+                <a:lnTo>
+                  <a:pt x="180974" y="874570"/>
+                </a:lnTo>
+                <a:lnTo>
+                  <a:pt x="217170" y="850511"/>
+                </a:lnTo>
+                <a:lnTo>
+                  <a:pt x="253365" y="821553"/>
+                </a:lnTo>
+                <a:lnTo>
+                  <a:pt x="289560" y="787277"/>
+                </a:lnTo>
+                <a:lnTo>
+                  <a:pt x="325754" y="747391"/>
+                </a:lnTo>
+                <a:lnTo>
+                  <a:pt x="361950" y="701784"/>
+                </a:lnTo>
+                <a:lnTo>
+                  <a:pt x="398145" y="650575"/>
+                </a:lnTo>
+                <a:lnTo>
+                  <a:pt x="434340" y="594149"/>
+                </a:lnTo>
+                <a:lnTo>
+                  <a:pt x="470534" y="533196"/>
+                </a:lnTo>
+                <a:lnTo>
+                  <a:pt x="506730" y="468718"/>
+                </a:lnTo>
+                <a:lnTo>
+                  <a:pt x="542925" y="402028"/>
+                </a:lnTo>
+                <a:lnTo>
+                  <a:pt x="579120" y="334721"/>
+                </a:lnTo>
+                <a:lnTo>
+                  <a:pt x="615315" y="268623"/>
+                </a:lnTo>
+                <a:lnTo>
+                  <a:pt x="651510" y="205713"/>
+                </a:lnTo>
+                <a:lnTo>
+                  <a:pt x="687705" y="148031"/>
+                </a:lnTo>
+                <a:lnTo>
+                  <a:pt x="723900" y="97571"/>
+                </a:lnTo>
+                <a:lnTo>
+                  <a:pt x="760095" y="56167"/>
+                </a:lnTo>
+                <a:lnTo>
+                  <a:pt x="796290" y="25381"/>
+                </a:lnTo>
+                <a:lnTo>
+                  <a:pt x="832485" y="6409"/>
+                </a:lnTo>
+                <a:lnTo>
+                  <a:pt x="868680" y="0"/>
+                </a:lnTo>
+                <a:lnTo>
+                  <a:pt x="904875" y="6409"/>
+                </a:lnTo>
+                <a:lnTo>
+                  <a:pt x="941070" y="25381"/>
+                </a:lnTo>
+                <a:lnTo>
+                  <a:pt x="977265" y="56167"/>
+                </a:lnTo>
+                <a:lnTo>
+                  <a:pt x="1013460" y="97571"/>
+                </a:lnTo>
+                <a:lnTo>
+                  <a:pt x="1049655" y="148031"/>
+                </a:lnTo>
+                <a:lnTo>
+                  <a:pt x="1085850" y="205713"/>
+                </a:lnTo>
+                <a:lnTo>
+                  <a:pt x="1122045" y="268623"/>
+                </a:lnTo>
+                <a:lnTo>
+                  <a:pt x="1158240" y="334721"/>
+                </a:lnTo>
+                <a:lnTo>
+                  <a:pt x="1194435" y="402028"/>
+                </a:lnTo>
+                <a:lnTo>
+                  <a:pt x="1230630" y="468718"/>
+                </a:lnTo>
+                <a:lnTo>
+                  <a:pt x="1266825" y="533196"/>
+                </a:lnTo>
+                <a:lnTo>
+                  <a:pt x="1303020" y="594149"/>
+                </a:lnTo>
+                <a:lnTo>
+                  <a:pt x="1339215" y="650575"/>
+                </a:lnTo>
+                <a:lnTo>
+                  <a:pt x="1375410" y="701784"/>
+                </a:lnTo>
+                <a:lnTo>
+                  <a:pt x="1411605" y="747391"/>
+                </a:lnTo>
+                <a:lnTo>
+                  <a:pt x="1447800" y="787277"/>
+                </a:lnTo>
+                <a:lnTo>
+                  <a:pt x="1483995" y="821553"/>
+                </a:lnTo>
+                <a:lnTo>
+                  <a:pt x="1520190" y="850511"/>
+                </a:lnTo>
+                <a:lnTo>
+                  <a:pt x="1556385" y="874570"/>
+                </a:lnTo>
+                <a:lnTo>
+                  <a:pt x="1592580" y="894237"/>
+                </a:lnTo>
+                <a:lnTo>
+                  <a:pt x="1628775" y="910058"/>
+                </a:lnTo>
+                <a:lnTo>
+                  <a:pt x="1664970" y="922586"/>
+                </a:lnTo>
+                <a:lnTo>
+                  <a:pt x="1701165" y="932353"/>
+                </a:lnTo>
+                <a:lnTo>
+                  <a:pt x="1737360" y="939852"/>
+                </a:lnTo>
+                <a:lnTo>
+                  <a:pt x="1737360" y="960119"/>
+                </a:lnTo>
+                <a:close/>
+              </a:path>
+            </a:pathLst>
+          </a:custGeom>
+          <a:solidFill>
+            <a:srgbClr val="BCEAE5"/>
+          </a:solidFill>
+          <a:ln w="25400">
+            <a:solidFill>
+              <a:srgbClr val="12B5A5"/>
+            </a:solidFill>
+          </a:ln>
+          <a:effectLst/>
+        </p:spPr>
+        <p:style>
+          <a:lnRef idx="1">
+            <a:schemeClr val="accent1"/>
+          </a:lnRef>
+          <a:fillRef idx="3">
+            <a:schemeClr val="accent1"/>
+          </a:fillRef>
+          <a:effectRef idx="2">
+            <a:schemeClr val="accent1"/>
+          </a:effectRef>
+          <a:fontRef idx="minor">
+            <a:schemeClr val="lt1"/>
+          </a:fontRef>
+        </p:style>
+        <p:txBody>
+          <a:bodyPr rtlCol="0" anchor="ctr"/>
+          <a:lstStyle/>
+          <a:p>
+            <a:pPr algn="ctr"/>
+          </a:p>
+        </p:txBody>
+      </p:sp>
+      <p:cxnSp>
+        <p:nvCxnSpPr>
+          <p:cNvPr id="41" name="Connector 40"/>
+          <p:cNvCxnSpPr/>
+          <p:nvPr/>
+        </p:nvCxnSpPr>
+        <p:spPr>
+          <a:xfrm>
+            <a:off x="7772400" y="5394959"/>
+            <a:ext cx="1737360" cy="0"/>
+          </a:xfrm>
+          <a:prstGeom prst="bentConnector3">
+            <a:avLst/>
+          </a:prstGeom>
+          <a:ln w="12700">
+            <a:solidFill>
+              <a:srgbClr val="8A93A3"/>
+            </a:solidFill>
+          </a:ln>
+          <a:effectLst/>
+        </p:spPr>
+        <p:style>
+          <a:lnRef idx="2">
+            <a:schemeClr val="accent1"/>
+          </a:lnRef>
+          <a:fillRef idx="0">
+            <a:schemeClr val="accent1"/>
+          </a:fillRef>
+          <a:effectRef idx="1">
+            <a:schemeClr val="accent1"/>
+          </a:effectRef>
+          <a:fontRef idx="minor">
+            <a:schemeClr val="tx1"/>
+          </a:fontRef>
+        </p:style>
+      </p:cxnSp>
+      <p:sp>
+        <p:nvSpPr>
+          <p:cNvPr id="42" name="TextBox 41"/>
+          <p:cNvSpPr txBox="1"/>
+          <p:nvPr/>
+        </p:nvSpPr>
+        <p:spPr>
+          <a:xfrm>
+            <a:off x="7589520" y="5440679"/>
+            <a:ext cx="2103120" cy="365760"/>
+          </a:xfrm>
+          <a:prstGeom prst="rect">
+            <a:avLst/>
+          </a:prstGeom>
+          <a:noFill/>
+        </p:spPr>
+        <p:txBody>
+          <a:bodyPr wrap="square">
+            <a:spAutoFit/>
+          </a:bodyPr>
+          <a:lstStyle/>
+          <a:p>
+            <a:pPr algn="ctr"/>
+            <a:r>
+              <a:rPr sz="1200" b="1">
+                <a:solidFill>
+                  <a:srgbClr val="1A2238"/>
+                </a:solidFill>
+              </a:rPr>
+              <a:t>P  4.8 +/- 1.9 kbar</a:t>
+            </a:r>
+          </a:p>
+        </p:txBody>
+      </p:sp>
+      <p:sp>
+        <p:nvSpPr>
+          <p:cNvPr id="43" name="Freeform 42"/>
+          <p:cNvSpPr/>
+          <p:nvPr/>
+        </p:nvSpPr>
+        <p:spPr>
+          <a:xfrm>
+            <a:off x="9738360" y="4434840"/>
+            <a:ext cx="1783080" cy="960119"/>
+          </a:xfrm>
+          <a:custGeom>
+            <a:avLst/>
+            <a:gdLst/>
+            <a:ahLst/>
+            <a:cxnLst/>
+            <a:rect l="l" t="t" r="r" b="b"/>
+            <a:pathLst>
+              <a:path w="1783080" h="960119">
+                <a:moveTo>
+                  <a:pt x="0" y="960119"/>
+                </a:moveTo>
+                <a:lnTo>
+                  <a:pt x="0" y="954380"/>
+                </a:lnTo>
+                <a:lnTo>
+                  <a:pt x="37147" y="949181"/>
+                </a:lnTo>
+                <a:lnTo>
+                  <a:pt x="74295" y="940156"/>
+                </a:lnTo>
+                <a:lnTo>
+                  <a:pt x="111442" y="925235"/>
+                </a:lnTo>
+                <a:lnTo>
+                  <a:pt x="148590" y="901749"/>
+                </a:lnTo>
+                <a:lnTo>
+                  <a:pt x="185737" y="866600"/>
+                </a:lnTo>
+                <a:lnTo>
+                  <a:pt x="222885" y="816648"/>
+                </a:lnTo>
+                <a:lnTo>
+                  <a:pt x="260032" y="749364"/>
+                </a:lnTo>
+                <a:lnTo>
+                  <a:pt x="297180" y="663673"/>
+                </a:lnTo>
+                <a:lnTo>
+                  <a:pt x="334327" y="560845"/>
+                </a:lnTo>
+                <a:lnTo>
+                  <a:pt x="371475" y="445176"/>
+                </a:lnTo>
+                <a:lnTo>
+                  <a:pt x="408622" y="324178"/>
+                </a:lnTo>
+                <a:lnTo>
+                  <a:pt x="445770" y="208043"/>
+                </a:lnTo>
+                <a:lnTo>
+                  <a:pt x="482917" y="108354"/>
+                </a:lnTo>
+                <a:lnTo>
+                  <a:pt x="520065" y="36181"/>
+                </a:lnTo>
+                <a:lnTo>
+                  <a:pt x="557212" y="0"/>
+                </a:lnTo>
+                <a:lnTo>
+                  <a:pt x="594360" y="3933"/>
+                </a:lnTo>
+                <a:lnTo>
+                  <a:pt x="631507" y="46793"/>
+                </a:lnTo>
+                <a:lnTo>
+                  <a:pt x="668655" y="122197"/>
+                </a:lnTo>
+                <a:lnTo>
+                  <a:pt x="705802" y="219711"/>
+                </a:lnTo>
+                <a:lnTo>
+                  <a:pt x="742950" y="326710"/>
+                </a:lnTo>
+                <a:lnTo>
+                  <a:pt x="780097" y="430457"/>
+                </a:lnTo>
+                <a:lnTo>
+                  <a:pt x="817245" y="519915"/>
+                </a:lnTo>
+                <a:lnTo>
+                  <a:pt x="854392" y="586970"/>
+                </a:lnTo>
+                <a:lnTo>
+                  <a:pt x="891540" y="626939"/>
+                </a:lnTo>
+                <a:lnTo>
+                  <a:pt x="928687" y="638485"/>
+                </a:lnTo>
+                <a:lnTo>
+                  <a:pt x="965835" y="623138"/>
+                </a:lnTo>
+                <a:lnTo>
+                  <a:pt x="1002982" y="584667"/>
+                </a:lnTo>
+                <a:lnTo>
+                  <a:pt x="1040130" y="528460"/>
+                </a:lnTo>
+                <a:lnTo>
+                  <a:pt x="1077277" y="460988"/>
+                </a:lnTo>
+                <a:lnTo>
+                  <a:pt x="1114425" y="389315"/>
+                </a:lnTo>
+                <a:lnTo>
+                  <a:pt x="1151572" y="320622"/>
+                </a:lnTo>
+                <a:lnTo>
+                  <a:pt x="1188720" y="261689"/>
+                </a:lnTo>
+                <a:lnTo>
+                  <a:pt x="1225867" y="218338"/>
+                </a:lnTo>
+                <a:lnTo>
+                  <a:pt x="1263015" y="194904"/>
+                </a:lnTo>
+                <a:lnTo>
+                  <a:pt x="1300162" y="193807"/>
+                </a:lnTo>
+                <a:lnTo>
+                  <a:pt x="1337310" y="215337"/>
+                </a:lnTo>
+                <a:lnTo>
+                  <a:pt x="1374457" y="257689"/>
+                </a:lnTo>
+                <a:lnTo>
+                  <a:pt x="1411605" y="317276"/>
+                </a:lnTo>
+                <a:lnTo>
+                  <a:pt x="1448752" y="389265"/>
+                </a:lnTo>
+                <a:lnTo>
+                  <a:pt x="1485900" y="468240"/>
+                </a:lnTo>
+                <a:lnTo>
+                  <a:pt x="1523047" y="548872"/>
+                </a:lnTo>
+                <a:lnTo>
+                  <a:pt x="1560195" y="626495"/>
+                </a:lnTo>
+                <a:lnTo>
+                  <a:pt x="1597342" y="697502"/>
+                </a:lnTo>
+                <a:lnTo>
+                  <a:pt x="1634490" y="759534"/>
+                </a:lnTo>
+                <a:lnTo>
+                  <a:pt x="1671637" y="811463"/>
+                </a:lnTo>
+                <a:lnTo>
+                  <a:pt x="1708785" y="853219"/>
+                </a:lnTo>
+                <a:lnTo>
+                  <a:pt x="1745932" y="885529"/>
+                </a:lnTo>
+                <a:lnTo>
+                  <a:pt x="1783080" y="909618"/>
+                </a:lnTo>
+                <a:lnTo>
+                  <a:pt x="1783080" y="960119"/>
+                </a:lnTo>
+                <a:close/>
+              </a:path>
+            </a:pathLst>
+          </a:custGeom>
+          <a:solidFill>
+            <a:srgbClr val="F8DDC7"/>
+          </a:solidFill>
+          <a:ln w="25400">
+            <a:solidFill>
+              <a:srgbClr val="E8883A"/>
+            </a:solidFill>
+          </a:ln>
+          <a:effectLst/>
+        </p:spPr>
+        <p:style>
+          <a:lnRef idx="1">
+            <a:schemeClr val="accent1"/>
+          </a:lnRef>
+          <a:fillRef idx="3">
+            <a:schemeClr val="accent1"/>
+          </a:fillRef>
+          <a:effectRef idx="2">
+            <a:schemeClr val="accent1"/>
+          </a:effectRef>
+          <a:fontRef idx="minor">
+            <a:schemeClr val="lt1"/>
+          </a:fontRef>
+        </p:style>
+        <p:txBody>
+          <a:bodyPr rtlCol="0" anchor="ctr"/>
+          <a:lstStyle/>
+          <a:p>
+            <a:pPr algn="ctr"/>
+          </a:p>
+        </p:txBody>
+      </p:sp>
+      <p:cxnSp>
+        <p:nvCxnSpPr>
+          <p:cNvPr id="44" name="Connector 43"/>
+          <p:cNvCxnSpPr/>
+          <p:nvPr/>
+        </p:nvCxnSpPr>
+        <p:spPr>
+          <a:xfrm>
+            <a:off x="9738360" y="5394959"/>
+            <a:ext cx="1783080" cy="0"/>
+          </a:xfrm>
+          <a:prstGeom prst="bentConnector3">
+            <a:avLst/>
+          </a:prstGeom>
+          <a:ln w="12700">
+            <a:solidFill>
+              <a:srgbClr val="8A93A3"/>
+            </a:solidFill>
+          </a:ln>
+          <a:effectLst/>
+        </p:spPr>
+        <p:style>
+          <a:lnRef idx="2">
+            <a:schemeClr val="accent1"/>
+          </a:lnRef>
+          <a:fillRef idx="0">
+            <a:schemeClr val="accent1"/>
+          </a:fillRef>
+          <a:effectRef idx="1">
+            <a:schemeClr val="accent1"/>
+          </a:effectRef>
+          <a:fontRef idx="minor">
+            <a:schemeClr val="tx1"/>
+          </a:fontRef>
+        </p:style>
+      </p:cxnSp>
+      <p:sp>
+        <p:nvSpPr>
+          <p:cNvPr id="45" name="TextBox 44"/>
+          <p:cNvSpPr txBox="1"/>
+          <p:nvPr/>
+        </p:nvSpPr>
+        <p:spPr>
+          <a:xfrm>
+            <a:off x="9555480" y="5440679"/>
+            <a:ext cx="2148840" cy="365760"/>
+          </a:xfrm>
+          <a:prstGeom prst="rect">
+            <a:avLst/>
+          </a:prstGeom>
+          <a:noFill/>
+        </p:spPr>
+        <p:txBody>
+          <a:bodyPr wrap="square">
+            <a:spAutoFit/>
+          </a:bodyPr>
+          <a:lstStyle/>
+          <a:p>
+            <a:pPr algn="ctr"/>
+            <a:r>
+              <a:rPr sz="1200" b="1">
+                <a:solidFill>
+                  <a:srgbClr val="1A2238"/>
+                </a:solidFill>
+              </a:rPr>
+              <a:t>H2O  multimodal</a:t>
+            </a:r>
+          </a:p>
+        </p:txBody>
+      </p:sp>
+      <p:sp>
+        <p:nvSpPr>
+          <p:cNvPr id="46" name="TextBox 45"/>
+          <p:cNvSpPr txBox="1"/>
+          <p:nvPr/>
+        </p:nvSpPr>
+        <p:spPr>
+          <a:xfrm>
+            <a:off x="502920" y="6172200"/>
+            <a:ext cx="11247120" cy="731520"/>
+          </a:xfrm>
+          <a:prstGeom prst="rect">
+            <a:avLst/>
+          </a:prstGeom>
+          <a:noFill/>
+        </p:spPr>
+        <p:txBody>
+          <a:bodyPr wrap="square">
+            <a:spAutoFit/>
+          </a:bodyPr>
+          <a:lstStyle/>
+          <a:p>
+            <a:pPr algn="l"/>
+            <a:r>
+              <a:rPr sz="1200" b="0">
+                <a:solidFill>
+                  <a:srgbClr val="8A93A3"/>
+                </a:solidFill>
+              </a:rPr>
+              <a:t>values illustrative -- every phase carries both numbers; faded bars = presence genuinely uncertain (here the amphibole/orthopyroxene either-or: wet-deep grows amp, dry-shallow grows opx). This marginal view is a projection; the primary output is the ranked-scenario view on the next slide.</a:t>
+            </a:r>
+          </a:p>
+        </p:txBody>
+      </p:sp>
+    </p:spTree>
+  </p:cSld>
+  <p:clrMapOvr>
+    <a:masterClrMapping/>
+  </p:clrMapOvr>
+</p:sld>
+</file>
+
+<file path=ppt/slides/slide21.xml><?xml version="1.0" encoding="utf-8"?>
+<p:sld xmlns:a="http://schemas.openxmlformats.org/drawingml/2006/main" xmlns:p="http://schemas.openxmlformats.org/presentationml/2006/main" xmlns:r="http://schemas.openxmlformats.org/officeDocument/2006/relationships">
+  <p:cSld>
+    <p:spTree>
+      <p:nvGrpSpPr>
+        <p:cNvPr id="1" name=""/>
+        <p:cNvGrpSpPr/>
+        <p:nvPr/>
+      </p:nvGrpSpPr>
+      <p:grpSpPr/>
+      <p:sp>
+        <p:nvSpPr>
+          <p:cNvPr id="2" name="TextBox 1"/>
+          <p:cNvSpPr txBox="1"/>
+          <p:nvPr/>
+        </p:nvSpPr>
+        <p:spPr>
+          <a:xfrm>
+            <a:off x="502920" y="274320"/>
+            <a:ext cx="10972800" cy="365760"/>
+          </a:xfrm>
+          <a:prstGeom prst="rect">
+            <a:avLst/>
+          </a:prstGeom>
+          <a:noFill/>
+        </p:spPr>
+        <p:txBody>
+          <a:bodyPr wrap="square">
+            <a:spAutoFit/>
+          </a:bodyPr>
+          <a:lstStyle/>
+          <a:p>
+            <a:pPr algn="l"/>
+            <a:r>
+              <a:rPr sz="1300" b="1">
+                <a:solidFill>
+                  <a:srgbClr val="2E5BFF"/>
+                </a:solidFill>
+              </a:rPr>
+              <a:t>HEADS</a:t>
+            </a:r>
+          </a:p>
+        </p:txBody>
+      </p:sp>
+      <p:sp>
+        <p:nvSpPr>
+          <p:cNvPr id="3" name="TextBox 2"/>
+          <p:cNvSpPr txBox="1"/>
+          <p:nvPr/>
+        </p:nvSpPr>
+        <p:spPr>
+          <a:xfrm>
+            <a:off x="502920" y="603504"/>
+            <a:ext cx="11155680" cy="731520"/>
+          </a:xfrm>
+          <a:prstGeom prst="rect">
+            <a:avLst/>
+          </a:prstGeom>
+          <a:noFill/>
+        </p:spPr>
+        <p:txBody>
+          <a:bodyPr wrap="square">
+            <a:spAutoFit/>
+          </a:bodyPr>
+          <a:lstStyle/>
+          <a:p>
+            <a:pPr algn="l"/>
+            <a:r>
+              <a:rPr sz="2600" b="1">
+                <a:solidFill>
+                  <a:srgbClr val="1A2238"/>
+                </a:solidFill>
+              </a:rPr>
+              <a:t>The coherent answer: ranked scenarios</a:t>
+            </a:r>
+          </a:p>
+        </p:txBody>
+      </p:sp>
+      <p:sp>
+        <p:nvSpPr>
+          <p:cNvPr id="4" name="TextBox 3"/>
+          <p:cNvSpPr txBox="1"/>
+          <p:nvPr/>
+        </p:nvSpPr>
+        <p:spPr>
+          <a:xfrm>
+            <a:off x="502920" y="1051560"/>
+            <a:ext cx="11155680" cy="731520"/>
+          </a:xfrm>
+          <a:prstGeom prst="rect">
+            <a:avLst/>
+          </a:prstGeom>
+          <a:noFill/>
+        </p:spPr>
+        <p:txBody>
+          <a:bodyPr wrap="square">
+            <a:spAutoFit/>
+          </a:bodyPr>
+          <a:lstStyle/>
+          <a:p>
+            <a:pPr algn="l"/>
+            <a:r>
+              <a:rPr sz="1300" b="0">
+                <a:solidFill>
+                  <a:srgbClr val="8A93A3"/>
+                </a:solidFill>
+              </a:rPr>
+              <a:t>the marginal table can't show WHICH minerals trade off; scenarios can -- sample the posterior, cluster by assemblage, rank by weight</a:t>
+            </a:r>
+          </a:p>
+        </p:txBody>
+      </p:sp>
+      <p:sp>
+        <p:nvSpPr>
+          <p:cNvPr id="5" name="Rounded Rectangle 4"/>
+          <p:cNvSpPr/>
+          <p:nvPr/>
+        </p:nvSpPr>
+        <p:spPr>
+          <a:xfrm>
+            <a:off x="640080" y="1783080"/>
+            <a:ext cx="5394960" cy="3291840"/>
+          </a:xfrm>
+          <a:prstGeom prst="roundRect">
+            <a:avLst/>
+          </a:prstGeom>
+          <a:solidFill>
+            <a:srgbClr val="E1F1EF"/>
+          </a:solidFill>
+          <a:ln w="25400">
+            <a:solidFill>
+              <a:srgbClr val="2A9D8F"/>
+            </a:solidFill>
+          </a:ln>
+          <a:effectLst/>
+        </p:spPr>
+        <p:style>
+          <a:lnRef idx="1">
+            <a:schemeClr val="accent1"/>
+          </a:lnRef>
+          <a:fillRef idx="3">
+            <a:schemeClr val="accent1"/>
+          </a:fillRef>
+          <a:effectRef idx="2">
+            <a:schemeClr val="accent1"/>
+          </a:effectRef>
+          <a:fontRef idx="minor">
+            <a:schemeClr val="lt1"/>
+          </a:fontRef>
+        </p:style>
+        <p:txBody>
+          <a:bodyPr rtlCol="0" anchor="ctr" wrap="square"/>
+          <a:lstStyle/>
+          <a:p>
+            <a:pPr algn="ctr"/>
+            <a:r>
+              <a:rPr sz="1400" b="1">
+                <a:solidFill>
+                  <a:srgbClr val="1A2238"/>
+                </a:solidFill>
+              </a:rPr>
+              <a:t>Scenario A -- deep &amp; wet . weight ~45%</a:t>
+            </a:r>
+          </a:p>
+          <a:p>
+            <a:pPr algn="ctr"/>
+            <a:r>
+              <a:rPr sz="1100" b="0">
+                <a:solidFill>
+                  <a:srgbClr val="8A93A3"/>
+                </a:solidFill>
+              </a:rPr>
+              <a:t>P 6-9 kbar   H2O 4-6 wt%   T ~950-990 C</a:t>
+            </a:r>
+          </a:p>
+          <a:p>
+            <a:pPr algn="ctr"/>
+            <a:r>
+              <a:rPr sz="1400" b="1">
+                <a:solidFill>
+                  <a:srgbClr val="1A2238"/>
+                </a:solidFill>
+              </a:rPr>
+              <a:t/>
+            </a:r>
+          </a:p>
+          <a:p>
+            <a:pPr algn="ctr"/>
+            <a:r>
+              <a:rPr sz="1100" b="0">
+                <a:solidFill>
+                  <a:srgbClr val="8A93A3"/>
+                </a:solidFill>
+              </a:rPr>
+              <a:t>phenocrysts (wt% of cargo, sums to 100):</a:t>
+            </a:r>
+          </a:p>
+          <a:p>
+            <a:pPr algn="ctr"/>
+            <a:r>
+              <a:rPr sz="1100" b="0">
+                <a:solidFill>
+                  <a:srgbClr val="8A93A3"/>
+                </a:solidFill>
+              </a:rPr>
+              <a:t>plagioclase 44 +/- 4    clinopyroxene 26 +/- 3</a:t>
+            </a:r>
+          </a:p>
+          <a:p>
+            <a:pPr algn="ctr"/>
+            <a:r>
+              <a:rPr sz="1100" b="0">
+                <a:solidFill>
+                  <a:srgbClr val="8A93A3"/>
+                </a:solidFill>
+              </a:rPr>
+              <a:t>amphibole 18 +/- 4      Fe-Ti oxides 12 +/- 2</a:t>
+            </a:r>
+          </a:p>
+        </p:txBody>
+      </p:sp>
+      <p:sp>
+        <p:nvSpPr>
+          <p:cNvPr id="6" name="Rounded Rectangle 5"/>
+          <p:cNvSpPr/>
+          <p:nvPr/>
+        </p:nvSpPr>
+        <p:spPr>
+          <a:xfrm>
+            <a:off x="6309360" y="1783080"/>
+            <a:ext cx="5394960" cy="3291840"/>
+          </a:xfrm>
+          <a:prstGeom prst="roundRect">
+            <a:avLst/>
+          </a:prstGeom>
+          <a:solidFill>
+            <a:srgbClr val="DDF4F2"/>
+          </a:solidFill>
+          <a:ln w="25400">
+            <a:solidFill>
+              <a:srgbClr val="12B5A5"/>
+            </a:solidFill>
+          </a:ln>
+          <a:effectLst/>
+        </p:spPr>
+        <p:style>
+          <a:lnRef idx="1">
+            <a:schemeClr val="accent1"/>
+          </a:lnRef>
+          <a:fillRef idx="3">
+            <a:schemeClr val="accent1"/>
+          </a:fillRef>
+          <a:effectRef idx="2">
+            <a:schemeClr val="accent1"/>
+          </a:effectRef>
+          <a:fontRef idx="minor">
+            <a:schemeClr val="lt1"/>
+          </a:fontRef>
+        </p:style>
+        <p:txBody>
+          <a:bodyPr rtlCol="0" anchor="ctr" wrap="square"/>
+          <a:lstStyle/>
+          <a:p>
+            <a:pPr algn="ctr"/>
+            <a:r>
+              <a:rPr sz="1400" b="1">
+                <a:solidFill>
+                  <a:srgbClr val="1A2238"/>
+                </a:solidFill>
+              </a:rPr>
+              <a:t>Scenario B -- shallow &amp; dry . weight ~35%</a:t>
+            </a:r>
+          </a:p>
+          <a:p>
+            <a:pPr algn="ctr"/>
+            <a:r>
+              <a:rPr sz="1100" b="0">
+                <a:solidFill>
+                  <a:srgbClr val="8A93A3"/>
+                </a:solidFill>
+              </a:rPr>
+              <a:t>P 1-3 kbar   H2O 1-2.5 wt%   T ~1000-1040 C</a:t>
+            </a:r>
+          </a:p>
+          <a:p>
+            <a:pPr algn="ctr"/>
+            <a:r>
+              <a:rPr sz="1400" b="1">
+                <a:solidFill>
+                  <a:srgbClr val="1A2238"/>
+                </a:solidFill>
+              </a:rPr>
+              <a:t/>
+            </a:r>
+          </a:p>
+          <a:p>
+            <a:pPr algn="ctr"/>
+            <a:r>
+              <a:rPr sz="1100" b="0">
+                <a:solidFill>
+                  <a:srgbClr val="8A93A3"/>
+                </a:solidFill>
+              </a:rPr>
+              <a:t>phenocrysts (wt% of cargo, sums to 100):</a:t>
+            </a:r>
+          </a:p>
+          <a:p>
+            <a:pPr algn="ctr"/>
+            <a:r>
+              <a:rPr sz="1100" b="0">
+                <a:solidFill>
+                  <a:srgbClr val="8A93A3"/>
+                </a:solidFill>
+              </a:rPr>
+              <a:t>plagioclase 48 +/- 4    clinopyroxene 24 +/- 3</a:t>
+            </a:r>
+          </a:p>
+          <a:p>
+            <a:pPr algn="ctr"/>
+            <a:r>
+              <a:rPr sz="1100" b="0">
+                <a:solidFill>
+                  <a:srgbClr val="8A93A3"/>
+                </a:solidFill>
+              </a:rPr>
+              <a:t>orthopyroxene 16 +/- 3  Fe-Ti oxides 12 +/- 2</a:t>
+            </a:r>
+          </a:p>
+        </p:txBody>
+      </p:sp>
+      <p:sp>
+        <p:nvSpPr>
+          <p:cNvPr id="7" name="TextBox 6"/>
+          <p:cNvSpPr txBox="1"/>
+          <p:nvPr/>
+        </p:nvSpPr>
+        <p:spPr>
+          <a:xfrm>
+            <a:off x="640080" y="5212080"/>
+            <a:ext cx="11064240" cy="731520"/>
+          </a:xfrm>
+          <a:prstGeom prst="rect">
+            <a:avLst/>
+          </a:prstGeom>
+          <a:noFill/>
+        </p:spPr>
+        <p:txBody>
+          <a:bodyPr wrap="square">
+            <a:spAutoFit/>
+          </a:bodyPr>
+          <a:lstStyle/>
+          <a:p>
+            <a:pPr algn="l"/>
+            <a:r>
+              <a:rPr sz="1200" b="0">
+                <a:solidFill>
+                  <a:srgbClr val="1A2238"/>
+                </a:solidFill>
+              </a:rPr>
+              <a:t>+ intermediate scenario (amp + opx coexist, ~12%) + tail (~8%) -- nothing silently dropped; weights are prior-weighted plausibility, reweightable</a:t>
+            </a:r>
+          </a:p>
+        </p:txBody>
+      </p:sp>
+      <p:sp>
+        <p:nvSpPr>
+          <p:cNvPr id="8" name="TextBox 7"/>
+          <p:cNvSpPr txBox="1"/>
+          <p:nvPr/>
+        </p:nvSpPr>
+        <p:spPr>
+          <a:xfrm>
+            <a:off x="640080" y="5806440"/>
+            <a:ext cx="11064240" cy="731520"/>
+          </a:xfrm>
+          <a:prstGeom prst="rect">
+            <a:avLst/>
+          </a:prstGeom>
+          <a:noFill/>
+        </p:spPr>
+        <p:txBody>
+          <a:bodyPr wrap="square">
+            <a:spAutoFit/>
+          </a:bodyPr>
+          <a:lstStyle/>
+          <a:p>
+            <a:pPr algn="l"/>
+            <a:r>
+              <a:rPr sz="1200" b="0">
+                <a:solidFill>
+                  <a:srgbClr val="8A93A3"/>
+                </a:solidFill>
+              </a:rPr>
+              <a:t>per-phase composition (An#, Mg#) is bulk-controlled -- one shared band across scenarios, not re-predicted per scenario. Each scenario is a falsifiable hypothesis: amphibole in thin section selects A, and with it A's conditions.</a:t>
             </a:r>
           </a:p>
         </p:txBody>

--- a/slides/overview.pptx
+++ b/slides/overview.pptx
@@ -872,7 +872,7 @@
           <a:lstStyle/>
           <a:p>
             <a:r>
-              <a:t>Worked example for the reliability diagram in results/mode_head/&lt;tag&gt;/reliability.png. Numbers illustrative but to scale: three rocks predicted in [0.70, 0.80) -- a real bin edge of the 10 equal-width bins the code uses -- contribute 3 predictions x 256 labels = 768 (p, truth) pairs -- 3 predictions, not 768; each rock's single p is scored against its 256 labels. x = count-weighted mean p (0.740), y = pooled fraction of pairs with cpx present (547/768 = 0.712). ECE on the real panels is the count-weighted |x - y| over 10 such bins. The gray ghost dot shows the overconfident failure mode. Real population: the sealed valtest tier's val roster (221 assigned rocks, 218 contributing 55,576 rows at 128 draws x rungs 50/30, minus attrition). Fixed roster: panel numbers move only when the head retrains. Pair with figure 2 (p vs within-bulk frequency): reliability is aggregate honesty, the scatter is per-rock sharpness; a base-rate predictor passes the first and fails the second.</a:t>
+              <a:t>Worked example for the reliability diagram in runs/mode_head/&lt;tag&gt;/reliability.png. Numbers illustrative but to scale: three rocks predicted in [0.70, 0.80) -- a real bin edge of the 10 equal-width bins the code uses -- contribute 3 predictions x 256 labels = 768 (p, truth) pairs -- 3 predictions, not 768; each rock's single p is scored against its 256 labels. x = count-weighted mean p (0.740), y = pooled fraction of pairs with cpx present (547/768 = 0.712). ECE on the real panels is the count-weighted |x - y| over 10 such bins. The gray ghost dot shows the overconfident failure mode. Real population: the sealed valtest tier's val roster (221 assigned rocks, 218 contributing 55,576 rows at 128 draws x rungs 50/30, minus attrition). Fixed roster: panel numbers move only when the head retrains. Pair with figure 2 (p vs within-bulk frequency): reliability is aggregate honesty, the scatter is per-rock sharpness; a base-rate predictor passes the first and fails the second.</a:t>
             </a:r>
           </a:p>
         </p:txBody>
@@ -1082,7 +1082,7 @@
           <a:lstStyle/>
           <a:p>
             <a:r>
-              <a:t>Eval-semantics slide for CompHead, mirroring the ModeHead magnitude worked example: two tracks converge at a scoring node; the truth contributes its support to the slice and meets the prediction only at scoring. Box numbers illustrative but to scale (a plag Dirichlet with alpha0 ~780 has SiO2 sd ~0.018); headline numbers are real, from results/comp_head/joint_heads_seed0/metrics.json vs the preserved joint_heads_seed0_baseline run: NLL -50.25 -&gt; -53.85, closure L2 mean 0.0181 -&gt; 0.0134 with the stable +SiO2/-Al2O3 signed bias collapsed to zero-centered residuals (the closure-penalty-form question, #38, closed on this evidence), An# parity mae 0.064 -&gt; 0.060 / r 0.920 -&gt; 0.927. The alpha0-span story is the headline fix: comp_concentration.png baseline vs tuned shows the 100-650 compression opening to 25-32,000, ordered by how constrained each mineral's chemistry really is. PIT here is per-oxide Beta marginals of the 11-simplex Dirichlet (same sub-composition property as the mode slice).</a:t>
+              <a:t>Eval-semantics slide for CompHead, mirroring the ModeHead magnitude worked example: two tracks converge at a scoring node; the truth contributes its support to the slice and meets the prediction only at scoring. Box numbers illustrative but to scale (a plag Dirichlet with alpha0 ~780 has SiO2 sd ~0.018); headline numbers are real, from runs/comp_head/joint_heads_seed0/metrics.json vs the preserved joint_heads_seed0_baseline run: NLL -50.25 -&gt; -53.85, closure L2 mean 0.0181 -&gt; 0.0134 with the stable +SiO2/-Al2O3 signed bias collapsed to zero-centered residuals (the closure-penalty-form question, #38, closed on this evidence), An# parity mae 0.064 -&gt; 0.060 / r 0.920 -&gt; 0.927. The alpha0-span story is the headline fix: comp_concentration.png baseline vs tuned shows the 100-650 compression opening to 25-32,000, ordered by how constrained each mineral's chemistry really is. PIT here is per-oxide Beta marginals of the 11-simplex Dirichlet (same sub-composition property as the mode slice).</a:t>
             </a:r>
           </a:p>
         </p:txBody>
@@ -1222,7 +1222,7 @@
           <a:lstStyle/>
           <a:p>
             <a:r>
-              <a:t>Eval-semantics slide for CondHead. The two-pass protocol is the point: teacher-forced scoring isolates the head's conditional skill p(T,P,H2O | h, true support); sampled-support scoring measures the deployed chain with ModeHead's Bernoulli draws standing in for the truth (exposure_seed pins reproducibility). Mixture drawing illustrative but to scale for a bimodal amp/opx bulk (deep-wet vs shallow-dry is the flagship condition multimodality). Real numbers from results/cond_head/joint_heads_seed0/metrics.json vs the preserved baseline: teacher-forced NLL 8.60 -&gt; 8.32 and coverage_68 0.65-0.69 -&gt; 0.67-0.72 (tuning + the 512x2 trunk), while the exposure delta WIDENED (T 2.91 -&gt; 3.94, H2O 1.53 -&gt; 2.40, P finite -&gt; inf on some rows) -- the sharper head is more wrong under mismatched supports. Coverage is central-interval mass via the mixture CDF (PIT), same construction as the mode/comp calibration reads.</a:t>
+              <a:t>Eval-semantics slide for CondHead. The two-pass protocol is the point: teacher-forced scoring isolates the head's conditional skill p(T,P,H2O | h, true support); sampled-support scoring measures the deployed chain with ModeHead's Bernoulli draws standing in for the truth (exposure_seed pins reproducibility). Mixture drawing illustrative but to scale for a bimodal amp/opx bulk (deep-wet vs shallow-dry is the flagship condition multimodality). Real numbers from runs/cond_head/joint_heads_seed0/metrics.json vs the preserved baseline: teacher-forced NLL 8.60 -&gt; 8.32 and coverage_68 0.65-0.69 -&gt; 0.67-0.72 (tuning + the 512x2 trunk), while the exposure delta WIDENED (T 2.91 -&gt; 3.94, H2O 1.53 -&gt; 2.40, P finite -&gt; inf on some rows) -- the sharper head is more wrong under mismatched supports. Coverage is central-interval mass via the mixture CDF (PIT), same construction as the mode/comp calibration reads.</a:t>
             </a:r>
           </a:p>
         </p:txBody>
@@ -10514,7 +10514,7 @@
                   <a:srgbClr val="8A93A3"/>
                 </a:solidFill>
               </a:rPr>
-              <a:t>BCE's per-rock minimum is the true fraction, so an honest head lands on the diagonal by construction. current limits (tuned model): intermediate-frequency presence is the miss mode (garnet recall 0.58 in f = [0.5, 0.9) and 0.0 elsewhere; opx 0.25 / ru 0.08 / ol 0.08 overall); spinel is the worst-calibrated panel (ECE 0.037); amphibole magnitude spread stays too narrow (next slide). full report: results/mode_head/&lt;tag&gt;/</a:t>
+              <a:t>BCE's per-rock minimum is the true fraction, so an honest head lands on the diagonal by construction. current limits (tuned model): intermediate-frequency presence is the miss mode (garnet recall 0.58 in f = [0.5, 0.9) and 0.0 elsewhere; opx 0.25 / ru 0.08 / ol 0.08 overall); spinel is the worst-calibrated panel (ECE 0.037); amphibole magnitude spread stays too narrow (next slide). full report: runs/mode_head/&lt;tag&gt;/</a:t>
             </a:r>
           </a:p>
         </p:txBody>
@@ -11866,7 +11866,7 @@
                   <a:srgbClr val="8A93A3"/>
                 </a:solidFill>
               </a:rPr>
-              <a:t>population: only truly-present (row, phase) pairs are scored -- ~41k pairs for plag down to ~240 for andalusite; single-phase rows are excluded (nothing to size). current limits (tuned model): amphibole stays the flagship miss -- 65% of its (rock, support) PIT groups are mean-shifted (within-bulk bimodality collapses to the mean; mixture fix staged, #25) and tuning did not move its magnitude error; plag/afs/q are majority-shifted too (the support-conditioning signal, heads.md). full report: results/mode_head/&lt;tag&gt;/ (magnitude_parity, magnitude_pit).</a:t>
+              <a:t>population: only truly-present (row, phase) pairs are scored -- ~41k pairs for plag down to ~240 for andalusite; single-phase rows are excluded (nothing to size). current limits (tuned model): amphibole stays the flagship miss -- 65% of its (rock, support) PIT groups are mean-shifted (within-bulk bimodality collapses to the mean; mixture fix staged, #25) and tuning did not move its magnitude error; plag/afs/q are majority-shifted too (the support-conditioning signal, heads.md). full report: runs/mode_head/&lt;tag&gt;/ (magnitude_parity, magnitude_pit).</a:t>
             </a:r>
           </a:p>
         </p:txBody>
@@ -14126,7 +14126,7 @@
                   <a:srgbClr val="8A93A3"/>
                 </a:solidFill>
               </a:rPr>
-              <a:t>current limits: hard-zero oxides ride the eps floor (a quartz row is 'SiO2 + 10 floors'); ilmenite FeO/TiO2 stays the accuracy outlier; ~0.3% of corpus rows cannot self-close and set an unattainable closure floor there. full report: results/comp_head/&lt;tag&gt;/</a:t>
+              <a:t>current limits: hard-zero oxides ride the eps floor (a quartz row is 'SiO2 + 10 floors'); ilmenite FeO/TiO2 stays the accuracy outlier; ~0.3% of corpus rows cannot self-close and set an unattainable closure floor there. full report: runs/comp_head/&lt;tag&gt;/</a:t>
             </a:r>
           </a:p>
         </p:txBody>
@@ -16519,7 +16519,7 @@
                   <a:srgbClr val="8A93A3"/>
                 </a:solidFill>
               </a:rPr>
-              <a:t>current limits: axes are independent mixtures (no (T, P) correlation, deferred per ADR 006); T is a derived cooling endpoint, not a sampled axis; sampled-support P rows can blow up numerically (the inf rows are #31's starting point). full report: results/cond_head/&lt;tag&gt;/</a:t>
+              <a:t>current limits: axes are independent mixtures (no (T, P) correlation, deferred per ADR 006); T is a derived cooling endpoint, not a sampled axis; sampled-support P rows can blow up numerically (the inf rows are #31's starting point). full report: runs/cond_head/&lt;tag&gt;/</a:t>
             </a:r>
           </a:p>
         </p:txBody>

--- a/slides/overview.pptx
+++ b/slides/overview.pptx
@@ -802,7 +802,7 @@
           <a:lstStyle/>
           <a:p>
             <a:r>
-              <a:t>Anatomy of the trained ModeHead (checkpoints/joint_heads_seed0): shared trunk 3 stacked Linear(-&gt;256)+GELU+dropout blocks, then two parallel linear branches -- presence logits (sigmoid -&gt; per-phase Bernoulli, BCE) and concentrations (softplus + eps -&gt; conditional Dirichlet, masked NLL on the true support). Param counts are pulled from the checkpoint (mode_hidden 256, mode_layers 3, the joint-HPO winner; fANOVA put architecture near zero, the gain came with the tuned environment). Loss boxes mirror the SSL slide: BCE is a proper scoring rule (per-rock minimum = within-bulk presence frequency, which is why intermediate p is signal); the Dirichlet NLL is masked to the label's present set (sub-composition property keeps it a proper density); λ_mag is the loss-weighting coefficient (config key magnitude_weight, 0.25 tuned) -- λ chosen over w to avoid clashing with layer weights and to match the λ_balance / λ_comp family. 'Trained jointly' is literal chain-rule math: L is one scalar, so one backward pass and one AdamW step update all params at once. Each branch's weights appear in only its own term (the other term's gradient is exactly zero there); the trunk appears in both, so its gradient is the sum -- λ_mag is the exchange rate between the two error signals shaping the shared features. NOT alternating epochs, NOT separate optimizers, NOT staged pretraining of one branch. The hurdle split exists because one full-simplex Dirichlet cannot be simultaneously confident about absences and honest about present-phase spread (shared concentration). CompHead/CondHead follow the same small-MLP-emitting-distribution-parameters pattern; their two-slide reports follow ModeHead's.</a:t>
+              <a:t>Anatomy of the trained ModeHead (checkpoints/joint_heads_supportmag_seed0): two parallel trunks of 3 stacked Linear(-&gt;256)+GELU+dropout blocks. The presence trunk reads h alone (it predicts the support, so it must not see it) -&gt; logits (sigmoid -&gt; per-phase Bernoulli, BCE). The magnitude trunk reads h concatenated with the 21-dim support vector -&gt; concentrations (softplus + eps -&gt; conditional Dirichlet, masked NLL on the same support) -- the chain rule CondHead already uses: teacher-forced true mask at train, sampled from the presence Bernoullis at inference. Support-conditioning (adopted 2026-07-22, #25) exists because the conditional truth is bimodal by support for path-sensitive phases (deep-wet-much-amp vs shallow-dry-little); a support-blind Dirichlet could only average the humps -- amp magnitude parity r went 0.715 -&gt; 0.876. Param counts are pulled from the checkpoint (mode_hidden 256, mode_layers 3 per trunk, the joint-HPO winner kept for isolation). Loss boxes mirror the SSL slide: BCE is a proper scoring rule (per-rock minimum = within-bulk presence frequency, which is why intermediate p is signal); the Dirichlet NLL is masked to the label's present set (sub-composition property keeps it a proper density); λ_mag is the loss-weighting coefficient (config key magnitude_weight, 0.25 tuned) -- λ chosen over w to avoid clashing with layer weights and to match the λ_balance / λ_comp family. 'Trained jointly' is one scalar L, one backward pass, one AdamW step; with the trunks split, the two ModeHead terms touch disjoint params -- λ_mag no longer arbitrates a shared trunk; its remaining role is balancing the Dirichlet term against the mass-balance closure (which also reads the magnitude alphas), with a second-order coupling via the per-head gradient clip pooling both trunks' norms. NOT alternating epochs, NOT separate optimizers, NOT staged pretraining of one branch. The hurdle split exists because one full-simplex Dirichlet cannot be simultaneously confident about absences and honest about present-phase spread (shared concentration). CompHead/CondHead follow the same small-MLP-emitting-distribution-parameters pattern; their two-slide reports follow ModeHead's.</a:t>
             </a:r>
           </a:p>
         </p:txBody>
@@ -942,7 +942,7 @@
           <a:lstStyle/>
           <a:p>
             <a:r>
-              <a:t>Eval-semantics slide for the magnitude branch, mirroring the presence branch's reliability worked example. Laid out as two tracks converging at a scoring node: the prediction track never sees the truth's modes; the truth contributes only its support to the slice (teacher-forced) and meets the prediction at scoring. Numbers illustrative but to scale: alpha sliced to the true 4-phase support gives Dirichlet means alpha_i/alpha0 and Beta marginals Beta(alpha_i, alpha0 - alpha_i); plag Beta(12,13) has mean 0.48, sd ~0.10, and truth 0.44 lands at CDF 0.34. alpha0 is the single shared confidence knob per row -- the reason per-phase spreads can't be tuned independently (see alpha_concentration.png). PIT histograms are the magnitude analog of reliability diagrams; parity plots are the point-estimate view. Scored by masked Dirichlet NLL (anatomy slide's L_magnitude). Worked numbers for the expansion box: this row scores -4.34 nats (normalizer -28.37 + shape +24.03); scaling alpha x4 improves to -5.26 when truth is near the peak but explodes to +17.9 when truth swaps to the other hump (plag/amp values exchanged) -- the mechanism that pins amphibole's alpha0 low and its mean in the middle.</a:t>
+              <a:t>Eval-semantics slide for the magnitude branch, mirroring the presence branch's reliability worked example. Laid out as two tracks converging at a scoring node: the prediction track never sees the truth's modes; the truth contributes its support twice (conditioning input to the magnitude trunk + the score's slice, both teacher-forced) and its modes meet the prediction only at scoring. Numbers illustrative but to scale: alpha sliced to the true 4-phase support gives Dirichlet means alpha_i/alpha0 and Beta marginals Beta(alpha_i, alpha0 - alpha_i); plag Beta(12,13) has mean 0.48, sd ~0.10, and truth 0.44 lands at CDF 0.34. alpha0 is the single shared confidence knob per row -- the reason per-phase spreads can't be tuned independently (see alpha_concentration.png). PIT histograms are the magnitude analog of reliability diagrams; parity plots are the point-estimate view. Scored by masked Dirichlet NLL (anatomy slide's L_magnitude). Worked numbers for the expansion box: this row scores -4.34 nats (normalizer -28.37 + shape +24.03); scaling alpha x4 improves to -5.26 when truth is near the peak but explodes to +17.9 when truth swaps to the other hump (plag/amp values exchanged) -- the mechanism that pinned the support-blind head's amphibole alpha0 low and its mean in the middle. Support-conditioning resolves the between-support humps; the within-support ones still punish confidence the same way (the mixture candidate's target).</a:t>
             </a:r>
           </a:p>
         </p:txBody>
@@ -1432,7 +1432,7 @@
           <a:lstStyle/>
           <a:p>
             <a:r>
-              <a:t>View 2 from heads.md, modernized to the locked corpus design: crystals-renormalized (no residual-melt row -- melt-fraction head dropped), composition shared across scenarios (CompHead reads h only), no inference-time mass-balance checkmark (closure is teacher-forced at training; the inference residual as OOD signal is an open rethink). Marginal view = projection of these scenarios; scenarios are the primary object. Open mechanism detail for #10/#13: coupling conditions to assemblage in a sampled scenario requires joint sampling across heads. Numbers illustrative.</a:t>
+              <a:t>View 2 from heads.md, modernized to the locked corpus design: crystals-renormalized (no residual-melt row -- melt-fraction head dropped), composition shared across scenarios (CompHead reads h only), no inference-time mass-balance checkmark (closure is teacher-forced at training; the inference residual as OOD signal is an open rethink). Marginal view = projection of these scenarios; scenarios are the primary object. The joint-sampling mechanism exists (two-step ancestral sampling: presence Bernoullis -&gt; support, then the support-conditioned magnitude Dirichlet and CondHead both condition on it -- scripts/view/scenario_view.py); per-scenario mode shares and conditions are genuinely re-predicted per support. Numbers illustrative.</a:t>
             </a:r>
           </a:p>
         </p:txBody>
@@ -8175,7 +8175,7 @@
                   <a:srgbClr val="1A2238"/>
                 </a:solidFill>
               </a:rPr>
-              <a:t>Inside ModeHead: a small MLP on the frozen h</a:t>
+              <a:t>Inside ModeHead: two small MLPs on the frozen h</a:t>
             </a:r>
           </a:p>
         </p:txBody>
@@ -8209,7 +8209,7 @@
                   <a:srgbClr val="8A93A3"/>
                 </a:solidFill>
               </a:rPr>
-              <a:t>ModeHead, the first head trained end-to-end -- two clean factors of the hurdle likelihood P(modal) = P(present) x P(modal | present)</a:t>
+              <a:t>ModeHead, the first head trained end-to-end -- two clean factors of the hurdle likelihood P(modal) = P(present) x P(modal | present), each with its own trunk: presence reads h alone; magnitude reads h + the mineral set it is sizing</a:t>
             </a:r>
           </a:p>
         </p:txBody>
@@ -8406,7 +8406,7 @@
                   <a:srgbClr val="1A2238"/>
                 </a:solidFill>
               </a:rPr>
-              <a:t>shared trunk</a:t>
+              <a:t>two parallel trunks</a:t>
             </a:r>
           </a:p>
           <a:p>
@@ -8417,7 +8417,7 @@
                   <a:srgbClr val="8A93A3"/>
                 </a:solidFill>
               </a:rPr>
-              <a:t>3 x [Linear -&gt; 256]</a:t>
+              <a:t>presence: 3 x [Linear -&gt; 256] on h</a:t>
             </a:r>
           </a:p>
           <a:p>
@@ -8428,7 +8428,7 @@
                   <a:srgbClr val="8A93A3"/>
                 </a:solidFill>
               </a:rPr>
-              <a:t>GELU + dropout each</a:t>
+              <a:t>magnitude: 3 x [Linear -&gt; 256]</a:t>
             </a:r>
           </a:p>
           <a:p>
@@ -8439,7 +8439,18 @@
                   <a:srgbClr val="8A93A3"/>
                 </a:solidFill>
               </a:rPr>
-              <a:t>197,376 params</a:t>
+              <a:t>on [h, support(21)] -- chain rule</a:t>
+            </a:r>
+          </a:p>
+          <a:p>
+            <a:pPr algn="ctr"/>
+            <a:r>
+              <a:rPr sz="1000" b="0">
+                <a:solidFill>
+                  <a:srgbClr val="8A93A3"/>
+                </a:solidFill>
+              </a:rPr>
+              <a:t>197,376 + 202,752 params</a:t>
             </a:r>
           </a:p>
         </p:txBody>
@@ -8794,7 +8805,7 @@
                   <a:srgbClr val="8A93A3"/>
                 </a:solidFill>
               </a:rPr>
-              <a:t>alpha_i, Dirichlet concentration</a:t>
+              <a:t>alpha_i, support-conditioned</a:t>
             </a:r>
           </a:p>
           <a:p>
@@ -8914,7 +8925,7 @@
                   <a:srgbClr val="8A93A3"/>
                 </a:solidFill>
               </a:rPr>
-              <a:t>how much of each,</a:t>
+              <a:t>how much, GIVEN</a:t>
             </a:r>
           </a:p>
           <a:p>
@@ -8925,7 +8936,7 @@
                   <a:srgbClr val="8A93A3"/>
                 </a:solidFill>
               </a:rPr>
-              <a:t>on the present set (NLL)</a:t>
+              <a:t>this mineral set (NLL)</a:t>
             </a:r>
           </a:p>
         </p:txBody>
@@ -8959,7 +8970,7 @@
                   <a:srgbClr val="1A2238"/>
                 </a:solidFill>
               </a:rPr>
-              <a:t>208,170 trainable params (trunk 197,376 + 2 x 5,397) -- ~6.4% of the frozen encoder; the 256 x 3 trunk is the joint-HPO winner (untuned 128 x 1 gave up 0.105 nats of assemblage NLL).</a:t>
+              <a:t>410,922 trainable params (trunks 197,376 + 202,752, outputs 2 x 5,397) -- ~12.7% of the frozen encoder; 256 x 3 per trunk is the joint-HPO winner, kept unchanged when the support-conditioned trunk was added (isolation, #25).</a:t>
             </a:r>
           </a:p>
         </p:txBody>
@@ -9188,7 +9199,7 @@
                   <a:srgbClr val="8A93A3"/>
                 </a:solidFill>
               </a:rPr>
-              <a:t>trained jointly: one backward pass; each branch gets only its own term's gradient, the shared trunk gets the SUM of both -- ∇L(trunk) = ∇L_pres + λ_mag ∇L_mag</a:t>
+              <a:t>one backward pass; the trunks are param-disjoint, so λ_mag no longer arbitrates a shared trunk -- it balances the Dirichlet term against the mass-balance closure on the magnitude trunk</a:t>
             </a:r>
           </a:p>
         </p:txBody>
@@ -10699,7 +10710,7 @@
                   <a:srgbClr val="8A93A3"/>
                 </a:solidFill>
               </a:rPr>
-              <a:t>alpha for all 21 phases,</a:t>
+              <a:t>alpha for all 21 phases, from</a:t>
             </a:r>
           </a:p>
           <a:p>
@@ -10710,7 +10721,7 @@
                   <a:srgbClr val="8A93A3"/>
                 </a:solidFill>
               </a:rPr>
-              <a:t>computed from the latent --</a:t>
+              <a:t>the latent + the row's support --</a:t>
             </a:r>
           </a:p>
           <a:p>
@@ -10721,7 +10732,7 @@
                   <a:srgbClr val="8A93A3"/>
                 </a:solidFill>
               </a:rPr>
-              <a:t>truth is not an input</a:t>
+              <a:t>the true MODES are not an input</a:t>
             </a:r>
           </a:p>
         </p:txBody>
@@ -11832,7 +11843,7 @@
                   <a:srgbClr val="1A2238"/>
                 </a:solidFill>
               </a:rPr>
-              <a:t>the truth plays two roles, never as a model input: its support slices alpha (teacher-forced at train/eval, sampled from the presence branch at inference; a Dirichlet sub-composition is itself a Dirichlet, so the sliced score is a proper density), and its modes appear only at the scoring step.</a:t>
+              <a:t>the truth's modes never enter the model; its support enters twice -- it CONDITIONS alpha (the magnitude trunk reads [h, support]; teacher-forced at train/eval, sampled from the presence branch at inference) and it slices the score to the present set (a Dirichlet sub-composition is itself a Dirichlet, so the sliced score is a proper density).</a:t>
             </a:r>
           </a:p>
         </p:txBody>
@@ -11866,7 +11877,7 @@
                   <a:srgbClr val="8A93A3"/>
                 </a:solidFill>
               </a:rPr>
-              <a:t>population: only truly-present (row, phase) pairs are scored -- ~41k pairs for plag down to ~240 for andalusite; single-phase rows are excluded (nothing to size). current limits (tuned model): amphibole stays the flagship miss -- 65% of its (rock, support) PIT groups are mean-shifted (within-bulk bimodality collapses to the mean; mixture fix staged, #25) and tuning did not move its magnitude error; plag/afs/q are majority-shifted too (the support-conditioning signal, heads.md). full report: runs/mode_head/&lt;tag&gt;/ (magnitude_parity, magnitude_pit).</a:t>
+              <a:t>population: only truly-present (row, phase) pairs are scored -- ~41k pairs for plag down to ~240 for andalusite; single-phase rows are excluded (nothing to size). current limits (support-conditioned model): amp parity r 0.876 (was 0.715 support-blind) and its mean-shifted PIT groups fell 65% -&gt; 41%; the surviving miss is the ~11% of amp groups bimodal WITHIN one support (mixture parameterization is the staged candidate, #25). full report: runs/mode_head/&lt;tag&gt;/ (magnitude_parity, magnitude_pit).</a:t>
             </a:r>
           </a:p>
         </p:txBody>

--- a/slides/overview.pptx
+++ b/slides/overview.pptx
@@ -26,6 +26,7 @@
     <p:sldId id="274" r:id="rId26"/>
     <p:sldId id="275" r:id="rId27"/>
     <p:sldId id="276" r:id="rId28"/>
+    <p:sldId id="277" r:id="rId29"/>
   </p:sldIdLst>
   <p:sldSz cx="12191695" cy="6858000" type="screen4x3"/>
   <p:notesSz cx="6858000" cy="9144000"/>
@@ -662,7 +663,7 @@
           <a:lstStyle/>
           <a:p>
             <a:r>
-              <a:t>The three-stage training pipeline. Stage 1 is the SSL loop from the prior slide; stage 2 freezes; stage 3 trains the heads on the labeled equilibrium corpus.</a:t>
+              <a:t>The three-stage training pipeline. Stage 1 is the SSL loop from the prior slide; stage 2 freezes; stage 3 trains the heads on the labeled equilibrium corpus. The production stack is checkpoints/pretrain_v3_logmse_std_seed0 (stage 1-2) + checkpoints/joint_heads_regen_tuned_seed0 (stage 3). Stage 3 is cheap by design -- ~900k head params against a 3.23M frozen encoder -- which is what makes re-supervising the heads against a different label source a retrain rather than a rebuild.</a:t>
             </a:r>
           </a:p>
         </p:txBody>
@@ -732,7 +733,7 @@
           <a:lstStyle/>
           <a:p>
             <a:r>
-              <a:t>Structural view: which heads exist and that they all read the same frozen h. Head internals on the next slide; outputs after.</a:t>
+              <a:t>Structural view: which heads exist and that they all read the same frozen h. Three heads are in the joint trainer -- ModeHead, CompHead, CondHead. ClassHead and G_sys are drawn gray because they are application slots the architecture allows, not code that runs: nothing in src/cnmineral/models implements them and no checkpoint carries their weights. G_sys in particular is an encoder regularizer if it is ever built, never a polymorph disambiguator. Head internals on the next slide; outputs after.</a:t>
             </a:r>
           </a:p>
         </p:txBody>
@@ -802,7 +803,7 @@
           <a:lstStyle/>
           <a:p>
             <a:r>
-              <a:t>Anatomy of the trained ModeHead (checkpoints/joint_heads_supportmag_seed0): two parallel trunks of 3 stacked Linear(-&gt;256)+GELU+dropout blocks. The presence trunk reads h alone (it predicts the support, so it must not see it) -&gt; logits (sigmoid -&gt; per-phase Bernoulli, BCE). The magnitude trunk reads h concatenated with the 21-dim support vector -&gt; concentrations (softplus + eps -&gt; conditional Dirichlet, masked NLL on the same support) -- the chain rule CondHead already uses: teacher-forced true mask at train, sampled from the presence Bernoullis at inference. Support-conditioning (adopted 2026-07-22, #25) exists because the conditional truth is bimodal by support for path-sensitive phases (deep-wet-much-amp vs shallow-dry-little); a support-blind Dirichlet could only average the humps -- amp magnitude parity r went 0.715 -&gt; 0.876. Param counts are pulled from the checkpoint (mode_hidden 256, mode_layers 3 per trunk, the joint-HPO winner kept for isolation). Loss boxes mirror the SSL slide: BCE is a proper scoring rule (per-rock minimum = within-bulk presence frequency, which is why intermediate p is signal); the Dirichlet NLL is masked to the label's present set (sub-composition property keeps it a proper density); λ_mag is the loss-weighting coefficient (config key magnitude_weight, 0.25 tuned) -- λ chosen over w to avoid clashing with layer weights and to match the λ_balance / λ_comp family. 'Trained jointly' is one scalar L, one backward pass, one AdamW step; with the trunks split, the two ModeHead terms touch disjoint params -- λ_mag no longer arbitrates a shared trunk; its remaining role is balancing the Dirichlet term against the mass-balance closure (which also reads the magnitude alphas), with a second-order coupling via the per-head gradient clip pooling both trunks' norms. NOT alternating epochs, NOT separate optimizers, NOT staged pretraining of one branch. The hurdle split exists because one full-simplex Dirichlet cannot be simultaneously confident about absences and honest about present-phase spread (shared concentration). CompHead/CondHead follow the same small-MLP-emitting-distribution-parameters pattern; their two-slide reports follow ModeHead's.</a:t>
+              <a:t>Anatomy of the trained ModeHead (checkpoints/joint_heads_regen_tuned_seed0): two parallel trunks of 3 stacked Linear(-&gt;256)+GELU+dropout blocks. The presence trunk reads h alone (it predicts the support, so it must not see it) -&gt; logits (sigmoid -&gt; per-phase Bernoulli, BCE). The magnitude trunk reads h concatenated with the 21-dim support vector -&gt; concentrations (softplus + eps -&gt; conditional Dirichlet, masked NLL on the same support) -- the chain rule CondHead already uses: teacher-forced true mask at train, sampled from the presence Bernoullis at inference. Support-conditioning (adopted 2026-07-22, #25) exists because the conditional truth is bimodal by support for path-sensitive phases (deep-wet-much-amp vs shallow-dry-little); a support-blind Dirichlet could only average the humps -- amp magnitude parity r went 0.715 -&gt; 0.876 when it landed (measured on the since-retired instrument; the current corpus reads 0.886). Param counts are pulled from the checkpoint (mode_hidden 256, mode_layers 3 per trunk, the joint-HPO winner kept through the weights-only retune). Loss boxes mirror the SSL slide: BCE is a proper scoring rule (per-rock minimum = within-bulk presence frequency, which is why intermediate p is signal); the Dirichlet NLL is masked to the label's present set (sub-composition property keeps it a proper density); λ_mag is the loss-weighting coefficient (config key magnitude_weight, 7.76 tuned) -- λ chosen over w to avoid clashing with layer weights and to match the λ_balance / λ_comp family. Note the reduction asymmetry: BCE means over the 21 phases while the Dirichlet NLL sums them, so 7.76 in the config is 163 against a per-phase-summed BCE. 'Trained jointly' is one scalar L, one backward pass, one AdamW step; with the trunks split, the two ModeHead terms touch disjoint params, coupled only second-order through the per-head gradient clip pooling both trunks' norms. NOT alternating epochs, NOT separate optimizers, NOT staged pretraining of one branch. The hurdle split exists because one full-simplex Dirichlet cannot be simultaneously confident about absences and honest about present-phase spread (shared concentration). CompHead/CondHead follow the same small-MLP-emitting-distribution-parameters pattern; their two-slide reports follow ModeHead's.</a:t>
             </a:r>
           </a:p>
         </p:txBody>
@@ -872,7 +873,7 @@
           <a:lstStyle/>
           <a:p>
             <a:r>
-              <a:t>Worked example for the reliability diagram in runs/mode_head/&lt;tag&gt;/reliability.png. Numbers illustrative but to scale: three rocks predicted in [0.70, 0.80) -- a real bin edge of the 10 equal-width bins the code uses -- contribute 3 predictions x 256 labels = 768 (p, truth) pairs -- 3 predictions, not 768; each rock's single p is scored against its 256 labels. x = count-weighted mean p (0.740), y = pooled fraction of pairs with cpx present (547/768 = 0.712). ECE on the real panels is the count-weighted |x - y| over 10 such bins. The gray ghost dot shows the overconfident failure mode. Real population: the sealed valtest tier's val roster (221 assigned rocks, 218 contributing 55,576 rows at 128 draws x rungs 50/30, minus attrition). Fixed roster: panel numbers move only when the head retrains. Pair with figure 2 (p vs within-bulk frequency): reliability is aggregate honesty, the scatter is per-rock sharpness; a base-rate predictor passes the first and fails the second.</a:t>
+              <a:t>Worked example for the reliability diagram in runs/mode_head/&lt;tag&gt;/reliability.png. Numbers illustrative but to scale: three rocks predicted in [0.70, 0.80) -- a real bin edge of the 10 equal-width bins the code uses -- contribute 3 predictions x 256 labels = 768 (p, truth) pairs -- 3 predictions, not 768; each rock's single p is scored against its 256 labels. x = count-weighted mean p (0.740), y = pooled fraction of pairs with cpx present (547/768 = 0.712). ECE on the real panels is the count-weighted |x - y| over 10 such bins. The gray ghost dot shows the overconfident failure mode. Real population: the sealed valtest tier's val roster (887 assigned rocks, 871 contributing 222,717 rows at 128 draws x rungs 50/30, minus attrition). Fixed roster: panel numbers move only when the head retrains. Pair with figure 2 (p vs within-bulk frequency): reliability is aggregate honesty, the scatter is per-rock sharpness; a base-rate predictor passes the first and fails the second.</a:t>
             </a:r>
           </a:p>
         </p:txBody>
@@ -942,7 +943,7 @@
           <a:lstStyle/>
           <a:p>
             <a:r>
-              <a:t>Eval-semantics slide for the magnitude branch, mirroring the presence branch's reliability worked example. Laid out as two tracks converging at a scoring node: the prediction track never sees the truth's modes; the truth contributes its support twice (conditioning input to the magnitude trunk + the score's slice, both teacher-forced) and its modes meet the prediction only at scoring. Numbers illustrative but to scale: alpha sliced to the true 4-phase support gives Dirichlet means alpha_i/alpha0 and Beta marginals Beta(alpha_i, alpha0 - alpha_i); plag Beta(12,13) has mean 0.48, sd ~0.10, and truth 0.44 lands at CDF 0.34. alpha0 is the single shared confidence knob per row -- the reason per-phase spreads can't be tuned independently (see alpha_concentration.png). PIT histograms are the magnitude analog of reliability diagrams; parity plots are the point-estimate view. Scored by masked Dirichlet NLL (anatomy slide's L_magnitude). Worked numbers for the expansion box: this row scores -4.34 nats (normalizer -28.37 + shape +24.03); scaling alpha x4 improves to -5.26 when truth is near the peak but explodes to +17.9 when truth swaps to the other hump (plag/amp values exchanged) -- the mechanism that pinned the support-blind head's amphibole alpha0 low and its mean in the middle. Support-conditioning resolves the between-support humps; the within-support ones still punish confidence the same way (the mixture candidate's target).</a:t>
+              <a:t>Eval-semantics slide for the magnitude branch, mirroring the presence branch's reliability worked example. Laid out as two tracks converging at a scoring node: the prediction track never sees the truth's modes; the truth contributes its support twice (conditioning input to the magnitude trunk + the score's slice, both teacher-forced) and its modes meet the prediction only at scoring. Numbers illustrative but to scale: alpha sliced to the true 4-phase support gives Dirichlet means alpha_i/alpha0 and Beta marginals Beta(alpha_i, alpha0 - alpha_i); plag Beta(12,13) has mean 0.48, sd ~0.10, and truth 0.44 lands at CDF 0.34. alpha0 is the single shared confidence knob per row -- the reason per-phase spreads can't be tuned independently (see alpha_concentration.png). PIT histograms are the magnitude analog of reliability diagrams; parity plots are the point-estimate view. Scored by masked Dirichlet NLL (anatomy slide's L_magnitude). Worked numbers for the expansion box: this row scores -4.34 nats (normalizer -28.37 + shape +24.03); scaling alpha x4 improves to -5.26 when truth is near the peak but explodes to +17.9 when truth swaps to the other hump (plag/amp values exchanged) -- the mechanism that pinned the support-blind head's amphibole alpha0 low and its mean in the middle. Support-conditioning resolves the between-support humps; the within-support ones still punish confidence the same way (the mixture candidate's target). The 0.715 -&gt; 0.876 amp parity jump that justified support-conditioning was measured on the retired instrument and cannot be restated here: on the traced corpus both the pre-sweep and the production dials read ~0.88, because the weights-only sweep moved sharpness, not conditioning. That sharpness is also why the sampled-support number is worse than the teacher-forced one -- the head specialized to the true support.</a:t>
             </a:r>
           </a:p>
         </p:txBody>
@@ -1012,7 +1013,7 @@
           <a:lstStyle/>
           <a:p>
             <a:r>
-              <a:t>Anatomy of CompHead (trains in the joint trainer, checkpoints/joint_heads_seed0). Interface: h [256] in, alpha [21, 11] out; one training example is one (bulk, draw, rung) row; targets are per-phase oxide mass fractions from the rungs table (same-token instances merged by mass-weighted mean, feldspar split into plag/afs BEFORE averaging so the solvus pair never mixes), eps-clipped at comp_eps and renormalized. Param counts are exact (instantiated at d_model 256, hidden 128). The shared-concentration factorization is the locked heads.md parameterization: one c_p per phase blurs per-oxide error bars toward each other -- accepted because composition spreads are 10-30x tighter than modal spreads (the reason CompHead is bulk-controlled and unconditioned). L_comp's minimum: the Dirichlet matching the per-bulk composition distribution of each phase. L_closure is the one loss term coupling two heads (mode x comp product); squared-L2 is a constraint penalty, not a head likelihood, so the no-MSE rule for heads doesn't apply. Known limits: hard-zero oxides are clipped (a q row is 'SiO2 + 10 eps-floors'); ~0.3% of corpus rows don't self-close (melt immiscibility, dropped-phase mass, worst 5.2 wt%) and set an unattainable closure floor there; endmember bonus heads deferred (heads.md).</a:t>
+              <a:t>Anatomy of CompHead (trains in the joint trainer, checkpoints/joint_heads_regen_tuned_seed0). Interface: h [256] in, alpha [21, 11] out; one training example is one (bulk, draw, rung) row; targets are per-phase oxide mass fractions from the rungs table (same-token instances merged by mass-weighted mean, feldspar split into plag/afs BEFORE averaging so the solvus pair never mixes), eps-clipped at comp_eps and renormalized. Param counts are exact (instantiated at d_model 256, hidden 128). The shared-concentration factorization is the locked heads.md parameterization: one c_p per phase blurs per-oxide error bars toward each other -- accepted because composition spreads are 10-30x tighter than modal spreads (the reason CompHead is bulk-controlled and unconditioned). L_comp's minimum: the Dirichlet matching the per-bulk composition distribution of each phase. L_closure is the one loss term coupling two heads (mode x comp product); squared-L2 is a constraint penalty, not a head likelihood, so the no-MSE rule for heads doesn't apply. Known limits: hard-zero oxides are clipped (a q row is 'SiO2 + 10 eps-floors'); ~0.3% of corpus rows don't self-close (melt immiscibility, dropped-phase mass, worst 5.2 wt%) and set an unattainable closure floor there; endmember bonus heads deferred (heads.md).</a:t>
             </a:r>
           </a:p>
         </p:txBody>
@@ -1082,7 +1083,7 @@
           <a:lstStyle/>
           <a:p>
             <a:r>
-              <a:t>Eval-semantics slide for CompHead, mirroring the ModeHead magnitude worked example: two tracks converge at a scoring node; the truth contributes its support to the slice and meets the prediction only at scoring. Box numbers illustrative but to scale (a plag Dirichlet with alpha0 ~780 has SiO2 sd ~0.018); headline numbers are real, from runs/comp_head/joint_heads_seed0/metrics.json vs the preserved joint_heads_seed0_baseline run: NLL -50.25 -&gt; -53.85, closure L2 mean 0.0181 -&gt; 0.0134 with the stable +SiO2/-Al2O3 signed bias collapsed to zero-centered residuals (the closure-penalty-form question, #38, closed on this evidence), An# parity mae 0.064 -&gt; 0.060 / r 0.920 -&gt; 0.927. The alpha0-span story is the headline fix: comp_concentration.png baseline vs tuned shows the 100-650 compression opening to 25-32,000, ordered by how constrained each mineral's chemistry really is. PIT here is per-oxide Beta marginals of the 11-simplex Dirichlet (same sub-composition property as the mode slice).</a:t>
+              <a:t>Eval-semantics slide for CompHead, mirroring the ModeHead magnitude worked example: two tracks converge at a scoring node; the truth contributes its support to the slice and meets the prediction only at scoring. Box numbers illustrative but to scale (a plag Dirichlet with alpha0 ~780 has SiO2 sd ~0.018); headline numbers are real, from runs/comp_head/joint_heads_regen_tuned_seed0/metrics.json. CompHead is the head the weights-only sweep did not move: against the same-corpus pre-sweep run (joint_heads_regen_seed0) NLL went -56.30 -&gt; -56.29, closure L2 0.0107 -&gt; 0.0109, An# parity mae 0.044 -&gt; 0.043 / r 0.957 -&gt; 0.959 -- all inside the 0.03-nat tie band, which is why the adoption argument rested on ModeHead. The alpha0 span is the durable story (comp_concentration.png): medians run ~170 for garnet to ~40,000 for quartz, ordered by how constrained each mineral's chemistry really is; the earlier untuned model compressed everything into 100-650, but that comparison was measured on the since-retired instrument. PIT here is per-oxide Beta marginals of the 11-simplex Dirichlet (same sub-composition property as the mode slice).</a:t>
             </a:r>
           </a:p>
         </p:txBody>
@@ -1152,7 +1153,7 @@
           <a:lstStyle/>
           <a:p>
             <a:r>
-              <a:t>Anatomy of CondHead (trains in the joint trainer, checkpoints/joint_heads_seed0). Interface: concat(h [256], presence [21]) in; (log_w, mu, sigma) each [3 axes, K] out; one training example is one (bulk, draw, rung) row with targets (T_end from the rung row; P_kbar, H2O from the draw). Param counts pulled from the checkpoint (cond_hidden 512, cond_layers 2, K=3): cond was the one head that wanted capacity -- starved at 128x1 under the shared tuned lr, fixed by the mini-sweep adoption. Support-conditioning is the locked chain-rule decision: independent heads assume a conditional independence the corpus violates by design -- the within-bulk label variance is driven by the shared hidden (P, H2O) path, and marginals forget which condition mode went with which support. Raw linear units are deliberate (no log transforms; negative mass is a diagnostic, not a bug -- mass_below_zero in the cond eval). init_output_bias seeds component means at target mean +/- 1 std and sigmas at the target std; without it Adam needs ~mu/lr steps to walk mu from 0 to ~900 C. lambda_cond nuance: L_cond's gradient reaches only CondHead's own weights (frozen encoder, separate trunks, teacher-forced input), and per-head clipping + Adam's per-parameter scaling make the constant nearly inert for optimization; per-head best selection (each head keeps its own raw-val best epoch) removed its old early-stopping lever too, leaving it a raw-unit scale absorber (mineralogy-first). Known limits: axes are independent mixtures (no (T, P) correlation, deferred per ADR 006); exposure bias measured, not yet mitigated (#31); T is a derived cooling endpoint, not a sampled axis, in the scenario view.</a:t>
+              <a:t>Anatomy of CondHead (trains in the joint trainer, checkpoints/joint_heads_regen_tuned_seed0). Interface: concat(h [256], presence [21]) in; (log_w, mu, sigma) each [3 axes, K] out; one training example is one (bulk, draw, rung) row with targets (T_end from the rung row; P_kbar, H2O from the draw). Param counts pulled from the checkpoint (cond_hidden 512, cond_layers 2, K=3): cond was the one head that wanted capacity -- starved at 128x1 under the shared tuned lr, fixed by the mini-sweep adoption. Support-conditioning is the locked chain-rule decision: independent heads assume a conditional independence the corpus violates by design -- the within-bulk label variance is driven by the shared hidden (P, H2O) path, and marginals forget which condition mode went with which support. Raw linear units are deliberate (no log transforms; negative mass is a diagnostic, not a bug -- mass_below_zero in the cond eval). init_output_bias seeds component means at target mean +/- 1 std and sigmas at the target std; without it Adam needs ~mu/lr steps to walk mu from 0 to ~900 C. lambda_cond nuance: L_cond's gradient reaches only CondHead's own weights (frozen encoder, separate trunks, teacher-forced input), and per-head clipping + Adam's per-parameter scaling make the constant nearly inert for optimization; per-head best selection (each head keeps its own raw-val best epoch) removed its old early-stopping lever too, leaving it a raw-unit scale absorber (mineralogy-first). Known limits: axes are independent mixtures (no (T, P) correlation, deferred per ADR 006); exposure bias measured, not yet mitigated (#31); T is a derived cooling endpoint, not a sampled axis, in the scenario view.</a:t>
             </a:r>
           </a:p>
         </p:txBody>
@@ -1222,7 +1223,7 @@
           <a:lstStyle/>
           <a:p>
             <a:r>
-              <a:t>Eval-semantics slide for CondHead. The two-pass protocol is the point: teacher-forced scoring isolates the head's conditional skill p(T,P,H2O | h, true support); sampled-support scoring measures the deployed chain with ModeHead's Bernoulli draws standing in for the truth (exposure_seed pins reproducibility). Mixture drawing illustrative but to scale for a bimodal amp/opx bulk (deep-wet vs shallow-dry is the flagship condition multimodality). Real numbers from runs/cond_head/joint_heads_seed0/metrics.json vs the preserved baseline: teacher-forced NLL 8.60 -&gt; 8.32 and coverage_68 0.65-0.69 -&gt; 0.67-0.72 (tuning + the 512x2 trunk), while the exposure delta WIDENED (T 2.91 -&gt; 3.94, H2O 1.53 -&gt; 2.40, P finite -&gt; inf on some rows) -- the sharper head is more wrong under mismatched supports. Coverage is central-interval mass via the mixture CDF (PIT), same construction as the mode/comp calibration reads.</a:t>
+              <a:t>Eval-semantics slide for CondHead. The two-pass protocol is the point: teacher-forced scoring isolates the head's conditional skill p(T,P,H2O | h, true support); sampled-support scoring measures the deployed chain with ModeHead's Bernoulli draws standing in for the truth (exposure_seed pins reproducibility). Mixture drawing illustrative but to scale for a bimodal amp/opx bulk (deep-wet vs shallow-dry is the flagship condition multimodality). Real numbers from runs/cond_head/joint_heads_regen_tuned_seed0/metrics.json against the same-corpus pre-sweep run: teacher-forced NLL 7.40 -&gt; 7.36 (T 4.762 -&gt; 4.727, P 1.562 -&gt; 1.558, H2O 1.080 -&gt; 1.072) while coverage drifted DOWN, 0.727/0.683/0.669 -&gt; 0.699/0.662/0.655, and the exposure delta widened on every axis (T 2.22 -&gt; 2.66, P 1.16 -&gt; 1.36, H2O 1.03 -&gt; 1.23) -- the sharper head is more wrong under mismatched supports, and slightly under-covering under matched ones. The sampled-support inf rows that used to appear here were a float32 underflow in the density guard, not a modelling failure; the per-axis NLL now goes through logsumexp, and those rows read 118-141 nats. Coverage is central-interval mass via the mixture CDF (PIT), same construction as the mode/comp calibration reads.</a:t>
             </a:r>
           </a:p>
         </p:txBody>
@@ -1292,7 +1293,7 @@
           <a:lstStyle/>
           <a:p>
             <a:r>
-              <a:t>Three corpora. Pretrain (Gard) is inputs-only and trains the encoder; the equilibrium corpus (MAGEMin cooling, phenocryst-regime endpoint -- generation pipeline on the next slide) carries the labels that train the heads; the real volcanic benchmark and mineralML grains are held out for validation.</a:t>
+              <a:t>Three corpora. Pretrain (Gard) is inputs-only and trains the encoder; the equilibrium corpus (MAGEMin cooling, phenocryst-regime endpoint -- generation pipeline on the next slide) carries the labels that train the heads; the real volcanic benchmark and mineralML grains are held out for validation. Counts are the traced regen (2026-07-27): train tier 35,000 bulks listed / 34,474 with rows x 24 draws x 2 rungs = 1.65M rows; a separate sealed valtest tier runs 2,000 bulks at 128 draws. The real benchmark is 724 rocks carrying both chemistry and modes, of which 640 least-altered form the headline cohort.</a:t>
             </a:r>
           </a:p>
         </p:txBody>
@@ -1362,7 +1363,7 @@
           <a:lstStyle/>
           <a:p>
             <a:r>
-              <a:t>Output FORM, not measured results (heads train in issue #10). ModeHead = hurdle Dirichlet over the crystals-renormalized solid assemblage (liq/fl dropped, solids sum to 1 -- matches real itemized-phenocrysts + lumped-groundmass granularity). EVERY phase gets a presence Bernoulli AND a conditional amount +/- CI; near-certain phases just have p~1. Amp 0.41 / opx 0.63 anti-correlated is the flagship multimodality (deep-wet-amp vs shallow-dry-opx), so their marginal amounts are conditional on presence, not rock-wide means. CondHead = per-axis GMM; P and H2O were sampled at generation, T is derived (cooling endpoint at the phenocryst window), hence the lower illustrative T. Second read-out view: top-K scenarios; weights labeled prior-weighted plausibility, reweightable p/q. Mass-balance closure teacher-forces the label melt fraction at training. Numbers illustrative.</a:t>
+              <a:t>The joint view the three anatomy slides decompose: every branch reads the same frozen 256-d h, and the four likelihood terms plus the closure penalty sum to one scalar. Two arrows are not plain feed-forward: the magnitude branch and CondHead take concat(h, support) -- the chain rule p(support | h) x p(rest | h, support), teacher-forced true mask at train, ModeHead-sampled at inference (exposure bias, #31). CompHead deliberately does NOT see the support: composition is bulk-controlled (heads.md). Closure is drawn as a joiner, not a fifth branch, because it has no parameters -- it multiplies ModeHead's support-masked Dirichlet mean by CompHead's Dirichlet mean and asks whether the reconstructed bulk matches the input; squared-L2 is a constraint penalty, not a head likelihood, so the no-MSE rule for heads does not apply. It is the one term coupling two heads. Weights and param counts are from the production run (checkpoints/joint_heads_regen_tuned_seed0, trial-22 dials adopted 2026-07-29). The reduction asymmetry in the last caption is a real footgun when transcribing the equation: BCE reduces over batch AND phases, the Dirichlet NLL over batch only, so magnitude_weight in the config is 1/21 of the coefficient you would write against a summed BCE. lambda_cond is small because L_cond is in raw units (T in the hundreds); it absorbs scale, it is not a statement about how much the conditions matter. Each head is snapshotted at its own best raw-val epoch and clipped separately, so the lambdas do not act as early-stopping levers. Not shown because they are not in the joint trainer: the auxiliary ClassHead and G_sys remain application slots, unimplemented.</a:t>
             </a:r>
           </a:p>
         </p:txBody>
@@ -1432,6 +1433,76 @@
           <a:lstStyle/>
           <a:p>
             <a:r>
+              <a:t>Output FORM, not measured results -- the numbers on this slide are illustrative even though the heads are trained. ModeHead = hurdle Dirichlet over the crystals-renormalized solid assemblage (liq/fl dropped, solids sum to 1 -- matches real itemized-phenocrysts + lumped-groundmass granularity). EVERY phase gets a presence Bernoulli AND a conditional amount +/- CI; near-certain phases just have p~1. Amp 0.41 / opx 0.63 anti-correlated is the flagship multimodality (deep-wet-amp vs shallow-dry-opx), so their marginal amounts are conditional on presence, not rock-wide means. CondHead = per-axis GMM; P and H2O were sampled at generation, T is derived (cooling endpoint at the phenocryst window), hence the lower illustrative T. Second read-out view: top-K scenarios; weights labeled prior-weighted plausibility, reweightable p/q. Mass-balance closure teacher-forces the label melt fraction at training. Numbers illustrative.</a:t>
+            </a:r>
+          </a:p>
+        </p:txBody>
+      </p:sp>
+      <p:sp>
+        <p:nvSpPr>
+          <p:cNvPr id="4" name="Slide Number Placeholder 3"/>
+          <p:cNvSpPr>
+            <a:spLocks noGrp="1"/>
+          </p:cNvSpPr>
+          <p:nvPr>
+            <p:ph type="sldNum" idx="5" sz="quarter"/>
+          </p:nvPr>
+        </p:nvSpPr>
+        <p:spPr/>
+      </p:sp>
+    </p:spTree>
+  </p:cSld>
+  <p:clrMapOvr>
+    <a:masterClrMapping/>
+  </p:clrMapOvr>
+</p:notes>
+</file>
+
+<file path=ppt/notesSlides/notesSlide22.xml><?xml version="1.0" encoding="utf-8"?>
+<p:notes xmlns:a="http://schemas.openxmlformats.org/drawingml/2006/main" xmlns:p="http://schemas.openxmlformats.org/presentationml/2006/main" xmlns:r="http://schemas.openxmlformats.org/officeDocument/2006/relationships">
+  <p:cSld>
+    <p:spTree>
+      <p:nvGrpSpPr>
+        <p:cNvPr id="1" name=""/>
+        <p:cNvGrpSpPr/>
+        <p:nvPr/>
+      </p:nvGrpSpPr>
+      <p:grpSpPr>
+        <a:xfrm>
+          <a:off x="0" y="0"/>
+          <a:ext cx="0" cy="0"/>
+          <a:chOff x="0" y="0"/>
+          <a:chExt cx="0" cy="0"/>
+        </a:xfrm>
+      </p:grpSpPr>
+      <p:sp>
+        <p:nvSpPr>
+          <p:cNvPr id="2" name="Slide Image Placeholder 1"/>
+          <p:cNvSpPr>
+            <a:spLocks noGrp="1"/>
+          </p:cNvSpPr>
+          <p:nvPr>
+            <p:ph type="sldImg" idx="2"/>
+          </p:nvPr>
+        </p:nvSpPr>
+        <p:spPr/>
+      </p:sp>
+      <p:sp>
+        <p:nvSpPr>
+          <p:cNvPr id="3" name="Notes Placeholder 2"/>
+          <p:cNvSpPr>
+            <a:spLocks noGrp="1"/>
+          </p:cNvSpPr>
+          <p:nvPr>
+            <p:ph type="body" idx="3" sz="quarter"/>
+          </p:nvPr>
+        </p:nvSpPr>
+        <p:spPr/>
+        <p:txBody>
+          <a:bodyPr/>
+          <a:lstStyle/>
+          <a:p>
+            <a:r>
               <a:t>View 2 from heads.md, modernized to the locked corpus design: crystals-renormalized (no residual-melt row -- melt-fraction head dropped), composition shared across scenarios (CompHead reads h only), no inference-time mass-balance checkmark (closure is teacher-forced at training; the inference residual as OOD signal is an open rethink). Marginal view = projection of these scenarios; scenarios are the primary object. The joint-sampling mechanism exists (two-step ancestral sampling: presence Bernoullis -&gt; support, then the support-conditioned magnitude Dirichlet and CondHead both condition on it -- scripts/view/scenario_view.py); per-scenario mode shares and conditions are genuinely re-predicted per support. Numbers illustrative.</a:t>
             </a:r>
           </a:p>
@@ -1502,7 +1573,7 @@
           <a:lstStyle/>
           <a:p>
             <a:r>
-              <a:t>The Track B label factory, left to right: stratified volcanic bulk tables; solubility-bounded Latin-Hypercube (P, H2O) draws with the proposal density stored per row; chunked MAGEMin equilibrium cooling stopped below 30% residual melt (fresh Julia worker per chunk, atomic parquet + manifest, rerun-to-resume); three tables with full labels at the four candidate rungs; crystals-renormalized training labels rebuilt at train time (presence cutoff is a rebuild, not a regen).</a:t>
+              <a:t>The Track B label factory, left to right: stratified volcanic bulk tables; trace-conditional (P, H2O) draws with the proposal density stored per row; chunked MAGEMin equilibrium cooling stopped below 30% residual melt (fresh Julia worker per chunk, atomic parquet + manifest, rerun-to-resume); three tables with full labels at the four candidate rungs; crystals-renormalized training labels rebuilt at train time (presence cutoff is a rebuild, not a regen). The sampler changed at the 2026-07-23 regen (#48): the solubility-bounded LHS that generated the pre-regen corpus is now the floor component of a per-bulk mixture -- an immobile-element discriminant cascade assigns each bulk a soft arc/ridge/intraplate posterior, and draws come from posterior-weighted per-(maficity, setting) literature boxes, falling back to per-class Wallace/Plank + Putirka ranges where traces are missing. The stored q carries the exact mixture density either way, so the p/q reweighting is unchanged.</a:t>
             </a:r>
           </a:p>
         </p:txBody>
@@ -1572,7 +1643,7 @@
           <a:lstStyle/>
           <a:p>
             <a:r>
-              <a:t>The one-to-many mapping that everything downstream leans on: one gard bulk -&gt; 48 solubility-bounded (P, H2O) draws -&gt; each read out at two melt-fraction rungs (50/30) -&gt; 96 label rows sharing one input vector. Assemblage numbers illustrative; amp-vs-opx flips with wetness/depth (the flagship multimodality). This is the visual justification for fractional presence targets (within-bulk frequency), the bulk-level split rule, and the per-bulk latent cache in training. Same-bulk-at-both-rungs is intentional (rungs LOCKED 50+30).</a:t>
+              <a:t>The one-to-many mapping that everything downstream leans on: one gard bulk -&gt; 24 trace-conditional (P, H2O) draws -&gt; each read out at two melt-fraction rungs (50/30) -&gt; 48 label rows sharing one input vector. The sealed valtest tier runs 128 draws per bulk (256 rows) so per-bulk frequencies are measured precisely where they are scored; 24 is where the training-side scaling curve flattened (#27). Assemblage numbers illustrative; amp-vs-opx flips with wetness/depth (the flagship multimodality). This is the visual justification for fractional presence targets (within-bulk frequency), the bulk-level split rule, and the per-bulk latent cache in training. Same-bulk-at-both-rungs is intentional (rungs LOCKED 50+30).</a:t>
             </a:r>
           </a:p>
         </p:txBody>
@@ -1642,7 +1713,7 @@
           <a:lstStyle/>
           <a:p>
             <a:r>
-              <a:t>Status strip for the corpus regen, now fully landed -- the slide is a record, not a plan. Candidate to retire or fold into the corpora slide at the next deck pass (owner call).</a:t>
+              <a:t>Status strip for the corpus regen, now fully landed -- the slide is a record, not a plan. Two generations have run: the first (2026-07-17, 10k train bulks x 48 broad-box draws) and the traced regen (2026-07-27) described here. Step 5 is cascade 1: heads retrained at the incumbent dials on the traced tiers, then a weights-only mini-HPO whose winner was adopted (joint_heads_regen_tuned_seed0). Cascade 2 -- swapping in the all-rock + redox encoder that was accepted 2026-07-28 -- has not run, which is why every architecture slide in this deck still shows the 22-token encoder. Candidate to retire or fold into the corpora slide at the next deck pass (owner call).</a:t>
             </a:r>
           </a:p>
         </p:txBody>
@@ -7072,7 +7143,7 @@
                   <a:srgbClr val="8A93A3"/>
                 </a:solidFill>
               </a:rPr>
-              <a:t>evaluation: frozen-latent probes + the held-out mineralML grains.</a:t>
+              <a:t>evaluation: frozen-latent probes, the held-out mineralML grains, and zero-shot scoring on the real-rock benchmark.</a:t>
             </a:r>
           </a:p>
         </p:txBody>
@@ -7873,11 +7944,11 @@
             <a:avLst/>
           </a:prstGeom>
           <a:solidFill>
-            <a:srgbClr val="E1F1EF"/>
+            <a:srgbClr val="FFFFFF"/>
           </a:solidFill>
-          <a:ln w="25400">
+          <a:ln w="12700">
             <a:solidFill>
-              <a:srgbClr val="2A9D8F"/>
+              <a:srgbClr val="C8CDD6"/>
             </a:solidFill>
           </a:ln>
           <a:effectLst/>
@@ -7904,7 +7975,7 @@
             <a:r>
               <a:rPr sz="1300" b="1">
                 <a:solidFill>
-                  <a:srgbClr val="1A2238"/>
+                  <a:srgbClr val="8A93A3"/>
                 </a:solidFill>
               </a:rPr>
               <a:t>ClassHead</a:t>
@@ -7918,7 +7989,7 @@
                   <a:srgbClr val="8A93A3"/>
                 </a:solidFill>
               </a:rPr>
-              <a:t>rock class (aux)</a:t>
+              <a:t>rock class -- slot, not built</a:t>
             </a:r>
           </a:p>
         </p:txBody>
@@ -7939,7 +8010,7 @@
           </a:prstGeom>
           <a:ln w="19050">
             <a:solidFill>
-              <a:srgbClr val="2A9D8F"/>
+              <a:srgbClr val="C8CDD6"/>
             </a:solidFill>
           </a:ln>
           <a:effectLst/>
@@ -7974,11 +8045,11 @@
             <a:avLst/>
           </a:prstGeom>
           <a:solidFill>
-            <a:srgbClr val="E1F1EF"/>
+            <a:srgbClr val="FFFFFF"/>
           </a:solidFill>
-          <a:ln w="25400">
+          <a:ln w="12700">
             <a:solidFill>
-              <a:srgbClr val="2A9D8F"/>
+              <a:srgbClr val="C8CDD6"/>
             </a:solidFill>
           </a:ln>
           <a:effectLst/>
@@ -8005,7 +8076,7 @@
             <a:r>
               <a:rPr sz="1300" b="1">
                 <a:solidFill>
-                  <a:srgbClr val="1A2238"/>
+                  <a:srgbClr val="8A93A3"/>
                 </a:solidFill>
               </a:rPr>
               <a:t>G_sys</a:t>
@@ -8019,7 +8090,7 @@
                   <a:srgbClr val="8A93A3"/>
                 </a:solidFill>
               </a:rPr>
-              <a:t>free energy (aux)</a:t>
+              <a:t>free energy -- slot, not built</a:t>
             </a:r>
           </a:p>
         </p:txBody>
@@ -8040,7 +8111,7 @@
           </a:prstGeom>
           <a:ln w="19050">
             <a:solidFill>
-              <a:srgbClr val="2A9D8F"/>
+              <a:srgbClr val="C8CDD6"/>
             </a:solidFill>
           </a:ln>
           <a:effectLst/>
@@ -8089,7 +8160,7 @@
                   <a:srgbClr val="1A2238"/>
                 </a:solidFill>
               </a:rPr>
-              <a:t>encoder now frozen; each head is a small network reading the same h (anatomy on the next slide, outputs after)</a:t>
+              <a:t>encoder now frozen; each head is a small network reading the same h. three are trained (anatomy on the next slide, outputs after); the two auxiliary ones stay open slots.</a:t>
             </a:r>
           </a:p>
         </p:txBody>
@@ -9004,7 +9075,7 @@
                   <a:srgbClr val="8A93A3"/>
                 </a:solidFill>
               </a:rPr>
-              <a:t>dials (configs/heads/joint_heads.yaml): mode_hidden 256 . mode_layers 3 . dropout 0.348 . magnitude_weight 0.25 . alpha_eps 1e-6 . lr 2.15e-4 . weight_decay 1.04e-5 . batch 1024 . epochs 120 / per-head patience 10 -- fixed in code: GELU, AdamW, grad-clip 1.0</a:t>
+              <a:t>dials (configs/heads/joint_heads.yaml): mode_hidden 256 . mode_layers 3 . dropout 0.160 . magnitude_weight 7.76 . alpha_eps 1e-6 . lr 3.36e-4 . weight_decay 1.59e-4 . batch 1024 . epochs 120 / per-head patience 10 -- fixed in code: GELU, AdamW, grad-clip 1.0</a:t>
             </a:r>
           </a:p>
         </p:txBody>
@@ -9199,7 +9270,7 @@
                   <a:srgbClr val="8A93A3"/>
                 </a:solidFill>
               </a:rPr>
-              <a:t>one backward pass; the trunks are param-disjoint, so λ_mag no longer arbitrates a shared trunk -- it balances the Dirichlet term against the mass-balance closure on the magnitude trunk</a:t>
+              <a:t>one backward pass; the trunks are param-disjoint, so λ_mag no longer arbitrates a shared trunk -- it sets how hard the Dirichlet term pulls relative to the presence term, and the sweep pushed it 31x up to 7.76</a:t>
             </a:r>
           </a:p>
         </p:txBody>
@@ -10491,7 +10562,7 @@
                   <a:srgbClr val="1A2238"/>
                 </a:solidFill>
               </a:rPr>
-              <a:t>3 rocks shown; the real figure pools the val-roster rocks only -- 218 rocks x ~255 rows = 55,576 (p, truth) pairs per mineral panel, partitioned across the 10 bins (the gray bars). Training rocks are excluded because a head that memorized them would grade itself calibrated. And since all ~255 rows of a rock share one prediction, a panel holds only 218 distinct p values, each stamped ~255x -- the effective sample size is rocks, not rows. The population is the fixed val roster of the sealed valtest tier (128 draws/rock at rungs 50+30), so panels are comparable across retrains.</a:t>
+              <a:t>3 rocks shown; the real figure pools the val-roster rocks only -- 871 rocks x ~256 rows = 222,717 (p, truth) pairs per mineral panel, partitioned across the 10 bins (the gray bars). Training rocks are excluded because a head that memorized them would grade itself calibrated. And since all ~256 rows of a rock share one prediction, a panel holds only 871 distinct p values, each stamped ~256x -- the effective sample size is rocks, not rows. The population is the fixed val roster of the sealed valtest tier (128 draws/rock at rungs 50+30), so panels are comparable across retrains.</a:t>
             </a:r>
           </a:p>
         </p:txBody>
@@ -10525,7 +10596,7 @@
                   <a:srgbClr val="8A93A3"/>
                 </a:solidFill>
               </a:rPr>
-              <a:t>BCE's per-rock minimum is the true fraction, so an honest head lands on the diagonal by construction. current limits (tuned model): intermediate-frequency presence is the miss mode (garnet recall 0.58 in f = [0.5, 0.9) and 0.0 elsewhere; opx 0.25 / ru 0.08 / ol 0.08 overall); spinel is the worst-calibrated panel (ECE 0.037); amphibole magnitude spread stays too narrow (next slide). full report: runs/mode_head/&lt;tag&gt;/</a:t>
+              <a:t>BCE's per-rock minimum is the true fraction, so an honest head lands on the diagonal by construction. current limits (production model): intermediate-frequency presence is the miss mode -- where a mineral grows on 10-50% of a rock's paths, recall runs 0.09-0.35, against 0.86-1.00 where it grows on &gt;90%; the rare phases (mu, ep, ky) are never called at all; spinel is the worst-calibrated panel (ECE 0.040). full report: runs/mode_head/&lt;tag&gt;/</a:t>
             </a:r>
           </a:p>
         </p:txBody>
@@ -11877,7 +11948,7 @@
                   <a:srgbClr val="8A93A3"/>
                 </a:solidFill>
               </a:rPr>
-              <a:t>population: only truly-present (row, phase) pairs are scored -- ~41k pairs for plag down to ~240 for andalusite; single-phase rows are excluded (nothing to size). current limits (support-conditioned model): amp parity r 0.876 (was 0.715 support-blind) and its mean-shifted PIT groups fell 65% -&gt; 41%; the surviving miss is the ~11% of amp groups bimodal WITHIN one support (mixture parameterization is the staged candidate, #25). full report: runs/mode_head/&lt;tag&gt;/ (magnitude_parity, magnitude_pit).</a:t>
+              <a:t>population: only truly-present (row, phase) pairs are scored -- ~177k pairs for plag down to ~340 for kyanite; single-phase rows are excluded (nothing to size). current limits (production model): amp parity r 0.886 teacher-forced but 0.580 on self-sampled supports; 47% of its PIT groups still sit mean-shifted and 11.5% are two-sided -- bimodal WITHIN one support (mixture parameterization is the staged candidate, #25). full report: runs/mode_head/&lt;tag&gt;/ (magnitude_parity, magnitude_pit).</a:t>
             </a:r>
           </a:p>
         </p:txBody>
@@ -12747,7 +12818,7 @@
                   <a:srgbClr val="1A2238"/>
                 </a:solidFill>
               </a:rPr>
-              <a:t>65,404 trainable params (trunk 32,896 + mean 29,799 + concentration 2,709) -- ~2.0% of the frozen encoder; the largest head, and still trivially retrainable.</a:t>
+              <a:t>65,404 trainable params (trunk 32,896 + mean 29,799 + concentration 2,709) -- ~2.0% of the frozen encoder, and the smallest of the three heads despite emitting the most numbers (21 x 11).</a:t>
             </a:r>
           </a:p>
         </p:txBody>
@@ -12781,7 +12852,7 @@
                   <a:srgbClr val="8A93A3"/>
                 </a:solidFill>
               </a:rPr>
-              <a:t>dials (configs/heads/joint_heads.yaml): comp_hidden 128 . comp_layers 1 (mini-sweep verdict: capacity above 128 x 1 hurts comp) . dropout 0.348 . alpha_eps 1e-6 . comp_eps 1e-4 (hard-zero clip on targets) . lambda_comp 1.0 . lambda_balance 54.5 -- fixed in code: GELU, AdamW, per-head grad-clip 1.0</a:t>
+              <a:t>dials (configs/heads/joint_heads.yaml): comp_hidden null -&gt; 128 . comp_layers 1 (mini-sweep verdict: capacity above 128 x 1 hurts comp) . dropout 0.160 . alpha_eps 1e-6 . comp_eps 1e-4 (hard-zero clip on targets) . lambda_comp 1.0 . lambda_balance 0.0118 -- fixed in code: GELU, AdamW, per-head grad-clip 1.0</a:t>
             </a:r>
           </a:p>
         </p:txBody>
@@ -14069,7 +14140,7 @@
                   <a:srgbClr val="1A2238"/>
                 </a:solidFill>
               </a:rPr>
-              <a:t>population: only truly-present (row, phase) pairs -- 42k for cpx down to ~240 for andalusite. headline (val roster, tuned): comp NLL -53.85 nats per present (row, phase), from -50.25 untuned; majors' PIT tails sit near the nominal 10% (cpx 0.055/0.056).</a:t>
+              <a:t>population: only truly-present (row, phase) pairs -- 161k for cpx down to ~340 for kyanite. headline (val roster, production): comp NLL -56.29 nats per present (row, phase); majors' PIT tails sit near the nominal 10% (cpx 0.040/0.055).</a:t>
             </a:r>
           </a:p>
         </p:txBody>
@@ -14103,7 +14174,7 @@
                   <a:srgbClr val="1A2238"/>
                 </a:solidFill>
               </a:rPr>
-              <a:t>the tuned confidence spans ~3 decades and tracks real mineralogy: near-stoichiometric phases (q, ru, sph, sill) earn alpha0 up to ~30,000 while wide solid solutions (spl, ilm, cpx) stay soft -- the untuned model hedged every phase into alpha0 100-650. mass balance closes to 1.3% mean L2 with signed per-oxide residuals centered on zero; plag An# parity r = 0.93.</a:t>
+              <a:t>confidence spans ~2.5 decades and tracks real mineralogy: near-stoichiometric phases earn median alpha0 ~40,000 (q), ~36,000 (ru), ~19,000 (sph) while wide solid solutions stay soft -- garnet ~170, spinel ~240, ilmenite ~480. mass balance closes to 1.1% mean L2 with signed per-oxide residuals centered on zero; plag An# parity r = 0.96.</a:t>
             </a:r>
           </a:p>
         </p:txBody>
@@ -15284,7 +15355,7 @@
                   <a:srgbClr val="8A93A3"/>
                 </a:solidFill>
               </a:rPr>
-              <a:t>dials (configs/heads/joint_heads.yaml): cond_n_components 3 . cond_sigma_eps 1e-3 . cond_hidden 512 . cond_layers 2 (adopted from the architecture mini-sweep) . dropout 0.348 . lambda_cond 0.01 -- fixed in code: GELU, AdamW, per-head grad-clip 1.0, linear units (no log transform of T/P/H2O)</a:t>
+              <a:t>dials (configs/heads/joint_heads.yaml): cond_n_components 3 . cond_sigma_eps 1e-3 . cond_hidden 512 . cond_layers 2 (adopted from the architecture mini-sweep) . dropout 0.160 . lambda_cond 0.01 -- fixed in code: GELU, AdamW, per-head grad-clip 1.0, linear units (no log transform of T/P/H2O)</a:t>
             </a:r>
           </a:p>
         </p:txBody>
@@ -16341,7 +16412,7 @@
                   <a:srgbClr val="8A93A3"/>
                 </a:solidFill>
               </a:rPr>
-              <a:t>68% band catches truth on 71.5% of rows (T),</a:t>
+              <a:t>68% band catches truth on 69.9% of rows (T),</a:t>
             </a:r>
           </a:p>
           <a:p>
@@ -16352,7 +16423,7 @@
                   <a:srgbClr val="8A93A3"/>
                 </a:solidFill>
               </a:rPr>
-              <a:t>67.1% (P), 68.4% (H2O) . NLL 8.32 nats/row (was 8.60)</a:t>
+              <a:t>66.2% (P), 65.5% (H2O) . NLL 7.36 nats/row</a:t>
             </a:r>
           </a:p>
         </p:txBody>
@@ -16417,7 +16488,7 @@
                   <a:srgbClr val="8A93A3"/>
                 </a:solidFill>
               </a:rPr>
-              <a:t>coverage collapses to 26-35% . NLL +2.4 to +3.9 nats/axis</a:t>
+              <a:t>coverage falls to 33% (T), 44% (P), 45% (H2O) . NLL +1.2 to +2.7</a:t>
             </a:r>
           </a:p>
           <a:p>
@@ -16428,7 +16499,7 @@
                   <a:srgbClr val="8A93A3"/>
                 </a:solidFill>
               </a:rPr>
-              <a:t>(P_kbar hits inf rows) -- sharper under truth = more wrong under mismatch</a:t>
+              <a:t>nats/axis -- sharper under truth = more wrong under mismatch</a:t>
             </a:r>
           </a:p>
         </p:txBody>
@@ -16496,7 +16567,7 @@
                   <a:srgbClr val="1A2238"/>
                 </a:solidFill>
               </a:rPr>
-              <a:t>population: all 55,576 val-roster rows, both scoring passes on the same rows with a fixed sampling seed. per-axis NLL (tuned, teacher-forced): T 4.97, P 1.82, H2O 1.53 -- summed 8.32.</a:t>
+              <a:t>population: all 222,717 val-roster rows, both scoring passes on the same rows with a fixed sampling seed. per-axis NLL (production, teacher-forced): T 4.73, P 1.56, H2O 1.07 -- summed 7.36.</a:t>
             </a:r>
           </a:p>
         </p:txBody>
@@ -16530,7 +16601,7 @@
                   <a:srgbClr val="8A93A3"/>
                 </a:solidFill>
               </a:rPr>
-              <a:t>current limits: axes are independent mixtures (no (T, P) correlation, deferred per ADR 006); T is a derived cooling endpoint, not a sampled axis; sampled-support P rows can blow up numerically (the inf rows are #31's starting point). full report: runs/cond_head/&lt;tag&gt;/</a:t>
+              <a:t>current limits: axes are independent mixtures (no (T, P) correlation, deferred per ADR 006); T is a derived cooling endpoint, not a sampled axis; badly mismatched supports drive individual rows past 100 nats (#31). full report: runs/cond_head/&lt;tag&gt;/</a:t>
             </a:r>
           </a:p>
         </p:txBody>
@@ -16801,7 +16872,7 @@
                   <a:srgbClr val="8A93A3"/>
                 </a:solidFill>
               </a:rPr>
-              <a:t>volcanic bulks x 48 (P, H2O) draws</a:t>
+              <a:t>35k volcanic bulks x 24 (P, H2O) draws</a:t>
             </a:r>
           </a:p>
           <a:p>
@@ -16812,7 +16883,7 @@
                   <a:srgbClr val="8A93A3"/>
                 </a:solidFill>
               </a:rPr>
-              <a:t>phenocryst-regime labels</a:t>
+              <a:t>1.65M phenocryst-regime rows</a:t>
             </a:r>
           </a:p>
         </p:txBody>
@@ -16888,7 +16959,7 @@
                   <a:srgbClr val="8A93A3"/>
                 </a:solidFill>
               </a:rPr>
-              <a:t>730 real volcanic modes</a:t>
+              <a:t>724 real volcanic rocks</a:t>
             </a:r>
           </a:p>
           <a:p>
@@ -17132,163 +17203,55 @@
                   <a:srgbClr val="1A2238"/>
                 </a:solidFill>
               </a:rPr>
-              <a:t>What the heads emit (distributions, not point estimates)</a:t>
-            </a:r>
-          </a:p>
-        </p:txBody>
-      </p:sp>
-      <p:sp>
-        <p:nvSpPr>
-          <p:cNvPr id="4" name="Rounded Rectangle 3"/>
+              <a:t>One latent, four branches, one scalar to minimize</a:t>
+            </a:r>
+          </a:p>
+        </p:txBody>
+      </p:sp>
+      <p:sp>
+        <p:nvSpPr>
+          <p:cNvPr id="4" name="TextBox 3"/>
+          <p:cNvSpPr txBox="1"/>
+          <p:nvPr/>
+        </p:nvSpPr>
+        <p:spPr>
+          <a:xfrm>
+            <a:off x="502920" y="1024128"/>
+            <a:ext cx="11155680" cy="731520"/>
+          </a:xfrm>
+          <a:prstGeom prst="rect">
+            <a:avLst/>
+          </a:prstGeom>
+          <a:noFill/>
+        </p:spPr>
+        <p:txBody>
+          <a:bodyPr wrap="square">
+            <a:spAutoFit/>
+          </a:bodyPr>
+          <a:lstStyle/>
+          <a:p>
+            <a:pPr algn="l"/>
+            <a:r>
+              <a:rPr sz="1200" b="0">
+                <a:solidFill>
+                  <a:srgbClr val="8A93A3"/>
+                </a:solidFill>
+              </a:rPr>
+              <a:t>the same frozen h feeds every branch; the two support-conditioned ones also take the assemblage set s (true set at train, ModeHead-sampled at inference). closure is the only term with no parameters of its own -- it is where two heads meet.</a:t>
+            </a:r>
+          </a:p>
+        </p:txBody>
+      </p:sp>
+      <p:sp>
+        <p:nvSpPr>
+          <p:cNvPr id="5" name="Oval 4"/>
           <p:cNvSpPr/>
           <p:nvPr/>
         </p:nvSpPr>
         <p:spPr>
           <a:xfrm>
-            <a:off x="502920" y="2651760"/>
-            <a:ext cx="2286000" cy="1554480"/>
-          </a:xfrm>
-          <a:prstGeom prst="roundRect">
-            <a:avLst/>
-          </a:prstGeom>
-          <a:solidFill>
-            <a:srgbClr val="E1E8FF"/>
-          </a:solidFill>
-          <a:ln w="25400">
-            <a:solidFill>
-              <a:srgbClr val="2E5BFF"/>
-            </a:solidFill>
-          </a:ln>
-          <a:effectLst/>
-        </p:spPr>
-        <p:style>
-          <a:lnRef idx="1">
-            <a:schemeClr val="accent1"/>
-          </a:lnRef>
-          <a:fillRef idx="3">
-            <a:schemeClr val="accent1"/>
-          </a:fillRef>
-          <a:effectRef idx="2">
-            <a:schemeClr val="accent1"/>
-          </a:effectRef>
-          <a:fontRef idx="minor">
-            <a:schemeClr val="lt1"/>
-          </a:fontRef>
-        </p:style>
-        <p:txBody>
-          <a:bodyPr rtlCol="0" anchor="ctr" wrap="square"/>
-          <a:lstStyle/>
-          <a:p>
-            <a:pPr algn="ctr"/>
-            <a:r>
-              <a:rPr sz="1200" b="1">
-                <a:solidFill>
-                  <a:srgbClr val="1A2238"/>
-                </a:solidFill>
-              </a:rPr>
-              <a:t>example bulk</a:t>
-            </a:r>
-          </a:p>
-          <a:p>
-            <a:pPr algn="ctr"/>
-            <a:r>
-              <a:rPr sz="1200" b="1">
-                <a:solidFill>
-                  <a:srgbClr val="1A2238"/>
-                </a:solidFill>
-              </a:rPr>
-              <a:t/>
-            </a:r>
-          </a:p>
-          <a:p>
-            <a:pPr algn="ctr"/>
-            <a:r>
-              <a:rPr sz="900" b="0">
-                <a:solidFill>
-                  <a:srgbClr val="8A93A3"/>
-                </a:solidFill>
-              </a:rPr>
-              <a:t>SiO2 50  Al2O3 16</a:t>
-            </a:r>
-          </a:p>
-          <a:p>
-            <a:pPr algn="ctr"/>
-            <a:r>
-              <a:rPr sz="900" b="0">
-                <a:solidFill>
-                  <a:srgbClr val="8A93A3"/>
-                </a:solidFill>
-              </a:rPr>
-              <a:t>MgO 7.5  FeO 11</a:t>
-            </a:r>
-          </a:p>
-          <a:p>
-            <a:pPr algn="ctr"/>
-            <a:r>
-              <a:rPr sz="900" b="0">
-                <a:solidFill>
-                  <a:srgbClr val="8A93A3"/>
-                </a:solidFill>
-              </a:rPr>
-              <a:t>Sr 400 ppm ...</a:t>
-            </a:r>
-          </a:p>
-        </p:txBody>
-      </p:sp>
-      <p:sp>
-        <p:nvSpPr>
-          <p:cNvPr id="5" name="Right Arrow 4"/>
-          <p:cNvSpPr/>
-          <p:nvPr/>
-        </p:nvSpPr>
-        <p:spPr>
-          <a:xfrm>
-            <a:off x="2880360" y="3246120"/>
-            <a:ext cx="457200" cy="365760"/>
-          </a:xfrm>
-          <a:prstGeom prst="rightArrow">
-            <a:avLst/>
-          </a:prstGeom>
-          <a:solidFill>
-            <a:srgbClr val="1A2238"/>
-          </a:solidFill>
-          <a:ln>
-            <a:noFill/>
-          </a:ln>
-          <a:effectLst/>
-        </p:spPr>
-        <p:style>
-          <a:lnRef idx="1">
-            <a:schemeClr val="accent1"/>
-          </a:lnRef>
-          <a:fillRef idx="3">
-            <a:schemeClr val="accent1"/>
-          </a:fillRef>
-          <a:effectRef idx="2">
-            <a:schemeClr val="accent1"/>
-          </a:effectRef>
-          <a:fontRef idx="minor">
-            <a:schemeClr val="lt1"/>
-          </a:fontRef>
-        </p:style>
-        <p:txBody>
-          <a:bodyPr rtlCol="0" anchor="ctr"/>
-          <a:lstStyle/>
-          <a:p>
-            <a:pPr algn="ctr"/>
-          </a:p>
-        </p:txBody>
-      </p:sp>
-      <p:sp>
-        <p:nvSpPr>
-          <p:cNvPr id="6" name="Oval 5"/>
-          <p:cNvSpPr/>
-          <p:nvPr/>
-        </p:nvSpPr>
-        <p:spPr>
-          <a:xfrm>
-            <a:off x="3456432" y="2770632"/>
-            <a:ext cx="1316736" cy="1316736"/>
+            <a:off x="548640" y="2423160"/>
+            <a:ext cx="1280160" cy="1280160"/>
           </a:xfrm>
           <a:prstGeom prst="ellipse">
             <a:avLst/>
@@ -17346,23 +17309,25 @@
       </p:sp>
       <p:sp>
         <p:nvSpPr>
-          <p:cNvPr id="7" name="Right Arrow 6"/>
+          <p:cNvPr id="6" name="Rounded Rectangle 5"/>
           <p:cNvSpPr/>
           <p:nvPr/>
         </p:nvSpPr>
         <p:spPr>
           <a:xfrm>
-            <a:off x="4892040" y="3246120"/>
-            <a:ext cx="457200" cy="365760"/>
-          </a:xfrm>
-          <a:prstGeom prst="rightArrow">
+            <a:off x="384048" y="3986784"/>
+            <a:ext cx="1627632" cy="548640"/>
+          </a:xfrm>
+          <a:prstGeom prst="roundRect">
             <a:avLst/>
           </a:prstGeom>
           <a:solidFill>
-            <a:srgbClr val="1A2238"/>
+            <a:srgbClr val="FBEEE3"/>
           </a:solidFill>
-          <a:ln>
-            <a:noFill/>
+          <a:ln w="25400">
+            <a:solidFill>
+              <a:srgbClr val="E8883A"/>
+            </a:solidFill>
           </a:ln>
           <a:effectLst/>
         </p:spPr>
@@ -17381,13 +17346,68 @@
           </a:fontRef>
         </p:style>
         <p:txBody>
-          <a:bodyPr rtlCol="0" anchor="ctr"/>
-          <a:lstStyle/>
-          <a:p>
-            <a:pPr algn="ctr"/>
-          </a:p>
-        </p:txBody>
-      </p:sp>
+          <a:bodyPr rtlCol="0" anchor="ctr" wrap="square"/>
+          <a:lstStyle/>
+          <a:p>
+            <a:pPr algn="ctr"/>
+            <a:r>
+              <a:rPr sz="1100" b="1">
+                <a:solidFill>
+                  <a:srgbClr val="1A2238"/>
+                </a:solidFill>
+              </a:rPr>
+              <a:t>s (21)</a:t>
+            </a:r>
+          </a:p>
+          <a:p>
+            <a:pPr algn="ctr"/>
+            <a:r>
+              <a:rPr sz="800" b="0">
+                <a:solidFill>
+                  <a:srgbClr val="8A93A3"/>
+                </a:solidFill>
+              </a:rPr>
+              <a:t>true set / sampled</a:t>
+            </a:r>
+          </a:p>
+        </p:txBody>
+      </p:sp>
+      <p:cxnSp>
+        <p:nvCxnSpPr>
+          <p:cNvPr id="7" name="Connector 6"/>
+          <p:cNvCxnSpPr/>
+          <p:nvPr/>
+        </p:nvCxnSpPr>
+        <p:spPr>
+          <a:xfrm flipV="1">
+            <a:off x="1828800" y="1783080"/>
+            <a:ext cx="1051560" cy="1280160"/>
+          </a:xfrm>
+          <a:prstGeom prst="bentConnector3">
+            <a:avLst/>
+          </a:prstGeom>
+          <a:ln w="19050">
+            <a:solidFill>
+              <a:srgbClr val="8A93A3"/>
+            </a:solidFill>
+          </a:ln>
+          <a:effectLst/>
+        </p:spPr>
+        <p:style>
+          <a:lnRef idx="2">
+            <a:schemeClr val="accent1"/>
+          </a:lnRef>
+          <a:fillRef idx="0">
+            <a:schemeClr val="accent1"/>
+          </a:fillRef>
+          <a:effectRef idx="1">
+            <a:schemeClr val="accent1"/>
+          </a:effectRef>
+          <a:fontRef idx="minor">
+            <a:schemeClr val="tx1"/>
+          </a:fontRef>
+        </p:style>
+      </p:cxnSp>
       <p:sp>
         <p:nvSpPr>
           <p:cNvPr id="8" name="Rounded Rectangle 7"/>
@@ -17396,8 +17416,8 @@
         </p:nvSpPr>
         <p:spPr>
           <a:xfrm>
-            <a:off x="5486400" y="1417320"/>
-            <a:ext cx="6309360" cy="2057400"/>
+            <a:off x="2880360" y="1417320"/>
+            <a:ext cx="3108960" cy="731520"/>
           </a:xfrm>
           <a:prstGeom prst="roundRect">
             <a:avLst/>
@@ -17432,66 +17452,54 @@
           <a:p>
             <a:pPr algn="ctr"/>
             <a:r>
-              <a:rPr sz="1300" b="1">
+              <a:rPr sz="1200" b="1">
                 <a:solidFill>
                   <a:srgbClr val="1A2238"/>
                 </a:solidFill>
               </a:rPr>
-              <a:t/>
-            </a:r>
-          </a:p>
-        </p:txBody>
-      </p:sp>
-      <p:sp>
-        <p:nvSpPr>
-          <p:cNvPr id="9" name="TextBox 8"/>
-          <p:cNvSpPr txBox="1"/>
-          <p:nvPr/>
-        </p:nvSpPr>
-        <p:spPr>
-          <a:xfrm>
-            <a:off x="5669280" y="1463040"/>
-            <a:ext cx="5943600" cy="731520"/>
-          </a:xfrm>
-          <a:prstGeom prst="rect">
-            <a:avLst/>
-          </a:prstGeom>
-          <a:noFill/>
-        </p:spPr>
-        <p:txBody>
-          <a:bodyPr wrap="square">
-            <a:spAutoFit/>
-          </a:bodyPr>
-          <a:lstStyle/>
-          <a:p>
-            <a:pPr algn="l"/>
-            <a:r>
-              <a:rPr sz="1200" b="0">
-                <a:solidFill>
-                  <a:srgbClr val="2A9D8F"/>
-                </a:solidFill>
-              </a:rPr>
-              <a:t>ModeHead -&gt; per phase: p(present) x amount-when-present (hurdle Dirichlet; crystals renormalized to 1, groundmass/melt excluded)</a:t>
-            </a:r>
-          </a:p>
-        </p:txBody>
-      </p:sp>
-      <p:sp>
-        <p:nvSpPr>
-          <p:cNvPr id="10" name="Rounded Rectangle 9"/>
+              <a:t>ModeHead . presence</a:t>
+            </a:r>
+          </a:p>
+          <a:p>
+            <a:pPr algn="ctr"/>
+            <a:r>
+              <a:rPr sz="900" b="0">
+                <a:solidFill>
+                  <a:srgbClr val="8A93A3"/>
+                </a:solidFill>
+              </a:rPr>
+              <a:t>3 x [Linear -&gt; 256] on h</a:t>
+            </a:r>
+          </a:p>
+          <a:p>
+            <a:pPr algn="ctr"/>
+            <a:r>
+              <a:rPr sz="900" b="0">
+                <a:solidFill>
+                  <a:srgbClr val="8A93A3"/>
+                </a:solidFill>
+              </a:rPr>
+              <a:t>Linear -&gt; 21, sigmoid</a:t>
+            </a:r>
+          </a:p>
+        </p:txBody>
+      </p:sp>
+      <p:sp>
+        <p:nvSpPr>
+          <p:cNvPr id="9" name="Right Arrow 8"/>
           <p:cNvSpPr/>
           <p:nvPr/>
         </p:nvSpPr>
         <p:spPr>
           <a:xfrm>
-            <a:off x="5715000" y="1874519"/>
-            <a:ext cx="1892807" cy="292608"/>
-          </a:xfrm>
-          <a:prstGeom prst="roundRect">
+            <a:off x="6446520" y="1636776"/>
+            <a:ext cx="274320" cy="292608"/>
+          </a:xfrm>
+          <a:prstGeom prst="rightArrow">
             <a:avLst/>
           </a:prstGeom>
           <a:solidFill>
-            <a:srgbClr val="2A9D8F"/>
+            <a:srgbClr val="1A2238"/>
           </a:solidFill>
           <a:ln>
             <a:noFill/>
@@ -17520,42 +17528,136 @@
           </a:p>
         </p:txBody>
       </p:sp>
-      <p:cxnSp>
-        <p:nvCxnSpPr>
-          <p:cNvPr id="11" name="Connector 10"/>
-          <p:cNvCxnSpPr/>
-          <p:nvPr/>
-        </p:nvCxnSpPr>
-        <p:spPr>
-          <a:xfrm>
-            <a:off x="7397496" y="2020824"/>
-            <a:ext cx="420624" cy="0"/>
-          </a:xfrm>
-          <a:prstGeom prst="bentConnector3">
-            <a:avLst/>
-          </a:prstGeom>
-          <a:ln w="15875">
+      <p:sp>
+        <p:nvSpPr>
+          <p:cNvPr id="10" name="Rounded Rectangle 9"/>
+          <p:cNvSpPr/>
+          <p:nvPr/>
+        </p:nvSpPr>
+        <p:spPr>
+          <a:xfrm>
+            <a:off x="6812280" y="1417320"/>
+            <a:ext cx="2194560" cy="731520"/>
+          </a:xfrm>
+          <a:prstGeom prst="roundRect">
+            <a:avLst/>
+          </a:prstGeom>
+          <a:solidFill>
+            <a:srgbClr val="FFFFFF"/>
+          </a:solidFill>
+          <a:ln w="12700">
             <a:solidFill>
-              <a:srgbClr val="1A2238"/>
+              <a:srgbClr val="C8CDD6"/>
             </a:solidFill>
           </a:ln>
           <a:effectLst/>
         </p:spPr>
         <p:style>
-          <a:lnRef idx="2">
-            <a:schemeClr val="accent1"/>
-          </a:lnRef>
-          <a:fillRef idx="0">
-            <a:schemeClr val="accent1"/>
-          </a:fillRef>
-          <a:effectRef idx="1">
-            <a:schemeClr val="accent1"/>
-          </a:effectRef>
-          <a:fontRef idx="minor">
-            <a:schemeClr val="tx1"/>
-          </a:fontRef>
-        </p:style>
-      </p:cxnSp>
+          <a:lnRef idx="1">
+            <a:schemeClr val="accent1"/>
+          </a:lnRef>
+          <a:fillRef idx="3">
+            <a:schemeClr val="accent1"/>
+          </a:fillRef>
+          <a:effectRef idx="2">
+            <a:schemeClr val="accent1"/>
+          </a:effectRef>
+          <a:fontRef idx="minor">
+            <a:schemeClr val="lt1"/>
+          </a:fontRef>
+        </p:style>
+        <p:txBody>
+          <a:bodyPr rtlCol="0" anchor="ctr" wrap="square"/>
+          <a:lstStyle/>
+          <a:p>
+            <a:pPr algn="ctr"/>
+            <a:r>
+              <a:rPr sz="1100" b="1">
+                <a:solidFill>
+                  <a:srgbClr val="8A93A3"/>
+                </a:solidFill>
+              </a:rPr>
+              <a:t>21 Bernoullis</a:t>
+            </a:r>
+          </a:p>
+          <a:p>
+            <a:pPr algn="ctr"/>
+            <a:r>
+              <a:rPr sz="800" b="0">
+                <a:solidFill>
+                  <a:srgbClr val="8A93A3"/>
+                </a:solidFill>
+              </a:rPr>
+              <a:t>which minerals are there</a:t>
+            </a:r>
+          </a:p>
+        </p:txBody>
+      </p:sp>
+      <p:sp>
+        <p:nvSpPr>
+          <p:cNvPr id="11" name="Rounded Rectangle 10"/>
+          <p:cNvSpPr/>
+          <p:nvPr/>
+        </p:nvSpPr>
+        <p:spPr>
+          <a:xfrm>
+            <a:off x="9144000" y="1417320"/>
+            <a:ext cx="2560320" cy="731520"/>
+          </a:xfrm>
+          <a:prstGeom prst="roundRect">
+            <a:avLst/>
+          </a:prstGeom>
+          <a:solidFill>
+            <a:srgbClr val="FFFFFF"/>
+          </a:solidFill>
+          <a:ln w="12700">
+            <a:solidFill>
+              <a:srgbClr val="C8CDD6"/>
+            </a:solidFill>
+          </a:ln>
+          <a:effectLst/>
+        </p:spPr>
+        <p:style>
+          <a:lnRef idx="1">
+            <a:schemeClr val="accent1"/>
+          </a:lnRef>
+          <a:fillRef idx="3">
+            <a:schemeClr val="accent1"/>
+          </a:fillRef>
+          <a:effectRef idx="2">
+            <a:schemeClr val="accent1"/>
+          </a:effectRef>
+          <a:fontRef idx="minor">
+            <a:schemeClr val="lt1"/>
+          </a:fontRef>
+        </p:style>
+        <p:txBody>
+          <a:bodyPr rtlCol="0" anchor="ctr" wrap="square"/>
+          <a:lstStyle/>
+          <a:p>
+            <a:pPr algn="ctr"/>
+            <a:r>
+              <a:rPr sz="1100" b="1">
+                <a:solidFill>
+                  <a:srgbClr val="8A93A3"/>
+                </a:solidFill>
+              </a:rPr>
+              <a:t>L_presence</a:t>
+            </a:r>
+          </a:p>
+          <a:p>
+            <a:pPr algn="ctr"/>
+            <a:r>
+              <a:rPr sz="800" b="0">
+                <a:solidFill>
+                  <a:srgbClr val="8A93A3"/>
+                </a:solidFill>
+              </a:rPr>
+              <a:t>−Σᵢ [ yᵢ ln pᵢ + (1−yᵢ) ln(1−pᵢ) ]</a:t>
+            </a:r>
+          </a:p>
+        </p:txBody>
+      </p:sp>
       <p:cxnSp>
         <p:nvCxnSpPr>
           <p:cNvPr id="12" name="Connector 11"/>
@@ -17563,16 +17665,16 @@
           <p:nvPr/>
         </p:nvCxnSpPr>
         <p:spPr>
-          <a:xfrm>
-            <a:off x="7397496" y="1956816"/>
-            <a:ext cx="0" cy="128015"/>
+          <a:xfrm flipV="1">
+            <a:off x="1828800" y="2633472"/>
+            <a:ext cx="1051560" cy="429768"/>
           </a:xfrm>
           <a:prstGeom prst="bentConnector3">
             <a:avLst/>
           </a:prstGeom>
-          <a:ln w="15875">
+          <a:ln w="19050">
             <a:solidFill>
-              <a:srgbClr val="1A2238"/>
+              <a:srgbClr val="8A93A3"/>
             </a:solidFill>
           </a:ln>
           <a:effectLst/>
@@ -17592,92 +17694,98 @@
           </a:fontRef>
         </p:style>
       </p:cxnSp>
-      <p:cxnSp>
-        <p:nvCxnSpPr>
-          <p:cNvPr id="13" name="Connector 12"/>
-          <p:cNvCxnSpPr/>
-          <p:nvPr/>
-        </p:nvCxnSpPr>
-        <p:spPr>
-          <a:xfrm>
-            <a:off x="7818120" y="1956816"/>
-            <a:ext cx="0" cy="128015"/>
-          </a:xfrm>
-          <a:prstGeom prst="bentConnector3">
-            <a:avLst/>
-          </a:prstGeom>
-          <a:ln w="15875">
+      <p:sp>
+        <p:nvSpPr>
+          <p:cNvPr id="13" name="Rounded Rectangle 12"/>
+          <p:cNvSpPr/>
+          <p:nvPr/>
+        </p:nvSpPr>
+        <p:spPr>
+          <a:xfrm>
+            <a:off x="2880360" y="2267712"/>
+            <a:ext cx="3108960" cy="731520"/>
+          </a:xfrm>
+          <a:prstGeom prst="roundRect">
+            <a:avLst/>
+          </a:prstGeom>
+          <a:solidFill>
+            <a:srgbClr val="FBEEE3"/>
+          </a:solidFill>
+          <a:ln w="25400">
             <a:solidFill>
-              <a:srgbClr val="1A2238"/>
+              <a:srgbClr val="E8883A"/>
             </a:solidFill>
           </a:ln>
           <a:effectLst/>
         </p:spPr>
         <p:style>
-          <a:lnRef idx="2">
-            <a:schemeClr val="accent1"/>
-          </a:lnRef>
-          <a:fillRef idx="0">
-            <a:schemeClr val="accent1"/>
-          </a:fillRef>
-          <a:effectRef idx="1">
-            <a:schemeClr val="accent1"/>
-          </a:effectRef>
-          <a:fontRef idx="minor">
-            <a:schemeClr val="tx1"/>
-          </a:fontRef>
-        </p:style>
-      </p:cxnSp>
-      <p:sp>
-        <p:nvSpPr>
-          <p:cNvPr id="14" name="TextBox 13"/>
-          <p:cNvSpPr txBox="1"/>
-          <p:nvPr/>
-        </p:nvSpPr>
-        <p:spPr>
-          <a:xfrm>
-            <a:off x="7909560" y="1828799"/>
-            <a:ext cx="4206240" cy="365760"/>
-          </a:xfrm>
-          <a:prstGeom prst="rect">
-            <a:avLst/>
-          </a:prstGeom>
-          <a:noFill/>
-        </p:spPr>
-        <p:txBody>
-          <a:bodyPr wrap="square">
-            <a:spAutoFit/>
-          </a:bodyPr>
-          <a:lstStyle/>
-          <a:p>
-            <a:pPr algn="l"/>
-            <a:r>
-              <a:rPr sz="1200" b="0">
+          <a:lnRef idx="1">
+            <a:schemeClr val="accent1"/>
+          </a:lnRef>
+          <a:fillRef idx="3">
+            <a:schemeClr val="accent1"/>
+          </a:fillRef>
+          <a:effectRef idx="2">
+            <a:schemeClr val="accent1"/>
+          </a:effectRef>
+          <a:fontRef idx="minor">
+            <a:schemeClr val="lt1"/>
+          </a:fontRef>
+        </p:style>
+        <p:txBody>
+          <a:bodyPr rtlCol="0" anchor="ctr" wrap="square"/>
+          <a:lstStyle/>
+          <a:p>
+            <a:pPr algn="ctr"/>
+            <a:r>
+              <a:rPr sz="1200" b="1">
                 <a:solidFill>
                   <a:srgbClr val="1A2238"/>
                 </a:solidFill>
               </a:rPr>
-              <a:t>plagioclase  0.45  |  p 1.00</a:t>
-            </a:r>
-          </a:p>
-        </p:txBody>
-      </p:sp>
-      <p:sp>
-        <p:nvSpPr>
-          <p:cNvPr id="15" name="Rounded Rectangle 14"/>
+              <a:t>ModeHead . magnitude</a:t>
+            </a:r>
+          </a:p>
+          <a:p>
+            <a:pPr algn="ctr"/>
+            <a:r>
+              <a:rPr sz="900" b="0">
+                <a:solidFill>
+                  <a:srgbClr val="8A93A3"/>
+                </a:solidFill>
+              </a:rPr>
+              <a:t>3 x [Linear -&gt; 256] on [h ; s]</a:t>
+            </a:r>
+          </a:p>
+          <a:p>
+            <a:pPr algn="ctr"/>
+            <a:r>
+              <a:rPr sz="900" b="0">
+                <a:solidFill>
+                  <a:srgbClr val="8A93A3"/>
+                </a:solidFill>
+              </a:rPr>
+              <a:t>Linear -&gt; 21, softplus</a:t>
+            </a:r>
+          </a:p>
+        </p:txBody>
+      </p:sp>
+      <p:sp>
+        <p:nvSpPr>
+          <p:cNvPr id="14" name="Right Arrow 13"/>
           <p:cNvSpPr/>
           <p:nvPr/>
         </p:nvSpPr>
         <p:spPr>
           <a:xfrm>
-            <a:off x="5715000" y="2185415"/>
-            <a:ext cx="1135684" cy="292608"/>
-          </a:xfrm>
-          <a:prstGeom prst="roundRect">
+            <a:off x="6446520" y="2487168"/>
+            <a:ext cx="274320" cy="292608"/>
+          </a:xfrm>
+          <a:prstGeom prst="rightArrow">
             <a:avLst/>
           </a:prstGeom>
           <a:solidFill>
-            <a:srgbClr val="2A9D8F"/>
+            <a:srgbClr val="1A2238"/>
           </a:solidFill>
           <a:ln>
             <a:noFill/>
@@ -17706,42 +17814,136 @@
           </a:p>
         </p:txBody>
       </p:sp>
-      <p:cxnSp>
-        <p:nvCxnSpPr>
-          <p:cNvPr id="16" name="Connector 15"/>
-          <p:cNvCxnSpPr/>
-          <p:nvPr/>
-        </p:nvCxnSpPr>
-        <p:spPr>
-          <a:xfrm>
-            <a:off x="6682435" y="2331720"/>
-            <a:ext cx="336499" cy="0"/>
-          </a:xfrm>
-          <a:prstGeom prst="bentConnector3">
-            <a:avLst/>
-          </a:prstGeom>
-          <a:ln w="15875">
+      <p:sp>
+        <p:nvSpPr>
+          <p:cNvPr id="15" name="Rounded Rectangle 14"/>
+          <p:cNvSpPr/>
+          <p:nvPr/>
+        </p:nvSpPr>
+        <p:spPr>
+          <a:xfrm>
+            <a:off x="6812280" y="2267712"/>
+            <a:ext cx="2194560" cy="731520"/>
+          </a:xfrm>
+          <a:prstGeom prst="roundRect">
+            <a:avLst/>
+          </a:prstGeom>
+          <a:solidFill>
+            <a:srgbClr val="FFFFFF"/>
+          </a:solidFill>
+          <a:ln w="12700">
             <a:solidFill>
-              <a:srgbClr val="1A2238"/>
+              <a:srgbClr val="C8CDD6"/>
             </a:solidFill>
           </a:ln>
           <a:effectLst/>
         </p:spPr>
         <p:style>
-          <a:lnRef idx="2">
-            <a:schemeClr val="accent1"/>
-          </a:lnRef>
-          <a:fillRef idx="0">
-            <a:schemeClr val="accent1"/>
-          </a:fillRef>
-          <a:effectRef idx="1">
-            <a:schemeClr val="accent1"/>
-          </a:effectRef>
-          <a:fontRef idx="minor">
-            <a:schemeClr val="tx1"/>
-          </a:fontRef>
-        </p:style>
-      </p:cxnSp>
+          <a:lnRef idx="1">
+            <a:schemeClr val="accent1"/>
+          </a:lnRef>
+          <a:fillRef idx="3">
+            <a:schemeClr val="accent1"/>
+          </a:fillRef>
+          <a:effectRef idx="2">
+            <a:schemeClr val="accent1"/>
+          </a:effectRef>
+          <a:fontRef idx="minor">
+            <a:schemeClr val="lt1"/>
+          </a:fontRef>
+        </p:style>
+        <p:txBody>
+          <a:bodyPr rtlCol="0" anchor="ctr" wrap="square"/>
+          <a:lstStyle/>
+          <a:p>
+            <a:pPr algn="ctr"/>
+            <a:r>
+              <a:rPr sz="1100" b="1">
+                <a:solidFill>
+                  <a:srgbClr val="8A93A3"/>
+                </a:solidFill>
+              </a:rPr>
+              <a:t>Dirichlet on the support</a:t>
+            </a:r>
+          </a:p>
+          <a:p>
+            <a:pPr algn="ctr"/>
+            <a:r>
+              <a:rPr sz="800" b="0">
+                <a:solidFill>
+                  <a:srgbClr val="8A93A3"/>
+                </a:solidFill>
+              </a:rPr>
+              <a:t>how much, given that set</a:t>
+            </a:r>
+          </a:p>
+        </p:txBody>
+      </p:sp>
+      <p:sp>
+        <p:nvSpPr>
+          <p:cNvPr id="16" name="Rounded Rectangle 15"/>
+          <p:cNvSpPr/>
+          <p:nvPr/>
+        </p:nvSpPr>
+        <p:spPr>
+          <a:xfrm>
+            <a:off x="9144000" y="2267712"/>
+            <a:ext cx="2560320" cy="731520"/>
+          </a:xfrm>
+          <a:prstGeom prst="roundRect">
+            <a:avLst/>
+          </a:prstGeom>
+          <a:solidFill>
+            <a:srgbClr val="FFFFFF"/>
+          </a:solidFill>
+          <a:ln w="12700">
+            <a:solidFill>
+              <a:srgbClr val="C8CDD6"/>
+            </a:solidFill>
+          </a:ln>
+          <a:effectLst/>
+        </p:spPr>
+        <p:style>
+          <a:lnRef idx="1">
+            <a:schemeClr val="accent1"/>
+          </a:lnRef>
+          <a:fillRef idx="3">
+            <a:schemeClr val="accent1"/>
+          </a:fillRef>
+          <a:effectRef idx="2">
+            <a:schemeClr val="accent1"/>
+          </a:effectRef>
+          <a:fontRef idx="minor">
+            <a:schemeClr val="lt1"/>
+          </a:fontRef>
+        </p:style>
+        <p:txBody>
+          <a:bodyPr rtlCol="0" anchor="ctr" wrap="square"/>
+          <a:lstStyle/>
+          <a:p>
+            <a:pPr algn="ctr"/>
+            <a:r>
+              <a:rPr sz="1100" b="1">
+                <a:solidFill>
+                  <a:srgbClr val="8A93A3"/>
+                </a:solidFill>
+              </a:rPr>
+              <a:t>λ_mag · L_magnitude</a:t>
+            </a:r>
+          </a:p>
+          <a:p>
+            <a:pPr algn="ctr"/>
+            <a:r>
+              <a:rPr sz="800" b="0">
+                <a:solidFill>
+                  <a:srgbClr val="8A93A3"/>
+                </a:solidFill>
+              </a:rPr>
+              <a:t>−log Dir(mₛ | αₛ), present set only</a:t>
+            </a:r>
+          </a:p>
+        </p:txBody>
+      </p:sp>
       <p:cxnSp>
         <p:nvCxnSpPr>
           <p:cNvPr id="17" name="Connector 16"/>
@@ -17750,15 +17952,15 @@
         </p:nvCxnSpPr>
         <p:spPr>
           <a:xfrm>
-            <a:off x="6682435" y="2267712"/>
-            <a:ext cx="0" cy="128015"/>
+            <a:off x="1828800" y="3063240"/>
+            <a:ext cx="1051560" cy="420624"/>
           </a:xfrm>
           <a:prstGeom prst="bentConnector3">
             <a:avLst/>
           </a:prstGeom>
-          <a:ln w="15875">
+          <a:ln w="19050">
             <a:solidFill>
-              <a:srgbClr val="1A2238"/>
+              <a:srgbClr val="8A93A3"/>
             </a:solidFill>
           </a:ln>
           <a:effectLst/>
@@ -17778,92 +17980,98 @@
           </a:fontRef>
         </p:style>
       </p:cxnSp>
-      <p:cxnSp>
-        <p:nvCxnSpPr>
-          <p:cNvPr id="18" name="Connector 17"/>
-          <p:cNvCxnSpPr/>
-          <p:nvPr/>
-        </p:nvCxnSpPr>
-        <p:spPr>
-          <a:xfrm>
-            <a:off x="7018934" y="2267712"/>
-            <a:ext cx="0" cy="128015"/>
-          </a:xfrm>
-          <a:prstGeom prst="bentConnector3">
-            <a:avLst/>
-          </a:prstGeom>
-          <a:ln w="15875">
+      <p:sp>
+        <p:nvSpPr>
+          <p:cNvPr id="18" name="Rounded Rectangle 17"/>
+          <p:cNvSpPr/>
+          <p:nvPr/>
+        </p:nvSpPr>
+        <p:spPr>
+          <a:xfrm>
+            <a:off x="2880360" y="3118104"/>
+            <a:ext cx="3108960" cy="731520"/>
+          </a:xfrm>
+          <a:prstGeom prst="roundRect">
+            <a:avLst/>
+          </a:prstGeom>
+          <a:solidFill>
+            <a:srgbClr val="DDF4F2"/>
+          </a:solidFill>
+          <a:ln w="25400">
             <a:solidFill>
-              <a:srgbClr val="1A2238"/>
+              <a:srgbClr val="12B5A5"/>
             </a:solidFill>
           </a:ln>
           <a:effectLst/>
         </p:spPr>
         <p:style>
-          <a:lnRef idx="2">
-            <a:schemeClr val="accent1"/>
-          </a:lnRef>
-          <a:fillRef idx="0">
-            <a:schemeClr val="accent1"/>
-          </a:fillRef>
-          <a:effectRef idx="1">
-            <a:schemeClr val="accent1"/>
-          </a:effectRef>
-          <a:fontRef idx="minor">
-            <a:schemeClr val="tx1"/>
-          </a:fontRef>
-        </p:style>
-      </p:cxnSp>
-      <p:sp>
-        <p:nvSpPr>
-          <p:cNvPr id="19" name="TextBox 18"/>
-          <p:cNvSpPr txBox="1"/>
-          <p:nvPr/>
-        </p:nvSpPr>
-        <p:spPr>
-          <a:xfrm>
-            <a:off x="7110374" y="2139696"/>
-            <a:ext cx="4206240" cy="365760"/>
-          </a:xfrm>
-          <a:prstGeom prst="rect">
-            <a:avLst/>
-          </a:prstGeom>
-          <a:noFill/>
-        </p:spPr>
-        <p:txBody>
-          <a:bodyPr wrap="square">
-            <a:spAutoFit/>
-          </a:bodyPr>
-          <a:lstStyle/>
-          <a:p>
-            <a:pPr algn="l"/>
-            <a:r>
-              <a:rPr sz="1200" b="0">
+          <a:lnRef idx="1">
+            <a:schemeClr val="accent1"/>
+          </a:lnRef>
+          <a:fillRef idx="3">
+            <a:schemeClr val="accent1"/>
+          </a:fillRef>
+          <a:effectRef idx="2">
+            <a:schemeClr val="accent1"/>
+          </a:effectRef>
+          <a:fontRef idx="minor">
+            <a:schemeClr val="lt1"/>
+          </a:fontRef>
+        </p:style>
+        <p:txBody>
+          <a:bodyPr rtlCol="0" anchor="ctr" wrap="square"/>
+          <a:lstStyle/>
+          <a:p>
+            <a:pPr algn="ctr"/>
+            <a:r>
+              <a:rPr sz="1200" b="1">
                 <a:solidFill>
                   <a:srgbClr val="1A2238"/>
                 </a:solidFill>
               </a:rPr>
-              <a:t>clinopyroxene  0.27  |  p 0.97</a:t>
-            </a:r>
-          </a:p>
-        </p:txBody>
-      </p:sp>
-      <p:sp>
-        <p:nvSpPr>
-          <p:cNvPr id="20" name="Rounded Rectangle 19"/>
+              <a:t>CompHead</a:t>
+            </a:r>
+          </a:p>
+          <a:p>
+            <a:pPr algn="ctr"/>
+            <a:r>
+              <a:rPr sz="900" b="0">
+                <a:solidFill>
+                  <a:srgbClr val="8A93A3"/>
+                </a:solidFill>
+              </a:rPr>
+              <a:t>1 x [Linear -&gt; 128] on h</a:t>
+            </a:r>
+          </a:p>
+          <a:p>
+            <a:pPr algn="ctr"/>
+            <a:r>
+              <a:rPr sz="900" b="0">
+                <a:solidFill>
+                  <a:srgbClr val="8A93A3"/>
+                </a:solidFill>
+              </a:rPr>
+              <a:t>softmax mean x softplus concentration</a:t>
+            </a:r>
+          </a:p>
+        </p:txBody>
+      </p:sp>
+      <p:sp>
+        <p:nvSpPr>
+          <p:cNvPr id="19" name="Right Arrow 18"/>
           <p:cNvSpPr/>
           <p:nvPr/>
         </p:nvSpPr>
         <p:spPr>
           <a:xfrm>
-            <a:off x="5715000" y="2496312"/>
-            <a:ext cx="757123" cy="292608"/>
-          </a:xfrm>
-          <a:prstGeom prst="roundRect">
+            <a:off x="6446520" y="3337560"/>
+            <a:ext cx="274320" cy="292608"/>
+          </a:xfrm>
+          <a:prstGeom prst="rightArrow">
             <a:avLst/>
           </a:prstGeom>
           <a:solidFill>
-            <a:srgbClr val="A9D7D2"/>
+            <a:srgbClr val="1A2238"/>
           </a:solidFill>
           <a:ln>
             <a:noFill/>
@@ -17892,42 +18100,136 @@
           </a:p>
         </p:txBody>
       </p:sp>
-      <p:cxnSp>
-        <p:nvCxnSpPr>
-          <p:cNvPr id="21" name="Connector 20"/>
-          <p:cNvCxnSpPr/>
-          <p:nvPr/>
-        </p:nvCxnSpPr>
-        <p:spPr>
-          <a:xfrm>
-            <a:off x="6219748" y="2642616"/>
-            <a:ext cx="504749" cy="0"/>
-          </a:xfrm>
-          <a:prstGeom prst="bentConnector3">
-            <a:avLst/>
-          </a:prstGeom>
-          <a:ln w="15875">
+      <p:sp>
+        <p:nvSpPr>
+          <p:cNvPr id="20" name="Rounded Rectangle 19"/>
+          <p:cNvSpPr/>
+          <p:nvPr/>
+        </p:nvSpPr>
+        <p:spPr>
+          <a:xfrm>
+            <a:off x="6812280" y="3118104"/>
+            <a:ext cx="2194560" cy="731520"/>
+          </a:xfrm>
+          <a:prstGeom prst="roundRect">
+            <a:avLst/>
+          </a:prstGeom>
+          <a:solidFill>
+            <a:srgbClr val="FFFFFF"/>
+          </a:solidFill>
+          <a:ln w="12700">
             <a:solidFill>
-              <a:srgbClr val="1A2238"/>
+              <a:srgbClr val="C8CDD6"/>
             </a:solidFill>
           </a:ln>
           <a:effectLst/>
         </p:spPr>
         <p:style>
-          <a:lnRef idx="2">
-            <a:schemeClr val="accent1"/>
-          </a:lnRef>
-          <a:fillRef idx="0">
-            <a:schemeClr val="accent1"/>
-          </a:fillRef>
-          <a:effectRef idx="1">
-            <a:schemeClr val="accent1"/>
-          </a:effectRef>
-          <a:fontRef idx="minor">
-            <a:schemeClr val="tx1"/>
-          </a:fontRef>
-        </p:style>
-      </p:cxnSp>
+          <a:lnRef idx="1">
+            <a:schemeClr val="accent1"/>
+          </a:lnRef>
+          <a:fillRef idx="3">
+            <a:schemeClr val="accent1"/>
+          </a:fillRef>
+          <a:effectRef idx="2">
+            <a:schemeClr val="accent1"/>
+          </a:effectRef>
+          <a:fontRef idx="minor">
+            <a:schemeClr val="lt1"/>
+          </a:fontRef>
+        </p:style>
+        <p:txBody>
+          <a:bodyPr rtlCol="0" anchor="ctr" wrap="square"/>
+          <a:lstStyle/>
+          <a:p>
+            <a:pPr algn="ctr"/>
+            <a:r>
+              <a:rPr sz="1100" b="1">
+                <a:solidFill>
+                  <a:srgbClr val="8A93A3"/>
+                </a:solidFill>
+              </a:rPr>
+              <a:t>21 Dirichlets x 11 oxides</a:t>
+            </a:r>
+          </a:p>
+          <a:p>
+            <a:pPr algn="ctr"/>
+            <a:r>
+              <a:rPr sz="800" b="0">
+                <a:solidFill>
+                  <a:srgbClr val="8A93A3"/>
+                </a:solidFill>
+              </a:rPr>
+              <a:t>what each mineral is made of</a:t>
+            </a:r>
+          </a:p>
+        </p:txBody>
+      </p:sp>
+      <p:sp>
+        <p:nvSpPr>
+          <p:cNvPr id="21" name="Rounded Rectangle 20"/>
+          <p:cNvSpPr/>
+          <p:nvPr/>
+        </p:nvSpPr>
+        <p:spPr>
+          <a:xfrm>
+            <a:off x="9144000" y="3118104"/>
+            <a:ext cx="2560320" cy="731520"/>
+          </a:xfrm>
+          <a:prstGeom prst="roundRect">
+            <a:avLst/>
+          </a:prstGeom>
+          <a:solidFill>
+            <a:srgbClr val="FFFFFF"/>
+          </a:solidFill>
+          <a:ln w="12700">
+            <a:solidFill>
+              <a:srgbClr val="C8CDD6"/>
+            </a:solidFill>
+          </a:ln>
+          <a:effectLst/>
+        </p:spPr>
+        <p:style>
+          <a:lnRef idx="1">
+            <a:schemeClr val="accent1"/>
+          </a:lnRef>
+          <a:fillRef idx="3">
+            <a:schemeClr val="accent1"/>
+          </a:fillRef>
+          <a:effectRef idx="2">
+            <a:schemeClr val="accent1"/>
+          </a:effectRef>
+          <a:fontRef idx="minor">
+            <a:schemeClr val="lt1"/>
+          </a:fontRef>
+        </p:style>
+        <p:txBody>
+          <a:bodyPr rtlCol="0" anchor="ctr" wrap="square"/>
+          <a:lstStyle/>
+          <a:p>
+            <a:pPr algn="ctr"/>
+            <a:r>
+              <a:rPr sz="1100" b="1">
+                <a:solidFill>
+                  <a:srgbClr val="8A93A3"/>
+                </a:solidFill>
+              </a:rPr>
+              <a:t>λ_comp · L_comp</a:t>
+            </a:r>
+          </a:p>
+          <a:p>
+            <a:pPr algn="ctr"/>
+            <a:r>
+              <a:rPr sz="800" b="0">
+                <a:solidFill>
+                  <a:srgbClr val="8A93A3"/>
+                </a:solidFill>
+              </a:rPr>
+              <a:t>−mean_{p ∈ S} log Dir(xₚ | αₚ)</a:t>
+            </a:r>
+          </a:p>
+        </p:txBody>
+      </p:sp>
       <p:cxnSp>
         <p:nvCxnSpPr>
           <p:cNvPr id="22" name="Connector 21"/>
@@ -17936,15 +18238,15 @@
         </p:nvCxnSpPr>
         <p:spPr>
           <a:xfrm>
-            <a:off x="6219748" y="2578608"/>
-            <a:ext cx="0" cy="128016"/>
+            <a:off x="1828800" y="3063240"/>
+            <a:ext cx="1051560" cy="1271016"/>
           </a:xfrm>
           <a:prstGeom prst="bentConnector3">
             <a:avLst/>
           </a:prstGeom>
-          <a:ln w="15875">
+          <a:ln w="19050">
             <a:solidFill>
-              <a:srgbClr val="1A2238"/>
+              <a:srgbClr val="8A93A3"/>
             </a:solidFill>
           </a:ln>
           <a:effectLst/>
@@ -17964,458 +18266,16 @@
           </a:fontRef>
         </p:style>
       </p:cxnSp>
-      <p:cxnSp>
-        <p:nvCxnSpPr>
-          <p:cNvPr id="23" name="Connector 22"/>
-          <p:cNvCxnSpPr/>
-          <p:nvPr/>
-        </p:nvCxnSpPr>
-        <p:spPr>
-          <a:xfrm>
-            <a:off x="6724497" y="2578608"/>
-            <a:ext cx="0" cy="128016"/>
-          </a:xfrm>
-          <a:prstGeom prst="bentConnector3">
-            <a:avLst/>
-          </a:prstGeom>
-          <a:ln w="15875">
-            <a:solidFill>
-              <a:srgbClr val="1A2238"/>
-            </a:solidFill>
-          </a:ln>
-          <a:effectLst/>
-        </p:spPr>
-        <p:style>
-          <a:lnRef idx="2">
-            <a:schemeClr val="accent1"/>
-          </a:lnRef>
-          <a:fillRef idx="0">
-            <a:schemeClr val="accent1"/>
-          </a:fillRef>
-          <a:effectRef idx="1">
-            <a:schemeClr val="accent1"/>
-          </a:effectRef>
-          <a:fontRef idx="minor">
-            <a:schemeClr val="tx1"/>
-          </a:fontRef>
-        </p:style>
-      </p:cxnSp>
-      <p:sp>
-        <p:nvSpPr>
-          <p:cNvPr id="24" name="TextBox 23"/>
-          <p:cNvSpPr txBox="1"/>
-          <p:nvPr/>
-        </p:nvSpPr>
-        <p:spPr>
-          <a:xfrm>
-            <a:off x="6815937" y="2450592"/>
-            <a:ext cx="4206240" cy="365760"/>
-          </a:xfrm>
-          <a:prstGeom prst="rect">
-            <a:avLst/>
-          </a:prstGeom>
-          <a:noFill/>
-        </p:spPr>
-        <p:txBody>
-          <a:bodyPr wrap="square">
-            <a:spAutoFit/>
-          </a:bodyPr>
-          <a:lstStyle/>
-          <a:p>
-            <a:pPr algn="l"/>
-            <a:r>
-              <a:rPr sz="1200" b="0">
-                <a:solidFill>
-                  <a:srgbClr val="1A2238"/>
-                </a:solidFill>
-              </a:rPr>
-              <a:t>amphibole  0.18  |  p 0.41</a:t>
-            </a:r>
-          </a:p>
-        </p:txBody>
-      </p:sp>
-      <p:sp>
-        <p:nvSpPr>
-          <p:cNvPr id="25" name="Rounded Rectangle 24"/>
+      <p:sp>
+        <p:nvSpPr>
+          <p:cNvPr id="23" name="Rounded Rectangle 22"/>
           <p:cNvSpPr/>
           <p:nvPr/>
         </p:nvSpPr>
         <p:spPr>
           <a:xfrm>
-            <a:off x="5715000" y="2807208"/>
-            <a:ext cx="420623" cy="292608"/>
-          </a:xfrm>
-          <a:prstGeom prst="roundRect">
-            <a:avLst/>
-          </a:prstGeom>
-          <a:solidFill>
-            <a:srgbClr val="A9D7D2"/>
-          </a:solidFill>
-          <a:ln>
-            <a:noFill/>
-          </a:ln>
-          <a:effectLst/>
-        </p:spPr>
-        <p:style>
-          <a:lnRef idx="1">
-            <a:schemeClr val="accent1"/>
-          </a:lnRef>
-          <a:fillRef idx="3">
-            <a:schemeClr val="accent1"/>
-          </a:fillRef>
-          <a:effectRef idx="2">
-            <a:schemeClr val="accent1"/>
-          </a:effectRef>
-          <a:fontRef idx="minor">
-            <a:schemeClr val="lt1"/>
-          </a:fontRef>
-        </p:style>
-        <p:txBody>
-          <a:bodyPr rtlCol="0" anchor="ctr"/>
-          <a:lstStyle/>
-          <a:p>
-            <a:pPr algn="ctr"/>
-          </a:p>
-        </p:txBody>
-      </p:sp>
-      <p:cxnSp>
-        <p:nvCxnSpPr>
-          <p:cNvPr id="26" name="Connector 25"/>
-          <p:cNvCxnSpPr/>
-          <p:nvPr/>
-        </p:nvCxnSpPr>
-        <p:spPr>
-          <a:xfrm>
-            <a:off x="5967374" y="2953512"/>
-            <a:ext cx="336499" cy="0"/>
-          </a:xfrm>
-          <a:prstGeom prst="bentConnector3">
-            <a:avLst/>
-          </a:prstGeom>
-          <a:ln w="15875">
-            <a:solidFill>
-              <a:srgbClr val="1A2238"/>
-            </a:solidFill>
-          </a:ln>
-          <a:effectLst/>
-        </p:spPr>
-        <p:style>
-          <a:lnRef idx="2">
-            <a:schemeClr val="accent1"/>
-          </a:lnRef>
-          <a:fillRef idx="0">
-            <a:schemeClr val="accent1"/>
-          </a:fillRef>
-          <a:effectRef idx="1">
-            <a:schemeClr val="accent1"/>
-          </a:effectRef>
-          <a:fontRef idx="minor">
-            <a:schemeClr val="tx1"/>
-          </a:fontRef>
-        </p:style>
-      </p:cxnSp>
-      <p:cxnSp>
-        <p:nvCxnSpPr>
-          <p:cNvPr id="27" name="Connector 26"/>
-          <p:cNvCxnSpPr/>
-          <p:nvPr/>
-        </p:nvCxnSpPr>
-        <p:spPr>
-          <a:xfrm>
-            <a:off x="5967374" y="2889504"/>
-            <a:ext cx="0" cy="128016"/>
-          </a:xfrm>
-          <a:prstGeom prst="bentConnector3">
-            <a:avLst/>
-          </a:prstGeom>
-          <a:ln w="15875">
-            <a:solidFill>
-              <a:srgbClr val="1A2238"/>
-            </a:solidFill>
-          </a:ln>
-          <a:effectLst/>
-        </p:spPr>
-        <p:style>
-          <a:lnRef idx="2">
-            <a:schemeClr val="accent1"/>
-          </a:lnRef>
-          <a:fillRef idx="0">
-            <a:schemeClr val="accent1"/>
-          </a:fillRef>
-          <a:effectRef idx="1">
-            <a:schemeClr val="accent1"/>
-          </a:effectRef>
-          <a:fontRef idx="minor">
-            <a:schemeClr val="tx1"/>
-          </a:fontRef>
-        </p:style>
-      </p:cxnSp>
-      <p:cxnSp>
-        <p:nvCxnSpPr>
-          <p:cNvPr id="28" name="Connector 27"/>
-          <p:cNvCxnSpPr/>
-          <p:nvPr/>
-        </p:nvCxnSpPr>
-        <p:spPr>
-          <a:xfrm>
-            <a:off x="6303873" y="2889504"/>
-            <a:ext cx="0" cy="128016"/>
-          </a:xfrm>
-          <a:prstGeom prst="bentConnector3">
-            <a:avLst/>
-          </a:prstGeom>
-          <a:ln w="15875">
-            <a:solidFill>
-              <a:srgbClr val="1A2238"/>
-            </a:solidFill>
-          </a:ln>
-          <a:effectLst/>
-        </p:spPr>
-        <p:style>
-          <a:lnRef idx="2">
-            <a:schemeClr val="accent1"/>
-          </a:lnRef>
-          <a:fillRef idx="0">
-            <a:schemeClr val="accent1"/>
-          </a:fillRef>
-          <a:effectRef idx="1">
-            <a:schemeClr val="accent1"/>
-          </a:effectRef>
-          <a:fontRef idx="minor">
-            <a:schemeClr val="tx1"/>
-          </a:fontRef>
-        </p:style>
-      </p:cxnSp>
-      <p:sp>
-        <p:nvSpPr>
-          <p:cNvPr id="29" name="TextBox 28"/>
-          <p:cNvSpPr txBox="1"/>
-          <p:nvPr/>
-        </p:nvSpPr>
-        <p:spPr>
-          <a:xfrm>
-            <a:off x="6395313" y="2761488"/>
-            <a:ext cx="4206240" cy="365760"/>
-          </a:xfrm>
-          <a:prstGeom prst="rect">
-            <a:avLst/>
-          </a:prstGeom>
-          <a:noFill/>
-        </p:spPr>
-        <p:txBody>
-          <a:bodyPr wrap="square">
-            <a:spAutoFit/>
-          </a:bodyPr>
-          <a:lstStyle/>
-          <a:p>
-            <a:pPr algn="l"/>
-            <a:r>
-              <a:rPr sz="1200" b="0">
-                <a:solidFill>
-                  <a:srgbClr val="1A2238"/>
-                </a:solidFill>
-              </a:rPr>
-              <a:t>orthopyroxene  0.10  |  p 0.63</a:t>
-            </a:r>
-          </a:p>
-        </p:txBody>
-      </p:sp>
-      <p:sp>
-        <p:nvSpPr>
-          <p:cNvPr id="30" name="Rounded Rectangle 29"/>
-          <p:cNvSpPr/>
-          <p:nvPr/>
-        </p:nvSpPr>
-        <p:spPr>
-          <a:xfrm>
-            <a:off x="5715000" y="3118104"/>
-            <a:ext cx="168249" cy="292608"/>
-          </a:xfrm>
-          <a:prstGeom prst="roundRect">
-            <a:avLst/>
-          </a:prstGeom>
-          <a:solidFill>
-            <a:srgbClr val="2A9D8F"/>
-          </a:solidFill>
-          <a:ln>
-            <a:noFill/>
-          </a:ln>
-          <a:effectLst/>
-        </p:spPr>
-        <p:style>
-          <a:lnRef idx="1">
-            <a:schemeClr val="accent1"/>
-          </a:lnRef>
-          <a:fillRef idx="3">
-            <a:schemeClr val="accent1"/>
-          </a:fillRef>
-          <a:effectRef idx="2">
-            <a:schemeClr val="accent1"/>
-          </a:effectRef>
-          <a:fontRef idx="minor">
-            <a:schemeClr val="lt1"/>
-          </a:fontRef>
-        </p:style>
-        <p:txBody>
-          <a:bodyPr rtlCol="0" anchor="ctr"/>
-          <a:lstStyle/>
-          <a:p>
-            <a:pPr algn="ctr"/>
-          </a:p>
-        </p:txBody>
-      </p:sp>
-      <p:cxnSp>
-        <p:nvCxnSpPr>
-          <p:cNvPr id="31" name="Connector 30"/>
-          <p:cNvCxnSpPr/>
-          <p:nvPr/>
-        </p:nvCxnSpPr>
-        <p:spPr>
-          <a:xfrm>
-            <a:off x="5799124" y="3264408"/>
-            <a:ext cx="168250" cy="0"/>
-          </a:xfrm>
-          <a:prstGeom prst="bentConnector3">
-            <a:avLst/>
-          </a:prstGeom>
-          <a:ln w="15875">
-            <a:solidFill>
-              <a:srgbClr val="1A2238"/>
-            </a:solidFill>
-          </a:ln>
-          <a:effectLst/>
-        </p:spPr>
-        <p:style>
-          <a:lnRef idx="2">
-            <a:schemeClr val="accent1"/>
-          </a:lnRef>
-          <a:fillRef idx="0">
-            <a:schemeClr val="accent1"/>
-          </a:fillRef>
-          <a:effectRef idx="1">
-            <a:schemeClr val="accent1"/>
-          </a:effectRef>
-          <a:fontRef idx="minor">
-            <a:schemeClr val="tx1"/>
-          </a:fontRef>
-        </p:style>
-      </p:cxnSp>
-      <p:cxnSp>
-        <p:nvCxnSpPr>
-          <p:cNvPr id="32" name="Connector 31"/>
-          <p:cNvCxnSpPr/>
-          <p:nvPr/>
-        </p:nvCxnSpPr>
-        <p:spPr>
-          <a:xfrm>
-            <a:off x="5799124" y="3200400"/>
-            <a:ext cx="0" cy="128016"/>
-          </a:xfrm>
-          <a:prstGeom prst="bentConnector3">
-            <a:avLst/>
-          </a:prstGeom>
-          <a:ln w="15875">
-            <a:solidFill>
-              <a:srgbClr val="1A2238"/>
-            </a:solidFill>
-          </a:ln>
-          <a:effectLst/>
-        </p:spPr>
-        <p:style>
-          <a:lnRef idx="2">
-            <a:schemeClr val="accent1"/>
-          </a:lnRef>
-          <a:fillRef idx="0">
-            <a:schemeClr val="accent1"/>
-          </a:fillRef>
-          <a:effectRef idx="1">
-            <a:schemeClr val="accent1"/>
-          </a:effectRef>
-          <a:fontRef idx="minor">
-            <a:schemeClr val="tx1"/>
-          </a:fontRef>
-        </p:style>
-      </p:cxnSp>
-      <p:cxnSp>
-        <p:nvCxnSpPr>
-          <p:cNvPr id="33" name="Connector 32"/>
-          <p:cNvCxnSpPr/>
-          <p:nvPr/>
-        </p:nvCxnSpPr>
-        <p:spPr>
-          <a:xfrm>
-            <a:off x="5967374" y="3200400"/>
-            <a:ext cx="0" cy="128016"/>
-          </a:xfrm>
-          <a:prstGeom prst="bentConnector3">
-            <a:avLst/>
-          </a:prstGeom>
-          <a:ln w="15875">
-            <a:solidFill>
-              <a:srgbClr val="1A2238"/>
-            </a:solidFill>
-          </a:ln>
-          <a:effectLst/>
-        </p:spPr>
-        <p:style>
-          <a:lnRef idx="2">
-            <a:schemeClr val="accent1"/>
-          </a:lnRef>
-          <a:fillRef idx="0">
-            <a:schemeClr val="accent1"/>
-          </a:fillRef>
-          <a:effectRef idx="1">
-            <a:schemeClr val="accent1"/>
-          </a:effectRef>
-          <a:fontRef idx="minor">
-            <a:schemeClr val="tx1"/>
-          </a:fontRef>
-        </p:style>
-      </p:cxnSp>
-      <p:sp>
-        <p:nvSpPr>
-          <p:cNvPr id="34" name="TextBox 33"/>
-          <p:cNvSpPr txBox="1"/>
-          <p:nvPr/>
-        </p:nvSpPr>
-        <p:spPr>
-          <a:xfrm>
-            <a:off x="6058814" y="3072384"/>
-            <a:ext cx="4206240" cy="365760"/>
-          </a:xfrm>
-          <a:prstGeom prst="rect">
-            <a:avLst/>
-          </a:prstGeom>
-          <a:noFill/>
-        </p:spPr>
-        <p:txBody>
-          <a:bodyPr wrap="square">
-            <a:spAutoFit/>
-          </a:bodyPr>
-          <a:lstStyle/>
-          <a:p>
-            <a:pPr algn="l"/>
-            <a:r>
-              <a:rPr sz="1200" b="0">
-                <a:solidFill>
-                  <a:srgbClr val="1A2238"/>
-                </a:solidFill>
-              </a:rPr>
-              <a:t>magnetite  0.04  |  p 0.95</a:t>
-            </a:r>
-          </a:p>
-        </p:txBody>
-      </p:sp>
-      <p:sp>
-        <p:nvSpPr>
-          <p:cNvPr id="35" name="Rounded Rectangle 34"/>
-          <p:cNvSpPr/>
-          <p:nvPr/>
-        </p:nvSpPr>
-        <p:spPr>
-          <a:xfrm>
-            <a:off x="5486400" y="3657600"/>
-            <a:ext cx="6309360" cy="2331720"/>
+            <a:off x="2880360" y="3968496"/>
+            <a:ext cx="3108960" cy="731520"/>
           </a:xfrm>
           <a:prstGeom prst="roundRect">
             <a:avLst/>
@@ -18450,232 +18310,102 @@
           <a:p>
             <a:pPr algn="ctr"/>
             <a:r>
-              <a:rPr sz="1300" b="1">
+              <a:rPr sz="1200" b="1">
                 <a:solidFill>
                   <a:srgbClr val="1A2238"/>
                 </a:solidFill>
               </a:rPr>
-              <a:t/>
-            </a:r>
-          </a:p>
-        </p:txBody>
-      </p:sp>
-      <p:sp>
-        <p:nvSpPr>
-          <p:cNvPr id="36" name="TextBox 35"/>
-          <p:cNvSpPr txBox="1"/>
-          <p:nvPr/>
-        </p:nvSpPr>
-        <p:spPr>
-          <a:xfrm>
-            <a:off x="5669280" y="3703320"/>
-            <a:ext cx="5943600" cy="731520"/>
-          </a:xfrm>
-          <a:prstGeom prst="rect">
-            <a:avLst/>
-          </a:prstGeom>
-          <a:noFill/>
-        </p:spPr>
-        <p:txBody>
-          <a:bodyPr wrap="square">
-            <a:spAutoFit/>
-          </a:bodyPr>
-          <a:lstStyle/>
-          <a:p>
-            <a:pPr algn="l"/>
-            <a:r>
-              <a:rPr sz="1200" b="0">
-                <a:solidFill>
-                  <a:srgbClr val="6C5CE7"/>
-                </a:solidFill>
-              </a:rPr>
-              <a:t>CondHead -&gt; storage conditions (per-axis GMM; P and H2O are sampled axes, T is the derived phenocryst-window endpoint temperature)</a:t>
-            </a:r>
-          </a:p>
-        </p:txBody>
-      </p:sp>
-      <p:sp>
-        <p:nvSpPr>
-          <p:cNvPr id="37" name="Freeform 36"/>
+              <a:t>CondHead</a:t>
+            </a:r>
+          </a:p>
+          <a:p>
+            <a:pPr algn="ctr"/>
+            <a:r>
+              <a:rPr sz="900" b="0">
+                <a:solidFill>
+                  <a:srgbClr val="8A93A3"/>
+                </a:solidFill>
+              </a:rPr>
+              <a:t>2 x [Linear -&gt; 512] on [h ; s]</a:t>
+            </a:r>
+          </a:p>
+          <a:p>
+            <a:pPr algn="ctr"/>
+            <a:r>
+              <a:rPr sz="900" b="0">
+                <a:solidFill>
+                  <a:srgbClr val="8A93A3"/>
+                </a:solidFill>
+              </a:rPr>
+              <a:t>log-softmax w, μ, softplus σ</a:t>
+            </a:r>
+          </a:p>
+        </p:txBody>
+      </p:sp>
+      <p:sp>
+        <p:nvSpPr>
+          <p:cNvPr id="24" name="Right Arrow 23"/>
           <p:cNvSpPr/>
           <p:nvPr/>
         </p:nvSpPr>
         <p:spPr>
           <a:xfrm>
-            <a:off x="5806440" y="4434840"/>
-            <a:ext cx="1737360" cy="960119"/>
-          </a:xfrm>
-          <a:custGeom>
-            <a:avLst/>
-            <a:gdLst/>
-            <a:ahLst/>
-            <a:cxnLst/>
-            <a:rect l="l" t="t" r="r" b="b"/>
-            <a:pathLst>
-              <a:path w="1737360" h="960119">
-                <a:moveTo>
-                  <a:pt x="0" y="960119"/>
-                </a:moveTo>
-                <a:lnTo>
-                  <a:pt x="0" y="952846"/>
-                </a:lnTo>
-                <a:lnTo>
-                  <a:pt x="36195" y="949286"/>
-                </a:lnTo>
-                <a:lnTo>
-                  <a:pt x="72390" y="944254"/>
-                </a:lnTo>
-                <a:lnTo>
-                  <a:pt x="108585" y="937276"/>
-                </a:lnTo>
-                <a:lnTo>
-                  <a:pt x="144780" y="927782"/>
-                </a:lnTo>
-                <a:lnTo>
-                  <a:pt x="180975" y="915112"/>
-                </a:lnTo>
-                <a:lnTo>
-                  <a:pt x="217169" y="898531"/>
-                </a:lnTo>
-                <a:lnTo>
-                  <a:pt x="253365" y="877258"/>
-                </a:lnTo>
-                <a:lnTo>
-                  <a:pt x="289559" y="850511"/>
-                </a:lnTo>
-                <a:lnTo>
-                  <a:pt x="325755" y="817567"/>
-                </a:lnTo>
-                <a:lnTo>
-                  <a:pt x="361949" y="777839"/>
-                </a:lnTo>
-                <a:lnTo>
-                  <a:pt x="398145" y="730958"/>
-                </a:lnTo>
-                <a:lnTo>
-                  <a:pt x="434339" y="676862"/>
-                </a:lnTo>
-                <a:lnTo>
-                  <a:pt x="470535" y="615883"/>
-                </a:lnTo>
-                <a:lnTo>
-                  <a:pt x="506730" y="548809"/>
-                </a:lnTo>
-                <a:lnTo>
-                  <a:pt x="542925" y="476928"/>
-                </a:lnTo>
-                <a:lnTo>
-                  <a:pt x="579119" y="402028"/>
-                </a:lnTo>
-                <a:lnTo>
-                  <a:pt x="615315" y="326353"/>
-                </a:lnTo>
-                <a:lnTo>
-                  <a:pt x="651510" y="252517"/>
-                </a:lnTo>
-                <a:lnTo>
-                  <a:pt x="687705" y="183360"/>
-                </a:lnTo>
-                <a:lnTo>
-                  <a:pt x="723900" y="121779"/>
-                </a:lnTo>
-                <a:lnTo>
-                  <a:pt x="760094" y="70526"/>
-                </a:lnTo>
-                <a:lnTo>
-                  <a:pt x="796290" y="32010"/>
-                </a:lnTo>
-                <a:lnTo>
-                  <a:pt x="832484" y="8104"/>
-                </a:lnTo>
-                <a:lnTo>
-                  <a:pt x="868680" y="0"/>
-                </a:lnTo>
-                <a:lnTo>
-                  <a:pt x="904874" y="8104"/>
-                </a:lnTo>
-                <a:lnTo>
-                  <a:pt x="941070" y="32010"/>
-                </a:lnTo>
-                <a:lnTo>
-                  <a:pt x="977264" y="70526"/>
-                </a:lnTo>
-                <a:lnTo>
-                  <a:pt x="1013460" y="121779"/>
-                </a:lnTo>
-                <a:lnTo>
-                  <a:pt x="1049654" y="183360"/>
-                </a:lnTo>
-                <a:lnTo>
-                  <a:pt x="1085850" y="252517"/>
-                </a:lnTo>
-                <a:lnTo>
-                  <a:pt x="1122044" y="326353"/>
-                </a:lnTo>
-                <a:lnTo>
-                  <a:pt x="1158240" y="402028"/>
-                </a:lnTo>
-                <a:lnTo>
-                  <a:pt x="1194435" y="476928"/>
-                </a:lnTo>
-                <a:lnTo>
-                  <a:pt x="1230630" y="548809"/>
-                </a:lnTo>
-                <a:lnTo>
-                  <a:pt x="1266824" y="615883"/>
-                </a:lnTo>
-                <a:lnTo>
-                  <a:pt x="1303019" y="676862"/>
-                </a:lnTo>
-                <a:lnTo>
-                  <a:pt x="1339215" y="730958"/>
-                </a:lnTo>
-                <a:lnTo>
-                  <a:pt x="1375409" y="777839"/>
-                </a:lnTo>
-                <a:lnTo>
-                  <a:pt x="1411605" y="817567"/>
-                </a:lnTo>
-                <a:lnTo>
-                  <a:pt x="1447799" y="850511"/>
-                </a:lnTo>
-                <a:lnTo>
-                  <a:pt x="1483995" y="877258"/>
-                </a:lnTo>
-                <a:lnTo>
-                  <a:pt x="1520189" y="898531"/>
-                </a:lnTo>
-                <a:lnTo>
-                  <a:pt x="1556384" y="915112"/>
-                </a:lnTo>
-                <a:lnTo>
-                  <a:pt x="1592580" y="927782"/>
-                </a:lnTo>
-                <a:lnTo>
-                  <a:pt x="1628775" y="937276"/>
-                </a:lnTo>
-                <a:lnTo>
-                  <a:pt x="1664969" y="944254"/>
-                </a:lnTo>
-                <a:lnTo>
-                  <a:pt x="1701165" y="949286"/>
-                </a:lnTo>
-                <a:lnTo>
-                  <a:pt x="1737360" y="952846"/>
-                </a:lnTo>
-                <a:lnTo>
-                  <a:pt x="1737360" y="960119"/>
-                </a:lnTo>
-                <a:close/>
-              </a:path>
-            </a:pathLst>
-          </a:custGeom>
+            <a:off x="6446520" y="4187952"/>
+            <a:ext cx="274320" cy="292608"/>
+          </a:xfrm>
+          <a:prstGeom prst="rightArrow">
+            <a:avLst/>
+          </a:prstGeom>
           <a:solidFill>
-            <a:srgbClr val="C4D1FF"/>
+            <a:srgbClr val="1A2238"/>
           </a:solidFill>
-          <a:ln w="25400">
+          <a:ln>
+            <a:noFill/>
+          </a:ln>
+          <a:effectLst/>
+        </p:spPr>
+        <p:style>
+          <a:lnRef idx="1">
+            <a:schemeClr val="accent1"/>
+          </a:lnRef>
+          <a:fillRef idx="3">
+            <a:schemeClr val="accent1"/>
+          </a:fillRef>
+          <a:effectRef idx="2">
+            <a:schemeClr val="accent1"/>
+          </a:effectRef>
+          <a:fontRef idx="minor">
+            <a:schemeClr val="lt1"/>
+          </a:fontRef>
+        </p:style>
+        <p:txBody>
+          <a:bodyPr rtlCol="0" anchor="ctr"/>
+          <a:lstStyle/>
+          <a:p>
+            <a:pPr algn="ctr"/>
+          </a:p>
+        </p:txBody>
+      </p:sp>
+      <p:sp>
+        <p:nvSpPr>
+          <p:cNvPr id="25" name="Rounded Rectangle 24"/>
+          <p:cNvSpPr/>
+          <p:nvPr/>
+        </p:nvSpPr>
+        <p:spPr>
+          <a:xfrm>
+            <a:off x="6812280" y="3968496"/>
+            <a:ext cx="2194560" cy="731520"/>
+          </a:xfrm>
+          <a:prstGeom prst="roundRect">
+            <a:avLst/>
+          </a:prstGeom>
+          <a:solidFill>
+            <a:srgbClr val="FFFFFF"/>
+          </a:solidFill>
+          <a:ln w="12700">
             <a:solidFill>
-              <a:srgbClr val="2E5BFF"/>
+              <a:srgbClr val="C8CDD6"/>
             </a:solidFill>
           </a:ln>
           <a:effectLst/>
@@ -18695,540 +18425,111 @@
           </a:fontRef>
         </p:style>
         <p:txBody>
-          <a:bodyPr rtlCol="0" anchor="ctr"/>
-          <a:lstStyle/>
-          <a:p>
-            <a:pPr algn="ctr"/>
+          <a:bodyPr rtlCol="0" anchor="ctr" wrap="square"/>
+          <a:lstStyle/>
+          <a:p>
+            <a:pPr algn="ctr"/>
+            <a:r>
+              <a:rPr sz="1100" b="1">
+                <a:solidFill>
+                  <a:srgbClr val="8A93A3"/>
+                </a:solidFill>
+              </a:rPr>
+              <a:t>3 axes x K=3 mixture</a:t>
+            </a:r>
+          </a:p>
+          <a:p>
+            <a:pPr algn="ctr"/>
+            <a:r>
+              <a:rPr sz="800" b="0">
+                <a:solidFill>
+                  <a:srgbClr val="8A93A3"/>
+                </a:solidFill>
+              </a:rPr>
+              <a:t>T, P, H2O in raw units</a:t>
+            </a:r>
+          </a:p>
+        </p:txBody>
+      </p:sp>
+      <p:sp>
+        <p:nvSpPr>
+          <p:cNvPr id="26" name="Rounded Rectangle 25"/>
+          <p:cNvSpPr/>
+          <p:nvPr/>
+        </p:nvSpPr>
+        <p:spPr>
+          <a:xfrm>
+            <a:off x="9144000" y="3968496"/>
+            <a:ext cx="2560320" cy="731520"/>
+          </a:xfrm>
+          <a:prstGeom prst="roundRect">
+            <a:avLst/>
+          </a:prstGeom>
+          <a:solidFill>
+            <a:srgbClr val="FFFFFF"/>
+          </a:solidFill>
+          <a:ln w="12700">
+            <a:solidFill>
+              <a:srgbClr val="C8CDD6"/>
+            </a:solidFill>
+          </a:ln>
+          <a:effectLst/>
+        </p:spPr>
+        <p:style>
+          <a:lnRef idx="1">
+            <a:schemeClr val="accent1"/>
+          </a:lnRef>
+          <a:fillRef idx="3">
+            <a:schemeClr val="accent1"/>
+          </a:fillRef>
+          <a:effectRef idx="2">
+            <a:schemeClr val="accent1"/>
+          </a:effectRef>
+          <a:fontRef idx="minor">
+            <a:schemeClr val="lt1"/>
+          </a:fontRef>
+        </p:style>
+        <p:txBody>
+          <a:bodyPr rtlCol="0" anchor="ctr" wrap="square"/>
+          <a:lstStyle/>
+          <a:p>
+            <a:pPr algn="ctr"/>
+            <a:r>
+              <a:rPr sz="1100" b="1">
+                <a:solidFill>
+                  <a:srgbClr val="8A93A3"/>
+                </a:solidFill>
+              </a:rPr>
+              <a:t>λ_cond · L_cond</a:t>
+            </a:r>
+          </a:p>
+          <a:p>
+            <a:pPr algn="ctr"/>
+            <a:r>
+              <a:rPr sz="800" b="0">
+                <a:solidFill>
+                  <a:srgbClr val="8A93A3"/>
+                </a:solidFill>
+              </a:rPr>
+              <a:t>Σ_axis −log Σₖ wₖ N(t | μₖ, σₖ²)</a:t>
+            </a:r>
           </a:p>
         </p:txBody>
       </p:sp>
       <p:cxnSp>
         <p:nvCxnSpPr>
-          <p:cNvPr id="38" name="Connector 37"/>
+          <p:cNvPr id="27" name="Connector 26"/>
           <p:cNvCxnSpPr/>
           <p:nvPr/>
         </p:nvCxnSpPr>
         <p:spPr>
-          <a:xfrm>
-            <a:off x="5806440" y="5394959"/>
-            <a:ext cx="1737360" cy="0"/>
+          <a:xfrm flipV="1">
+            <a:off x="2011680" y="2770632"/>
+            <a:ext cx="868680" cy="1490472"/>
           </a:xfrm>
           <a:prstGeom prst="bentConnector3">
             <a:avLst/>
           </a:prstGeom>
-          <a:ln w="12700">
-            <a:solidFill>
-              <a:srgbClr val="8A93A3"/>
-            </a:solidFill>
-          </a:ln>
-          <a:effectLst/>
-        </p:spPr>
-        <p:style>
-          <a:lnRef idx="2">
-            <a:schemeClr val="accent1"/>
-          </a:lnRef>
-          <a:fillRef idx="0">
-            <a:schemeClr val="accent1"/>
-          </a:fillRef>
-          <a:effectRef idx="1">
-            <a:schemeClr val="accent1"/>
-          </a:effectRef>
-          <a:fontRef idx="minor">
-            <a:schemeClr val="tx1"/>
-          </a:fontRef>
-        </p:style>
-      </p:cxnSp>
-      <p:sp>
-        <p:nvSpPr>
-          <p:cNvPr id="39" name="TextBox 38"/>
-          <p:cNvSpPr txBox="1"/>
-          <p:nvPr/>
-        </p:nvSpPr>
-        <p:spPr>
-          <a:xfrm>
-            <a:off x="5623559" y="5440679"/>
-            <a:ext cx="2103120" cy="365760"/>
-          </a:xfrm>
-          <a:prstGeom prst="rect">
-            <a:avLst/>
-          </a:prstGeom>
-          <a:noFill/>
-        </p:spPr>
-        <p:txBody>
-          <a:bodyPr wrap="square">
-            <a:spAutoFit/>
-          </a:bodyPr>
-          <a:lstStyle/>
-          <a:p>
-            <a:pPr algn="ctr"/>
-            <a:r>
-              <a:rPr sz="1200" b="1">
-                <a:solidFill>
-                  <a:srgbClr val="1A2238"/>
-                </a:solidFill>
-              </a:rPr>
-              <a:t>T  1010 +/- 40 C</a:t>
-            </a:r>
-          </a:p>
-        </p:txBody>
-      </p:sp>
-      <p:sp>
-        <p:nvSpPr>
-          <p:cNvPr id="40" name="Freeform 39"/>
-          <p:cNvSpPr/>
-          <p:nvPr/>
-        </p:nvSpPr>
-        <p:spPr>
-          <a:xfrm>
-            <a:off x="7772400" y="4434840"/>
-            <a:ext cx="1737360" cy="960119"/>
-          </a:xfrm>
-          <a:custGeom>
-            <a:avLst/>
-            <a:gdLst/>
-            <a:ahLst/>
-            <a:cxnLst/>
-            <a:rect l="l" t="t" r="r" b="b"/>
-            <a:pathLst>
-              <a:path w="1737360" h="960119">
-                <a:moveTo>
-                  <a:pt x="0" y="960119"/>
-                </a:moveTo>
-                <a:lnTo>
-                  <a:pt x="0" y="939852"/>
-                </a:lnTo>
-                <a:lnTo>
-                  <a:pt x="36195" y="932353"/>
-                </a:lnTo>
-                <a:lnTo>
-                  <a:pt x="72390" y="922586"/>
-                </a:lnTo>
-                <a:lnTo>
-                  <a:pt x="108585" y="910058"/>
-                </a:lnTo>
-                <a:lnTo>
-                  <a:pt x="144780" y="894237"/>
-                </a:lnTo>
-                <a:lnTo>
-                  <a:pt x="180974" y="874570"/>
-                </a:lnTo>
-                <a:lnTo>
-                  <a:pt x="217170" y="850511"/>
-                </a:lnTo>
-                <a:lnTo>
-                  <a:pt x="253365" y="821553"/>
-                </a:lnTo>
-                <a:lnTo>
-                  <a:pt x="289560" y="787277"/>
-                </a:lnTo>
-                <a:lnTo>
-                  <a:pt x="325754" y="747391"/>
-                </a:lnTo>
-                <a:lnTo>
-                  <a:pt x="361950" y="701784"/>
-                </a:lnTo>
-                <a:lnTo>
-                  <a:pt x="398145" y="650575"/>
-                </a:lnTo>
-                <a:lnTo>
-                  <a:pt x="434340" y="594149"/>
-                </a:lnTo>
-                <a:lnTo>
-                  <a:pt x="470534" y="533196"/>
-                </a:lnTo>
-                <a:lnTo>
-                  <a:pt x="506730" y="468718"/>
-                </a:lnTo>
-                <a:lnTo>
-                  <a:pt x="542925" y="402028"/>
-                </a:lnTo>
-                <a:lnTo>
-                  <a:pt x="579120" y="334721"/>
-                </a:lnTo>
-                <a:lnTo>
-                  <a:pt x="615315" y="268623"/>
-                </a:lnTo>
-                <a:lnTo>
-                  <a:pt x="651510" y="205713"/>
-                </a:lnTo>
-                <a:lnTo>
-                  <a:pt x="687705" y="148031"/>
-                </a:lnTo>
-                <a:lnTo>
-                  <a:pt x="723900" y="97571"/>
-                </a:lnTo>
-                <a:lnTo>
-                  <a:pt x="760095" y="56167"/>
-                </a:lnTo>
-                <a:lnTo>
-                  <a:pt x="796290" y="25381"/>
-                </a:lnTo>
-                <a:lnTo>
-                  <a:pt x="832485" y="6409"/>
-                </a:lnTo>
-                <a:lnTo>
-                  <a:pt x="868680" y="0"/>
-                </a:lnTo>
-                <a:lnTo>
-                  <a:pt x="904875" y="6409"/>
-                </a:lnTo>
-                <a:lnTo>
-                  <a:pt x="941070" y="25381"/>
-                </a:lnTo>
-                <a:lnTo>
-                  <a:pt x="977265" y="56167"/>
-                </a:lnTo>
-                <a:lnTo>
-                  <a:pt x="1013460" y="97571"/>
-                </a:lnTo>
-                <a:lnTo>
-                  <a:pt x="1049655" y="148031"/>
-                </a:lnTo>
-                <a:lnTo>
-                  <a:pt x="1085850" y="205713"/>
-                </a:lnTo>
-                <a:lnTo>
-                  <a:pt x="1122045" y="268623"/>
-                </a:lnTo>
-                <a:lnTo>
-                  <a:pt x="1158240" y="334721"/>
-                </a:lnTo>
-                <a:lnTo>
-                  <a:pt x="1194435" y="402028"/>
-                </a:lnTo>
-                <a:lnTo>
-                  <a:pt x="1230630" y="468718"/>
-                </a:lnTo>
-                <a:lnTo>
-                  <a:pt x="1266825" y="533196"/>
-                </a:lnTo>
-                <a:lnTo>
-                  <a:pt x="1303020" y="594149"/>
-                </a:lnTo>
-                <a:lnTo>
-                  <a:pt x="1339215" y="650575"/>
-                </a:lnTo>
-                <a:lnTo>
-                  <a:pt x="1375410" y="701784"/>
-                </a:lnTo>
-                <a:lnTo>
-                  <a:pt x="1411605" y="747391"/>
-                </a:lnTo>
-                <a:lnTo>
-                  <a:pt x="1447800" y="787277"/>
-                </a:lnTo>
-                <a:lnTo>
-                  <a:pt x="1483995" y="821553"/>
-                </a:lnTo>
-                <a:lnTo>
-                  <a:pt x="1520190" y="850511"/>
-                </a:lnTo>
-                <a:lnTo>
-                  <a:pt x="1556385" y="874570"/>
-                </a:lnTo>
-                <a:lnTo>
-                  <a:pt x="1592580" y="894237"/>
-                </a:lnTo>
-                <a:lnTo>
-                  <a:pt x="1628775" y="910058"/>
-                </a:lnTo>
-                <a:lnTo>
-                  <a:pt x="1664970" y="922586"/>
-                </a:lnTo>
-                <a:lnTo>
-                  <a:pt x="1701165" y="932353"/>
-                </a:lnTo>
-                <a:lnTo>
-                  <a:pt x="1737360" y="939852"/>
-                </a:lnTo>
-                <a:lnTo>
-                  <a:pt x="1737360" y="960119"/>
-                </a:lnTo>
-                <a:close/>
-              </a:path>
-            </a:pathLst>
-          </a:custGeom>
-          <a:solidFill>
-            <a:srgbClr val="BCEAE5"/>
-          </a:solidFill>
-          <a:ln w="25400">
-            <a:solidFill>
-              <a:srgbClr val="12B5A5"/>
-            </a:solidFill>
-          </a:ln>
-          <a:effectLst/>
-        </p:spPr>
-        <p:style>
-          <a:lnRef idx="1">
-            <a:schemeClr val="accent1"/>
-          </a:lnRef>
-          <a:fillRef idx="3">
-            <a:schemeClr val="accent1"/>
-          </a:fillRef>
-          <a:effectRef idx="2">
-            <a:schemeClr val="accent1"/>
-          </a:effectRef>
-          <a:fontRef idx="minor">
-            <a:schemeClr val="lt1"/>
-          </a:fontRef>
-        </p:style>
-        <p:txBody>
-          <a:bodyPr rtlCol="0" anchor="ctr"/>
-          <a:lstStyle/>
-          <a:p>
-            <a:pPr algn="ctr"/>
-          </a:p>
-        </p:txBody>
-      </p:sp>
-      <p:cxnSp>
-        <p:nvCxnSpPr>
-          <p:cNvPr id="41" name="Connector 40"/>
-          <p:cNvCxnSpPr/>
-          <p:nvPr/>
-        </p:nvCxnSpPr>
-        <p:spPr>
-          <a:xfrm>
-            <a:off x="7772400" y="5394959"/>
-            <a:ext cx="1737360" cy="0"/>
-          </a:xfrm>
-          <a:prstGeom prst="bentConnector3">
-            <a:avLst/>
-          </a:prstGeom>
-          <a:ln w="12700">
-            <a:solidFill>
-              <a:srgbClr val="8A93A3"/>
-            </a:solidFill>
-          </a:ln>
-          <a:effectLst/>
-        </p:spPr>
-        <p:style>
-          <a:lnRef idx="2">
-            <a:schemeClr val="accent1"/>
-          </a:lnRef>
-          <a:fillRef idx="0">
-            <a:schemeClr val="accent1"/>
-          </a:fillRef>
-          <a:effectRef idx="1">
-            <a:schemeClr val="accent1"/>
-          </a:effectRef>
-          <a:fontRef idx="minor">
-            <a:schemeClr val="tx1"/>
-          </a:fontRef>
-        </p:style>
-      </p:cxnSp>
-      <p:sp>
-        <p:nvSpPr>
-          <p:cNvPr id="42" name="TextBox 41"/>
-          <p:cNvSpPr txBox="1"/>
-          <p:nvPr/>
-        </p:nvSpPr>
-        <p:spPr>
-          <a:xfrm>
-            <a:off x="7589520" y="5440679"/>
-            <a:ext cx="2103120" cy="365760"/>
-          </a:xfrm>
-          <a:prstGeom prst="rect">
-            <a:avLst/>
-          </a:prstGeom>
-          <a:noFill/>
-        </p:spPr>
-        <p:txBody>
-          <a:bodyPr wrap="square">
-            <a:spAutoFit/>
-          </a:bodyPr>
-          <a:lstStyle/>
-          <a:p>
-            <a:pPr algn="ctr"/>
-            <a:r>
-              <a:rPr sz="1200" b="1">
-                <a:solidFill>
-                  <a:srgbClr val="1A2238"/>
-                </a:solidFill>
-              </a:rPr>
-              <a:t>P  4.8 +/- 1.9 kbar</a:t>
-            </a:r>
-          </a:p>
-        </p:txBody>
-      </p:sp>
-      <p:sp>
-        <p:nvSpPr>
-          <p:cNvPr id="43" name="Freeform 42"/>
-          <p:cNvSpPr/>
-          <p:nvPr/>
-        </p:nvSpPr>
-        <p:spPr>
-          <a:xfrm>
-            <a:off x="9738360" y="4434840"/>
-            <a:ext cx="1783080" cy="960119"/>
-          </a:xfrm>
-          <a:custGeom>
-            <a:avLst/>
-            <a:gdLst/>
-            <a:ahLst/>
-            <a:cxnLst/>
-            <a:rect l="l" t="t" r="r" b="b"/>
-            <a:pathLst>
-              <a:path w="1783080" h="960119">
-                <a:moveTo>
-                  <a:pt x="0" y="960119"/>
-                </a:moveTo>
-                <a:lnTo>
-                  <a:pt x="0" y="954380"/>
-                </a:lnTo>
-                <a:lnTo>
-                  <a:pt x="37147" y="949181"/>
-                </a:lnTo>
-                <a:lnTo>
-                  <a:pt x="74295" y="940156"/>
-                </a:lnTo>
-                <a:lnTo>
-                  <a:pt x="111442" y="925235"/>
-                </a:lnTo>
-                <a:lnTo>
-                  <a:pt x="148590" y="901749"/>
-                </a:lnTo>
-                <a:lnTo>
-                  <a:pt x="185737" y="866600"/>
-                </a:lnTo>
-                <a:lnTo>
-                  <a:pt x="222885" y="816648"/>
-                </a:lnTo>
-                <a:lnTo>
-                  <a:pt x="260032" y="749364"/>
-                </a:lnTo>
-                <a:lnTo>
-                  <a:pt x="297180" y="663673"/>
-                </a:lnTo>
-                <a:lnTo>
-                  <a:pt x="334327" y="560845"/>
-                </a:lnTo>
-                <a:lnTo>
-                  <a:pt x="371475" y="445176"/>
-                </a:lnTo>
-                <a:lnTo>
-                  <a:pt x="408622" y="324178"/>
-                </a:lnTo>
-                <a:lnTo>
-                  <a:pt x="445770" y="208043"/>
-                </a:lnTo>
-                <a:lnTo>
-                  <a:pt x="482917" y="108354"/>
-                </a:lnTo>
-                <a:lnTo>
-                  <a:pt x="520065" y="36181"/>
-                </a:lnTo>
-                <a:lnTo>
-                  <a:pt x="557212" y="0"/>
-                </a:lnTo>
-                <a:lnTo>
-                  <a:pt x="594360" y="3933"/>
-                </a:lnTo>
-                <a:lnTo>
-                  <a:pt x="631507" y="46793"/>
-                </a:lnTo>
-                <a:lnTo>
-                  <a:pt x="668655" y="122197"/>
-                </a:lnTo>
-                <a:lnTo>
-                  <a:pt x="705802" y="219711"/>
-                </a:lnTo>
-                <a:lnTo>
-                  <a:pt x="742950" y="326710"/>
-                </a:lnTo>
-                <a:lnTo>
-                  <a:pt x="780097" y="430457"/>
-                </a:lnTo>
-                <a:lnTo>
-                  <a:pt x="817245" y="519915"/>
-                </a:lnTo>
-                <a:lnTo>
-                  <a:pt x="854392" y="586970"/>
-                </a:lnTo>
-                <a:lnTo>
-                  <a:pt x="891540" y="626939"/>
-                </a:lnTo>
-                <a:lnTo>
-                  <a:pt x="928687" y="638485"/>
-                </a:lnTo>
-                <a:lnTo>
-                  <a:pt x="965835" y="623138"/>
-                </a:lnTo>
-                <a:lnTo>
-                  <a:pt x="1002982" y="584667"/>
-                </a:lnTo>
-                <a:lnTo>
-                  <a:pt x="1040130" y="528460"/>
-                </a:lnTo>
-                <a:lnTo>
-                  <a:pt x="1077277" y="460988"/>
-                </a:lnTo>
-                <a:lnTo>
-                  <a:pt x="1114425" y="389315"/>
-                </a:lnTo>
-                <a:lnTo>
-                  <a:pt x="1151572" y="320622"/>
-                </a:lnTo>
-                <a:lnTo>
-                  <a:pt x="1188720" y="261689"/>
-                </a:lnTo>
-                <a:lnTo>
-                  <a:pt x="1225867" y="218338"/>
-                </a:lnTo>
-                <a:lnTo>
-                  <a:pt x="1263015" y="194904"/>
-                </a:lnTo>
-                <a:lnTo>
-                  <a:pt x="1300162" y="193807"/>
-                </a:lnTo>
-                <a:lnTo>
-                  <a:pt x="1337310" y="215337"/>
-                </a:lnTo>
-                <a:lnTo>
-                  <a:pt x="1374457" y="257689"/>
-                </a:lnTo>
-                <a:lnTo>
-                  <a:pt x="1411605" y="317276"/>
-                </a:lnTo>
-                <a:lnTo>
-                  <a:pt x="1448752" y="389265"/>
-                </a:lnTo>
-                <a:lnTo>
-                  <a:pt x="1485900" y="468240"/>
-                </a:lnTo>
-                <a:lnTo>
-                  <a:pt x="1523047" y="548872"/>
-                </a:lnTo>
-                <a:lnTo>
-                  <a:pt x="1560195" y="626495"/>
-                </a:lnTo>
-                <a:lnTo>
-                  <a:pt x="1597342" y="697502"/>
-                </a:lnTo>
-                <a:lnTo>
-                  <a:pt x="1634490" y="759534"/>
-                </a:lnTo>
-                <a:lnTo>
-                  <a:pt x="1671637" y="811463"/>
-                </a:lnTo>
-                <a:lnTo>
-                  <a:pt x="1708785" y="853219"/>
-                </a:lnTo>
-                <a:lnTo>
-                  <a:pt x="1745932" y="885529"/>
-                </a:lnTo>
-                <a:lnTo>
-                  <a:pt x="1783080" y="909618"/>
-                </a:lnTo>
-                <a:lnTo>
-                  <a:pt x="1783080" y="960119"/>
-                </a:lnTo>
-                <a:close/>
-              </a:path>
-            </a:pathLst>
-          </a:custGeom>
-          <a:solidFill>
-            <a:srgbClr val="F8DDC7"/>
-          </a:solidFill>
           <a:ln w="25400">
             <a:solidFill>
               <a:srgbClr val="E8883A"/>
@@ -19237,73 +18538,304 @@
           <a:effectLst/>
         </p:spPr>
         <p:style>
-          <a:lnRef idx="1">
-            <a:schemeClr val="accent1"/>
-          </a:lnRef>
-          <a:fillRef idx="3">
-            <a:schemeClr val="accent1"/>
-          </a:fillRef>
-          <a:effectRef idx="2">
-            <a:schemeClr val="accent1"/>
-          </a:effectRef>
-          <a:fontRef idx="minor">
-            <a:schemeClr val="lt1"/>
-          </a:fontRef>
-        </p:style>
-        <p:txBody>
-          <a:bodyPr rtlCol="0" anchor="ctr"/>
-          <a:lstStyle/>
-          <a:p>
-            <a:pPr algn="ctr"/>
-          </a:p>
-        </p:txBody>
-      </p:sp>
+          <a:lnRef idx="2">
+            <a:schemeClr val="accent1"/>
+          </a:lnRef>
+          <a:fillRef idx="0">
+            <a:schemeClr val="accent1"/>
+          </a:fillRef>
+          <a:effectRef idx="1">
+            <a:schemeClr val="accent1"/>
+          </a:effectRef>
+          <a:fontRef idx="minor">
+            <a:schemeClr val="tx1"/>
+          </a:fontRef>
+        </p:style>
+      </p:cxnSp>
       <p:cxnSp>
         <p:nvCxnSpPr>
-          <p:cNvPr id="44" name="Connector 43"/>
+          <p:cNvPr id="28" name="Connector 27"/>
           <p:cNvCxnSpPr/>
           <p:nvPr/>
         </p:nvCxnSpPr>
         <p:spPr>
           <a:xfrm>
-            <a:off x="9738360" y="5394959"/>
-            <a:ext cx="1783080" cy="0"/>
+            <a:off x="2011680" y="4261104"/>
+            <a:ext cx="868680" cy="210312"/>
           </a:xfrm>
           <a:prstGeom prst="bentConnector3">
             <a:avLst/>
           </a:prstGeom>
+          <a:ln w="25400">
+            <a:solidFill>
+              <a:srgbClr val="E8883A"/>
+            </a:solidFill>
+          </a:ln>
+          <a:effectLst/>
+        </p:spPr>
+        <p:style>
+          <a:lnRef idx="2">
+            <a:schemeClr val="accent1"/>
+          </a:lnRef>
+          <a:fillRef idx="0">
+            <a:schemeClr val="accent1"/>
+          </a:fillRef>
+          <a:effectRef idx="1">
+            <a:schemeClr val="accent1"/>
+          </a:effectRef>
+          <a:fontRef idx="minor">
+            <a:schemeClr val="tx1"/>
+          </a:fontRef>
+        </p:style>
+      </p:cxnSp>
+      <p:cxnSp>
+        <p:nvCxnSpPr>
+          <p:cNvPr id="29" name="Connector 28"/>
+          <p:cNvCxnSpPr/>
+          <p:nvPr/>
+        </p:nvCxnSpPr>
+        <p:spPr>
+          <a:xfrm>
+            <a:off x="5989320" y="2633472"/>
+            <a:ext cx="228600" cy="0"/>
+          </a:xfrm>
+          <a:prstGeom prst="bentConnector3">
+            <a:avLst/>
+          </a:prstGeom>
+          <a:ln w="19050">
+            <a:solidFill>
+              <a:srgbClr val="C0392B"/>
+            </a:solidFill>
+          </a:ln>
+          <a:effectLst/>
+        </p:spPr>
+        <p:style>
+          <a:lnRef idx="2">
+            <a:schemeClr val="accent1"/>
+          </a:lnRef>
+          <a:fillRef idx="0">
+            <a:schemeClr val="accent1"/>
+          </a:fillRef>
+          <a:effectRef idx="1">
+            <a:schemeClr val="accent1"/>
+          </a:effectRef>
+          <a:fontRef idx="minor">
+            <a:schemeClr val="tx1"/>
+          </a:fontRef>
+        </p:style>
+      </p:cxnSp>
+      <p:cxnSp>
+        <p:nvCxnSpPr>
+          <p:cNvPr id="30" name="Connector 29"/>
+          <p:cNvCxnSpPr/>
+          <p:nvPr/>
+        </p:nvCxnSpPr>
+        <p:spPr>
+          <a:xfrm>
+            <a:off x="5989320" y="3483864"/>
+            <a:ext cx="228600" cy="0"/>
+          </a:xfrm>
+          <a:prstGeom prst="bentConnector3">
+            <a:avLst/>
+          </a:prstGeom>
+          <a:ln w="19050">
+            <a:solidFill>
+              <a:srgbClr val="C0392B"/>
+            </a:solidFill>
+          </a:ln>
+          <a:effectLst/>
+        </p:spPr>
+        <p:style>
+          <a:lnRef idx="2">
+            <a:schemeClr val="accent1"/>
+          </a:lnRef>
+          <a:fillRef idx="0">
+            <a:schemeClr val="accent1"/>
+          </a:fillRef>
+          <a:effectRef idx="1">
+            <a:schemeClr val="accent1"/>
+          </a:effectRef>
+          <a:fontRef idx="minor">
+            <a:schemeClr val="tx1"/>
+          </a:fontRef>
+        </p:style>
+      </p:cxnSp>
+      <p:cxnSp>
+        <p:nvCxnSpPr>
+          <p:cNvPr id="31" name="Connector 30"/>
+          <p:cNvCxnSpPr/>
+          <p:nvPr/>
+        </p:nvCxnSpPr>
+        <p:spPr>
+          <a:xfrm>
+            <a:off x="6217920" y="2633472"/>
+            <a:ext cx="0" cy="2212848"/>
+          </a:xfrm>
+          <a:prstGeom prst="bentConnector3">
+            <a:avLst/>
+          </a:prstGeom>
+          <a:ln w="19050">
+            <a:solidFill>
+              <a:srgbClr val="C0392B"/>
+            </a:solidFill>
+          </a:ln>
+          <a:effectLst/>
+        </p:spPr>
+        <p:style>
+          <a:lnRef idx="2">
+            <a:schemeClr val="accent1"/>
+          </a:lnRef>
+          <a:fillRef idx="0">
+            <a:schemeClr val="accent1"/>
+          </a:fillRef>
+          <a:effectRef idx="1">
+            <a:schemeClr val="accent1"/>
+          </a:effectRef>
+          <a:fontRef idx="minor">
+            <a:schemeClr val="tx1"/>
+          </a:fontRef>
+        </p:style>
+      </p:cxnSp>
+      <p:sp>
+        <p:nvSpPr>
+          <p:cNvPr id="32" name="Rounded Rectangle 31"/>
+          <p:cNvSpPr/>
+          <p:nvPr/>
+        </p:nvSpPr>
+        <p:spPr>
+          <a:xfrm>
+            <a:off x="2880360" y="4846320"/>
+            <a:ext cx="8823960" cy="548640"/>
+          </a:xfrm>
+          <a:prstGeom prst="roundRect">
+            <a:avLst/>
+          </a:prstGeom>
+          <a:solidFill>
+            <a:srgbClr val="FFFFFF"/>
+          </a:solidFill>
           <a:ln w="12700">
             <a:solidFill>
-              <a:srgbClr val="8A93A3"/>
+              <a:srgbClr val="C8CDD6"/>
             </a:solidFill>
           </a:ln>
           <a:effectLst/>
         </p:spPr>
         <p:style>
-          <a:lnRef idx="2">
-            <a:schemeClr val="accent1"/>
-          </a:lnRef>
-          <a:fillRef idx="0">
-            <a:schemeClr val="accent1"/>
-          </a:fillRef>
-          <a:effectRef idx="1">
-            <a:schemeClr val="accent1"/>
-          </a:effectRef>
-          <a:fontRef idx="minor">
-            <a:schemeClr val="tx1"/>
-          </a:fontRef>
-        </p:style>
-      </p:cxnSp>
-      <p:sp>
-        <p:nvSpPr>
-          <p:cNvPr id="45" name="TextBox 44"/>
+          <a:lnRef idx="1">
+            <a:schemeClr val="accent1"/>
+          </a:lnRef>
+          <a:fillRef idx="3">
+            <a:schemeClr val="accent1"/>
+          </a:fillRef>
+          <a:effectRef idx="2">
+            <a:schemeClr val="accent1"/>
+          </a:effectRef>
+          <a:fontRef idx="minor">
+            <a:schemeClr val="lt1"/>
+          </a:fontRef>
+        </p:style>
+        <p:txBody>
+          <a:bodyPr rtlCol="0" anchor="ctr" wrap="square"/>
+          <a:lstStyle/>
+          <a:p>
+            <a:pPr algn="ctr"/>
+            <a:r>
+              <a:rPr sz="1200" b="1">
+                <a:solidFill>
+                  <a:srgbClr val="8A93A3"/>
+                </a:solidFill>
+              </a:rPr>
+              <a:t>λ_bal · L_closure = ‖(1−F_liq−F_fl)·Σₚ mₚCₚ + F_liq·C_liq + F_fl·C_fl − B‖²</a:t>
+            </a:r>
+          </a:p>
+          <a:p>
+            <a:pPr algn="ctr"/>
+            <a:r>
+              <a:rPr sz="900" b="0">
+                <a:solidFill>
+                  <a:srgbClr val="8A93A3"/>
+                </a:solidFill>
+              </a:rPr>
+              <a:t>no weights of its own: ModeHead's masked mean m x CompHead's mean C must rebuild the input bulk B, melt/fluid side teacher-forced from the corpus row</a:t>
+            </a:r>
+          </a:p>
+        </p:txBody>
+      </p:sp>
+      <p:sp>
+        <p:nvSpPr>
+          <p:cNvPr id="33" name="Rounded Rectangle 32"/>
+          <p:cNvSpPr/>
+          <p:nvPr/>
+        </p:nvSpPr>
+        <p:spPr>
+          <a:xfrm>
+            <a:off x="502920" y="5468112"/>
+            <a:ext cx="11201400" cy="566928"/>
+          </a:xfrm>
+          <a:prstGeom prst="roundRect">
+            <a:avLst/>
+          </a:prstGeom>
+          <a:solidFill>
+            <a:srgbClr val="EAE8FB"/>
+          </a:solidFill>
+          <a:ln w="25400">
+            <a:solidFill>
+              <a:srgbClr val="6C5CE7"/>
+            </a:solidFill>
+          </a:ln>
+          <a:effectLst/>
+        </p:spPr>
+        <p:style>
+          <a:lnRef idx="1">
+            <a:schemeClr val="accent1"/>
+          </a:lnRef>
+          <a:fillRef idx="3">
+            <a:schemeClr val="accent1"/>
+          </a:fillRef>
+          <a:effectRef idx="2">
+            <a:schemeClr val="accent1"/>
+          </a:effectRef>
+          <a:fontRef idx="minor">
+            <a:schemeClr val="lt1"/>
+          </a:fontRef>
+        </p:style>
+        <p:txBody>
+          <a:bodyPr rtlCol="0" anchor="ctr" wrap="square"/>
+          <a:lstStyle/>
+          <a:p>
+            <a:pPr algn="ctr"/>
+            <a:r>
+              <a:rPr sz="1400" b="1">
+                <a:solidFill>
+                  <a:srgbClr val="1A2238"/>
+                </a:solidFill>
+              </a:rPr>
+              <a:t>L = L_presence + λ_mag·L_magnitude + λ_comp·L_comp + λ_cond·L_cond + λ_bal·L_closure</a:t>
+            </a:r>
+          </a:p>
+          <a:p>
+            <a:pPr algn="ctr"/>
+            <a:r>
+              <a:rPr sz="1100" b="0">
+                <a:solidFill>
+                  <a:srgbClr val="8A93A3"/>
+                </a:solidFill>
+              </a:rPr>
+              <a:t>λ_mag 7.76 . λ_comp 1.0 . λ_cond 0.01 . λ_bal 0.0118 (joint HPO, ADR 006) -- one scalar, one backward pass, one AdamW step; the branches share no weights, so each λ balances terms rather than arbitrating a trunk</a:t>
+            </a:r>
+          </a:p>
+        </p:txBody>
+      </p:sp>
+      <p:sp>
+        <p:nvSpPr>
+          <p:cNvPr id="34" name="TextBox 33"/>
           <p:cNvSpPr txBox="1"/>
           <p:nvPr/>
         </p:nvSpPr>
         <p:spPr>
           <a:xfrm>
-            <a:off x="9555480" y="5440679"/>
-            <a:ext cx="2148840" cy="365760"/>
+            <a:off x="502920" y="6071616"/>
+            <a:ext cx="11201400" cy="731520"/>
           </a:xfrm>
           <a:prstGeom prst="rect">
             <a:avLst/>
@@ -19316,28 +18848,28 @@
           </a:bodyPr>
           <a:lstStyle/>
           <a:p>
-            <a:pPr algn="ctr"/>
-            <a:r>
-              <a:rPr sz="1200" b="1">
+            <a:pPr algn="l"/>
+            <a:r>
+              <a:rPr sz="1050" b="0">
                 <a:solidFill>
                   <a:srgbClr val="1A2238"/>
                 </a:solidFill>
               </a:rPr>
-              <a:t>H2O  multimodal</a:t>
-            </a:r>
-          </a:p>
-        </p:txBody>
-      </p:sp>
-      <p:sp>
-        <p:nvSpPr>
-          <p:cNvPr id="46" name="TextBox 45"/>
+              <a:t>895,169 params on the frozen 3.23M encoder (~28%): mode 410,922 . comp 65,404 . cond 418,843 -- from checkpoints/joint_heads_regen_tuned_seed0/heads_best.pt</a:t>
+            </a:r>
+          </a:p>
+        </p:txBody>
+      </p:sp>
+      <p:sp>
+        <p:nvSpPr>
+          <p:cNvPr id="35" name="TextBox 34"/>
           <p:cNvSpPr txBox="1"/>
           <p:nvPr/>
         </p:nvSpPr>
         <p:spPr>
           <a:xfrm>
-            <a:off x="502920" y="6172200"/>
-            <a:ext cx="11247120" cy="731520"/>
+            <a:off x="502920" y="6327648"/>
+            <a:ext cx="11201400" cy="731520"/>
           </a:xfrm>
           <a:prstGeom prst="rect">
             <a:avLst/>
@@ -19352,12 +18884,46 @@
           <a:p>
             <a:pPr algn="l"/>
             <a:r>
-              <a:rPr sz="1200" b="0">
-                <a:solidFill>
-                  <a:srgbClr val="8A93A3"/>
-                </a:solidFill>
-              </a:rPr>
-              <a:t>values illustrative -- every phase carries both numbers; faded bars = presence genuinely uncertain (here the amphibole/orthopyroxene either-or: wet-deep grows amp, dry-shallow grows opx). This marginal view is a projection; the primary output is the ranked-scenario view on the next slide.</a:t>
+              <a:rPr sz="950" b="0">
+                <a:solidFill>
+                  <a:srgbClr val="8A93A3"/>
+                </a:solidFill>
+              </a:rPr>
+              <a:t>dials (configs/heads/joint_heads.yaml): dropout 0.160 . lr 3.36e-4 . weight_decay 1.59e-4 . batch 1024 . epochs 120 / patience 10 -- in code: GELU, AdamW, grad-clip 1.0 per head</a:t>
+            </a:r>
+          </a:p>
+        </p:txBody>
+      </p:sp>
+      <p:sp>
+        <p:nvSpPr>
+          <p:cNvPr id="36" name="TextBox 35"/>
+          <p:cNvSpPr txBox="1"/>
+          <p:nvPr/>
+        </p:nvSpPr>
+        <p:spPr>
+          <a:xfrm>
+            <a:off x="502920" y="6528816"/>
+            <a:ext cx="11201400" cy="731520"/>
+          </a:xfrm>
+          <a:prstGeom prst="rect">
+            <a:avLst/>
+          </a:prstGeom>
+          <a:noFill/>
+        </p:spPr>
+        <p:txBody>
+          <a:bodyPr wrap="square">
+            <a:spAutoFit/>
+          </a:bodyPr>
+          <a:lstStyle/>
+          <a:p>
+            <a:pPr algn="l"/>
+            <a:r>
+              <a:rPr sz="950" b="0">
+                <a:solidFill>
+                  <a:srgbClr val="C0392B"/>
+                </a:solidFill>
+              </a:rPr>
+              <a:t>L_presence is meaned over the 21 phases while L_magnitude sums them, so against a per-phase-SUM BCE the same weight reads 21 x 7.76 = 163</a:t>
             </a:r>
           </a:p>
         </p:txBody>
@@ -19443,6 +19009,2317 @@
                   <a:srgbClr val="1A2238"/>
                 </a:solidFill>
               </a:rPr>
+              <a:t>What the heads emit (distributions, not point estimates)</a:t>
+            </a:r>
+          </a:p>
+        </p:txBody>
+      </p:sp>
+      <p:sp>
+        <p:nvSpPr>
+          <p:cNvPr id="4" name="Rounded Rectangle 3"/>
+          <p:cNvSpPr/>
+          <p:nvPr/>
+        </p:nvSpPr>
+        <p:spPr>
+          <a:xfrm>
+            <a:off x="502920" y="2651760"/>
+            <a:ext cx="2286000" cy="1554480"/>
+          </a:xfrm>
+          <a:prstGeom prst="roundRect">
+            <a:avLst/>
+          </a:prstGeom>
+          <a:solidFill>
+            <a:srgbClr val="E1E8FF"/>
+          </a:solidFill>
+          <a:ln w="25400">
+            <a:solidFill>
+              <a:srgbClr val="2E5BFF"/>
+            </a:solidFill>
+          </a:ln>
+          <a:effectLst/>
+        </p:spPr>
+        <p:style>
+          <a:lnRef idx="1">
+            <a:schemeClr val="accent1"/>
+          </a:lnRef>
+          <a:fillRef idx="3">
+            <a:schemeClr val="accent1"/>
+          </a:fillRef>
+          <a:effectRef idx="2">
+            <a:schemeClr val="accent1"/>
+          </a:effectRef>
+          <a:fontRef idx="minor">
+            <a:schemeClr val="lt1"/>
+          </a:fontRef>
+        </p:style>
+        <p:txBody>
+          <a:bodyPr rtlCol="0" anchor="ctr" wrap="square"/>
+          <a:lstStyle/>
+          <a:p>
+            <a:pPr algn="ctr"/>
+            <a:r>
+              <a:rPr sz="1200" b="1">
+                <a:solidFill>
+                  <a:srgbClr val="1A2238"/>
+                </a:solidFill>
+              </a:rPr>
+              <a:t>example bulk</a:t>
+            </a:r>
+          </a:p>
+          <a:p>
+            <a:pPr algn="ctr"/>
+            <a:r>
+              <a:rPr sz="1200" b="1">
+                <a:solidFill>
+                  <a:srgbClr val="1A2238"/>
+                </a:solidFill>
+              </a:rPr>
+              <a:t/>
+            </a:r>
+          </a:p>
+          <a:p>
+            <a:pPr algn="ctr"/>
+            <a:r>
+              <a:rPr sz="900" b="0">
+                <a:solidFill>
+                  <a:srgbClr val="8A93A3"/>
+                </a:solidFill>
+              </a:rPr>
+              <a:t>SiO2 50  Al2O3 16</a:t>
+            </a:r>
+          </a:p>
+          <a:p>
+            <a:pPr algn="ctr"/>
+            <a:r>
+              <a:rPr sz="900" b="0">
+                <a:solidFill>
+                  <a:srgbClr val="8A93A3"/>
+                </a:solidFill>
+              </a:rPr>
+              <a:t>MgO 7.5  FeO 11</a:t>
+            </a:r>
+          </a:p>
+          <a:p>
+            <a:pPr algn="ctr"/>
+            <a:r>
+              <a:rPr sz="900" b="0">
+                <a:solidFill>
+                  <a:srgbClr val="8A93A3"/>
+                </a:solidFill>
+              </a:rPr>
+              <a:t>Sr 400 ppm ...</a:t>
+            </a:r>
+          </a:p>
+        </p:txBody>
+      </p:sp>
+      <p:sp>
+        <p:nvSpPr>
+          <p:cNvPr id="5" name="Right Arrow 4"/>
+          <p:cNvSpPr/>
+          <p:nvPr/>
+        </p:nvSpPr>
+        <p:spPr>
+          <a:xfrm>
+            <a:off x="2880360" y="3246120"/>
+            <a:ext cx="457200" cy="365760"/>
+          </a:xfrm>
+          <a:prstGeom prst="rightArrow">
+            <a:avLst/>
+          </a:prstGeom>
+          <a:solidFill>
+            <a:srgbClr val="1A2238"/>
+          </a:solidFill>
+          <a:ln>
+            <a:noFill/>
+          </a:ln>
+          <a:effectLst/>
+        </p:spPr>
+        <p:style>
+          <a:lnRef idx="1">
+            <a:schemeClr val="accent1"/>
+          </a:lnRef>
+          <a:fillRef idx="3">
+            <a:schemeClr val="accent1"/>
+          </a:fillRef>
+          <a:effectRef idx="2">
+            <a:schemeClr val="accent1"/>
+          </a:effectRef>
+          <a:fontRef idx="minor">
+            <a:schemeClr val="lt1"/>
+          </a:fontRef>
+        </p:style>
+        <p:txBody>
+          <a:bodyPr rtlCol="0" anchor="ctr"/>
+          <a:lstStyle/>
+          <a:p>
+            <a:pPr algn="ctr"/>
+          </a:p>
+        </p:txBody>
+      </p:sp>
+      <p:sp>
+        <p:nvSpPr>
+          <p:cNvPr id="6" name="Oval 5"/>
+          <p:cNvSpPr/>
+          <p:nvPr/>
+        </p:nvSpPr>
+        <p:spPr>
+          <a:xfrm>
+            <a:off x="3456432" y="2770632"/>
+            <a:ext cx="1316736" cy="1316736"/>
+          </a:xfrm>
+          <a:prstGeom prst="ellipse">
+            <a:avLst/>
+          </a:prstGeom>
+          <a:solidFill>
+            <a:srgbClr val="E8883A"/>
+          </a:solidFill>
+          <a:ln w="31750">
+            <a:solidFill>
+              <a:srgbClr val="E8883A"/>
+            </a:solidFill>
+          </a:ln>
+          <a:effectLst/>
+        </p:spPr>
+        <p:style>
+          <a:lnRef idx="1">
+            <a:schemeClr val="accent1"/>
+          </a:lnRef>
+          <a:fillRef idx="3">
+            <a:schemeClr val="accent1"/>
+          </a:fillRef>
+          <a:effectRef idx="2">
+            <a:schemeClr val="accent1"/>
+          </a:effectRef>
+          <a:fontRef idx="minor">
+            <a:schemeClr val="lt1"/>
+          </a:fontRef>
+        </p:style>
+        <p:txBody>
+          <a:bodyPr rtlCol="0" anchor="ctr" wrap="square"/>
+          <a:lstStyle/>
+          <a:p>
+            <a:pPr algn="ctr"/>
+            <a:r>
+              <a:rPr sz="2200" b="1">
+                <a:solidFill>
+                  <a:srgbClr val="FFFFFF"/>
+                </a:solidFill>
+              </a:rPr>
+              <a:t>h</a:t>
+            </a:r>
+          </a:p>
+          <a:p>
+            <a:pPr algn="ctr"/>
+            <a:r>
+              <a:rPr sz="1900" b="0">
+                <a:solidFill>
+                  <a:srgbClr val="8A93A3"/>
+                </a:solidFill>
+              </a:rPr>
+              <a:t>256-d latent</a:t>
+            </a:r>
+          </a:p>
+        </p:txBody>
+      </p:sp>
+      <p:sp>
+        <p:nvSpPr>
+          <p:cNvPr id="7" name="Right Arrow 6"/>
+          <p:cNvSpPr/>
+          <p:nvPr/>
+        </p:nvSpPr>
+        <p:spPr>
+          <a:xfrm>
+            <a:off x="4892040" y="3246120"/>
+            <a:ext cx="457200" cy="365760"/>
+          </a:xfrm>
+          <a:prstGeom prst="rightArrow">
+            <a:avLst/>
+          </a:prstGeom>
+          <a:solidFill>
+            <a:srgbClr val="1A2238"/>
+          </a:solidFill>
+          <a:ln>
+            <a:noFill/>
+          </a:ln>
+          <a:effectLst/>
+        </p:spPr>
+        <p:style>
+          <a:lnRef idx="1">
+            <a:schemeClr val="accent1"/>
+          </a:lnRef>
+          <a:fillRef idx="3">
+            <a:schemeClr val="accent1"/>
+          </a:fillRef>
+          <a:effectRef idx="2">
+            <a:schemeClr val="accent1"/>
+          </a:effectRef>
+          <a:fontRef idx="minor">
+            <a:schemeClr val="lt1"/>
+          </a:fontRef>
+        </p:style>
+        <p:txBody>
+          <a:bodyPr rtlCol="0" anchor="ctr"/>
+          <a:lstStyle/>
+          <a:p>
+            <a:pPr algn="ctr"/>
+          </a:p>
+        </p:txBody>
+      </p:sp>
+      <p:sp>
+        <p:nvSpPr>
+          <p:cNvPr id="8" name="Rounded Rectangle 7"/>
+          <p:cNvSpPr/>
+          <p:nvPr/>
+        </p:nvSpPr>
+        <p:spPr>
+          <a:xfrm>
+            <a:off x="5486400" y="1417320"/>
+            <a:ext cx="6309360" cy="2057400"/>
+          </a:xfrm>
+          <a:prstGeom prst="roundRect">
+            <a:avLst/>
+          </a:prstGeom>
+          <a:solidFill>
+            <a:srgbClr val="E1F1EF"/>
+          </a:solidFill>
+          <a:ln w="25400">
+            <a:solidFill>
+              <a:srgbClr val="2A9D8F"/>
+            </a:solidFill>
+          </a:ln>
+          <a:effectLst/>
+        </p:spPr>
+        <p:style>
+          <a:lnRef idx="1">
+            <a:schemeClr val="accent1"/>
+          </a:lnRef>
+          <a:fillRef idx="3">
+            <a:schemeClr val="accent1"/>
+          </a:fillRef>
+          <a:effectRef idx="2">
+            <a:schemeClr val="accent1"/>
+          </a:effectRef>
+          <a:fontRef idx="minor">
+            <a:schemeClr val="lt1"/>
+          </a:fontRef>
+        </p:style>
+        <p:txBody>
+          <a:bodyPr rtlCol="0" anchor="ctr" wrap="square"/>
+          <a:lstStyle/>
+          <a:p>
+            <a:pPr algn="ctr"/>
+            <a:r>
+              <a:rPr sz="1300" b="1">
+                <a:solidFill>
+                  <a:srgbClr val="1A2238"/>
+                </a:solidFill>
+              </a:rPr>
+              <a:t/>
+            </a:r>
+          </a:p>
+        </p:txBody>
+      </p:sp>
+      <p:sp>
+        <p:nvSpPr>
+          <p:cNvPr id="9" name="TextBox 8"/>
+          <p:cNvSpPr txBox="1"/>
+          <p:nvPr/>
+        </p:nvSpPr>
+        <p:spPr>
+          <a:xfrm>
+            <a:off x="5669280" y="1463040"/>
+            <a:ext cx="5943600" cy="731520"/>
+          </a:xfrm>
+          <a:prstGeom prst="rect">
+            <a:avLst/>
+          </a:prstGeom>
+          <a:noFill/>
+        </p:spPr>
+        <p:txBody>
+          <a:bodyPr wrap="square">
+            <a:spAutoFit/>
+          </a:bodyPr>
+          <a:lstStyle/>
+          <a:p>
+            <a:pPr algn="l"/>
+            <a:r>
+              <a:rPr sz="1200" b="0">
+                <a:solidFill>
+                  <a:srgbClr val="2A9D8F"/>
+                </a:solidFill>
+              </a:rPr>
+              <a:t>ModeHead -&gt; per phase: p(present) x amount-when-present (hurdle Dirichlet; crystals renormalized to 1, groundmass/melt excluded)</a:t>
+            </a:r>
+          </a:p>
+        </p:txBody>
+      </p:sp>
+      <p:sp>
+        <p:nvSpPr>
+          <p:cNvPr id="10" name="Rounded Rectangle 9"/>
+          <p:cNvSpPr/>
+          <p:nvPr/>
+        </p:nvSpPr>
+        <p:spPr>
+          <a:xfrm>
+            <a:off x="5715000" y="1874519"/>
+            <a:ext cx="1892807" cy="292608"/>
+          </a:xfrm>
+          <a:prstGeom prst="roundRect">
+            <a:avLst/>
+          </a:prstGeom>
+          <a:solidFill>
+            <a:srgbClr val="2A9D8F"/>
+          </a:solidFill>
+          <a:ln>
+            <a:noFill/>
+          </a:ln>
+          <a:effectLst/>
+        </p:spPr>
+        <p:style>
+          <a:lnRef idx="1">
+            <a:schemeClr val="accent1"/>
+          </a:lnRef>
+          <a:fillRef idx="3">
+            <a:schemeClr val="accent1"/>
+          </a:fillRef>
+          <a:effectRef idx="2">
+            <a:schemeClr val="accent1"/>
+          </a:effectRef>
+          <a:fontRef idx="minor">
+            <a:schemeClr val="lt1"/>
+          </a:fontRef>
+        </p:style>
+        <p:txBody>
+          <a:bodyPr rtlCol="0" anchor="ctr"/>
+          <a:lstStyle/>
+          <a:p>
+            <a:pPr algn="ctr"/>
+          </a:p>
+        </p:txBody>
+      </p:sp>
+      <p:cxnSp>
+        <p:nvCxnSpPr>
+          <p:cNvPr id="11" name="Connector 10"/>
+          <p:cNvCxnSpPr/>
+          <p:nvPr/>
+        </p:nvCxnSpPr>
+        <p:spPr>
+          <a:xfrm>
+            <a:off x="7397496" y="2020824"/>
+            <a:ext cx="420624" cy="0"/>
+          </a:xfrm>
+          <a:prstGeom prst="bentConnector3">
+            <a:avLst/>
+          </a:prstGeom>
+          <a:ln w="15875">
+            <a:solidFill>
+              <a:srgbClr val="1A2238"/>
+            </a:solidFill>
+          </a:ln>
+          <a:effectLst/>
+        </p:spPr>
+        <p:style>
+          <a:lnRef idx="2">
+            <a:schemeClr val="accent1"/>
+          </a:lnRef>
+          <a:fillRef idx="0">
+            <a:schemeClr val="accent1"/>
+          </a:fillRef>
+          <a:effectRef idx="1">
+            <a:schemeClr val="accent1"/>
+          </a:effectRef>
+          <a:fontRef idx="minor">
+            <a:schemeClr val="tx1"/>
+          </a:fontRef>
+        </p:style>
+      </p:cxnSp>
+      <p:cxnSp>
+        <p:nvCxnSpPr>
+          <p:cNvPr id="12" name="Connector 11"/>
+          <p:cNvCxnSpPr/>
+          <p:nvPr/>
+        </p:nvCxnSpPr>
+        <p:spPr>
+          <a:xfrm>
+            <a:off x="7397496" y="1956816"/>
+            <a:ext cx="0" cy="128015"/>
+          </a:xfrm>
+          <a:prstGeom prst="bentConnector3">
+            <a:avLst/>
+          </a:prstGeom>
+          <a:ln w="15875">
+            <a:solidFill>
+              <a:srgbClr val="1A2238"/>
+            </a:solidFill>
+          </a:ln>
+          <a:effectLst/>
+        </p:spPr>
+        <p:style>
+          <a:lnRef idx="2">
+            <a:schemeClr val="accent1"/>
+          </a:lnRef>
+          <a:fillRef idx="0">
+            <a:schemeClr val="accent1"/>
+          </a:fillRef>
+          <a:effectRef idx="1">
+            <a:schemeClr val="accent1"/>
+          </a:effectRef>
+          <a:fontRef idx="minor">
+            <a:schemeClr val="tx1"/>
+          </a:fontRef>
+        </p:style>
+      </p:cxnSp>
+      <p:cxnSp>
+        <p:nvCxnSpPr>
+          <p:cNvPr id="13" name="Connector 12"/>
+          <p:cNvCxnSpPr/>
+          <p:nvPr/>
+        </p:nvCxnSpPr>
+        <p:spPr>
+          <a:xfrm>
+            <a:off x="7818120" y="1956816"/>
+            <a:ext cx="0" cy="128015"/>
+          </a:xfrm>
+          <a:prstGeom prst="bentConnector3">
+            <a:avLst/>
+          </a:prstGeom>
+          <a:ln w="15875">
+            <a:solidFill>
+              <a:srgbClr val="1A2238"/>
+            </a:solidFill>
+          </a:ln>
+          <a:effectLst/>
+        </p:spPr>
+        <p:style>
+          <a:lnRef idx="2">
+            <a:schemeClr val="accent1"/>
+          </a:lnRef>
+          <a:fillRef idx="0">
+            <a:schemeClr val="accent1"/>
+          </a:fillRef>
+          <a:effectRef idx="1">
+            <a:schemeClr val="accent1"/>
+          </a:effectRef>
+          <a:fontRef idx="minor">
+            <a:schemeClr val="tx1"/>
+          </a:fontRef>
+        </p:style>
+      </p:cxnSp>
+      <p:sp>
+        <p:nvSpPr>
+          <p:cNvPr id="14" name="TextBox 13"/>
+          <p:cNvSpPr txBox="1"/>
+          <p:nvPr/>
+        </p:nvSpPr>
+        <p:spPr>
+          <a:xfrm>
+            <a:off x="7909560" y="1828799"/>
+            <a:ext cx="4206240" cy="365760"/>
+          </a:xfrm>
+          <a:prstGeom prst="rect">
+            <a:avLst/>
+          </a:prstGeom>
+          <a:noFill/>
+        </p:spPr>
+        <p:txBody>
+          <a:bodyPr wrap="square">
+            <a:spAutoFit/>
+          </a:bodyPr>
+          <a:lstStyle/>
+          <a:p>
+            <a:pPr algn="l"/>
+            <a:r>
+              <a:rPr sz="1200" b="0">
+                <a:solidFill>
+                  <a:srgbClr val="1A2238"/>
+                </a:solidFill>
+              </a:rPr>
+              <a:t>plagioclase  0.45  |  p 1.00</a:t>
+            </a:r>
+          </a:p>
+        </p:txBody>
+      </p:sp>
+      <p:sp>
+        <p:nvSpPr>
+          <p:cNvPr id="15" name="Rounded Rectangle 14"/>
+          <p:cNvSpPr/>
+          <p:nvPr/>
+        </p:nvSpPr>
+        <p:spPr>
+          <a:xfrm>
+            <a:off x="5715000" y="2185415"/>
+            <a:ext cx="1135684" cy="292608"/>
+          </a:xfrm>
+          <a:prstGeom prst="roundRect">
+            <a:avLst/>
+          </a:prstGeom>
+          <a:solidFill>
+            <a:srgbClr val="2A9D8F"/>
+          </a:solidFill>
+          <a:ln>
+            <a:noFill/>
+          </a:ln>
+          <a:effectLst/>
+        </p:spPr>
+        <p:style>
+          <a:lnRef idx="1">
+            <a:schemeClr val="accent1"/>
+          </a:lnRef>
+          <a:fillRef idx="3">
+            <a:schemeClr val="accent1"/>
+          </a:fillRef>
+          <a:effectRef idx="2">
+            <a:schemeClr val="accent1"/>
+          </a:effectRef>
+          <a:fontRef idx="minor">
+            <a:schemeClr val="lt1"/>
+          </a:fontRef>
+        </p:style>
+        <p:txBody>
+          <a:bodyPr rtlCol="0" anchor="ctr"/>
+          <a:lstStyle/>
+          <a:p>
+            <a:pPr algn="ctr"/>
+          </a:p>
+        </p:txBody>
+      </p:sp>
+      <p:cxnSp>
+        <p:nvCxnSpPr>
+          <p:cNvPr id="16" name="Connector 15"/>
+          <p:cNvCxnSpPr/>
+          <p:nvPr/>
+        </p:nvCxnSpPr>
+        <p:spPr>
+          <a:xfrm>
+            <a:off x="6682435" y="2331720"/>
+            <a:ext cx="336499" cy="0"/>
+          </a:xfrm>
+          <a:prstGeom prst="bentConnector3">
+            <a:avLst/>
+          </a:prstGeom>
+          <a:ln w="15875">
+            <a:solidFill>
+              <a:srgbClr val="1A2238"/>
+            </a:solidFill>
+          </a:ln>
+          <a:effectLst/>
+        </p:spPr>
+        <p:style>
+          <a:lnRef idx="2">
+            <a:schemeClr val="accent1"/>
+          </a:lnRef>
+          <a:fillRef idx="0">
+            <a:schemeClr val="accent1"/>
+          </a:fillRef>
+          <a:effectRef idx="1">
+            <a:schemeClr val="accent1"/>
+          </a:effectRef>
+          <a:fontRef idx="minor">
+            <a:schemeClr val="tx1"/>
+          </a:fontRef>
+        </p:style>
+      </p:cxnSp>
+      <p:cxnSp>
+        <p:nvCxnSpPr>
+          <p:cNvPr id="17" name="Connector 16"/>
+          <p:cNvCxnSpPr/>
+          <p:nvPr/>
+        </p:nvCxnSpPr>
+        <p:spPr>
+          <a:xfrm>
+            <a:off x="6682435" y="2267712"/>
+            <a:ext cx="0" cy="128015"/>
+          </a:xfrm>
+          <a:prstGeom prst="bentConnector3">
+            <a:avLst/>
+          </a:prstGeom>
+          <a:ln w="15875">
+            <a:solidFill>
+              <a:srgbClr val="1A2238"/>
+            </a:solidFill>
+          </a:ln>
+          <a:effectLst/>
+        </p:spPr>
+        <p:style>
+          <a:lnRef idx="2">
+            <a:schemeClr val="accent1"/>
+          </a:lnRef>
+          <a:fillRef idx="0">
+            <a:schemeClr val="accent1"/>
+          </a:fillRef>
+          <a:effectRef idx="1">
+            <a:schemeClr val="accent1"/>
+          </a:effectRef>
+          <a:fontRef idx="minor">
+            <a:schemeClr val="tx1"/>
+          </a:fontRef>
+        </p:style>
+      </p:cxnSp>
+      <p:cxnSp>
+        <p:nvCxnSpPr>
+          <p:cNvPr id="18" name="Connector 17"/>
+          <p:cNvCxnSpPr/>
+          <p:nvPr/>
+        </p:nvCxnSpPr>
+        <p:spPr>
+          <a:xfrm>
+            <a:off x="7018934" y="2267712"/>
+            <a:ext cx="0" cy="128015"/>
+          </a:xfrm>
+          <a:prstGeom prst="bentConnector3">
+            <a:avLst/>
+          </a:prstGeom>
+          <a:ln w="15875">
+            <a:solidFill>
+              <a:srgbClr val="1A2238"/>
+            </a:solidFill>
+          </a:ln>
+          <a:effectLst/>
+        </p:spPr>
+        <p:style>
+          <a:lnRef idx="2">
+            <a:schemeClr val="accent1"/>
+          </a:lnRef>
+          <a:fillRef idx="0">
+            <a:schemeClr val="accent1"/>
+          </a:fillRef>
+          <a:effectRef idx="1">
+            <a:schemeClr val="accent1"/>
+          </a:effectRef>
+          <a:fontRef idx="minor">
+            <a:schemeClr val="tx1"/>
+          </a:fontRef>
+        </p:style>
+      </p:cxnSp>
+      <p:sp>
+        <p:nvSpPr>
+          <p:cNvPr id="19" name="TextBox 18"/>
+          <p:cNvSpPr txBox="1"/>
+          <p:nvPr/>
+        </p:nvSpPr>
+        <p:spPr>
+          <a:xfrm>
+            <a:off x="7110374" y="2139696"/>
+            <a:ext cx="4206240" cy="365760"/>
+          </a:xfrm>
+          <a:prstGeom prst="rect">
+            <a:avLst/>
+          </a:prstGeom>
+          <a:noFill/>
+        </p:spPr>
+        <p:txBody>
+          <a:bodyPr wrap="square">
+            <a:spAutoFit/>
+          </a:bodyPr>
+          <a:lstStyle/>
+          <a:p>
+            <a:pPr algn="l"/>
+            <a:r>
+              <a:rPr sz="1200" b="0">
+                <a:solidFill>
+                  <a:srgbClr val="1A2238"/>
+                </a:solidFill>
+              </a:rPr>
+              <a:t>clinopyroxene  0.27  |  p 0.97</a:t>
+            </a:r>
+          </a:p>
+        </p:txBody>
+      </p:sp>
+      <p:sp>
+        <p:nvSpPr>
+          <p:cNvPr id="20" name="Rounded Rectangle 19"/>
+          <p:cNvSpPr/>
+          <p:nvPr/>
+        </p:nvSpPr>
+        <p:spPr>
+          <a:xfrm>
+            <a:off x="5715000" y="2496312"/>
+            <a:ext cx="757123" cy="292608"/>
+          </a:xfrm>
+          <a:prstGeom prst="roundRect">
+            <a:avLst/>
+          </a:prstGeom>
+          <a:solidFill>
+            <a:srgbClr val="A9D7D2"/>
+          </a:solidFill>
+          <a:ln>
+            <a:noFill/>
+          </a:ln>
+          <a:effectLst/>
+        </p:spPr>
+        <p:style>
+          <a:lnRef idx="1">
+            <a:schemeClr val="accent1"/>
+          </a:lnRef>
+          <a:fillRef idx="3">
+            <a:schemeClr val="accent1"/>
+          </a:fillRef>
+          <a:effectRef idx="2">
+            <a:schemeClr val="accent1"/>
+          </a:effectRef>
+          <a:fontRef idx="minor">
+            <a:schemeClr val="lt1"/>
+          </a:fontRef>
+        </p:style>
+        <p:txBody>
+          <a:bodyPr rtlCol="0" anchor="ctr"/>
+          <a:lstStyle/>
+          <a:p>
+            <a:pPr algn="ctr"/>
+          </a:p>
+        </p:txBody>
+      </p:sp>
+      <p:cxnSp>
+        <p:nvCxnSpPr>
+          <p:cNvPr id="21" name="Connector 20"/>
+          <p:cNvCxnSpPr/>
+          <p:nvPr/>
+        </p:nvCxnSpPr>
+        <p:spPr>
+          <a:xfrm>
+            <a:off x="6219748" y="2642616"/>
+            <a:ext cx="504749" cy="0"/>
+          </a:xfrm>
+          <a:prstGeom prst="bentConnector3">
+            <a:avLst/>
+          </a:prstGeom>
+          <a:ln w="15875">
+            <a:solidFill>
+              <a:srgbClr val="1A2238"/>
+            </a:solidFill>
+          </a:ln>
+          <a:effectLst/>
+        </p:spPr>
+        <p:style>
+          <a:lnRef idx="2">
+            <a:schemeClr val="accent1"/>
+          </a:lnRef>
+          <a:fillRef idx="0">
+            <a:schemeClr val="accent1"/>
+          </a:fillRef>
+          <a:effectRef idx="1">
+            <a:schemeClr val="accent1"/>
+          </a:effectRef>
+          <a:fontRef idx="minor">
+            <a:schemeClr val="tx1"/>
+          </a:fontRef>
+        </p:style>
+      </p:cxnSp>
+      <p:cxnSp>
+        <p:nvCxnSpPr>
+          <p:cNvPr id="22" name="Connector 21"/>
+          <p:cNvCxnSpPr/>
+          <p:nvPr/>
+        </p:nvCxnSpPr>
+        <p:spPr>
+          <a:xfrm>
+            <a:off x="6219748" y="2578608"/>
+            <a:ext cx="0" cy="128016"/>
+          </a:xfrm>
+          <a:prstGeom prst="bentConnector3">
+            <a:avLst/>
+          </a:prstGeom>
+          <a:ln w="15875">
+            <a:solidFill>
+              <a:srgbClr val="1A2238"/>
+            </a:solidFill>
+          </a:ln>
+          <a:effectLst/>
+        </p:spPr>
+        <p:style>
+          <a:lnRef idx="2">
+            <a:schemeClr val="accent1"/>
+          </a:lnRef>
+          <a:fillRef idx="0">
+            <a:schemeClr val="accent1"/>
+          </a:fillRef>
+          <a:effectRef idx="1">
+            <a:schemeClr val="accent1"/>
+          </a:effectRef>
+          <a:fontRef idx="minor">
+            <a:schemeClr val="tx1"/>
+          </a:fontRef>
+        </p:style>
+      </p:cxnSp>
+      <p:cxnSp>
+        <p:nvCxnSpPr>
+          <p:cNvPr id="23" name="Connector 22"/>
+          <p:cNvCxnSpPr/>
+          <p:nvPr/>
+        </p:nvCxnSpPr>
+        <p:spPr>
+          <a:xfrm>
+            <a:off x="6724497" y="2578608"/>
+            <a:ext cx="0" cy="128016"/>
+          </a:xfrm>
+          <a:prstGeom prst="bentConnector3">
+            <a:avLst/>
+          </a:prstGeom>
+          <a:ln w="15875">
+            <a:solidFill>
+              <a:srgbClr val="1A2238"/>
+            </a:solidFill>
+          </a:ln>
+          <a:effectLst/>
+        </p:spPr>
+        <p:style>
+          <a:lnRef idx="2">
+            <a:schemeClr val="accent1"/>
+          </a:lnRef>
+          <a:fillRef idx="0">
+            <a:schemeClr val="accent1"/>
+          </a:fillRef>
+          <a:effectRef idx="1">
+            <a:schemeClr val="accent1"/>
+          </a:effectRef>
+          <a:fontRef idx="minor">
+            <a:schemeClr val="tx1"/>
+          </a:fontRef>
+        </p:style>
+      </p:cxnSp>
+      <p:sp>
+        <p:nvSpPr>
+          <p:cNvPr id="24" name="TextBox 23"/>
+          <p:cNvSpPr txBox="1"/>
+          <p:nvPr/>
+        </p:nvSpPr>
+        <p:spPr>
+          <a:xfrm>
+            <a:off x="6815937" y="2450592"/>
+            <a:ext cx="4206240" cy="365760"/>
+          </a:xfrm>
+          <a:prstGeom prst="rect">
+            <a:avLst/>
+          </a:prstGeom>
+          <a:noFill/>
+        </p:spPr>
+        <p:txBody>
+          <a:bodyPr wrap="square">
+            <a:spAutoFit/>
+          </a:bodyPr>
+          <a:lstStyle/>
+          <a:p>
+            <a:pPr algn="l"/>
+            <a:r>
+              <a:rPr sz="1200" b="0">
+                <a:solidFill>
+                  <a:srgbClr val="1A2238"/>
+                </a:solidFill>
+              </a:rPr>
+              <a:t>amphibole  0.18  |  p 0.41</a:t>
+            </a:r>
+          </a:p>
+        </p:txBody>
+      </p:sp>
+      <p:sp>
+        <p:nvSpPr>
+          <p:cNvPr id="25" name="Rounded Rectangle 24"/>
+          <p:cNvSpPr/>
+          <p:nvPr/>
+        </p:nvSpPr>
+        <p:spPr>
+          <a:xfrm>
+            <a:off x="5715000" y="2807208"/>
+            <a:ext cx="420623" cy="292608"/>
+          </a:xfrm>
+          <a:prstGeom prst="roundRect">
+            <a:avLst/>
+          </a:prstGeom>
+          <a:solidFill>
+            <a:srgbClr val="A9D7D2"/>
+          </a:solidFill>
+          <a:ln>
+            <a:noFill/>
+          </a:ln>
+          <a:effectLst/>
+        </p:spPr>
+        <p:style>
+          <a:lnRef idx="1">
+            <a:schemeClr val="accent1"/>
+          </a:lnRef>
+          <a:fillRef idx="3">
+            <a:schemeClr val="accent1"/>
+          </a:fillRef>
+          <a:effectRef idx="2">
+            <a:schemeClr val="accent1"/>
+          </a:effectRef>
+          <a:fontRef idx="minor">
+            <a:schemeClr val="lt1"/>
+          </a:fontRef>
+        </p:style>
+        <p:txBody>
+          <a:bodyPr rtlCol="0" anchor="ctr"/>
+          <a:lstStyle/>
+          <a:p>
+            <a:pPr algn="ctr"/>
+          </a:p>
+        </p:txBody>
+      </p:sp>
+      <p:cxnSp>
+        <p:nvCxnSpPr>
+          <p:cNvPr id="26" name="Connector 25"/>
+          <p:cNvCxnSpPr/>
+          <p:nvPr/>
+        </p:nvCxnSpPr>
+        <p:spPr>
+          <a:xfrm>
+            <a:off x="5967374" y="2953512"/>
+            <a:ext cx="336499" cy="0"/>
+          </a:xfrm>
+          <a:prstGeom prst="bentConnector3">
+            <a:avLst/>
+          </a:prstGeom>
+          <a:ln w="15875">
+            <a:solidFill>
+              <a:srgbClr val="1A2238"/>
+            </a:solidFill>
+          </a:ln>
+          <a:effectLst/>
+        </p:spPr>
+        <p:style>
+          <a:lnRef idx="2">
+            <a:schemeClr val="accent1"/>
+          </a:lnRef>
+          <a:fillRef idx="0">
+            <a:schemeClr val="accent1"/>
+          </a:fillRef>
+          <a:effectRef idx="1">
+            <a:schemeClr val="accent1"/>
+          </a:effectRef>
+          <a:fontRef idx="minor">
+            <a:schemeClr val="tx1"/>
+          </a:fontRef>
+        </p:style>
+      </p:cxnSp>
+      <p:cxnSp>
+        <p:nvCxnSpPr>
+          <p:cNvPr id="27" name="Connector 26"/>
+          <p:cNvCxnSpPr/>
+          <p:nvPr/>
+        </p:nvCxnSpPr>
+        <p:spPr>
+          <a:xfrm>
+            <a:off x="5967374" y="2889504"/>
+            <a:ext cx="0" cy="128016"/>
+          </a:xfrm>
+          <a:prstGeom prst="bentConnector3">
+            <a:avLst/>
+          </a:prstGeom>
+          <a:ln w="15875">
+            <a:solidFill>
+              <a:srgbClr val="1A2238"/>
+            </a:solidFill>
+          </a:ln>
+          <a:effectLst/>
+        </p:spPr>
+        <p:style>
+          <a:lnRef idx="2">
+            <a:schemeClr val="accent1"/>
+          </a:lnRef>
+          <a:fillRef idx="0">
+            <a:schemeClr val="accent1"/>
+          </a:fillRef>
+          <a:effectRef idx="1">
+            <a:schemeClr val="accent1"/>
+          </a:effectRef>
+          <a:fontRef idx="minor">
+            <a:schemeClr val="tx1"/>
+          </a:fontRef>
+        </p:style>
+      </p:cxnSp>
+      <p:cxnSp>
+        <p:nvCxnSpPr>
+          <p:cNvPr id="28" name="Connector 27"/>
+          <p:cNvCxnSpPr/>
+          <p:nvPr/>
+        </p:nvCxnSpPr>
+        <p:spPr>
+          <a:xfrm>
+            <a:off x="6303873" y="2889504"/>
+            <a:ext cx="0" cy="128016"/>
+          </a:xfrm>
+          <a:prstGeom prst="bentConnector3">
+            <a:avLst/>
+          </a:prstGeom>
+          <a:ln w="15875">
+            <a:solidFill>
+              <a:srgbClr val="1A2238"/>
+            </a:solidFill>
+          </a:ln>
+          <a:effectLst/>
+        </p:spPr>
+        <p:style>
+          <a:lnRef idx="2">
+            <a:schemeClr val="accent1"/>
+          </a:lnRef>
+          <a:fillRef idx="0">
+            <a:schemeClr val="accent1"/>
+          </a:fillRef>
+          <a:effectRef idx="1">
+            <a:schemeClr val="accent1"/>
+          </a:effectRef>
+          <a:fontRef idx="minor">
+            <a:schemeClr val="tx1"/>
+          </a:fontRef>
+        </p:style>
+      </p:cxnSp>
+      <p:sp>
+        <p:nvSpPr>
+          <p:cNvPr id="29" name="TextBox 28"/>
+          <p:cNvSpPr txBox="1"/>
+          <p:nvPr/>
+        </p:nvSpPr>
+        <p:spPr>
+          <a:xfrm>
+            <a:off x="6395313" y="2761488"/>
+            <a:ext cx="4206240" cy="365760"/>
+          </a:xfrm>
+          <a:prstGeom prst="rect">
+            <a:avLst/>
+          </a:prstGeom>
+          <a:noFill/>
+        </p:spPr>
+        <p:txBody>
+          <a:bodyPr wrap="square">
+            <a:spAutoFit/>
+          </a:bodyPr>
+          <a:lstStyle/>
+          <a:p>
+            <a:pPr algn="l"/>
+            <a:r>
+              <a:rPr sz="1200" b="0">
+                <a:solidFill>
+                  <a:srgbClr val="1A2238"/>
+                </a:solidFill>
+              </a:rPr>
+              <a:t>orthopyroxene  0.10  |  p 0.63</a:t>
+            </a:r>
+          </a:p>
+        </p:txBody>
+      </p:sp>
+      <p:sp>
+        <p:nvSpPr>
+          <p:cNvPr id="30" name="Rounded Rectangle 29"/>
+          <p:cNvSpPr/>
+          <p:nvPr/>
+        </p:nvSpPr>
+        <p:spPr>
+          <a:xfrm>
+            <a:off x="5715000" y="3118104"/>
+            <a:ext cx="168249" cy="292608"/>
+          </a:xfrm>
+          <a:prstGeom prst="roundRect">
+            <a:avLst/>
+          </a:prstGeom>
+          <a:solidFill>
+            <a:srgbClr val="2A9D8F"/>
+          </a:solidFill>
+          <a:ln>
+            <a:noFill/>
+          </a:ln>
+          <a:effectLst/>
+        </p:spPr>
+        <p:style>
+          <a:lnRef idx="1">
+            <a:schemeClr val="accent1"/>
+          </a:lnRef>
+          <a:fillRef idx="3">
+            <a:schemeClr val="accent1"/>
+          </a:fillRef>
+          <a:effectRef idx="2">
+            <a:schemeClr val="accent1"/>
+          </a:effectRef>
+          <a:fontRef idx="minor">
+            <a:schemeClr val="lt1"/>
+          </a:fontRef>
+        </p:style>
+        <p:txBody>
+          <a:bodyPr rtlCol="0" anchor="ctr"/>
+          <a:lstStyle/>
+          <a:p>
+            <a:pPr algn="ctr"/>
+          </a:p>
+        </p:txBody>
+      </p:sp>
+      <p:cxnSp>
+        <p:nvCxnSpPr>
+          <p:cNvPr id="31" name="Connector 30"/>
+          <p:cNvCxnSpPr/>
+          <p:nvPr/>
+        </p:nvCxnSpPr>
+        <p:spPr>
+          <a:xfrm>
+            <a:off x="5799124" y="3264408"/>
+            <a:ext cx="168250" cy="0"/>
+          </a:xfrm>
+          <a:prstGeom prst="bentConnector3">
+            <a:avLst/>
+          </a:prstGeom>
+          <a:ln w="15875">
+            <a:solidFill>
+              <a:srgbClr val="1A2238"/>
+            </a:solidFill>
+          </a:ln>
+          <a:effectLst/>
+        </p:spPr>
+        <p:style>
+          <a:lnRef idx="2">
+            <a:schemeClr val="accent1"/>
+          </a:lnRef>
+          <a:fillRef idx="0">
+            <a:schemeClr val="accent1"/>
+          </a:fillRef>
+          <a:effectRef idx="1">
+            <a:schemeClr val="accent1"/>
+          </a:effectRef>
+          <a:fontRef idx="minor">
+            <a:schemeClr val="tx1"/>
+          </a:fontRef>
+        </p:style>
+      </p:cxnSp>
+      <p:cxnSp>
+        <p:nvCxnSpPr>
+          <p:cNvPr id="32" name="Connector 31"/>
+          <p:cNvCxnSpPr/>
+          <p:nvPr/>
+        </p:nvCxnSpPr>
+        <p:spPr>
+          <a:xfrm>
+            <a:off x="5799124" y="3200400"/>
+            <a:ext cx="0" cy="128016"/>
+          </a:xfrm>
+          <a:prstGeom prst="bentConnector3">
+            <a:avLst/>
+          </a:prstGeom>
+          <a:ln w="15875">
+            <a:solidFill>
+              <a:srgbClr val="1A2238"/>
+            </a:solidFill>
+          </a:ln>
+          <a:effectLst/>
+        </p:spPr>
+        <p:style>
+          <a:lnRef idx="2">
+            <a:schemeClr val="accent1"/>
+          </a:lnRef>
+          <a:fillRef idx="0">
+            <a:schemeClr val="accent1"/>
+          </a:fillRef>
+          <a:effectRef idx="1">
+            <a:schemeClr val="accent1"/>
+          </a:effectRef>
+          <a:fontRef idx="minor">
+            <a:schemeClr val="tx1"/>
+          </a:fontRef>
+        </p:style>
+      </p:cxnSp>
+      <p:cxnSp>
+        <p:nvCxnSpPr>
+          <p:cNvPr id="33" name="Connector 32"/>
+          <p:cNvCxnSpPr/>
+          <p:nvPr/>
+        </p:nvCxnSpPr>
+        <p:spPr>
+          <a:xfrm>
+            <a:off x="5967374" y="3200400"/>
+            <a:ext cx="0" cy="128016"/>
+          </a:xfrm>
+          <a:prstGeom prst="bentConnector3">
+            <a:avLst/>
+          </a:prstGeom>
+          <a:ln w="15875">
+            <a:solidFill>
+              <a:srgbClr val="1A2238"/>
+            </a:solidFill>
+          </a:ln>
+          <a:effectLst/>
+        </p:spPr>
+        <p:style>
+          <a:lnRef idx="2">
+            <a:schemeClr val="accent1"/>
+          </a:lnRef>
+          <a:fillRef idx="0">
+            <a:schemeClr val="accent1"/>
+          </a:fillRef>
+          <a:effectRef idx="1">
+            <a:schemeClr val="accent1"/>
+          </a:effectRef>
+          <a:fontRef idx="minor">
+            <a:schemeClr val="tx1"/>
+          </a:fontRef>
+        </p:style>
+      </p:cxnSp>
+      <p:sp>
+        <p:nvSpPr>
+          <p:cNvPr id="34" name="TextBox 33"/>
+          <p:cNvSpPr txBox="1"/>
+          <p:nvPr/>
+        </p:nvSpPr>
+        <p:spPr>
+          <a:xfrm>
+            <a:off x="6058814" y="3072384"/>
+            <a:ext cx="4206240" cy="365760"/>
+          </a:xfrm>
+          <a:prstGeom prst="rect">
+            <a:avLst/>
+          </a:prstGeom>
+          <a:noFill/>
+        </p:spPr>
+        <p:txBody>
+          <a:bodyPr wrap="square">
+            <a:spAutoFit/>
+          </a:bodyPr>
+          <a:lstStyle/>
+          <a:p>
+            <a:pPr algn="l"/>
+            <a:r>
+              <a:rPr sz="1200" b="0">
+                <a:solidFill>
+                  <a:srgbClr val="1A2238"/>
+                </a:solidFill>
+              </a:rPr>
+              <a:t>magnetite  0.04  |  p 0.95</a:t>
+            </a:r>
+          </a:p>
+        </p:txBody>
+      </p:sp>
+      <p:sp>
+        <p:nvSpPr>
+          <p:cNvPr id="35" name="Rounded Rectangle 34"/>
+          <p:cNvSpPr/>
+          <p:nvPr/>
+        </p:nvSpPr>
+        <p:spPr>
+          <a:xfrm>
+            <a:off x="5486400" y="3657600"/>
+            <a:ext cx="6309360" cy="2331720"/>
+          </a:xfrm>
+          <a:prstGeom prst="roundRect">
+            <a:avLst/>
+          </a:prstGeom>
+          <a:solidFill>
+            <a:srgbClr val="EAE8FB"/>
+          </a:solidFill>
+          <a:ln w="25400">
+            <a:solidFill>
+              <a:srgbClr val="6C5CE7"/>
+            </a:solidFill>
+          </a:ln>
+          <a:effectLst/>
+        </p:spPr>
+        <p:style>
+          <a:lnRef idx="1">
+            <a:schemeClr val="accent1"/>
+          </a:lnRef>
+          <a:fillRef idx="3">
+            <a:schemeClr val="accent1"/>
+          </a:fillRef>
+          <a:effectRef idx="2">
+            <a:schemeClr val="accent1"/>
+          </a:effectRef>
+          <a:fontRef idx="minor">
+            <a:schemeClr val="lt1"/>
+          </a:fontRef>
+        </p:style>
+        <p:txBody>
+          <a:bodyPr rtlCol="0" anchor="ctr" wrap="square"/>
+          <a:lstStyle/>
+          <a:p>
+            <a:pPr algn="ctr"/>
+            <a:r>
+              <a:rPr sz="1300" b="1">
+                <a:solidFill>
+                  <a:srgbClr val="1A2238"/>
+                </a:solidFill>
+              </a:rPr>
+              <a:t/>
+            </a:r>
+          </a:p>
+        </p:txBody>
+      </p:sp>
+      <p:sp>
+        <p:nvSpPr>
+          <p:cNvPr id="36" name="TextBox 35"/>
+          <p:cNvSpPr txBox="1"/>
+          <p:nvPr/>
+        </p:nvSpPr>
+        <p:spPr>
+          <a:xfrm>
+            <a:off x="5669280" y="3703320"/>
+            <a:ext cx="5943600" cy="731520"/>
+          </a:xfrm>
+          <a:prstGeom prst="rect">
+            <a:avLst/>
+          </a:prstGeom>
+          <a:noFill/>
+        </p:spPr>
+        <p:txBody>
+          <a:bodyPr wrap="square">
+            <a:spAutoFit/>
+          </a:bodyPr>
+          <a:lstStyle/>
+          <a:p>
+            <a:pPr algn="l"/>
+            <a:r>
+              <a:rPr sz="1200" b="0">
+                <a:solidFill>
+                  <a:srgbClr val="6C5CE7"/>
+                </a:solidFill>
+              </a:rPr>
+              <a:t>CondHead -&gt; storage conditions (per-axis GMM; P and H2O are sampled axes, T is the derived phenocryst-window endpoint temperature)</a:t>
+            </a:r>
+          </a:p>
+        </p:txBody>
+      </p:sp>
+      <p:sp>
+        <p:nvSpPr>
+          <p:cNvPr id="37" name="Freeform 36"/>
+          <p:cNvSpPr/>
+          <p:nvPr/>
+        </p:nvSpPr>
+        <p:spPr>
+          <a:xfrm>
+            <a:off x="5806440" y="4434840"/>
+            <a:ext cx="1737360" cy="960119"/>
+          </a:xfrm>
+          <a:custGeom>
+            <a:avLst/>
+            <a:gdLst/>
+            <a:ahLst/>
+            <a:cxnLst/>
+            <a:rect l="l" t="t" r="r" b="b"/>
+            <a:pathLst>
+              <a:path w="1737360" h="960119">
+                <a:moveTo>
+                  <a:pt x="0" y="960119"/>
+                </a:moveTo>
+                <a:lnTo>
+                  <a:pt x="0" y="952846"/>
+                </a:lnTo>
+                <a:lnTo>
+                  <a:pt x="36195" y="949286"/>
+                </a:lnTo>
+                <a:lnTo>
+                  <a:pt x="72390" y="944254"/>
+                </a:lnTo>
+                <a:lnTo>
+                  <a:pt x="108585" y="937276"/>
+                </a:lnTo>
+                <a:lnTo>
+                  <a:pt x="144780" y="927782"/>
+                </a:lnTo>
+                <a:lnTo>
+                  <a:pt x="180975" y="915112"/>
+                </a:lnTo>
+                <a:lnTo>
+                  <a:pt x="217169" y="898531"/>
+                </a:lnTo>
+                <a:lnTo>
+                  <a:pt x="253365" y="877258"/>
+                </a:lnTo>
+                <a:lnTo>
+                  <a:pt x="289559" y="850511"/>
+                </a:lnTo>
+                <a:lnTo>
+                  <a:pt x="325755" y="817567"/>
+                </a:lnTo>
+                <a:lnTo>
+                  <a:pt x="361949" y="777839"/>
+                </a:lnTo>
+                <a:lnTo>
+                  <a:pt x="398145" y="730958"/>
+                </a:lnTo>
+                <a:lnTo>
+                  <a:pt x="434339" y="676862"/>
+                </a:lnTo>
+                <a:lnTo>
+                  <a:pt x="470535" y="615883"/>
+                </a:lnTo>
+                <a:lnTo>
+                  <a:pt x="506730" y="548809"/>
+                </a:lnTo>
+                <a:lnTo>
+                  <a:pt x="542925" y="476928"/>
+                </a:lnTo>
+                <a:lnTo>
+                  <a:pt x="579119" y="402028"/>
+                </a:lnTo>
+                <a:lnTo>
+                  <a:pt x="615315" y="326353"/>
+                </a:lnTo>
+                <a:lnTo>
+                  <a:pt x="651510" y="252517"/>
+                </a:lnTo>
+                <a:lnTo>
+                  <a:pt x="687705" y="183360"/>
+                </a:lnTo>
+                <a:lnTo>
+                  <a:pt x="723900" y="121779"/>
+                </a:lnTo>
+                <a:lnTo>
+                  <a:pt x="760094" y="70526"/>
+                </a:lnTo>
+                <a:lnTo>
+                  <a:pt x="796290" y="32010"/>
+                </a:lnTo>
+                <a:lnTo>
+                  <a:pt x="832484" y="8104"/>
+                </a:lnTo>
+                <a:lnTo>
+                  <a:pt x="868680" y="0"/>
+                </a:lnTo>
+                <a:lnTo>
+                  <a:pt x="904874" y="8104"/>
+                </a:lnTo>
+                <a:lnTo>
+                  <a:pt x="941070" y="32010"/>
+                </a:lnTo>
+                <a:lnTo>
+                  <a:pt x="977264" y="70526"/>
+                </a:lnTo>
+                <a:lnTo>
+                  <a:pt x="1013460" y="121779"/>
+                </a:lnTo>
+                <a:lnTo>
+                  <a:pt x="1049654" y="183360"/>
+                </a:lnTo>
+                <a:lnTo>
+                  <a:pt x="1085850" y="252517"/>
+                </a:lnTo>
+                <a:lnTo>
+                  <a:pt x="1122044" y="326353"/>
+                </a:lnTo>
+                <a:lnTo>
+                  <a:pt x="1158240" y="402028"/>
+                </a:lnTo>
+                <a:lnTo>
+                  <a:pt x="1194435" y="476928"/>
+                </a:lnTo>
+                <a:lnTo>
+                  <a:pt x="1230630" y="548809"/>
+                </a:lnTo>
+                <a:lnTo>
+                  <a:pt x="1266824" y="615883"/>
+                </a:lnTo>
+                <a:lnTo>
+                  <a:pt x="1303019" y="676862"/>
+                </a:lnTo>
+                <a:lnTo>
+                  <a:pt x="1339215" y="730958"/>
+                </a:lnTo>
+                <a:lnTo>
+                  <a:pt x="1375409" y="777839"/>
+                </a:lnTo>
+                <a:lnTo>
+                  <a:pt x="1411605" y="817567"/>
+                </a:lnTo>
+                <a:lnTo>
+                  <a:pt x="1447799" y="850511"/>
+                </a:lnTo>
+                <a:lnTo>
+                  <a:pt x="1483995" y="877258"/>
+                </a:lnTo>
+                <a:lnTo>
+                  <a:pt x="1520189" y="898531"/>
+                </a:lnTo>
+                <a:lnTo>
+                  <a:pt x="1556384" y="915112"/>
+                </a:lnTo>
+                <a:lnTo>
+                  <a:pt x="1592580" y="927782"/>
+                </a:lnTo>
+                <a:lnTo>
+                  <a:pt x="1628775" y="937276"/>
+                </a:lnTo>
+                <a:lnTo>
+                  <a:pt x="1664969" y="944254"/>
+                </a:lnTo>
+                <a:lnTo>
+                  <a:pt x="1701165" y="949286"/>
+                </a:lnTo>
+                <a:lnTo>
+                  <a:pt x="1737360" y="952846"/>
+                </a:lnTo>
+                <a:lnTo>
+                  <a:pt x="1737360" y="960119"/>
+                </a:lnTo>
+                <a:close/>
+              </a:path>
+            </a:pathLst>
+          </a:custGeom>
+          <a:solidFill>
+            <a:srgbClr val="C4D1FF"/>
+          </a:solidFill>
+          <a:ln w="25400">
+            <a:solidFill>
+              <a:srgbClr val="2E5BFF"/>
+            </a:solidFill>
+          </a:ln>
+          <a:effectLst/>
+        </p:spPr>
+        <p:style>
+          <a:lnRef idx="1">
+            <a:schemeClr val="accent1"/>
+          </a:lnRef>
+          <a:fillRef idx="3">
+            <a:schemeClr val="accent1"/>
+          </a:fillRef>
+          <a:effectRef idx="2">
+            <a:schemeClr val="accent1"/>
+          </a:effectRef>
+          <a:fontRef idx="minor">
+            <a:schemeClr val="lt1"/>
+          </a:fontRef>
+        </p:style>
+        <p:txBody>
+          <a:bodyPr rtlCol="0" anchor="ctr"/>
+          <a:lstStyle/>
+          <a:p>
+            <a:pPr algn="ctr"/>
+          </a:p>
+        </p:txBody>
+      </p:sp>
+      <p:cxnSp>
+        <p:nvCxnSpPr>
+          <p:cNvPr id="38" name="Connector 37"/>
+          <p:cNvCxnSpPr/>
+          <p:nvPr/>
+        </p:nvCxnSpPr>
+        <p:spPr>
+          <a:xfrm>
+            <a:off x="5806440" y="5394959"/>
+            <a:ext cx="1737360" cy="0"/>
+          </a:xfrm>
+          <a:prstGeom prst="bentConnector3">
+            <a:avLst/>
+          </a:prstGeom>
+          <a:ln w="12700">
+            <a:solidFill>
+              <a:srgbClr val="8A93A3"/>
+            </a:solidFill>
+          </a:ln>
+          <a:effectLst/>
+        </p:spPr>
+        <p:style>
+          <a:lnRef idx="2">
+            <a:schemeClr val="accent1"/>
+          </a:lnRef>
+          <a:fillRef idx="0">
+            <a:schemeClr val="accent1"/>
+          </a:fillRef>
+          <a:effectRef idx="1">
+            <a:schemeClr val="accent1"/>
+          </a:effectRef>
+          <a:fontRef idx="minor">
+            <a:schemeClr val="tx1"/>
+          </a:fontRef>
+        </p:style>
+      </p:cxnSp>
+      <p:sp>
+        <p:nvSpPr>
+          <p:cNvPr id="39" name="TextBox 38"/>
+          <p:cNvSpPr txBox="1"/>
+          <p:nvPr/>
+        </p:nvSpPr>
+        <p:spPr>
+          <a:xfrm>
+            <a:off x="5623559" y="5440679"/>
+            <a:ext cx="2103120" cy="365760"/>
+          </a:xfrm>
+          <a:prstGeom prst="rect">
+            <a:avLst/>
+          </a:prstGeom>
+          <a:noFill/>
+        </p:spPr>
+        <p:txBody>
+          <a:bodyPr wrap="square">
+            <a:spAutoFit/>
+          </a:bodyPr>
+          <a:lstStyle/>
+          <a:p>
+            <a:pPr algn="ctr"/>
+            <a:r>
+              <a:rPr sz="1200" b="1">
+                <a:solidFill>
+                  <a:srgbClr val="1A2238"/>
+                </a:solidFill>
+              </a:rPr>
+              <a:t>T  1010 +/- 40 C</a:t>
+            </a:r>
+          </a:p>
+        </p:txBody>
+      </p:sp>
+      <p:sp>
+        <p:nvSpPr>
+          <p:cNvPr id="40" name="Freeform 39"/>
+          <p:cNvSpPr/>
+          <p:nvPr/>
+        </p:nvSpPr>
+        <p:spPr>
+          <a:xfrm>
+            <a:off x="7772400" y="4434840"/>
+            <a:ext cx="1737360" cy="960119"/>
+          </a:xfrm>
+          <a:custGeom>
+            <a:avLst/>
+            <a:gdLst/>
+            <a:ahLst/>
+            <a:cxnLst/>
+            <a:rect l="l" t="t" r="r" b="b"/>
+            <a:pathLst>
+              <a:path w="1737360" h="960119">
+                <a:moveTo>
+                  <a:pt x="0" y="960119"/>
+                </a:moveTo>
+                <a:lnTo>
+                  <a:pt x="0" y="939852"/>
+                </a:lnTo>
+                <a:lnTo>
+                  <a:pt x="36195" y="932353"/>
+                </a:lnTo>
+                <a:lnTo>
+                  <a:pt x="72390" y="922586"/>
+                </a:lnTo>
+                <a:lnTo>
+                  <a:pt x="108585" y="910058"/>
+                </a:lnTo>
+                <a:lnTo>
+                  <a:pt x="144780" y="894237"/>
+                </a:lnTo>
+                <a:lnTo>
+                  <a:pt x="180974" y="874570"/>
+                </a:lnTo>
+                <a:lnTo>
+                  <a:pt x="217170" y="850511"/>
+                </a:lnTo>
+                <a:lnTo>
+                  <a:pt x="253365" y="821553"/>
+                </a:lnTo>
+                <a:lnTo>
+                  <a:pt x="289560" y="787277"/>
+                </a:lnTo>
+                <a:lnTo>
+                  <a:pt x="325754" y="747391"/>
+                </a:lnTo>
+                <a:lnTo>
+                  <a:pt x="361950" y="701784"/>
+                </a:lnTo>
+                <a:lnTo>
+                  <a:pt x="398145" y="650575"/>
+                </a:lnTo>
+                <a:lnTo>
+                  <a:pt x="434340" y="594149"/>
+                </a:lnTo>
+                <a:lnTo>
+                  <a:pt x="470534" y="533196"/>
+                </a:lnTo>
+                <a:lnTo>
+                  <a:pt x="506730" y="468718"/>
+                </a:lnTo>
+                <a:lnTo>
+                  <a:pt x="542925" y="402028"/>
+                </a:lnTo>
+                <a:lnTo>
+                  <a:pt x="579120" y="334721"/>
+                </a:lnTo>
+                <a:lnTo>
+                  <a:pt x="615315" y="268623"/>
+                </a:lnTo>
+                <a:lnTo>
+                  <a:pt x="651510" y="205713"/>
+                </a:lnTo>
+                <a:lnTo>
+                  <a:pt x="687705" y="148031"/>
+                </a:lnTo>
+                <a:lnTo>
+                  <a:pt x="723900" y="97571"/>
+                </a:lnTo>
+                <a:lnTo>
+                  <a:pt x="760095" y="56167"/>
+                </a:lnTo>
+                <a:lnTo>
+                  <a:pt x="796290" y="25381"/>
+                </a:lnTo>
+                <a:lnTo>
+                  <a:pt x="832485" y="6409"/>
+                </a:lnTo>
+                <a:lnTo>
+                  <a:pt x="868680" y="0"/>
+                </a:lnTo>
+                <a:lnTo>
+                  <a:pt x="904875" y="6409"/>
+                </a:lnTo>
+                <a:lnTo>
+                  <a:pt x="941070" y="25381"/>
+                </a:lnTo>
+                <a:lnTo>
+                  <a:pt x="977265" y="56167"/>
+                </a:lnTo>
+                <a:lnTo>
+                  <a:pt x="1013460" y="97571"/>
+                </a:lnTo>
+                <a:lnTo>
+                  <a:pt x="1049655" y="148031"/>
+                </a:lnTo>
+                <a:lnTo>
+                  <a:pt x="1085850" y="205713"/>
+                </a:lnTo>
+                <a:lnTo>
+                  <a:pt x="1122045" y="268623"/>
+                </a:lnTo>
+                <a:lnTo>
+                  <a:pt x="1158240" y="334721"/>
+                </a:lnTo>
+                <a:lnTo>
+                  <a:pt x="1194435" y="402028"/>
+                </a:lnTo>
+                <a:lnTo>
+                  <a:pt x="1230630" y="468718"/>
+                </a:lnTo>
+                <a:lnTo>
+                  <a:pt x="1266825" y="533196"/>
+                </a:lnTo>
+                <a:lnTo>
+                  <a:pt x="1303020" y="594149"/>
+                </a:lnTo>
+                <a:lnTo>
+                  <a:pt x="1339215" y="650575"/>
+                </a:lnTo>
+                <a:lnTo>
+                  <a:pt x="1375410" y="701784"/>
+                </a:lnTo>
+                <a:lnTo>
+                  <a:pt x="1411605" y="747391"/>
+                </a:lnTo>
+                <a:lnTo>
+                  <a:pt x="1447800" y="787277"/>
+                </a:lnTo>
+                <a:lnTo>
+                  <a:pt x="1483995" y="821553"/>
+                </a:lnTo>
+                <a:lnTo>
+                  <a:pt x="1520190" y="850511"/>
+                </a:lnTo>
+                <a:lnTo>
+                  <a:pt x="1556385" y="874570"/>
+                </a:lnTo>
+                <a:lnTo>
+                  <a:pt x="1592580" y="894237"/>
+                </a:lnTo>
+                <a:lnTo>
+                  <a:pt x="1628775" y="910058"/>
+                </a:lnTo>
+                <a:lnTo>
+                  <a:pt x="1664970" y="922586"/>
+                </a:lnTo>
+                <a:lnTo>
+                  <a:pt x="1701165" y="932353"/>
+                </a:lnTo>
+                <a:lnTo>
+                  <a:pt x="1737360" y="939852"/>
+                </a:lnTo>
+                <a:lnTo>
+                  <a:pt x="1737360" y="960119"/>
+                </a:lnTo>
+                <a:close/>
+              </a:path>
+            </a:pathLst>
+          </a:custGeom>
+          <a:solidFill>
+            <a:srgbClr val="BCEAE5"/>
+          </a:solidFill>
+          <a:ln w="25400">
+            <a:solidFill>
+              <a:srgbClr val="12B5A5"/>
+            </a:solidFill>
+          </a:ln>
+          <a:effectLst/>
+        </p:spPr>
+        <p:style>
+          <a:lnRef idx="1">
+            <a:schemeClr val="accent1"/>
+          </a:lnRef>
+          <a:fillRef idx="3">
+            <a:schemeClr val="accent1"/>
+          </a:fillRef>
+          <a:effectRef idx="2">
+            <a:schemeClr val="accent1"/>
+          </a:effectRef>
+          <a:fontRef idx="minor">
+            <a:schemeClr val="lt1"/>
+          </a:fontRef>
+        </p:style>
+        <p:txBody>
+          <a:bodyPr rtlCol="0" anchor="ctr"/>
+          <a:lstStyle/>
+          <a:p>
+            <a:pPr algn="ctr"/>
+          </a:p>
+        </p:txBody>
+      </p:sp>
+      <p:cxnSp>
+        <p:nvCxnSpPr>
+          <p:cNvPr id="41" name="Connector 40"/>
+          <p:cNvCxnSpPr/>
+          <p:nvPr/>
+        </p:nvCxnSpPr>
+        <p:spPr>
+          <a:xfrm>
+            <a:off x="7772400" y="5394959"/>
+            <a:ext cx="1737360" cy="0"/>
+          </a:xfrm>
+          <a:prstGeom prst="bentConnector3">
+            <a:avLst/>
+          </a:prstGeom>
+          <a:ln w="12700">
+            <a:solidFill>
+              <a:srgbClr val="8A93A3"/>
+            </a:solidFill>
+          </a:ln>
+          <a:effectLst/>
+        </p:spPr>
+        <p:style>
+          <a:lnRef idx="2">
+            <a:schemeClr val="accent1"/>
+          </a:lnRef>
+          <a:fillRef idx="0">
+            <a:schemeClr val="accent1"/>
+          </a:fillRef>
+          <a:effectRef idx="1">
+            <a:schemeClr val="accent1"/>
+          </a:effectRef>
+          <a:fontRef idx="minor">
+            <a:schemeClr val="tx1"/>
+          </a:fontRef>
+        </p:style>
+      </p:cxnSp>
+      <p:sp>
+        <p:nvSpPr>
+          <p:cNvPr id="42" name="TextBox 41"/>
+          <p:cNvSpPr txBox="1"/>
+          <p:nvPr/>
+        </p:nvSpPr>
+        <p:spPr>
+          <a:xfrm>
+            <a:off x="7589520" y="5440679"/>
+            <a:ext cx="2103120" cy="365760"/>
+          </a:xfrm>
+          <a:prstGeom prst="rect">
+            <a:avLst/>
+          </a:prstGeom>
+          <a:noFill/>
+        </p:spPr>
+        <p:txBody>
+          <a:bodyPr wrap="square">
+            <a:spAutoFit/>
+          </a:bodyPr>
+          <a:lstStyle/>
+          <a:p>
+            <a:pPr algn="ctr"/>
+            <a:r>
+              <a:rPr sz="1200" b="1">
+                <a:solidFill>
+                  <a:srgbClr val="1A2238"/>
+                </a:solidFill>
+              </a:rPr>
+              <a:t>P  4.8 +/- 1.9 kbar</a:t>
+            </a:r>
+          </a:p>
+        </p:txBody>
+      </p:sp>
+      <p:sp>
+        <p:nvSpPr>
+          <p:cNvPr id="43" name="Freeform 42"/>
+          <p:cNvSpPr/>
+          <p:nvPr/>
+        </p:nvSpPr>
+        <p:spPr>
+          <a:xfrm>
+            <a:off x="9738360" y="4434840"/>
+            <a:ext cx="1783080" cy="960119"/>
+          </a:xfrm>
+          <a:custGeom>
+            <a:avLst/>
+            <a:gdLst/>
+            <a:ahLst/>
+            <a:cxnLst/>
+            <a:rect l="l" t="t" r="r" b="b"/>
+            <a:pathLst>
+              <a:path w="1783080" h="960119">
+                <a:moveTo>
+                  <a:pt x="0" y="960119"/>
+                </a:moveTo>
+                <a:lnTo>
+                  <a:pt x="0" y="954380"/>
+                </a:lnTo>
+                <a:lnTo>
+                  <a:pt x="37147" y="949181"/>
+                </a:lnTo>
+                <a:lnTo>
+                  <a:pt x="74295" y="940156"/>
+                </a:lnTo>
+                <a:lnTo>
+                  <a:pt x="111442" y="925235"/>
+                </a:lnTo>
+                <a:lnTo>
+                  <a:pt x="148590" y="901749"/>
+                </a:lnTo>
+                <a:lnTo>
+                  <a:pt x="185737" y="866600"/>
+                </a:lnTo>
+                <a:lnTo>
+                  <a:pt x="222885" y="816648"/>
+                </a:lnTo>
+                <a:lnTo>
+                  <a:pt x="260032" y="749364"/>
+                </a:lnTo>
+                <a:lnTo>
+                  <a:pt x="297180" y="663673"/>
+                </a:lnTo>
+                <a:lnTo>
+                  <a:pt x="334327" y="560845"/>
+                </a:lnTo>
+                <a:lnTo>
+                  <a:pt x="371475" y="445176"/>
+                </a:lnTo>
+                <a:lnTo>
+                  <a:pt x="408622" y="324178"/>
+                </a:lnTo>
+                <a:lnTo>
+                  <a:pt x="445770" y="208043"/>
+                </a:lnTo>
+                <a:lnTo>
+                  <a:pt x="482917" y="108354"/>
+                </a:lnTo>
+                <a:lnTo>
+                  <a:pt x="520065" y="36181"/>
+                </a:lnTo>
+                <a:lnTo>
+                  <a:pt x="557212" y="0"/>
+                </a:lnTo>
+                <a:lnTo>
+                  <a:pt x="594360" y="3933"/>
+                </a:lnTo>
+                <a:lnTo>
+                  <a:pt x="631507" y="46793"/>
+                </a:lnTo>
+                <a:lnTo>
+                  <a:pt x="668655" y="122197"/>
+                </a:lnTo>
+                <a:lnTo>
+                  <a:pt x="705802" y="219711"/>
+                </a:lnTo>
+                <a:lnTo>
+                  <a:pt x="742950" y="326710"/>
+                </a:lnTo>
+                <a:lnTo>
+                  <a:pt x="780097" y="430457"/>
+                </a:lnTo>
+                <a:lnTo>
+                  <a:pt x="817245" y="519915"/>
+                </a:lnTo>
+                <a:lnTo>
+                  <a:pt x="854392" y="586970"/>
+                </a:lnTo>
+                <a:lnTo>
+                  <a:pt x="891540" y="626939"/>
+                </a:lnTo>
+                <a:lnTo>
+                  <a:pt x="928687" y="638485"/>
+                </a:lnTo>
+                <a:lnTo>
+                  <a:pt x="965835" y="623138"/>
+                </a:lnTo>
+                <a:lnTo>
+                  <a:pt x="1002982" y="584667"/>
+                </a:lnTo>
+                <a:lnTo>
+                  <a:pt x="1040130" y="528460"/>
+                </a:lnTo>
+                <a:lnTo>
+                  <a:pt x="1077277" y="460988"/>
+                </a:lnTo>
+                <a:lnTo>
+                  <a:pt x="1114425" y="389315"/>
+                </a:lnTo>
+                <a:lnTo>
+                  <a:pt x="1151572" y="320622"/>
+                </a:lnTo>
+                <a:lnTo>
+                  <a:pt x="1188720" y="261689"/>
+                </a:lnTo>
+                <a:lnTo>
+                  <a:pt x="1225867" y="218338"/>
+                </a:lnTo>
+                <a:lnTo>
+                  <a:pt x="1263015" y="194904"/>
+                </a:lnTo>
+                <a:lnTo>
+                  <a:pt x="1300162" y="193807"/>
+                </a:lnTo>
+                <a:lnTo>
+                  <a:pt x="1337310" y="215337"/>
+                </a:lnTo>
+                <a:lnTo>
+                  <a:pt x="1374457" y="257689"/>
+                </a:lnTo>
+                <a:lnTo>
+                  <a:pt x="1411605" y="317276"/>
+                </a:lnTo>
+                <a:lnTo>
+                  <a:pt x="1448752" y="389265"/>
+                </a:lnTo>
+                <a:lnTo>
+                  <a:pt x="1485900" y="468240"/>
+                </a:lnTo>
+                <a:lnTo>
+                  <a:pt x="1523047" y="548872"/>
+                </a:lnTo>
+                <a:lnTo>
+                  <a:pt x="1560195" y="626495"/>
+                </a:lnTo>
+                <a:lnTo>
+                  <a:pt x="1597342" y="697502"/>
+                </a:lnTo>
+                <a:lnTo>
+                  <a:pt x="1634490" y="759534"/>
+                </a:lnTo>
+                <a:lnTo>
+                  <a:pt x="1671637" y="811463"/>
+                </a:lnTo>
+                <a:lnTo>
+                  <a:pt x="1708785" y="853219"/>
+                </a:lnTo>
+                <a:lnTo>
+                  <a:pt x="1745932" y="885529"/>
+                </a:lnTo>
+                <a:lnTo>
+                  <a:pt x="1783080" y="909618"/>
+                </a:lnTo>
+                <a:lnTo>
+                  <a:pt x="1783080" y="960119"/>
+                </a:lnTo>
+                <a:close/>
+              </a:path>
+            </a:pathLst>
+          </a:custGeom>
+          <a:solidFill>
+            <a:srgbClr val="F8DDC7"/>
+          </a:solidFill>
+          <a:ln w="25400">
+            <a:solidFill>
+              <a:srgbClr val="E8883A"/>
+            </a:solidFill>
+          </a:ln>
+          <a:effectLst/>
+        </p:spPr>
+        <p:style>
+          <a:lnRef idx="1">
+            <a:schemeClr val="accent1"/>
+          </a:lnRef>
+          <a:fillRef idx="3">
+            <a:schemeClr val="accent1"/>
+          </a:fillRef>
+          <a:effectRef idx="2">
+            <a:schemeClr val="accent1"/>
+          </a:effectRef>
+          <a:fontRef idx="minor">
+            <a:schemeClr val="lt1"/>
+          </a:fontRef>
+        </p:style>
+        <p:txBody>
+          <a:bodyPr rtlCol="0" anchor="ctr"/>
+          <a:lstStyle/>
+          <a:p>
+            <a:pPr algn="ctr"/>
+          </a:p>
+        </p:txBody>
+      </p:sp>
+      <p:cxnSp>
+        <p:nvCxnSpPr>
+          <p:cNvPr id="44" name="Connector 43"/>
+          <p:cNvCxnSpPr/>
+          <p:nvPr/>
+        </p:nvCxnSpPr>
+        <p:spPr>
+          <a:xfrm>
+            <a:off x="9738360" y="5394959"/>
+            <a:ext cx="1783080" cy="0"/>
+          </a:xfrm>
+          <a:prstGeom prst="bentConnector3">
+            <a:avLst/>
+          </a:prstGeom>
+          <a:ln w="12700">
+            <a:solidFill>
+              <a:srgbClr val="8A93A3"/>
+            </a:solidFill>
+          </a:ln>
+          <a:effectLst/>
+        </p:spPr>
+        <p:style>
+          <a:lnRef idx="2">
+            <a:schemeClr val="accent1"/>
+          </a:lnRef>
+          <a:fillRef idx="0">
+            <a:schemeClr val="accent1"/>
+          </a:fillRef>
+          <a:effectRef idx="1">
+            <a:schemeClr val="accent1"/>
+          </a:effectRef>
+          <a:fontRef idx="minor">
+            <a:schemeClr val="tx1"/>
+          </a:fontRef>
+        </p:style>
+      </p:cxnSp>
+      <p:sp>
+        <p:nvSpPr>
+          <p:cNvPr id="45" name="TextBox 44"/>
+          <p:cNvSpPr txBox="1"/>
+          <p:nvPr/>
+        </p:nvSpPr>
+        <p:spPr>
+          <a:xfrm>
+            <a:off x="9555480" y="5440679"/>
+            <a:ext cx="2148840" cy="365760"/>
+          </a:xfrm>
+          <a:prstGeom prst="rect">
+            <a:avLst/>
+          </a:prstGeom>
+          <a:noFill/>
+        </p:spPr>
+        <p:txBody>
+          <a:bodyPr wrap="square">
+            <a:spAutoFit/>
+          </a:bodyPr>
+          <a:lstStyle/>
+          <a:p>
+            <a:pPr algn="ctr"/>
+            <a:r>
+              <a:rPr sz="1200" b="1">
+                <a:solidFill>
+                  <a:srgbClr val="1A2238"/>
+                </a:solidFill>
+              </a:rPr>
+              <a:t>H2O  multimodal</a:t>
+            </a:r>
+          </a:p>
+        </p:txBody>
+      </p:sp>
+      <p:sp>
+        <p:nvSpPr>
+          <p:cNvPr id="46" name="TextBox 45"/>
+          <p:cNvSpPr txBox="1"/>
+          <p:nvPr/>
+        </p:nvSpPr>
+        <p:spPr>
+          <a:xfrm>
+            <a:off x="502920" y="6172200"/>
+            <a:ext cx="11247120" cy="731520"/>
+          </a:xfrm>
+          <a:prstGeom prst="rect">
+            <a:avLst/>
+          </a:prstGeom>
+          <a:noFill/>
+        </p:spPr>
+        <p:txBody>
+          <a:bodyPr wrap="square">
+            <a:spAutoFit/>
+          </a:bodyPr>
+          <a:lstStyle/>
+          <a:p>
+            <a:pPr algn="l"/>
+            <a:r>
+              <a:rPr sz="1200" b="0">
+                <a:solidFill>
+                  <a:srgbClr val="8A93A3"/>
+                </a:solidFill>
+              </a:rPr>
+              <a:t>values illustrative -- every phase carries both numbers; faded bars = presence genuinely uncertain (here the amphibole/orthopyroxene either-or: wet-deep grows amp, dry-shallow grows opx). This marginal view is a projection; the primary output is the ranked-scenario view on the next slide.</a:t>
+            </a:r>
+          </a:p>
+        </p:txBody>
+      </p:sp>
+    </p:spTree>
+  </p:cSld>
+  <p:clrMapOvr>
+    <a:masterClrMapping/>
+  </p:clrMapOvr>
+</p:sld>
+</file>
+
+<file path=ppt/slides/slide22.xml><?xml version="1.0" encoding="utf-8"?>
+<p:sld xmlns:a="http://schemas.openxmlformats.org/drawingml/2006/main" xmlns:p="http://schemas.openxmlformats.org/presentationml/2006/main" xmlns:r="http://schemas.openxmlformats.org/officeDocument/2006/relationships">
+  <p:cSld>
+    <p:spTree>
+      <p:nvGrpSpPr>
+        <p:cNvPr id="1" name=""/>
+        <p:cNvGrpSpPr/>
+        <p:nvPr/>
+      </p:nvGrpSpPr>
+      <p:grpSpPr/>
+      <p:sp>
+        <p:nvSpPr>
+          <p:cNvPr id="2" name="TextBox 1"/>
+          <p:cNvSpPr txBox="1"/>
+          <p:nvPr/>
+        </p:nvSpPr>
+        <p:spPr>
+          <a:xfrm>
+            <a:off x="502920" y="274320"/>
+            <a:ext cx="10972800" cy="365760"/>
+          </a:xfrm>
+          <a:prstGeom prst="rect">
+            <a:avLst/>
+          </a:prstGeom>
+          <a:noFill/>
+        </p:spPr>
+        <p:txBody>
+          <a:bodyPr wrap="square">
+            <a:spAutoFit/>
+          </a:bodyPr>
+          <a:lstStyle/>
+          <a:p>
+            <a:pPr algn="l"/>
+            <a:r>
+              <a:rPr sz="1300" b="1">
+                <a:solidFill>
+                  <a:srgbClr val="2E5BFF"/>
+                </a:solidFill>
+              </a:rPr>
+              <a:t>HEADS</a:t>
+            </a:r>
+          </a:p>
+        </p:txBody>
+      </p:sp>
+      <p:sp>
+        <p:nvSpPr>
+          <p:cNvPr id="3" name="TextBox 2"/>
+          <p:cNvSpPr txBox="1"/>
+          <p:nvPr/>
+        </p:nvSpPr>
+        <p:spPr>
+          <a:xfrm>
+            <a:off x="502920" y="603504"/>
+            <a:ext cx="11155680" cy="731520"/>
+          </a:xfrm>
+          <a:prstGeom prst="rect">
+            <a:avLst/>
+          </a:prstGeom>
+          <a:noFill/>
+        </p:spPr>
+        <p:txBody>
+          <a:bodyPr wrap="square">
+            <a:spAutoFit/>
+          </a:bodyPr>
+          <a:lstStyle/>
+          <a:p>
+            <a:pPr algn="l"/>
+            <a:r>
+              <a:rPr sz="2600" b="1">
+                <a:solidFill>
+                  <a:srgbClr val="1A2238"/>
+                </a:solidFill>
+              </a:rPr>
               <a:t>The coherent answer: ranked scenarios</a:t>
             </a:r>
           </a:p>
@@ -19925,7 +21802,7 @@
                   <a:srgbClr val="8A93A3"/>
                 </a:solidFill>
               </a:rPr>
-              <a:t>stratified: 10k train</a:t>
+              <a:t>stratified: 35k train</a:t>
             </a:r>
           </a:p>
           <a:p>
@@ -19936,7 +21813,7 @@
                   <a:srgbClr val="8A93A3"/>
                 </a:solidFill>
               </a:rPr>
-              <a:t>+ 500 val/test</a:t>
+              <a:t>+ 2k sealed valtest</a:t>
             </a:r>
           </a:p>
         </p:txBody>
@@ -20035,7 +21912,7 @@
                   <a:srgbClr val="8A93A3"/>
                 </a:solidFill>
               </a:rPr>
-              <a:t>48 (P, H2O) draws/bulk</a:t>
+              <a:t>24 draws/bulk (128 valtest)</a:t>
             </a:r>
           </a:p>
           <a:p>
@@ -20046,7 +21923,7 @@
                   <a:srgbClr val="8A93A3"/>
                 </a:solidFill>
               </a:rPr>
-              <a:t>solubility-bounded LHS</a:t>
+              <a:t>trace-conditional boxes</a:t>
             </a:r>
           </a:p>
           <a:p>
@@ -20872,7 +22749,7 @@
                   <a:srgbClr val="2E5BFF"/>
                 </a:solidFill>
               </a:rPr>
-              <a:t>sampled (P, H2O) region</a:t>
+              <a:t>the floor: bounded (P, H2O) region</a:t>
             </a:r>
           </a:p>
         </p:txBody>
@@ -20885,7 +22762,7 @@
         </p:nvSpPr>
         <p:spPr>
           <a:xfrm>
-            <a:off x="4937760" y="5440680"/>
+            <a:off x="4937760" y="5303520"/>
             <a:ext cx="6766560" cy="731520"/>
           </a:xfrm>
           <a:prstGeom prst="rect">
@@ -20906,7 +22783,7 @@
                   <a:srgbClr val="1A2238"/>
                 </a:solidFill>
               </a:rPr>
-              <a:t>water is bounded by what melt can dissolve at each pressure (Newman &amp; Lowenstern 2002 rhyolite curve, capped at 8 wt%) -- the old flat box (whole rectangle) sampled impossible wet-shallow corners. q is the sampling density; inference reweights scenarios by p/q, so the corpus itself stays prior-agnostic.</a:t>
+              <a:t>water is bounded by what melt can dissolve at each pressure (Newman &amp; Lowenstern 2002 rhyolite curve, capped at 8 wt%). Draws now come from literature (P, H2O) boxes picked per bulk by an immobile-trace tectonic-setting posterior, over a broad floor of this bounded region so importance weights stay finite. q is the mixture density; inference reweights scenarios by p/q, so the corpus itself stays prior-agnostic.</a:t>
             </a:r>
           </a:p>
         </p:txBody>
@@ -20992,7 +22869,7 @@
                   <a:srgbClr val="1A2238"/>
                 </a:solidFill>
               </a:rPr>
-              <a:t>One rock, 96 labels: the one-to-many mapping</a:t>
+              <a:t>One rock, 48 labels: the one-to-many mapping</a:t>
             </a:r>
           </a:p>
         </p:txBody>
@@ -21060,7 +22937,7 @@
                   <a:srgbClr val="6C5CE7"/>
                 </a:solidFill>
               </a:rPr>
-              <a:t>48 sampled (P, H2O) paths</a:t>
+              <a:t>24 sampled (P, H2O) paths</a:t>
             </a:r>
           </a:p>
         </p:txBody>
@@ -21128,7 +23005,7 @@
                   <a:srgbClr val="2A9D8F"/>
                 </a:solidFill>
               </a:rPr>
-              <a:t>96 training labels (solid wt%, crystals-renormalized)</a:t>
+              <a:t>48 training labels (solid wt%, crystals-renormalized)</a:t>
             </a:r>
           </a:p>
         </p:txBody>
@@ -22205,7 +24082,7 @@
                   <a:srgbClr val="1A2238"/>
                 </a:solidFill>
               </a:rPr>
-              <a:t>(P₄₈, H₂O₄₈)</a:t>
+              <a:t>(P₂₄, H₂O₂₄)</a:t>
             </a:r>
           </a:p>
           <a:p>
@@ -22954,7 +24831,7 @@
                   <a:srgbClr val="1A2238"/>
                 </a:solidFill>
               </a:rPr>
-              <a:t>why this shape matters for the presence head: it only ever sees the left box, so all 96 rows share one input and it emits ONE p per mineral against 96 different truths -- amp grows on the wet-deep paths, opx on the dry-shallow. BCE's optimum is the fraction of paths growing the mineral, so an intermediate p is the multimodal signal, not indecision.</a:t>
+              <a:t>why this shape matters for the presence head: it only ever sees the left box, so all 48 rows share one input and it emits ONE p per mineral against 48 different truths -- amp grows on the wet-deep paths, opx on the dry-shallow. BCE's optimum is the fraction of paths growing the mineral, so an intermediate p is the multimodal signal, not indecision.</a:t>
             </a:r>
           </a:p>
         </p:txBody>
@@ -23094,7 +24971,7 @@
                   <a:srgbClr val="1A2238"/>
                 </a:solidFill>
               </a:rPr>
-              <a:t>1. bounded sampler</a:t>
+              <a:t>1. traced sampler</a:t>
             </a:r>
           </a:p>
           <a:p>
@@ -23116,7 +24993,7 @@
                   <a:srgbClr val="1A2238"/>
                 </a:solidFill>
               </a:rPr>
-              <a:t>landed + tested</a:t>
+              <a:t>adopted at default knobs</a:t>
             </a:r>
           </a:p>
           <a:p>
@@ -23127,7 +25004,18 @@
                   <a:srgbClr val="8A93A3"/>
                 </a:solidFill>
               </a:rPr>
-              <a:t>condition_proposal</a:t>
+              <a:t>trace-conditional boxes</a:t>
+            </a:r>
+          </a:p>
+          <a:p>
+            <a:pPr algn="ctr"/>
+            <a:r>
+              <a:rPr sz="900" b="0">
+                <a:solidFill>
+                  <a:srgbClr val="8A93A3"/>
+                </a:solidFill>
+              </a:rPr>
+              <a:t>over the bounded floor</a:t>
             </a:r>
           </a:p>
         </p:txBody>
@@ -23215,7 +25103,7 @@
                   <a:srgbClr val="1A2238"/>
                 </a:solidFill>
               </a:rPr>
-              <a:t>2. orchestrator</a:t>
+              <a:t>2. generator wiring</a:t>
             </a:r>
           </a:p>
           <a:p>
@@ -23248,7 +25136,29 @@
                   <a:srgbClr val="8A93A3"/>
                 </a:solidFill>
               </a:rPr>
-              <a:t>generate_mineralogy_corpus</a:t>
+              <a:t>nested-block expansion</a:t>
+            </a:r>
+          </a:p>
+          <a:p>
+            <a:pPr algn="ctr"/>
+            <a:r>
+              <a:rPr sz="900" b="0">
+                <a:solidFill>
+                  <a:srgbClr val="8A93A3"/>
+                </a:solidFill>
+              </a:rPr>
+              <a:t>so any prefix is</a:t>
+            </a:r>
+          </a:p>
+          <a:p>
+            <a:pPr algn="ctr"/>
+            <a:r>
+              <a:rPr sz="900" b="0">
+                <a:solidFill>
+                  <a:srgbClr val="8A93A3"/>
+                </a:solidFill>
+              </a:rPr>
+              <a:t>class-representative</a:t>
             </a:r>
           </a:p>
         </p:txBody>
@@ -23380,7 +25290,7 @@
                   <a:srgbClr val="1A2238"/>
                 </a:solidFill>
               </a:rPr>
-              <a:t>3. water A/B</a:t>
+              <a:t>3. train tier</a:t>
             </a:r>
           </a:p>
           <a:p>
@@ -23402,7 +25312,7 @@
                   <a:srgbClr val="1A2238"/>
                 </a:solidFill>
               </a:rPr>
-              <a:t>switch holds;</a:t>
+              <a:t>complete</a:t>
             </a:r>
           </a:p>
           <a:p>
@@ -23413,7 +25323,7 @@
                   <a:srgbClr val="8A93A3"/>
                 </a:solidFill>
               </a:rPr>
-              <a:t>biotite gap is</a:t>
+              <a:t>35k bulks x 24 draws</a:t>
             </a:r>
           </a:p>
           <a:p>
@@ -23424,7 +25334,18 @@
                   <a:srgbClr val="8A93A3"/>
                 </a:solidFill>
               </a:rPr>
-              <a:t>prior-side, not coverage</a:t>
+              <a:t>34,474 with rows</a:t>
+            </a:r>
+          </a:p>
+          <a:p>
+            <a:pPr algn="ctr"/>
+            <a:r>
+              <a:rPr sz="900" b="0">
+                <a:solidFill>
+                  <a:srgbClr val="8A93A3"/>
+                </a:solidFill>
+              </a:rPr>
+              <a:t>1.65M rows at 50 + 30</a:t>
             </a:r>
           </a:p>
         </p:txBody>
@@ -23556,7 +25477,7 @@
                   <a:srgbClr val="1A2238"/>
                 </a:solidFill>
               </a:rPr>
-              <a:t>4. pilot + rung pick</a:t>
+              <a:t>4. valtest tier</a:t>
             </a:r>
           </a:p>
           <a:p>
@@ -23578,7 +25499,7 @@
                   <a:srgbClr val="1A2238"/>
                 </a:solidFill>
               </a:rPr>
-              <a:t>passed; rungs locked</a:t>
+              <a:t>complete + sealed</a:t>
             </a:r>
           </a:p>
           <a:p>
@@ -23589,7 +25510,7 @@
                   <a:srgbClr val="8A93A3"/>
                 </a:solidFill>
               </a:rPr>
-              <a:t>50 + 30 (owner,</a:t>
+              <a:t>2k bulks x 128 draws</a:t>
             </a:r>
           </a:p>
           <a:p>
@@ -23600,7 +25521,18 @@
                   <a:srgbClr val="8A93A3"/>
                 </a:solidFill>
               </a:rPr>
-              <a:t>rung_prescreen.py)</a:t>
+              <a:t>roster grown by extension:</a:t>
+            </a:r>
+          </a:p>
+          <a:p>
+            <a:pPr algn="ctr"/>
+            <a:r>
+              <a:rPr sz="900" b="0">
+                <a:solidFill>
+                  <a:srgbClr val="8A93A3"/>
+                </a:solidFill>
+              </a:rPr>
+              <a:t>887 val / 1112 test</a:t>
             </a:r>
           </a:p>
         </p:txBody>
@@ -23732,7 +25664,7 @@
                   <a:srgbClr val="1A2238"/>
                 </a:solidFill>
               </a:rPr>
-              <a:t>5. production</a:t>
+              <a:t>5. heads cascade</a:t>
             </a:r>
           </a:p>
           <a:p>
@@ -23754,7 +25686,7 @@
                   <a:srgbClr val="1A2238"/>
                 </a:solidFill>
               </a:rPr>
-              <a:t>both tiers complete</a:t>
+              <a:t>retrained + re-tuned</a:t>
             </a:r>
           </a:p>
           <a:p>
@@ -23765,7 +25697,7 @@
                   <a:srgbClr val="8A93A3"/>
                 </a:solidFill>
               </a:rPr>
-              <a:t>948k train rows;</a:t>
+              <a:t>on the traced tiers;</a:t>
             </a:r>
           </a:p>
           <a:p>
@@ -23776,18 +25708,7 @@
                   <a:srgbClr val="8A93A3"/>
                 </a:solidFill>
               </a:rPr>
-              <a:t>valtest 125k, sealed</a:t>
-            </a:r>
-          </a:p>
-          <a:p>
-            <a:pPr algn="ctr"/>
-            <a:r>
-              <a:rPr sz="900" b="0">
-                <a:solidFill>
-                  <a:srgbClr val="8A93A3"/>
-                </a:solidFill>
-              </a:rPr>
-              <a:t>221/278 val/test roster</a:t>
+              <a:t>encoder swap is next</a:t>
             </a:r>
           </a:p>
         </p:txBody>
@@ -23899,7 +25820,7 @@
                   <a:srgbClr val="1A2238"/>
                 </a:solidFill>
               </a:rPr>
-              <a:t>all gates passed: the water A/B held under bounded sampling; the pilot pre-screen locked rungs 50 + 30; production completed 2026-07-17 (train 99.2% point convergence, valtest 97.7% usable rows after dropping one solver-poisoned bulk). The 499 valtest bulks divide 16:20 into a committed val/test roster (valtest_split.csv); test stays sealed.</a:t>
+              <a:t>the corpus was regenerated end to end in July 2026: 3.5x the bulks (scaling said bulks are where the nats are, and draws flatten past ~24), a trace-conditional (P, H2O) proposal replacing the broad box, and a valtest roster grown to 2,000 bulks by extension -- prior val/test assignments are frozen, so committed rows never move between splits. Test stays sealed.</a:t>
             </a:r>
           </a:p>
         </p:txBody>
@@ -23933,7 +25854,7 @@
                   <a:srgbClr val="8A93A3"/>
                 </a:solidFill>
               </a:rPr>
-              <a:t>spec: docs/corpus_regen_spec.md (all design decisions locked 2026-07-14; generation complete 2026-07-17).</a:t>
+              <a:t>spec: docs/corpus_regen_spec.md . the roster change retired the old measuring instrument, so headline numbers before and after it are not comparable (results/ledger.yaml stamps each version with the instrument that measured it).</a:t>
             </a:r>
           </a:p>
         </p:txBody>

--- a/slides/overview.pptx
+++ b/slides/overview.pptx
@@ -663,7 +663,7 @@
           <a:lstStyle/>
           <a:p>
             <a:r>
-              <a:t>The three-stage training pipeline. Stage 1 is the SSL loop from the prior slide; stage 2 freezes; stage 3 trains the heads on the labeled equilibrium corpus. The production stack is checkpoints/pretrain_v3_logmse_std_seed0 (stage 1-2) + checkpoints/joint_heads_regen_tuned_seed0 (stage 3). Stage 3 is cheap by design -- ~900k head params against a 3.23M frozen encoder -- which is what makes re-supervising the heads against a different label source a retrain rather than a rebuild.</a:t>
+              <a:t>The three-stage training pipeline. Stage 1 is the SSL loop from the prior slide; stage 2 freezes; stage 3 trains the heads on the labeled equilibrium corpus. The production stack is checkpoints/pretrain_v3_logmse_std_seed0 (stage 1-2) + checkpoints/joint_heads_supportmag_seed0 (stage 3, old broad-draw corpus; the traced-corpus retrains were measured and not adopted). Stage 3 is cheap by design -- ~900k head params against a 3.23M frozen encoder -- which is what makes re-supervising the heads against a different label source a retrain rather than a rebuild.</a:t>
             </a:r>
           </a:p>
         </p:txBody>
@@ -803,7 +803,7 @@
           <a:lstStyle/>
           <a:p>
             <a:r>
-              <a:t>Anatomy of the trained ModeHead (checkpoints/joint_heads_regen_tuned_seed0): two parallel trunks of 3 stacked Linear(-&gt;256)+GELU+dropout blocks. The presence trunk reads h alone (it predicts the support, so it must not see it) -&gt; logits (sigmoid -&gt; per-phase Bernoulli, BCE). The magnitude trunk reads h concatenated with the 21-dim support vector -&gt; concentrations (softplus + eps -&gt; conditional Dirichlet, masked NLL on the same support) -- the chain rule CondHead already uses: teacher-forced true mask at train, sampled from the presence Bernoullis at inference. Support-conditioning (adopted 2026-07-22, #25) exists because the conditional truth is bimodal by support for path-sensitive phases (deep-wet-much-amp vs shallow-dry-little); a support-blind Dirichlet could only average the humps -- amp magnitude parity r went 0.715 -&gt; 0.876 when it landed (measured on the since-retired instrument; the current corpus reads 0.886). Param counts are pulled from the checkpoint (mode_hidden 256, mode_layers 3 per trunk, the joint-HPO winner kept through the weights-only retune). Loss boxes mirror the SSL slide: BCE is a proper scoring rule (per-rock minimum = within-bulk presence frequency, which is why intermediate p is signal); the Dirichlet NLL is masked to the label's present set (sub-composition property keeps it a proper density); λ_mag is the loss-weighting coefficient (config key magnitude_weight, 7.76 tuned) -- λ chosen over w to avoid clashing with layer weights and to match the λ_balance / λ_comp family. Note the reduction asymmetry: BCE means over the 21 phases while the Dirichlet NLL sums them, so 7.76 in the config is 163 against a per-phase-summed BCE. 'Trained jointly' is one scalar L, one backward pass, one AdamW step; with the trunks split, the two ModeHead terms touch disjoint params, coupled only second-order through the per-head gradient clip pooling both trunks' norms. NOT alternating epochs, NOT separate optimizers, NOT staged pretraining of one branch. The hurdle split exists because one full-simplex Dirichlet cannot be simultaneously confident about absences and honest about present-phase spread (shared concentration). CompHead/CondHead follow the same small-MLP-emitting-distribution-parameters pattern; their two-slide reports follow ModeHead's.</a:t>
+              <a:t>Anatomy of the trained ModeHead (checkpoints/joint_heads_supportmag_seed0, the production run): two parallel trunks of 3 stacked Linear(-&gt;256)+GELU+dropout blocks. The presence trunk reads h alone (it predicts the support, so it must not see it) -&gt; logits (sigmoid -&gt; per-phase Bernoulli, BCE). The magnitude trunk reads h concatenated with the 21-dim support vector -&gt; concentrations (softplus + eps -&gt; conditional Dirichlet, masked NLL on the same support) -- the chain rule CondHead already uses: teacher-forced true mask at train, sampled from the presence Bernoullis at inference. Support-conditioning (adopted 2026-07-22, #25) exists because the conditional truth is bimodal by support for path-sensitive phases (deep-wet-much-amp vs shallow-dry-little); a support-blind Dirichlet could only average the humps -- amp magnitude parity r went 0.715 -&gt; 0.876 when it landed (the traced-corpus retrains later read 0.886 on their own instrument). Param counts are pulled from the checkpoint (mode_hidden 256, mode_layers 3 per trunk, the joint-HPO winner). Loss boxes mirror the SSL slide: BCE is a proper scoring rule (per-rock minimum = within-bulk presence frequency, which is why intermediate p is signal); the Dirichlet NLL is masked to the label's present set (sub-composition property keeps it a proper density); λ_mag is the loss-weighting coefficient (config key magnitude_weight, 0.25 in production) -- λ chosen over w to avoid clashing with layer weights and to match the λ_balance / λ_comp family. Note the reduction asymmetry: BCE means over the 21 phases while the Dirichlet NLL sums them, so 0.25 in the config is ~5.3 against (effective lambda; the reversed trial-22 dials ran 7.76 = 163) a per-phase-summed BCE. 'Trained jointly' is one scalar L, one backward pass, one AdamW step; with the trunks split, the two ModeHead terms touch disjoint params, coupled only second-order through the per-head gradient clip pooling both trunks' norms. NOT alternating epochs, NOT separate optimizers, NOT staged pretraining of one branch. The hurdle split exists because one full-simplex Dirichlet cannot be simultaneously confident about absences and honest about present-phase spread (shared concentration). CompHead/CondHead follow the same small-MLP-emitting-distribution-parameters pattern; their two-slide reports follow ModeHead's.</a:t>
             </a:r>
           </a:p>
         </p:txBody>
@@ -873,7 +873,7 @@
           <a:lstStyle/>
           <a:p>
             <a:r>
-              <a:t>Worked example for the reliability diagram in runs/mode_head/&lt;tag&gt;/reliability.png. Numbers illustrative but to scale: three rocks predicted in [0.70, 0.80) -- a real bin edge of the 10 equal-width bins the code uses -- contribute 3 predictions x 256 labels = 768 (p, truth) pairs -- 3 predictions, not 768; each rock's single p is scored against its 256 labels. x = count-weighted mean p (0.740), y = pooled fraction of pairs with cpx present (547/768 = 0.712). ECE on the real panels is the count-weighted |x - y| over 10 such bins. The gray ghost dot shows the overconfident failure mode. Real population: the sealed valtest tier's val roster (887 assigned rocks, 871 contributing 222,717 rows at 128 draws x rungs 50/30, minus attrition). Fixed roster: panel numbers move only when the head retrains. Pair with figure 2 (p vs within-bulk frequency): reliability is aggregate honesty, the scatter is per-rock sharpness; a base-rate predictor passes the first and fails the second.</a:t>
+              <a:t>Worked example for the reliability diagram in runs/mode_head/&lt;tag&gt;/reliability.png. Numbers illustrative but to scale: three rocks predicted in [0.70, 0.80) -- a real bin edge of the 10 equal-width bins the code uses -- contribute 3 predictions x 256 labels = 768 (p, truth) pairs -- 3 predictions, not 768; each rock's single p is scored against its 256 labels. x = count-weighted mean p (0.740), y = pooled fraction of pairs with cpx present (547/768 = 0.712). ECE on the real panels is the count-weighted |x - y| over 10 such bins. The gray ghost dot shows the overconfident failure mode. Real population: the production instrument's val roster (221 assigned bulks, 218 contributing 55,576 rows at 128 draws x rungs 50/30, minus attrition). Fixed roster: panel numbers move only when the head retrains. Pair with figure 2 (p vs within-bulk frequency): reliability is aggregate honesty, the scatter is per-rock sharpness; a base-rate predictor passes the first and fails the second.</a:t>
             </a:r>
           </a:p>
         </p:txBody>
@@ -1013,7 +1013,7 @@
           <a:lstStyle/>
           <a:p>
             <a:r>
-              <a:t>Anatomy of CompHead (trains in the joint trainer, checkpoints/joint_heads_regen_tuned_seed0). Interface: h [256] in, alpha [21, 11] out; one training example is one (bulk, draw, rung) row; targets are per-phase oxide mass fractions from the rungs table (same-token instances merged by mass-weighted mean, feldspar split into plag/afs BEFORE averaging so the solvus pair never mixes), eps-clipped at comp_eps and renormalized. Param counts are exact (instantiated at d_model 256, hidden 128). The shared-concentration factorization is the locked heads.md parameterization: one c_p per phase blurs per-oxide error bars toward each other -- accepted because composition spreads are 10-30x tighter than modal spreads (the reason CompHead is bulk-controlled and unconditioned). L_comp's minimum: the Dirichlet matching the per-bulk composition distribution of each phase. L_closure is the one loss term coupling two heads (mode x comp product); squared-L2 is a constraint penalty, not a head likelihood, so the no-MSE rule for heads doesn't apply. Known limits: hard-zero oxides are clipped (a q row is 'SiO2 + 10 eps-floors'); ~0.3% of corpus rows don't self-close (melt immiscibility, dropped-phase mass, worst 5.2 wt%) and set an unattainable closure floor there; endmember bonus heads deferred (heads.md).</a:t>
+              <a:t>Anatomy of CompHead (trains in the joint trainer, checkpoints/joint_heads_supportmag_seed0, the production run). Interface: h [256] in, alpha [21, 11] out; one training example is one (bulk, draw, rung) row; targets are per-phase oxide mass fractions from the rungs table (same-token instances merged by mass-weighted mean, feldspar split into plag/afs BEFORE averaging so the solvus pair never mixes), eps-clipped at comp_eps and renormalized. Param counts are exact (instantiated at d_model 256, hidden 128). The shared-concentration factorization is the locked heads.md parameterization: one c_p per phase blurs per-oxide error bars toward each other -- accepted because composition spreads are 10-30x tighter than modal spreads (the reason CompHead is bulk-controlled and unconditioned). L_comp's minimum: the Dirichlet matching the per-bulk composition distribution of each phase. L_closure is the one loss term coupling two heads (mode x comp product); squared-L2 is a constraint penalty, not a head likelihood, so the no-MSE rule for heads doesn't apply. Known limits: hard-zero oxides are clipped (a q row is 'SiO2 + 10 eps-floors'); ~0.3% of corpus rows don't self-close (melt immiscibility, dropped-phase mass, worst 5.2 wt%) and set an unattainable closure floor there; endmember bonus heads deferred (heads.md).</a:t>
             </a:r>
           </a:p>
         </p:txBody>
@@ -1083,7 +1083,7 @@
           <a:lstStyle/>
           <a:p>
             <a:r>
-              <a:t>Eval-semantics slide for CompHead, mirroring the ModeHead magnitude worked example: two tracks converge at a scoring node; the truth contributes its support to the slice and meets the prediction only at scoring. Box numbers illustrative but to scale (a plag Dirichlet with alpha0 ~780 has SiO2 sd ~0.018); headline numbers are real, from runs/comp_head/joint_heads_regen_tuned_seed0/metrics.json. CompHead is the head the weights-only sweep did not move: against the same-corpus pre-sweep run (joint_heads_regen_seed0) NLL went -56.30 -&gt; -56.29, closure L2 0.0107 -&gt; 0.0109, An# parity mae 0.044 -&gt; 0.043 / r 0.957 -&gt; 0.959 -- all inside the 0.03-nat tie band, which is why the adoption argument rested on ModeHead. The alpha0 span is the durable story (comp_concentration.png): medians run ~170 for garnet to ~40,000 for quartz, ordered by how constrained each mineral's chemistry really is; the earlier untuned model compressed everything into 100-650, but that comparison was measured on the since-retired instrument. PIT here is per-oxide Beta marginals of the 11-simplex Dirichlet (same sub-composition property as the mode slice).</a:t>
+              <a:t>Eval-semantics slide for CompHead, mirroring the ModeHead magnitude worked example: two tracks converge at a scoring node; the truth contributes its support to the slice and meets the prediction only at scoring. Box numbers illustrative but to scale (a plag Dirichlet with alpha0 ~780 has SiO2 sd ~0.018); headline numbers are real, from runs/comp_head/joint_heads_supportmag_seed0/metrics.json (the production run). In the later traced-corpus sweep CompHead was the head the weights-only sweep did not move (NLL -56.30 -&gt; -56.29, inside the tie band) -- which is why that sweep's adoption argument rested on ModeHead, before the adoption itself was reversed 2026-08-03 on the real-rock evidence. The alpha0 span is the durable story (comp_concentration.png): medians run ~170 for garnet to ~40,000 for quartz, ordered by how constrained each mineral's chemistry really is; the earlier untuned model compressed everything into 100-650, but that comparison was measured on the since-retired instrument. PIT here is per-oxide Beta marginals of the 11-simplex Dirichlet (same sub-composition property as the mode slice).</a:t>
             </a:r>
           </a:p>
         </p:txBody>
@@ -1153,7 +1153,7 @@
           <a:lstStyle/>
           <a:p>
             <a:r>
-              <a:t>Anatomy of CondHead (trains in the joint trainer, checkpoints/joint_heads_regen_tuned_seed0). Interface: concat(h [256], presence [21]) in; (log_w, mu, sigma) each [3 axes, K] out; one training example is one (bulk, draw, rung) row with targets (T_end from the rung row; P_kbar, H2O from the draw). Param counts pulled from the checkpoint (cond_hidden 512, cond_layers 2, K=3): cond was the one head that wanted capacity -- starved at 128x1 under the shared tuned lr, fixed by the mini-sweep adoption. Support-conditioning is the locked chain-rule decision: independent heads assume a conditional independence the corpus violates by design -- the within-bulk label variance is driven by the shared hidden (P, H2O) path, and marginals forget which condition mode went with which support. Raw linear units are deliberate (no log transforms; negative mass is a diagnostic, not a bug -- mass_below_zero in the cond eval). init_output_bias seeds component means at target mean +/- 1 std and sigmas at the target std; without it Adam needs ~mu/lr steps to walk mu from 0 to ~900 C. lambda_cond nuance: L_cond's gradient reaches only CondHead's own weights (frozen encoder, separate trunks, teacher-forced input), and per-head clipping + Adam's per-parameter scaling make the constant nearly inert for optimization; per-head best selection (each head keeps its own raw-val best epoch) removed its old early-stopping lever too, leaving it a raw-unit scale absorber (mineralogy-first). Known limits: axes are independent mixtures (no (T, P) correlation, deferred per ADR 006); exposure bias measured, not yet mitigated (#31); T is a derived cooling endpoint, not a sampled axis, in the scenario view.</a:t>
+              <a:t>Anatomy of CondHead (trains in the joint trainer, checkpoints/joint_heads_supportmag_seed0, the production run). Interface: concat(h [256], presence [21]) in; (log_w, mu, sigma) each [3 axes, K] out; one training example is one (bulk, draw, rung) row with targets (T_end from the rung row; P_kbar, H2O from the draw). Param counts pulled from the checkpoint (cond_hidden 512, cond_layers 2, K=3): cond was the one head that wanted capacity -- starved at 128x1 under the shared tuned lr, fixed by the mini-sweep adoption. Support-conditioning is the locked chain-rule decision: independent heads assume a conditional independence the corpus violates by design -- the within-bulk label variance is driven by the shared hidden (P, H2O) path, and marginals forget which condition mode went with which support. Raw linear units are deliberate (no log transforms; negative mass is a diagnostic, not a bug -- mass_below_zero in the cond eval). init_output_bias seeds component means at target mean +/- 1 std and sigmas at the target std; without it Adam needs ~mu/lr steps to walk mu from 0 to ~900 C. lambda_cond nuance: L_cond's gradient reaches only CondHead's own weights (frozen encoder, separate trunks, teacher-forced input), and per-head clipping + Adam's per-parameter scaling make the constant nearly inert for optimization; per-head best selection (each head keeps its own raw-val best epoch) removed its old early-stopping lever too, leaving it a raw-unit scale absorber (mineralogy-first). Known limits: axes are independent mixtures (no (T, P) correlation, deferred per ADR 006); exposure bias measured, not yet mitigated (#31); T is a derived cooling endpoint, not a sampled axis, in the scenario view.</a:t>
             </a:r>
           </a:p>
         </p:txBody>
@@ -1223,7 +1223,7 @@
           <a:lstStyle/>
           <a:p>
             <a:r>
-              <a:t>Eval-semantics slide for CondHead. The two-pass protocol is the point: teacher-forced scoring isolates the head's conditional skill p(T,P,H2O | h, true support); sampled-support scoring measures the deployed chain with ModeHead's Bernoulli draws standing in for the truth (exposure_seed pins reproducibility). Mixture drawing illustrative but to scale for a bimodal amp/opx bulk (deep-wet vs shallow-dry is the flagship condition multimodality). Real numbers from runs/cond_head/joint_heads_regen_tuned_seed0/metrics.json against the same-corpus pre-sweep run: teacher-forced NLL 7.40 -&gt; 7.36 (T 4.762 -&gt; 4.727, P 1.562 -&gt; 1.558, H2O 1.080 -&gt; 1.072) while coverage drifted DOWN, 0.727/0.683/0.669 -&gt; 0.699/0.662/0.655, and the exposure delta widened on every axis (T 2.22 -&gt; 2.66, P 1.16 -&gt; 1.36, H2O 1.03 -&gt; 1.23) -- the sharper head is more wrong under mismatched supports, and slightly under-covering under matched ones. The sampled-support inf rows that used to appear here were a float32 underflow in the density guard, not a modelling failure; the per-axis NLL now goes through logsumexp, and those rows read 118-141 nats. Coverage is central-interval mass via the mixture CDF (PIT), same construction as the mode/comp calibration reads.</a:t>
+              <a:t>Eval-semantics slide for CondHead. The two-pass protocol is the point: teacher-forced scoring isolates the head's conditional skill p(T,P,H2O | h, true support); sampled-support scoring measures the deployed chain with ModeHead's Bernoulli draws standing in for the truth (exposure_seed pins reproducibility). Mixture drawing illustrative but to scale for a bimodal amp/opx bulk (deep-wet vs shallow-dry is the flagship condition multimodality). Real numbers from runs/cond_head/joint_heads_supportmag_seed0/metrics.json (the production run): teacher-forced per-axis NLL T 4.97 / P 1.82 / H2O 1.52, coverage-68 0.710/0.674/0.679, exposure delta T 4.00 / P 2.73 / H2O 2.40 nats with sampled coverage falling to 0.26/0.34/0.34. (The later traced-corpus sweep sharpened NLL slightly while coverage drifted down and the exposure delta widened -- one strand of the evidence behind the 2026-08-03 adoption reversal.) The sampled-support inf rows that used to appear here were a float32 underflow in the density guard, not a modelling failure; the per-axis NLL now goes through logsumexp, and those rows read 118-141 nats. Coverage is central-interval mass via the mixture CDF (PIT), same construction as the mode/comp calibration reads.</a:t>
             </a:r>
           </a:p>
         </p:txBody>
@@ -1363,7 +1363,7 @@
           <a:lstStyle/>
           <a:p>
             <a:r>
-              <a:t>The joint view the three anatomy slides decompose: every branch reads the same frozen 256-d h, and the four likelihood terms plus the closure penalty sum to one scalar. Two arrows are not plain feed-forward: the magnitude branch and CondHead take concat(h, support) -- the chain rule p(support | h) x p(rest | h, support), teacher-forced true mask at train, ModeHead-sampled at inference (exposure bias, #31). CompHead deliberately does NOT see the support: composition is bulk-controlled (heads.md). Closure is drawn as a joiner, not a fifth branch, because it has no parameters -- it multiplies ModeHead's support-masked Dirichlet mean by CompHead's Dirichlet mean and asks whether the reconstructed bulk matches the input; squared-L2 is a constraint penalty, not a head likelihood, so the no-MSE rule for heads does not apply. It is the one term coupling two heads. Weights and param counts are from the production run (checkpoints/joint_heads_regen_tuned_seed0, trial-22 dials adopted 2026-07-29). The reduction asymmetry in the last caption is a real footgun when transcribing the equation: BCE reduces over batch AND phases, the Dirichlet NLL over batch only, so magnitude_weight in the config is 1/21 of the coefficient you would write against a summed BCE. lambda_cond is small because L_cond is in raw units (T in the hundreds); it absorbs scale, it is not a statement about how much the conditions matter. Each head is snapshotted at its own best raw-val epoch and clipped separately, so the lambdas do not act as early-stopping levers. Not shown because they are not in the joint trainer: the auxiliary ClassHead and G_sys remain application slots, unimplemented.</a:t>
+              <a:t>The joint view the three anatomy slides decompose: every branch reads the same frozen 256-d h, and the four likelihood terms plus the closure penalty sum to one scalar. Two arrows are not plain feed-forward: the magnitude branch and CondHead take concat(h, support) -- the chain rule p(support | h) x p(rest | h, support), teacher-forced true mask at train, ModeHead-sampled at inference (exposure bias, #31). CompHead deliberately does NOT see the support: composition is bulk-controlled (heads.md). Closure is drawn as a joiner, not a fifth branch, because it has no parameters -- it multiplies ModeHead's support-masked Dirichlet mean by CompHead's Dirichlet mean and asks whether the reconstructed bulk matches the input; squared-L2 is a constraint penalty, not a head likelihood, so the no-MSE rule for heads does not apply. It is the one term coupling two heads. Weights and param counts are from the production run (checkpoints/joint_heads_supportmag_seed0; the trial-22 adoption of 2026-07-29 was reversed 2026-08-03 -- the traced-corpus retrains lose on real rocks). The reduction asymmetry in the last caption is a real footgun when transcribing the equation: BCE reduces over batch AND phases, the Dirichlet NLL over batch only, so magnitude_weight in the config is 1/21 of the coefficient you would write against a summed BCE. lambda_cond is small because L_cond is in raw units (T in the hundreds); it absorbs scale, it is not a statement about how much the conditions matter. Each head is snapshotted at its own best raw-val epoch and clipped separately, so the lambdas do not act as early-stopping levers. Not shown because they are not in the joint trainer: the auxiliary ClassHead and G_sys remain application slots, unimplemented.</a:t>
             </a:r>
           </a:p>
         </p:txBody>
@@ -1713,7 +1713,7 @@
           <a:lstStyle/>
           <a:p>
             <a:r>
-              <a:t>Status strip for the corpus regen, now fully landed -- the slide is a record, not a plan. Two generations have run: the first (2026-07-17, 10k train bulks x 48 broad-box draws) and the traced regen (2026-07-27) described here. Step 5 is cascade 1: heads retrained at the incumbent dials on the traced tiers, then a weights-only mini-HPO whose winner was adopted (joint_heads_regen_tuned_seed0). Cascade 2 -- swapping in the all-rock + redox encoder that was accepted 2026-07-28 -- has not run, which is why every architecture slide in this deck still shows the 22-token encoder. Candidate to retire or fold into the corpora slide at the next deck pass (owner call).</a:t>
+              <a:t>Status strip for the corpus regen, now fully landed -- the slide is a record, not a plan. Two generations have run: the first (2026-07-17, 10k train bulks x 48 broad-box draws) and the traced regen (2026-07-27) described here. Step 5 is cascade 1: heads retrained at the incumbent dials on the traced tiers, then a weights-only mini-HPO. Its winner (joint_heads_regen_tuned_seed0) was provisionally adopted 2026-07-29 and reversed 2026-08-03: both traced-corpus checkpoints lose to the old-corpus production model on real rocks after identical recalibration (sealed test joint NLL 0.478 / 0.769 / 1.371), so production remains joint_heads_supportmag_seed0 and the traced corpus is a measured non-production arm (its wins: quartz presence, assemblage ranking). Cascade 2 -- the all-rock + redox encoder (accepted 2026-07-28) on the old broad-draw corpus, baseline-first -- has not run, which is why every architecture slide in this deck still shows the 22-token encoder. Candidate to retire or fold into the corpora slide at the next deck pass (owner call).</a:t>
             </a:r>
           </a:p>
         </p:txBody>
@@ -9075,7 +9075,7 @@
                   <a:srgbClr val="8A93A3"/>
                 </a:solidFill>
               </a:rPr>
-              <a:t>dials (configs/heads/joint_heads.yaml): mode_hidden 256 . mode_layers 3 . dropout 0.160 . magnitude_weight 7.76 . alpha_eps 1e-6 . lr 3.36e-4 . weight_decay 1.59e-4 . batch 1024 . epochs 120 / per-head patience 10 -- fixed in code: GELU, AdamW, grad-clip 1.0</a:t>
+              <a:t>dials (stamped in the production checkpoint): mode_hidden 256 . mode_layers 3 . dropout 0.348 . magnitude_weight 0.25 . alpha_eps 1e-6 . lr 2.15e-4 . weight_decay 1.04e-5 . batch 1024 . epochs 120 / per-head patience 10 -- fixed in code: GELU, AdamW, grad-clip 1.0</a:t>
             </a:r>
           </a:p>
         </p:txBody>
@@ -9270,7 +9270,7 @@
                   <a:srgbClr val="8A93A3"/>
                 </a:solidFill>
               </a:rPr>
-              <a:t>one backward pass; the trunks are param-disjoint, so λ_mag no longer arbitrates a shared trunk -- it sets how hard the Dirichlet term pulls relative to the presence term, and the sweep pushed it 31x up to 7.76</a:t>
+              <a:t>one backward pass; the trunks are param-disjoint, so λ_mag no longer arbitrates a shared trunk -- it sets how hard the Dirichlet term pulls relative to the presence term; production runs 0.25</a:t>
             </a:r>
           </a:p>
         </p:txBody>
@@ -10562,7 +10562,7 @@
                   <a:srgbClr val="1A2238"/>
                 </a:solidFill>
               </a:rPr>
-              <a:t>3 rocks shown; the real figure pools the val-roster rocks only -- 871 rocks x ~256 rows = 222,717 (p, truth) pairs per mineral panel, partitioned across the 10 bins (the gray bars). Training rocks are excluded because a head that memorized them would grade itself calibrated. And since all ~256 rows of a rock share one prediction, a panel holds only 871 distinct p values, each stamped ~256x -- the effective sample size is rocks, not rows. The population is the fixed val roster of the sealed valtest tier (128 draws/rock at rungs 50+30), so panels are comparable across retrains.</a:t>
+              <a:t>3 rocks shown; the real figure pools the val-roster rocks only -- 218 rocks x ~255 rows = 55,576 (p, truth) pairs per mineral panel, partitioned across the 10 bins (the gray bars). Training rocks are excluded because a head that memorized them would grade itself calibrated. And since all ~255 rows of a rock share one prediction, a panel holds only 218 distinct p values, each stamped ~256x -- the effective sample size is rocks, not rows. The population is the fixed val roster of the sealed valtest tier (128 draws/rock at rungs 50+30), so panels are comparable across retrains.</a:t>
             </a:r>
           </a:p>
         </p:txBody>
@@ -10596,7 +10596,7 @@
                   <a:srgbClr val="8A93A3"/>
                 </a:solidFill>
               </a:rPr>
-              <a:t>BCE's per-rock minimum is the true fraction, so an honest head lands on the diagonal by construction. current limits (production model): intermediate-frequency presence is the miss mode -- where a mineral grows on 10-50% of a rock's paths, recall runs 0.09-0.35, against 0.86-1.00 where it grows on &gt;90%; the rare phases (mu, ep, ky) are never called at all; spinel is the worst-calibrated panel (ECE 0.040). full report: runs/mode_head/&lt;tag&gt;/</a:t>
+              <a:t>BCE's per-rock minimum is the true fraction, so an honest head lands on the diagonal by construction. current limits (production model): intermediate-frequency presence is the miss mode -- where a mineral grows on 10-50% of a rock's paths, recall runs 0.00-0.41, against 0.76-1.00 where it grows on &gt;90%; the rarest phases are essentially never called; spinel is the worst-calibrated panel (ECE 0.072). full report: runs/mode_head/&lt;tag&gt;/</a:t>
             </a:r>
           </a:p>
         </p:txBody>
@@ -11948,7 +11948,7 @@
                   <a:srgbClr val="8A93A3"/>
                 </a:solidFill>
               </a:rPr>
-              <a:t>population: only truly-present (row, phase) pairs are scored -- ~177k pairs for plag down to ~340 for kyanite; single-phase rows are excluded (nothing to size). current limits (production model): amp parity r 0.886 teacher-forced but 0.580 on self-sampled supports; 47% of its PIT groups still sit mean-shifted and 11.5% are two-sided -- bimodal WITHIN one support (mixture parameterization is the staged candidate, #25). full report: runs/mode_head/&lt;tag&gt;/ (magnitude_parity, magnitude_pit).</a:t>
+              <a:t>population: only truly-present (row, phase) pairs are scored -- ~41k pairs for plag down to a few hundred for the rarest phases; single-phase rows are excluded (nothing to size). current limits (production model): amp parity r 0.876 teacher-forced but 0.539 on self-sampled supports; the interrogation also measured amp bimodal WITHIN one support (mixture parameterization is the staged candidate, #25). full report: runs/mode_head/&lt;tag&gt;/ (magnitude_parity, magnitude_pit).</a:t>
             </a:r>
           </a:p>
         </p:txBody>
@@ -12852,7 +12852,7 @@
                   <a:srgbClr val="8A93A3"/>
                 </a:solidFill>
               </a:rPr>
-              <a:t>dials (configs/heads/joint_heads.yaml): comp_hidden null -&gt; 128 . comp_layers 1 (mini-sweep verdict: capacity above 128 x 1 hurts comp) . dropout 0.160 . alpha_eps 1e-6 . comp_eps 1e-4 (hard-zero clip on targets) . lambda_comp 1.0 . lambda_balance 0.0118 -- fixed in code: GELU, AdamW, per-head grad-clip 1.0</a:t>
+              <a:t>dials (configs/heads/joint_heads.yaml): comp_hidden null -&gt; 128 . comp_layers 1 (mini-sweep verdict: capacity above 128 x 1 hurts comp) . dropout 0.348 . alpha_eps 1e-6 . comp_eps 1e-4 (hard-zero clip on targets) . lambda_comp 1.0 . lambda_balance 54.5 -- fixed in code: GELU, AdamW, per-head grad-clip 1.0</a:t>
             </a:r>
           </a:p>
         </p:txBody>
@@ -14140,7 +14140,7 @@
                   <a:srgbClr val="1A2238"/>
                 </a:solidFill>
               </a:rPr>
-              <a:t>population: only truly-present (row, phase) pairs -- 161k for cpx down to ~340 for kyanite. headline (val roster, production): comp NLL -56.29 nats per present (row, phase); majors' PIT tails sit near the nominal 10% (cpx 0.040/0.055).</a:t>
+              <a:t>population: only truly-present (row, phase) pairs -- 42k for cpx down to ~240 for andalusite. headline (val roster, production): comp NLL -53.90 nats per present (row, phase); majors' PIT tails sit near the nominal 10% (cpx 0.048/0.054).</a:t>
             </a:r>
           </a:p>
         </p:txBody>
@@ -14174,7 +14174,7 @@
                   <a:srgbClr val="1A2238"/>
                 </a:solidFill>
               </a:rPr>
-              <a:t>confidence spans ~2.5 decades and tracks real mineralogy: near-stoichiometric phases earn median alpha0 ~40,000 (q), ~36,000 (ru), ~19,000 (sph) while wide solid solutions stay soft -- garnet ~170, spinel ~240, ilmenite ~480. mass balance closes to 1.1% mean L2 with signed per-oxide residuals centered on zero; plag An# parity r = 0.96.</a:t>
+              <a:t>confidence spans decades and tracks real mineralogy: near-stoichiometric phases (q, ru, sph) earn far higher median alpha0 than wide solid solutions (garnet, spinel, ilmenite) -- span measured on the traced-corpus retrain. mass balance closes to 1.3% mean L2 with signed per-oxide residuals centered on zero; plag An# parity r = 0.93.</a:t>
             </a:r>
           </a:p>
         </p:txBody>
@@ -15355,7 +15355,7 @@
                   <a:srgbClr val="8A93A3"/>
                 </a:solidFill>
               </a:rPr>
-              <a:t>dials (configs/heads/joint_heads.yaml): cond_n_components 3 . cond_sigma_eps 1e-3 . cond_hidden 512 . cond_layers 2 (adopted from the architecture mini-sweep) . dropout 0.160 . lambda_cond 0.01 -- fixed in code: GELU, AdamW, per-head grad-clip 1.0, linear units (no log transform of T/P/H2O)</a:t>
+              <a:t>dials (configs/heads/joint_heads.yaml): cond_n_components 3 . cond_sigma_eps 1e-3 . cond_hidden 512 . cond_layers 2 (adopted from the architecture mini-sweep) . dropout 0.348 . lambda_cond 0.01 -- fixed in code: GELU, AdamW, per-head grad-clip 1.0, linear units (no log transform of T/P/H2O)</a:t>
             </a:r>
           </a:p>
         </p:txBody>
@@ -16412,7 +16412,7 @@
                   <a:srgbClr val="8A93A3"/>
                 </a:solidFill>
               </a:rPr>
-              <a:t>68% band catches truth on 69.9% of rows (T),</a:t>
+              <a:t>68% band catches truth on 71.0% of rows (T),</a:t>
             </a:r>
           </a:p>
           <a:p>
@@ -16423,7 +16423,7 @@
                   <a:srgbClr val="8A93A3"/>
                 </a:solidFill>
               </a:rPr>
-              <a:t>66.2% (P), 65.5% (H2O) . NLL 7.36 nats/row</a:t>
+              <a:t>67.4% (P), 67.9% (H2O) . NLL 8.31 nats/row</a:t>
             </a:r>
           </a:p>
         </p:txBody>
@@ -16488,7 +16488,7 @@
                   <a:srgbClr val="8A93A3"/>
                 </a:solidFill>
               </a:rPr>
-              <a:t>coverage falls to 33% (T), 44% (P), 45% (H2O) . NLL +1.2 to +2.7</a:t>
+              <a:t>coverage falls to 26% (T), 34% (P), 34% (H2O) . NLL +2.4 to +4.0</a:t>
             </a:r>
           </a:p>
           <a:p>
@@ -16499,7 +16499,7 @@
                   <a:srgbClr val="8A93A3"/>
                 </a:solidFill>
               </a:rPr>
-              <a:t>nats/axis -- sharper under truth = more wrong under mismatch</a:t>
+              <a:t>nats/axis -- sharp under truth = more wrong under mismatch</a:t>
             </a:r>
           </a:p>
         </p:txBody>
@@ -16533,7 +16533,7 @@
                   <a:srgbClr val="1A2238"/>
                 </a:solidFill>
               </a:rPr>
-              <a:t>the gap is a deliberate debt: the head trains and is graded teacher-forced (mineralogy-first -- conditions are the bonus product), and tuning made the head sharper, which widened the gap. It is measured, tracked (#31, P3), and untouched by design until the mineralogy heads are done.</a:t>
+              <a:t>the gap is a deliberate debt: the head trains and is graded teacher-forced (mineralogy-first -- conditions are the bonus product). It is measured, tracked (#31, P3), and untouched by design until the mineralogy heads are done.</a:t>
             </a:r>
           </a:p>
         </p:txBody>
@@ -16567,7 +16567,7 @@
                   <a:srgbClr val="1A2238"/>
                 </a:solidFill>
               </a:rPr>
-              <a:t>population: all 222,717 val-roster rows, both scoring passes on the same rows with a fixed sampling seed. per-axis NLL (production, teacher-forced): T 4.73, P 1.56, H2O 1.07 -- summed 7.36.</a:t>
+              <a:t>population: all 55,576 val-roster rows, both scoring passes on the same rows with a fixed sampling seed. per-axis NLL (production, teacher-forced): T 4.97, P 1.82, H2O 1.52 -- summed 8.31.</a:t>
             </a:r>
           </a:p>
         </p:txBody>
@@ -18821,7 +18821,7 @@
                   <a:srgbClr val="8A93A3"/>
                 </a:solidFill>
               </a:rPr>
-              <a:t>λ_mag 7.76 . λ_comp 1.0 . λ_cond 0.01 . λ_bal 0.0118 (joint HPO, ADR 006) -- one scalar, one backward pass, one AdamW step; the branches share no weights, so each λ balances terms rather than arbitrating a trunk</a:t>
+              <a:t>λ_mag 0.25 . λ_comp 1.0 . λ_cond 0.01 . λ_bal 54.5 (joint HPO, ADR 006) -- one scalar, one backward pass, one AdamW step; the branches share no weights, so each λ balances terms rather than arbitrating a trunk</a:t>
             </a:r>
           </a:p>
         </p:txBody>
@@ -18855,7 +18855,7 @@
                   <a:srgbClr val="1A2238"/>
                 </a:solidFill>
               </a:rPr>
-              <a:t>895,169 params on the frozen 3.23M encoder (~28%): mode 410,922 . comp 65,404 . cond 418,843 -- from checkpoints/joint_heads_regen_tuned_seed0/heads_best.pt</a:t>
+              <a:t>895,169 params on the frozen 3.23M encoder (~28%): mode 410,922 . comp 65,404 . cond 418,843 -- from checkpoints/joint_heads_supportmag_seed0/heads_best.pt</a:t>
             </a:r>
           </a:p>
         </p:txBody>
@@ -18889,7 +18889,7 @@
                   <a:srgbClr val="8A93A3"/>
                 </a:solidFill>
               </a:rPr>
-              <a:t>dials (configs/heads/joint_heads.yaml): dropout 0.160 . lr 3.36e-4 . weight_decay 1.59e-4 . batch 1024 . epochs 120 / patience 10 -- in code: GELU, AdamW, grad-clip 1.0 per head</a:t>
+              <a:t>dials (stamped in the production checkpoint): dropout 0.348 . lr 2.15e-4 . weight_decay 1.04e-5 . batch 1024 . epochs 120 / patience 10 -- in code: GELU, AdamW, grad-clip 1.0 per head</a:t>
             </a:r>
           </a:p>
         </p:txBody>
@@ -18923,7 +18923,7 @@
                   <a:srgbClr val="C0392B"/>
                 </a:solidFill>
               </a:rPr>
-              <a:t>L_presence is meaned over the 21 phases while L_magnitude sums them, so against a per-phase-SUM BCE the same weight reads 21 x 7.76 = 163</a:t>
+              <a:t>L_presence is meaned over the 21 phases while L_magnitude sums them, so against a per-phase-SUM BCE the same weight reads 21 x 0.25 = ~5.3 (the reversed trial-22 dials ran 21 x 7.76 = 163)</a:t>
             </a:r>
           </a:p>
         </p:txBody>
@@ -25686,7 +25686,7 @@
                   <a:srgbClr val="1A2238"/>
                 </a:solidFill>
               </a:rPr>
-              <a:t>retrained + re-tuned</a:t>
+              <a:t>measured, not adopted</a:t>
             </a:r>
           </a:p>
           <a:p>
@@ -25697,7 +25697,7 @@
                   <a:srgbClr val="8A93A3"/>
                 </a:solidFill>
               </a:rPr>
-              <a:t>on the traced tiers;</a:t>
+              <a:t>traced heads lost on</a:t>
             </a:r>
           </a:p>
           <a:p>
@@ -25708,7 +25708,18 @@
                   <a:srgbClr val="8A93A3"/>
                 </a:solidFill>
               </a:rPr>
-              <a:t>encoder swap is next</a:t>
+              <a:t>real rocks; encoder</a:t>
+            </a:r>
+          </a:p>
+          <a:p>
+            <a:pPr algn="ctr"/>
+            <a:r>
+              <a:rPr sz="900" b="0">
+                <a:solidFill>
+                  <a:srgbClr val="8A93A3"/>
+                </a:solidFill>
+              </a:rPr>
+              <a:t>swap is next</a:t>
             </a:r>
           </a:p>
         </p:txBody>
@@ -25820,7 +25831,7 @@
                   <a:srgbClr val="1A2238"/>
                 </a:solidFill>
               </a:rPr>
-              <a:t>the corpus was regenerated end to end in July 2026: 3.5x the bulks (scaling said bulks are where the nats are, and draws flatten past ~24), a trace-conditional (P, H2O) proposal replacing the broad box, and a valtest roster grown to 2,000 bulks by extension -- prior val/test assignments are frozen, so committed rows never move between splits. Test stays sealed.</a:t>
+              <a:t>the corpus was regenerated end to end in July 2026: 3.5x the bulks (scaling said bulks are where the nats are, and draws flatten past ~24), a trace-conditional (P, H2O) proposal replacing the broad box, and a valtest roster grown to 2,000 bulks by extension -- prior val/test assignments are frozen, so committed rows never move between splits.</a:t>
             </a:r>
           </a:p>
         </p:txBody>

--- a/slides/overview.pptx
+++ b/slides/overview.pptx
@@ -27,6 +27,7 @@
     <p:sldId id="275" r:id="rId27"/>
     <p:sldId id="276" r:id="rId28"/>
     <p:sldId id="277" r:id="rId29"/>
+    <p:sldId id="278" r:id="rId30"/>
   </p:sldIdLst>
   <p:sldSz cx="12191695" cy="6858000" type="screen4x3"/>
   <p:notesSz cx="6858000" cy="9144000"/>
@@ -1504,6 +1505,76 @@
           <a:p>
             <a:r>
               <a:t>View 2 from heads.md, modernized to the locked corpus design: crystals-renormalized (no residual-melt row -- melt-fraction head dropped), composition shared across scenarios (CompHead reads h only), no inference-time mass-balance checkmark (closure is teacher-forced at training; the inference residual as OOD signal is an open rethink). Marginal view = projection of these scenarios; scenarios are the primary object. The joint-sampling mechanism exists (two-step ancestral sampling: presence Bernoullis -&gt; support, then the support-conditioned magnitude Dirichlet and CondHead both condition on it -- scripts/view/scenario_view.py); per-scenario mode shares and conditions are genuinely re-predicted per support. Numbers illustrative.</a:t>
+            </a:r>
+          </a:p>
+        </p:txBody>
+      </p:sp>
+      <p:sp>
+        <p:nvSpPr>
+          <p:cNvPr id="4" name="Slide Number Placeholder 3"/>
+          <p:cNvSpPr>
+            <a:spLocks noGrp="1"/>
+          </p:cNvSpPr>
+          <p:nvPr>
+            <p:ph type="sldNum" idx="5" sz="quarter"/>
+          </p:nvPr>
+        </p:nvSpPr>
+        <p:spPr/>
+      </p:sp>
+    </p:spTree>
+  </p:cSld>
+  <p:clrMapOvr>
+    <a:masterClrMapping/>
+  </p:clrMapOvr>
+</p:notes>
+</file>
+
+<file path=ppt/notesSlides/notesSlide23.xml><?xml version="1.0" encoding="utf-8"?>
+<p:notes xmlns:a="http://schemas.openxmlformats.org/drawingml/2006/main" xmlns:p="http://schemas.openxmlformats.org/presentationml/2006/main" xmlns:r="http://schemas.openxmlformats.org/officeDocument/2006/relationships">
+  <p:cSld>
+    <p:spTree>
+      <p:nvGrpSpPr>
+        <p:cNvPr id="1" name=""/>
+        <p:cNvGrpSpPr/>
+        <p:nvPr/>
+      </p:nvGrpSpPr>
+      <p:grpSpPr>
+        <a:xfrm>
+          <a:off x="0" y="0"/>
+          <a:ext cx="0" cy="0"/>
+          <a:chOff x="0" y="0"/>
+          <a:chExt cx="0" cy="0"/>
+        </a:xfrm>
+      </p:grpSpPr>
+      <p:sp>
+        <p:nvSpPr>
+          <p:cNvPr id="2" name="Slide Image Placeholder 1"/>
+          <p:cNvSpPr>
+            <a:spLocks noGrp="1"/>
+          </p:cNvSpPr>
+          <p:nvPr>
+            <p:ph type="sldImg" idx="2"/>
+          </p:nvPr>
+        </p:nvSpPr>
+        <p:spPr/>
+      </p:sp>
+      <p:sp>
+        <p:nvSpPr>
+          <p:cNvPr id="3" name="Notes Placeholder 2"/>
+          <p:cNvSpPr>
+            <a:spLocks noGrp="1"/>
+          </p:cNvSpPr>
+          <p:nvPr>
+            <p:ph type="body" idx="3" sz="quarter"/>
+          </p:nvPr>
+        </p:nvSpPr>
+        <p:spPr/>
+        <p:txBody>
+          <a:bodyPr/>
+          <a:lstStyle/>
+          <a:p>
+            <a:r>
+              <a:t>Proposal slide for the ModeHead dirichlet layer (mixture), built 2026-08-04 behind the K=1-identity `mode_n_components` dial -- no trained checkpoint yet, so the canonical output is unchanged; drawn so the contrast with the two current-output slides is visual. Motivating measurements: 45% of sampled bulks bimodal in conditional amp proportion (2026-07-17 corpus exam), 34% of testable bimodal bulks still bimodal within their dominant support (the part support-conditioning cannot represent); amp two-sided PIT groups 0.026 -&gt; 0.114 when support-conditioning landed (truth escaping both tails = mean parked between humps); real-rock residual heavier-tailed than any Beta at the fitted mean. Design locked with the owner: K=2 fixed (not an HPO dial yet), assemblage-level components (one gate choosing whole alpha vectors -- on a simplex a per-phase mixture is not even coherent, and the humps co-vary through the shared hidden (P, H2O) path, cf. the 51% amp&lt;-&gt;opx switch), no gate regularizer in the first build (gate entropy is a read-after diagnostic; collapse = H~0 everywhere plus identical components), all-rock encoder with the allrock-tuned dials, control = joint_heads_allrock_tuned_seed0 as trained. Loss is logsumexp(log w_k + log Dir_k) on the present support -- CondHead's GMM pattern moved onto the Dirichlet. Build gate: K=1 under the new code must reproduce production metrics to float precision before any K=2 run. Old broad-draw corpus; verdict on the real-rock benchmark, val only, test untouched.</a:t>
             </a:r>
           </a:p>
         </p:txBody>
@@ -18975,7 +19046,7 @@
                   <a:srgbClr val="2E5BFF"/>
                 </a:solidFill>
               </a:rPr>
-              <a:t>HEADS</a:t>
+              <a:t>HEADS -- CURRENT CANONICAL OUTPUT</a:t>
             </a:r>
           </a:p>
         </p:txBody>
@@ -21286,7 +21357,7 @@
                   <a:srgbClr val="2E5BFF"/>
                 </a:solidFill>
               </a:rPr>
-              <a:t>HEADS</a:t>
+              <a:t>HEADS -- CURRENT CANONICAL OUTPUT</a:t>
             </a:r>
           </a:p>
         </p:txBody>
@@ -21641,6 +21712,1536 @@
                 </a:solidFill>
               </a:rPr>
               <a:t>per-phase composition (An#, Mg#) is bulk-controlled -- one shared band across scenarios, not re-predicted per scenario. Each scenario is a falsifiable hypothesis: amphibole in thin section selects A, and with it A's conditions.</a:t>
+            </a:r>
+          </a:p>
+        </p:txBody>
+      </p:sp>
+    </p:spTree>
+  </p:cSld>
+  <p:clrMapOvr>
+    <a:masterClrMapping/>
+  </p:clrMapOvr>
+</p:sld>
+</file>
+
+<file path=ppt/slides/slide23.xml><?xml version="1.0" encoding="utf-8"?>
+<p:sld xmlns:a="http://schemas.openxmlformats.org/drawingml/2006/main" xmlns:p="http://schemas.openxmlformats.org/presentationml/2006/main" xmlns:r="http://schemas.openxmlformats.org/officeDocument/2006/relationships">
+  <p:cSld>
+    <p:spTree>
+      <p:nvGrpSpPr>
+        <p:cNvPr id="1" name=""/>
+        <p:cNvGrpSpPr/>
+        <p:nvPr/>
+      </p:nvGrpSpPr>
+      <p:grpSpPr/>
+      <p:sp>
+        <p:nvSpPr>
+          <p:cNvPr id="2" name="TextBox 1"/>
+          <p:cNvSpPr txBox="1"/>
+          <p:nvPr/>
+        </p:nvSpPr>
+        <p:spPr>
+          <a:xfrm>
+            <a:off x="502920" y="274320"/>
+            <a:ext cx="10972800" cy="365760"/>
+          </a:xfrm>
+          <a:prstGeom prst="rect">
+            <a:avLst/>
+          </a:prstGeom>
+          <a:noFill/>
+        </p:spPr>
+        <p:txBody>
+          <a:bodyPr wrap="square">
+            <a:spAutoFit/>
+          </a:bodyPr>
+          <a:lstStyle/>
+          <a:p>
+            <a:pPr algn="l"/>
+            <a:r>
+              <a:rPr sz="1300" b="1">
+                <a:solidFill>
+                  <a:srgbClr val="2E5BFF"/>
+                </a:solidFill>
+              </a:rPr>
+              <a:t>HEADS -- PROPOSED CANONICAL OUTPUT (K=2 DISTRIBUTIONS)</a:t>
+            </a:r>
+          </a:p>
+        </p:txBody>
+      </p:sp>
+      <p:sp>
+        <p:nvSpPr>
+          <p:cNvPr id="3" name="TextBox 2"/>
+          <p:cNvSpPr txBox="1"/>
+          <p:nvPr/>
+        </p:nvSpPr>
+        <p:spPr>
+          <a:xfrm>
+            <a:off x="502920" y="603504"/>
+            <a:ext cx="11155680" cy="731520"/>
+          </a:xfrm>
+          <a:prstGeom prst="rect">
+            <a:avLst/>
+          </a:prstGeom>
+          <a:noFill/>
+        </p:spPr>
+        <p:txBody>
+          <a:bodyPr wrap="square">
+            <a:spAutoFit/>
+          </a:bodyPr>
+          <a:lstStyle/>
+          <a:p>
+            <a:pPr algn="l"/>
+            <a:r>
+              <a:rPr sz="2600" b="1">
+                <a:solidFill>
+                  <a:srgbClr val="1A2238"/>
+                </a:solidFill>
+              </a:rPr>
+              <a:t>Proposed: the ModeHead dirichlet layer (mixture) -- built, not yet trained</a:t>
+            </a:r>
+          </a:p>
+        </p:txBody>
+      </p:sp>
+      <p:sp>
+        <p:nvSpPr>
+          <p:cNvPr id="4" name="TextBox 3"/>
+          <p:cNvSpPr txBox="1"/>
+          <p:nvPr/>
+        </p:nvSpPr>
+        <p:spPr>
+          <a:xfrm>
+            <a:off x="502920" y="1051560"/>
+            <a:ext cx="11155680" cy="731520"/>
+          </a:xfrm>
+          <a:prstGeom prst="rect">
+            <a:avLst/>
+          </a:prstGeom>
+          <a:noFill/>
+        </p:spPr>
+        <p:txBody>
+          <a:bodyPr wrap="square">
+            <a:spAutoFit/>
+          </a:bodyPr>
+          <a:lstStyle/>
+          <a:p>
+            <a:pPr algn="l"/>
+            <a:r>
+              <a:rPr sz="1300" b="0">
+                <a:solidFill>
+                  <a:srgbClr val="8A93A3"/>
+                </a:solidFill>
+              </a:rPr>
+              <a:t>same bulk, same h, same presence Bernoullis -- only the 'how much, given this mineral set' answer changes: two full-assemblage components chosen by a gate, instead of one Dirichlet per (rock, support)</a:t>
+            </a:r>
+          </a:p>
+        </p:txBody>
+      </p:sp>
+      <p:sp>
+        <p:nvSpPr>
+          <p:cNvPr id="5" name="TextBox 4"/>
+          <p:cNvSpPr txBox="1"/>
+          <p:nvPr/>
+        </p:nvSpPr>
+        <p:spPr>
+          <a:xfrm>
+            <a:off x="502920" y="1645920"/>
+            <a:ext cx="11155680" cy="731520"/>
+          </a:xfrm>
+          <a:prstGeom prst="rect">
+            <a:avLst/>
+          </a:prstGeom>
+          <a:noFill/>
+        </p:spPr>
+        <p:txBody>
+          <a:bodyPr wrap="square">
+            <a:spAutoFit/>
+          </a:bodyPr>
+          <a:lstStyle/>
+          <a:p>
+            <a:pPr algn="l"/>
+            <a:r>
+              <a:rPr sz="1200" b="0">
+                <a:solidFill>
+                  <a:srgbClr val="1A2238"/>
+                </a:solidFill>
+              </a:rPr>
+              <a:t>amphibole's conditional share, one fixed support (same minerals present, path deep-wet or shallow-dry):</a:t>
+            </a:r>
+          </a:p>
+        </p:txBody>
+      </p:sp>
+      <p:sp>
+        <p:nvSpPr>
+          <p:cNvPr id="6" name="Freeform 5"/>
+          <p:cNvSpPr/>
+          <p:nvPr/>
+        </p:nvSpPr>
+        <p:spPr>
+          <a:xfrm>
+            <a:off x="822960" y="2148840"/>
+            <a:ext cx="2926080" cy="1188720"/>
+          </a:xfrm>
+          <a:custGeom>
+            <a:avLst/>
+            <a:gdLst/>
+            <a:ahLst/>
+            <a:cxnLst/>
+            <a:rect l="l" t="t" r="r" b="b"/>
+            <a:pathLst>
+              <a:path w="2926080" h="1188720">
+                <a:moveTo>
+                  <a:pt x="0" y="1188720"/>
+                </a:moveTo>
+                <a:lnTo>
+                  <a:pt x="0" y="1175468"/>
+                </a:lnTo>
+                <a:lnTo>
+                  <a:pt x="60960" y="1146313"/>
+                </a:lnTo>
+                <a:lnTo>
+                  <a:pt x="121920" y="1074642"/>
+                </a:lnTo>
+                <a:lnTo>
+                  <a:pt x="182880" y="930747"/>
+                </a:lnTo>
+                <a:lnTo>
+                  <a:pt x="243840" y="698322"/>
+                </a:lnTo>
+                <a:lnTo>
+                  <a:pt x="304800" y="405067"/>
+                </a:lnTo>
+                <a:lnTo>
+                  <a:pt x="365760" y="136029"/>
+                </a:lnTo>
+                <a:lnTo>
+                  <a:pt x="426720" y="0"/>
+                </a:lnTo>
+                <a:lnTo>
+                  <a:pt x="487680" y="60327"/>
+                </a:lnTo>
+                <a:lnTo>
+                  <a:pt x="548640" y="288305"/>
+                </a:lnTo>
+                <a:lnTo>
+                  <a:pt x="609600" y="584729"/>
+                </a:lnTo>
+                <a:lnTo>
+                  <a:pt x="670560" y="848116"/>
+                </a:lnTo>
+                <a:lnTo>
+                  <a:pt x="731520" y="1027149"/>
+                </a:lnTo>
+                <a:lnTo>
+                  <a:pt x="792480" y="1123853"/>
+                </a:lnTo>
+                <a:lnTo>
+                  <a:pt x="853440" y="1165256"/>
+                </a:lnTo>
+                <a:lnTo>
+                  <a:pt x="914400" y="1176628"/>
+                </a:lnTo>
+                <a:lnTo>
+                  <a:pt x="975360" y="1170496"/>
+                </a:lnTo>
+                <a:lnTo>
+                  <a:pt x="1036320" y="1146969"/>
+                </a:lnTo>
+                <a:lnTo>
+                  <a:pt x="1097280" y="1097886"/>
+                </a:lnTo>
+                <a:lnTo>
+                  <a:pt x="1158239" y="1012517"/>
+                </a:lnTo>
+                <a:lnTo>
+                  <a:pt x="1219200" y="885597"/>
+                </a:lnTo>
+                <a:lnTo>
+                  <a:pt x="1280160" y="726470"/>
+                </a:lnTo>
+                <a:lnTo>
+                  <a:pt x="1341120" y="563869"/>
+                </a:lnTo>
+                <a:lnTo>
+                  <a:pt x="1402080" y="440005"/>
+                </a:lnTo>
+                <a:lnTo>
+                  <a:pt x="1463040" y="393483"/>
+                </a:lnTo>
+                <a:lnTo>
+                  <a:pt x="1524000" y="440005"/>
+                </a:lnTo>
+                <a:lnTo>
+                  <a:pt x="1584960" y="563869"/>
+                </a:lnTo>
+                <a:lnTo>
+                  <a:pt x="1645920" y="726470"/>
+                </a:lnTo>
+                <a:lnTo>
+                  <a:pt x="1706880" y="885598"/>
+                </a:lnTo>
+                <a:lnTo>
+                  <a:pt x="1767840" y="1012523"/>
+                </a:lnTo>
+                <a:lnTo>
+                  <a:pt x="1828800" y="1097934"/>
+                </a:lnTo>
+                <a:lnTo>
+                  <a:pt x="1889760" y="1147255"/>
+                </a:lnTo>
+                <a:lnTo>
+                  <a:pt x="1950720" y="1171932"/>
+                </a:lnTo>
+                <a:lnTo>
+                  <a:pt x="2011680" y="1182695"/>
+                </a:lnTo>
+                <a:lnTo>
+                  <a:pt x="2072640" y="1186803"/>
+                </a:lnTo>
+                <a:lnTo>
+                  <a:pt x="2133600" y="1188179"/>
+                </a:lnTo>
+                <a:lnTo>
+                  <a:pt x="2194560" y="1188584"/>
+                </a:lnTo>
+                <a:lnTo>
+                  <a:pt x="2255520" y="1188690"/>
+                </a:lnTo>
+                <a:lnTo>
+                  <a:pt x="2316480" y="1188714"/>
+                </a:lnTo>
+                <a:lnTo>
+                  <a:pt x="2377440" y="1188718"/>
+                </a:lnTo>
+                <a:lnTo>
+                  <a:pt x="2438400" y="1188719"/>
+                </a:lnTo>
+                <a:lnTo>
+                  <a:pt x="2499360" y="1188719"/>
+                </a:lnTo>
+                <a:lnTo>
+                  <a:pt x="2560320" y="1188719"/>
+                </a:lnTo>
+                <a:lnTo>
+                  <a:pt x="2621280" y="1188719"/>
+                </a:lnTo>
+                <a:lnTo>
+                  <a:pt x="2682240" y="1188719"/>
+                </a:lnTo>
+                <a:lnTo>
+                  <a:pt x="2743200" y="1188719"/>
+                </a:lnTo>
+                <a:lnTo>
+                  <a:pt x="2804160" y="1188719"/>
+                </a:lnTo>
+                <a:lnTo>
+                  <a:pt x="2865120" y="1188719"/>
+                </a:lnTo>
+                <a:lnTo>
+                  <a:pt x="2926080" y="1188719"/>
+                </a:lnTo>
+                <a:lnTo>
+                  <a:pt x="2926080" y="1188720"/>
+                </a:lnTo>
+                <a:close/>
+              </a:path>
+            </a:pathLst>
+          </a:custGeom>
+          <a:solidFill>
+            <a:srgbClr val="C3E3DF"/>
+          </a:solidFill>
+          <a:ln w="25400">
+            <a:solidFill>
+              <a:srgbClr val="2A9D8F"/>
+            </a:solidFill>
+          </a:ln>
+          <a:effectLst/>
+        </p:spPr>
+        <p:style>
+          <a:lnRef idx="1">
+            <a:schemeClr val="accent1"/>
+          </a:lnRef>
+          <a:fillRef idx="3">
+            <a:schemeClr val="accent1"/>
+          </a:fillRef>
+          <a:effectRef idx="2">
+            <a:schemeClr val="accent1"/>
+          </a:effectRef>
+          <a:fontRef idx="minor">
+            <a:schemeClr val="lt1"/>
+          </a:fontRef>
+        </p:style>
+        <p:txBody>
+          <a:bodyPr rtlCol="0" anchor="ctr"/>
+          <a:lstStyle/>
+          <a:p>
+            <a:pPr algn="ctr"/>
+          </a:p>
+        </p:txBody>
+      </p:sp>
+      <p:cxnSp>
+        <p:nvCxnSpPr>
+          <p:cNvPr id="7" name="Connector 6"/>
+          <p:cNvCxnSpPr/>
+          <p:nvPr/>
+        </p:nvCxnSpPr>
+        <p:spPr>
+          <a:xfrm>
+            <a:off x="822960" y="3337560"/>
+            <a:ext cx="2926080" cy="0"/>
+          </a:xfrm>
+          <a:prstGeom prst="bentConnector3">
+            <a:avLst/>
+          </a:prstGeom>
+          <a:ln w="12700">
+            <a:solidFill>
+              <a:srgbClr val="8A93A3"/>
+            </a:solidFill>
+          </a:ln>
+          <a:effectLst/>
+        </p:spPr>
+        <p:style>
+          <a:lnRef idx="2">
+            <a:schemeClr val="accent1"/>
+          </a:lnRef>
+          <a:fillRef idx="0">
+            <a:schemeClr val="accent1"/>
+          </a:fillRef>
+          <a:effectRef idx="1">
+            <a:schemeClr val="accent1"/>
+          </a:effectRef>
+          <a:fontRef idx="minor">
+            <a:schemeClr val="tx1"/>
+          </a:fontRef>
+        </p:style>
+      </p:cxnSp>
+      <p:sp>
+        <p:nvSpPr>
+          <p:cNvPr id="8" name="TextBox 7"/>
+          <p:cNvSpPr txBox="1"/>
+          <p:nvPr/>
+        </p:nvSpPr>
+        <p:spPr>
+          <a:xfrm>
+            <a:off x="640080" y="3383280"/>
+            <a:ext cx="3291840" cy="365760"/>
+          </a:xfrm>
+          <a:prstGeom prst="rect">
+            <a:avLst/>
+          </a:prstGeom>
+          <a:noFill/>
+        </p:spPr>
+        <p:txBody>
+          <a:bodyPr wrap="square">
+            <a:spAutoFit/>
+          </a:bodyPr>
+          <a:lstStyle/>
+          <a:p>
+            <a:pPr algn="ctr"/>
+            <a:r>
+              <a:rPr sz="1200" b="1">
+                <a:solidFill>
+                  <a:srgbClr val="1A2238"/>
+                </a:solidFill>
+              </a:rPr>
+              <a:t>truth across paths: two humps</a:t>
+            </a:r>
+          </a:p>
+        </p:txBody>
+      </p:sp>
+      <p:sp>
+        <p:nvSpPr>
+          <p:cNvPr id="9" name="Freeform 8"/>
+          <p:cNvSpPr/>
+          <p:nvPr/>
+        </p:nvSpPr>
+        <p:spPr>
+          <a:xfrm>
+            <a:off x="4617720" y="2148840"/>
+            <a:ext cx="2926080" cy="1188720"/>
+          </a:xfrm>
+          <a:custGeom>
+            <a:avLst/>
+            <a:gdLst/>
+            <a:ahLst/>
+            <a:cxnLst/>
+            <a:rect l="l" t="t" r="r" b="b"/>
+            <a:pathLst>
+              <a:path w="2926080" h="1188720">
+                <a:moveTo>
+                  <a:pt x="0" y="1188720"/>
+                </a:moveTo>
+                <a:lnTo>
+                  <a:pt x="0" y="1005295"/>
+                </a:lnTo>
+                <a:lnTo>
+                  <a:pt x="60960" y="951098"/>
+                </a:lnTo>
+                <a:lnTo>
+                  <a:pt x="121920" y="886769"/>
+                </a:lnTo>
+                <a:lnTo>
+                  <a:pt x="182880" y="812356"/>
+                </a:lnTo>
+                <a:lnTo>
+                  <a:pt x="243840" y="728567"/>
+                </a:lnTo>
+                <a:lnTo>
+                  <a:pt x="304800" y="636872"/>
+                </a:lnTo>
+                <a:lnTo>
+                  <a:pt x="365760" y="539550"/>
+                </a:lnTo>
+                <a:lnTo>
+                  <a:pt x="426720" y="439654"/>
+                </a:lnTo>
+                <a:lnTo>
+                  <a:pt x="487680" y="340899"/>
+                </a:lnTo>
+                <a:lnTo>
+                  <a:pt x="548640" y="247457"/>
+                </a:lnTo>
+                <a:lnTo>
+                  <a:pt x="609600" y="163682"/>
+                </a:lnTo>
+                <a:lnTo>
+                  <a:pt x="670560" y="93778"/>
+                </a:lnTo>
+                <a:lnTo>
+                  <a:pt x="731520" y="41452"/>
+                </a:lnTo>
+                <a:lnTo>
+                  <a:pt x="792479" y="9591"/>
+                </a:lnTo>
+                <a:lnTo>
+                  <a:pt x="853440" y="0"/>
+                </a:lnTo>
+                <a:lnTo>
+                  <a:pt x="914400" y="13225"/>
+                </a:lnTo>
+                <a:lnTo>
+                  <a:pt x="975360" y="48512"/>
+                </a:lnTo>
+                <a:lnTo>
+                  <a:pt x="1036320" y="103869"/>
+                </a:lnTo>
+                <a:lnTo>
+                  <a:pt x="1097280" y="176259"/>
+                </a:lnTo>
+                <a:lnTo>
+                  <a:pt x="1158240" y="261871"/>
+                </a:lnTo>
+                <a:lnTo>
+                  <a:pt x="1219200" y="356455"/>
+                </a:lnTo>
+                <a:lnTo>
+                  <a:pt x="1280160" y="455664"/>
+                </a:lnTo>
+                <a:lnTo>
+                  <a:pt x="1341120" y="555382"/>
+                </a:lnTo>
+                <a:lnTo>
+                  <a:pt x="1402080" y="651990"/>
+                </a:lnTo>
+                <a:lnTo>
+                  <a:pt x="1463040" y="742552"/>
+                </a:lnTo>
+                <a:lnTo>
+                  <a:pt x="1524000" y="824919"/>
+                </a:lnTo>
+                <a:lnTo>
+                  <a:pt x="1584960" y="897748"/>
+                </a:lnTo>
+                <a:lnTo>
+                  <a:pt x="1645920" y="960444"/>
+                </a:lnTo>
+                <a:lnTo>
+                  <a:pt x="1706880" y="1013052"/>
+                </a:lnTo>
+                <a:lnTo>
+                  <a:pt x="1767840" y="1056118"/>
+                </a:lnTo>
+                <a:lnTo>
+                  <a:pt x="1828800" y="1090539"/>
+                </a:lnTo>
+                <a:lnTo>
+                  <a:pt x="1889760" y="1117414"/>
+                </a:lnTo>
+                <a:lnTo>
+                  <a:pt x="1950720" y="1137922"/>
+                </a:lnTo>
+                <a:lnTo>
+                  <a:pt x="2011680" y="1153223"/>
+                </a:lnTo>
+                <a:lnTo>
+                  <a:pt x="2072640" y="1164389"/>
+                </a:lnTo>
+                <a:lnTo>
+                  <a:pt x="2133600" y="1172361"/>
+                </a:lnTo>
+                <a:lnTo>
+                  <a:pt x="2194560" y="1177931"/>
+                </a:lnTo>
+                <a:lnTo>
+                  <a:pt x="2255520" y="1181741"/>
+                </a:lnTo>
+                <a:lnTo>
+                  <a:pt x="2316480" y="1184291"/>
+                </a:lnTo>
+                <a:lnTo>
+                  <a:pt x="2377440" y="1185963"/>
+                </a:lnTo>
+                <a:lnTo>
+                  <a:pt x="2438400" y="1187037"/>
+                </a:lnTo>
+                <a:lnTo>
+                  <a:pt x="2499360" y="1187712"/>
+                </a:lnTo>
+                <a:lnTo>
+                  <a:pt x="2560320" y="1188128"/>
+                </a:lnTo>
+                <a:lnTo>
+                  <a:pt x="2621280" y="1188378"/>
+                </a:lnTo>
+                <a:lnTo>
+                  <a:pt x="2682240" y="1188527"/>
+                </a:lnTo>
+                <a:lnTo>
+                  <a:pt x="2743200" y="1188613"/>
+                </a:lnTo>
+                <a:lnTo>
+                  <a:pt x="2804160" y="1188661"/>
+                </a:lnTo>
+                <a:lnTo>
+                  <a:pt x="2865120" y="1188688"/>
+                </a:lnTo>
+                <a:lnTo>
+                  <a:pt x="2926080" y="1188703"/>
+                </a:lnTo>
+                <a:lnTo>
+                  <a:pt x="2926080" y="1188720"/>
+                </a:lnTo>
+                <a:close/>
+              </a:path>
+            </a:pathLst>
+          </a:custGeom>
+          <a:solidFill>
+            <a:srgbClr val="EDC7C3"/>
+          </a:solidFill>
+          <a:ln w="25400">
+            <a:solidFill>
+              <a:srgbClr val="C0392B"/>
+            </a:solidFill>
+          </a:ln>
+          <a:effectLst/>
+        </p:spPr>
+        <p:style>
+          <a:lnRef idx="1">
+            <a:schemeClr val="accent1"/>
+          </a:lnRef>
+          <a:fillRef idx="3">
+            <a:schemeClr val="accent1"/>
+          </a:fillRef>
+          <a:effectRef idx="2">
+            <a:schemeClr val="accent1"/>
+          </a:effectRef>
+          <a:fontRef idx="minor">
+            <a:schemeClr val="lt1"/>
+          </a:fontRef>
+        </p:style>
+        <p:txBody>
+          <a:bodyPr rtlCol="0" anchor="ctr"/>
+          <a:lstStyle/>
+          <a:p>
+            <a:pPr algn="ctr"/>
+          </a:p>
+        </p:txBody>
+      </p:sp>
+      <p:cxnSp>
+        <p:nvCxnSpPr>
+          <p:cNvPr id="10" name="Connector 9"/>
+          <p:cNvCxnSpPr/>
+          <p:nvPr/>
+        </p:nvCxnSpPr>
+        <p:spPr>
+          <a:xfrm>
+            <a:off x="4617720" y="3337560"/>
+            <a:ext cx="2926080" cy="0"/>
+          </a:xfrm>
+          <a:prstGeom prst="bentConnector3">
+            <a:avLst/>
+          </a:prstGeom>
+          <a:ln w="12700">
+            <a:solidFill>
+              <a:srgbClr val="8A93A3"/>
+            </a:solidFill>
+          </a:ln>
+          <a:effectLst/>
+        </p:spPr>
+        <p:style>
+          <a:lnRef idx="2">
+            <a:schemeClr val="accent1"/>
+          </a:lnRef>
+          <a:fillRef idx="0">
+            <a:schemeClr val="accent1"/>
+          </a:fillRef>
+          <a:effectRef idx="1">
+            <a:schemeClr val="accent1"/>
+          </a:effectRef>
+          <a:fontRef idx="minor">
+            <a:schemeClr val="tx1"/>
+          </a:fontRef>
+        </p:style>
+      </p:cxnSp>
+      <p:sp>
+        <p:nvSpPr>
+          <p:cNvPr id="11" name="TextBox 10"/>
+          <p:cNvSpPr txBox="1"/>
+          <p:nvPr/>
+        </p:nvSpPr>
+        <p:spPr>
+          <a:xfrm>
+            <a:off x="4434840" y="3383280"/>
+            <a:ext cx="3291840" cy="365760"/>
+          </a:xfrm>
+          <a:prstGeom prst="rect">
+            <a:avLst/>
+          </a:prstGeom>
+          <a:noFill/>
+        </p:spPr>
+        <p:txBody>
+          <a:bodyPr wrap="square">
+            <a:spAutoFit/>
+          </a:bodyPr>
+          <a:lstStyle/>
+          <a:p>
+            <a:pPr algn="ctr"/>
+            <a:r>
+              <a:rPr sz="1200" b="1">
+                <a:solidFill>
+                  <a:srgbClr val="1A2238"/>
+                </a:solidFill>
+              </a:rPr>
+              <a:t>current: one Dirichlet -- mean in the valley</a:t>
+            </a:r>
+          </a:p>
+        </p:txBody>
+      </p:sp>
+      <p:sp>
+        <p:nvSpPr>
+          <p:cNvPr id="12" name="Freeform 11"/>
+          <p:cNvSpPr/>
+          <p:nvPr/>
+        </p:nvSpPr>
+        <p:spPr>
+          <a:xfrm>
+            <a:off x="8412480" y="2148840"/>
+            <a:ext cx="2926079" cy="1188720"/>
+          </a:xfrm>
+          <a:custGeom>
+            <a:avLst/>
+            <a:gdLst/>
+            <a:ahLst/>
+            <a:cxnLst/>
+            <a:rect l="l" t="t" r="r" b="b"/>
+            <a:pathLst>
+              <a:path w="2926079" h="1188720">
+                <a:moveTo>
+                  <a:pt x="0" y="1188720"/>
+                </a:moveTo>
+                <a:lnTo>
+                  <a:pt x="0" y="1159801"/>
+                </a:lnTo>
+                <a:lnTo>
+                  <a:pt x="60960" y="1113093"/>
+                </a:lnTo>
+                <a:lnTo>
+                  <a:pt x="121919" y="1017380"/>
+                </a:lnTo>
+                <a:lnTo>
+                  <a:pt x="182879" y="852419"/>
+                </a:lnTo>
+                <a:lnTo>
+                  <a:pt x="243840" y="616866"/>
+                </a:lnTo>
+                <a:lnTo>
+                  <a:pt x="304800" y="346299"/>
+                </a:lnTo>
+                <a:lnTo>
+                  <a:pt x="365760" y="113590"/>
+                </a:lnTo>
+                <a:lnTo>
+                  <a:pt x="426720" y="0"/>
+                </a:lnTo>
+                <a:lnTo>
+                  <a:pt x="487680" y="50080"/>
+                </a:lnTo>
+                <a:lnTo>
+                  <a:pt x="548639" y="243826"/>
+                </a:lnTo>
+                <a:lnTo>
+                  <a:pt x="609599" y="509388"/>
+                </a:lnTo>
+                <a:lnTo>
+                  <a:pt x="670560" y="765499"/>
+                </a:lnTo>
+                <a:lnTo>
+                  <a:pt x="731520" y="959944"/>
+                </a:lnTo>
+                <a:lnTo>
+                  <a:pt x="792480" y="1080416"/>
+                </a:lnTo>
+                <a:lnTo>
+                  <a:pt x="853440" y="1140830"/>
+                </a:lnTo>
+                <a:lnTo>
+                  <a:pt x="914400" y="1161159"/>
+                </a:lnTo>
+                <a:lnTo>
+                  <a:pt x="975360" y="1154423"/>
+                </a:lnTo>
+                <a:lnTo>
+                  <a:pt x="1036319" y="1123358"/>
+                </a:lnTo>
+                <a:lnTo>
+                  <a:pt x="1097279" y="1063366"/>
+                </a:lnTo>
+                <a:lnTo>
+                  <a:pt x="1158239" y="968598"/>
+                </a:lnTo>
+                <a:lnTo>
+                  <a:pt x="1219200" y="839313"/>
+                </a:lnTo>
+                <a:lnTo>
+                  <a:pt x="1280160" y="688143"/>
+                </a:lnTo>
+                <a:lnTo>
+                  <a:pt x="1341120" y="541568"/>
+                </a:lnTo>
+                <a:lnTo>
+                  <a:pt x="1402080" y="433754"/>
+                </a:lnTo>
+                <a:lnTo>
+                  <a:pt x="1463039" y="393962"/>
+                </a:lnTo>
+                <a:lnTo>
+                  <a:pt x="1524000" y="433754"/>
+                </a:lnTo>
+                <a:lnTo>
+                  <a:pt x="1584960" y="541568"/>
+                </a:lnTo>
+                <a:lnTo>
+                  <a:pt x="1645920" y="688144"/>
+                </a:lnTo>
+                <a:lnTo>
+                  <a:pt x="1706880" y="839322"/>
+                </a:lnTo>
+                <a:lnTo>
+                  <a:pt x="1767840" y="968653"/>
+                </a:lnTo>
+                <a:lnTo>
+                  <a:pt x="1828800" y="1063643"/>
+                </a:lnTo>
+                <a:lnTo>
+                  <a:pt x="1889760" y="1124572"/>
+                </a:lnTo>
+                <a:lnTo>
+                  <a:pt x="1950719" y="1159032"/>
+                </a:lnTo>
+                <a:lnTo>
+                  <a:pt x="2011679" y="1176322"/>
+                </a:lnTo>
+                <a:lnTo>
+                  <a:pt x="2072640" y="1184047"/>
+                </a:lnTo>
+                <a:lnTo>
+                  <a:pt x="2133600" y="1187131"/>
+                </a:lnTo>
+                <a:lnTo>
+                  <a:pt x="2194560" y="1188232"/>
+                </a:lnTo>
+                <a:lnTo>
+                  <a:pt x="2255520" y="1188585"/>
+                </a:lnTo>
+                <a:lnTo>
+                  <a:pt x="2316480" y="1188686"/>
+                </a:lnTo>
+                <a:lnTo>
+                  <a:pt x="2377439" y="1188712"/>
+                </a:lnTo>
+                <a:lnTo>
+                  <a:pt x="2438400" y="1188718"/>
+                </a:lnTo>
+                <a:lnTo>
+                  <a:pt x="2499360" y="1188719"/>
+                </a:lnTo>
+                <a:lnTo>
+                  <a:pt x="2560320" y="1188719"/>
+                </a:lnTo>
+                <a:lnTo>
+                  <a:pt x="2621280" y="1188719"/>
+                </a:lnTo>
+                <a:lnTo>
+                  <a:pt x="2682240" y="1188719"/>
+                </a:lnTo>
+                <a:lnTo>
+                  <a:pt x="2743200" y="1188719"/>
+                </a:lnTo>
+                <a:lnTo>
+                  <a:pt x="2804160" y="1188719"/>
+                </a:lnTo>
+                <a:lnTo>
+                  <a:pt x="2865119" y="1188719"/>
+                </a:lnTo>
+                <a:lnTo>
+                  <a:pt x="2926079" y="1188719"/>
+                </a:lnTo>
+                <a:lnTo>
+                  <a:pt x="2926079" y="1188720"/>
+                </a:lnTo>
+                <a:close/>
+              </a:path>
+            </a:pathLst>
+          </a:custGeom>
+          <a:solidFill>
+            <a:srgbClr val="F8DDC7"/>
+          </a:solidFill>
+          <a:ln w="25400">
+            <a:solidFill>
+              <a:srgbClr val="E8883A"/>
+            </a:solidFill>
+          </a:ln>
+          <a:effectLst/>
+        </p:spPr>
+        <p:style>
+          <a:lnRef idx="1">
+            <a:schemeClr val="accent1"/>
+          </a:lnRef>
+          <a:fillRef idx="3">
+            <a:schemeClr val="accent1"/>
+          </a:fillRef>
+          <a:effectRef idx="2">
+            <a:schemeClr val="accent1"/>
+          </a:effectRef>
+          <a:fontRef idx="minor">
+            <a:schemeClr val="lt1"/>
+          </a:fontRef>
+        </p:style>
+        <p:txBody>
+          <a:bodyPr rtlCol="0" anchor="ctr"/>
+          <a:lstStyle/>
+          <a:p>
+            <a:pPr algn="ctr"/>
+          </a:p>
+        </p:txBody>
+      </p:sp>
+      <p:cxnSp>
+        <p:nvCxnSpPr>
+          <p:cNvPr id="13" name="Connector 12"/>
+          <p:cNvCxnSpPr/>
+          <p:nvPr/>
+        </p:nvCxnSpPr>
+        <p:spPr>
+          <a:xfrm>
+            <a:off x="8412480" y="3337560"/>
+            <a:ext cx="2926079" cy="0"/>
+          </a:xfrm>
+          <a:prstGeom prst="bentConnector3">
+            <a:avLst/>
+          </a:prstGeom>
+          <a:ln w="12700">
+            <a:solidFill>
+              <a:srgbClr val="8A93A3"/>
+            </a:solidFill>
+          </a:ln>
+          <a:effectLst/>
+        </p:spPr>
+        <p:style>
+          <a:lnRef idx="2">
+            <a:schemeClr val="accent1"/>
+          </a:lnRef>
+          <a:fillRef idx="0">
+            <a:schemeClr val="accent1"/>
+          </a:fillRef>
+          <a:effectRef idx="1">
+            <a:schemeClr val="accent1"/>
+          </a:effectRef>
+          <a:fontRef idx="minor">
+            <a:schemeClr val="tx1"/>
+          </a:fontRef>
+        </p:style>
+      </p:cxnSp>
+      <p:sp>
+        <p:nvSpPr>
+          <p:cNvPr id="14" name="TextBox 13"/>
+          <p:cNvSpPr txBox="1"/>
+          <p:nvPr/>
+        </p:nvSpPr>
+        <p:spPr>
+          <a:xfrm>
+            <a:off x="8229600" y="3383280"/>
+            <a:ext cx="3291840" cy="365760"/>
+          </a:xfrm>
+          <a:prstGeom prst="rect">
+            <a:avLst/>
+          </a:prstGeom>
+          <a:noFill/>
+        </p:spPr>
+        <p:txBody>
+          <a:bodyPr wrap="square">
+            <a:spAutoFit/>
+          </a:bodyPr>
+          <a:lstStyle/>
+          <a:p>
+            <a:pPr algn="ctr"/>
+            <a:r>
+              <a:rPr sz="1200" b="1">
+                <a:solidFill>
+                  <a:srgbClr val="1A2238"/>
+                </a:solidFill>
+              </a:rPr>
+              <a:t>proposed: K=2 -- mass on the humps</a:t>
+            </a:r>
+          </a:p>
+        </p:txBody>
+      </p:sp>
+      <p:sp>
+        <p:nvSpPr>
+          <p:cNvPr id="15" name="Rounded Rectangle 14"/>
+          <p:cNvSpPr/>
+          <p:nvPr/>
+        </p:nvSpPr>
+        <p:spPr>
+          <a:xfrm>
+            <a:off x="822960" y="4114800"/>
+            <a:ext cx="3291840" cy="1371600"/>
+          </a:xfrm>
+          <a:prstGeom prst="roundRect">
+            <a:avLst/>
+          </a:prstGeom>
+          <a:solidFill>
+            <a:srgbClr val="EAE8FB"/>
+          </a:solidFill>
+          <a:ln w="25400">
+            <a:solidFill>
+              <a:srgbClr val="6C5CE7"/>
+            </a:solidFill>
+          </a:ln>
+          <a:effectLst/>
+        </p:spPr>
+        <p:style>
+          <a:lnRef idx="1">
+            <a:schemeClr val="accent1"/>
+          </a:lnRef>
+          <a:fillRef idx="3">
+            <a:schemeClr val="accent1"/>
+          </a:fillRef>
+          <a:effectRef idx="2">
+            <a:schemeClr val="accent1"/>
+          </a:effectRef>
+          <a:fontRef idx="minor">
+            <a:schemeClr val="lt1"/>
+          </a:fontRef>
+        </p:style>
+        <p:txBody>
+          <a:bodyPr rtlCol="0" anchor="ctr" wrap="square"/>
+          <a:lstStyle/>
+          <a:p>
+            <a:pPr algn="ctr"/>
+            <a:r>
+              <a:rPr sz="1200" b="1">
+                <a:solidFill>
+                  <a:srgbClr val="1A2238"/>
+                </a:solidFill>
+              </a:rPr>
+              <a:t>gate (the new piece)</a:t>
+            </a:r>
+          </a:p>
+          <a:p>
+            <a:pPr algn="ctr"/>
+            <a:r>
+              <a:rPr sz="900" b="0">
+                <a:solidFill>
+                  <a:srgbClr val="8A93A3"/>
+                </a:solidFill>
+              </a:rPr>
+              <a:t>w = [0.60, 0.40] for this rock</a:t>
+            </a:r>
+          </a:p>
+          <a:p>
+            <a:pPr algn="ctr"/>
+            <a:r>
+              <a:rPr sz="900" b="0">
+                <a:solidFill>
+                  <a:srgbClr val="8A93A3"/>
+                </a:solidFill>
+              </a:rPr>
+              <a:t>softmax over 2 logits from the</a:t>
+            </a:r>
+          </a:p>
+          <a:p>
+            <a:pPr algn="ctr"/>
+            <a:r>
+              <a:rPr sz="900" b="0">
+                <a:solidFill>
+                  <a:srgbClr val="8A93A3"/>
+                </a:solidFill>
+              </a:rPr>
+              <a:t>magnitude trunk on [h, support]</a:t>
+            </a:r>
+          </a:p>
+          <a:p>
+            <a:pPr algn="ctr"/>
+            <a:r>
+              <a:rPr sz="900" b="0">
+                <a:solidFill>
+                  <a:srgbClr val="8A93A3"/>
+                </a:solidFill>
+              </a:rPr>
+              <a:t>H(w) -&gt; 0 = commits to one answer</a:t>
+            </a:r>
+          </a:p>
+        </p:txBody>
+      </p:sp>
+      <p:sp>
+        <p:nvSpPr>
+          <p:cNvPr id="16" name="Freeform 15"/>
+          <p:cNvSpPr/>
+          <p:nvPr/>
+        </p:nvSpPr>
+        <p:spPr>
+          <a:xfrm>
+            <a:off x="4617720" y="4434840"/>
+            <a:ext cx="2926080" cy="1005839"/>
+          </a:xfrm>
+          <a:custGeom>
+            <a:avLst/>
+            <a:gdLst/>
+            <a:ahLst/>
+            <a:cxnLst/>
+            <a:rect l="l" t="t" r="r" b="b"/>
+            <a:pathLst>
+              <a:path w="2926080" h="1005839">
+                <a:moveTo>
+                  <a:pt x="0" y="1005839"/>
+                </a:moveTo>
+                <a:lnTo>
+                  <a:pt x="0" y="1005838"/>
+                </a:lnTo>
+                <a:lnTo>
+                  <a:pt x="60960" y="1005836"/>
+                </a:lnTo>
+                <a:lnTo>
+                  <a:pt x="121920" y="1005827"/>
+                </a:lnTo>
+                <a:lnTo>
+                  <a:pt x="182880" y="1005804"/>
+                </a:lnTo>
+                <a:lnTo>
+                  <a:pt x="243840" y="1005740"/>
+                </a:lnTo>
+                <a:lnTo>
+                  <a:pt x="304800" y="1005578"/>
+                </a:lnTo>
+                <a:lnTo>
+                  <a:pt x="365760" y="1005188"/>
+                </a:lnTo>
+                <a:lnTo>
+                  <a:pt x="426720" y="1004299"/>
+                </a:lnTo>
+                <a:lnTo>
+                  <a:pt x="487680" y="1002387"/>
+                </a:lnTo>
+                <a:lnTo>
+                  <a:pt x="548640" y="998506"/>
+                </a:lnTo>
+                <a:lnTo>
+                  <a:pt x="609600" y="991075"/>
+                </a:lnTo>
+                <a:lnTo>
+                  <a:pt x="670560" y="977663"/>
+                </a:lnTo>
+                <a:lnTo>
+                  <a:pt x="731520" y="954876"/>
+                </a:lnTo>
+                <a:lnTo>
+                  <a:pt x="792479" y="918469"/>
+                </a:lnTo>
+                <a:lnTo>
+                  <a:pt x="853440" y="863867"/>
+                </a:lnTo>
+                <a:lnTo>
+                  <a:pt x="914400" y="787180"/>
+                </a:lnTo>
+                <a:lnTo>
+                  <a:pt x="975360" y="686640"/>
+                </a:lnTo>
+                <a:lnTo>
+                  <a:pt x="1036320" y="564183"/>
+                </a:lnTo>
+                <a:lnTo>
+                  <a:pt x="1097280" y="426629"/>
+                </a:lnTo>
+                <a:lnTo>
+                  <a:pt x="1158240" y="285865"/>
+                </a:lnTo>
+                <a:lnTo>
+                  <a:pt x="1219200" y="157584"/>
+                </a:lnTo>
+                <a:lnTo>
+                  <a:pt x="1280160" y="58588"/>
+                </a:lnTo>
+                <a:lnTo>
+                  <a:pt x="1341120" y="3228"/>
+                </a:lnTo>
+                <a:lnTo>
+                  <a:pt x="1402080" y="0"/>
+                </a:lnTo>
+                <a:lnTo>
+                  <a:pt x="1463040" y="49408"/>
+                </a:lnTo>
+                <a:lnTo>
+                  <a:pt x="1524000" y="143838"/>
+                </a:lnTo>
+                <a:lnTo>
+                  <a:pt x="1584960" y="269478"/>
+                </a:lnTo>
+                <a:lnTo>
+                  <a:pt x="1645920" y="409624"/>
+                </a:lnTo>
+                <a:lnTo>
+                  <a:pt x="1706880" y="548284"/>
+                </a:lnTo>
+                <a:lnTo>
+                  <a:pt x="1767840" y="673016"/>
+                </a:lnTo>
+                <a:lnTo>
+                  <a:pt x="1828800" y="776377"/>
+                </a:lnTo>
+                <a:lnTo>
+                  <a:pt x="1889760" y="855892"/>
+                </a:lnTo>
+                <a:lnTo>
+                  <a:pt x="1950720" y="912965"/>
+                </a:lnTo>
+                <a:lnTo>
+                  <a:pt x="2011680" y="951316"/>
+                </a:lnTo>
+                <a:lnTo>
+                  <a:pt x="2072640" y="975501"/>
+                </a:lnTo>
+                <a:lnTo>
+                  <a:pt x="2133600" y="989839"/>
+                </a:lnTo>
+                <a:lnTo>
+                  <a:pt x="2194560" y="997841"/>
+                </a:lnTo>
+                <a:lnTo>
+                  <a:pt x="2255520" y="1002050"/>
+                </a:lnTo>
+                <a:lnTo>
+                  <a:pt x="2316480" y="1004138"/>
+                </a:lnTo>
+                <a:lnTo>
+                  <a:pt x="2377440" y="1005115"/>
+                </a:lnTo>
+                <a:lnTo>
+                  <a:pt x="2438400" y="1005547"/>
+                </a:lnTo>
+                <a:lnTo>
+                  <a:pt x="2499360" y="1005728"/>
+                </a:lnTo>
+                <a:lnTo>
+                  <a:pt x="2560320" y="1005799"/>
+                </a:lnTo>
+                <a:lnTo>
+                  <a:pt x="2621280" y="1005826"/>
+                </a:lnTo>
+                <a:lnTo>
+                  <a:pt x="2682240" y="1005835"/>
+                </a:lnTo>
+                <a:lnTo>
+                  <a:pt x="2743200" y="1005838"/>
+                </a:lnTo>
+                <a:lnTo>
+                  <a:pt x="2804160" y="1005839"/>
+                </a:lnTo>
+                <a:lnTo>
+                  <a:pt x="2865120" y="1005839"/>
+                </a:lnTo>
+                <a:lnTo>
+                  <a:pt x="2926080" y="1005839"/>
+                </a:lnTo>
+                <a:lnTo>
+                  <a:pt x="2926080" y="1005839"/>
+                </a:lnTo>
+                <a:close/>
+              </a:path>
+            </a:pathLst>
+          </a:custGeom>
+          <a:solidFill>
+            <a:srgbClr val="BCEAE5"/>
+          </a:solidFill>
+          <a:ln w="25400">
+            <a:solidFill>
+              <a:srgbClr val="12B5A5"/>
+            </a:solidFill>
+          </a:ln>
+          <a:effectLst/>
+        </p:spPr>
+        <p:style>
+          <a:lnRef idx="1">
+            <a:schemeClr val="accent1"/>
+          </a:lnRef>
+          <a:fillRef idx="3">
+            <a:schemeClr val="accent1"/>
+          </a:fillRef>
+          <a:effectRef idx="2">
+            <a:schemeClr val="accent1"/>
+          </a:effectRef>
+          <a:fontRef idx="minor">
+            <a:schemeClr val="lt1"/>
+          </a:fontRef>
+        </p:style>
+        <p:txBody>
+          <a:bodyPr rtlCol="0" anchor="ctr"/>
+          <a:lstStyle/>
+          <a:p>
+            <a:pPr algn="ctr"/>
+          </a:p>
+        </p:txBody>
+      </p:sp>
+      <p:cxnSp>
+        <p:nvCxnSpPr>
+          <p:cNvPr id="17" name="Connector 16"/>
+          <p:cNvCxnSpPr/>
+          <p:nvPr/>
+        </p:nvCxnSpPr>
+        <p:spPr>
+          <a:xfrm>
+            <a:off x="4617720" y="5440679"/>
+            <a:ext cx="2926080" cy="0"/>
+          </a:xfrm>
+          <a:prstGeom prst="bentConnector3">
+            <a:avLst/>
+          </a:prstGeom>
+          <a:ln w="12700">
+            <a:solidFill>
+              <a:srgbClr val="8A93A3"/>
+            </a:solidFill>
+          </a:ln>
+          <a:effectLst/>
+        </p:spPr>
+        <p:style>
+          <a:lnRef idx="2">
+            <a:schemeClr val="accent1"/>
+          </a:lnRef>
+          <a:fillRef idx="0">
+            <a:schemeClr val="accent1"/>
+          </a:fillRef>
+          <a:effectRef idx="1">
+            <a:schemeClr val="accent1"/>
+          </a:effectRef>
+          <a:fontRef idx="minor">
+            <a:schemeClr val="tx1"/>
+          </a:fontRef>
+        </p:style>
+      </p:cxnSp>
+      <p:sp>
+        <p:nvSpPr>
+          <p:cNvPr id="18" name="TextBox 17"/>
+          <p:cNvSpPr txBox="1"/>
+          <p:nvPr/>
+        </p:nvSpPr>
+        <p:spPr>
+          <a:xfrm>
+            <a:off x="4434840" y="5486399"/>
+            <a:ext cx="3291840" cy="365760"/>
+          </a:xfrm>
+          <a:prstGeom prst="rect">
+            <a:avLst/>
+          </a:prstGeom>
+          <a:noFill/>
+        </p:spPr>
+        <p:txBody>
+          <a:bodyPr wrap="square">
+            <a:spAutoFit/>
+          </a:bodyPr>
+          <a:lstStyle/>
+          <a:p>
+            <a:pPr algn="ctr"/>
+            <a:r>
+              <a:rPr sz="1200" b="1">
+                <a:solidFill>
+                  <a:srgbClr val="1A2238"/>
+                </a:solidFill>
+              </a:rPr>
+              <a:t>plag: components coincide -- unimodal phases unchanged</a:t>
+            </a:r>
+          </a:p>
+        </p:txBody>
+      </p:sp>
+      <p:sp>
+        <p:nvSpPr>
+          <p:cNvPr id="19" name="Rounded Rectangle 18"/>
+          <p:cNvSpPr/>
+          <p:nvPr/>
+        </p:nvSpPr>
+        <p:spPr>
+          <a:xfrm>
+            <a:off x="8229600" y="4114800"/>
+            <a:ext cx="3383280" cy="1371600"/>
+          </a:xfrm>
+          <a:prstGeom prst="roundRect">
+            <a:avLst/>
+          </a:prstGeom>
+          <a:solidFill>
+            <a:srgbClr val="E1F1EF"/>
+          </a:solidFill>
+          <a:ln w="25400">
+            <a:solidFill>
+              <a:srgbClr val="2A9D8F"/>
+            </a:solidFill>
+          </a:ln>
+          <a:effectLst/>
+        </p:spPr>
+        <p:style>
+          <a:lnRef idx="1">
+            <a:schemeClr val="accent1"/>
+          </a:lnRef>
+          <a:fillRef idx="3">
+            <a:schemeClr val="accent1"/>
+          </a:fillRef>
+          <a:effectRef idx="2">
+            <a:schemeClr val="accent1"/>
+          </a:effectRef>
+          <a:fontRef idx="minor">
+            <a:schemeClr val="lt1"/>
+          </a:fontRef>
+        </p:style>
+        <p:txBody>
+          <a:bodyPr rtlCol="0" anchor="ctr" wrap="square"/>
+          <a:lstStyle/>
+          <a:p>
+            <a:pPr algn="ctr"/>
+            <a:r>
+              <a:rPr sz="1200" b="1">
+                <a:solidFill>
+                  <a:srgbClr val="1A2238"/>
+                </a:solidFill>
+              </a:rPr>
+              <a:t>scenario view gains one field</a:t>
+            </a:r>
+          </a:p>
+          <a:p>
+            <a:pPr algn="ctr"/>
+            <a:r>
+              <a:rPr sz="900" b="0">
+                <a:solidFill>
+                  <a:srgbClr val="8A93A3"/>
+                </a:solidFill>
+              </a:rPr>
+              <a:t>a sample = support -&gt; component</a:t>
+            </a:r>
+          </a:p>
+          <a:p>
+            <a:pPr algn="ctr"/>
+            <a:r>
+              <a:rPr sz="900" b="0">
+                <a:solidFill>
+                  <a:srgbClr val="8A93A3"/>
+                </a:solidFill>
+              </a:rPr>
+              <a:t>-&gt; abundances; each scenario now</a:t>
+            </a:r>
+          </a:p>
+          <a:p>
+            <a:pPr algn="ctr"/>
+            <a:r>
+              <a:rPr sz="900" b="0">
+                <a:solidFill>
+                  <a:srgbClr val="8A93A3"/>
+                </a:solidFill>
+              </a:rPr>
+              <a:t>commits to a hump instead of</a:t>
+            </a:r>
+          </a:p>
+          <a:p>
+            <a:pPr algn="ctr"/>
+            <a:r>
+              <a:rPr sz="900" b="0">
+                <a:solidFill>
+                  <a:srgbClr val="8A93A3"/>
+                </a:solidFill>
+              </a:rPr>
+              <a:t>predicting the valley</a:t>
+            </a:r>
+          </a:p>
+        </p:txBody>
+      </p:sp>
+      <p:sp>
+        <p:nvSpPr>
+          <p:cNvPr id="20" name="TextBox 19"/>
+          <p:cNvSpPr txBox="1"/>
+          <p:nvPr/>
+        </p:nvSpPr>
+        <p:spPr>
+          <a:xfrm>
+            <a:off x="502920" y="5715000"/>
+            <a:ext cx="11155680" cy="731520"/>
+          </a:xfrm>
+          <a:prstGeom prst="rect">
+            <a:avLst/>
+          </a:prstGeom>
+          <a:noFill/>
+        </p:spPr>
+        <p:txBody>
+          <a:bodyPr wrap="square">
+            <a:spAutoFit/>
+          </a:bodyPr>
+          <a:lstStyle/>
+          <a:p>
+            <a:pPr algn="l"/>
+            <a:r>
+              <a:rPr sz="1100" b="0">
+                <a:solidFill>
+                  <a:srgbClr val="1A2238"/>
+                </a:solidFill>
+              </a:rPr>
+              <a:t>unchanged: presence branch, CompHead, CondHead, closure. K=1 is the current head exactly (same parameters, same loss), so production checkpoints load untouched and the drop path is one deleted code branch.</a:t>
+            </a:r>
+          </a:p>
+        </p:txBody>
+      </p:sp>
+      <p:sp>
+        <p:nvSpPr>
+          <p:cNvPr id="21" name="TextBox 20"/>
+          <p:cNvSpPr txBox="1"/>
+          <p:nvPr/>
+        </p:nvSpPr>
+        <p:spPr>
+          <a:xfrm>
+            <a:off x="502920" y="6309360"/>
+            <a:ext cx="11155680" cy="731520"/>
+          </a:xfrm>
+          <a:prstGeom prst="rect">
+            <a:avLst/>
+          </a:prstGeom>
+          <a:noFill/>
+        </p:spPr>
+        <p:txBody>
+          <a:bodyPr wrap="square">
+            <a:spAutoFit/>
+          </a:bodyPr>
+          <a:lstStyle/>
+          <a:p>
+            <a:pPr algn="l"/>
+            <a:r>
+              <a:rPr sz="1000" b="0">
+                <a:solidFill>
+                  <a:srgbClr val="8A93A3"/>
+                </a:solidFill>
+              </a:rPr>
+              <a:t>kept only if better on real rocks: recalibrated val paired NLL vs the same-dials single-Dirichlet control; PIT/coverage break an NLL tie. distribution numbers illustrative.</a:t>
             </a:r>
           </a:p>
         </p:txBody>

--- a/slides/overview.pptx
+++ b/slides/overview.pptx
@@ -1574,7 +1574,7 @@
           <a:lstStyle/>
           <a:p>
             <a:r>
-              <a:t>Proposal slide for the ModeHead dirichlet layer (mixture), built 2026-08-04 behind the K=1-identity `mode_n_components` dial -- no trained checkpoint yet, so the canonical output is unchanged; drawn so the contrast with the two current-output slides is visual. Motivating measurements: 45% of sampled bulks bimodal in conditional amp proportion (2026-07-17 corpus exam), 34% of testable bimodal bulks still bimodal within their dominant support (the part support-conditioning cannot represent); amp two-sided PIT groups 0.026 -&gt; 0.114 when support-conditioning landed (truth escaping both tails = mean parked between humps); real-rock residual heavier-tailed than any Beta at the fitted mean. Design locked with the owner: K=2 fixed (not an HPO dial yet), assemblage-level components (one gate choosing whole alpha vectors -- on a simplex a per-phase mixture is not even coherent, and the humps co-vary through the shared hidden (P, H2O) path, cf. the 51% amp&lt;-&gt;opx switch), no gate regularizer in the first build (gate entropy is a read-after diagnostic; collapse = H~0 everywhere plus identical components), all-rock encoder with the allrock-tuned dials, control = joint_heads_allrock_tuned_seed0 as trained. Loss is logsumexp(log w_k + log Dir_k) on the present support -- CondHead's GMM pattern moved onto the Dirichlet. Build gate: K=1 under the new code must reproduce production metrics to float precision before any K=2 run. Old broad-draw corpus; verdict on the real-rock benchmark, val only, test untouched.</a:t>
+              <a:t>Slide for the ModeHead dirichlet layer (mixture), built and evaluated 2026-08-04 behind the K=1-identity `mode_n_components` dial. VERDICT (owner, same day): kept as a dial, K=1 stays the canonical output -- the trained K=2 posts the best corpus numbers on record on both axes (teacher-forced -3.0819 vs control -2.6713, sampled-support -2.1161 vs -1.9620) and collapses the targeted amp two-sided PIT residue, but the recalibrated real-rock val contrast leans against the same-dials control (1.642 vs 1.277, -0.365 [-0.864, +0.118], all in the magnitude term) and the gate hedges near 50/50 rather than switching. Attribution (journal 2026-08-04, second entry): the 7-group instrument passes 61% of the corpus advantage; the real amp population at matched chemistry has the same total spread but ONE hump (GMM BIC 39% vs 100% of matched corpus bulks); a single gate-offset recalibration parameter recovers ~60% of the penalty, to a tie, never a win. Drawn so the contrast with the two current-output slides is visual. Motivating measurements: 45% of sampled bulks bimodal in conditional amp proportion (2026-07-17 corpus exam), 34% of testable bimodal bulks still bimodal within their dominant support (the part support-conditioning cannot represent); amp two-sided PIT groups 0.026 -&gt; 0.114 when support-conditioning landed (truth escaping both tails = mean parked between humps); real-rock residual heavier-tailed than any Beta at the fitted mean. Design locked with the owner: K=2 fixed (not an HPO dial yet), assemblage-level components (one gate choosing whole alpha vectors -- on a simplex a per-phase mixture is not even coherent, and the humps co-vary through the shared hidden (P, H2O) path, cf. the 51% amp&lt;-&gt;opx switch), no gate regularizer in the first build (gate entropy is a read-after diagnostic; collapse = H~0 everywhere plus identical components), all-rock encoder with the allrock-tuned dials, control = joint_heads_allrock_tuned_seed0 as trained. Loss is logsumexp(log w_k + log Dir_k) on the present support -- CondHead's GMM pattern moved onto the Dirichlet. Build gate: K=1 under the new code must reproduce production metrics to float precision before any K=2 run. Old broad-draw corpus; verdict on the real-rock benchmark, val only, test untouched.</a:t>
             </a:r>
           </a:p>
         </p:txBody>
@@ -21763,7 +21763,7 @@
                   <a:srgbClr val="2E5BFF"/>
                 </a:solidFill>
               </a:rPr>
-              <a:t>HEADS -- PROPOSED CANONICAL OUTPUT (K=2 DISTRIBUTIONS)</a:t>
+              <a:t>HEADS -- K=2 MIXTURE: EVALUATED, KEPT AS A DIAL (K=1 STAYS CANONICAL)</a:t>
             </a:r>
           </a:p>
         </p:txBody>
@@ -21797,7 +21797,7 @@
                   <a:srgbClr val="1A2238"/>
                 </a:solidFill>
               </a:rPr>
-              <a:t>Proposed: the ModeHead dirichlet layer (mixture) -- built, not yet trained</a:t>
+              <a:t>The ModeHead dirichlet layer (mixture) -- trained 2026-08-04; wins the corpus, leans against on real rocks</a:t>
             </a:r>
           </a:p>
         </p:txBody>
@@ -23241,7 +23241,7 @@
                   <a:srgbClr val="8A93A3"/>
                 </a:solidFill>
               </a:rPr>
-              <a:t>kept only if better on real rocks: recalibrated val paired NLL vs the same-dials single-Dirichlet control; PIT/coverage break an NLL tie. distribution numbers illustrative.</a:t>
+              <a:t>verdict 2026-08-04: corpus best-on-record on both axes, amp two-sided PIT 0.120 -&gt; 0.023, but recalibrated real-rock val leans against the K=1 control (-0.365 [-0.864, +0.118]) -- the real amp population is one-humped at matched chemistry; the second hump belongs to the broad hidden-(P, H2O) prior. kept as the `mode_n_components` dial, K=1 default. drawings illustrative.</a:t>
             </a:r>
           </a:p>
         </p:txBody>

--- a/slides/overview.pptx
+++ b/slides/overview.pptx
@@ -5214,7 +5214,7 @@
                   <a:srgbClr val="FFFFFF"/>
                 </a:solidFill>
               </a:rPr>
-              <a:t>CrabNet-Mineral v3</a:t>
+              <a:t>phasecast</a:t>
             </a:r>
           </a:p>
         </p:txBody>

--- a/slides/overview.pptx
+++ b/slides/overview.pptx
@@ -1505,7 +1505,7 @@
           <a:lstStyle/>
           <a:p>
             <a:r>
-              <a:t>Anatomy of the sim-to-real recalibrator (cnmineral.models.real_rock_recalibrator.RealRockRecalibrator). This is the one component that is NOT a head on h: it reads the frozen ModeHead's own outputs, which is why it does not use the head_anatomy_slide template. Interface: (p7 logits, alpha7, SiO2 wt%) in, corrected (logits, alpha, gate log-weights) out. It acts in coarsened 7-group space rather than the model's 21 phases because that is where real modal labels live, where the residuals were measured, and where the three tiers nest exactly. Presence is corrected in logit space (that is where Platt scaling lives); magnitude multiplicatively on the concentrations -- multiplicative matters, because coarsening leaves exact zeros wherever a group has no member phase on the support, alpha*exp(c) keeps those zeros, and an additive correction in log space would turn them into -inf. Param counts instantiated from the module, exact: vector 23, matrix 121, mlp 1095, tailed 123; the 5.07M denominator is the frozen encoder (3,234,699 trainable) plus heads (1,830,337). The SiO2 slopes shown are the PRESENCE-side ones on q and amp, which stay; a magnitude-side location slope was built alongside the tailed tier, measured +0.007 [-0.004, +0.016] nats, and excised as three dead parameters (journal 2026-08-06). The contamination is parameterized as an offset from a -3.0 prior logit so weight decay shrinks toward 'rare contamination' (eps ~0.05) rather than the eps = 0.5 a raw logit would decay to; k = 1 at init collapses the mixture, preserving identity-at-init. Splits are clustered by eruption unit, not by rock, because rocks from one unit are not independent samples.</a:t>
+              <a:t>Anatomy of the sim-to-real recalibrator (cnmineral.models.real_rock_recalibrator.RealRockRecalibrator). This is the one component that is NOT a head on h: it reads the frozen ModeHead's own outputs, which is why it does not use the head_anatomy_slide template. Interface: (p7 logits, alpha7) in, corrected (logits, alpha, gate log-weights) out. It acts in coarsened 7-group space rather than the model's 21 phases because that is where real modal labels live, where the residuals were measured, and where the three tiers nest exactly. Presence is corrected in logit space (that is where Platt scaling lives); magnitude multiplicatively on the concentrations -- multiplicative matters, because coarsening leaves exact zeros wherever a group has no member phase on the support, alpha*exp(c) keeps those zeros, and an additive correction in log space would turn them into -inf. Param counts instantiated from the module, exact: vector 21, matrix 119, mlp 1061, tailed 121; the 5.07M denominator is the frozen encoder (3,234,699 trainable) plus heads (1,830,337). Silica is not an input: a magnitude-side location slope was built alongside the tailed tier, measured +0.007 [-0.004, +0.016] nats, and excised (journal 2026-08-06); the presence-side slopes on q and amp measured +0.002 nats (journal 2026-08-18) and were removed after submission (journal 2026-09-02). The contamination is parameterized as an offset from a -3.0 prior logit so weight decay shrinks toward 'rare contamination' (eps ~0.05) rather than the eps = 0.5 a raw logit would decay to; k = 1 at init collapses the mixture, preserving identity-at-init. Splits are clustered by eruption unit, not by rock, because rocks from one unit are not independent samples.</a:t>
             </a:r>
           </a:p>
         </p:txBody>
@@ -20357,7 +20357,7 @@
                   <a:srgbClr val="1A2238"/>
                 </a:solidFill>
               </a:rPr>
-              <a:t>Inside the recalibrator: 123 numbers between corpus and real rock</a:t>
+              <a:t>Inside the recalibrator: 121 numbers between corpus and real rock</a:t>
             </a:r>
           </a:p>
         </p:txBody>
@@ -20702,17 +20702,6 @@
               <a:t>scale, offset, 7x7 mix</a:t>
             </a:r>
           </a:p>
-          <a:p>
-            <a:pPr algn="ctr"/>
-            <a:r>
-              <a:rPr sz="900" b="0">
-                <a:solidFill>
-                  <a:srgbClr val="8A93A3"/>
-                </a:solidFill>
-              </a:rPr>
-              <a:t>+ SiO2 slope on q, amp</a:t>
-            </a:r>
-          </a:p>
         </p:txBody>
       </p:sp>
       <p:sp>
@@ -21295,7 +21284,7 @@
                   <a:srgbClr val="1A2238"/>
                 </a:solidFill>
               </a:rPr>
-              <a:t>123 trainable params on a frozen 5.07M stack (0.002%): 7 presence scales + 7 offsets + 7 magnitude offsets + 2 SiO2 slopes + two 7x7 mixes + 2 contamination params. The tiers nest -- vector (23) in matrix (121), and tailed = matrix + 2. Identity at initialization, so an unfit recalibrator reproduces the zero-shot number exactly and every gain reads as nats recovered.</a:t>
+              <a:t>121 trainable params on a frozen 5.07M stack (0.002%): 7 presence scales + 7 offsets + 7 magnitude offsets + two 7x7 mixes + 2 contamination params. The tiers nest -- vector (21) in matrix (119), and tailed = matrix + 2. Identity at initialization, so an unfit recalibrator reproduces the zero-shot number exactly and every gain reads as nats recovered.</a:t>
             </a:r>
           </a:p>
         </p:txBody>

--- a/slides/overview.pptx
+++ b/slides/overview.pptx
@@ -21318,7 +21318,7 @@
                   <a:srgbClr val="8A93A3"/>
                 </a:solidFill>
               </a:rPr>
-              <a:t>dials: Adam, lr 0.05, 400 epochs, no per-draw early stopping by design . weight decay picked on val per tier (vector 0.1, matrix 1.0, tailed 1.0) . amphibole's magnitude correction is PINNED at zero -- the mapping audit's band straddles zero there, so a fitted value reads the mapping's uncertainty, not the model's error.</a:t>
+              <a:t>dials: Adam, lr 0.05, 400 epochs, no per-draw early stopping by design . weight decay picked on val per tier (vector 0.1, matrix 1.0, tailed 1.0) . every group's correction is fit; amphibole's is not interpretable (the mapping audit's density band straddles zero there), which the audit says, not the layer.</a:t>
             </a:r>
           </a:p>
         </p:txBody>

--- a/slides/overview.pptx
+++ b/slides/overview.pptx
@@ -875,7 +875,7 @@
           <a:lstStyle/>
           <a:p>
             <a:r>
-              <a:t>Eval-semantics slide for the magnitude branch, mirroring the presence branch's reliability worked example. Laid out as two tracks converging at a scoring node: the prediction track never sees the truth's modes; the truth contributes its support twice (conditioning input to the magnitude trunk + the score's slice, both teacher-forced) and its modes meet the prediction only at scoring. Numbers illustrative but to scale: alpha sliced to the true 4-phase support gives Dirichlet means alpha_i/alpha0 and Beta marginals Beta(alpha_i, alpha0 - alpha_i); plag Beta(12,13) has mean 0.48, sd ~0.10, and truth 0.44 lands at CDF 0.34. alpha0 is the single shared confidence knob per row -- the reason per-phase spreads can't be tuned independently (see alpha_concentration.png). PIT histograms are the magnitude analog of reliability diagrams; parity plots are the point-estimate view. Scored by masked Dirichlet NLL (anatomy slide's L_magnitude). Worked numbers for the expansion box: this row scores -4.34 nats (normalizer -28.37 + shape +24.03); scaling alpha x4 improves to -5.26 when truth is near the peak but explodes to +17.9 when truth swaps to the other hump (plag/amp values exchanged) -- the mechanism that pinned the support-blind head's amphibole alpha0 low and its mean in the middle. Support-conditioning resolves the between-support humps; the within-support ones still punish confidence the same way (the mixture candidate's target). The 0.715 -&gt; 0.876 amp parity jump that justified support-conditioning was measured when the support-conditioned trunk landed (#25); the production model reads 0.876 on the same axis, and 0.538 under sampled support. Retunes since have moved sharpness rather than conditioning, which is also why every sampled-support number is worse than its teacher-forced twin -- the head specialized to the true support.</a:t>
+              <a:t>Eval-semantics slide for the magnitude branch, mirroring the presence branch's reliability worked example. Laid out as two tracks converging at a scoring node: the prediction track never sees the truth's modes; the truth contributes its support twice (conditioning input to the magnitude trunk + the score's slice, both teacher-forced) and its modes meet the prediction only at scoring. Numbers illustrative but to scale: alpha sliced to the true 4-phase support gives Dirichlet means alpha_i/alpha0 and Beta marginals Beta(alpha_i, alpha0 - alpha_i); plag Beta(12,13) has mean 0.48, sd ~0.10, and truth 0.44 lands at CDF 0.34. alpha0 is the single shared confidence knob per row -- the reason per-phase spreads can't be tuned independently (see alpha_concentration.png). PIT histograms are the magnitude analog of reliability diagrams; parity plots are the point-estimate view. Scored by masked Dirichlet NLL (anatomy slide's L_magnitude). Worked numbers for the expansion box: this row scores -4.34 nats (normalizer -28.37 + shape +24.03); scaling alpha x4 improves to -5.26 when truth is near the peak but explodes to +17.9 when truth swaps to the other hump (plag/amp values exchanged) -- the mechanism that pinned the support-blind head's amphibole alpha0 low and its mean in the middle. Support-conditioning resolves the between-support humps; the within-support ones still punish confidence the same way (a K=2 mixture targeted them and was removed, journal 2026-09-02). The 0.715 -&gt; 0.876 amp parity jump that justified support-conditioning was measured when the support-conditioned trunk landed (#25); the production model reads 0.876 on the same axis, and 0.538 under sampled support. Retunes since have moved sharpness rather than conditioning, which is also why every sampled-support number is worse than its teacher-forced twin -- the head specialized to the true support.</a:t>
             </a:r>
           </a:p>
         </p:txBody>
@@ -1645,7 +1645,7 @@
           <a:lstStyle/>
           <a:p>
             <a:r>
-              <a:t>Slide for the ModeHead dirichlet layer (mixture), built and evaluated 2026-08-04 behind the K=1-identity `mode_n_components` dial. VERDICT (owner, same day): kept as a dial, K=1 stays the canonical output -- the trained K=2 posts the best corpus numbers on record on both axes (teacher-forced -3.0819 vs control -2.6713, sampled-support -2.1161 vs -1.9620) and collapses the targeted amp two-sided PIT residue, but the recalibrated real-rock val contrast leans against the same-dials control (1.642 vs 1.277, -0.365 [-0.864, +0.118], all in the magnitude term) and the gate hedges near 50/50 rather than switching. Attribution (journal 2026-08-04, second entry): the 7-group instrument passes 61% of the corpus advantage; the real amp population at matched chemistry has the same total spread but ONE hump (GMM BIC 39% vs 100% of matched corpus bulks); a single gate-offset recalibration parameter recovers ~60% of the penalty, to a tie, never a win. Drawn so the contrast with the two current-output slides is visual. Motivating measurements: 45% of sampled bulks bimodal in conditional amp proportion (2026-07-17 corpus exam), 34% of testable bimodal bulks still bimodal within their dominant support (the part support-conditioning cannot represent); amp two-sided PIT groups 0.026 -&gt; 0.114 when support-conditioning landed (truth escaping both tails = mean parked between humps); real-rock residual heavier-tailed than any Beta at the fitted mean. Design locked with the owner: K=2 fixed (not an HPO dial yet), assemblage-level components (one gate choosing whole alpha vectors -- on a simplex a per-phase mixture is not even coherent, and the humps co-vary through the shared hidden (P, H2O) path, cf. the 51% amp&lt;-&gt;opx switch), no gate regularizer in the first build (gate entropy is a read-after diagnostic; collapse = H~0 everywhere plus identical components), all-rock encoder with the allrock-tuned dials, control = joint_heads_allrock_tuned_seed0 as trained. Loss is logsumexp(log w_k + log Dir_k) on the present support -- CondHead's GMM pattern moved onto the Dirichlet. Build gate: K=1 under the new code must reproduce production metrics to float precision before any K=2 run. Old broad-draw corpus; verdict on the real-rock benchmark, val only, test untouched.</a:t>
+              <a:t>Slide for the ModeHead dirichlet layer (mixture), built and evaluated 2026-08-04 behind a K=1-identity dial and deleted 2026-09-02 (#67 item 4; explorations/archive/mode_mixture is the record). VERDICT (owner, 2026-08-04): kept as a dial, K=1 stays the canonical output -- the trained K=2 posts the best corpus numbers on record on both axes (teacher-forced -3.0819 vs control -2.6713, sampled-support -2.1161 vs -1.9620) and collapses the targeted amp two-sided PIT residue, but the recalibrated real-rock val contrast leans against the same-dials control (1.642 vs 1.277, -0.365 [-0.864, +0.118], all in the magnitude term) and the gate hedges near 50/50 rather than switching. Attribution (journal 2026-08-04, second entry): the 7-group instrument passes 61% of the corpus advantage; the real amp population at matched chemistry has the same total spread but ONE hump (GMM BIC 39% vs 100% of matched corpus bulks); a single gate-offset recalibration parameter recovers ~60% of the penalty, to a tie, never a win. Drawn so the contrast with the two current-output slides is visual. Motivating measurements: 45% of sampled bulks bimodal in conditional amp proportion (2026-07-17 corpus exam), 34% of testable bimodal bulks still bimodal within their dominant support (the part support-conditioning cannot represent); amp two-sided PIT groups 0.026 -&gt; 0.114 when support-conditioning landed (truth escaping both tails = mean parked between humps); real-rock residual heavier-tailed than any Beta at the fitted mean. Design locked with the owner: K=2 fixed (not an HPO dial yet), assemblage-level components (one gate choosing whole alpha vectors -- on a simplex a per-phase mixture is not even coherent, and the humps co-vary through the shared hidden (P, H2O) path, cf. the 51% amp&lt;-&gt;opx switch), no gate regularizer in the first build (gate entropy is a read-after diagnostic; collapse = H~0 everywhere plus identical components), all-rock encoder with the allrock-tuned dials, control = joint_heads_allrock_tuned_seed0 as trained. Loss is logsumexp(log w_k + log Dir_k) on the present support -- CondHead's GMM pattern moved onto the Dirichlet. Build gate: K=1 under the new code must reproduce production metrics to float precision before any K=2 run. Old broad-draw corpus; verdict on the real-rock benchmark, val only, test untouched.</a:t>
             </a:r>
           </a:p>
         </p:txBody>
@@ -10545,7 +10545,7 @@
                   <a:srgbClr val="8A93A3"/>
                 </a:solidFill>
               </a:rPr>
-              <a:t>population: only truly-present (row, phase) pairs are scored -- ~41k pairs for plag down to a few hundred for the rarest phases; single-phase rows are excluded (nothing to size). current limits (production model): amp parity r 0.876 teacher-forced but 0.539 on self-sampled supports; the interrogation also measured amp bimodal WITHIN one support (mixture parameterization is the staged candidate, #25). full report: runs/mode_head/&lt;tag&gt;/ (magnitude_parity, magnitude_pit).</a:t>
+              <a:t>population: only truly-present (row, phase) pairs are scored -- ~41k pairs for plag down to a few hundred for the rarest phases; single-phase rows are excluded (nothing to size). current limits (production model): amp parity r 0.876 teacher-forced but 0.539 on self-sampled supports; the interrogation also measured amp bimodal WITHIN one support (a K=2 Dirichlet mixture was tried for them and removed: real amphibole at matched chemistry is one-humped, journal 2026-08-04). full report: runs/mode_head/&lt;tag&gt;/ (magnitude_parity, magnitude_pit).</a:t>
             </a:r>
           </a:p>
         </p:txBody>
@@ -22775,7 +22775,7 @@
                   <a:srgbClr val="2E5BFF"/>
                 </a:solidFill>
               </a:rPr>
-              <a:t>HEADS -- K=2 MIXTURE: EVALUATED, KEPT AS A DIAL (K=1 STAYS CANONICAL)</a:t>
+              <a:t>HEADS -- K=2 MIXTURE: EVALUATED AND REMOVED (K=1 IS THE HEAD)</a:t>
             </a:r>
           </a:p>
         </p:txBody>
@@ -22809,7 +22809,7 @@
                   <a:srgbClr val="1A2238"/>
                 </a:solidFill>
               </a:rPr>
-              <a:t>The ModeHead dirichlet layer (mixture) -- trained 2026-08-04; wins the corpus, leans against on real rocks</a:t>
+              <a:t>The ModeHead dirichlet layer (mixture) -- trained 2026-08-04; wins the corpus, leans against on real rocks; deleted 2026-09-02</a:t>
             </a:r>
           </a:p>
         </p:txBody>
@@ -23711,7 +23711,7 @@
                   <a:srgbClr val="1A2238"/>
                 </a:solidFill>
               </a:rPr>
-              <a:t>proposed: K=2 -- mass on the humps</a:t>
+              <a:t>tried: K=2 -- mass on the humps</a:t>
             </a:r>
           </a:p>
         </p:txBody>
@@ -24219,7 +24219,7 @@
                   <a:srgbClr val="1A2238"/>
                 </a:solidFill>
               </a:rPr>
-              <a:t>unchanged: presence branch, CompHead, CondHead, closure. K=1 is the current head exactly (same parameters, same loss), so production checkpoints load untouched and the drop path is one deleted code branch.</a:t>
+              <a:t>unchanged: presence branch, CompHead, CondHead, closure. K=1 is the head (same parameters, same loss); the K=2 branch was one code path and was deleted 2026-09-02 (#67 item 4).</a:t>
             </a:r>
           </a:p>
         </p:txBody>
@@ -24253,7 +24253,7 @@
                   <a:srgbClr val="8A93A3"/>
                 </a:solidFill>
               </a:rPr>
-              <a:t>verdict 2026-08-04: corpus best-on-record on both axes, amp two-sided PIT 0.120 -&gt; 0.023, but recalibrated real-rock val leans against the K=1 control (-0.365 [-0.864, +0.118]) -- the real amp population is one-humped at matched chemistry; the second hump belongs to the broad hidden-(P, H2O) prior. kept as the `mode_n_components` dial, K=1 default. drawings illustrative.</a:t>
+              <a:t>verdict 2026-08-04: corpus best-on-record on both axes, amp two-sided PIT 0.120 -&gt; 0.023, but recalibrated real-rock val leans against the K=1 control (-0.365 [-0.864, +0.118]) -- the real amp population is one-humped at matched chemistry; the second hump belongs to the broad hidden-(P, H2O) prior. removed 2026-09-02; the archived exploration is the record. drawings illustrative.</a:t>
             </a:r>
           </a:p>
         </p:txBody>

--- a/slides/overview.pptx
+++ b/slides/overview.pptx
@@ -595,7 +595,7 @@
           <a:lstStyle/>
           <a:p>
             <a:r>
-              <a:t>The three-stage training pipeline. Stage 1 is the SSL loop from the prior slide; stage 2 freezes; stage 3 trains the heads on the labeled equilibrium corpus. The production stack is checkpoints/pretrain_allrock_redox_seed0 (stage 1-2, all-rock 23-token, canonical 2026-08-05) + checkpoints/joint_heads_allrock_tuned_seed0 (stage 3, old broad-draw corpus; the traced-corpus retrains were measured and not adopted). Stage 3 is cheap by design -- 1.83M head params against a 3.23M frozen encoder -- which is what makes re-supervising the heads against a different label source a retrain rather than a rebuild. A fourth stage exists downstream for real rocks: a 123-parameter recalibrator fit on measured modes, two slides on from here.</a:t>
+              <a:t>The three-stage training pipeline. Stage 1 is the SSL loop from the prior slide; stage 2 freezes; stage 3 trains the heads on the labeled equilibrium corpus. The production stack is checkpoints/pretrain_allrock_redox_seed0 (stage 1-2, all-rock 23-token, canonical 2026-08-05) + checkpoints/joint_heads_allrock_tuned_seed0 (stage 3, old broad-draw corpus; the traced-corpus retrains were measured and not adopted). Stage 3 is cheap by design -- 1.83M head params against a 3.23M frozen encoder -- which is what makes re-supervising the heads against a different label source a retrain rather than a rebuild. A fourth stage exists downstream for real rocks: a 119-parameter recalibrator fit on measured modes, two slides on from here.</a:t>
             </a:r>
           </a:p>
         </p:txBody>
@@ -1505,7 +1505,7 @@
           <a:lstStyle/>
           <a:p>
             <a:r>
-              <a:t>Anatomy of the sim-to-real recalibrator (cnmineral.models.real_rock_recalibrator.RealRockRecalibrator). This is the one component that is NOT a head on h: it reads the frozen ModeHead's own outputs, which is why it does not use the head_anatomy_slide template. Interface: (p7 logits, alpha7) in, corrected (logits, alpha, gate log-weights) out. It acts in coarsened 7-group space rather than the model's 21 phases because that is where real modal labels live, where the residuals were measured, and where the three tiers nest exactly. Presence is corrected in logit space (that is where Platt scaling lives); magnitude multiplicatively on the concentrations -- multiplicative matters, because coarsening leaves exact zeros wherever a group has no member phase on the support, alpha*exp(c) keeps those zeros, and an additive correction in log space would turn them into -inf. Param counts instantiated from the module, exact: vector 21, matrix 119, mlp 1061, tailed 121; the 5.07M denominator is the frozen encoder (3,234,699 trainable) plus heads (1,830,337). Silica is not an input: a magnitude-side location slope was built alongside the tailed tier, measured +0.007 [-0.004, +0.016] nats, and excised (journal 2026-08-06); the presence-side slopes on q and amp measured +0.002 nats (journal 2026-08-18) and were removed after submission (journal 2026-09-02). The contamination is parameterized as an offset from a -3.0 prior logit so weight decay shrinks toward 'rare contamination' (eps ~0.05) rather than the eps = 0.5 a raw logit would decay to; k = 1 at init collapses the mixture, preserving identity-at-init. Splits are clustered by eruption unit, not by rock, because rocks from one unit are not independent samples.</a:t>
+              <a:t>Anatomy of the sim-to-real recalibrator (cnmineral.models.real_rock_recalibrator.RealRockRecalibrator). This is the one component that is NOT a head on h: it reads the frozen ModeHead's own outputs, which is why it does not use the head_anatomy_slide template. Interface: (p7 logits, alpha7) in, corrected (logits, alpha, gate log-weights) out. It acts in coarsened 7-group space rather than the model's 21 phases because that is where real modal labels live, where the residuals were measured, and where the three tiers nest exactly. Presence is corrected in logit space (that is where Platt scaling lives); magnitude multiplicatively on the concentrations -- multiplicative matters, because coarsening leaves exact zeros wherever a group has no member phase on the support, alpha*exp(c) keeps those zeros, and an additive correction in log space would turn them into -inf. Param counts instantiated from the module, exact: vector 21, matrix 119, mlp 1061; the 5.07M denominator is the frozen encoder (3,234,699 trainable) plus heads (1,830,337). Silica is not an input: a magnitude-side location slope was built, measured +0.007 [-0.004, +0.016] nats, and excised (journal 2026-08-06); the presence-side slopes on q and amp measured +0.002 nats (journal 2026-08-18) and were removed after submission (journal 2026-09-02). The submitted layer was matrix plus a two-parameter precision contamination ('tailed', 121 params, val 1.277 -&gt; 0.972); that margin was traced to the amphibole pin (unpinned matrix scores 0.688 on the same rocks and the contaminant sits at its identity), so the tier was deleted (journal 2026-09-03). Splits are clustered by eruption unit, not by rock, because rocks from one unit are not independent samples.</a:t>
             </a:r>
           </a:p>
         </p:txBody>
@@ -1575,7 +1575,7 @@
           <a:lstStyle/>
           <a:p>
             <a:r>
-              <a:t>Eval-semantics slide for the recalibrator. All levels are val-only (111 rocks, 39 eruption units) with the layer fit on the 368-rock train roster; the test slice is untouched. Levels from tailed_acceptance.json: zero-shot joint 13.444 (dirichlet 7.630 + bernoulli 5.813), vector 3.761, matrix 1.277, tailed 0.972. The matrix-minus-tailed contrast is +0.30445 [+0.04942, +0.65876] over 39 units; the bernoulli component of that contrast is exactly 0.0 because tailed forks from matrix and leaves the presence branch untouched -- worth saying out loud, since a reader may expect the usual both-terms-move pattern. Fitted contamination eps 0.05209, k 0.50665. Curve numbers from curve_val.json (10 whole-unit draws per budget, budgets 25-400, paired across tiers, weight decay re-selected on this checkpoint): per-budget median dirichlet for tailed runs 0.324 at 25, -0.753 at 50, -1.154 at 100, -1.814 at 200, -1.924 at full train, against a 7.630 zero-shot -- so the 9.55-nat gain is 7.630 minus -1.924. The distribution drawings are illustrative but to scale for k = 0.507: halving the concentration roughly doubles the variance, so the contaminating component is ~1.4x wider at the same mean. Note the 111-rock val zero-shot (13.444) is NOT the 640-rock headline zero-shot (11.638 in results/real_rock_ledger.yaml) -- different populations, and mixing them is the easiest mistake to make here. Internal reference, deliberately not on the slide: the climatology baseline reads val joint 2.175 against tailed's 0.965.</a:t>
+              <a:t>Eval-semantics slide for the recalibrator. All levels are val-only (106 rocks, 39 eruption units) with the layer fit on the 372-rock train roster, rebuilt 2026-09-02 without the silica-containment rule and with unit spellings canonicalized; the test slice is untouched. Levels from acceptance.json: zero-shot joint 11.293 (dirichlet 5.284 + bernoulli 6.009), vector 1.417, matrix 0.829. The vector-minus-matrix contrast is +0.588 [+0.248, +0.943] over 39 units, dirichlet +0.397 [+0.114, +0.690], bernoulli +0.191 [+0.038, +0.370]. History: the submitted layer was 'tailed' (matrix + 2-param precision contamination), 1.277 -&gt; 0.972 on the old 111-rock val slice with amphibole's magnitude correction pinned at zero; bisected on identical rocks, unpinning alone takes matrix to 0.688 and leaves the contaminant at its identity (k 0.99), so the 0.30 was the pin's cost and the tier was deleted (journal 2026-09-03). Curve numbers from curve_val.json (10 whole-unit draws per budget, budgets 25-400, paired across arms, weight decay re-selected on this roster: vector 0.01, matrix 1.0): per-budget median dirichlet for matrix runs 1.656 at 25, -1.079 at 50, -1.841 at 100, -2.021 at 200, -2.133 at full train, against a 5.284 zero-shot -- so the 7.4-nat gain is 5.284 minus -2.133. Note the 106-rock val zero-shot (11.293) is NOT the 640-rock headline zero-shot (11.638 in results/real_rock_ledger.yaml) -- different populations, and mixing them is the easiest mistake to make here. Internal reference, deliberately not on the slide: the climatology baseline reads val joint 2.286 against matrix's 0.829.</a:t>
             </a:r>
           </a:p>
         </p:txBody>
@@ -20357,7 +20357,7 @@
                   <a:srgbClr val="1A2238"/>
                 </a:solidFill>
               </a:rPr>
-              <a:t>Inside the recalibrator: 121 numbers between corpus and real rock</a:t>
+              <a:t>Inside the recalibrator: 119 numbers between corpus and real rock</a:t>
             </a:r>
           </a:p>
         </p:txBody>
@@ -20611,8 +20611,8 @@
         </p:nvCxnSpPr>
         <p:spPr>
           <a:xfrm flipV="1">
-            <a:off x="5577840" y="2263140"/>
-            <a:ext cx="365760" cy="800100"/>
+            <a:off x="5577840" y="2583179"/>
+            <a:ext cx="365760" cy="480061"/>
           </a:xfrm>
           <a:prstGeom prst="bentConnector3">
             <a:avLst/>
@@ -20647,7 +20647,7 @@
         </p:nvSpPr>
         <p:spPr>
           <a:xfrm>
-            <a:off x="5943600" y="1783080"/>
+            <a:off x="5943600" y="2103120"/>
             <a:ext cx="3657600" cy="960120"/>
           </a:xfrm>
           <a:prstGeom prst="roundRect">
@@ -20712,7 +20712,7 @@
         </p:nvSpPr>
         <p:spPr>
           <a:xfrm>
-            <a:off x="9692640" y="2107692"/>
+            <a:off x="9692640" y="2427732"/>
             <a:ext cx="320040" cy="310896"/>
           </a:xfrm>
           <a:prstGeom prst="rightArrow">
@@ -20756,7 +20756,7 @@
         </p:nvSpPr>
         <p:spPr>
           <a:xfrm>
-            <a:off x="10104120" y="1828800"/>
+            <a:off x="10104120" y="2148839"/>
             <a:ext cx="1691640" cy="868680"/>
           </a:xfrm>
           <a:prstGeom prst="roundRect">
@@ -20822,7 +20822,7 @@
         <p:spPr>
           <a:xfrm>
             <a:off x="5577840" y="3063240"/>
-            <a:ext cx="365760" cy="388620"/>
+            <a:ext cx="365760" cy="982980"/>
           </a:xfrm>
           <a:prstGeom prst="bentConnector3">
             <a:avLst/>
@@ -20857,7 +20857,7 @@
         </p:nvSpPr>
         <p:spPr>
           <a:xfrm>
-            <a:off x="5943600" y="2971800"/>
+            <a:off x="5943600" y="3566160"/>
             <a:ext cx="3657600" cy="960120"/>
           </a:xfrm>
           <a:prstGeom prst="roundRect">
@@ -20933,7 +20933,7 @@
         </p:nvSpPr>
         <p:spPr>
           <a:xfrm>
-            <a:off x="9692640" y="3296412"/>
+            <a:off x="9692640" y="3890772"/>
             <a:ext cx="320040" cy="310896"/>
           </a:xfrm>
           <a:prstGeom prst="rightArrow">
@@ -20977,7 +20977,7 @@
         </p:nvSpPr>
         <p:spPr>
           <a:xfrm>
-            <a:off x="10104120" y="3017520"/>
+            <a:off x="10104120" y="3611879"/>
             <a:ext cx="1691640" cy="868680"/>
           </a:xfrm>
           <a:prstGeom prst="roundRect">
@@ -21034,230 +21034,9 @@
           </a:p>
         </p:txBody>
       </p:sp>
-      <p:cxnSp>
-        <p:nvCxnSpPr>
-          <p:cNvPr id="16" name="Connector 15"/>
-          <p:cNvCxnSpPr/>
-          <p:nvPr/>
-        </p:nvCxnSpPr>
-        <p:spPr>
-          <a:xfrm>
-            <a:off x="5577840" y="3063240"/>
-            <a:ext cx="365760" cy="1577340"/>
-          </a:xfrm>
-          <a:prstGeom prst="bentConnector3">
-            <a:avLst/>
-          </a:prstGeom>
-          <a:ln w="17780">
-            <a:solidFill>
-              <a:srgbClr val="8A93A3"/>
-            </a:solidFill>
-          </a:ln>
-          <a:effectLst/>
-        </p:spPr>
-        <p:style>
-          <a:lnRef idx="2">
-            <a:schemeClr val="accent1"/>
-          </a:lnRef>
-          <a:fillRef idx="0">
-            <a:schemeClr val="accent1"/>
-          </a:fillRef>
-          <a:effectRef idx="1">
-            <a:schemeClr val="accent1"/>
-          </a:effectRef>
-          <a:fontRef idx="minor">
-            <a:schemeClr val="tx1"/>
-          </a:fontRef>
-        </p:style>
-      </p:cxnSp>
-      <p:sp>
-        <p:nvSpPr>
-          <p:cNvPr id="17" name="Rounded Rectangle 16"/>
-          <p:cNvSpPr/>
-          <p:nvPr/>
-        </p:nvSpPr>
-        <p:spPr>
-          <a:xfrm>
-            <a:off x="5943600" y="4160520"/>
-            <a:ext cx="3657600" cy="960120"/>
-          </a:xfrm>
-          <a:prstGeom prst="roundRect">
-            <a:avLst/>
-          </a:prstGeom>
-          <a:solidFill>
-            <a:srgbClr val="EAE8FB"/>
-          </a:solidFill>
-          <a:ln w="25400">
-            <a:solidFill>
-              <a:srgbClr val="6C5CE7"/>
-            </a:solidFill>
-          </a:ln>
-          <a:effectLst/>
-        </p:spPr>
-        <p:style>
-          <a:lnRef idx="1">
-            <a:schemeClr val="accent1"/>
-          </a:lnRef>
-          <a:fillRef idx="3">
-            <a:schemeClr val="accent1"/>
-          </a:fillRef>
-          <a:effectRef idx="2">
-            <a:schemeClr val="accent1"/>
-          </a:effectRef>
-          <a:fontRef idx="minor">
-            <a:schemeClr val="lt1"/>
-          </a:fontRef>
-        </p:style>
-        <p:txBody>
-          <a:bodyPr rtlCol="0" anchor="ctr" wrap="square"/>
-          <a:lstStyle/>
-          <a:p>
-            <a:pPr algn="ctr"/>
-            <a:r>
-              <a:rPr sz="1200" b="1">
-                <a:solidFill>
-                  <a:srgbClr val="1A2238"/>
-                </a:solidFill>
-              </a:rPr>
-              <a:t>tail: precision contamination</a:t>
-            </a:r>
-          </a:p>
-          <a:p>
-            <a:pPr algn="ctr"/>
-            <a:r>
-              <a:rPr sz="900" b="0">
-                <a:solidFill>
-                  <a:srgbClr val="8A93A3"/>
-                </a:solidFill>
-              </a:rPr>
-              <a:t>weight eps on a second alpha x k</a:t>
-            </a:r>
-          </a:p>
-          <a:p>
-            <a:pPr algn="ctr"/>
-            <a:r>
-              <a:rPr sz="900" b="0">
-                <a:solidFill>
-                  <a:srgbClr val="8A93A3"/>
-                </a:solidFill>
-              </a:rPr>
-              <a:t>component -- same mean, fatter tail</a:t>
-            </a:r>
-          </a:p>
-        </p:txBody>
-      </p:sp>
-      <p:sp>
-        <p:nvSpPr>
-          <p:cNvPr id="18" name="Right Arrow 17"/>
-          <p:cNvSpPr/>
-          <p:nvPr/>
-        </p:nvSpPr>
-        <p:spPr>
-          <a:xfrm>
-            <a:off x="9692640" y="4485132"/>
-            <a:ext cx="320040" cy="310896"/>
-          </a:xfrm>
-          <a:prstGeom prst="rightArrow">
-            <a:avLst/>
-          </a:prstGeom>
-          <a:solidFill>
-            <a:srgbClr val="1A2238"/>
-          </a:solidFill>
-          <a:ln>
-            <a:noFill/>
-          </a:ln>
-          <a:effectLst/>
-        </p:spPr>
-        <p:style>
-          <a:lnRef idx="1">
-            <a:schemeClr val="accent1"/>
-          </a:lnRef>
-          <a:fillRef idx="3">
-            <a:schemeClr val="accent1"/>
-          </a:fillRef>
-          <a:effectRef idx="2">
-            <a:schemeClr val="accent1"/>
-          </a:effectRef>
-          <a:fontRef idx="minor">
-            <a:schemeClr val="lt1"/>
-          </a:fontRef>
-        </p:style>
-        <p:txBody>
-          <a:bodyPr rtlCol="0" anchor="ctr"/>
-          <a:lstStyle/>
-          <a:p>
-            <a:pPr algn="ctr"/>
-          </a:p>
-        </p:txBody>
-      </p:sp>
-      <p:sp>
-        <p:nvSpPr>
-          <p:cNvPr id="19" name="Rounded Rectangle 18"/>
-          <p:cNvSpPr/>
-          <p:nvPr/>
-        </p:nvSpPr>
-        <p:spPr>
-          <a:xfrm>
-            <a:off x="10104120" y="4206240"/>
-            <a:ext cx="1691640" cy="868680"/>
-          </a:xfrm>
-          <a:prstGeom prst="roundRect">
-            <a:avLst/>
-          </a:prstGeom>
-          <a:solidFill>
-            <a:srgbClr val="FFFFFF"/>
-          </a:solidFill>
-          <a:ln w="12700">
-            <a:solidFill>
-              <a:srgbClr val="C8CDD6"/>
-            </a:solidFill>
-          </a:ln>
-          <a:effectLst/>
-        </p:spPr>
-        <p:style>
-          <a:lnRef idx="1">
-            <a:schemeClr val="accent1"/>
-          </a:lnRef>
-          <a:fillRef idx="3">
-            <a:schemeClr val="accent1"/>
-          </a:fillRef>
-          <a:effectRef idx="2">
-            <a:schemeClr val="accent1"/>
-          </a:effectRef>
-          <a:fontRef idx="minor">
-            <a:schemeClr val="lt1"/>
-          </a:fontRef>
-        </p:style>
-        <p:txBody>
-          <a:bodyPr rtlCol="0" anchor="ctr" wrap="square"/>
-          <a:lstStyle/>
-          <a:p>
-            <a:pPr algn="ctr"/>
-            <a:r>
-              <a:rPr sz="1100" b="1">
-                <a:solidFill>
-                  <a:srgbClr val="8A93A3"/>
-                </a:solidFill>
-              </a:rPr>
-              <a:t>2-component</a:t>
-            </a:r>
-          </a:p>
-          <a:p>
-            <a:pPr algn="ctr"/>
-            <a:r>
-              <a:rPr sz="800" b="0">
-                <a:solidFill>
-                  <a:srgbClr val="8A93A3"/>
-                </a:solidFill>
-              </a:rPr>
-              <a:t>mixture out</a:t>
-            </a:r>
-          </a:p>
-        </p:txBody>
-      </p:sp>
-      <p:sp>
-        <p:nvSpPr>
-          <p:cNvPr id="20" name="TextBox 19"/>
+      <p:sp>
+        <p:nvSpPr>
+          <p:cNvPr id="16" name="TextBox 15"/>
           <p:cNvSpPr txBox="1"/>
           <p:nvPr/>
         </p:nvSpPr>
@@ -21284,14 +21063,14 @@
                   <a:srgbClr val="1A2238"/>
                 </a:solidFill>
               </a:rPr>
-              <a:t>121 trainable params on a frozen 5.07M stack (0.002%): 7 presence scales + 7 offsets + 7 magnitude offsets + two 7x7 mixes + 2 contamination params. The tiers nest -- vector (21) in matrix (119), and tailed = matrix + 2. Identity at initialization, so an unfit recalibrator reproduces the zero-shot number exactly and every gain reads as nats recovered.</a:t>
-            </a:r>
-          </a:p>
-        </p:txBody>
-      </p:sp>
-      <p:sp>
-        <p:nvSpPr>
-          <p:cNvPr id="21" name="TextBox 20"/>
+              <a:t>119 trainable params on a frozen 5.07M stack (0.002%): 7 presence scales + 7 offsets + 7 magnitude offsets + two 7x7 mixes. The tiers nest -- vector (21) in matrix (119) in mlp (1061, a comparison arm that never repaid its capacity). Identity at initialization, so an unfit recalibrator reproduces the zero-shot number exactly and every gain reads as nats recovered.</a:t>
+            </a:r>
+          </a:p>
+        </p:txBody>
+      </p:sp>
+      <p:sp>
+        <p:nvSpPr>
+          <p:cNvPr id="17" name="TextBox 16"/>
           <p:cNvSpPr txBox="1"/>
           <p:nvPr/>
         </p:nvSpPr>
@@ -21318,14 +21097,14 @@
                   <a:srgbClr val="8A93A3"/>
                 </a:solidFill>
               </a:rPr>
-              <a:t>dials: Adam, lr 0.05, 400 epochs, no per-draw early stopping by design . weight decay picked on val per tier (vector 0.1, matrix 1.0, tailed 1.0) . every group's correction is fit; amphibole's is not interpretable (the mapping audit's density band straddles zero there), which the audit says, not the layer.</a:t>
-            </a:r>
-          </a:p>
-        </p:txBody>
-      </p:sp>
-      <p:sp>
-        <p:nvSpPr>
-          <p:cNvPr id="22" name="TextBox 21"/>
+              <a:t>dials: Adam, lr 0.05, 400 epochs, no per-draw early stopping by design . weight decay picked on val per tier (vector 0.01, matrix 1.0) . every group's correction is fit; amphibole's is not interpretable (the mapping audit's density band straddles zero there), which the audit says, not the layer.</a:t>
+            </a:r>
+          </a:p>
+        </p:txBody>
+      </p:sp>
+      <p:sp>
+        <p:nvSpPr>
+          <p:cNvPr id="18" name="TextBox 17"/>
           <p:cNvSpPr txBox="1"/>
           <p:nvPr/>
         </p:nvSpPr>
@@ -21352,7 +21131,7 @@
                   <a:srgbClr val="8A93A3"/>
                 </a:solidFill>
               </a:rPr>
-              <a:t>ground truth: measured modal data, eruption-v2 benchmark. 640 least-altered rocks split by eruption unit -- 368 train (the fit) / 111 val (every number on the next slide) / 161 test, sealed.</a:t>
+              <a:t>ground truth: measured modal data, eruption-v2 benchmark. 640 least-altered rocks split by eruption unit -- 372 train (the fit) / 106 val (every number on the next slide) / 162 test, sealed.</a:t>
             </a:r>
           </a:p>
         </p:txBody>
@@ -21438,7 +21217,7 @@
                   <a:srgbClr val="1A2238"/>
                 </a:solidFill>
               </a:rPr>
-              <a:t>What 123 parameters buy, and how many labelled rocks it takes</a:t>
+              <a:t>What 119 parameters buy, and how many labelled rocks it takes</a:t>
             </a:r>
           </a:p>
         </p:txBody>
@@ -21472,7 +21251,7 @@
                   <a:srgbClr val="8A93A3"/>
                 </a:solidFill>
               </a:rPr>
-              <a:t>every level below is joint NLL on the same 111 val rocks, lower better; contrasts are paired and clustered on the 39 eruption units, because rocks from one eruption are not independent.</a:t>
+              <a:t>every level below is joint NLL on the same 106 val rocks, lower better; contrasts are paired and clustered on the 39 eruption units, because rocks from one eruption are not independent.</a:t>
             </a:r>
           </a:p>
         </p:txBody>
@@ -21604,7 +21383,7 @@
                   <a:srgbClr val="8A93A3"/>
                 </a:solidFill>
               </a:rPr>
-              <a:t>13.44</a:t>
+              <a:t>11.29</a:t>
             </a:r>
           </a:p>
         </p:txBody>
@@ -21658,7 +21437,7 @@
                   <a:srgbClr val="1A2238"/>
                 </a:solidFill>
               </a:rPr>
-              <a:t>vector (23)</a:t>
+              <a:t>vector (21)</a:t>
             </a:r>
           </a:p>
         </p:txBody>
@@ -21672,7 +21451,7 @@
         <p:spPr>
           <a:xfrm>
             <a:off x="3017520" y="2578608"/>
-            <a:ext cx="1381397" cy="365760"/>
+            <a:ext cx="621046" cy="365760"/>
           </a:xfrm>
           <a:prstGeom prst="rect">
             <a:avLst/>
@@ -21715,7 +21494,7 @@
         </p:nvSpPr>
         <p:spPr>
           <a:xfrm>
-            <a:off x="4490357" y="2596896"/>
+            <a:off x="3730006" y="2596896"/>
             <a:ext cx="1371600" cy="731520"/>
           </a:xfrm>
           <a:prstGeom prst="rect">
@@ -21736,7 +21515,7 @@
                   <a:srgbClr val="12B5A5"/>
                 </a:solidFill>
               </a:rPr>
-              <a:t>3.76</a:t>
+              <a:t>1.42</a:t>
             </a:r>
           </a:p>
         </p:txBody>
@@ -21790,7 +21569,7 @@
                   <a:srgbClr val="1A2238"/>
                 </a:solidFill>
               </a:rPr>
-              <a:t>matrix (121)</a:t>
+              <a:t>matrix (119)</a:t>
             </a:r>
           </a:p>
         </p:txBody>
@@ -21804,7 +21583,7 @@
         <p:spPr>
           <a:xfrm>
             <a:off x="3017520" y="3236976"/>
-            <a:ext cx="470262" cy="365760"/>
+            <a:ext cx="363006" cy="365760"/>
           </a:xfrm>
           <a:prstGeom prst="rect">
             <a:avLst/>
@@ -21847,7 +21626,7 @@
         </p:nvSpPr>
         <p:spPr>
           <a:xfrm>
-            <a:off x="3579222" y="3255264"/>
+            <a:off x="3471966" y="3255264"/>
             <a:ext cx="1371600" cy="731520"/>
           </a:xfrm>
           <a:prstGeom prst="rect">
@@ -21868,119 +21647,21 @@
                   <a:srgbClr val="E8883A"/>
                 </a:solidFill>
               </a:rPr>
-              <a:t>1.28</a:t>
-            </a:r>
-          </a:p>
-        </p:txBody>
-      </p:sp>
-      <p:sp>
-        <p:nvSpPr>
-          <p:cNvPr id="14" name="Rounded Rectangle 13"/>
-          <p:cNvSpPr/>
-          <p:nvPr/>
-        </p:nvSpPr>
-        <p:spPr>
-          <a:xfrm>
-            <a:off x="502920" y="3803904"/>
-            <a:ext cx="2377440" cy="548640"/>
-          </a:xfrm>
-          <a:prstGeom prst="roundRect">
-            <a:avLst/>
-          </a:prstGeom>
-          <a:solidFill>
-            <a:srgbClr val="E1F1EF"/>
-          </a:solidFill>
-          <a:ln w="25400">
-            <a:solidFill>
-              <a:srgbClr val="2A9D8F"/>
-            </a:solidFill>
-          </a:ln>
-          <a:effectLst/>
-        </p:spPr>
-        <p:style>
-          <a:lnRef idx="1">
-            <a:schemeClr val="accent1"/>
-          </a:lnRef>
-          <a:fillRef idx="3">
-            <a:schemeClr val="accent1"/>
-          </a:fillRef>
-          <a:effectRef idx="2">
-            <a:schemeClr val="accent1"/>
-          </a:effectRef>
-          <a:fontRef idx="minor">
-            <a:schemeClr val="lt1"/>
-          </a:fontRef>
-        </p:style>
-        <p:txBody>
-          <a:bodyPr rtlCol="0" anchor="ctr" wrap="square"/>
-          <a:lstStyle/>
-          <a:p>
-            <a:pPr algn="ctr"/>
-            <a:r>
-              <a:rPr sz="1300" b="1">
-                <a:solidFill>
-                  <a:srgbClr val="1A2238"/>
-                </a:solidFill>
-              </a:rPr>
-              <a:t>tailed (123)</a:t>
-            </a:r>
-          </a:p>
-        </p:txBody>
-      </p:sp>
-      <p:sp>
-        <p:nvSpPr>
-          <p:cNvPr id="15" name="Rectangle 14"/>
-          <p:cNvSpPr/>
-          <p:nvPr/>
-        </p:nvSpPr>
-        <p:spPr>
-          <a:xfrm>
-            <a:off x="3017520" y="3895344"/>
-            <a:ext cx="356371" cy="365760"/>
-          </a:xfrm>
-          <a:prstGeom prst="rect">
-            <a:avLst/>
-          </a:prstGeom>
-          <a:solidFill>
-            <a:srgbClr val="2A9D8F"/>
-          </a:solidFill>
-          <a:ln>
-            <a:noFill/>
-          </a:ln>
-          <a:effectLst/>
-        </p:spPr>
-        <p:style>
-          <a:lnRef idx="1">
-            <a:schemeClr val="accent1"/>
-          </a:lnRef>
-          <a:fillRef idx="3">
-            <a:schemeClr val="accent1"/>
-          </a:fillRef>
-          <a:effectRef idx="2">
-            <a:schemeClr val="accent1"/>
-          </a:effectRef>
-          <a:fontRef idx="minor">
-            <a:schemeClr val="lt1"/>
-          </a:fontRef>
-        </p:style>
-        <p:txBody>
-          <a:bodyPr rtlCol="0" anchor="ctr"/>
-          <a:lstStyle/>
-          <a:p>
-            <a:pPr algn="ctr"/>
-          </a:p>
-        </p:txBody>
-      </p:sp>
-      <p:sp>
-        <p:nvSpPr>
-          <p:cNvPr id="16" name="TextBox 15"/>
+              <a:t>0.83</a:t>
+            </a:r>
+          </a:p>
+        </p:txBody>
+      </p:sp>
+      <p:sp>
+        <p:nvSpPr>
+          <p:cNvPr id="14" name="TextBox 13"/>
           <p:cNvSpPr txBox="1"/>
           <p:nvPr/>
         </p:nvSpPr>
         <p:spPr>
           <a:xfrm>
-            <a:off x="3465331" y="3913632"/>
-            <a:ext cx="1371600" cy="731520"/>
+            <a:off x="502920" y="3931920"/>
+            <a:ext cx="7680960" cy="731520"/>
           </a:xfrm>
           <a:prstGeom prst="rect">
             <a:avLst/>
@@ -21995,650 +21676,26 @@
           <a:p>
             <a:pPr algn="l"/>
             <a:r>
-              <a:rPr sz="1200" b="0">
-                <a:solidFill>
-                  <a:srgbClr val="2A9D8F"/>
-                </a:solidFill>
-              </a:rPr>
-              <a:t>0.97</a:t>
-            </a:r>
-          </a:p>
-        </p:txBody>
-      </p:sp>
-      <p:sp>
-        <p:nvSpPr>
-          <p:cNvPr id="17" name="TextBox 16"/>
-          <p:cNvSpPr txBox="1"/>
-          <p:nvPr/>
-        </p:nvSpPr>
-        <p:spPr>
-          <a:xfrm>
-            <a:off x="502920" y="4526280"/>
-            <a:ext cx="7680960" cy="731520"/>
-          </a:xfrm>
-          <a:prstGeom prst="rect">
-            <a:avLst/>
-          </a:prstGeom>
-          <a:noFill/>
-        </p:spPr>
-        <p:txBody>
-          <a:bodyPr wrap="square">
-            <a:spAutoFit/>
-          </a:bodyPr>
-          <a:lstStyle/>
-          <a:p>
-            <a:pPr algn="l"/>
-            <a:r>
               <a:rPr sz="1100" b="0">
                 <a:solidFill>
                   <a:srgbClr val="1A2238"/>
                 </a:solidFill>
               </a:rPr>
-              <a:t>matrix -&gt; tailed is +0.304 [+0.049, +0.659] nats, ALL of it in the Dirichlet term -- the two tiers share a presence branch, so that contrast is exactly 0.000. Fitted eps 0.052, k 0.507: about 5% of the mass moves to a component with half the concentration, same mean.</a:t>
-            </a:r>
-          </a:p>
-        </p:txBody>
-      </p:sp>
-      <p:sp>
-        <p:nvSpPr>
-          <p:cNvPr id="18" name="Freeform 17"/>
+              <a:t>vector -&gt; matrix is +0.59 [+0.25, +0.94] nats, on both terms (Dirichlet +0.40, Bernoulli +0.19): the 7x7 coupling pays. Every group's correction is fit. With amphibole's pinned at zero (the layer through 2026-09-02) matrix scored 1.28 here and a two-parameter heavy-tail term won 0.30 of it back -- the pin's own cost, measured on identical rocks -- so that tier is gone.</a:t>
+            </a:r>
+          </a:p>
+        </p:txBody>
+      </p:sp>
+      <p:sp>
+        <p:nvSpPr>
+          <p:cNvPr id="15" name="Rounded Rectangle 14"/>
           <p:cNvSpPr/>
           <p:nvPr/>
         </p:nvSpPr>
         <p:spPr>
           <a:xfrm>
-            <a:off x="8503920" y="1965960"/>
-            <a:ext cx="3108960" cy="1143000"/>
-          </a:xfrm>
-          <a:custGeom>
-            <a:avLst/>
-            <a:gdLst/>
-            <a:ahLst/>
-            <a:cxnLst/>
-            <a:rect l="l" t="t" r="r" b="b"/>
-            <a:pathLst>
-              <a:path w="3108960" h="1143000">
-                <a:moveTo>
-                  <a:pt x="0" y="1143000"/>
-                </a:moveTo>
-                <a:lnTo>
-                  <a:pt x="0" y="1142999"/>
-                </a:lnTo>
-                <a:lnTo>
-                  <a:pt x="64770" y="1142999"/>
-                </a:lnTo>
-                <a:lnTo>
-                  <a:pt x="129540" y="1142999"/>
-                </a:lnTo>
-                <a:lnTo>
-                  <a:pt x="194310" y="1142998"/>
-                </a:lnTo>
-                <a:lnTo>
-                  <a:pt x="259080" y="1142992"/>
-                </a:lnTo>
-                <a:lnTo>
-                  <a:pt x="323850" y="1142972"/>
-                </a:lnTo>
-                <a:lnTo>
-                  <a:pt x="388620" y="1142903"/>
-                </a:lnTo>
-                <a:lnTo>
-                  <a:pt x="453390" y="1142691"/>
-                </a:lnTo>
-                <a:lnTo>
-                  <a:pt x="518160" y="1142084"/>
-                </a:lnTo>
-                <a:lnTo>
-                  <a:pt x="582930" y="1140484"/>
-                </a:lnTo>
-                <a:lnTo>
-                  <a:pt x="647700" y="1136600"/>
-                </a:lnTo>
-                <a:lnTo>
-                  <a:pt x="712470" y="1127929"/>
-                </a:lnTo>
-                <a:lnTo>
-                  <a:pt x="777240" y="1110147"/>
-                </a:lnTo>
-                <a:lnTo>
-                  <a:pt x="842010" y="1076700"/>
-                </a:lnTo>
-                <a:lnTo>
-                  <a:pt x="906780" y="1019135"/>
-                </a:lnTo>
-                <a:lnTo>
-                  <a:pt x="971550" y="928774"/>
-                </a:lnTo>
-                <a:lnTo>
-                  <a:pt x="1036320" y="800007"/>
-                </a:lnTo>
-                <a:lnTo>
-                  <a:pt x="1101090" y="634621"/>
-                </a:lnTo>
-                <a:lnTo>
-                  <a:pt x="1165860" y="445442"/>
-                </a:lnTo>
-                <a:lnTo>
-                  <a:pt x="1230630" y="256942"/>
-                </a:lnTo>
-                <a:lnTo>
-                  <a:pt x="1295400" y="101081"/>
-                </a:lnTo>
-                <a:lnTo>
-                  <a:pt x="1360170" y="8785"/>
-                </a:lnTo>
-                <a:lnTo>
-                  <a:pt x="1424940" y="0"/>
-                </a:lnTo>
-                <a:lnTo>
-                  <a:pt x="1489710" y="76681"/>
-                </a:lnTo>
-                <a:lnTo>
-                  <a:pt x="1554480" y="222090"/>
-                </a:lnTo>
-                <a:lnTo>
-                  <a:pt x="1619250" y="406730"/>
-                </a:lnTo>
-                <a:lnTo>
-                  <a:pt x="1684020" y="598062"/>
-                </a:lnTo>
-                <a:lnTo>
-                  <a:pt x="1748790" y="769624"/>
-                </a:lnTo>
-                <a:lnTo>
-                  <a:pt x="1813560" y="906171"/>
-                </a:lnTo>
-                <a:lnTo>
-                  <a:pt x="1878330" y="1003936"/>
-                </a:lnTo>
-                <a:lnTo>
-                  <a:pt x="1943100" y="1067407"/>
-                </a:lnTo>
-                <a:lnTo>
-                  <a:pt x="2007870" y="1104960"/>
-                </a:lnTo>
-                <a:lnTo>
-                  <a:pt x="2072640" y="1125279"/>
-                </a:lnTo>
-                <a:lnTo>
-                  <a:pt x="2137410" y="1135357"/>
-                </a:lnTo>
-                <a:lnTo>
-                  <a:pt x="2202180" y="1139948"/>
-                </a:lnTo>
-                <a:lnTo>
-                  <a:pt x="2266950" y="1141872"/>
-                </a:lnTo>
-                <a:lnTo>
-                  <a:pt x="2331720" y="1142614"/>
-                </a:lnTo>
-                <a:lnTo>
-                  <a:pt x="2396490" y="1142877"/>
-                </a:lnTo>
-                <a:lnTo>
-                  <a:pt x="2461260" y="1142964"/>
-                </a:lnTo>
-                <a:lnTo>
-                  <a:pt x="2526030" y="1142990"/>
-                </a:lnTo>
-                <a:lnTo>
-                  <a:pt x="2590800" y="1142997"/>
-                </a:lnTo>
-                <a:lnTo>
-                  <a:pt x="2655570" y="1142999"/>
-                </a:lnTo>
-                <a:lnTo>
-                  <a:pt x="2720340" y="1142999"/>
-                </a:lnTo>
-                <a:lnTo>
-                  <a:pt x="2785110" y="1142999"/>
-                </a:lnTo>
-                <a:lnTo>
-                  <a:pt x="2849880" y="1142999"/>
-                </a:lnTo>
-                <a:lnTo>
-                  <a:pt x="2914650" y="1142999"/>
-                </a:lnTo>
-                <a:lnTo>
-                  <a:pt x="2979420" y="1142999"/>
-                </a:lnTo>
-                <a:lnTo>
-                  <a:pt x="3044190" y="1142999"/>
-                </a:lnTo>
-                <a:lnTo>
-                  <a:pt x="3108960" y="1142999"/>
-                </a:lnTo>
-                <a:lnTo>
-                  <a:pt x="3108960" y="1143000"/>
-                </a:lnTo>
-                <a:close/>
-              </a:path>
-            </a:pathLst>
-          </a:custGeom>
-          <a:solidFill>
-            <a:srgbClr val="F8DDC7"/>
-          </a:solidFill>
-          <a:ln w="25400">
-            <a:solidFill>
-              <a:srgbClr val="E8883A"/>
-            </a:solidFill>
-          </a:ln>
-          <a:effectLst/>
-        </p:spPr>
-        <p:style>
-          <a:lnRef idx="1">
-            <a:schemeClr val="accent1"/>
-          </a:lnRef>
-          <a:fillRef idx="3">
-            <a:schemeClr val="accent1"/>
-          </a:fillRef>
-          <a:effectRef idx="2">
-            <a:schemeClr val="accent1"/>
-          </a:effectRef>
-          <a:fontRef idx="minor">
-            <a:schemeClr val="lt1"/>
-          </a:fontRef>
-        </p:style>
-        <p:txBody>
-          <a:bodyPr rtlCol="0" anchor="ctr"/>
-          <a:lstStyle/>
-          <a:p>
-            <a:pPr algn="ctr"/>
-          </a:p>
-        </p:txBody>
-      </p:sp>
-      <p:cxnSp>
-        <p:nvCxnSpPr>
-          <p:cNvPr id="19" name="Connector 18"/>
-          <p:cNvCxnSpPr/>
-          <p:nvPr/>
-        </p:nvCxnSpPr>
-        <p:spPr>
-          <a:xfrm>
-            <a:off x="8503920" y="3108960"/>
-            <a:ext cx="3108960" cy="0"/>
-          </a:xfrm>
-          <a:prstGeom prst="bentConnector3">
-            <a:avLst/>
-          </a:prstGeom>
-          <a:ln w="12700">
-            <a:solidFill>
-              <a:srgbClr val="8A93A3"/>
-            </a:solidFill>
-          </a:ln>
-          <a:effectLst/>
-        </p:spPr>
-        <p:style>
-          <a:lnRef idx="2">
-            <a:schemeClr val="accent1"/>
-          </a:lnRef>
-          <a:fillRef idx="0">
-            <a:schemeClr val="accent1"/>
-          </a:fillRef>
-          <a:effectRef idx="1">
-            <a:schemeClr val="accent1"/>
-          </a:effectRef>
-          <a:fontRef idx="minor">
-            <a:schemeClr val="tx1"/>
-          </a:fontRef>
-        </p:style>
-      </p:cxnSp>
-      <p:sp>
-        <p:nvSpPr>
-          <p:cNvPr id="20" name="TextBox 19"/>
-          <p:cNvSpPr txBox="1"/>
-          <p:nvPr/>
-        </p:nvSpPr>
-        <p:spPr>
-          <a:xfrm>
-            <a:off x="8321040" y="3154679"/>
-            <a:ext cx="3474720" cy="365760"/>
-          </a:xfrm>
-          <a:prstGeom prst="rect">
-            <a:avLst/>
-          </a:prstGeom>
-          <a:noFill/>
-        </p:spPr>
-        <p:txBody>
-          <a:bodyPr wrap="square">
-            <a:spAutoFit/>
-          </a:bodyPr>
-          <a:lstStyle/>
-          <a:p>
-            <a:pPr algn="ctr"/>
-            <a:r>
-              <a:rPr sz="1200" b="1">
-                <a:solidFill>
-                  <a:srgbClr val="1A2238"/>
-                </a:solidFill>
-              </a:rPr>
-              <a:t>matrix: one Dirichlet, thin tails</a:t>
-            </a:r>
-          </a:p>
-        </p:txBody>
-      </p:sp>
-      <p:sp>
-        <p:nvSpPr>
-          <p:cNvPr id="21" name="Freeform 20"/>
-          <p:cNvSpPr/>
-          <p:nvPr/>
-        </p:nvSpPr>
-        <p:spPr>
-          <a:xfrm>
-            <a:off x="8503920" y="3657600"/>
-            <a:ext cx="3108960" cy="1143000"/>
-          </a:xfrm>
-          <a:custGeom>
-            <a:avLst/>
-            <a:gdLst/>
-            <a:ahLst/>
-            <a:cxnLst/>
-            <a:rect l="l" t="t" r="r" b="b"/>
-            <a:pathLst>
-              <a:path w="3108960" h="1143000">
-                <a:moveTo>
-                  <a:pt x="0" y="1143000"/>
-                </a:moveTo>
-                <a:lnTo>
-                  <a:pt x="0" y="1142335"/>
-                </a:lnTo>
-                <a:lnTo>
-                  <a:pt x="64770" y="1142002"/>
-                </a:lnTo>
-                <a:lnTo>
-                  <a:pt x="129540" y="1141529"/>
-                </a:lnTo>
-                <a:lnTo>
-                  <a:pt x="194310" y="1140872"/>
-                </a:lnTo>
-                <a:lnTo>
-                  <a:pt x="259080" y="1139979"/>
-                </a:lnTo>
-                <a:lnTo>
-                  <a:pt x="323850" y="1138782"/>
-                </a:lnTo>
-                <a:lnTo>
-                  <a:pt x="388620" y="1137190"/>
-                </a:lnTo>
-                <a:lnTo>
-                  <a:pt x="453390" y="1135056"/>
-                </a:lnTo>
-                <a:lnTo>
-                  <a:pt x="518160" y="1132089"/>
-                </a:lnTo>
-                <a:lnTo>
-                  <a:pt x="582930" y="1127685"/>
-                </a:lnTo>
-                <a:lnTo>
-                  <a:pt x="647700" y="1120604"/>
-                </a:lnTo>
-                <a:lnTo>
-                  <a:pt x="712470" y="1108488"/>
-                </a:lnTo>
-                <a:lnTo>
-                  <a:pt x="777240" y="1087283"/>
-                </a:lnTo>
-                <a:lnTo>
-                  <a:pt x="842010" y="1050865"/>
-                </a:lnTo>
-                <a:lnTo>
-                  <a:pt x="906780" y="991353"/>
-                </a:lnTo>
-                <a:lnTo>
-                  <a:pt x="971550" y="900684"/>
-                </a:lnTo>
-                <a:lnTo>
-                  <a:pt x="1036320" y="773737"/>
-                </a:lnTo>
-                <a:lnTo>
-                  <a:pt x="1101090" y="612421"/>
-                </a:lnTo>
-                <a:lnTo>
-                  <a:pt x="1165860" y="429111"/>
-                </a:lnTo>
-                <a:lnTo>
-                  <a:pt x="1230630" y="247204"/>
-                </a:lnTo>
-                <a:lnTo>
-                  <a:pt x="1295400" y="97168"/>
-                </a:lnTo>
-                <a:lnTo>
-                  <a:pt x="1360170" y="8441"/>
-                </a:lnTo>
-                <a:lnTo>
-                  <a:pt x="1424940" y="0"/>
-                </a:lnTo>
-                <a:lnTo>
-                  <a:pt x="1489710" y="73704"/>
-                </a:lnTo>
-                <a:lnTo>
-                  <a:pt x="1554480" y="213629"/>
-                </a:lnTo>
-                <a:lnTo>
-                  <a:pt x="1619250" y="391703"/>
-                </a:lnTo>
-                <a:lnTo>
-                  <a:pt x="1684020" y="576918"/>
-                </a:lnTo>
-                <a:lnTo>
-                  <a:pt x="1748790" y="743993"/>
-                </a:lnTo>
-                <a:lnTo>
-                  <a:pt x="1813560" y="878263"/>
-                </a:lnTo>
-                <a:lnTo>
-                  <a:pt x="1878330" y="975942"/>
-                </a:lnTo>
-                <a:lnTo>
-                  <a:pt x="1943100" y="1041081"/>
-                </a:lnTo>
-                <a:lnTo>
-                  <a:pt x="2007870" y="1081449"/>
-                </a:lnTo>
-                <a:lnTo>
-                  <a:pt x="2072640" y="1105139"/>
-                </a:lnTo>
-                <a:lnTo>
-                  <a:pt x="2137410" y="1118686"/>
-                </a:lnTo>
-                <a:lnTo>
-                  <a:pt x="2202180" y="1126539"/>
-                </a:lnTo>
-                <a:lnTo>
-                  <a:pt x="2266950" y="1131351"/>
-                </a:lnTo>
-                <a:lnTo>
-                  <a:pt x="2331720" y="1134542"/>
-                </a:lnTo>
-                <a:lnTo>
-                  <a:pt x="2396490" y="1136813"/>
-                </a:lnTo>
-                <a:lnTo>
-                  <a:pt x="2461260" y="1138499"/>
-                </a:lnTo>
-                <a:lnTo>
-                  <a:pt x="2526030" y="1139766"/>
-                </a:lnTo>
-                <a:lnTo>
-                  <a:pt x="2590800" y="1140714"/>
-                </a:lnTo>
-                <a:lnTo>
-                  <a:pt x="2655570" y="1141414"/>
-                </a:lnTo>
-                <a:lnTo>
-                  <a:pt x="2720340" y="1141919"/>
-                </a:lnTo>
-                <a:lnTo>
-                  <a:pt x="2785110" y="1142278"/>
-                </a:lnTo>
-                <a:lnTo>
-                  <a:pt x="2849880" y="1142527"/>
-                </a:lnTo>
-                <a:lnTo>
-                  <a:pt x="2914650" y="1142695"/>
-                </a:lnTo>
-                <a:lnTo>
-                  <a:pt x="2979420" y="1142808"/>
-                </a:lnTo>
-                <a:lnTo>
-                  <a:pt x="3044190" y="1142881"/>
-                </a:lnTo>
-                <a:lnTo>
-                  <a:pt x="3108960" y="1142928"/>
-                </a:lnTo>
-                <a:lnTo>
-                  <a:pt x="3108960" y="1143000"/>
-                </a:lnTo>
-                <a:close/>
-              </a:path>
-            </a:pathLst>
-          </a:custGeom>
-          <a:solidFill>
-            <a:srgbClr val="C3E3DF"/>
-          </a:solidFill>
-          <a:ln w="25400">
-            <a:solidFill>
-              <a:srgbClr val="2A9D8F"/>
-            </a:solidFill>
-          </a:ln>
-          <a:effectLst/>
-        </p:spPr>
-        <p:style>
-          <a:lnRef idx="1">
-            <a:schemeClr val="accent1"/>
-          </a:lnRef>
-          <a:fillRef idx="3">
-            <a:schemeClr val="accent1"/>
-          </a:fillRef>
-          <a:effectRef idx="2">
-            <a:schemeClr val="accent1"/>
-          </a:effectRef>
-          <a:fontRef idx="minor">
-            <a:schemeClr val="lt1"/>
-          </a:fontRef>
-        </p:style>
-        <p:txBody>
-          <a:bodyPr rtlCol="0" anchor="ctr"/>
-          <a:lstStyle/>
-          <a:p>
-            <a:pPr algn="ctr"/>
-          </a:p>
-        </p:txBody>
-      </p:sp>
-      <p:cxnSp>
-        <p:nvCxnSpPr>
-          <p:cNvPr id="22" name="Connector 21"/>
-          <p:cNvCxnSpPr/>
-          <p:nvPr/>
-        </p:nvCxnSpPr>
-        <p:spPr>
-          <a:xfrm>
-            <a:off x="8503920" y="4800600"/>
-            <a:ext cx="3108960" cy="0"/>
-          </a:xfrm>
-          <a:prstGeom prst="bentConnector3">
-            <a:avLst/>
-          </a:prstGeom>
-          <a:ln w="12700">
-            <a:solidFill>
-              <a:srgbClr val="8A93A3"/>
-            </a:solidFill>
-          </a:ln>
-          <a:effectLst/>
-        </p:spPr>
-        <p:style>
-          <a:lnRef idx="2">
-            <a:schemeClr val="accent1"/>
-          </a:lnRef>
-          <a:fillRef idx="0">
-            <a:schemeClr val="accent1"/>
-          </a:fillRef>
-          <a:effectRef idx="1">
-            <a:schemeClr val="accent1"/>
-          </a:effectRef>
-          <a:fontRef idx="minor">
-            <a:schemeClr val="tx1"/>
-          </a:fontRef>
-        </p:style>
-      </p:cxnSp>
-      <p:sp>
-        <p:nvSpPr>
-          <p:cNvPr id="23" name="TextBox 22"/>
-          <p:cNvSpPr txBox="1"/>
-          <p:nvPr/>
-        </p:nvSpPr>
-        <p:spPr>
-          <a:xfrm>
-            <a:off x="8321040" y="4846320"/>
-            <a:ext cx="3474720" cy="365760"/>
-          </a:xfrm>
-          <a:prstGeom prst="rect">
-            <a:avLst/>
-          </a:prstGeom>
-          <a:noFill/>
-        </p:spPr>
-        <p:txBody>
-          <a:bodyPr wrap="square">
-            <a:spAutoFit/>
-          </a:bodyPr>
-          <a:lstStyle/>
-          <a:p>
-            <a:pPr algn="ctr"/>
-            <a:r>
-              <a:rPr sz="1200" b="1">
-                <a:solidFill>
-                  <a:srgbClr val="1A2238"/>
-                </a:solidFill>
-              </a:rPr>
-              <a:t>tailed: same mean, 5% wide component</a:t>
-            </a:r>
-          </a:p>
-        </p:txBody>
-      </p:sp>
-      <p:sp>
-        <p:nvSpPr>
-          <p:cNvPr id="24" name="TextBox 23"/>
-          <p:cNvSpPr txBox="1"/>
-          <p:nvPr/>
-        </p:nvSpPr>
-        <p:spPr>
-          <a:xfrm>
-            <a:off x="8321040" y="4892040"/>
-            <a:ext cx="3474720" cy="731520"/>
-          </a:xfrm>
-          <a:prstGeom prst="rect">
-            <a:avLst/>
-          </a:prstGeom>
-          <a:noFill/>
-        </p:spPr>
-        <p:txBody>
-          <a:bodyPr wrap="square">
-            <a:spAutoFit/>
-          </a:bodyPr>
-          <a:lstStyle/>
-          <a:p>
-            <a:pPr algn="ctr"/>
-            <a:r>
-              <a:rPr sz="1000" b="0">
-                <a:solidFill>
-                  <a:srgbClr val="8A93A3"/>
-                </a:solidFill>
-              </a:rPr>
-              <a:t>the repair is to interval-MISS rocks (score), not to the stated intervals (width)</a:t>
-            </a:r>
-          </a:p>
-        </p:txBody>
-      </p:sp>
-      <p:sp>
-        <p:nvSpPr>
-          <p:cNvPr id="25" name="Rounded Rectangle 24"/>
-          <p:cNvSpPr/>
-          <p:nvPr/>
-        </p:nvSpPr>
-        <p:spPr>
-          <a:xfrm>
-            <a:off x="502920" y="5257800"/>
-            <a:ext cx="11201400" cy="731520"/>
+            <a:off x="8503920" y="1828800"/>
+            <a:ext cx="3200400" cy="2286000"/>
           </a:xfrm>
           <a:prstGeom prst="roundRect">
             <a:avLst/>
@@ -22673,37 +21730,70 @@
           <a:p>
             <a:pPr algn="ctr"/>
             <a:r>
-              <a:rPr sz="1200" b="1">
-                <a:solidFill>
-                  <a:srgbClr val="8A93A3"/>
-                </a:solidFill>
-              </a:rPr>
-              <a:t>how many labelled rocks does this need?</a:t>
-            </a:r>
-          </a:p>
-          <a:p>
-            <a:pPr algn="ctr"/>
-            <a:r>
-              <a:rPr sz="900" b="0">
-                <a:solidFill>
-                  <a:srgbClr val="8A93A3"/>
-                </a:solidFill>
-              </a:rPr>
-              <a:t>~26 rocks recover ~77% of the 9.55-nat magnitude gain, then it flattens hard. matrix and tailed are indistinguishable there (paired delta -0.001) -- 25 rocks carry too few interval misses to identify two contamination parameters -- and tailed then wins 10/10 paired draws at every budget from 50 up (-0.11 at 100, -0.29 at 200, -0.30 at full train). vector lags from 50 on and never goes negative.</a:t>
-            </a:r>
-          </a:p>
-        </p:txBody>
-      </p:sp>
-      <p:sp>
-        <p:nvSpPr>
-          <p:cNvPr id="26" name="TextBox 25"/>
+              <a:rPr sz="1100" b="1">
+                <a:solidFill>
+                  <a:srgbClr val="8A93A3"/>
+                </a:solidFill>
+              </a:rPr>
+              <a:t>80% interval coverage on val</a:t>
+            </a:r>
+          </a:p>
+          <a:p>
+            <a:pPr algn="ctr"/>
+            <a:r>
+              <a:rPr sz="800" b="0">
+                <a:solidFill>
+                  <a:srgbClr val="8A93A3"/>
+                </a:solidFill>
+              </a:rPr>
+              <a:t>zero-shot: 0.19-0.55 per group</a:t>
+            </a:r>
+          </a:p>
+          <a:p>
+            <a:pPr algn="ctr"/>
+            <a:r>
+              <a:rPr sz="800" b="0">
+                <a:solidFill>
+                  <a:srgbClr val="8A93A3"/>
+                </a:solidFill>
+              </a:rPr>
+              <a:t>matrix: 0.64-0.89</a:t>
+            </a:r>
+          </a:p>
+          <a:p>
+            <a:pPr algn="ctr"/>
+            <a:r>
+              <a:rPr sz="800" b="0">
+                <a:solidFill>
+                  <a:srgbClr val="8A93A3"/>
+                </a:solidFill>
+              </a:rPr>
+              <a:t>median width 0.20-0.31 after the fit</a:t>
+            </a:r>
+          </a:p>
+          <a:p>
+            <a:pPr algn="ctr"/>
+            <a:r>
+              <a:rPr sz="800" b="0">
+                <a:solidFill>
+                  <a:srgbClr val="8A93A3"/>
+                </a:solidFill>
+              </a:rPr>
+              <a:t>widening buys score, not vacuity</a:t>
+            </a:r>
+          </a:p>
+        </p:txBody>
+      </p:sp>
+      <p:sp>
+        <p:nvSpPr>
+          <p:cNvPr id="16" name="TextBox 15"/>
           <p:cNvSpPr txBox="1"/>
           <p:nvPr/>
         </p:nvSpPr>
         <p:spPr>
           <a:xfrm>
-            <a:off x="502920" y="6172200"/>
-            <a:ext cx="11201400" cy="731520"/>
+            <a:off x="8321040" y="4251960"/>
+            <a:ext cx="3474720" cy="731520"/>
           </a:xfrm>
           <a:prstGeom prst="rect">
             <a:avLst/>
@@ -22716,6 +21806,105 @@
           </a:bodyPr>
           <a:lstStyle/>
           <a:p>
+            <a:pPr algn="ctr"/>
+            <a:r>
+              <a:rPr sz="1000" b="0">
+                <a:solidFill>
+                  <a:srgbClr val="8A93A3"/>
+                </a:solidFill>
+              </a:rPr>
+              <a:t>the correction widens the Dirichlet (val alpha0 ~2.7x smaller) and recentres opq/bi up, q/fsp down</a:t>
+            </a:r>
+          </a:p>
+        </p:txBody>
+      </p:sp>
+      <p:sp>
+        <p:nvSpPr>
+          <p:cNvPr id="17" name="Rounded Rectangle 16"/>
+          <p:cNvSpPr/>
+          <p:nvPr/>
+        </p:nvSpPr>
+        <p:spPr>
+          <a:xfrm>
+            <a:off x="502920" y="5257800"/>
+            <a:ext cx="11201400" cy="731520"/>
+          </a:xfrm>
+          <a:prstGeom prst="roundRect">
+            <a:avLst/>
+          </a:prstGeom>
+          <a:solidFill>
+            <a:srgbClr val="FFFFFF"/>
+          </a:solidFill>
+          <a:ln w="12700">
+            <a:solidFill>
+              <a:srgbClr val="C8CDD6"/>
+            </a:solidFill>
+          </a:ln>
+          <a:effectLst/>
+        </p:spPr>
+        <p:style>
+          <a:lnRef idx="1">
+            <a:schemeClr val="accent1"/>
+          </a:lnRef>
+          <a:fillRef idx="3">
+            <a:schemeClr val="accent1"/>
+          </a:fillRef>
+          <a:effectRef idx="2">
+            <a:schemeClr val="accent1"/>
+          </a:effectRef>
+          <a:fontRef idx="minor">
+            <a:schemeClr val="lt1"/>
+          </a:fontRef>
+        </p:style>
+        <p:txBody>
+          <a:bodyPr rtlCol="0" anchor="ctr" wrap="square"/>
+          <a:lstStyle/>
+          <a:p>
+            <a:pPr algn="ctr"/>
+            <a:r>
+              <a:rPr sz="1200" b="1">
+                <a:solidFill>
+                  <a:srgbClr val="8A93A3"/>
+                </a:solidFill>
+              </a:rPr>
+              <a:t>how many labelled rocks does this need?</a:t>
+            </a:r>
+          </a:p>
+          <a:p>
+            <a:pPr algn="ctr"/>
+            <a:r>
+              <a:rPr sz="900" b="0">
+                <a:solidFill>
+                  <a:srgbClr val="8A93A3"/>
+                </a:solidFill>
+              </a:rPr>
+              <a:t>25 rocks (~8 eruptions) recover ~49% of matrix's 7.4-nat magnitude gain and ~79% of vector's 7.0; 50 rocks recover 86% (matrix). vector and matrix tie on paired draws through 50 rocks (5/10), then matrix wins 10/10 from 100 up (-0.45 at 100, -0.55 at 200, -0.59 at full train).</a:t>
+            </a:r>
+          </a:p>
+        </p:txBody>
+      </p:sp>
+      <p:sp>
+        <p:nvSpPr>
+          <p:cNvPr id="18" name="TextBox 17"/>
+          <p:cNvSpPr txBox="1"/>
+          <p:nvPr/>
+        </p:nvSpPr>
+        <p:spPr>
+          <a:xfrm>
+            <a:off x="502920" y="6172200"/>
+            <a:ext cx="11201400" cy="731520"/>
+          </a:xfrm>
+          <a:prstGeom prst="rect">
+            <a:avLst/>
+          </a:prstGeom>
+          <a:noFill/>
+        </p:spPr>
+        <p:txBody>
+          <a:bodyPr wrap="square">
+            <a:spAutoFit/>
+          </a:bodyPr>
+          <a:lstStyle/>
+          <a:p>
             <a:pPr algn="l"/>
             <a:r>
               <a:rPr sz="1000" b="0">
@@ -22723,7 +21912,7 @@
                   <a:srgbClr val="8A93A3"/>
                 </a:solidFill>
               </a:rPr>
-              <a:t>current limits: at 25 rocks the 10-90 draw band spans ~2.5 nats, so WHICH eruptions you label dominates which tier you fit. The silica location hypothesis was tested and refuted at the joint-likelihood level. Rendered verdicts stay stamped to the tier that produced them. The 161-rock test slice is sealed. full report: explorations/real_rock_fewshot/results/&lt;tag&gt;/</a:t>
+              <a:t>current limits: at 25 rocks the 10-90 draw band spans ~6 nats (2.5 to 8.8), so WHICH eruptions you label dominates which tier you fit. Rendered verdicts stay stamped to the tier that produced them. The 162-rock test slice is sealed and has never been scored. full report: explorations/real_rock_fewshot/results/&lt;tag&gt;/</a:t>
             </a:r>
           </a:p>
         </p:txBody>
